--- a/P1_R2_13.pptx
+++ b/P1_R2_13.pptx
@@ -13,12 +13,14 @@
     <p:sldId id="261" r:id="rId7"/>
     <p:sldId id="262" r:id="rId8"/>
     <p:sldId id="263" r:id="rId9"/>
+    <p:sldId id="272" r:id="rId23"/>
     <p:sldId id="264" r:id="rId10"/>
     <p:sldId id="265" r:id="rId11"/>
     <p:sldId id="266" r:id="rId12"/>
     <p:sldId id="267" r:id="rId13"/>
     <p:sldId id="268" r:id="rId14"/>
     <p:sldId id="269" r:id="rId15"/>
+    <p:sldId id="273" r:id="rId24"/>
     <p:sldId id="270" r:id="rId16"/>
     <p:sldId id="271" r:id="rId17"/>
   </p:sldIdLst>
@@ -859,7 +861,7 @@
             </a:pPr>
             <a:r>
               <a:rPr lang="en-US" dirty="0"/>
-              <a:t>The local Qwen2.5-14B extractor is In progress and not usable yet, because it passed validation on 2 of 10 test batches.</a:t>
+              <a:t>The worker is the fine-tuned Qwen3-4B served by Ollama. The older Qwen2.5-14B extractor passed validation on only 2 of 10 test batches and is no longer the default.</a:t>
             </a:r>
           </a:p>
           <a:p>
@@ -870,7 +872,7 @@
             </a:pPr>
             <a:r>
               <a:rPr lang="en-US" dirty="0"/>
-              <a:t>The development namespace user:dev was filled through POST /api/v2/retain with the project documents and source plus invented example facts. The distillation corpus holds 784 windows and 3,706 memories from 10 LoCoMo conversations, with 642 training windows from 8 of them and 142 held out from the other 2. LoCoMo [15] is released under CC BY-NC 4.0, so we still have to confirm that keeping its turns in the repository is allowed.</a:t>
+              <a:t>The development namespace user:dev was filled through POST /api/v2/retain with the project documents and source plus invented example facts. The fine-tuning set holds 2,961 task rows in sixteen domains, split 2,095, 424 and 442. LoCoMo [15] is released under CC BY-NC 4.0 and only sixteen held-out windows of it are used, for evaluation.</a:t>
             </a:r>
           </a:p>
         </p:txBody>
@@ -1200,7 +1202,7 @@
             </a:pPr>
             <a:r>
               <a:rPr lang="en-US" dirty="0"/>
-              <a:t>The student is In progress because we have the pipeline, corpus and scores but not the 139 MB adapter in the repository, and nothing serves it yet. Serving it needs the LoRA weights combined with the base model, a GGUF conversion, ollama create and a schema decision, since the student learned the V1 style schema.</a:t>
+              <a:t>The fine-tuned worker is In progress because its internal scores are mixed: consolidation and reflection improved, extraction coverage fell, and we have not yet run the full benchmark with it.</a:t>
             </a:r>
           </a:p>
         </p:txBody>
@@ -1373,6 +1375,146 @@
 </p:notes>
 </file>
 
+<file path=ppt/notesSlides/notesSlide17.xml><?xml version="1.0" encoding="utf-8"?>
+<p:notes xmlns:a="http://schemas.openxmlformats.org/drawingml/2006/main" xmlns:p="http://schemas.openxmlformats.org/presentationml/2006/main" xmlns:r="http://schemas.openxmlformats.org/officeDocument/2006/relationships">
+  <p:cSld>
+    <p:spTree>
+      <p:nvGrpSpPr>
+        <p:cNvPr id="1" name=""/>
+        <p:cNvGrpSpPr/>
+        <p:nvPr/>
+      </p:nvGrpSpPr>
+      <p:grpSpPr>
+        <a:xfrm>
+          <a:off x="0" y="0"/>
+          <a:ext cx="0" cy="0"/>
+          <a:chOff x="0" y="0"/>
+          <a:chExt cx="0" cy="0"/>
+        </a:xfrm>
+      </p:grpSpPr>
+      <p:sp>
+        <p:nvSpPr>
+          <p:cNvPr id="2" name="Slide Image Placeholder 1"/>
+          <p:cNvSpPr>
+            <a:spLocks noGrp="1"/>
+          </p:cNvSpPr>
+          <p:nvPr>
+            <p:ph type="sldImg" idx="2"/>
+          </p:nvPr>
+        </p:nvSpPr>
+        <p:spPr/>
+      </p:sp>
+      <p:sp>
+        <p:nvSpPr>
+          <p:cNvPr id="3" name="Notes Placeholder 2"/>
+          <p:cNvSpPr>
+            <a:spLocks noGrp="1"/>
+          </p:cNvSpPr>
+          <p:nvPr>
+            <p:ph type="body" idx="3" sz="quarter"/>
+          </p:nvPr>
+        </p:nvSpPr>
+        <p:spPr/>
+        <p:txBody>
+          <a:bodyPr/>
+          <a:lstStyle/>
+          <a:p>
+            <a:r>
+              <a:t>Retaining a conversation and interpreting it are separate jobs. Retain stores the episode and queues an extract job in one transaction. A worker claims that job under a lease, sends windows of about 2,800 tokens to mem-extractor on Ollama, and checks every reply against the engine's rules, with at most two repairs. Valid claims are stored as facts: a new value in a single-value slot supersedes the old one, and the old one stays as history. Storing an episode queues a consolidate job, where the same model combines two or more facts into observations, and a project job that copies entities and edges to Neo4j. A job lease renewed every 30 seconds lets one attempt own a job, and a namespace lease keeps one episode per namespace at a time, so four namespaces run in parallel by default. A late attempt that lost its lease cannot commit. There is no fallback model: if the model is unreachable or never gives a valid reply, the job fails and is retried.</a:t>
+            </a:r>
+          </a:p>
+        </p:txBody>
+      </p:sp>
+      <p:sp>
+        <p:nvSpPr>
+          <p:cNvPr id="4" name="Slide Number Placeholder 3"/>
+          <p:cNvSpPr>
+            <a:spLocks noGrp="1"/>
+          </p:cNvSpPr>
+          <p:nvPr>
+            <p:ph type="sldNum" idx="5" sz="quarter"/>
+          </p:nvPr>
+        </p:nvSpPr>
+        <p:spPr/>
+      </p:sp>
+    </p:spTree>
+  </p:cSld>
+  <p:clrMapOvr>
+    <a:masterClrMapping/>
+  </p:clrMapOvr>
+</p:notes>
+</file>
+
+<file path=ppt/notesSlides/notesSlide18.xml><?xml version="1.0" encoding="utf-8"?>
+<p:notes xmlns:a="http://schemas.openxmlformats.org/drawingml/2006/main" xmlns:p="http://schemas.openxmlformats.org/presentationml/2006/main" xmlns:r="http://schemas.openxmlformats.org/officeDocument/2006/relationships">
+  <p:cSld>
+    <p:spTree>
+      <p:nvGrpSpPr>
+        <p:cNvPr id="1" name=""/>
+        <p:cNvGrpSpPr/>
+        <p:nvPr/>
+      </p:nvGrpSpPr>
+      <p:grpSpPr>
+        <a:xfrm>
+          <a:off x="0" y="0"/>
+          <a:ext cx="0" cy="0"/>
+          <a:chOff x="0" y="0"/>
+          <a:chExt cx="0" cy="0"/>
+        </a:xfrm>
+      </p:grpSpPr>
+      <p:sp>
+        <p:nvSpPr>
+          <p:cNvPr id="2" name="Slide Image Placeholder 1"/>
+          <p:cNvSpPr>
+            <a:spLocks noGrp="1"/>
+          </p:cNvSpPr>
+          <p:nvPr>
+            <p:ph type="sldImg" idx="2"/>
+          </p:nvPr>
+        </p:nvSpPr>
+        <p:spPr/>
+      </p:sp>
+      <p:sp>
+        <p:nvSpPr>
+          <p:cNvPr id="3" name="Notes Placeholder 2"/>
+          <p:cNvSpPr>
+            <a:spLocks noGrp="1"/>
+          </p:cNvSpPr>
+          <p:nvPr>
+            <p:ph type="body" idx="3" sz="quarter"/>
+          </p:nvPr>
+        </p:nvSpPr>
+        <p:spPr/>
+        <p:txBody>
+          <a:bodyPr/>
+          <a:lstStyle/>
+          <a:p>
+            <a:r>
+              <a:t>This is the table for the full memory benchmark. Every TBD is filled from the run outputs after the run finishes, and none of it is claimed before that. The three conditions are raw hybrid search, the enhanced memory with observations and graph expansion, and the full history in the prompt. The two ablations switch off the graph expansion and the observations on the same 100 questions, and the repeats show how much the score moves when nothing changes. A pilot run of 10 questions was started on 2026-10-09 with Sonnet 5.5 as reader and Opus 5.5 as judge. It stopped during ingestion because the worker model hit its 3,072 token output limit on some episodes and the harness stops on a failed job, so there are no scored answers yet.</a:t>
+            </a:r>
+          </a:p>
+        </p:txBody>
+      </p:sp>
+      <p:sp>
+        <p:nvSpPr>
+          <p:cNvPr id="4" name="Slide Number Placeholder 3"/>
+          <p:cNvSpPr>
+            <a:spLocks noGrp="1"/>
+          </p:cNvSpPr>
+          <p:nvPr>
+            <p:ph type="sldNum" idx="5" sz="quarter"/>
+          </p:nvPr>
+        </p:nvSpPr>
+        <p:spPr/>
+      </p:sp>
+    </p:spTree>
+  </p:cSld>
+  <p:clrMapOvr>
+    <a:masterClrMapping/>
+  </p:clrMapOvr>
+</p:notes>
+</file>
+
 <file path=ppt/notesSlides/notesSlide2.xml><?xml version="1.0" encoding="utf-8"?>
 <p:notes xmlns:a="http://schemas.openxmlformats.org/drawingml/2006/main" xmlns:r="http://schemas.openxmlformats.org/officeDocument/2006/relationships" xmlns:p="http://schemas.openxmlformats.org/presentationml/2006/main">
   <p:cSld>
@@ -1860,7 +2002,7 @@
             <a:pPr/>
             <a:r>
               <a:rPr lang="en-US" dirty="0"/>
-              <a:t>The First Review design was one PostgreSQL store with a distilled local model doing the extraction. Since then we added a graph projection, background workers and a Pi extension, and the next slide redraws the architecture to match.</a:t>
+              <a:t>The First Review design was one PostgreSQL store with a distilled Qwen3-1.7B doing the extraction. Since then we added a graph projection, background workers and a Pi extension, and the next slide redraws the architecture to match.</a:t>
             </a:r>
           </a:p>
           <a:p>
@@ -1871,7 +2013,7 @@
             </a:pPr>
             <a:r>
               <a:rPr lang="en-US" dirty="0"/>
-              <a:t>Three First Review claims no longer hold: there is a second store, which is Neo4j 5.26 as a projection we can rebuild, the default extraction is a hosted model through Pi, and on that path event text leaves the machine. The distilled student still exists, but only as an offline pipeline that is not wired into the service.</a:t>
+              <a:t>Three First Review claims changed: there is a second store, which is Neo4j 5.26 as a projection we can rebuild, the student is now a retrained Qwen3-4B instead of Qwen3-1.7B and it runs as the worker through Ollama, and Pi still sends the coding conversation to its own hosted model even though extraction is local.</a:t>
             </a:r>
           </a:p>
           <a:p>
@@ -1970,7 +2112,7 @@
             <a:pPr/>
             <a:r>
               <a:rPr lang="en-US" dirty="0"/>
-              <a:t>This is the architecture figure from the First Review, redrawn to match the code as it is now. The routes are /api/v1 and /api/v2, PostgreSQL is the authoritative store, and Neo4j is a second store that we can rebuild from it [8].</a:t>
+              <a:t>This is the architecture figure from the First Review, redrawn to match the code as it is now. The routes are /api/v1 and /api/v2, PostgreSQL is the authoritative store, and Neo4j is a second store that we can rebuild from it [8]. Coding sessions are the input: the developer's prompts and the tool output of each session go to the memory extension in Pi, which sends them on as events.</a:t>
             </a:r>
           </a:p>
           <a:p>
@@ -1992,7 +2134,7 @@
             </a:pPr>
             <a:r>
               <a:rPr lang="en-US" dirty="0"/>
-              <a:t>Offline training is separate and not in the request path: a hosted teacher labels windows, we train Qwen3-1.7B with QLoRA, and the adapter is not served yet. We keep three model paths apart: the Pi worker [9] and the Azure OpenAI adapter are hosted, Ollama is local, and the student is a planned local model.</a:t>
+              <a:t>Offline training is separate and not in the request path: a hosted teacher labels windows and we train Qwen3-4B with QLoRA. The trained model is published as a GGUF and served through Ollama as mem-extractor, which is the worker. Pi is the coding agent [9] and the Azure OpenAI adapter is hosted.</a:t>
             </a:r>
           </a:p>
         </p:txBody>
@@ -3238,7 +3380,7 @@
         <p:spPr>
           <a:xfrm>
             <a:off x="6858000" y="4617720"/>
-            <a:ext cx="4663440" cy="1463040"/>
+            <a:ext cx="4663440" cy="1650000"/>
           </a:xfrm>
           <a:prstGeom prst="rect">
             <a:avLst/>
@@ -3360,6 +3502,2018 @@
 </file>
 
 <file path=ppt/slides/slide10.xml><?xml version="1.0" encoding="utf-8"?>
+<p:sld xmlns:a="http://schemas.openxmlformats.org/drawingml/2006/main" xmlns:r="http://schemas.openxmlformats.org/officeDocument/2006/relationships" xmlns:p="http://schemas.openxmlformats.org/presentationml/2006/main">
+  <p:cSld name="Slide 9">
+    <p:spTree>
+      <p:nvGrpSpPr>
+        <p:cNvPr id="1" name=""/>
+        <p:cNvGrpSpPr/>
+        <p:nvPr/>
+      </p:nvGrpSpPr>
+      <p:grpSpPr>
+        <a:xfrm>
+          <a:off x="0" y="0"/>
+          <a:ext cx="0" cy="0"/>
+          <a:chOff x="0" y="0"/>
+          <a:chExt cx="0" cy="0"/>
+        </a:xfrm>
+      </p:grpSpPr>
+      <p:sp>
+        <p:nvSpPr>
+          <p:cNvPr id="2" name="Text 2"/>
+          <p:cNvSpPr/>
+          <p:nvPr>
+            <p:ph idx="102" type="title" hasCustomPrompt="1"/>
+          </p:nvPr>
+        </p:nvSpPr>
+        <p:spPr>
+          <a:xfrm>
+            <a:off x="594360" y="384048"/>
+            <a:ext cx="9814255" cy="777240"/>
+          </a:xfrm>
+          <a:prstGeom prst="rect">
+            <a:avLst/>
+          </a:prstGeom>
+          <a:noFill/>
+          <a:ln/>
+        </p:spPr>
+        <p:txBody>
+          <a:bodyPr wrap="square" lIns="0" tIns="0" rIns="0" bIns="0" rtlCol="0" anchor="ctr"/>
+          <a:lstStyle/>
+          <a:p>
+            <a:pPr algn="l" indent="0" marL="0">
+              <a:buNone/>
+            </a:pPr>
+            <a:r>
+              <a:rPr lang="en-US" sz="3000" dirty="0">
+                <a:solidFill>
+                  <a:srgbClr val="000000"/>
+                </a:solidFill>
+                <a:latin typeface="Times New Roman" pitchFamily="34" charset="0"/>
+                <a:ea typeface="Times New Roman" pitchFamily="34" charset="-122"/>
+                <a:cs typeface="Times New Roman" pitchFamily="34" charset="-120"/>
+              </a:rPr>
+              <a:t>DATA MODEL AND KNOWLEDGE GRAPH</a:t>
+            </a:r>
+            <a:endParaRPr lang="en-US" sz="3000" dirty="0"/>
+          </a:p>
+        </p:txBody>
+      </p:sp>
+      <p:sp>
+        <p:nvSpPr>
+          <p:cNvPr id="3" name="Text 1"/>
+          <p:cNvSpPr/>
+          <p:nvPr/>
+        </p:nvSpPr>
+        <p:spPr>
+          <a:xfrm>
+            <a:off x="594360" y="1225296"/>
+            <a:ext cx="292608" cy="292608"/>
+          </a:xfrm>
+          <a:prstGeom prst="rect">
+            <a:avLst/>
+          </a:prstGeom>
+          <a:solidFill>
+            <a:srgbClr val="000000"/>
+          </a:solidFill>
+          <a:ln w="6350">
+            <a:solidFill>
+              <a:srgbClr val="000000"/>
+            </a:solidFill>
+          </a:ln>
+        </p:spPr>
+        <p:txBody>
+          <a:bodyPr wrap="square" lIns="0" tIns="0" rIns="0" bIns="0" rtlCol="0" anchor="ctr"/>
+          <a:lstStyle/>
+          <a:p>
+            <a:pPr algn="ctr" indent="0" marL="0">
+              <a:buNone/>
+            </a:pPr>
+            <a:r>
+              <a:rPr lang="en-US" sz="1300" b="1" dirty="0">
+                <a:solidFill>
+                  <a:srgbClr val="FFFFFF"/>
+                </a:solidFill>
+                <a:latin typeface="Times New Roman" pitchFamily="34" charset="0"/>
+                <a:ea typeface="Times New Roman" pitchFamily="34" charset="-122"/>
+                <a:cs typeface="Times New Roman" pitchFamily="34" charset="-120"/>
+              </a:rPr>
+              <a:t>1</a:t>
+            </a:r>
+            <a:endParaRPr lang="en-US" sz="1300" dirty="0"/>
+          </a:p>
+        </p:txBody>
+      </p:sp>
+      <p:sp>
+        <p:nvSpPr>
+          <p:cNvPr id="4" name="Text 2"/>
+          <p:cNvSpPr txBox="1"/>
+          <p:nvPr/>
+        </p:nvSpPr>
+        <p:spPr>
+          <a:xfrm>
+            <a:off x="996696" y="1225296"/>
+            <a:ext cx="5486400" cy="292608"/>
+          </a:xfrm>
+          <a:prstGeom prst="rect">
+            <a:avLst/>
+          </a:prstGeom>
+          <a:noFill/>
+          <a:ln/>
+        </p:spPr>
+        <p:txBody>
+          <a:bodyPr wrap="square" lIns="0" tIns="0" rIns="0" bIns="0" rtlCol="0" anchor="ctr"/>
+          <a:lstStyle/>
+          <a:p>
+            <a:pPr indent="0" marL="0">
+              <a:buNone/>
+            </a:pPr>
+            <a:r>
+              <a:rPr lang="en-US" sz="1300" b="1" dirty="0">
+                <a:solidFill>
+                  <a:srgbClr val="000000"/>
+                </a:solidFill>
+                <a:latin typeface="Times New Roman" pitchFamily="34" charset="0"/>
+                <a:ea typeface="Times New Roman" pitchFamily="34" charset="-122"/>
+                <a:cs typeface="Times New Roman" pitchFamily="34" charset="-120"/>
+              </a:rPr>
+              <a:t>TABLES AND LINKS</a:t>
+            </a:r>
+            <a:endParaRPr lang="en-US" sz="1300" dirty="0"/>
+          </a:p>
+        </p:txBody>
+      </p:sp>
+      <p:sp>
+        <p:nvSpPr>
+          <p:cNvPr id="5" name="Text 3"/>
+          <p:cNvSpPr/>
+          <p:nvPr/>
+        </p:nvSpPr>
+        <p:spPr>
+          <a:xfrm>
+            <a:off x="594360" y="1572768"/>
+            <a:ext cx="1920240" cy="731520"/>
+          </a:xfrm>
+          <a:prstGeom prst="rect">
+            <a:avLst/>
+          </a:prstGeom>
+          <a:solidFill>
+            <a:srgbClr val="FFFFFF"/>
+          </a:solidFill>
+          <a:ln w="12700">
+            <a:solidFill>
+              <a:srgbClr val="333333"/>
+            </a:solidFill>
+            <a:prstDash val="solid"/>
+          </a:ln>
+        </p:spPr>
+        <p:txBody>
+          <a:bodyPr wrap="square" lIns="63500" tIns="88900" rIns="88900" bIns="63500" rtlCol="0" anchor="t"/>
+          <a:lstStyle/>
+          <a:p>
+            <a:pPr algn="l" indent="0" marL="0">
+              <a:spcAft>
+                <a:spcPts val="300"/>
+              </a:spcAft>
+              <a:buNone/>
+            </a:pPr>
+            <a:r>
+              <a:rPr lang="en-US" sz="1200" b="1" dirty="0">
+                <a:solidFill>
+                  <a:srgbClr val="1A1A1A"/>
+                </a:solidFill>
+                <a:latin typeface="Times New Roman" pitchFamily="34" charset="0"/>
+                <a:ea typeface="Times New Roman" pitchFamily="34" charset="-122"/>
+                <a:cs typeface="Times New Roman" pitchFamily="34" charset="-120"/>
+              </a:rPr>
+              <a:t>raw_events</a:t>
+            </a:r>
+            <a:endParaRPr lang="en-US" sz="1200" dirty="0"/>
+          </a:p>
+          <a:p>
+            <a:pPr algn="l" indent="0" marL="0">
+              <a:buNone/>
+            </a:pPr>
+            <a:r>
+              <a:rPr lang="en-US" sz="1100" dirty="0">
+                <a:solidFill>
+                  <a:srgbClr val="1A1A1A"/>
+                </a:solidFill>
+                <a:latin typeface="Times New Roman" pitchFamily="34" charset="0"/>
+                <a:ea typeface="Times New Roman" pitchFamily="34" charset="-122"/>
+                <a:cs typeface="Times New Roman" pitchFamily="34" charset="-120"/>
+              </a:rPr>
+              <a:t>role, content, occurred_at</a:t>
+            </a:r>
+            <a:endParaRPr lang="en-US" sz="1200" dirty="0"/>
+          </a:p>
+          <a:p>
+            <a:pPr algn="l" indent="0" marL="0">
+              <a:buNone/>
+            </a:pPr>
+            <a:r>
+              <a:rPr lang="en-US" sz="1100" dirty="0">
+                <a:solidFill>
+                  <a:srgbClr val="1A1A1A"/>
+                </a:solidFill>
+                <a:latin typeface="Times New Roman" pitchFamily="34" charset="0"/>
+                <a:ea typeface="Times New Roman" pitchFamily="34" charset="-122"/>
+                <a:cs typeface="Times New Roman" pitchFamily="34" charset="-120"/>
+              </a:rPr>
+              <a:t>metadata, processing_state</a:t>
+            </a:r>
+            <a:endParaRPr lang="en-US" sz="1200" dirty="0"/>
+          </a:p>
+        </p:txBody>
+      </p:sp>
+      <p:sp>
+        <p:nvSpPr>
+          <p:cNvPr id="6" name="Text 4"/>
+          <p:cNvSpPr/>
+          <p:nvPr/>
+        </p:nvSpPr>
+        <p:spPr>
+          <a:xfrm>
+            <a:off x="594360" y="2615184"/>
+            <a:ext cx="1920240" cy="731520"/>
+          </a:xfrm>
+          <a:prstGeom prst="rect">
+            <a:avLst/>
+          </a:prstGeom>
+          <a:solidFill>
+            <a:srgbClr val="FFFFFF"/>
+          </a:solidFill>
+          <a:ln w="12700">
+            <a:solidFill>
+              <a:srgbClr val="333333"/>
+            </a:solidFill>
+            <a:prstDash val="solid"/>
+          </a:ln>
+        </p:spPr>
+        <p:txBody>
+          <a:bodyPr wrap="square" lIns="63500" tIns="88900" rIns="88900" bIns="63500" rtlCol="0" anchor="t"/>
+          <a:lstStyle/>
+          <a:p>
+            <a:pPr algn="l" indent="0" marL="0">
+              <a:spcAft>
+                <a:spcPts val="300"/>
+              </a:spcAft>
+              <a:buNone/>
+            </a:pPr>
+            <a:r>
+              <a:rPr lang="en-US" sz="1200" b="1" dirty="0">
+                <a:solidFill>
+                  <a:srgbClr val="1A1A1A"/>
+                </a:solidFill>
+                <a:latin typeface="Times New Roman" pitchFamily="34" charset="0"/>
+                <a:ea typeface="Times New Roman" pitchFamily="34" charset="-122"/>
+                <a:cs typeface="Times New Roman" pitchFamily="34" charset="-120"/>
+              </a:rPr>
+              <a:t>chunks</a:t>
+            </a:r>
+            <a:endParaRPr lang="en-US" sz="1200" dirty="0"/>
+          </a:p>
+          <a:p>
+            <a:pPr algn="l" indent="0" marL="0">
+              <a:buNone/>
+            </a:pPr>
+            <a:r>
+              <a:rPr lang="en-US" sz="1100" dirty="0">
+                <a:solidFill>
+                  <a:srgbClr val="1A1A1A"/>
+                </a:solidFill>
+                <a:latin typeface="Times New Roman" pitchFamily="34" charset="0"/>
+                <a:ea typeface="Times New Roman" pitchFamily="34" charset="-122"/>
+                <a:cs typeface="Times New Roman" pitchFamily="34" charset="-120"/>
+              </a:rPr>
+              <a:t>one per event, never split</a:t>
+            </a:r>
+            <a:endParaRPr lang="en-US" sz="1200" dirty="0"/>
+          </a:p>
+          <a:p>
+            <a:pPr algn="l" indent="0" marL="0">
+              <a:buNone/>
+            </a:pPr>
+            <a:r>
+              <a:rPr lang="en-US" sz="1100" dirty="0">
+                <a:solidFill>
+                  <a:srgbClr val="1A1A1A"/>
+                </a:solidFill>
+                <a:latin typeface="Times New Roman" pitchFamily="34" charset="0"/>
+                <a:ea typeface="Times New Roman" pitchFamily="34" charset="-122"/>
+                <a:cs typeface="Times New Roman" pitchFamily="34" charset="-120"/>
+              </a:rPr>
+              <a:t>embedding, search_vector</a:t>
+            </a:r>
+            <a:endParaRPr lang="en-US" sz="1200" dirty="0"/>
+          </a:p>
+        </p:txBody>
+      </p:sp>
+      <p:sp>
+        <p:nvSpPr>
+          <p:cNvPr id="7" name="Text 5"/>
+          <p:cNvSpPr/>
+          <p:nvPr/>
+        </p:nvSpPr>
+        <p:spPr>
+          <a:xfrm>
+            <a:off x="594360" y="3639312"/>
+            <a:ext cx="1920240" cy="914400"/>
+          </a:xfrm>
+          <a:prstGeom prst="rect">
+            <a:avLst/>
+          </a:prstGeom>
+          <a:solidFill>
+            <a:srgbClr val="FFFFFF"/>
+          </a:solidFill>
+          <a:ln w="12700">
+            <a:solidFill>
+              <a:srgbClr val="333333"/>
+            </a:solidFill>
+            <a:prstDash val="solid"/>
+          </a:ln>
+        </p:spPr>
+        <p:txBody>
+          <a:bodyPr wrap="square" lIns="63500" tIns="88900" rIns="88900" bIns="63500" rtlCol="0" anchor="t"/>
+          <a:lstStyle/>
+          <a:p>
+            <a:pPr algn="l" indent="0" marL="0">
+              <a:spcAft>
+                <a:spcPts val="300"/>
+              </a:spcAft>
+              <a:buNone/>
+            </a:pPr>
+            <a:r>
+              <a:rPr lang="en-US" sz="1200" b="1" dirty="0">
+                <a:solidFill>
+                  <a:srgbClr val="1A1A1A"/>
+                </a:solidFill>
+                <a:latin typeface="Times New Roman" pitchFamily="34" charset="0"/>
+                <a:ea typeface="Times New Roman" pitchFamily="34" charset="-122"/>
+                <a:cs typeface="Times New Roman" pitchFamily="34" charset="-120"/>
+              </a:rPr>
+              <a:t>episodes</a:t>
+            </a:r>
+            <a:endParaRPr lang="en-US" sz="1200" dirty="0"/>
+          </a:p>
+          <a:p>
+            <a:pPr algn="l" indent="0" marL="0">
+              <a:buNone/>
+            </a:pPr>
+            <a:r>
+              <a:rPr lang="en-US" sz="1100" dirty="0">
+                <a:solidFill>
+                  <a:srgbClr val="1A1A1A"/>
+                </a:solidFill>
+                <a:latin typeface="Times New Roman" pitchFamily="34" charset="0"/>
+                <a:ea typeface="Times New Roman" pitchFamily="34" charset="-122"/>
+                <a:cs typeface="Times New Roman" pitchFamily="34" charset="-120"/>
+              </a:rPr>
+              <a:t>one retain call, idempotent</a:t>
+            </a:r>
+            <a:endParaRPr lang="en-US" sz="1200" dirty="0"/>
+          </a:p>
+          <a:p>
+            <a:pPr algn="l" indent="0" marL="0">
+              <a:buNone/>
+            </a:pPr>
+            <a:r>
+              <a:rPr lang="en-US" sz="1100" dirty="0">
+                <a:solidFill>
+                  <a:srgbClr val="1A1A1A"/>
+                </a:solidFill>
+                <a:latin typeface="Times New Roman" pitchFamily="34" charset="0"/>
+                <a:ea typeface="Times New Roman" pitchFamily="34" charset="-122"/>
+                <a:cs typeface="Times New Roman" pitchFamily="34" charset="-120"/>
+              </a:rPr>
+              <a:t>episode_sources keep order</a:t>
+            </a:r>
+            <a:endParaRPr lang="en-US" sz="1200" dirty="0"/>
+          </a:p>
+        </p:txBody>
+      </p:sp>
+      <p:sp>
+        <p:nvSpPr>
+          <p:cNvPr id="8" name="Text 6"/>
+          <p:cNvSpPr/>
+          <p:nvPr/>
+        </p:nvSpPr>
+        <p:spPr>
+          <a:xfrm>
+            <a:off x="3246120" y="1572768"/>
+            <a:ext cx="2011680" cy="731520"/>
+          </a:xfrm>
+          <a:prstGeom prst="rect">
+            <a:avLst/>
+          </a:prstGeom>
+          <a:solidFill>
+            <a:srgbClr val="FFFFFF"/>
+          </a:solidFill>
+          <a:ln w="12700">
+            <a:solidFill>
+              <a:srgbClr val="333333"/>
+            </a:solidFill>
+            <a:prstDash val="solid"/>
+          </a:ln>
+        </p:spPr>
+        <p:txBody>
+          <a:bodyPr wrap="square" lIns="63500" tIns="88900" rIns="88900" bIns="63500" rtlCol="0" anchor="t"/>
+          <a:lstStyle/>
+          <a:p>
+            <a:pPr algn="l" indent="0" marL="0">
+              <a:spcAft>
+                <a:spcPts val="300"/>
+              </a:spcAft>
+              <a:buNone/>
+            </a:pPr>
+            <a:r>
+              <a:rPr lang="en-US" sz="1200" b="1" dirty="0">
+                <a:solidFill>
+                  <a:srgbClr val="1A1A1A"/>
+                </a:solidFill>
+                <a:latin typeface="Times New Roman" pitchFamily="34" charset="0"/>
+                <a:ea typeface="Times New Roman" pitchFamily="34" charset="-122"/>
+                <a:cs typeface="Times New Roman" pitchFamily="34" charset="-120"/>
+              </a:rPr>
+              <a:t>entities, aliases</a:t>
+            </a:r>
+            <a:endParaRPr lang="en-US" sz="1200" dirty="0"/>
+          </a:p>
+          <a:p>
+            <a:pPr algn="l" indent="0" marL="0">
+              <a:buNone/>
+            </a:pPr>
+            <a:r>
+              <a:rPr lang="en-US" sz="1100" dirty="0">
+                <a:solidFill>
+                  <a:srgbClr val="1A1A1A"/>
+                </a:solidFill>
+                <a:latin typeface="Times New Roman" pitchFamily="34" charset="0"/>
+                <a:ea typeface="Times New Roman" pitchFamily="34" charset="-122"/>
+                <a:cs typeface="Times New Roman" pitchFamily="34" charset="-120"/>
+              </a:rPr>
+              <a:t>type, name, normalized_name</a:t>
+            </a:r>
+            <a:endParaRPr lang="en-US" sz="1200" dirty="0"/>
+          </a:p>
+          <a:p>
+            <a:pPr algn="l" indent="0" marL="0">
+              <a:buNone/>
+            </a:pPr>
+            <a:r>
+              <a:rPr lang="en-US" sz="1100" dirty="0">
+                <a:solidFill>
+                  <a:srgbClr val="1A1A1A"/>
+                </a:solidFill>
+                <a:latin typeface="Times New Roman" pitchFamily="34" charset="0"/>
+                <a:ea typeface="Times New Roman" pitchFamily="34" charset="-122"/>
+                <a:cs typeface="Times New Roman" pitchFamily="34" charset="-120"/>
+              </a:rPr>
+              <a:t>alias with its grounding chunk</a:t>
+            </a:r>
+            <a:endParaRPr lang="en-US" sz="1200" dirty="0"/>
+          </a:p>
+        </p:txBody>
+      </p:sp>
+      <p:sp>
+        <p:nvSpPr>
+          <p:cNvPr id="9" name="Text 7"/>
+          <p:cNvSpPr/>
+          <p:nvPr/>
+        </p:nvSpPr>
+        <p:spPr>
+          <a:xfrm>
+            <a:off x="3246120" y="2615184"/>
+            <a:ext cx="2011680" cy="731520"/>
+          </a:xfrm>
+          <a:prstGeom prst="rect">
+            <a:avLst/>
+          </a:prstGeom>
+          <a:solidFill>
+            <a:srgbClr val="FFFFFF"/>
+          </a:solidFill>
+          <a:ln w="12700">
+            <a:solidFill>
+              <a:srgbClr val="333333"/>
+            </a:solidFill>
+            <a:prstDash val="solid"/>
+          </a:ln>
+        </p:spPr>
+        <p:txBody>
+          <a:bodyPr wrap="square" lIns="63500" tIns="88900" rIns="88900" bIns="63500" rtlCol="0" anchor="t"/>
+          <a:lstStyle/>
+          <a:p>
+            <a:pPr algn="l" indent="0" marL="0">
+              <a:spcAft>
+                <a:spcPts val="300"/>
+              </a:spcAft>
+              <a:buNone/>
+            </a:pPr>
+            <a:r>
+              <a:rPr lang="en-US" sz="1200" b="1" dirty="0">
+                <a:solidFill>
+                  <a:srgbClr val="1A1A1A"/>
+                </a:solidFill>
+                <a:latin typeface="Times New Roman" pitchFamily="34" charset="0"/>
+                <a:ea typeface="Times New Roman" pitchFamily="34" charset="-122"/>
+                <a:cs typeface="Times New Roman" pitchFamily="34" charset="-120"/>
+              </a:rPr>
+              <a:t>assertion_sources</a:t>
+            </a:r>
+            <a:endParaRPr lang="en-US" sz="1200" dirty="0"/>
+          </a:p>
+          <a:p>
+            <a:pPr algn="l" indent="0" marL="0">
+              <a:buNone/>
+            </a:pPr>
+            <a:r>
+              <a:rPr lang="en-US" sz="1100" dirty="0">
+                <a:solidFill>
+                  <a:srgbClr val="1A1A1A"/>
+                </a:solidFill>
+                <a:latin typeface="Times New Roman" pitchFamily="34" charset="0"/>
+                <a:ea typeface="Times New Roman" pitchFamily="34" charset="-122"/>
+                <a:cs typeface="Times New Roman" pitchFamily="34" charset="-120"/>
+              </a:rPr>
+              <a:t>assertion_id, chunk_id, quote</a:t>
+            </a:r>
+            <a:endParaRPr lang="en-US" sz="1200" dirty="0"/>
+          </a:p>
+          <a:p>
+            <a:pPr algn="l" indent="0" marL="0">
+              <a:buNone/>
+            </a:pPr>
+            <a:r>
+              <a:rPr lang="en-US" sz="1100" dirty="0">
+                <a:solidFill>
+                  <a:srgbClr val="1A1A1A"/>
+                </a:solidFill>
+                <a:latin typeface="Times New Roman" pitchFamily="34" charset="0"/>
+                <a:ea typeface="Times New Roman" pitchFamily="34" charset="-122"/>
+                <a:cs typeface="Times New Roman" pitchFamily="34" charset="-120"/>
+              </a:rPr>
+              <a:t>quote is exact chunk text</a:t>
+            </a:r>
+            <a:endParaRPr lang="en-US" sz="1200" dirty="0"/>
+          </a:p>
+        </p:txBody>
+      </p:sp>
+      <p:sp>
+        <p:nvSpPr>
+          <p:cNvPr id="10" name="Text 8"/>
+          <p:cNvSpPr/>
+          <p:nvPr/>
+        </p:nvSpPr>
+        <p:spPr>
+          <a:xfrm>
+            <a:off x="6080760" y="1572768"/>
+            <a:ext cx="2468880" cy="1773936"/>
+          </a:xfrm>
+          <a:prstGeom prst="rect">
+            <a:avLst/>
+          </a:prstGeom>
+          <a:solidFill>
+            <a:srgbClr val="F2F2F2"/>
+          </a:solidFill>
+          <a:ln w="22225">
+            <a:solidFill>
+              <a:srgbClr val="000000"/>
+            </a:solidFill>
+            <a:prstDash val="solid"/>
+          </a:ln>
+        </p:spPr>
+        <p:txBody>
+          <a:bodyPr wrap="square" lIns="63500" tIns="88900" rIns="88900" bIns="63500" rtlCol="0" anchor="t"/>
+          <a:lstStyle/>
+          <a:p>
+            <a:pPr algn="l" indent="0" marL="0">
+              <a:spcAft>
+                <a:spcPts val="300"/>
+              </a:spcAft>
+              <a:buNone/>
+            </a:pPr>
+            <a:r>
+              <a:rPr lang="en-US" sz="1200" b="1" dirty="0">
+                <a:solidFill>
+                  <a:srgbClr val="1A1A1A"/>
+                </a:solidFill>
+                <a:latin typeface="Times New Roman" pitchFamily="34" charset="0"/>
+                <a:ea typeface="Times New Roman" pitchFamily="34" charset="-122"/>
+                <a:cs typeface="Times New Roman" pitchFamily="34" charset="-120"/>
+              </a:rPr>
+              <a:t>assertions</a:t>
+            </a:r>
+            <a:endParaRPr lang="en-US" sz="1200" dirty="0"/>
+          </a:p>
+          <a:p>
+            <a:pPr algn="l" indent="0" marL="0">
+              <a:buNone/>
+            </a:pPr>
+            <a:r>
+              <a:rPr lang="en-US" sz="1100" dirty="0">
+                <a:solidFill>
+                  <a:srgbClr val="1A1A1A"/>
+                </a:solidFill>
+                <a:latin typeface="Times New Roman" pitchFamily="34" charset="0"/>
+                <a:ea typeface="Times New Roman" pitchFamily="34" charset="-122"/>
+                <a:cs typeface="Times New Roman" pitchFamily="34" charset="-120"/>
+              </a:rPr>
+              <a:t>slot_key: subject_id::predicate</a:t>
+            </a:r>
+            <a:endParaRPr lang="en-US" sz="1200" dirty="0"/>
+          </a:p>
+          <a:p>
+            <a:pPr algn="l" indent="0" marL="0">
+              <a:buNone/>
+            </a:pPr>
+            <a:r>
+              <a:rPr lang="en-US" sz="1100" dirty="0">
+                <a:solidFill>
+                  <a:srgbClr val="1A1A1A"/>
+                </a:solidFill>
+                <a:latin typeface="Times New Roman" pitchFamily="34" charset="0"/>
+                <a:ea typeface="Times New Roman" pitchFamily="34" charset="-122"/>
+                <a:cs typeface="Times New Roman" pitchFamily="34" charset="-120"/>
+              </a:rPr>
+              <a:t>cardinality: single, multiple, event</a:t>
+            </a:r>
+            <a:endParaRPr lang="en-US" sz="1200" dirty="0"/>
+          </a:p>
+          <a:p>
+            <a:pPr algn="l" indent="0" marL="0">
+              <a:buNone/>
+            </a:pPr>
+            <a:r>
+              <a:rPr lang="en-US" sz="1100" dirty="0">
+                <a:solidFill>
+                  <a:srgbClr val="1A1A1A"/>
+                </a:solidFill>
+                <a:latin typeface="Times New Roman" pitchFamily="34" charset="0"/>
+                <a:ea typeface="Times New Roman" pitchFamily="34" charset="-122"/>
+                <a:cs typeface="Times New Roman" pitchFamily="34" charset="-120"/>
+              </a:rPr>
+              <a:t>status: active, superseded, contested, stale, retracted</a:t>
+            </a:r>
+            <a:endParaRPr lang="en-US" sz="1200" dirty="0"/>
+          </a:p>
+          <a:p>
+            <a:pPr algn="l" indent="0" marL="0">
+              <a:buNone/>
+            </a:pPr>
+            <a:r>
+              <a:rPr lang="en-US" sz="1100" dirty="0">
+                <a:solidFill>
+                  <a:srgbClr val="1A1A1A"/>
+                </a:solidFill>
+                <a:latin typeface="Times New Roman" pitchFamily="34" charset="0"/>
+                <a:ea typeface="Times New Roman" pitchFamily="34" charset="-122"/>
+                <a:cs typeface="Times New Roman" pitchFamily="34" charset="-120"/>
+              </a:rPr>
+              <a:t>valid_from, valid_to: belief applies</a:t>
+            </a:r>
+            <a:endParaRPr lang="en-US" sz="1200" dirty="0"/>
+          </a:p>
+          <a:p>
+            <a:pPr algn="l" indent="0" marL="0">
+              <a:buNone/>
+            </a:pPr>
+            <a:r>
+              <a:rPr lang="en-US" sz="1100" dirty="0">
+                <a:solidFill>
+                  <a:srgbClr val="1A1A1A"/>
+                </a:solidFill>
+                <a:latin typeface="Times New Roman" pitchFamily="34" charset="0"/>
+                <a:ea typeface="Times New Roman" pitchFamily="34" charset="-122"/>
+                <a:cs typeface="Times New Roman" pitchFamily="34" charset="-120"/>
+              </a:rPr>
+              <a:t>event_at: event happened</a:t>
+            </a:r>
+            <a:endParaRPr lang="en-US" sz="1200" dirty="0"/>
+          </a:p>
+          <a:p>
+            <a:pPr algn="l" indent="0" marL="0">
+              <a:buNone/>
+            </a:pPr>
+            <a:r>
+              <a:rPr lang="en-US" sz="1100" dirty="0">
+                <a:solidFill>
+                  <a:srgbClr val="1A1A1A"/>
+                </a:solidFill>
+                <a:latin typeface="Times New Roman" pitchFamily="34" charset="0"/>
+                <a:ea typeface="Times New Roman" pitchFamily="34" charset="-122"/>
+                <a:cs typeface="Times New Roman" pitchFamily="34" charset="-120"/>
+              </a:rPr>
+              <a:t>recorded_at: engine stored it</a:t>
+            </a:r>
+            <a:endParaRPr lang="en-US" sz="1200" dirty="0"/>
+          </a:p>
+        </p:txBody>
+      </p:sp>
+      <p:sp>
+        <p:nvSpPr>
+          <p:cNvPr id="11" name="Text 9"/>
+          <p:cNvSpPr/>
+          <p:nvPr/>
+        </p:nvSpPr>
+        <p:spPr>
+          <a:xfrm>
+            <a:off x="6080760" y="3639312"/>
+            <a:ext cx="2468880" cy="914400"/>
+          </a:xfrm>
+          <a:prstGeom prst="rect">
+            <a:avLst/>
+          </a:prstGeom>
+          <a:solidFill>
+            <a:srgbClr val="FFFFFF"/>
+          </a:solidFill>
+          <a:ln w="12700">
+            <a:solidFill>
+              <a:srgbClr val="333333"/>
+            </a:solidFill>
+            <a:prstDash val="solid"/>
+          </a:ln>
+        </p:spPr>
+        <p:txBody>
+          <a:bodyPr wrap="square" lIns="63500" tIns="88900" rIns="88900" bIns="63500" rtlCol="0" anchor="t"/>
+          <a:lstStyle/>
+          <a:p>
+            <a:pPr algn="l" indent="0" marL="0">
+              <a:spcAft>
+                <a:spcPts val="300"/>
+              </a:spcAft>
+              <a:buNone/>
+            </a:pPr>
+            <a:r>
+              <a:rPr lang="en-US" sz="1200" b="1" dirty="0">
+                <a:solidFill>
+                  <a:srgbClr val="1A1A1A"/>
+                </a:solidFill>
+                <a:latin typeface="Times New Roman" pitchFamily="34" charset="0"/>
+                <a:ea typeface="Times New Roman" pitchFamily="34" charset="-122"/>
+                <a:cs typeface="Times New Roman" pitchFamily="34" charset="-120"/>
+              </a:rPr>
+              <a:t>assertion_edges</a:t>
+            </a:r>
+            <a:endParaRPr lang="en-US" sz="1200" dirty="0"/>
+          </a:p>
+          <a:p>
+            <a:pPr algn="l" indent="0" marL="0">
+              <a:buNone/>
+            </a:pPr>
+            <a:r>
+              <a:rPr lang="en-US" sz="1100" dirty="0">
+                <a:solidFill>
+                  <a:srgbClr val="1A1A1A"/>
+                </a:solidFill>
+                <a:latin typeface="Times New Roman" pitchFamily="34" charset="0"/>
+                <a:ea typeface="Times New Roman" pitchFamily="34" charset="-122"/>
+                <a:cs typeface="Times New Roman" pitchFamily="34" charset="-120"/>
+              </a:rPr>
+              <a:t>supersedes, extends, contradicts, causes</a:t>
+            </a:r>
+            <a:endParaRPr lang="en-US" sz="1200" dirty="0"/>
+          </a:p>
+          <a:p>
+            <a:pPr algn="l" indent="0" marL="0">
+              <a:buNone/>
+            </a:pPr>
+            <a:r>
+              <a:rPr lang="en-US" sz="1100" dirty="0">
+                <a:solidFill>
+                  <a:srgbClr val="1A1A1A"/>
+                </a:solidFill>
+                <a:latin typeface="Times New Roman" pitchFamily="34" charset="0"/>
+                <a:ea typeface="Times New Roman" pitchFamily="34" charset="-122"/>
+                <a:cs typeface="Times New Roman" pitchFamily="34" charset="-120"/>
+              </a:rPr>
+              <a:t>supports: observation to its facts</a:t>
+            </a:r>
+            <a:endParaRPr lang="en-US" sz="1200" dirty="0"/>
+          </a:p>
+          <a:p>
+            <a:pPr algn="l" indent="0" marL="0">
+              <a:buNone/>
+            </a:pPr>
+            <a:r>
+              <a:rPr lang="en-US" sz="1100" dirty="0">
+                <a:solidFill>
+                  <a:srgbClr val="1A1A1A"/>
+                </a:solidFill>
+                <a:latin typeface="Times New Roman" pitchFamily="34" charset="0"/>
+                <a:ea typeface="Times New Roman" pitchFamily="34" charset="-122"/>
+                <a:cs typeface="Times New Roman" pitchFamily="34" charset="-120"/>
+              </a:rPr>
+              <a:t>derives: no writer, Status to confirm</a:t>
+            </a:r>
+            <a:endParaRPr lang="en-US" sz="1200" dirty="0"/>
+          </a:p>
+        </p:txBody>
+      </p:sp>
+      <p:cxnSp>
+        <p:nvCxnSpPr>
+          <p:cNvPr id="12" name="Connector 12"/>
+          <p:cNvCxnSpPr/>
+          <p:nvPr/>
+        </p:nvCxnSpPr>
+        <p:spPr>
+          <a:xfrm flipV="1">
+            <a:off x="1170432" y="2304288"/>
+            <a:ext cx="0" cy="310896"/>
+          </a:xfrm>
+          <a:prstGeom prst="straightConnector1">
+            <a:avLst/>
+          </a:prstGeom>
+          <a:noFill/>
+          <a:ln w="15875">
+            <a:solidFill>
+              <a:srgbClr val="333333"/>
+            </a:solidFill>
+            <a:prstDash val="solid"/>
+            <a:tailEnd type="triangle"/>
+          </a:ln>
+        </p:spPr>
+      </p:cxnSp>
+      <p:sp>
+        <p:nvSpPr>
+          <p:cNvPr id="13" name="Text 11"/>
+          <p:cNvSpPr txBox="1"/>
+          <p:nvPr/>
+        </p:nvSpPr>
+        <p:spPr>
+          <a:xfrm>
+            <a:off x="1243584" y="2331720"/>
+            <a:ext cx="914400" cy="256032"/>
+          </a:xfrm>
+          <a:prstGeom prst="rect">
+            <a:avLst/>
+          </a:prstGeom>
+          <a:noFill/>
+          <a:ln/>
+        </p:spPr>
+        <p:txBody>
+          <a:bodyPr wrap="square" lIns="0" tIns="0" rIns="0" bIns="0" rtlCol="0" anchor="ctr"/>
+          <a:lstStyle/>
+          <a:p>
+            <a:pPr algn="l" indent="0" marL="0">
+              <a:buNone/>
+            </a:pPr>
+            <a:r>
+              <a:rPr lang="en-US" sz="1100" i="1" dirty="0">
+                <a:solidFill>
+                  <a:srgbClr val="595959"/>
+                </a:solidFill>
+                <a:latin typeface="Times New Roman" pitchFamily="34" charset="0"/>
+                <a:ea typeface="Times New Roman" pitchFamily="34" charset="-122"/>
+                <a:cs typeface="Times New Roman" pitchFamily="34" charset="-120"/>
+              </a:rPr>
+              <a:t>raw_event_id</a:t>
+            </a:r>
+            <a:endParaRPr lang="en-US" sz="1100" dirty="0"/>
+          </a:p>
+        </p:txBody>
+      </p:sp>
+      <p:cxnSp>
+        <p:nvCxnSpPr>
+          <p:cNvPr id="14" name="Connector 14"/>
+          <p:cNvCxnSpPr/>
+          <p:nvPr/>
+        </p:nvCxnSpPr>
+        <p:spPr>
+          <a:xfrm flipV="1">
+            <a:off x="1170432" y="3346704"/>
+            <a:ext cx="0" cy="292608"/>
+          </a:xfrm>
+          <a:prstGeom prst="straightConnector1">
+            <a:avLst/>
+          </a:prstGeom>
+          <a:noFill/>
+          <a:ln w="15875">
+            <a:solidFill>
+              <a:srgbClr val="333333"/>
+            </a:solidFill>
+            <a:prstDash val="solid"/>
+            <a:tailEnd type="triangle"/>
+          </a:ln>
+        </p:spPr>
+      </p:cxnSp>
+      <p:sp>
+        <p:nvSpPr>
+          <p:cNvPr id="15" name="Text 13"/>
+          <p:cNvSpPr txBox="1"/>
+          <p:nvPr/>
+        </p:nvSpPr>
+        <p:spPr>
+          <a:xfrm>
+            <a:off x="1243584" y="3364992"/>
+            <a:ext cx="914400" cy="256032"/>
+          </a:xfrm>
+          <a:prstGeom prst="rect">
+            <a:avLst/>
+          </a:prstGeom>
+          <a:noFill/>
+          <a:ln/>
+        </p:spPr>
+        <p:txBody>
+          <a:bodyPr wrap="square" lIns="0" tIns="0" rIns="0" bIns="0" rtlCol="0" anchor="ctr"/>
+          <a:lstStyle/>
+          <a:p>
+            <a:pPr algn="l" indent="0" marL="0">
+              <a:buNone/>
+            </a:pPr>
+            <a:r>
+              <a:rPr lang="en-US" sz="1100" i="1" dirty="0">
+                <a:solidFill>
+                  <a:srgbClr val="595959"/>
+                </a:solidFill>
+                <a:latin typeface="Times New Roman" pitchFamily="34" charset="0"/>
+                <a:ea typeface="Times New Roman" pitchFamily="34" charset="-122"/>
+                <a:cs typeface="Times New Roman" pitchFamily="34" charset="-120"/>
+              </a:rPr>
+              <a:t>chunk_id</a:t>
+            </a:r>
+            <a:endParaRPr lang="en-US" sz="1100" dirty="0"/>
+          </a:p>
+        </p:txBody>
+      </p:sp>
+      <p:cxnSp>
+        <p:nvCxnSpPr>
+          <p:cNvPr id="16" name="Connector 16"/>
+          <p:cNvCxnSpPr>
+            <a:stCxn id="9" idx="1"/>
+            <a:endCxn id="6" idx="3"/>
+          </p:cNvCxnSpPr>
+          <p:nvPr/>
+        </p:nvCxnSpPr>
+        <p:spPr>
+          <a:xfrm flipH="1">
+            <a:off x="2514600" y="2980944"/>
+            <a:ext cx="731520" cy="0"/>
+          </a:xfrm>
+          <a:prstGeom prst="straightConnector1">
+            <a:avLst/>
+          </a:prstGeom>
+          <a:noFill/>
+          <a:ln w="15875">
+            <a:solidFill>
+              <a:srgbClr val="333333"/>
+            </a:solidFill>
+            <a:prstDash val="solid"/>
+            <a:tailEnd type="triangle"/>
+          </a:ln>
+        </p:spPr>
+      </p:cxnSp>
+      <p:sp>
+        <p:nvSpPr>
+          <p:cNvPr id="17" name="Text 15"/>
+          <p:cNvSpPr txBox="1"/>
+          <p:nvPr/>
+        </p:nvSpPr>
+        <p:spPr>
+          <a:xfrm>
+            <a:off x="2560320" y="2697480"/>
+            <a:ext cx="640080" cy="256032"/>
+          </a:xfrm>
+          <a:prstGeom prst="rect">
+            <a:avLst/>
+          </a:prstGeom>
+          <a:noFill/>
+          <a:ln/>
+        </p:spPr>
+        <p:txBody>
+          <a:bodyPr wrap="square" lIns="0" tIns="0" rIns="0" bIns="0" rtlCol="0" anchor="ctr"/>
+          <a:lstStyle/>
+          <a:p>
+            <a:pPr algn="ctr" indent="0" marL="0">
+              <a:buNone/>
+            </a:pPr>
+            <a:r>
+              <a:rPr lang="en-US" sz="1100" i="1" dirty="0">
+                <a:solidFill>
+                  <a:srgbClr val="595959"/>
+                </a:solidFill>
+                <a:latin typeface="Times New Roman" pitchFamily="34" charset="0"/>
+                <a:ea typeface="Times New Roman" pitchFamily="34" charset="-122"/>
+                <a:cs typeface="Times New Roman" pitchFamily="34" charset="-120"/>
+              </a:rPr>
+              <a:t>chunk_id</a:t>
+            </a:r>
+            <a:endParaRPr lang="en-US" sz="1100" dirty="0"/>
+          </a:p>
+        </p:txBody>
+      </p:sp>
+      <p:cxnSp>
+        <p:nvCxnSpPr>
+          <p:cNvPr id="18" name="Connector 18"/>
+          <p:cNvCxnSpPr>
+            <a:stCxn id="9" idx="3"/>
+          </p:cNvCxnSpPr>
+          <p:nvPr/>
+        </p:nvCxnSpPr>
+        <p:spPr>
+          <a:xfrm>
+            <a:off x="5257800" y="2980944"/>
+            <a:ext cx="822960" cy="0"/>
+          </a:xfrm>
+          <a:prstGeom prst="straightConnector1">
+            <a:avLst/>
+          </a:prstGeom>
+          <a:noFill/>
+          <a:ln w="15875">
+            <a:solidFill>
+              <a:srgbClr val="333333"/>
+            </a:solidFill>
+            <a:prstDash val="solid"/>
+            <a:tailEnd type="triangle"/>
+          </a:ln>
+        </p:spPr>
+      </p:cxnSp>
+      <p:sp>
+        <p:nvSpPr>
+          <p:cNvPr id="19" name="Text 17"/>
+          <p:cNvSpPr txBox="1"/>
+          <p:nvPr/>
+        </p:nvSpPr>
+        <p:spPr>
+          <a:xfrm>
+            <a:off x="5280660" y="2697480"/>
+            <a:ext cx="777240" cy="256032"/>
+          </a:xfrm>
+          <a:prstGeom prst="rect">
+            <a:avLst/>
+          </a:prstGeom>
+          <a:noFill/>
+          <a:ln/>
+        </p:spPr>
+        <p:txBody>
+          <a:bodyPr wrap="square" lIns="0" tIns="0" rIns="0" bIns="0" rtlCol="0" anchor="ctr"/>
+          <a:lstStyle/>
+          <a:p>
+            <a:pPr algn="ctr" indent="0" marL="0">
+              <a:buNone/>
+            </a:pPr>
+            <a:r>
+              <a:rPr lang="en-US" sz="1100" i="1" dirty="0">
+                <a:solidFill>
+                  <a:srgbClr val="595959"/>
+                </a:solidFill>
+                <a:latin typeface="Times New Roman" pitchFamily="34" charset="0"/>
+                <a:ea typeface="Times New Roman" pitchFamily="34" charset="-122"/>
+                <a:cs typeface="Times New Roman" pitchFamily="34" charset="-120"/>
+              </a:rPr>
+              <a:t>assertion_id</a:t>
+            </a:r>
+            <a:endParaRPr lang="en-US" sz="1100" dirty="0"/>
+          </a:p>
+        </p:txBody>
+      </p:sp>
+      <p:cxnSp>
+        <p:nvCxnSpPr>
+          <p:cNvPr id="20" name="Connector 20"/>
+          <p:cNvCxnSpPr>
+            <a:endCxn id="8" idx="3"/>
+          </p:cNvCxnSpPr>
+          <p:nvPr/>
+        </p:nvCxnSpPr>
+        <p:spPr>
+          <a:xfrm flipH="1">
+            <a:off x="5257800" y="1938528"/>
+            <a:ext cx="822960" cy="0"/>
+          </a:xfrm>
+          <a:prstGeom prst="straightConnector1">
+            <a:avLst/>
+          </a:prstGeom>
+          <a:noFill/>
+          <a:ln w="15875">
+            <a:solidFill>
+              <a:srgbClr val="333333"/>
+            </a:solidFill>
+            <a:prstDash val="solid"/>
+            <a:tailEnd type="triangle"/>
+          </a:ln>
+        </p:spPr>
+      </p:cxnSp>
+      <p:sp>
+        <p:nvSpPr>
+          <p:cNvPr id="21" name="Text 19"/>
+          <p:cNvSpPr txBox="1"/>
+          <p:nvPr/>
+        </p:nvSpPr>
+        <p:spPr>
+          <a:xfrm>
+            <a:off x="5303520" y="1655064"/>
+            <a:ext cx="731520" cy="256032"/>
+          </a:xfrm>
+          <a:prstGeom prst="rect">
+            <a:avLst/>
+          </a:prstGeom>
+          <a:noFill/>
+          <a:ln/>
+        </p:spPr>
+        <p:txBody>
+          <a:bodyPr wrap="square" lIns="0" tIns="0" rIns="0" bIns="0" rtlCol="0" anchor="ctr"/>
+          <a:lstStyle/>
+          <a:p>
+            <a:pPr algn="ctr" indent="0" marL="0">
+              <a:buNone/>
+            </a:pPr>
+            <a:r>
+              <a:rPr lang="en-US" sz="1100" i="1" dirty="0">
+                <a:solidFill>
+                  <a:srgbClr val="595959"/>
+                </a:solidFill>
+                <a:latin typeface="Times New Roman" pitchFamily="34" charset="0"/>
+                <a:ea typeface="Times New Roman" pitchFamily="34" charset="-122"/>
+                <a:cs typeface="Times New Roman" pitchFamily="34" charset="-120"/>
+              </a:rPr>
+              <a:t>subject_id</a:t>
+            </a:r>
+            <a:endParaRPr lang="en-US" sz="1100" dirty="0"/>
+          </a:p>
+        </p:txBody>
+      </p:sp>
+      <p:cxnSp>
+        <p:nvCxnSpPr>
+          <p:cNvPr id="22" name="Connector 22"/>
+          <p:cNvCxnSpPr/>
+          <p:nvPr/>
+        </p:nvCxnSpPr>
+        <p:spPr>
+          <a:xfrm flipV="1">
+            <a:off x="6821424" y="3346704"/>
+            <a:ext cx="0" cy="292608"/>
+          </a:xfrm>
+          <a:prstGeom prst="straightConnector1">
+            <a:avLst/>
+          </a:prstGeom>
+          <a:noFill/>
+          <a:ln w="15875">
+            <a:solidFill>
+              <a:srgbClr val="333333"/>
+            </a:solidFill>
+            <a:prstDash val="solid"/>
+            <a:tailEnd type="triangle"/>
+          </a:ln>
+        </p:spPr>
+      </p:cxnSp>
+      <p:sp>
+        <p:nvSpPr>
+          <p:cNvPr id="23" name="Text 21"/>
+          <p:cNvSpPr txBox="1"/>
+          <p:nvPr/>
+        </p:nvSpPr>
+        <p:spPr>
+          <a:xfrm>
+            <a:off x="6894576" y="3364992"/>
+            <a:ext cx="1097280" cy="256032"/>
+          </a:xfrm>
+          <a:prstGeom prst="rect">
+            <a:avLst/>
+          </a:prstGeom>
+          <a:noFill/>
+          <a:ln/>
+        </p:spPr>
+        <p:txBody>
+          <a:bodyPr wrap="square" lIns="0" tIns="0" rIns="0" bIns="0" rtlCol="0" anchor="ctr"/>
+          <a:lstStyle/>
+          <a:p>
+            <a:pPr algn="l" indent="0" marL="0">
+              <a:buNone/>
+            </a:pPr>
+            <a:r>
+              <a:rPr lang="en-US" sz="1100" i="1" dirty="0">
+                <a:solidFill>
+                  <a:srgbClr val="595959"/>
+                </a:solidFill>
+                <a:latin typeface="Times New Roman" pitchFamily="34" charset="0"/>
+                <a:ea typeface="Times New Roman" pitchFamily="34" charset="-122"/>
+                <a:cs typeface="Times New Roman" pitchFamily="34" charset="-120"/>
+              </a:rPr>
+              <a:t>from_id, to_id</a:t>
+            </a:r>
+            <a:endParaRPr lang="en-US" sz="1100" dirty="0"/>
+          </a:p>
+        </p:txBody>
+      </p:sp>
+      <p:sp>
+        <p:nvSpPr>
+          <p:cNvPr id="24" name="Text 22"/>
+          <p:cNvSpPr/>
+          <p:nvPr/>
+        </p:nvSpPr>
+        <p:spPr>
+          <a:xfrm>
+            <a:off x="594360" y="4645152"/>
+            <a:ext cx="292608" cy="292608"/>
+          </a:xfrm>
+          <a:prstGeom prst="rect">
+            <a:avLst/>
+          </a:prstGeom>
+          <a:solidFill>
+            <a:srgbClr val="000000"/>
+          </a:solidFill>
+          <a:ln w="6350">
+            <a:solidFill>
+              <a:srgbClr val="000000"/>
+            </a:solidFill>
+          </a:ln>
+        </p:spPr>
+        <p:txBody>
+          <a:bodyPr wrap="square" lIns="0" tIns="0" rIns="0" bIns="0" rtlCol="0" anchor="ctr"/>
+          <a:lstStyle/>
+          <a:p>
+            <a:pPr algn="ctr" indent="0" marL="0">
+              <a:buNone/>
+            </a:pPr>
+            <a:r>
+              <a:rPr lang="en-US" sz="1300" b="1" dirty="0">
+                <a:solidFill>
+                  <a:srgbClr val="FFFFFF"/>
+                </a:solidFill>
+                <a:latin typeface="Times New Roman" pitchFamily="34" charset="0"/>
+                <a:ea typeface="Times New Roman" pitchFamily="34" charset="-122"/>
+                <a:cs typeface="Times New Roman" pitchFamily="34" charset="-120"/>
+              </a:rPr>
+              <a:t>2</a:t>
+            </a:r>
+            <a:endParaRPr lang="en-US" sz="1300" dirty="0"/>
+          </a:p>
+        </p:txBody>
+      </p:sp>
+      <p:sp>
+        <p:nvSpPr>
+          <p:cNvPr id="25" name="Text 23"/>
+          <p:cNvSpPr txBox="1"/>
+          <p:nvPr/>
+        </p:nvSpPr>
+        <p:spPr>
+          <a:xfrm>
+            <a:off x="996696" y="4645152"/>
+            <a:ext cx="4572000" cy="292608"/>
+          </a:xfrm>
+          <a:prstGeom prst="rect">
+            <a:avLst/>
+          </a:prstGeom>
+          <a:noFill/>
+          <a:ln/>
+        </p:spPr>
+        <p:txBody>
+          <a:bodyPr wrap="square" lIns="0" tIns="0" rIns="0" bIns="0" rtlCol="0" anchor="ctr"/>
+          <a:lstStyle/>
+          <a:p>
+            <a:pPr indent="0" marL="0">
+              <a:buNone/>
+            </a:pPr>
+            <a:r>
+              <a:rPr lang="en-US" sz="1300" b="1" dirty="0">
+                <a:solidFill>
+                  <a:srgbClr val="000000"/>
+                </a:solidFill>
+                <a:latin typeface="Times New Roman" pitchFamily="34" charset="0"/>
+                <a:ea typeface="Times New Roman" pitchFamily="34" charset="-122"/>
+                <a:cs typeface="Times New Roman" pitchFamily="34" charset="-120"/>
+              </a:rPr>
+              <a:t>VERSION CHAIN FOR ONE SLOT</a:t>
+            </a:r>
+            <a:endParaRPr lang="en-US" sz="1300" dirty="0"/>
+          </a:p>
+        </p:txBody>
+      </p:sp>
+      <p:sp>
+        <p:nvSpPr>
+          <p:cNvPr id="26" name="Text 24"/>
+          <p:cNvSpPr/>
+          <p:nvPr/>
+        </p:nvSpPr>
+        <p:spPr>
+          <a:xfrm>
+            <a:off x="594360" y="5029200"/>
+            <a:ext cx="3063240" cy="749808"/>
+          </a:xfrm>
+          <a:prstGeom prst="rect">
+            <a:avLst/>
+          </a:prstGeom>
+          <a:solidFill>
+            <a:srgbClr val="FFFFFF"/>
+          </a:solidFill>
+          <a:ln w="12700">
+            <a:solidFill>
+              <a:srgbClr val="333333"/>
+            </a:solidFill>
+            <a:prstDash val="solid"/>
+          </a:ln>
+        </p:spPr>
+        <p:txBody>
+          <a:bodyPr wrap="square" lIns="63500" tIns="88900" rIns="88900" bIns="63500" rtlCol="0" anchor="t"/>
+          <a:lstStyle/>
+          <a:p>
+            <a:pPr algn="l" indent="0" marL="0">
+              <a:spcAft>
+                <a:spcPts val="300"/>
+              </a:spcAft>
+              <a:buNone/>
+            </a:pPr>
+            <a:r>
+              <a:rPr lang="en-US" sz="1200" b="1" dirty="0">
+                <a:solidFill>
+                  <a:srgbClr val="1A1A1A"/>
+                </a:solidFill>
+                <a:latin typeface="Times New Roman" pitchFamily="34" charset="0"/>
+                <a:ea typeface="Times New Roman" pitchFamily="34" charset="-122"/>
+                <a:cs typeface="Times New Roman" pitchFamily="34" charset="-120"/>
+              </a:rPr>
+              <a:t>deploys on: Friday</a:t>
+            </a:r>
+            <a:endParaRPr lang="en-US" sz="1200" dirty="0"/>
+          </a:p>
+          <a:p>
+            <a:pPr algn="l" indent="0" marL="0">
+              <a:buNone/>
+            </a:pPr>
+            <a:r>
+              <a:rPr lang="en-US" sz="1100" dirty="0">
+                <a:solidFill>
+                  <a:srgbClr val="1A1A1A"/>
+                </a:solidFill>
+                <a:latin typeface="Times New Roman" pitchFamily="34" charset="0"/>
+                <a:ea typeface="Times New Roman" pitchFamily="34" charset="-122"/>
+                <a:cs typeface="Times New Roman" pitchFamily="34" charset="-120"/>
+              </a:rPr>
+              <a:t>status: superseded, valid_to: session 3</a:t>
+            </a:r>
+            <a:endParaRPr lang="en-US" sz="1200" dirty="0"/>
+          </a:p>
+          <a:p>
+            <a:pPr algn="l" indent="0" marL="0">
+              <a:buNone/>
+            </a:pPr>
+            <a:r>
+              <a:rPr lang="en-US" sz="1100" dirty="0">
+                <a:solidFill>
+                  <a:srgbClr val="1A1A1A"/>
+                </a:solidFill>
+                <a:latin typeface="Times New Roman" pitchFamily="34" charset="0"/>
+                <a:ea typeface="Times New Roman" pitchFamily="34" charset="-122"/>
+                <a:cs typeface="Times New Roman" pitchFamily="34" charset="-120"/>
+              </a:rPr>
+              <a:t>valid_from: session 1</a:t>
+            </a:r>
+            <a:endParaRPr lang="en-US" sz="1200" dirty="0"/>
+          </a:p>
+        </p:txBody>
+      </p:sp>
+      <p:sp>
+        <p:nvSpPr>
+          <p:cNvPr id="27" name="Text 25"/>
+          <p:cNvSpPr/>
+          <p:nvPr/>
+        </p:nvSpPr>
+        <p:spPr>
+          <a:xfrm>
+            <a:off x="5394960" y="5029200"/>
+            <a:ext cx="3154680" cy="749808"/>
+          </a:xfrm>
+          <a:prstGeom prst="rect">
+            <a:avLst/>
+          </a:prstGeom>
+          <a:solidFill>
+            <a:srgbClr val="F2F2F2"/>
+          </a:solidFill>
+          <a:ln w="22225">
+            <a:solidFill>
+              <a:srgbClr val="000000"/>
+            </a:solidFill>
+            <a:prstDash val="solid"/>
+          </a:ln>
+        </p:spPr>
+        <p:txBody>
+          <a:bodyPr wrap="square" lIns="63500" tIns="88900" rIns="88900" bIns="63500" rtlCol="0" anchor="t"/>
+          <a:lstStyle/>
+          <a:p>
+            <a:pPr algn="l" indent="0" marL="0">
+              <a:spcAft>
+                <a:spcPts val="300"/>
+              </a:spcAft>
+              <a:buNone/>
+            </a:pPr>
+            <a:r>
+              <a:rPr lang="en-US" sz="1200" b="1" dirty="0">
+                <a:solidFill>
+                  <a:srgbClr val="1A1A1A"/>
+                </a:solidFill>
+                <a:latin typeface="Times New Roman" pitchFamily="34" charset="0"/>
+                <a:ea typeface="Times New Roman" pitchFamily="34" charset="-122"/>
+                <a:cs typeface="Times New Roman" pitchFamily="34" charset="-120"/>
+              </a:rPr>
+              <a:t>deploys on: Tuesday</a:t>
+            </a:r>
+            <a:endParaRPr lang="en-US" sz="1200" dirty="0"/>
+          </a:p>
+          <a:p>
+            <a:pPr algn="l" indent="0" marL="0">
+              <a:buNone/>
+            </a:pPr>
+            <a:r>
+              <a:rPr lang="en-US" sz="1100" dirty="0">
+                <a:solidFill>
+                  <a:srgbClr val="1A1A1A"/>
+                </a:solidFill>
+                <a:latin typeface="Times New Roman" pitchFamily="34" charset="0"/>
+                <a:ea typeface="Times New Roman" pitchFamily="34" charset="-122"/>
+                <a:cs typeface="Times New Roman" pitchFamily="34" charset="-120"/>
+              </a:rPr>
+              <a:t>status: active, valid_to: empty</a:t>
+            </a:r>
+            <a:endParaRPr lang="en-US" sz="1200" dirty="0"/>
+          </a:p>
+          <a:p>
+            <a:pPr algn="l" indent="0" marL="0">
+              <a:buNone/>
+            </a:pPr>
+            <a:r>
+              <a:rPr lang="en-US" sz="1100" dirty="0">
+                <a:solidFill>
+                  <a:srgbClr val="1A1A1A"/>
+                </a:solidFill>
+                <a:latin typeface="Times New Roman" pitchFamily="34" charset="0"/>
+                <a:ea typeface="Times New Roman" pitchFamily="34" charset="-122"/>
+                <a:cs typeface="Times New Roman" pitchFamily="34" charset="-120"/>
+              </a:rPr>
+              <a:t>valid_from: session 3</a:t>
+            </a:r>
+            <a:endParaRPr lang="en-US" sz="1200" dirty="0"/>
+          </a:p>
+        </p:txBody>
+      </p:sp>
+      <p:cxnSp>
+        <p:nvCxnSpPr>
+          <p:cNvPr id="28" name="Connector 28"/>
+          <p:cNvCxnSpPr>
+            <a:stCxn id="27" idx="1"/>
+            <a:endCxn id="26" idx="3"/>
+          </p:cNvCxnSpPr>
+          <p:nvPr/>
+        </p:nvCxnSpPr>
+        <p:spPr>
+          <a:xfrm flipH="1">
+            <a:off x="3657600" y="5404104"/>
+            <a:ext cx="1737360" cy="0"/>
+          </a:xfrm>
+          <a:prstGeom prst="straightConnector1">
+            <a:avLst/>
+          </a:prstGeom>
+          <a:noFill/>
+          <a:ln w="15875">
+            <a:solidFill>
+              <a:srgbClr val="333333"/>
+            </a:solidFill>
+            <a:prstDash val="solid"/>
+            <a:tailEnd type="triangle"/>
+          </a:ln>
+        </p:spPr>
+      </p:cxnSp>
+      <p:sp>
+        <p:nvSpPr>
+          <p:cNvPr id="29" name="Text 27"/>
+          <p:cNvSpPr txBox="1"/>
+          <p:nvPr/>
+        </p:nvSpPr>
+        <p:spPr>
+          <a:xfrm>
+            <a:off x="4069080" y="5120640"/>
+            <a:ext cx="914400" cy="256032"/>
+          </a:xfrm>
+          <a:prstGeom prst="rect">
+            <a:avLst/>
+          </a:prstGeom>
+          <a:noFill/>
+          <a:ln/>
+        </p:spPr>
+        <p:txBody>
+          <a:bodyPr wrap="square" lIns="0" tIns="0" rIns="0" bIns="0" rtlCol="0" anchor="ctr"/>
+          <a:lstStyle/>
+          <a:p>
+            <a:pPr algn="ctr" indent="0" marL="0">
+              <a:buNone/>
+            </a:pPr>
+            <a:r>
+              <a:rPr lang="en-US" sz="1100" i="1" dirty="0">
+                <a:solidFill>
+                  <a:srgbClr val="595959"/>
+                </a:solidFill>
+                <a:latin typeface="Times New Roman" pitchFamily="34" charset="0"/>
+                <a:ea typeface="Times New Roman" pitchFamily="34" charset="-122"/>
+                <a:cs typeface="Times New Roman" pitchFamily="34" charset="-120"/>
+              </a:rPr>
+              <a:t>supersedes</a:t>
+            </a:r>
+            <a:endParaRPr lang="en-US" sz="1100" dirty="0"/>
+          </a:p>
+        </p:txBody>
+      </p:sp>
+      <p:sp>
+        <p:nvSpPr>
+          <p:cNvPr id="30" name="Text 28"/>
+          <p:cNvSpPr/>
+          <p:nvPr/>
+        </p:nvSpPr>
+        <p:spPr>
+          <a:xfrm>
+            <a:off x="8823960" y="1225296"/>
+            <a:ext cx="292608" cy="292608"/>
+          </a:xfrm>
+          <a:prstGeom prst="rect">
+            <a:avLst/>
+          </a:prstGeom>
+          <a:solidFill>
+            <a:srgbClr val="000000"/>
+          </a:solidFill>
+          <a:ln w="6350">
+            <a:solidFill>
+              <a:srgbClr val="000000"/>
+            </a:solidFill>
+          </a:ln>
+        </p:spPr>
+        <p:txBody>
+          <a:bodyPr wrap="square" lIns="0" tIns="0" rIns="0" bIns="0" rtlCol="0" anchor="ctr"/>
+          <a:lstStyle/>
+          <a:p>
+            <a:pPr algn="ctr" indent="0" marL="0">
+              <a:buNone/>
+            </a:pPr>
+            <a:r>
+              <a:rPr lang="en-US" sz="1300" b="1" dirty="0">
+                <a:solidFill>
+                  <a:srgbClr val="FFFFFF"/>
+                </a:solidFill>
+                <a:latin typeface="Times New Roman" pitchFamily="34" charset="0"/>
+                <a:ea typeface="Times New Roman" pitchFamily="34" charset="-122"/>
+                <a:cs typeface="Times New Roman" pitchFamily="34" charset="-120"/>
+              </a:rPr>
+              <a:t>3</a:t>
+            </a:r>
+            <a:endParaRPr lang="en-US" sz="1300" dirty="0"/>
+          </a:p>
+        </p:txBody>
+      </p:sp>
+      <p:sp>
+        <p:nvSpPr>
+          <p:cNvPr id="31" name="Text 29"/>
+          <p:cNvSpPr txBox="1"/>
+          <p:nvPr/>
+        </p:nvSpPr>
+        <p:spPr>
+          <a:xfrm>
+            <a:off x="9226296" y="1225296"/>
+            <a:ext cx="2743200" cy="292608"/>
+          </a:xfrm>
+          <a:prstGeom prst="rect">
+            <a:avLst/>
+          </a:prstGeom>
+          <a:noFill/>
+          <a:ln/>
+        </p:spPr>
+        <p:txBody>
+          <a:bodyPr wrap="square" lIns="0" tIns="0" rIns="0" bIns="0" rtlCol="0" anchor="ctr"/>
+          <a:lstStyle/>
+          <a:p>
+            <a:pPr indent="0" marL="0">
+              <a:buNone/>
+            </a:pPr>
+            <a:r>
+              <a:rPr lang="en-US" sz="1300" b="1" dirty="0">
+                <a:solidFill>
+                  <a:srgbClr val="000000"/>
+                </a:solidFill>
+                <a:latin typeface="Times New Roman" pitchFamily="34" charset="0"/>
+                <a:ea typeface="Times New Roman" pitchFamily="34" charset="-122"/>
+                <a:cs typeface="Times New Roman" pitchFamily="34" charset="-120"/>
+              </a:rPr>
+              <a:t>GRAPH PROJECTION</a:t>
+            </a:r>
+            <a:endParaRPr lang="en-US" sz="1300" dirty="0"/>
+          </a:p>
+        </p:txBody>
+      </p:sp>
+      <p:sp>
+        <p:nvSpPr>
+          <p:cNvPr id="32" name="Text 30"/>
+          <p:cNvSpPr/>
+          <p:nvPr/>
+        </p:nvSpPr>
+        <p:spPr>
+          <a:xfrm>
+            <a:off x="8823960" y="1572768"/>
+            <a:ext cx="2773375" cy="914400"/>
+          </a:xfrm>
+          <a:prstGeom prst="rect">
+            <a:avLst/>
+          </a:prstGeom>
+          <a:solidFill>
+            <a:srgbClr val="F2F2F2"/>
+          </a:solidFill>
+          <a:ln w="22225">
+            <a:solidFill>
+              <a:srgbClr val="000000"/>
+            </a:solidFill>
+            <a:prstDash val="solid"/>
+          </a:ln>
+        </p:spPr>
+        <p:txBody>
+          <a:bodyPr wrap="square" lIns="63500" tIns="88900" rIns="88900" bIns="63500" rtlCol="0" anchor="t"/>
+          <a:lstStyle/>
+          <a:p>
+            <a:pPr algn="l" indent="0" marL="0">
+              <a:spcAft>
+                <a:spcPts val="300"/>
+              </a:spcAft>
+              <a:buNone/>
+            </a:pPr>
+            <a:r>
+              <a:rPr lang="en-US" sz="1200" b="1" dirty="0">
+                <a:solidFill>
+                  <a:srgbClr val="1A1A1A"/>
+                </a:solidFill>
+                <a:latin typeface="Times New Roman" pitchFamily="34" charset="0"/>
+                <a:ea typeface="Times New Roman" pitchFamily="34" charset="-122"/>
+                <a:cs typeface="Times New Roman" pitchFamily="34" charset="-120"/>
+              </a:rPr>
+              <a:t>PostgreSQL 17, authoritative</a:t>
+            </a:r>
+            <a:endParaRPr lang="en-US" sz="1200" dirty="0"/>
+          </a:p>
+          <a:p>
+            <a:pPr algn="l" indent="0" marL="0">
+              <a:buNone/>
+            </a:pPr>
+            <a:r>
+              <a:rPr lang="en-US" sz="1100" dirty="0">
+                <a:solidFill>
+                  <a:srgbClr val="1A1A1A"/>
+                </a:solidFill>
+                <a:latin typeface="Times New Roman" pitchFamily="34" charset="0"/>
+                <a:ea typeface="Times New Roman" pitchFamily="34" charset="-122"/>
+                <a:cs typeface="Times New Roman" pitchFamily="34" charset="-120"/>
+              </a:rPr>
+              <a:t>Entities resolve by exact type and name, else one grounded alias, never by similarity. Every update raises a revision.</a:t>
+            </a:r>
+            <a:endParaRPr lang="en-US" sz="1200" dirty="0"/>
+          </a:p>
+        </p:txBody>
+      </p:sp>
+      <p:sp>
+        <p:nvSpPr>
+          <p:cNvPr id="33" name="Text 31"/>
+          <p:cNvSpPr/>
+          <p:nvPr/>
+        </p:nvSpPr>
+        <p:spPr>
+          <a:xfrm>
+            <a:off x="8823960" y="2743200"/>
+            <a:ext cx="2773375" cy="1097280"/>
+          </a:xfrm>
+          <a:prstGeom prst="rect">
+            <a:avLst/>
+          </a:prstGeom>
+          <a:solidFill>
+            <a:srgbClr val="FFFFFF"/>
+          </a:solidFill>
+          <a:ln w="12700">
+            <a:solidFill>
+              <a:srgbClr val="333333"/>
+            </a:solidFill>
+            <a:prstDash val="solid"/>
+          </a:ln>
+        </p:spPr>
+        <p:txBody>
+          <a:bodyPr wrap="square" lIns="63500" tIns="88900" rIns="88900" bIns="63500" rtlCol="0" anchor="t"/>
+          <a:lstStyle/>
+          <a:p>
+            <a:pPr algn="l" indent="0" marL="0">
+              <a:spcAft>
+                <a:spcPts val="300"/>
+              </a:spcAft>
+              <a:buNone/>
+            </a:pPr>
+            <a:r>
+              <a:rPr lang="en-US" sz="1200" b="1" dirty="0">
+                <a:solidFill>
+                  <a:srgbClr val="1A1A1A"/>
+                </a:solidFill>
+                <a:latin typeface="Times New Roman" pitchFamily="34" charset="0"/>
+                <a:ea typeface="Times New Roman" pitchFamily="34" charset="-122"/>
+                <a:cs typeface="Times New Roman" pitchFamily="34" charset="-120"/>
+              </a:rPr>
+              <a:t>Neo4j 5.26, projection</a:t>
+            </a:r>
+            <a:endParaRPr lang="en-US" sz="1200" dirty="0"/>
+          </a:p>
+          <a:p>
+            <a:pPr algn="l" indent="0" marL="0">
+              <a:buNone/>
+            </a:pPr>
+            <a:r>
+              <a:rPr lang="en-US" sz="1100" dirty="0">
+                <a:solidFill>
+                  <a:srgbClr val="1A1A1A"/>
+                </a:solidFill>
+                <a:latin typeface="Times New Roman" pitchFamily="34" charset="0"/>
+                <a:ea typeface="Times New Roman" pitchFamily="34" charset="-122"/>
+                <a:cs typeface="Times New Roman" pitchFamily="34" charset="-120"/>
+              </a:rPr>
+              <a:t>Assertion, KnowledgeEntity and MemoryNamespace nodes, MENTIONS and SUPPORTS edges. A write with an older revision is dropped.</a:t>
+            </a:r>
+            <a:endParaRPr lang="en-US" sz="1200" dirty="0"/>
+          </a:p>
+        </p:txBody>
+      </p:sp>
+      <p:sp>
+        <p:nvSpPr>
+          <p:cNvPr id="34" name="Text 32"/>
+          <p:cNvSpPr/>
+          <p:nvPr/>
+        </p:nvSpPr>
+        <p:spPr>
+          <a:xfrm>
+            <a:off x="8823960" y="4096512"/>
+            <a:ext cx="2773375" cy="1005840"/>
+          </a:xfrm>
+          <a:prstGeom prst="rect">
+            <a:avLst/>
+          </a:prstGeom>
+          <a:solidFill>
+            <a:srgbClr val="FFFFFF"/>
+          </a:solidFill>
+          <a:ln w="12700">
+            <a:solidFill>
+              <a:srgbClr val="333333"/>
+            </a:solidFill>
+            <a:prstDash val="solid"/>
+          </a:ln>
+        </p:spPr>
+        <p:txBody>
+          <a:bodyPr wrap="square" lIns="63500" tIns="88900" rIns="88900" bIns="63500" rtlCol="0" anchor="t"/>
+          <a:lstStyle/>
+          <a:p>
+            <a:pPr algn="l" indent="0" marL="0">
+              <a:spcAft>
+                <a:spcPts val="300"/>
+              </a:spcAft>
+              <a:buNone/>
+            </a:pPr>
+            <a:r>
+              <a:rPr lang="en-US" sz="1200" b="1" dirty="0">
+                <a:solidFill>
+                  <a:srgbClr val="1A1A1A"/>
+                </a:solidFill>
+                <a:latin typeface="Times New Roman" pitchFamily="34" charset="0"/>
+                <a:ea typeface="Times New Roman" pitchFamily="34" charset="-122"/>
+                <a:cs typeface="Times New Roman" pitchFamily="34" charset="-120"/>
+              </a:rPr>
+              <a:t>Graph arm in recall</a:t>
+            </a:r>
+            <a:endParaRPr lang="en-US" sz="1200" dirty="0"/>
+          </a:p>
+          <a:p>
+            <a:pPr algn="l" indent="0" marL="0">
+              <a:buNone/>
+            </a:pPr>
+            <a:r>
+              <a:rPr lang="en-US" sz="1100" dirty="0">
+                <a:solidFill>
+                  <a:srgbClr val="1A1A1A"/>
+                </a:solidFill>
+                <a:latin typeface="Times New Roman" pitchFamily="34" charset="0"/>
+                <a:ea typeface="Times New Roman" pitchFamily="34" charset="-122"/>
+                <a:cs typeface="Times New Roman" pitchFamily="34" charset="-120"/>
+              </a:rPr>
+              <a:t>Seeds: top 5 lexical, top 5 semantic, 10 by entity name. Two expansion rounds, 200 rows at most. PostgreSQL checks every id again.</a:t>
+            </a:r>
+            <a:endParaRPr lang="en-US" sz="1200" dirty="0"/>
+          </a:p>
+        </p:txBody>
+      </p:sp>
+      <p:cxnSp>
+        <p:nvCxnSpPr>
+          <p:cNvPr id="35" name="Connector 35"/>
+          <p:cNvCxnSpPr/>
+          <p:nvPr/>
+        </p:nvCxnSpPr>
+        <p:spPr>
+          <a:xfrm>
+            <a:off x="9156765" y="2487168"/>
+            <a:ext cx="0" cy="256032"/>
+          </a:xfrm>
+          <a:prstGeom prst="straightConnector1">
+            <a:avLst/>
+          </a:prstGeom>
+          <a:noFill/>
+          <a:ln w="15875">
+            <a:solidFill>
+              <a:srgbClr val="333333"/>
+            </a:solidFill>
+            <a:prstDash val="solid"/>
+            <a:tailEnd type="triangle"/>
+          </a:ln>
+        </p:spPr>
+      </p:cxnSp>
+      <p:sp>
+        <p:nvSpPr>
+          <p:cNvPr id="36" name="Text 34"/>
+          <p:cNvSpPr txBox="1"/>
+          <p:nvPr/>
+        </p:nvSpPr>
+        <p:spPr>
+          <a:xfrm>
+            <a:off x="9229917" y="2487168"/>
+            <a:ext cx="1554480" cy="256032"/>
+          </a:xfrm>
+          <a:prstGeom prst="rect">
+            <a:avLst/>
+          </a:prstGeom>
+          <a:noFill/>
+          <a:ln/>
+        </p:spPr>
+        <p:txBody>
+          <a:bodyPr wrap="square" lIns="0" tIns="0" rIns="0" bIns="0" rtlCol="0" anchor="ctr"/>
+          <a:lstStyle/>
+          <a:p>
+            <a:pPr algn="l" indent="0" marL="0">
+              <a:buNone/>
+            </a:pPr>
+            <a:r>
+              <a:rPr lang="en-US" sz="1100" i="1" dirty="0">
+                <a:solidFill>
+                  <a:srgbClr val="595959"/>
+                </a:solidFill>
+                <a:latin typeface="Times New Roman" pitchFamily="34" charset="0"/>
+                <a:ea typeface="Times New Roman" pitchFamily="34" charset="-122"/>
+                <a:cs typeface="Times New Roman" pitchFamily="34" charset="-120"/>
+              </a:rPr>
+              <a:t>assertion id, revision</a:t>
+            </a:r>
+            <a:endParaRPr lang="en-US" sz="1100" dirty="0"/>
+          </a:p>
+        </p:txBody>
+      </p:sp>
+      <p:cxnSp>
+        <p:nvCxnSpPr>
+          <p:cNvPr id="37" name="Connector 37"/>
+          <p:cNvCxnSpPr/>
+          <p:nvPr/>
+        </p:nvCxnSpPr>
+        <p:spPr>
+          <a:xfrm>
+            <a:off x="9156765" y="3840480"/>
+            <a:ext cx="0" cy="256032"/>
+          </a:xfrm>
+          <a:prstGeom prst="straightConnector1">
+            <a:avLst/>
+          </a:prstGeom>
+          <a:noFill/>
+          <a:ln w="15875">
+            <a:solidFill>
+              <a:srgbClr val="333333"/>
+            </a:solidFill>
+            <a:prstDash val="solid"/>
+            <a:tailEnd type="triangle"/>
+          </a:ln>
+        </p:spPr>
+      </p:cxnSp>
+      <p:sp>
+        <p:nvSpPr>
+          <p:cNvPr id="38" name="Text 36"/>
+          <p:cNvSpPr txBox="1"/>
+          <p:nvPr/>
+        </p:nvSpPr>
+        <p:spPr>
+          <a:xfrm>
+            <a:off x="9229917" y="3840480"/>
+            <a:ext cx="1554480" cy="256032"/>
+          </a:xfrm>
+          <a:prstGeom prst="rect">
+            <a:avLst/>
+          </a:prstGeom>
+          <a:noFill/>
+          <a:ln/>
+        </p:spPr>
+        <p:txBody>
+          <a:bodyPr wrap="square" lIns="0" tIns="0" rIns="0" bIns="0" rtlCol="0" anchor="ctr"/>
+          <a:lstStyle/>
+          <a:p>
+            <a:pPr algn="l" indent="0" marL="0">
+              <a:buNone/>
+            </a:pPr>
+            <a:r>
+              <a:rPr lang="en-US" sz="1100" i="1" dirty="0">
+                <a:solidFill>
+                  <a:srgbClr val="595959"/>
+                </a:solidFill>
+                <a:latin typeface="Times New Roman" pitchFamily="34" charset="0"/>
+                <a:ea typeface="Times New Roman" pitchFamily="34" charset="-122"/>
+                <a:cs typeface="Times New Roman" pitchFamily="34" charset="-120"/>
+              </a:rPr>
+              <a:t>candidate ids, paths</a:t>
+            </a:r>
+            <a:endParaRPr lang="en-US" sz="1100" dirty="0"/>
+          </a:p>
+        </p:txBody>
+      </p:sp>
+      <p:sp>
+        <p:nvSpPr>
+          <p:cNvPr id="39" name="Text 37"/>
+          <p:cNvSpPr txBox="1"/>
+          <p:nvPr/>
+        </p:nvSpPr>
+        <p:spPr>
+          <a:xfrm>
+            <a:off x="8823960" y="5212080"/>
+            <a:ext cx="2773375" cy="777240"/>
+          </a:xfrm>
+          <a:prstGeom prst="rect">
+            <a:avLst/>
+          </a:prstGeom>
+          <a:noFill/>
+          <a:ln/>
+        </p:spPr>
+        <p:txBody>
+          <a:bodyPr wrap="square" lIns="0" tIns="0" rIns="0" bIns="0" rtlCol="0" anchor="t"/>
+          <a:lstStyle/>
+          <a:p>
+            <a:pPr indent="0" marL="0">
+              <a:buNone/>
+            </a:pPr>
+            <a:r>
+              <a:rPr lang="en-US" sz="1100" dirty="0">
+                <a:solidFill>
+                  <a:srgbClr val="1A1A1A"/>
+                </a:solidFill>
+                <a:latin typeface="Times New Roman" pitchFamily="34" charset="0"/>
+                <a:ea typeface="Times New Roman" pitchFamily="34" charset="-122"/>
+                <a:cs typeface="Times New Roman" pitchFamily="34" charset="-120"/>
+              </a:rPr>
+              <a:t>Every fact traces back to its exact quote, chunk and raw event. Graph results are ranked by Neo4j row order, and we have not measured what the graph search adds.</a:t>
+            </a:r>
+            <a:endParaRPr lang="en-US" sz="1100" dirty="0"/>
+          </a:p>
+        </p:txBody>
+      </p:sp>
+      <p:sp>
+        <p:nvSpPr>
+          <p:cNvPr id="40" name="Slide Number Placeholder 0"/>
+          <p:cNvSpPr>
+            <a:spLocks noGrp="1"/>
+          </p:cNvSpPr>
+          <p:nvPr>
+            <p:ph type="sldNum" sz="quarter" idx="4294967295"/>
+          </p:nvPr>
+        </p:nvSpPr>
+        <p:spPr>
+          <a:xfrm>
+            <a:off x="10865815" y="384048"/>
+            <a:ext cx="731520" cy="457200"/>
+          </a:xfrm>
+          <a:prstGeom prst="rect">
+            <a:avLst/>
+          </a:prstGeom>
+          <a:extLst>
+            <a:ext uri="{C572A759-6A51-4108-AA02-DFA0A04FC94B}">
+              <ma14:wrappingTextBoxFlag xmlns:ma14="http://schemas.microsoft.com/office/mac/drawingml/2011/main" val="0"/>
+            </a:ext>
+          </a:extLst>
+        </p:spPr>
+        <p:txBody>
+          <a:bodyPr/>
+          <a:lstStyle>
+            <a:lvl1pPr>
+              <a:defRPr sz="1600">
+                <a:solidFill>
+                  <a:srgbClr val="000000"/>
+                </a:solidFill>
+                <a:latin typeface="Times New Roman"/>
+                <a:ea typeface="Times New Roman"/>
+                <a:cs typeface="Times New Roman"/>
+              </a:defRPr>
+            </a:lvl1pPr>
+          </a:lstStyle>
+          <a:p>
+            <a:pPr algn="r"/>
+            <a:fld id="{F7021451-1387-4CA6-816F-3879F97B5CBC}" type="slidenum">
+              <a:rPr b="0" lang="en-US"/>
+              <a:t>10</a:t>
+            </a:fld>
+            <a:endParaRPr lang="en-US"/>
+          </a:p>
+        </p:txBody>
+      </p:sp>
+    </p:spTree>
+  </p:cSld>
+  <p:clrMapOvr>
+    <a:masterClrMapping/>
+  </p:clrMapOvr>
+</p:sld>
+</file>
+
+<file path=ppt/slides/slide11.xml><?xml version="1.0" encoding="utf-8"?>
 <p:sld xmlns:a="http://schemas.openxmlformats.org/drawingml/2006/main" xmlns:r="http://schemas.openxmlformats.org/officeDocument/2006/relationships" xmlns:p="http://schemas.openxmlformats.org/presentationml/2006/main">
   <p:cSld name="Slide 10">
     <p:spTree>
@@ -3441,6 +5595,10 @@
             <a:prstDash val="solid"/>
           </a:ln>
         </p:spPr>
+        <p:txBody>
+          <a:bodyPr/>
+          <a:p/>
+        </p:txBody>
       </p:sp>
       <p:sp>
         <p:nvSpPr>
@@ -3505,6 +5663,10 @@
             <a:prstDash val="solid"/>
           </a:ln>
         </p:spPr>
+        <p:txBody>
+          <a:bodyPr/>
+          <a:p/>
+        </p:txBody>
       </p:sp>
       <p:sp>
         <p:nvSpPr>
@@ -3569,6 +5731,10 @@
             <a:prstDash val="solid"/>
           </a:ln>
         </p:spPr>
+        <p:txBody>
+          <a:bodyPr/>
+          <a:p/>
+        </p:txBody>
       </p:sp>
       <p:sp>
         <p:nvSpPr>
@@ -5211,6 +7377,10 @@
             <a:prstDash val="solid"/>
           </a:ln>
         </p:spPr>
+        <p:txBody>
+          <a:bodyPr/>
+          <a:p/>
+        </p:txBody>
       </p:sp>
       <p:sp>
         <p:nvSpPr>
@@ -5462,7 +7632,7 @@
             <a:pPr algn="r"/>
             <a:fld id="{F7021451-1387-4CA6-816F-3879F97B5CBC}" type="slidenum">
               <a:rPr b="0" lang="en-US"/>
-              <a:t>10</a:t>
+              <a:t>11</a:t>
             </a:fld>
             <a:endParaRPr lang="en-US"/>
           </a:p>
@@ -5476,7 +7646,7 @@
 </p:sld>
 </file>
 
-<file path=ppt/slides/slide11.xml><?xml version="1.0" encoding="utf-8"?>
+<file path=ppt/slides/slide12.xml><?xml version="1.0" encoding="utf-8"?>
 <p:sld xmlns:a="http://schemas.openxmlformats.org/drawingml/2006/main" xmlns:r="http://schemas.openxmlformats.org/officeDocument/2006/relationships" xmlns:p="http://schemas.openxmlformats.org/presentationml/2006/main">
   <p:cSld name="Slide 11">
     <p:spTree>
@@ -5642,6 +7812,10 @@
             <a:prstDash val="solid"/>
           </a:ln>
         </p:spPr>
+        <p:txBody>
+          <a:bodyPr/>
+          <a:p/>
+        </p:txBody>
       </p:sp>
       <p:sp>
         <p:nvSpPr>
@@ -6096,6 +8270,10 @@
             <a:prstDash val="solid"/>
           </a:ln>
         </p:spPr>
+        <p:txBody>
+          <a:bodyPr/>
+          <a:p/>
+        </p:txBody>
       </p:sp>
       <p:sp>
         <p:nvSpPr>
@@ -6716,7 +8894,7 @@
             <a:pPr algn="r"/>
             <a:fld id="{F7021451-1387-4CA6-816F-3879F97B5CBC}" type="slidenum">
               <a:rPr b="0" lang="en-US"/>
-              <a:t>11</a:t>
+              <a:t>12</a:t>
             </a:fld>
             <a:endParaRPr lang="en-US"/>
           </a:p>
@@ -6730,7 +8908,7 @@
 </p:sld>
 </file>
 
-<file path=ppt/slides/slide12.xml><?xml version="1.0" encoding="utf-8"?>
+<file path=ppt/slides/slide13.xml><?xml version="1.0" encoding="utf-8"?>
 <p:sld xmlns:a="http://schemas.openxmlformats.org/drawingml/2006/main" xmlns:r="http://schemas.openxmlformats.org/officeDocument/2006/relationships" xmlns:p="http://schemas.openxmlformats.org/presentationml/2006/main">
   <p:cSld name="Slide 12">
     <p:spTree>
@@ -8024,7 +10202,7 @@
                           <a:ea typeface="Times New Roman" pitchFamily="34" charset="-122"/>
                           <a:cs typeface="Times New Roman" pitchFamily="34" charset="-120"/>
                         </a:rPr>
-                        <a:t>Qwen3-Embedding-0.6B, 1024-d [13]. Optional Qwen2.5-14B extractor: In progress, not usable yet</a:t>
+                        <a:t>Qwen3-Embedding-0.6B, 1024-d [13], and the mem-extractor worker: Qwen3-4B, Q8_0 GGUF, 4.3 GB, pinned Hugging Face revision</a:t>
                       </a:r>
                       <a:endParaRPr lang="en-US" sz="1200" dirty="0">
                         <a:latin typeface="Times New Roman" charset="0"/>
@@ -8286,7 +10464,7 @@
                           <a:ea typeface="Times New Roman" pitchFamily="34" charset="-122"/>
                           <a:cs typeface="Times New Roman" pitchFamily="34" charset="-120"/>
                         </a:rPr>
-                        <a:t>Hosts the memory extension and runs the default extraction worker [9]. Completed</a:t>
+                        <a:t>Hosts the memory extension [9]. It is the coding agent, not the extraction worker. Completed</a:t>
                       </a:r>
                       <a:endParaRPr lang="en-US" sz="1200" dirty="0">
                         <a:latin typeface="Times New Roman" charset="0"/>
@@ -8680,7 +10858,7 @@
                           <a:ea typeface="Times New Roman" pitchFamily="34" charset="-122"/>
                           <a:cs typeface="Times New Roman" pitchFamily="34" charset="-120"/>
                         </a:rPr>
-                        <a:t>Qwen3-1.7B student</a:t>
+                        <a:t>Qwen3-4B student</a:t>
                       </a:r>
                       <a:endParaRPr lang="en-US" sz="1200" dirty="0">
                         <a:latin typeface="Times New Roman" charset="0"/>
@@ -8810,7 +10988,7 @@
                           <a:ea typeface="Times New Roman" pitchFamily="34" charset="-122"/>
                           <a:cs typeface="Times New Roman" pitchFamily="34" charset="-120"/>
                         </a:rPr>
-                        <a:t>Offline pipeline: In progress, not wired in. Serving through Ollama: Planned</a:t>
+                        <a:t>Fine-tuned for extraction, consolidation and reflection. Published as a GGUF and served by Ollama as mem-extractor</a:t>
                       </a:r>
                       <a:endParaRPr lang="en-US" sz="1200" dirty="0">
                         <a:latin typeface="Times New Roman" charset="0"/>
@@ -8875,7 +11053,7 @@
                           <a:ea typeface="Times New Roman" pitchFamily="34" charset="-122"/>
                           <a:cs typeface="Times New Roman" pitchFamily="34" charset="-120"/>
                         </a:rPr>
-                        <a:t>Local, once served</a:t>
+                        <a:t>Local</a:t>
                       </a:r>
                       <a:endParaRPr lang="en-US" sz="1200" dirty="0">
                         <a:latin typeface="Times New Roman" charset="0"/>
@@ -9080,7 +11258,7 @@
                 <a:ea typeface="Times New Roman" pitchFamily="34" charset="-122"/>
                 <a:cs typeface="Times New Roman" pitchFamily="34" charset="-120"/>
               </a:rPr>
-              <a:t>784 windows and 3,706 memories from 10 LoCoMo conversations [15]. Train: 642 windows from 8. Held out: 142 from 2. Labelled once by a hosted teacher.</a:t>
+              <a:t>2,961 task rows in sixteen domains: 2,095 train, 424 validation, 442 test, from 1,181 episode IDs including replay. Labelled by a hosted teacher.</a:t>
             </a:r>
             <a:endParaRPr lang="en-US" sz="1300" dirty="0"/>
           </a:p>
@@ -9100,7 +11278,7 @@
                 <a:ea typeface="Times New Roman" pitchFamily="34" charset="-122"/>
                 <a:cs typeface="Times New Roman" pitchFamily="34" charset="-120"/>
               </a:rPr>
-              <a:t>LoCoMo is CC BY-NC 4.0. We still have to confirm that keeping its turns in the repository is allowed.</a:t>
+              <a:t>LoCoMo [15] is used only for evaluation, never for training. It is CC BY-NC 4.0.</a:t>
             </a:r>
             <a:endParaRPr lang="en-US" sz="1300" dirty="0"/>
           </a:p>
@@ -9237,7 +11415,7 @@
             <a:pPr algn="r"/>
             <a:fld id="{F7021451-1387-4CA6-816F-3879F97B5CBC}" type="slidenum">
               <a:rPr b="0" lang="en-US"/>
-              <a:t>12</a:t>
+              <a:t>13</a:t>
             </a:fld>
             <a:endParaRPr lang="en-US"/>
           </a:p>
@@ -9251,7 +11429,7 @@
 </p:sld>
 </file>
 
-<file path=ppt/slides/slide13.xml><?xml version="1.0" encoding="utf-8"?>
+<file path=ppt/slides/slide14.xml><?xml version="1.0" encoding="utf-8"?>
 <p:sld xmlns:a="http://schemas.openxmlformats.org/drawingml/2006/main" xmlns:r="http://schemas.openxmlformats.org/officeDocument/2006/relationships" xmlns:p="http://schemas.openxmlformats.org/presentationml/2006/main">
   <p:cSld name="Slide 13">
     <p:spTree>
@@ -9333,6 +11511,10 @@
             <a:prstDash val="solid"/>
           </a:ln>
         </p:spPr>
+        <p:txBody>
+          <a:bodyPr/>
+          <a:p/>
+        </p:txBody>
       </p:sp>
       <p:pic>
         <p:nvPicPr>
@@ -9421,6 +11603,10 @@
             <a:prstDash val="solid"/>
           </a:ln>
         </p:spPr>
+        <p:txBody>
+          <a:bodyPr/>
+          <a:p/>
+        </p:txBody>
       </p:sp>
       <p:pic>
         <p:nvPicPr>
@@ -9509,6 +11695,10 @@
             <a:prstDash val="solid"/>
           </a:ln>
         </p:spPr>
+        <p:txBody>
+          <a:bodyPr/>
+          <a:p/>
+        </p:txBody>
       </p:sp>
       <p:pic>
         <p:nvPicPr>
@@ -9597,6 +11787,10 @@
             <a:prstDash val="solid"/>
           </a:ln>
         </p:spPr>
+        <p:txBody>
+          <a:bodyPr/>
+          <a:p/>
+        </p:txBody>
       </p:sp>
       <p:pic>
         <p:nvPicPr>
@@ -9703,7 +11897,7 @@
             <a:pPr algn="r"/>
             <a:fld id="{F7021451-1387-4CA6-816F-3879F97B5CBC}" type="slidenum">
               <a:rPr b="0" lang="en-US"/>
-              <a:t>13</a:t>
+              <a:t>14</a:t>
             </a:fld>
             <a:endParaRPr lang="en-US"/>
           </a:p>
@@ -9717,7 +11911,7 @@
 </p:sld>
 </file>
 
-<file path=ppt/slides/slide14.xml><?xml version="1.0" encoding="utf-8"?>
+<file path=ppt/slides/slide15.xml><?xml version="1.0" encoding="utf-8"?>
 <p:sld xmlns:a="http://schemas.openxmlformats.org/drawingml/2006/main" xmlns:r="http://schemas.openxmlformats.org/officeDocument/2006/relationships" xmlns:p="http://schemas.openxmlformats.org/presentationml/2006/main">
   <p:cSld name="Slide 14">
     <p:spTree>
@@ -11405,7 +13599,7 @@
                           <a:ea typeface="Times New Roman" pitchFamily="34" charset="-122"/>
                           <a:cs typeface="Times New Roman" pitchFamily="34" charset="-120"/>
                         </a:rPr>
-                        <a:t>Offline agreement, distilled student</a:t>
+                        <a:t>Fine-tuned worker, internal test</a:t>
                       </a:r>
                       <a:endParaRPr lang="en-US" sz="1100" dirty="0">
                         <a:latin typeface="Times New Roman" charset="0"/>
@@ -11470,7 +13664,7 @@
                           <a:ea typeface="Times New Roman" pitchFamily="34" charset="-122"/>
                           <a:cs typeface="Times New Roman" pitchFamily="34" charset="-120"/>
                         </a:rPr>
-                        <a:t>136 held-out windows. Relaxed F1 0.398 for the student and 0.000 for the base model (same type and subject, statement word overlap at least 0.5)</a:t>
+                        <a:t>Consolidation 1 of 16 to 13 of 16, reflection 10 of 16 to 15 of 16. Extraction coverage fell from 50 of 55 to 41 of 55 facts</a:t>
                       </a:r>
                       <a:endParaRPr lang="en-US" sz="1100" dirty="0">
                         <a:latin typeface="Times New Roman" charset="0"/>
@@ -11535,7 +13729,7 @@
                           <a:ea typeface="Times New Roman" pitchFamily="34" charset="-122"/>
                           <a:cs typeface="Times New Roman" pitchFamily="34" charset="-120"/>
                         </a:rPr>
-                        <a:t>Agreement with the teacher, not accuracy. Student p50 6,115 ms against 2,868 ms in an unbatched run. Not wired in</a:t>
+                        <a:t>Labels and grading share a teacher family, so not independent human accuracy. Relative dates still wrong in places</a:t>
                       </a:r>
                       <a:endParaRPr lang="en-US" sz="1100" dirty="0">
                         <a:latin typeface="Times New Roman" charset="0"/>
@@ -11827,7 +14021,7 @@
             <a:pPr algn="r"/>
             <a:fld id="{F7021451-1387-4CA6-816F-3879F97B5CBC}" type="slidenum">
               <a:rPr b="0" lang="en-US"/>
-              <a:t>14</a:t>
+              <a:t>15</a:t>
             </a:fld>
             <a:endParaRPr lang="en-US"/>
           </a:p>
@@ -11841,7 +14035,1934 @@
 </p:sld>
 </file>
 
-<file path=ppt/slides/slide15.xml><?xml version="1.0" encoding="utf-8"?>
+<file path=ppt/slides/slide16.xml><?xml version="1.0" encoding="utf-8"?>
+<p:sld xmlns:a="http://schemas.openxmlformats.org/drawingml/2006/main" xmlns:r="http://schemas.openxmlformats.org/officeDocument/2006/relationships" xmlns:p="http://schemas.openxmlformats.org/presentationml/2006/main">
+  <p:cSld name="Slide 14">
+    <p:spTree>
+      <p:nvGrpSpPr>
+        <p:cNvPr id="1" name=""/>
+        <p:cNvGrpSpPr/>
+        <p:nvPr/>
+      </p:nvGrpSpPr>
+      <p:grpSpPr>
+        <a:xfrm>
+          <a:off x="0" y="0"/>
+          <a:ext cx="0" cy="0"/>
+          <a:chOff x="0" y="0"/>
+          <a:chExt cx="0" cy="0"/>
+        </a:xfrm>
+      </p:grpSpPr>
+      <p:sp>
+        <p:nvSpPr>
+          <p:cNvPr id="2" name="Text 2"/>
+          <p:cNvSpPr/>
+          <p:nvPr>
+            <p:ph idx="102" type="title" hasCustomPrompt="1"/>
+          </p:nvPr>
+        </p:nvSpPr>
+        <p:spPr>
+          <a:xfrm>
+            <a:off x="594360" y="384048"/>
+            <a:ext cx="9814255" cy="777240"/>
+          </a:xfrm>
+          <a:prstGeom prst="rect">
+            <a:avLst/>
+          </a:prstGeom>
+          <a:noFill/>
+          <a:ln/>
+        </p:spPr>
+        <p:txBody>
+          <a:bodyPr wrap="square" lIns="0" tIns="0" rIns="0" bIns="0" rtlCol="0" anchor="ctr"/>
+          <a:lstStyle/>
+          <a:p>
+            <a:pPr algn="l" indent="0" marL="0">
+              <a:buNone/>
+            </a:pPr>
+            <a:r>
+              <a:rPr lang="en-US" sz="3000" dirty="0">
+                <a:solidFill>
+                  <a:srgbClr val="000000"/>
+                </a:solidFill>
+                <a:latin typeface="Times New Roman" pitchFamily="34" charset="0"/>
+                <a:ea typeface="Times New Roman" pitchFamily="34" charset="-122"/>
+                <a:cs typeface="Times New Roman" pitchFamily="34" charset="-120"/>
+              </a:rPr>
+              <a:t>BENCHMARK RESULTS</a:t>
+            </a:r>
+            <a:endParaRPr lang="en-US" sz="3000" dirty="0"/>
+          </a:p>
+        </p:txBody>
+      </p:sp>
+      <p:graphicFrame>
+        <p:nvGraphicFramePr>
+          <p:cNvPr id="3" name="Table 0"/>
+          <p:cNvGraphicFramePr>
+            <a:graphicFrameLocks noGrp="1"/>
+          </p:cNvGraphicFramePr>
+          <p:nvPr>
+            <p:extLst>
+              <p:ext uri="{D42A27DB-BD31-4B8C-83A1-F6EECF244321}">
+                <p14:modId xmlns:p14="http://schemas.microsoft.com/office/powerpoint/2010/main" val="1579011935"/>
+              </p:ext>
+            </p:extLst>
+          </p:nvPr>
+        </p:nvGraphicFramePr>
+        <p:xfrm>
+          <a:off x="594360" y="1188720"/>
+          <a:ext cx="11002975" cy="914400"/>
+        </p:xfrm>
+        <a:graphic>
+          <a:graphicData uri="http://schemas.openxmlformats.org/drawingml/2006/table">
+            <a:tbl>
+              <a:tblPr firstRow="1"/>
+              <a:tblGrid>
+                <a:gridCol w="1828800"/>
+                <a:gridCol w="5943600"/>
+                <a:gridCol w="3227832"/>
+              </a:tblGrid>
+              <a:tr h="0">
+                <a:tc>
+                  <a:txBody>
+                    <a:bodyPr/>
+                    <a:lstStyle/>
+                    <a:p>
+                      <a:pPr algn="l" indent="0" marL="0">
+                        <a:buNone/>
+                      </a:pPr>
+                      <a:r>
+                        <a:rPr lang="en-US" sz="1100" b="1" dirty="0">
+                          <a:solidFill>
+                            <a:srgbClr val="000000"/>
+                          </a:solidFill>
+                          <a:latin typeface="Times New Roman" pitchFamily="34" charset="0"/>
+                          <a:ea typeface="Times New Roman" pitchFamily="34" charset="-122"/>
+                          <a:cs typeface="Times New Roman" pitchFamily="34" charset="-120"/>
+                        </a:rPr>
+                        <a:t>Condition</a:t>
+                      </a:r>
+                      <a:endParaRPr lang="en-US" sz="1100" dirty="0">
+                        <a:latin typeface="Times New Roman" charset="0"/>
+                        <a:ea typeface="Times New Roman" charset="0"/>
+                        <a:cs typeface="Times New Roman" charset="0"/>
+                      </a:endParaRPr>
+                    </a:p>
+                  </a:txBody>
+                  <a:tcPr marL="64008" marR="64008" marT="36576" marB="36576" anchor="t">
+                    <a:lnL w="9525" cap="flat" cmpd="sng" algn="ctr">
+                      <a:solidFill>
+                        <a:srgbClr val="333333"/>
+                      </a:solidFill>
+                      <a:prstDash val="solid"/>
+                      <a:round/>
+                      <a:headEnd type="none" w="med" len="med"/>
+                      <a:tailEnd type="none" w="med" len="med"/>
+                    </a:lnL>
+                    <a:lnR w="9525" cap="flat" cmpd="sng" algn="ctr">
+                      <a:solidFill>
+                        <a:srgbClr val="333333"/>
+                      </a:solidFill>
+                      <a:prstDash val="solid"/>
+                      <a:round/>
+                      <a:headEnd type="none" w="med" len="med"/>
+                      <a:tailEnd type="none" w="med" len="med"/>
+                    </a:lnR>
+                    <a:lnT w="9525" cap="flat" cmpd="sng" algn="ctr">
+                      <a:solidFill>
+                        <a:srgbClr val="333333"/>
+                      </a:solidFill>
+                      <a:prstDash val="solid"/>
+                      <a:round/>
+                      <a:headEnd type="none" w="med" len="med"/>
+                      <a:tailEnd type="none" w="med" len="med"/>
+                    </a:lnT>
+                    <a:lnB w="9525" cap="flat" cmpd="sng" algn="ctr">
+                      <a:solidFill>
+                        <a:srgbClr val="333333"/>
+                      </a:solidFill>
+                      <a:prstDash val="solid"/>
+                      <a:round/>
+                      <a:headEnd type="none" w="med" len="med"/>
+                      <a:tailEnd type="none" w="med" len="med"/>
+                    </a:lnB>
+                    <a:solidFill>
+                      <a:srgbClr val="F2F2F2"/>
+                    </a:solidFill>
+                  </a:tcPr>
+                </a:tc>
+                <a:tc>
+                  <a:txBody>
+                    <a:bodyPr/>
+                    <a:lstStyle/>
+                    <a:p>
+                      <a:pPr algn="l" indent="0" marL="0">
+                        <a:buNone/>
+                      </a:pPr>
+                      <a:r>
+                        <a:rPr lang="en-US" sz="1100" b="1" dirty="0">
+                          <a:solidFill>
+                            <a:srgbClr val="000000"/>
+                          </a:solidFill>
+                          <a:latin typeface="Times New Roman" pitchFamily="34" charset="0"/>
+                          <a:ea typeface="Times New Roman" pitchFamily="34" charset="-122"/>
+                          <a:cs typeface="Times New Roman" pitchFamily="34" charset="-120"/>
+                        </a:rPr>
+                        <a:t>Result</a:t>
+                      </a:r>
+                      <a:endParaRPr lang="en-US" sz="1100" dirty="0">
+                        <a:latin typeface="Times New Roman" charset="0"/>
+                        <a:ea typeface="Times New Roman" charset="0"/>
+                        <a:cs typeface="Times New Roman" charset="0"/>
+                      </a:endParaRPr>
+                    </a:p>
+                  </a:txBody>
+                  <a:tcPr marL="64008" marR="64008" marT="36576" marB="36576" anchor="t">
+                    <a:lnL w="9525" cap="flat" cmpd="sng" algn="ctr">
+                      <a:solidFill>
+                        <a:srgbClr val="333333"/>
+                      </a:solidFill>
+                      <a:prstDash val="solid"/>
+                      <a:round/>
+                      <a:headEnd type="none" w="med" len="med"/>
+                      <a:tailEnd type="none" w="med" len="med"/>
+                    </a:lnL>
+                    <a:lnR w="9525" cap="flat" cmpd="sng" algn="ctr">
+                      <a:solidFill>
+                        <a:srgbClr val="333333"/>
+                      </a:solidFill>
+                      <a:prstDash val="solid"/>
+                      <a:round/>
+                      <a:headEnd type="none" w="med" len="med"/>
+                      <a:tailEnd type="none" w="med" len="med"/>
+                    </a:lnR>
+                    <a:lnT w="9525" cap="flat" cmpd="sng" algn="ctr">
+                      <a:solidFill>
+                        <a:srgbClr val="333333"/>
+                      </a:solidFill>
+                      <a:prstDash val="solid"/>
+                      <a:round/>
+                      <a:headEnd type="none" w="med" len="med"/>
+                      <a:tailEnd type="none" w="med" len="med"/>
+                    </a:lnT>
+                    <a:lnB w="9525" cap="flat" cmpd="sng" algn="ctr">
+                      <a:solidFill>
+                        <a:srgbClr val="333333"/>
+                      </a:solidFill>
+                      <a:prstDash val="solid"/>
+                      <a:round/>
+                      <a:headEnd type="none" w="med" len="med"/>
+                      <a:tailEnd type="none" w="med" len="med"/>
+                    </a:lnB>
+                    <a:solidFill>
+                      <a:srgbClr val="F2F2F2"/>
+                    </a:solidFill>
+                  </a:tcPr>
+                </a:tc>
+                <a:tc>
+                  <a:txBody>
+                    <a:bodyPr/>
+                    <a:lstStyle/>
+                    <a:p>
+                      <a:pPr algn="l" indent="0" marL="0">
+                        <a:buNone/>
+                      </a:pPr>
+                      <a:r>
+                        <a:rPr lang="en-US" sz="1100" b="1" dirty="0">
+                          <a:solidFill>
+                            <a:srgbClr val="000000"/>
+                          </a:solidFill>
+                          <a:latin typeface="Times New Roman" pitchFamily="34" charset="0"/>
+                          <a:ea typeface="Times New Roman" pitchFamily="34" charset="-122"/>
+                          <a:cs typeface="Times New Roman" pitchFamily="34" charset="-120"/>
+                        </a:rPr>
+                        <a:t>Limit kept with it</a:t>
+                      </a:r>
+                      <a:endParaRPr lang="en-US" sz="1100" dirty="0">
+                        <a:latin typeface="Times New Roman" charset="0"/>
+                        <a:ea typeface="Times New Roman" charset="0"/>
+                        <a:cs typeface="Times New Roman" charset="0"/>
+                      </a:endParaRPr>
+                    </a:p>
+                  </a:txBody>
+                  <a:tcPr marL="64008" marR="64008" marT="36576" marB="36576" anchor="t">
+                    <a:lnL w="9525" cap="flat" cmpd="sng" algn="ctr">
+                      <a:solidFill>
+                        <a:srgbClr val="333333"/>
+                      </a:solidFill>
+                      <a:prstDash val="solid"/>
+                      <a:round/>
+                      <a:headEnd type="none" w="med" len="med"/>
+                      <a:tailEnd type="none" w="med" len="med"/>
+                    </a:lnL>
+                    <a:lnR w="9525" cap="flat" cmpd="sng" algn="ctr">
+                      <a:solidFill>
+                        <a:srgbClr val="333333"/>
+                      </a:solidFill>
+                      <a:prstDash val="solid"/>
+                      <a:round/>
+                      <a:headEnd type="none" w="med" len="med"/>
+                      <a:tailEnd type="none" w="med" len="med"/>
+                    </a:lnR>
+                    <a:lnT w="9525" cap="flat" cmpd="sng" algn="ctr">
+                      <a:solidFill>
+                        <a:srgbClr val="333333"/>
+                      </a:solidFill>
+                      <a:prstDash val="solid"/>
+                      <a:round/>
+                      <a:headEnd type="none" w="med" len="med"/>
+                      <a:tailEnd type="none" w="med" len="med"/>
+                    </a:lnT>
+                    <a:lnB w="9525" cap="flat" cmpd="sng" algn="ctr">
+                      <a:solidFill>
+                        <a:srgbClr val="333333"/>
+                      </a:solidFill>
+                      <a:prstDash val="solid"/>
+                      <a:round/>
+                      <a:headEnd type="none" w="med" len="med"/>
+                      <a:tailEnd type="none" w="med" len="med"/>
+                    </a:lnB>
+                    <a:solidFill>
+                      <a:srgbClr val="F2F2F2"/>
+                    </a:solidFill>
+                  </a:tcPr>
+                </a:tc>
+              </a:tr>
+              <a:tr h="0">
+                <a:tc>
+                  <a:txBody>
+                    <a:bodyPr/>
+                    <a:lstStyle/>
+                    <a:p>
+                      <a:pPr algn="l" indent="0" marL="0">
+                        <a:buNone/>
+                      </a:pPr>
+                      <a:r>
+                        <a:rPr lang="en-US" sz="1100" b="1" dirty="0">
+                          <a:solidFill>
+                            <a:srgbClr val="1A1A1A"/>
+                          </a:solidFill>
+                          <a:latin typeface="Times New Roman" pitchFamily="34" charset="0"/>
+                          <a:ea typeface="Times New Roman" pitchFamily="34" charset="-122"/>
+                          <a:cs typeface="Times New Roman" pitchFamily="34" charset="-120"/>
+                        </a:rPr>
+                        <a:t>Setup</a:t>
+                      </a:r>
+                      <a:endParaRPr lang="en-US" sz="1100" dirty="0">
+                        <a:latin typeface="Times New Roman" charset="0"/>
+                        <a:ea typeface="Times New Roman" charset="0"/>
+                        <a:cs typeface="Times New Roman" charset="0"/>
+                      </a:endParaRPr>
+                    </a:p>
+                  </a:txBody>
+                  <a:tcPr marL="64008" marR="64008" marT="36576" marB="36576" anchor="t">
+                    <a:lnL w="9525" cap="flat" cmpd="sng" algn="ctr">
+                      <a:solidFill>
+                        <a:srgbClr val="333333"/>
+                      </a:solidFill>
+                      <a:prstDash val="solid"/>
+                      <a:round/>
+                      <a:headEnd type="none" w="med" len="med"/>
+                      <a:tailEnd type="none" w="med" len="med"/>
+                    </a:lnL>
+                    <a:lnR w="9525" cap="flat" cmpd="sng" algn="ctr">
+                      <a:solidFill>
+                        <a:srgbClr val="333333"/>
+                      </a:solidFill>
+                      <a:prstDash val="solid"/>
+                      <a:round/>
+                      <a:headEnd type="none" w="med" len="med"/>
+                      <a:tailEnd type="none" w="med" len="med"/>
+                    </a:lnR>
+                    <a:lnT w="9525" cap="flat" cmpd="sng" algn="ctr">
+                      <a:solidFill>
+                        <a:srgbClr val="333333"/>
+                      </a:solidFill>
+                      <a:prstDash val="solid"/>
+                      <a:round/>
+                      <a:headEnd type="none" w="med" len="med"/>
+                      <a:tailEnd type="none" w="med" len="med"/>
+                    </a:lnT>
+                    <a:lnB w="9525" cap="flat" cmpd="sng" algn="ctr">
+                      <a:solidFill>
+                        <a:srgbClr val="333333"/>
+                      </a:solidFill>
+                      <a:prstDash val="solid"/>
+                      <a:round/>
+                      <a:headEnd type="none" w="med" len="med"/>
+                      <a:tailEnd type="none" w="med" len="med"/>
+                    </a:lnB>
+                  </a:tcPr>
+                </a:tc>
+                <a:tc>
+                  <a:txBody>
+                    <a:bodyPr/>
+                    <a:lstStyle/>
+                    <a:p>
+                      <a:pPr algn="l" indent="0" marL="0">
+                        <a:buNone/>
+                      </a:pPr>
+                      <a:r>
+                        <a:rPr lang="en-US" sz="1100" dirty="0">
+                          <a:solidFill>
+                            <a:srgbClr val="1A1A1A"/>
+                          </a:solidFill>
+                          <a:latin typeface="Times New Roman" pitchFamily="34" charset="0"/>
+                          <a:ea typeface="Times New Roman" pitchFamily="34" charset="-122"/>
+                          <a:cs typeface="Times New Roman" pitchFamily="34" charset="-120"/>
+                        </a:rPr>
+                        <a:t>LongMemEval-S cleaned, 500 questions, 23,867 episodes. Worker mem-extractor, embeddings qwen3-embedding:0.6b. Reader TBD, judge TBD, seed 20261005</a:t>
+                      </a:r>
+                      <a:endParaRPr lang="en-US" sz="1100" dirty="0">
+                        <a:latin typeface="Times New Roman" charset="0"/>
+                        <a:ea typeface="Times New Roman" charset="0"/>
+                        <a:cs typeface="Times New Roman" charset="0"/>
+                      </a:endParaRPr>
+                    </a:p>
+                  </a:txBody>
+                  <a:tcPr marL="64008" marR="64008" marT="36576" marB="36576" anchor="t">
+                    <a:lnL w="9525" cap="flat" cmpd="sng" algn="ctr">
+                      <a:solidFill>
+                        <a:srgbClr val="333333"/>
+                      </a:solidFill>
+                      <a:prstDash val="solid"/>
+                      <a:round/>
+                      <a:headEnd type="none" w="med" len="med"/>
+                      <a:tailEnd type="none" w="med" len="med"/>
+                    </a:lnL>
+                    <a:lnR w="9525" cap="flat" cmpd="sng" algn="ctr">
+                      <a:solidFill>
+                        <a:srgbClr val="333333"/>
+                      </a:solidFill>
+                      <a:prstDash val="solid"/>
+                      <a:round/>
+                      <a:headEnd type="none" w="med" len="med"/>
+                      <a:tailEnd type="none" w="med" len="med"/>
+                    </a:lnR>
+                    <a:lnT w="9525" cap="flat" cmpd="sng" algn="ctr">
+                      <a:solidFill>
+                        <a:srgbClr val="333333"/>
+                      </a:solidFill>
+                      <a:prstDash val="solid"/>
+                      <a:round/>
+                      <a:headEnd type="none" w="med" len="med"/>
+                      <a:tailEnd type="none" w="med" len="med"/>
+                    </a:lnT>
+                    <a:lnB w="9525" cap="flat" cmpd="sng" algn="ctr">
+                      <a:solidFill>
+                        <a:srgbClr val="333333"/>
+                      </a:solidFill>
+                      <a:prstDash val="solid"/>
+                      <a:round/>
+                      <a:headEnd type="none" w="med" len="med"/>
+                      <a:tailEnd type="none" w="med" len="med"/>
+                    </a:lnB>
+                  </a:tcPr>
+                </a:tc>
+                <a:tc>
+                  <a:txBody>
+                    <a:bodyPr/>
+                    <a:lstStyle/>
+                    <a:p>
+                      <a:pPr algn="l" indent="0" marL="0">
+                        <a:buNone/>
+                      </a:pPr>
+                      <a:r>
+                        <a:rPr lang="en-US" sz="1100" dirty="0">
+                          <a:solidFill>
+                            <a:srgbClr val="1A1A1A"/>
+                          </a:solidFill>
+                          <a:latin typeface="Times New Roman" pitchFamily="34" charset="0"/>
+                          <a:ea typeface="Times New Roman" pitchFamily="34" charset="-122"/>
+                          <a:cs typeface="Times New Roman" pitchFamily="34" charset="-120"/>
+                        </a:rPr>
+                        <a:t>Pilot of 10 questions stopped during ingestion: for 3 of the 5 questions in progress, an extract job failed 5 times at the worker's 3,072 token output limit. No answers were scored. Frozen in benchmark/config.json</a:t>
+                      </a:r>
+                      <a:endParaRPr lang="en-US" sz="1100" dirty="0">
+                        <a:latin typeface="Times New Roman" charset="0"/>
+                        <a:ea typeface="Times New Roman" charset="0"/>
+                        <a:cs typeface="Times New Roman" charset="0"/>
+                      </a:endParaRPr>
+                    </a:p>
+                  </a:txBody>
+                  <a:tcPr marL="64008" marR="64008" marT="36576" marB="36576" anchor="t">
+                    <a:lnL w="9525" cap="flat" cmpd="sng" algn="ctr">
+                      <a:solidFill>
+                        <a:srgbClr val="333333"/>
+                      </a:solidFill>
+                      <a:prstDash val="solid"/>
+                      <a:round/>
+                      <a:headEnd type="none" w="med" len="med"/>
+                      <a:tailEnd type="none" w="med" len="med"/>
+                    </a:lnL>
+                    <a:lnR w="9525" cap="flat" cmpd="sng" algn="ctr">
+                      <a:solidFill>
+                        <a:srgbClr val="333333"/>
+                      </a:solidFill>
+                      <a:prstDash val="solid"/>
+                      <a:round/>
+                      <a:headEnd type="none" w="med" len="med"/>
+                      <a:tailEnd type="none" w="med" len="med"/>
+                    </a:lnR>
+                    <a:lnT w="9525" cap="flat" cmpd="sng" algn="ctr">
+                      <a:solidFill>
+                        <a:srgbClr val="333333"/>
+                      </a:solidFill>
+                      <a:prstDash val="solid"/>
+                      <a:round/>
+                      <a:headEnd type="none" w="med" len="med"/>
+                      <a:tailEnd type="none" w="med" len="med"/>
+                    </a:lnT>
+                    <a:lnB w="9525" cap="flat" cmpd="sng" algn="ctr">
+                      <a:solidFill>
+                        <a:srgbClr val="333333"/>
+                      </a:solidFill>
+                      <a:prstDash val="solid"/>
+                      <a:round/>
+                      <a:headEnd type="none" w="med" len="med"/>
+                      <a:tailEnd type="none" w="med" len="med"/>
+                    </a:lnB>
+                  </a:tcPr>
+                </a:tc>
+              </a:tr>
+              <a:tr h="0">
+                <a:tc>
+                  <a:txBody>
+                    <a:bodyPr/>
+                    <a:lstStyle/>
+                    <a:p>
+                      <a:pPr algn="l" indent="0" marL="0">
+                        <a:buNone/>
+                      </a:pPr>
+                      <a:r>
+                        <a:rPr lang="en-US" sz="1100" b="1" dirty="0">
+                          <a:solidFill>
+                            <a:srgbClr val="1A1A1A"/>
+                          </a:solidFill>
+                          <a:latin typeface="Times New Roman" pitchFamily="34" charset="0"/>
+                          <a:ea typeface="Times New Roman" pitchFamily="34" charset="-122"/>
+                          <a:cs typeface="Times New Roman" pitchFamily="34" charset="-120"/>
+                        </a:rPr>
+                        <a:t>raw_hybrid: lexical and vector search over source chunks</a:t>
+                      </a:r>
+                      <a:endParaRPr lang="en-US" sz="1100" dirty="0">
+                        <a:latin typeface="Times New Roman" charset="0"/>
+                        <a:ea typeface="Times New Roman" charset="0"/>
+                        <a:cs typeface="Times New Roman" charset="0"/>
+                      </a:endParaRPr>
+                    </a:p>
+                  </a:txBody>
+                  <a:tcPr marL="64008" marR="64008" marT="36576" marB="36576" anchor="t">
+                    <a:lnL w="9525" cap="flat" cmpd="sng" algn="ctr">
+                      <a:solidFill>
+                        <a:srgbClr val="333333"/>
+                      </a:solidFill>
+                      <a:prstDash val="solid"/>
+                      <a:round/>
+                      <a:headEnd type="none" w="med" len="med"/>
+                      <a:tailEnd type="none" w="med" len="med"/>
+                    </a:lnL>
+                    <a:lnR w="9525" cap="flat" cmpd="sng" algn="ctr">
+                      <a:solidFill>
+                        <a:srgbClr val="333333"/>
+                      </a:solidFill>
+                      <a:prstDash val="solid"/>
+                      <a:round/>
+                      <a:headEnd type="none" w="med" len="med"/>
+                      <a:tailEnd type="none" w="med" len="med"/>
+                    </a:lnR>
+                    <a:lnT w="9525" cap="flat" cmpd="sng" algn="ctr">
+                      <a:solidFill>
+                        <a:srgbClr val="333333"/>
+                      </a:solidFill>
+                      <a:prstDash val="solid"/>
+                      <a:round/>
+                      <a:headEnd type="none" w="med" len="med"/>
+                      <a:tailEnd type="none" w="med" len="med"/>
+                    </a:lnT>
+                    <a:lnB w="9525" cap="flat" cmpd="sng" algn="ctr">
+                      <a:solidFill>
+                        <a:srgbClr val="333333"/>
+                      </a:solidFill>
+                      <a:prstDash val="solid"/>
+                      <a:round/>
+                      <a:headEnd type="none" w="med" len="med"/>
+                      <a:tailEnd type="none" w="med" len="med"/>
+                    </a:lnB>
+                  </a:tcPr>
+                </a:tc>
+                <a:tc>
+                  <a:txBody>
+                    <a:bodyPr/>
+                    <a:lstStyle/>
+                    <a:p>
+                      <a:pPr algn="l" indent="0" marL="0">
+                        <a:buNone/>
+                      </a:pPr>
+                      <a:r>
+                        <a:rPr lang="en-US" sz="1100" dirty="0">
+                          <a:solidFill>
+                            <a:srgbClr val="1A1A1A"/>
+                          </a:solidFill>
+                          <a:latin typeface="Times New Roman" pitchFamily="34" charset="0"/>
+                          <a:ea typeface="Times New Roman" pitchFamily="34" charset="-122"/>
+                          <a:cs typeface="Times New Roman" pitchFamily="34" charset="-120"/>
+                        </a:rPr>
+                        <a:t>Accuracy TBD of 500. Knowledge-update TBD, temporal TBD</a:t>
+                      </a:r>
+                      <a:endParaRPr lang="en-US" sz="1100" dirty="0">
+                        <a:latin typeface="Times New Roman" charset="0"/>
+                        <a:ea typeface="Times New Roman" charset="0"/>
+                        <a:cs typeface="Times New Roman" charset="0"/>
+                      </a:endParaRPr>
+                    </a:p>
+                  </a:txBody>
+                  <a:tcPr marL="64008" marR="64008" marT="36576" marB="36576" anchor="t">
+                    <a:lnL w="9525" cap="flat" cmpd="sng" algn="ctr">
+                      <a:solidFill>
+                        <a:srgbClr val="333333"/>
+                      </a:solidFill>
+                      <a:prstDash val="solid"/>
+                      <a:round/>
+                      <a:headEnd type="none" w="med" len="med"/>
+                      <a:tailEnd type="none" w="med" len="med"/>
+                    </a:lnL>
+                    <a:lnR w="9525" cap="flat" cmpd="sng" algn="ctr">
+                      <a:solidFill>
+                        <a:srgbClr val="333333"/>
+                      </a:solidFill>
+                      <a:prstDash val="solid"/>
+                      <a:round/>
+                      <a:headEnd type="none" w="med" len="med"/>
+                      <a:tailEnd type="none" w="med" len="med"/>
+                    </a:lnR>
+                    <a:lnT w="9525" cap="flat" cmpd="sng" algn="ctr">
+                      <a:solidFill>
+                        <a:srgbClr val="333333"/>
+                      </a:solidFill>
+                      <a:prstDash val="solid"/>
+                      <a:round/>
+                      <a:headEnd type="none" w="med" len="med"/>
+                      <a:tailEnd type="none" w="med" len="med"/>
+                    </a:lnT>
+                    <a:lnB w="9525" cap="flat" cmpd="sng" algn="ctr">
+                      <a:solidFill>
+                        <a:srgbClr val="333333"/>
+                      </a:solidFill>
+                      <a:prstDash val="solid"/>
+                      <a:round/>
+                      <a:headEnd type="none" w="med" len="med"/>
+                      <a:tailEnd type="none" w="med" len="med"/>
+                    </a:lnB>
+                  </a:tcPr>
+                </a:tc>
+                <a:tc>
+                  <a:txBody>
+                    <a:bodyPr/>
+                    <a:lstStyle/>
+                    <a:p>
+                      <a:pPr algn="l" indent="0" marL="0">
+                        <a:buNone/>
+                      </a:pPr>
+                      <a:r>
+                        <a:rPr lang="en-US" sz="1100" dirty="0">
+                          <a:solidFill>
+                            <a:srgbClr val="1A1A1A"/>
+                          </a:solidFill>
+                          <a:latin typeface="Times New Roman" pitchFamily="34" charset="0"/>
+                          <a:ea typeface="Times New Roman" pitchFamily="34" charset="-122"/>
+                          <a:cs typeface="Times New Roman" pitchFamily="34" charset="-120"/>
+                        </a:rPr>
+                        <a:t>Same reader and judge in every condition. Judge scores are custom, not official GPT-4o scores</a:t>
+                      </a:r>
+                      <a:endParaRPr lang="en-US" sz="1100" dirty="0">
+                        <a:latin typeface="Times New Roman" charset="0"/>
+                        <a:ea typeface="Times New Roman" charset="0"/>
+                        <a:cs typeface="Times New Roman" charset="0"/>
+                      </a:endParaRPr>
+                    </a:p>
+                  </a:txBody>
+                  <a:tcPr marL="64008" marR="64008" marT="36576" marB="36576" anchor="t">
+                    <a:lnL w="9525" cap="flat" cmpd="sng" algn="ctr">
+                      <a:solidFill>
+                        <a:srgbClr val="333333"/>
+                      </a:solidFill>
+                      <a:prstDash val="solid"/>
+                      <a:round/>
+                      <a:headEnd type="none" w="med" len="med"/>
+                      <a:tailEnd type="none" w="med" len="med"/>
+                    </a:lnL>
+                    <a:lnR w="9525" cap="flat" cmpd="sng" algn="ctr">
+                      <a:solidFill>
+                        <a:srgbClr val="333333"/>
+                      </a:solidFill>
+                      <a:prstDash val="solid"/>
+                      <a:round/>
+                      <a:headEnd type="none" w="med" len="med"/>
+                      <a:tailEnd type="none" w="med" len="med"/>
+                    </a:lnR>
+                    <a:lnT w="9525" cap="flat" cmpd="sng" algn="ctr">
+                      <a:solidFill>
+                        <a:srgbClr val="333333"/>
+                      </a:solidFill>
+                      <a:prstDash val="solid"/>
+                      <a:round/>
+                      <a:headEnd type="none" w="med" len="med"/>
+                      <a:tailEnd type="none" w="med" len="med"/>
+                    </a:lnT>
+                    <a:lnB w="9525" cap="flat" cmpd="sng" algn="ctr">
+                      <a:solidFill>
+                        <a:srgbClr val="333333"/>
+                      </a:solidFill>
+                      <a:prstDash val="solid"/>
+                      <a:round/>
+                      <a:headEnd type="none" w="med" len="med"/>
+                      <a:tailEnd type="none" w="med" len="med"/>
+                    </a:lnB>
+                  </a:tcPr>
+                </a:tc>
+              </a:tr>
+              <a:tr h="0">
+                <a:tc>
+                  <a:txBody>
+                    <a:bodyPr/>
+                    <a:lstStyle/>
+                    <a:p>
+                      <a:pPr algn="l" indent="0" marL="0">
+                        <a:buNone/>
+                      </a:pPr>
+                      <a:r>
+                        <a:rPr lang="en-US" sz="1100" b="1" dirty="0">
+                          <a:solidFill>
+                            <a:srgbClr val="1A1A1A"/>
+                          </a:solidFill>
+                          <a:latin typeface="Times New Roman" pitchFamily="34" charset="0"/>
+                          <a:ea typeface="Times New Roman" pitchFamily="34" charset="-122"/>
+                          <a:cs typeface="Times New Roman" pitchFamily="34" charset="-120"/>
+                        </a:rPr>
+                        <a:t>enhanced: facts, observations and graph expansion</a:t>
+                      </a:r>
+                      <a:endParaRPr lang="en-US" sz="1100" dirty="0">
+                        <a:latin typeface="Times New Roman" charset="0"/>
+                        <a:ea typeface="Times New Roman" charset="0"/>
+                        <a:cs typeface="Times New Roman" charset="0"/>
+                      </a:endParaRPr>
+                    </a:p>
+                  </a:txBody>
+                  <a:tcPr marL="64008" marR="64008" marT="36576" marB="36576" anchor="t">
+                    <a:lnL w="9525" cap="flat" cmpd="sng" algn="ctr">
+                      <a:solidFill>
+                        <a:srgbClr val="333333"/>
+                      </a:solidFill>
+                      <a:prstDash val="solid"/>
+                      <a:round/>
+                      <a:headEnd type="none" w="med" len="med"/>
+                      <a:tailEnd type="none" w="med" len="med"/>
+                    </a:lnL>
+                    <a:lnR w="9525" cap="flat" cmpd="sng" algn="ctr">
+                      <a:solidFill>
+                        <a:srgbClr val="333333"/>
+                      </a:solidFill>
+                      <a:prstDash val="solid"/>
+                      <a:round/>
+                      <a:headEnd type="none" w="med" len="med"/>
+                      <a:tailEnd type="none" w="med" len="med"/>
+                    </a:lnR>
+                    <a:lnT w="9525" cap="flat" cmpd="sng" algn="ctr">
+                      <a:solidFill>
+                        <a:srgbClr val="333333"/>
+                      </a:solidFill>
+                      <a:prstDash val="solid"/>
+                      <a:round/>
+                      <a:headEnd type="none" w="med" len="med"/>
+                      <a:tailEnd type="none" w="med" len="med"/>
+                    </a:lnT>
+                    <a:lnB w="9525" cap="flat" cmpd="sng" algn="ctr">
+                      <a:solidFill>
+                        <a:srgbClr val="333333"/>
+                      </a:solidFill>
+                      <a:prstDash val="solid"/>
+                      <a:round/>
+                      <a:headEnd type="none" w="med" len="med"/>
+                      <a:tailEnd type="none" w="med" len="med"/>
+                    </a:lnB>
+                  </a:tcPr>
+                </a:tc>
+                <a:tc>
+                  <a:txBody>
+                    <a:bodyPr/>
+                    <a:lstStyle/>
+                    <a:p>
+                      <a:pPr algn="l" indent="0" marL="0">
+                        <a:buNone/>
+                      </a:pPr>
+                      <a:r>
+                        <a:rPr lang="en-US" sz="1100" dirty="0">
+                          <a:solidFill>
+                            <a:srgbClr val="1A1A1A"/>
+                          </a:solidFill>
+                          <a:latin typeface="Times New Roman" pitchFamily="34" charset="0"/>
+                          <a:ea typeface="Times New Roman" pitchFamily="34" charset="-122"/>
+                          <a:cs typeface="Times New Roman" pitchFamily="34" charset="-120"/>
+                        </a:rPr>
+                        <a:t>Accuracy TBD of 500. Knowledge-update TBD, temporal TBD. Difference from raw_hybrid TBD points</a:t>
+                      </a:r>
+                      <a:endParaRPr lang="en-US" sz="1100" dirty="0">
+                        <a:latin typeface="Times New Roman" charset="0"/>
+                        <a:ea typeface="Times New Roman" charset="0"/>
+                        <a:cs typeface="Times New Roman" charset="0"/>
+                      </a:endParaRPr>
+                    </a:p>
+                  </a:txBody>
+                  <a:tcPr marL="64008" marR="64008" marT="36576" marB="36576" anchor="t">
+                    <a:lnL w="9525" cap="flat" cmpd="sng" algn="ctr">
+                      <a:solidFill>
+                        <a:srgbClr val="333333"/>
+                      </a:solidFill>
+                      <a:prstDash val="solid"/>
+                      <a:round/>
+                      <a:headEnd type="none" w="med" len="med"/>
+                      <a:tailEnd type="none" w="med" len="med"/>
+                    </a:lnL>
+                    <a:lnR w="9525" cap="flat" cmpd="sng" algn="ctr">
+                      <a:solidFill>
+                        <a:srgbClr val="333333"/>
+                      </a:solidFill>
+                      <a:prstDash val="solid"/>
+                      <a:round/>
+                      <a:headEnd type="none" w="med" len="med"/>
+                      <a:tailEnd type="none" w="med" len="med"/>
+                    </a:lnR>
+                    <a:lnT w="9525" cap="flat" cmpd="sng" algn="ctr">
+                      <a:solidFill>
+                        <a:srgbClr val="333333"/>
+                      </a:solidFill>
+                      <a:prstDash val="solid"/>
+                      <a:round/>
+                      <a:headEnd type="none" w="med" len="med"/>
+                      <a:tailEnd type="none" w="med" len="med"/>
+                    </a:lnT>
+                    <a:lnB w="9525" cap="flat" cmpd="sng" algn="ctr">
+                      <a:solidFill>
+                        <a:srgbClr val="333333"/>
+                      </a:solidFill>
+                      <a:prstDash val="solid"/>
+                      <a:round/>
+                      <a:headEnd type="none" w="med" len="med"/>
+                      <a:tailEnd type="none" w="med" len="med"/>
+                    </a:lnB>
+                  </a:tcPr>
+                </a:tc>
+                <a:tc>
+                  <a:txBody>
+                    <a:bodyPr/>
+                    <a:lstStyle/>
+                    <a:p>
+                      <a:pPr algn="l" indent="0" marL="0">
+                        <a:buNone/>
+                      </a:pPr>
+                      <a:r>
+                        <a:rPr lang="en-US" sz="1100" dirty="0">
+                          <a:solidFill>
+                            <a:srgbClr val="1A1A1A"/>
+                          </a:solidFill>
+                          <a:latin typeface="Times New Roman" pitchFamily="34" charset="0"/>
+                          <a:ea typeface="Times New Roman" pitchFamily="34" charset="-122"/>
+                          <a:cs typeface="Times New Roman" pitchFamily="34" charset="-120"/>
+                        </a:rPr>
+                        <a:t>Read the paired difference per question, not only the totals</a:t>
+                      </a:r>
+                      <a:endParaRPr lang="en-US" sz="1100" dirty="0">
+                        <a:latin typeface="Times New Roman" charset="0"/>
+                        <a:ea typeface="Times New Roman" charset="0"/>
+                        <a:cs typeface="Times New Roman" charset="0"/>
+                      </a:endParaRPr>
+                    </a:p>
+                  </a:txBody>
+                  <a:tcPr marL="64008" marR="64008" marT="36576" marB="36576" anchor="t">
+                    <a:lnL w="9525" cap="flat" cmpd="sng" algn="ctr">
+                      <a:solidFill>
+                        <a:srgbClr val="333333"/>
+                      </a:solidFill>
+                      <a:prstDash val="solid"/>
+                      <a:round/>
+                      <a:headEnd type="none" w="med" len="med"/>
+                      <a:tailEnd type="none" w="med" len="med"/>
+                    </a:lnL>
+                    <a:lnR w="9525" cap="flat" cmpd="sng" algn="ctr">
+                      <a:solidFill>
+                        <a:srgbClr val="333333"/>
+                      </a:solidFill>
+                      <a:prstDash val="solid"/>
+                      <a:round/>
+                      <a:headEnd type="none" w="med" len="med"/>
+                      <a:tailEnd type="none" w="med" len="med"/>
+                    </a:lnR>
+                    <a:lnT w="9525" cap="flat" cmpd="sng" algn="ctr">
+                      <a:solidFill>
+                        <a:srgbClr val="333333"/>
+                      </a:solidFill>
+                      <a:prstDash val="solid"/>
+                      <a:round/>
+                      <a:headEnd type="none" w="med" len="med"/>
+                      <a:tailEnd type="none" w="med" len="med"/>
+                    </a:lnT>
+                    <a:lnB w="9525" cap="flat" cmpd="sng" algn="ctr">
+                      <a:solidFill>
+                        <a:srgbClr val="333333"/>
+                      </a:solidFill>
+                      <a:prstDash val="solid"/>
+                      <a:round/>
+                      <a:headEnd type="none" w="med" len="med"/>
+                      <a:tailEnd type="none" w="med" len="med"/>
+                    </a:lnB>
+                  </a:tcPr>
+                </a:tc>
+              </a:tr>
+              <a:tr h="0">
+                <a:tc>
+                  <a:txBody>
+                    <a:bodyPr/>
+                    <a:lstStyle/>
+                    <a:p>
+                      <a:pPr algn="l" indent="0" marL="0">
+                        <a:buNone/>
+                      </a:pPr>
+                      <a:r>
+                        <a:rPr lang="en-US" sz="1100" b="1" dirty="0">
+                          <a:solidFill>
+                            <a:srgbClr val="1A1A1A"/>
+                          </a:solidFill>
+                          <a:latin typeface="Times New Roman" pitchFamily="34" charset="0"/>
+                          <a:ea typeface="Times New Roman" pitchFamily="34" charset="-122"/>
+                          <a:cs typeface="Times New Roman" pitchFamily="34" charset="-120"/>
+                        </a:rPr>
+                        <a:t>full_history: whole history in the prompt, no memory</a:t>
+                      </a:r>
+                      <a:endParaRPr lang="en-US" sz="1100" dirty="0">
+                        <a:latin typeface="Times New Roman" charset="0"/>
+                        <a:ea typeface="Times New Roman" charset="0"/>
+                        <a:cs typeface="Times New Roman" charset="0"/>
+                      </a:endParaRPr>
+                    </a:p>
+                  </a:txBody>
+                  <a:tcPr marL="64008" marR="64008" marT="36576" marB="36576" anchor="t">
+                    <a:lnL w="9525" cap="flat" cmpd="sng" algn="ctr">
+                      <a:solidFill>
+                        <a:srgbClr val="333333"/>
+                      </a:solidFill>
+                      <a:prstDash val="solid"/>
+                      <a:round/>
+                      <a:headEnd type="none" w="med" len="med"/>
+                      <a:tailEnd type="none" w="med" len="med"/>
+                    </a:lnL>
+                    <a:lnR w="9525" cap="flat" cmpd="sng" algn="ctr">
+                      <a:solidFill>
+                        <a:srgbClr val="333333"/>
+                      </a:solidFill>
+                      <a:prstDash val="solid"/>
+                      <a:round/>
+                      <a:headEnd type="none" w="med" len="med"/>
+                      <a:tailEnd type="none" w="med" len="med"/>
+                    </a:lnR>
+                    <a:lnT w="9525" cap="flat" cmpd="sng" algn="ctr">
+                      <a:solidFill>
+                        <a:srgbClr val="333333"/>
+                      </a:solidFill>
+                      <a:prstDash val="solid"/>
+                      <a:round/>
+                      <a:headEnd type="none" w="med" len="med"/>
+                      <a:tailEnd type="none" w="med" len="med"/>
+                    </a:lnT>
+                    <a:lnB w="9525" cap="flat" cmpd="sng" algn="ctr">
+                      <a:solidFill>
+                        <a:srgbClr val="333333"/>
+                      </a:solidFill>
+                      <a:prstDash val="solid"/>
+                      <a:round/>
+                      <a:headEnd type="none" w="med" len="med"/>
+                      <a:tailEnd type="none" w="med" len="med"/>
+                    </a:lnB>
+                  </a:tcPr>
+                </a:tc>
+                <a:tc>
+                  <a:txBody>
+                    <a:bodyPr/>
+                    <a:lstStyle/>
+                    <a:p>
+                      <a:pPr algn="l" indent="0" marL="0">
+                        <a:buNone/>
+                      </a:pPr>
+                      <a:r>
+                        <a:rPr lang="en-US" sz="1100" dirty="0">
+                          <a:solidFill>
+                            <a:srgbClr val="1A1A1A"/>
+                          </a:solidFill>
+                          <a:latin typeface="Times New Roman" pitchFamily="34" charset="0"/>
+                          <a:ea typeface="Times New Roman" pitchFamily="34" charset="-122"/>
+                          <a:cs typeface="Times New Roman" pitchFamily="34" charset="-120"/>
+                        </a:rPr>
+                        <a:t>Accuracy TBD of 500. Tokens per question TBD</a:t>
+                      </a:r>
+                      <a:endParaRPr lang="en-US" sz="1100" dirty="0">
+                        <a:latin typeface="Times New Roman" charset="0"/>
+                        <a:ea typeface="Times New Roman" charset="0"/>
+                        <a:cs typeface="Times New Roman" charset="0"/>
+                      </a:endParaRPr>
+                    </a:p>
+                  </a:txBody>
+                  <a:tcPr marL="64008" marR="64008" marT="36576" marB="36576" anchor="t">
+                    <a:lnL w="9525" cap="flat" cmpd="sng" algn="ctr">
+                      <a:solidFill>
+                        <a:srgbClr val="333333"/>
+                      </a:solidFill>
+                      <a:prstDash val="solid"/>
+                      <a:round/>
+                      <a:headEnd type="none" w="med" len="med"/>
+                      <a:tailEnd type="none" w="med" len="med"/>
+                    </a:lnL>
+                    <a:lnR w="9525" cap="flat" cmpd="sng" algn="ctr">
+                      <a:solidFill>
+                        <a:srgbClr val="333333"/>
+                      </a:solidFill>
+                      <a:prstDash val="solid"/>
+                      <a:round/>
+                      <a:headEnd type="none" w="med" len="med"/>
+                      <a:tailEnd type="none" w="med" len="med"/>
+                    </a:lnR>
+                    <a:lnT w="9525" cap="flat" cmpd="sng" algn="ctr">
+                      <a:solidFill>
+                        <a:srgbClr val="333333"/>
+                      </a:solidFill>
+                      <a:prstDash val="solid"/>
+                      <a:round/>
+                      <a:headEnd type="none" w="med" len="med"/>
+                      <a:tailEnd type="none" w="med" len="med"/>
+                    </a:lnT>
+                    <a:lnB w="9525" cap="flat" cmpd="sng" algn="ctr">
+                      <a:solidFill>
+                        <a:srgbClr val="333333"/>
+                      </a:solidFill>
+                      <a:prstDash val="solid"/>
+                      <a:round/>
+                      <a:headEnd type="none" w="med" len="med"/>
+                      <a:tailEnd type="none" w="med" len="med"/>
+                    </a:lnB>
+                  </a:tcPr>
+                </a:tc>
+                <a:tc>
+                  <a:txBody>
+                    <a:bodyPr/>
+                    <a:lstStyle/>
+                    <a:p>
+                      <a:pPr algn="l" indent="0" marL="0">
+                        <a:buNone/>
+                      </a:pPr>
+                      <a:r>
+                        <a:rPr lang="en-US" sz="1100" dirty="0">
+                          <a:solidFill>
+                            <a:srgbClr val="1A1A1A"/>
+                          </a:solidFill>
+                          <a:latin typeface="Times New Roman" pitchFamily="34" charset="0"/>
+                          <a:ea typeface="Times New Roman" pitchFamily="34" charset="-122"/>
+                          <a:cs typeface="Times New Roman" pitchFamily="34" charset="-120"/>
+                        </a:rPr>
+                        <a:t>Largest history is about 135,000 tokens. A context error is a failed run, not a truncation</a:t>
+                      </a:r>
+                      <a:endParaRPr lang="en-US" sz="1100" dirty="0">
+                        <a:latin typeface="Times New Roman" charset="0"/>
+                        <a:ea typeface="Times New Roman" charset="0"/>
+                        <a:cs typeface="Times New Roman" charset="0"/>
+                      </a:endParaRPr>
+                    </a:p>
+                  </a:txBody>
+                  <a:tcPr marL="64008" marR="64008" marT="36576" marB="36576" anchor="t">
+                    <a:lnL w="9525" cap="flat" cmpd="sng" algn="ctr">
+                      <a:solidFill>
+                        <a:srgbClr val="333333"/>
+                      </a:solidFill>
+                      <a:prstDash val="solid"/>
+                      <a:round/>
+                      <a:headEnd type="none" w="med" len="med"/>
+                      <a:tailEnd type="none" w="med" len="med"/>
+                    </a:lnL>
+                    <a:lnR w="9525" cap="flat" cmpd="sng" algn="ctr">
+                      <a:solidFill>
+                        <a:srgbClr val="333333"/>
+                      </a:solidFill>
+                      <a:prstDash val="solid"/>
+                      <a:round/>
+                      <a:headEnd type="none" w="med" len="med"/>
+                      <a:tailEnd type="none" w="med" len="med"/>
+                    </a:lnR>
+                    <a:lnT w="9525" cap="flat" cmpd="sng" algn="ctr">
+                      <a:solidFill>
+                        <a:srgbClr val="333333"/>
+                      </a:solidFill>
+                      <a:prstDash val="solid"/>
+                      <a:round/>
+                      <a:headEnd type="none" w="med" len="med"/>
+                      <a:tailEnd type="none" w="med" len="med"/>
+                    </a:lnT>
+                    <a:lnB w="9525" cap="flat" cmpd="sng" algn="ctr">
+                      <a:solidFill>
+                        <a:srgbClr val="333333"/>
+                      </a:solidFill>
+                      <a:prstDash val="solid"/>
+                      <a:round/>
+                      <a:headEnd type="none" w="med" len="med"/>
+                      <a:tailEnd type="none" w="med" len="med"/>
+                    </a:lnB>
+                  </a:tcPr>
+                </a:tc>
+              </a:tr>
+              <a:tr h="0">
+                <a:tc>
+                  <a:txBody>
+                    <a:bodyPr/>
+                    <a:lstStyle/>
+                    <a:p>
+                      <a:pPr algn="l" indent="0" marL="0">
+                        <a:buNone/>
+                      </a:pPr>
+                      <a:r>
+                        <a:rPr lang="en-US" sz="1100" b="1" dirty="0">
+                          <a:solidFill>
+                            <a:srgbClr val="1A1A1A"/>
+                          </a:solidFill>
+                          <a:latin typeface="Times New Roman" pitchFamily="34" charset="0"/>
+                          <a:ea typeface="Times New Roman" pitchFamily="34" charset="-122"/>
+                          <a:cs typeface="Times New Roman" pitchFamily="34" charset="-120"/>
+                        </a:rPr>
+                        <a:t>Ablations on 100 questions: no_graph and no_consolidation</a:t>
+                      </a:r>
+                      <a:endParaRPr lang="en-US" sz="1100" dirty="0">
+                        <a:latin typeface="Times New Roman" charset="0"/>
+                        <a:ea typeface="Times New Roman" charset="0"/>
+                        <a:cs typeface="Times New Roman" charset="0"/>
+                      </a:endParaRPr>
+                    </a:p>
+                  </a:txBody>
+                  <a:tcPr marL="64008" marR="64008" marT="36576" marB="36576" anchor="t">
+                    <a:lnL w="9525" cap="flat" cmpd="sng" algn="ctr">
+                      <a:solidFill>
+                        <a:srgbClr val="333333"/>
+                      </a:solidFill>
+                      <a:prstDash val="solid"/>
+                      <a:round/>
+                      <a:headEnd type="none" w="med" len="med"/>
+                      <a:tailEnd type="none" w="med" len="med"/>
+                    </a:lnL>
+                    <a:lnR w="9525" cap="flat" cmpd="sng" algn="ctr">
+                      <a:solidFill>
+                        <a:srgbClr val="333333"/>
+                      </a:solidFill>
+                      <a:prstDash val="solid"/>
+                      <a:round/>
+                      <a:headEnd type="none" w="med" len="med"/>
+                      <a:tailEnd type="none" w="med" len="med"/>
+                    </a:lnR>
+                    <a:lnT w="9525" cap="flat" cmpd="sng" algn="ctr">
+                      <a:solidFill>
+                        <a:srgbClr val="333333"/>
+                      </a:solidFill>
+                      <a:prstDash val="solid"/>
+                      <a:round/>
+                      <a:headEnd type="none" w="med" len="med"/>
+                      <a:tailEnd type="none" w="med" len="med"/>
+                    </a:lnT>
+                    <a:lnB w="9525" cap="flat" cmpd="sng" algn="ctr">
+                      <a:solidFill>
+                        <a:srgbClr val="333333"/>
+                      </a:solidFill>
+                      <a:prstDash val="solid"/>
+                      <a:round/>
+                      <a:headEnd type="none" w="med" len="med"/>
+                      <a:tailEnd type="none" w="med" len="med"/>
+                    </a:lnB>
+                  </a:tcPr>
+                </a:tc>
+                <a:tc>
+                  <a:txBody>
+                    <a:bodyPr/>
+                    <a:lstStyle/>
+                    <a:p>
+                      <a:pPr algn="l" indent="0" marL="0">
+                        <a:buNone/>
+                      </a:pPr>
+                      <a:r>
+                        <a:rPr lang="en-US" sz="1100" dirty="0">
+                          <a:solidFill>
+                            <a:srgbClr val="1A1A1A"/>
+                          </a:solidFill>
+                          <a:latin typeface="Times New Roman" pitchFamily="34" charset="0"/>
+                          <a:ea typeface="Times New Roman" pitchFamily="34" charset="-122"/>
+                          <a:cs typeface="Times New Roman" pitchFamily="34" charset="-120"/>
+                        </a:rPr>
+                        <a:t>no_graph TBD, no_consolidation TBD, enhanced on the same 100 TBD</a:t>
+                      </a:r>
+                      <a:endParaRPr lang="en-US" sz="1100" dirty="0">
+                        <a:latin typeface="Times New Roman" charset="0"/>
+                        <a:ea typeface="Times New Roman" charset="0"/>
+                        <a:cs typeface="Times New Roman" charset="0"/>
+                      </a:endParaRPr>
+                    </a:p>
+                  </a:txBody>
+                  <a:tcPr marL="64008" marR="64008" marT="36576" marB="36576" anchor="t">
+                    <a:lnL w="9525" cap="flat" cmpd="sng" algn="ctr">
+                      <a:solidFill>
+                        <a:srgbClr val="333333"/>
+                      </a:solidFill>
+                      <a:prstDash val="solid"/>
+                      <a:round/>
+                      <a:headEnd type="none" w="med" len="med"/>
+                      <a:tailEnd type="none" w="med" len="med"/>
+                    </a:lnL>
+                    <a:lnR w="9525" cap="flat" cmpd="sng" algn="ctr">
+                      <a:solidFill>
+                        <a:srgbClr val="333333"/>
+                      </a:solidFill>
+                      <a:prstDash val="solid"/>
+                      <a:round/>
+                      <a:headEnd type="none" w="med" len="med"/>
+                      <a:tailEnd type="none" w="med" len="med"/>
+                    </a:lnR>
+                    <a:lnT w="9525" cap="flat" cmpd="sng" algn="ctr">
+                      <a:solidFill>
+                        <a:srgbClr val="333333"/>
+                      </a:solidFill>
+                      <a:prstDash val="solid"/>
+                      <a:round/>
+                      <a:headEnd type="none" w="med" len="med"/>
+                      <a:tailEnd type="none" w="med" len="med"/>
+                    </a:lnT>
+                    <a:lnB w="9525" cap="flat" cmpd="sng" algn="ctr">
+                      <a:solidFill>
+                        <a:srgbClr val="333333"/>
+                      </a:solidFill>
+                      <a:prstDash val="solid"/>
+                      <a:round/>
+                      <a:headEnd type="none" w="med" len="med"/>
+                      <a:tailEnd type="none" w="med" len="med"/>
+                    </a:lnB>
+                  </a:tcPr>
+                </a:tc>
+                <a:tc>
+                  <a:txBody>
+                    <a:bodyPr/>
+                    <a:lstStyle/>
+                    <a:p>
+                      <a:pPr algn="l" indent="0" marL="0">
+                        <a:buNone/>
+                      </a:pPr>
+                      <a:r>
+                        <a:rPr lang="en-US" sz="1100" dirty="0">
+                          <a:solidFill>
+                            <a:srgbClr val="1A1A1A"/>
+                          </a:solidFill>
+                          <a:latin typeface="Times New Roman" pitchFamily="34" charset="0"/>
+                          <a:ea typeface="Times New Roman" pitchFamily="34" charset="-122"/>
+                          <a:cs typeface="Times New Roman" pitchFamily="34" charset="-120"/>
+                        </a:rPr>
+                        <a:t>Small sample. Do not claim a component helps unless the gap is larger than the repeat spread</a:t>
+                      </a:r>
+                      <a:endParaRPr lang="en-US" sz="1100" dirty="0">
+                        <a:latin typeface="Times New Roman" charset="0"/>
+                        <a:ea typeface="Times New Roman" charset="0"/>
+                        <a:cs typeface="Times New Roman" charset="0"/>
+                      </a:endParaRPr>
+                    </a:p>
+                  </a:txBody>
+                  <a:tcPr marL="64008" marR="64008" marT="36576" marB="36576" anchor="t">
+                    <a:lnL w="9525" cap="flat" cmpd="sng" algn="ctr">
+                      <a:solidFill>
+                        <a:srgbClr val="333333"/>
+                      </a:solidFill>
+                      <a:prstDash val="solid"/>
+                      <a:round/>
+                      <a:headEnd type="none" w="med" len="med"/>
+                      <a:tailEnd type="none" w="med" len="med"/>
+                    </a:lnL>
+                    <a:lnR w="9525" cap="flat" cmpd="sng" algn="ctr">
+                      <a:solidFill>
+                        <a:srgbClr val="333333"/>
+                      </a:solidFill>
+                      <a:prstDash val="solid"/>
+                      <a:round/>
+                      <a:headEnd type="none" w="med" len="med"/>
+                      <a:tailEnd type="none" w="med" len="med"/>
+                    </a:lnR>
+                    <a:lnT w="9525" cap="flat" cmpd="sng" algn="ctr">
+                      <a:solidFill>
+                        <a:srgbClr val="333333"/>
+                      </a:solidFill>
+                      <a:prstDash val="solid"/>
+                      <a:round/>
+                      <a:headEnd type="none" w="med" len="med"/>
+                      <a:tailEnd type="none" w="med" len="med"/>
+                    </a:lnT>
+                    <a:lnB w="9525" cap="flat" cmpd="sng" algn="ctr">
+                      <a:solidFill>
+                        <a:srgbClr val="333333"/>
+                      </a:solidFill>
+                      <a:prstDash val="solid"/>
+                      <a:round/>
+                      <a:headEnd type="none" w="med" len="med"/>
+                      <a:tailEnd type="none" w="med" len="med"/>
+                    </a:lnB>
+                  </a:tcPr>
+                </a:tc>
+              </a:tr>
+              <a:tr h="0">
+                <a:tc>
+                  <a:txBody>
+                    <a:bodyPr/>
+                    <a:lstStyle/>
+                    <a:p>
+                      <a:pPr algn="l" indent="0" marL="0">
+                        <a:buNone/>
+                      </a:pPr>
+                      <a:r>
+                        <a:rPr lang="en-US" sz="1100" b="1" dirty="0">
+                          <a:solidFill>
+                            <a:srgbClr val="1A1A1A"/>
+                          </a:solidFill>
+                          <a:latin typeface="Times New Roman" pitchFamily="34" charset="0"/>
+                          <a:ea typeface="Times New Roman" pitchFamily="34" charset="-122"/>
+                          <a:cs typeface="Times New Roman" pitchFamily="34" charset="-120"/>
+                        </a:rPr>
+                        <a:t>Repeats: 100 questions, 3 repetitions</a:t>
+                      </a:r>
+                      <a:endParaRPr lang="en-US" sz="1100" dirty="0">
+                        <a:latin typeface="Times New Roman" charset="0"/>
+                        <a:ea typeface="Times New Roman" charset="0"/>
+                        <a:cs typeface="Times New Roman" charset="0"/>
+                      </a:endParaRPr>
+                    </a:p>
+                  </a:txBody>
+                  <a:tcPr marL="64008" marR="64008" marT="36576" marB="36576" anchor="t">
+                    <a:lnL w="9525" cap="flat" cmpd="sng" algn="ctr">
+                      <a:solidFill>
+                        <a:srgbClr val="333333"/>
+                      </a:solidFill>
+                      <a:prstDash val="solid"/>
+                      <a:round/>
+                      <a:headEnd type="none" w="med" len="med"/>
+                      <a:tailEnd type="none" w="med" len="med"/>
+                    </a:lnL>
+                    <a:lnR w="9525" cap="flat" cmpd="sng" algn="ctr">
+                      <a:solidFill>
+                        <a:srgbClr val="333333"/>
+                      </a:solidFill>
+                      <a:prstDash val="solid"/>
+                      <a:round/>
+                      <a:headEnd type="none" w="med" len="med"/>
+                      <a:tailEnd type="none" w="med" len="med"/>
+                    </a:lnR>
+                    <a:lnT w="9525" cap="flat" cmpd="sng" algn="ctr">
+                      <a:solidFill>
+                        <a:srgbClr val="333333"/>
+                      </a:solidFill>
+                      <a:prstDash val="solid"/>
+                      <a:round/>
+                      <a:headEnd type="none" w="med" len="med"/>
+                      <a:tailEnd type="none" w="med" len="med"/>
+                    </a:lnT>
+                    <a:lnB w="9525" cap="flat" cmpd="sng" algn="ctr">
+                      <a:solidFill>
+                        <a:srgbClr val="333333"/>
+                      </a:solidFill>
+                      <a:prstDash val="solid"/>
+                      <a:round/>
+                      <a:headEnd type="none" w="med" len="med"/>
+                      <a:tailEnd type="none" w="med" len="med"/>
+                    </a:lnB>
+                  </a:tcPr>
+                </a:tc>
+                <a:tc>
+                  <a:txBody>
+                    <a:bodyPr/>
+                    <a:lstStyle/>
+                    <a:p>
+                      <a:pPr algn="l" indent="0" marL="0">
+                        <a:buNone/>
+                      </a:pPr>
+                      <a:r>
+                        <a:rPr lang="en-US" sz="1100" dirty="0">
+                          <a:solidFill>
+                            <a:srgbClr val="1A1A1A"/>
+                          </a:solidFill>
+                          <a:latin typeface="Times New Roman" pitchFamily="34" charset="0"/>
+                          <a:ea typeface="Times New Roman" pitchFamily="34" charset="-122"/>
+                          <a:cs typeface="Times New Roman" pitchFamily="34" charset="-120"/>
+                        </a:rPr>
+                        <a:t>Spread across repeats TBD points</a:t>
+                      </a:r>
+                      <a:endParaRPr lang="en-US" sz="1100" dirty="0">
+                        <a:latin typeface="Times New Roman" charset="0"/>
+                        <a:ea typeface="Times New Roman" charset="0"/>
+                        <a:cs typeface="Times New Roman" charset="0"/>
+                      </a:endParaRPr>
+                    </a:p>
+                  </a:txBody>
+                  <a:tcPr marL="64008" marR="64008" marT="36576" marB="36576" anchor="t">
+                    <a:lnL w="9525" cap="flat" cmpd="sng" algn="ctr">
+                      <a:solidFill>
+                        <a:srgbClr val="333333"/>
+                      </a:solidFill>
+                      <a:prstDash val="solid"/>
+                      <a:round/>
+                      <a:headEnd type="none" w="med" len="med"/>
+                      <a:tailEnd type="none" w="med" len="med"/>
+                    </a:lnL>
+                    <a:lnR w="9525" cap="flat" cmpd="sng" algn="ctr">
+                      <a:solidFill>
+                        <a:srgbClr val="333333"/>
+                      </a:solidFill>
+                      <a:prstDash val="solid"/>
+                      <a:round/>
+                      <a:headEnd type="none" w="med" len="med"/>
+                      <a:tailEnd type="none" w="med" len="med"/>
+                    </a:lnR>
+                    <a:lnT w="9525" cap="flat" cmpd="sng" algn="ctr">
+                      <a:solidFill>
+                        <a:srgbClr val="333333"/>
+                      </a:solidFill>
+                      <a:prstDash val="solid"/>
+                      <a:round/>
+                      <a:headEnd type="none" w="med" len="med"/>
+                      <a:tailEnd type="none" w="med" len="med"/>
+                    </a:lnT>
+                    <a:lnB w="9525" cap="flat" cmpd="sng" algn="ctr">
+                      <a:solidFill>
+                        <a:srgbClr val="333333"/>
+                      </a:solidFill>
+                      <a:prstDash val="solid"/>
+                      <a:round/>
+                      <a:headEnd type="none" w="med" len="med"/>
+                      <a:tailEnd type="none" w="med" len="med"/>
+                    </a:lnB>
+                  </a:tcPr>
+                </a:tc>
+                <a:tc>
+                  <a:txBody>
+                    <a:bodyPr/>
+                    <a:lstStyle/>
+                    <a:p>
+                      <a:pPr algn="l" indent="0" marL="0">
+                        <a:buNone/>
+                      </a:pPr>
+                      <a:r>
+                        <a:rPr lang="en-US" sz="1100" dirty="0">
+                          <a:solidFill>
+                            <a:srgbClr val="1A1A1A"/>
+                          </a:solidFill>
+                          <a:latin typeface="Times New Roman" pitchFamily="34" charset="0"/>
+                          <a:ea typeface="Times New Roman" pitchFamily="34" charset="-122"/>
+                          <a:cs typeface="Times New Roman" pitchFamily="34" charset="-120"/>
+                        </a:rPr>
+                        <a:t>Shows how much the score moves with the same settings</a:t>
+                      </a:r>
+                      <a:endParaRPr lang="en-US" sz="1100" dirty="0">
+                        <a:latin typeface="Times New Roman" charset="0"/>
+                        <a:ea typeface="Times New Roman" charset="0"/>
+                        <a:cs typeface="Times New Roman" charset="0"/>
+                      </a:endParaRPr>
+                    </a:p>
+                  </a:txBody>
+                  <a:tcPr marL="64008" marR="64008" marT="36576" marB="36576" anchor="t">
+                    <a:lnL w="9525" cap="flat" cmpd="sng" algn="ctr">
+                      <a:solidFill>
+                        <a:srgbClr val="333333"/>
+                      </a:solidFill>
+                      <a:prstDash val="solid"/>
+                      <a:round/>
+                      <a:headEnd type="none" w="med" len="med"/>
+                      <a:tailEnd type="none" w="med" len="med"/>
+                    </a:lnL>
+                    <a:lnR w="9525" cap="flat" cmpd="sng" algn="ctr">
+                      <a:solidFill>
+                        <a:srgbClr val="333333"/>
+                      </a:solidFill>
+                      <a:prstDash val="solid"/>
+                      <a:round/>
+                      <a:headEnd type="none" w="med" len="med"/>
+                      <a:tailEnd type="none" w="med" len="med"/>
+                    </a:lnR>
+                    <a:lnT w="9525" cap="flat" cmpd="sng" algn="ctr">
+                      <a:solidFill>
+                        <a:srgbClr val="333333"/>
+                      </a:solidFill>
+                      <a:prstDash val="solid"/>
+                      <a:round/>
+                      <a:headEnd type="none" w="med" len="med"/>
+                      <a:tailEnd type="none" w="med" len="med"/>
+                    </a:lnT>
+                    <a:lnB w="9525" cap="flat" cmpd="sng" algn="ctr">
+                      <a:solidFill>
+                        <a:srgbClr val="333333"/>
+                      </a:solidFill>
+                      <a:prstDash val="solid"/>
+                      <a:round/>
+                      <a:headEnd type="none" w="med" len="med"/>
+                      <a:tailEnd type="none" w="med" len="med"/>
+                    </a:lnB>
+                  </a:tcPr>
+                </a:tc>
+              </a:tr>
+              <a:tr h="0">
+                <a:tc>
+                  <a:txBody>
+                    <a:bodyPr/>
+                    <a:lstStyle/>
+                    <a:p>
+                      <a:pPr algn="l" indent="0" marL="0">
+                        <a:buNone/>
+                      </a:pPr>
+                      <a:r>
+                        <a:rPr lang="en-US" sz="1100" b="1" dirty="0">
+                          <a:solidFill>
+                            <a:srgbClr val="1A1A1A"/>
+                          </a:solidFill>
+                          <a:latin typeface="Times New Roman" pitchFamily="34" charset="0"/>
+                          <a:ea typeface="Times New Roman" pitchFamily="34" charset="-122"/>
+                          <a:cs typeface="Times New Roman" pitchFamily="34" charset="-120"/>
+                        </a:rPr>
+                        <a:t>Retrieval latency and context size at benchmark scale</a:t>
+                      </a:r>
+                      <a:endParaRPr lang="en-US" sz="1100" dirty="0">
+                        <a:latin typeface="Times New Roman" charset="0"/>
+                        <a:ea typeface="Times New Roman" charset="0"/>
+                        <a:cs typeface="Times New Roman" charset="0"/>
+                      </a:endParaRPr>
+                    </a:p>
+                  </a:txBody>
+                  <a:tcPr marL="64008" marR="64008" marT="36576" marB="36576" anchor="t">
+                    <a:lnL w="9525" cap="flat" cmpd="sng" algn="ctr">
+                      <a:solidFill>
+                        <a:srgbClr val="333333"/>
+                      </a:solidFill>
+                      <a:prstDash val="solid"/>
+                      <a:round/>
+                      <a:headEnd type="none" w="med" len="med"/>
+                      <a:tailEnd type="none" w="med" len="med"/>
+                    </a:lnL>
+                    <a:lnR w="9525" cap="flat" cmpd="sng" algn="ctr">
+                      <a:solidFill>
+                        <a:srgbClr val="333333"/>
+                      </a:solidFill>
+                      <a:prstDash val="solid"/>
+                      <a:round/>
+                      <a:headEnd type="none" w="med" len="med"/>
+                      <a:tailEnd type="none" w="med" len="med"/>
+                    </a:lnR>
+                    <a:lnT w="9525" cap="flat" cmpd="sng" algn="ctr">
+                      <a:solidFill>
+                        <a:srgbClr val="333333"/>
+                      </a:solidFill>
+                      <a:prstDash val="solid"/>
+                      <a:round/>
+                      <a:headEnd type="none" w="med" len="med"/>
+                      <a:tailEnd type="none" w="med" len="med"/>
+                    </a:lnT>
+                    <a:lnB w="9525" cap="flat" cmpd="sng" algn="ctr">
+                      <a:solidFill>
+                        <a:srgbClr val="333333"/>
+                      </a:solidFill>
+                      <a:prstDash val="solid"/>
+                      <a:round/>
+                      <a:headEnd type="none" w="med" len="med"/>
+                      <a:tailEnd type="none" w="med" len="med"/>
+                    </a:lnB>
+                  </a:tcPr>
+                </a:tc>
+                <a:tc>
+                  <a:txBody>
+                    <a:bodyPr/>
+                    <a:lstStyle/>
+                    <a:p>
+                      <a:pPr algn="l" indent="0" marL="0">
+                        <a:buNone/>
+                      </a:pPr>
+                      <a:r>
+                        <a:rPr lang="en-US" sz="1100" dirty="0">
+                          <a:solidFill>
+                            <a:srgbClr val="1A1A1A"/>
+                          </a:solidFill>
+                          <a:latin typeface="Times New Roman" pitchFamily="34" charset="0"/>
+                          <a:ea typeface="Times New Roman" pitchFamily="34" charset="-122"/>
+                          <a:cs typeface="Times New Roman" pitchFamily="34" charset="-120"/>
+                        </a:rPr>
+                        <a:t>p50 TBD ms, p95 TBD ms. Median context TBD tokens, p95 TBD tokens</a:t>
+                      </a:r>
+                      <a:endParaRPr lang="en-US" sz="1100" dirty="0">
+                        <a:latin typeface="Times New Roman" charset="0"/>
+                        <a:ea typeface="Times New Roman" charset="0"/>
+                        <a:cs typeface="Times New Roman" charset="0"/>
+                      </a:endParaRPr>
+                    </a:p>
+                  </a:txBody>
+                  <a:tcPr marL="64008" marR="64008" marT="36576" marB="36576" anchor="t">
+                    <a:lnL w="9525" cap="flat" cmpd="sng" algn="ctr">
+                      <a:solidFill>
+                        <a:srgbClr val="333333"/>
+                      </a:solidFill>
+                      <a:prstDash val="solid"/>
+                      <a:round/>
+                      <a:headEnd type="none" w="med" len="med"/>
+                      <a:tailEnd type="none" w="med" len="med"/>
+                    </a:lnL>
+                    <a:lnR w="9525" cap="flat" cmpd="sng" algn="ctr">
+                      <a:solidFill>
+                        <a:srgbClr val="333333"/>
+                      </a:solidFill>
+                      <a:prstDash val="solid"/>
+                      <a:round/>
+                      <a:headEnd type="none" w="med" len="med"/>
+                      <a:tailEnd type="none" w="med" len="med"/>
+                    </a:lnR>
+                    <a:lnT w="9525" cap="flat" cmpd="sng" algn="ctr">
+                      <a:solidFill>
+                        <a:srgbClr val="333333"/>
+                      </a:solidFill>
+                      <a:prstDash val="solid"/>
+                      <a:round/>
+                      <a:headEnd type="none" w="med" len="med"/>
+                      <a:tailEnd type="none" w="med" len="med"/>
+                    </a:lnT>
+                    <a:lnB w="9525" cap="flat" cmpd="sng" algn="ctr">
+                      <a:solidFill>
+                        <a:srgbClr val="333333"/>
+                      </a:solidFill>
+                      <a:prstDash val="solid"/>
+                      <a:round/>
+                      <a:headEnd type="none" w="med" len="med"/>
+                      <a:tailEnd type="none" w="med" len="med"/>
+                    </a:lnB>
+                  </a:tcPr>
+                </a:tc>
+                <a:tc>
+                  <a:txBody>
+                    <a:bodyPr/>
+                    <a:lstStyle/>
+                    <a:p>
+                      <a:pPr algn="l" indent="0" marL="0">
+                        <a:buNone/>
+                      </a:pPr>
+                      <a:r>
+                        <a:rPr lang="en-US" sz="1100" dirty="0">
+                          <a:solidFill>
+                            <a:srgbClr val="1A1A1A"/>
+                          </a:solidFill>
+                          <a:latin typeface="Times New Roman" pitchFamily="34" charset="0"/>
+                          <a:ea typeface="Times New Roman" pitchFamily="34" charset="-122"/>
+                          <a:cs typeface="Times New Roman" pitchFamily="34" charset="-120"/>
+                        </a:rPr>
+                        <a:t>Compare with slide 15: p95 72 ms and 1,942 tokens on a 323-fact namespace</a:t>
+                      </a:r>
+                      <a:endParaRPr lang="en-US" sz="1100" dirty="0">
+                        <a:latin typeface="Times New Roman" charset="0"/>
+                        <a:ea typeface="Times New Roman" charset="0"/>
+                        <a:cs typeface="Times New Roman" charset="0"/>
+                      </a:endParaRPr>
+                    </a:p>
+                  </a:txBody>
+                  <a:tcPr marL="64008" marR="64008" marT="36576" marB="36576" anchor="t">
+                    <a:lnL w="9525" cap="flat" cmpd="sng" algn="ctr">
+                      <a:solidFill>
+                        <a:srgbClr val="333333"/>
+                      </a:solidFill>
+                      <a:prstDash val="solid"/>
+                      <a:round/>
+                      <a:headEnd type="none" w="med" len="med"/>
+                      <a:tailEnd type="none" w="med" len="med"/>
+                    </a:lnL>
+                    <a:lnR w="9525" cap="flat" cmpd="sng" algn="ctr">
+                      <a:solidFill>
+                        <a:srgbClr val="333333"/>
+                      </a:solidFill>
+                      <a:prstDash val="solid"/>
+                      <a:round/>
+                      <a:headEnd type="none" w="med" len="med"/>
+                      <a:tailEnd type="none" w="med" len="med"/>
+                    </a:lnR>
+                    <a:lnT w="9525" cap="flat" cmpd="sng" algn="ctr">
+                      <a:solidFill>
+                        <a:srgbClr val="333333"/>
+                      </a:solidFill>
+                      <a:prstDash val="solid"/>
+                      <a:round/>
+                      <a:headEnd type="none" w="med" len="med"/>
+                      <a:tailEnd type="none" w="med" len="med"/>
+                    </a:lnT>
+                    <a:lnB w="9525" cap="flat" cmpd="sng" algn="ctr">
+                      <a:solidFill>
+                        <a:srgbClr val="333333"/>
+                      </a:solidFill>
+                      <a:prstDash val="solid"/>
+                      <a:round/>
+                      <a:headEnd type="none" w="med" len="med"/>
+                      <a:tailEnd type="none" w="med" len="med"/>
+                    </a:lnB>
+                  </a:tcPr>
+                </a:tc>
+              </a:tr>
+              <a:tr h="0">
+                <a:tc>
+                  <a:txBody>
+                    <a:bodyPr/>
+                    <a:lstStyle/>
+                    <a:p>
+                      <a:pPr algn="l" indent="0" marL="0">
+                        <a:buNone/>
+                      </a:pPr>
+                      <a:r>
+                        <a:rPr lang="en-US" sz="1100" b="1" dirty="0">
+                          <a:solidFill>
+                            <a:srgbClr val="1A1A1A"/>
+                          </a:solidFill>
+                          <a:latin typeface="Times New Roman" pitchFamily="34" charset="0"/>
+                          <a:ea typeface="Times New Roman" pitchFamily="34" charset="-122"/>
+                          <a:cs typeface="Times New Roman" pitchFamily="34" charset="-120"/>
+                        </a:rPr>
+                        <a:t>Scale check, about 10,000 graph nodes</a:t>
+                      </a:r>
+                      <a:endParaRPr lang="en-US" sz="1100" dirty="0">
+                        <a:latin typeface="Times New Roman" charset="0"/>
+                        <a:ea typeface="Times New Roman" charset="0"/>
+                        <a:cs typeface="Times New Roman" charset="0"/>
+                      </a:endParaRPr>
+                    </a:p>
+                  </a:txBody>
+                  <a:tcPr marL="64008" marR="64008" marT="36576" marB="36576" anchor="t">
+                    <a:lnL w="9525" cap="flat" cmpd="sng" algn="ctr">
+                      <a:solidFill>
+                        <a:srgbClr val="333333"/>
+                      </a:solidFill>
+                      <a:prstDash val="solid"/>
+                      <a:round/>
+                      <a:headEnd type="none" w="med" len="med"/>
+                      <a:tailEnd type="none" w="med" len="med"/>
+                    </a:lnL>
+                    <a:lnR w="9525" cap="flat" cmpd="sng" algn="ctr">
+                      <a:solidFill>
+                        <a:srgbClr val="333333"/>
+                      </a:solidFill>
+                      <a:prstDash val="solid"/>
+                      <a:round/>
+                      <a:headEnd type="none" w="med" len="med"/>
+                      <a:tailEnd type="none" w="med" len="med"/>
+                    </a:lnR>
+                    <a:lnT w="9525" cap="flat" cmpd="sng" algn="ctr">
+                      <a:solidFill>
+                        <a:srgbClr val="333333"/>
+                      </a:solidFill>
+                      <a:prstDash val="solid"/>
+                      <a:round/>
+                      <a:headEnd type="none" w="med" len="med"/>
+                      <a:tailEnd type="none" w="med" len="med"/>
+                    </a:lnT>
+                    <a:lnB w="9525" cap="flat" cmpd="sng" algn="ctr">
+                      <a:solidFill>
+                        <a:srgbClr val="333333"/>
+                      </a:solidFill>
+                      <a:prstDash val="solid"/>
+                      <a:round/>
+                      <a:headEnd type="none" w="med" len="med"/>
+                      <a:tailEnd type="none" w="med" len="med"/>
+                    </a:lnB>
+                  </a:tcPr>
+                </a:tc>
+                <a:tc>
+                  <a:txBody>
+                    <a:bodyPr/>
+                    <a:lstStyle/>
+                    <a:p>
+                      <a:pPr algn="l" indent="0" marL="0">
+                        <a:buNone/>
+                      </a:pPr>
+                      <a:r>
+                        <a:rPr lang="en-US" sz="1100" dirty="0">
+                          <a:solidFill>
+                            <a:srgbClr val="1A1A1A"/>
+                          </a:solidFill>
+                          <a:latin typeface="Times New Roman" pitchFamily="34" charset="0"/>
+                          <a:ea typeface="Times New Roman" pitchFamily="34" charset="-122"/>
+                          <a:cs typeface="Times New Roman" pitchFamily="34" charset="-120"/>
+                        </a:rPr>
+                        <a:t>Nodes TBD. Recall p95 TBD ms. Correct answers TBD of TBD. Graph page renders in TBD s</a:t>
+                      </a:r>
+                      <a:endParaRPr lang="en-US" sz="1100" dirty="0">
+                        <a:latin typeface="Times New Roman" charset="0"/>
+                        <a:ea typeface="Times New Roman" charset="0"/>
+                        <a:cs typeface="Times New Roman" charset="0"/>
+                      </a:endParaRPr>
+                    </a:p>
+                  </a:txBody>
+                  <a:tcPr marL="64008" marR="64008" marT="36576" marB="36576" anchor="t">
+                    <a:lnL w="9525" cap="flat" cmpd="sng" algn="ctr">
+                      <a:solidFill>
+                        <a:srgbClr val="333333"/>
+                      </a:solidFill>
+                      <a:prstDash val="solid"/>
+                      <a:round/>
+                      <a:headEnd type="none" w="med" len="med"/>
+                      <a:tailEnd type="none" w="med" len="med"/>
+                    </a:lnL>
+                    <a:lnR w="9525" cap="flat" cmpd="sng" algn="ctr">
+                      <a:solidFill>
+                        <a:srgbClr val="333333"/>
+                      </a:solidFill>
+                      <a:prstDash val="solid"/>
+                      <a:round/>
+                      <a:headEnd type="none" w="med" len="med"/>
+                      <a:tailEnd type="none" w="med" len="med"/>
+                    </a:lnR>
+                    <a:lnT w="9525" cap="flat" cmpd="sng" algn="ctr">
+                      <a:solidFill>
+                        <a:srgbClr val="333333"/>
+                      </a:solidFill>
+                      <a:prstDash val="solid"/>
+                      <a:round/>
+                      <a:headEnd type="none" w="med" len="med"/>
+                      <a:tailEnd type="none" w="med" len="med"/>
+                    </a:lnT>
+                    <a:lnB w="9525" cap="flat" cmpd="sng" algn="ctr">
+                      <a:solidFill>
+                        <a:srgbClr val="333333"/>
+                      </a:solidFill>
+                      <a:prstDash val="solid"/>
+                      <a:round/>
+                      <a:headEnd type="none" w="med" len="med"/>
+                      <a:tailEnd type="none" w="med" len="med"/>
+                    </a:lnB>
+                  </a:tcPr>
+                </a:tc>
+                <a:tc>
+                  <a:txBody>
+                    <a:bodyPr/>
+                    <a:lstStyle/>
+                    <a:p>
+                      <a:pPr algn="l" indent="0" marL="0">
+                        <a:buNone/>
+                      </a:pPr>
+                      <a:r>
+                        <a:rPr lang="en-US" sz="1100" dirty="0">
+                          <a:solidFill>
+                            <a:srgbClr val="1A1A1A"/>
+                          </a:solidFill>
+                          <a:latin typeface="Times New Roman" pitchFamily="34" charset="0"/>
+                          <a:ea typeface="Times New Roman" pitchFamily="34" charset="-122"/>
+                          <a:cs typeface="Times New Roman" pitchFamily="34" charset="-120"/>
+                        </a:rPr>
+                        <a:t>Machine, model and embedding settings written next to the number</a:t>
+                      </a:r>
+                      <a:endParaRPr lang="en-US" sz="1100" dirty="0">
+                        <a:latin typeface="Times New Roman" charset="0"/>
+                        <a:ea typeface="Times New Roman" charset="0"/>
+                        <a:cs typeface="Times New Roman" charset="0"/>
+                      </a:endParaRPr>
+                    </a:p>
+                  </a:txBody>
+                  <a:tcPr marL="64008" marR="64008" marT="36576" marB="36576" anchor="t">
+                    <a:lnL w="9525" cap="flat" cmpd="sng" algn="ctr">
+                      <a:solidFill>
+                        <a:srgbClr val="333333"/>
+                      </a:solidFill>
+                      <a:prstDash val="solid"/>
+                      <a:round/>
+                      <a:headEnd type="none" w="med" len="med"/>
+                      <a:tailEnd type="none" w="med" len="med"/>
+                    </a:lnL>
+                    <a:lnR w="9525" cap="flat" cmpd="sng" algn="ctr">
+                      <a:solidFill>
+                        <a:srgbClr val="333333"/>
+                      </a:solidFill>
+                      <a:prstDash val="solid"/>
+                      <a:round/>
+                      <a:headEnd type="none" w="med" len="med"/>
+                      <a:tailEnd type="none" w="med" len="med"/>
+                    </a:lnR>
+                    <a:lnT w="9525" cap="flat" cmpd="sng" algn="ctr">
+                      <a:solidFill>
+                        <a:srgbClr val="333333"/>
+                      </a:solidFill>
+                      <a:prstDash val="solid"/>
+                      <a:round/>
+                      <a:headEnd type="none" w="med" len="med"/>
+                      <a:tailEnd type="none" w="med" len="med"/>
+                    </a:lnT>
+                    <a:lnB w="9525" cap="flat" cmpd="sng" algn="ctr">
+                      <a:solidFill>
+                        <a:srgbClr val="333333"/>
+                      </a:solidFill>
+                      <a:prstDash val="solid"/>
+                      <a:round/>
+                      <a:headEnd type="none" w="med" len="med"/>
+                      <a:tailEnd type="none" w="med" len="med"/>
+                    </a:lnB>
+                  </a:tcPr>
+                </a:tc>
+              </a:tr>
+            </a:tbl>
+          </a:graphicData>
+        </a:graphic>
+      </p:graphicFrame>
+      <p:sp>
+        <p:nvSpPr>
+          <p:cNvPr id="4" name="Slide Number Placeholder 0"/>
+          <p:cNvSpPr>
+            <a:spLocks noGrp="1"/>
+          </p:cNvSpPr>
+          <p:nvPr>
+            <p:ph type="sldNum" sz="quarter" idx="4294967295"/>
+          </p:nvPr>
+        </p:nvSpPr>
+        <p:spPr>
+          <a:xfrm>
+            <a:off x="10865815" y="384048"/>
+            <a:ext cx="731520" cy="457200"/>
+          </a:xfrm>
+          <a:prstGeom prst="rect">
+            <a:avLst/>
+          </a:prstGeom>
+          <a:extLst>
+            <a:ext uri="{C572A759-6A51-4108-AA02-DFA0A04FC94B}">
+              <ma14:wrappingTextBoxFlag xmlns:ma14="http://schemas.microsoft.com/office/mac/drawingml/2011/main" val="0"/>
+            </a:ext>
+          </a:extLst>
+        </p:spPr>
+        <p:txBody>
+          <a:bodyPr/>
+          <a:lstStyle>
+            <a:lvl1pPr>
+              <a:defRPr sz="1600">
+                <a:solidFill>
+                  <a:srgbClr val="000000"/>
+                </a:solidFill>
+                <a:latin typeface="Times New Roman"/>
+                <a:ea typeface="Times New Roman"/>
+                <a:cs typeface="Times New Roman"/>
+              </a:defRPr>
+            </a:lvl1pPr>
+          </a:lstStyle>
+          <a:p>
+            <a:pPr algn="r"/>
+            <a:fld id="{F7021451-1387-4CA6-816F-3879F97B5CBC}" type="slidenum">
+              <a:rPr b="0" lang="en-US"/>
+              <a:t>16</a:t>
+            </a:fld>
+            <a:endParaRPr lang="en-US"/>
+          </a:p>
+        </p:txBody>
+      </p:sp>
+    </p:spTree>
+  </p:cSld>
+  <p:clrMapOvr>
+    <a:masterClrMapping/>
+  </p:clrMapOvr>
+</p:sld>
+</file>
+
+<file path=ppt/slides/slide17.xml><?xml version="1.0" encoding="utf-8"?>
 <p:sld xmlns:a="http://schemas.openxmlformats.org/drawingml/2006/main" xmlns:r="http://schemas.openxmlformats.org/officeDocument/2006/relationships" xmlns:p="http://schemas.openxmlformats.org/presentationml/2006/main">
   <p:cSld name="Slide 15">
     <p:spTree>
@@ -12810,7 +16931,7 @@
                           <a:ea typeface="Times New Roman" pitchFamily="34" charset="-122"/>
                           <a:cs typeface="Times New Roman" pitchFamily="34" charset="-120"/>
                         </a:rPr>
-                        <a:t>Extraction quality of the Pi worker is unmeasured</a:t>
+                        <a:t>Extraction quality at scale is unmeasured</a:t>
                       </a:r>
                       <a:endParaRPr lang="en-US" sz="1200" dirty="0">
                         <a:latin typeface="Times New Roman" charset="0"/>
@@ -13399,7 +17520,7 @@
                           <a:ea typeface="Times New Roman" pitchFamily="34" charset="-122"/>
                           <a:cs typeface="Times New Roman" pitchFamily="34" charset="-120"/>
                         </a:rPr>
-                        <a:t>src/v2.rs, graph.rs, tests/evidence_graph.rs; latency on slide 14</a:t>
+                        <a:t>src/v2.rs, graph.rs, tests/evidence_graph.rs; latency on slide 15</a:t>
                       </a:r>
                       <a:endParaRPr lang="en-US" sz="1200" dirty="0">
                         <a:latin typeface="Times New Roman" charset="0"/>
@@ -14250,7 +18371,7 @@
                           <a:ea typeface="Times New Roman" pitchFamily="34" charset="-122"/>
                           <a:cs typeface="Times New Roman" pitchFamily="34" charset="-120"/>
                         </a:rPr>
-                        <a:t>Student extractor, offline</a:t>
+                        <a:t>Fine-tuned worker (mem-extractor)</a:t>
                       </a:r>
                       <a:endParaRPr lang="en-US" sz="1200" dirty="0">
                         <a:latin typeface="Times New Roman" charset="0"/>
@@ -14315,7 +18436,7 @@
                           <a:ea typeface="Times New Roman" pitchFamily="34" charset="-122"/>
                           <a:cs typeface="Times New Roman" pitchFamily="34" charset="-120"/>
                         </a:rPr>
-                        <a:t>QLoRA of Qwen3-1.7B on 642 windows; 136 held-out windows scored</a:t>
+                        <a:t>QLoRA of Qwen3-4B on 2,095 rows; Q8_0 GGUF served by Ollama</a:t>
                       </a:r>
                       <a:endParaRPr lang="en-US" sz="1200" dirty="0">
                         <a:latin typeface="Times New Roman" charset="0"/>
@@ -14380,7 +18501,7 @@
                           <a:ea typeface="Times New Roman" pitchFamily="34" charset="-122"/>
                           <a:cs typeface="Times New Roman" pitchFamily="34" charset="-120"/>
                         </a:rPr>
-                        <a:t>slm-distill/, scores recomputed 2026-10-06</a:t>
+                        <a:t>slm-distill/, release receipt</a:t>
                       </a:r>
                       <a:endParaRPr lang="en-US" sz="1200" dirty="0">
                         <a:latin typeface="Times New Roman" charset="0"/>
@@ -14445,7 +18566,7 @@
                           <a:ea typeface="Times New Roman" pitchFamily="34" charset="-122"/>
                           <a:cs typeface="Times New Roman" pitchFamily="34" charset="-120"/>
                         </a:rPr>
-                        <a:t>Not wired in: merge the LoRA, convert to GGUF, ollama create, decide the schema, retest latency. Serving: Planned</a:t>
+                        <a:t>Coverage fell, relative dates weak. Live check and benchmark run: In progress</a:t>
                       </a:r>
                       <a:endParaRPr lang="en-US" sz="1200" dirty="0">
                         <a:latin typeface="Times New Roman" charset="0"/>
@@ -14932,7 +19053,7 @@
             <a:pPr algn="r"/>
             <a:fld id="{F7021451-1387-4CA6-816F-3879F97B5CBC}" type="slidenum">
               <a:rPr b="0" lang="en-US"/>
-              <a:t>15</a:t>
+              <a:t>17</a:t>
             </a:fld>
             <a:endParaRPr lang="en-US"/>
           </a:p>
@@ -14946,7 +19067,7 @@
 </p:sld>
 </file>
 
-<file path=ppt/slides/slide16.xml><?xml version="1.0" encoding="utf-8"?>
+<file path=ppt/slides/slide18.xml><?xml version="1.0" encoding="utf-8"?>
 <p:sld xmlns:a="http://schemas.openxmlformats.org/drawingml/2006/main" xmlns:r="http://schemas.openxmlformats.org/officeDocument/2006/relationships" xmlns:p="http://schemas.openxmlformats.org/presentationml/2006/main">
   <p:cSld name="Slide 16">
     <p:spTree>
@@ -15013,7 +19134,7 @@
         <p:spPr>
           <a:xfrm>
             <a:off x="594360" y="1216152"/>
-            <a:ext cx="5341468" cy="5138928"/>
+            <a:ext cx="5341468" cy="5238928"/>
           </a:xfrm>
           <a:prstGeom prst="rect">
             <a:avLst/>
@@ -15195,7 +19316,7 @@
         <p:spPr>
           <a:xfrm>
             <a:off x="6255868" y="1216152"/>
-            <a:ext cx="5341468" cy="5138928"/>
+            <a:ext cx="5341468" cy="5238928"/>
           </a:xfrm>
           <a:prstGeom prst="rect">
             <a:avLst/>
@@ -15390,7 +19511,7 @@
             <a:pPr algn="r"/>
             <a:fld id="{F7021451-1387-4CA6-816F-3879F97B5CBC}" type="slidenum">
               <a:rPr b="0" lang="en-US"/>
-              <a:t>16</a:t>
+              <a:t>18</a:t>
             </a:fld>
             <a:endParaRPr lang="en-US"/>
           </a:p>
@@ -19112,7 +23233,7 @@
                 <a:ea typeface="Times New Roman" pitchFamily="34" charset="-122"/>
                 <a:cs typeface="Times New Roman" pitchFamily="34" charset="-120"/>
               </a:rPr>
-              <a:t>We put a small distilled model on the serving path, and it was trained on a format we no longer use.</a:t>
+              <a:t>Our first small distilled model was trained on the old memory format, so we retrained it for the fact format the graph uses.</a:t>
             </a:r>
             <a:endParaRPr lang="en-US" sz="1300" dirty="0"/>
           </a:p>
@@ -20642,7 +24763,7 @@
                           <a:ea typeface="Times New Roman" pitchFamily="34" charset="-122"/>
                           <a:cs typeface="Times New Roman" pitchFamily="34" charset="-120"/>
                         </a:rPr>
-                        <a:t>Relaxed F1 0.398 for the student and 0.000 for the base model on 136 held-out windows, agreement with the teacher labels. Student p50 latency 6,115 ms against 2,868 ms, so the latency target is not met.</a:t>
+                        <a:t>Retrained as Qwen3-4B and served by Ollama as the worker. Internal test: consolidation 1 of 16 to 13 of 16, reflection 10 of 16 to 15 of 16, but extraction coverage fell from 50 of 55 to 41 of 55. The 0.398 F1 was for the old 1.7B model.</a:t>
                       </a:r>
                       <a:endParaRPr lang="en-US" sz="1250" dirty="0">
                         <a:latin typeface="Times New Roman" charset="0"/>
@@ -23156,7 +27277,7 @@
                           <a:ea typeface="Times New Roman" pitchFamily="34" charset="-122"/>
                           <a:cs typeface="Times New Roman" pitchFamily="34" charset="-120"/>
                         </a:rPr>
-                        <a:t>Pi-hosted worker. Optional local Qwen2.5-14B in Ollama, valid on 2 of 10 batches. The student is an offline pipeline, not wired in.</a:t>
+                        <a:t>Fine-tuned Qwen3-4B worker (mem-extractor) served by Ollama, with exact-quote checks and two repairs. Pi is only the coding agent.</a:t>
                       </a:r>
                       <a:endParaRPr lang="en-US" sz="1250" dirty="0">
                         <a:latin typeface="Times New Roman" charset="0"/>
@@ -24141,7 +28262,7 @@
                           <a:ea typeface="Times New Roman" pitchFamily="34" charset="-122"/>
                           <a:cs typeface="Times New Roman" pitchFamily="34" charset="-120"/>
                         </a:rPr>
-                        <a:t>Rust 83, Python 5 and TypeScript 9, all passing (slide 14)</a:t>
+                        <a:t>Rust 83, Python 5 and TypeScript 9, all passing (slide 15)</a:t>
                       </a:r>
                       <a:endParaRPr lang="en-US" sz="1250" dirty="0">
                         <a:latin typeface="Times New Roman" charset="0"/>
@@ -24498,7 +28619,7 @@
                 <a:ea typeface="Times New Roman" pitchFamily="34" charset="-122"/>
                 <a:cs typeface="Times New Roman" pitchFamily="34" charset="-120"/>
               </a:rPr>
-              <a:t>First Review: a distilled student does the extraction. Now: a hosted model through Pi, and the student is not wired in.</a:t>
+              <a:t>First Review: the student is Qwen3-1.7B. Now: it is Qwen3-4B, retrained on the fact format and wired in as the worker.</a:t>
             </a:r>
             <a:endParaRPr lang="en-US" sz="1500" dirty="0"/>
           </a:p>
@@ -24519,7 +28640,7 @@
                 <a:ea typeface="Times New Roman" pitchFamily="34" charset="-122"/>
                 <a:cs typeface="Times New Roman" pitchFamily="34" charset="-120"/>
               </a:rPr>
-              <a:t>First Review: no memory data leaves the machine. Now: on the default path, event text goes to a hosted model.</a:t>
+              <a:t>First Review: no memory data leaves the machine. Now: extraction runs locally, but Pi sends the coding chat to its own hosted model.</a:t>
             </a:r>
             <a:endParaRPr lang="en-US" sz="1500" dirty="0"/>
           </a:p>
@@ -24764,8 +28885,8 @@
         </p:nvSpPr>
         <p:spPr>
           <a:xfrm>
-            <a:off x="594360" y="1225296"/>
-            <a:ext cx="2331720" cy="530352"/>
+            <a:off x="2148840" y="1225296"/>
+            <a:ext cx="1325880" cy="530352"/>
           </a:xfrm>
           <a:prstGeom prst="rect">
             <a:avLst/>
@@ -24816,7 +28937,73 @@
                 <a:ea typeface="Times New Roman" pitchFamily="34" charset="-122"/>
                 <a:cs typeface="Times New Roman" pitchFamily="34" charset="-120"/>
               </a:rPr>
-              <a:t>coding agent, memory extension</a:t>
+              <a:t>memory extension</a:t>
+            </a:r>
+            <a:endParaRPr lang="en-US" sz="1300" dirty="0"/>
+          </a:p>
+        </p:txBody>
+      </p:sp>
+      <p:sp>
+        <p:nvSpPr>
+          <p:cNvPr id="93" name="Coding sessions box"/>
+          <p:cNvSpPr/>
+          <p:nvPr/>
+        </p:nvSpPr>
+        <p:spPr>
+          <a:xfrm>
+            <a:off x="594360" y="1225296"/>
+            <a:ext cx="1371600" cy="530352"/>
+          </a:xfrm>
+          <a:prstGeom prst="rect">
+            <a:avLst/>
+          </a:prstGeom>
+          <a:solidFill>
+            <a:srgbClr val="F2F2F2"/>
+          </a:solidFill>
+          <a:ln w="9525">
+            <a:solidFill>
+              <a:srgbClr val="808080"/>
+            </a:solidFill>
+            <a:prstDash val="solid"/>
+          </a:ln>
+        </p:spPr>
+        <p:txBody>
+          <a:bodyPr wrap="square" lIns="63500" tIns="88900" rIns="88900" bIns="63500" rtlCol="0" anchor="t"/>
+          <a:lstStyle/>
+          <a:p>
+            <a:pPr algn="l" indent="0" marL="0">
+              <a:spcAft>
+                <a:spcPts val="300"/>
+              </a:spcAft>
+              <a:buNone/>
+            </a:pPr>
+            <a:r>
+              <a:rPr lang="en-US" sz="1300" b="1" dirty="0">
+                <a:solidFill>
+                  <a:srgbClr val="1A1A1A"/>
+                </a:solidFill>
+                <a:latin typeface="Times New Roman" pitchFamily="34" charset="0"/>
+                <a:ea typeface="Times New Roman" pitchFamily="34" charset="-122"/>
+                <a:cs typeface="Times New Roman" pitchFamily="34" charset="-120"/>
+              </a:rPr>
+              <a:t>Coding sessions</a:t>
+            </a:r>
+            <a:endParaRPr lang="en-US" sz="1300" dirty="0"/>
+          </a:p>
+          <a:p>
+            <a:pPr algn="l" indent="0" marL="0">
+              <a:buNone/>
+            </a:pPr>
+            <a:r>
+              <a:rPr lang="en-US" sz="1200" dirty="0">
+                <a:solidFill>
+                  <a:srgbClr val="1A1A1A"/>
+                </a:solidFill>
+                <a:latin typeface="Times New Roman" pitchFamily="34" charset="0"/>
+                <a:ea typeface="Times New Roman" pitchFamily="34" charset="-122"/>
+                <a:cs typeface="Times New Roman" pitchFamily="34" charset="-120"/>
+              </a:rPr>
+              <a:t>prompts, output</a:t>
             </a:r>
             <a:endParaRPr lang="en-US" sz="1300" dirty="0"/>
           </a:p>
@@ -24830,8 +29017,8 @@
         </p:nvSpPr>
         <p:spPr>
           <a:xfrm>
-            <a:off x="3200400" y="1225296"/>
-            <a:ext cx="1920240" cy="530352"/>
+            <a:off x="3566160" y="1225296"/>
+            <a:ext cx="1554480" cy="530352"/>
           </a:xfrm>
           <a:prstGeom prst="rect">
             <a:avLst/>
@@ -25176,6 +29363,10 @@
             <a:prstDash val="solid"/>
           </a:ln>
         </p:spPr>
+        <p:txBody>
+          <a:bodyPr/>
+          <a:p/>
+        </p:txBody>
       </p:sp>
       <p:sp>
         <p:nvSpPr>
@@ -25240,6 +29431,10 @@
             <a:prstDash val="solid"/>
           </a:ln>
         </p:spPr>
+        <p:txBody>
+          <a:bodyPr/>
+          <a:p/>
+        </p:txBody>
       </p:sp>
       <p:sp>
         <p:nvSpPr>
@@ -25731,6 +29926,10 @@
             <a:prstDash val="solid"/>
           </a:ln>
         </p:spPr>
+        <p:txBody>
+          <a:bodyPr/>
+          <a:p/>
+        </p:txBody>
       </p:sp>
       <p:sp>
         <p:nvSpPr>
@@ -25814,7 +30013,7 @@
                 <a:ea typeface="Times New Roman" pitchFamily="34" charset="-122"/>
                 <a:cs typeface="Times New Roman" pitchFamily="34" charset="-120"/>
               </a:rPr>
-              <a:t>Pi worker, hosted</a:t>
+              <a:t>Pi, hosted model</a:t>
             </a:r>
             <a:endParaRPr lang="en-US" sz="1300" dirty="0"/>
           </a:p>
@@ -25831,7 +30030,7 @@
                 <a:ea typeface="Times New Roman" pitchFamily="34" charset="-122"/>
                 <a:cs typeface="Times New Roman" pitchFamily="34" charset="-120"/>
               </a:rPr>
-              <a:t>default extractor</a:t>
+              <a:t>coding agent only</a:t>
             </a:r>
             <a:endParaRPr lang="en-US" sz="1300" dirty="0"/>
           </a:p>
@@ -25897,7 +30096,7 @@
                 <a:ea typeface="Times New Roman" pitchFamily="34" charset="-122"/>
                 <a:cs typeface="Times New Roman" pitchFamily="34" charset="-120"/>
               </a:rPr>
-              <a:t>embedder, extractor</a:t>
+              <a:t>embedder, worker</a:t>
             </a:r>
             <a:endParaRPr lang="en-US" sz="1300" dirty="0"/>
           </a:p>
@@ -25984,13 +30183,13 @@
             <a:avLst/>
           </a:prstGeom>
           <a:solidFill>
-            <a:srgbClr val="FAFAFA"/>
+            <a:srgbClr val="FFFFFF"/>
           </a:solidFill>
           <a:ln w="12700">
             <a:solidFill>
-              <a:srgbClr val="595959"/>
+              <a:srgbClr val="333333"/>
             </a:solidFill>
-            <a:prstDash val="sysDot"/>
+            <a:prstDash val="solid"/>
           </a:ln>
         </p:spPr>
         <p:txBody>
@@ -26006,13 +30205,13 @@
             <a:r>
               <a:rPr lang="en-US" sz="1300" b="1" dirty="0">
                 <a:solidFill>
-                  <a:srgbClr val="595959"/>
-                </a:solidFill>
-                <a:latin typeface="Times New Roman" pitchFamily="34" charset="0"/>
-                <a:ea typeface="Times New Roman" pitchFamily="34" charset="-122"/>
-                <a:cs typeface="Times New Roman" pitchFamily="34" charset="-120"/>
-              </a:rPr>
-              <a:t>Student SLM</a:t>
+                  <a:srgbClr val="1A1A1A"/>
+                </a:solidFill>
+                <a:latin typeface="Times New Roman" pitchFamily="34" charset="0"/>
+                <a:ea typeface="Times New Roman" pitchFamily="34" charset="-122"/>
+                <a:cs typeface="Times New Roman" pitchFamily="34" charset="-120"/>
+              </a:rPr>
+              <a:t>mem-extractor</a:t>
             </a:r>
             <a:endParaRPr lang="en-US" sz="1300" dirty="0"/>
           </a:p>
@@ -26021,15 +30220,15 @@
               <a:buNone/>
             </a:pPr>
             <a:r>
-              <a:rPr lang="en-US" sz="1100" i="1" dirty="0">
-                <a:solidFill>
-                  <a:srgbClr val="595959"/>
-                </a:solidFill>
-                <a:latin typeface="Times New Roman" pitchFamily="34" charset="0"/>
-                <a:ea typeface="Times New Roman" pitchFamily="34" charset="-122"/>
-                <a:cs typeface="Times New Roman" pitchFamily="34" charset="-120"/>
-              </a:rPr>
-              <a:t>local, Planned</a:t>
+              <a:rPr lang="en-US" sz="1200" dirty="0">
+                <a:solidFill>
+                  <a:srgbClr val="1A1A1A"/>
+                </a:solidFill>
+                <a:latin typeface="Times New Roman" pitchFamily="34" charset="0"/>
+                <a:ea typeface="Times New Roman" pitchFamily="34" charset="-122"/>
+                <a:cs typeface="Times New Roman" pitchFamily="34" charset="-120"/>
+              </a:rPr>
+              <a:t>local, the worker</a:t>
             </a:r>
             <a:endParaRPr lang="en-US" sz="1300" dirty="0"/>
           </a:p>
@@ -26061,6 +30260,10 @@
             <a:prstDash val="solid"/>
           </a:ln>
         </p:spPr>
+        <p:txBody>
+          <a:bodyPr/>
+          <a:p/>
+        </p:txBody>
       </p:sp>
       <p:sp>
         <p:nvSpPr>
@@ -26371,7 +30574,7 @@
                 <a:ea typeface="Times New Roman" pitchFamily="34" charset="-122"/>
                 <a:cs typeface="Times New Roman" pitchFamily="34" charset="-120"/>
               </a:rPr>
-              <a:t>Qwen3-1.7B, 4-bit NF4</a:t>
+              <a:t>Qwen3-4B, 4-bit NF4</a:t>
             </a:r>
             <a:endParaRPr lang="en-US" sz="1300" dirty="0"/>
           </a:p>
@@ -26420,7 +30623,7 @@
                 <a:ea typeface="Times New Roman" pitchFamily="34" charset="-122"/>
                 <a:cs typeface="Times New Roman" pitchFamily="34" charset="-120"/>
               </a:rPr>
-              <a:t>Adapter artifact</a:t>
+              <a:t>Model artifact</a:t>
             </a:r>
             <a:endParaRPr lang="en-US" sz="1300" dirty="0"/>
           </a:p>
@@ -26437,7 +30640,7 @@
                 <a:ea typeface="Times New Roman" pitchFamily="34" charset="-122"/>
                 <a:cs typeface="Times New Roman" pitchFamily="34" charset="-120"/>
               </a:rPr>
-              <a:t>LoRA weights, not in Git</a:t>
+              <a:t>GGUF on Hugging Face</a:t>
             </a:r>
             <a:endParaRPr lang="en-US" sz="1300" dirty="0"/>
           </a:p>
@@ -26451,7 +30654,7 @@
         </p:nvCxnSpPr>
         <p:spPr>
           <a:xfrm>
-            <a:off x="960120" y="1755648"/>
+            <a:off x="2423160" y="1755648"/>
             <a:ext cx="0" cy="274320"/>
           </a:xfrm>
           <a:prstGeom prst="straightConnector1">
@@ -26475,8 +30678,8 @@
         </p:nvSpPr>
         <p:spPr>
           <a:xfrm>
-            <a:off x="1033272" y="1783080"/>
-            <a:ext cx="1097280" cy="219456"/>
+            <a:off x="2496312" y="1783080"/>
+            <a:ext cx="548640" cy="219456"/>
           </a:xfrm>
           <a:prstGeom prst="rect">
             <a:avLst/>
@@ -26500,7 +30703,7 @@
                 <a:ea typeface="Times New Roman" pitchFamily="34" charset="-122"/>
                 <a:cs typeface="Times New Roman" pitchFamily="34" charset="-120"/>
               </a:rPr>
-              <a:t>events, queries</a:t>
+              <a:t>events</a:t>
             </a:r>
             <a:endParaRPr lang="en-US" sz="1100" dirty="0"/>
           </a:p>
@@ -26514,7 +30717,7 @@
         </p:nvCxnSpPr>
         <p:spPr>
           <a:xfrm flipV="1">
-            <a:off x="2606040" y="1755648"/>
+            <a:off x="3246120" y="1755648"/>
             <a:ext cx="0" cy="274320"/>
           </a:xfrm>
           <a:prstGeom prst="straightConnector1">
@@ -26538,7 +30741,7 @@
         </p:nvSpPr>
         <p:spPr>
           <a:xfrm>
-            <a:off x="2679192" y="1783080"/>
+            <a:off x="3319272" y="1783080"/>
             <a:ext cx="594360" cy="219456"/>
           </a:xfrm>
           <a:prstGeom prst="rect">
@@ -26577,7 +30780,7 @@
         </p:nvCxnSpPr>
         <p:spPr>
           <a:xfrm>
-            <a:off x="3657600" y="1755648"/>
+            <a:off x="4023360" y="1755648"/>
             <a:ext cx="0" cy="274320"/>
           </a:xfrm>
           <a:prstGeom prst="straightConnector1">
@@ -26601,7 +30804,7 @@
         </p:nvSpPr>
         <p:spPr>
           <a:xfrm>
-            <a:off x="3730752" y="1783080"/>
+            <a:off x="4096512" y="1783080"/>
             <a:ext cx="1234440" cy="219456"/>
           </a:xfrm>
           <a:prstGeom prst="rect">
@@ -26722,6 +30925,33 @@
           </a:ln>
         </p:spPr>
       </p:cxnSp>
+      <p:cxnSp>
+        <p:nvCxnSpPr>
+          <p:cNvPr id="94" name="Sessions arrow"/>
+          <p:cNvCxnSpPr>
+            <a:stCxn id="11" idx="1"/>
+            <a:endCxn id="10" idx="3"/>
+          </p:cNvCxnSpPr>
+          <p:nvPr/>
+        </p:nvCxnSpPr>
+        <p:spPr>
+          <a:xfrm flipH="1">
+            <a:off x="1965960" y="1490472"/>
+            <a:ext cx="182880" cy="0"/>
+          </a:xfrm>
+          <a:prstGeom prst="straightConnector1">
+            <a:avLst/>
+          </a:prstGeom>
+          <a:noFill/>
+          <a:ln w="15875">
+            <a:solidFill>
+              <a:srgbClr val="333333"/>
+            </a:solidFill>
+            <a:prstDash val="solid"/>
+            <a:tailEnd type="triangle"/>
+          </a:ln>
+        </p:spPr>
+      </p:cxnSp>
       <p:sp>
         <p:nvSpPr>
           <p:cNvPr id="46" name="Text 44"/>
@@ -27710,7 +31940,7 @@
                 <a:ea typeface="Times New Roman" pitchFamily="34" charset="-122"/>
                 <a:cs typeface="Times New Roman" pitchFamily="34" charset="-120"/>
               </a:rPr>
-              <a:t>LoRA weights</a:t>
+              <a:t>GGUF</a:t>
             </a:r>
             <a:endParaRPr lang="en-US" sz="1100" dirty="0"/>
           </a:p>
@@ -27773,7 +32003,7 @@
                 <a:ea typeface="Times New Roman" pitchFamily="34" charset="-122"/>
                 <a:cs typeface="Times New Roman" pitchFamily="34" charset="-120"/>
               </a:rPr>
-              <a:t>adapter</a:t>
+              <a:t>model</a:t>
             </a:r>
             <a:endParaRPr lang="en-US" sz="1100" dirty="0"/>
           </a:p>
@@ -27803,6 +32033,10 @@
             <a:prstDash val="solid"/>
           </a:ln>
         </p:spPr>
+        <p:txBody>
+          <a:bodyPr/>
+          <a:p/>
+        </p:txBody>
       </p:sp>
       <p:sp>
         <p:nvSpPr>
@@ -27867,6 +32101,10 @@
             <a:prstDash val="dashDot"/>
           </a:ln>
         </p:spPr>
+        <p:txBody>
+          <a:bodyPr/>
+          <a:p/>
+        </p:txBody>
       </p:sp>
       <p:sp>
         <p:nvSpPr>
@@ -27931,6 +32169,10 @@
             <a:prstDash val="sysDot"/>
           </a:ln>
         </p:spPr>
+        <p:txBody>
+          <a:bodyPr/>
+          <a:p/>
+        </p:txBody>
       </p:sp>
       <p:sp>
         <p:nvSpPr>
@@ -27995,6 +32237,10 @@
             <a:prstDash val="solid"/>
           </a:ln>
         </p:spPr>
+        <p:txBody>
+          <a:bodyPr/>
+          <a:p/>
+        </p:txBody>
       </p:sp>
       <p:sp>
         <p:nvSpPr>
@@ -28059,6 +32305,10 @@
             <a:prstDash val="solid"/>
           </a:ln>
         </p:spPr>
+        <p:txBody>
+          <a:bodyPr/>
+          <a:p/>
+        </p:txBody>
       </p:sp>
       <p:sp>
         <p:nvSpPr>
@@ -28300,6 +32550,10 @@
             <a:prstDash val="solid"/>
           </a:ln>
         </p:spPr>
+        <p:txBody>
+          <a:bodyPr/>
+          <a:p/>
+        </p:txBody>
       </p:sp>
       <p:sp>
         <p:nvSpPr>
@@ -28792,7 +33046,7 @@
                 <a:ea typeface="Times New Roman" pitchFamily="34" charset="-122"/>
                 <a:cs typeface="Times New Roman" pitchFamily="34" charset="-120"/>
               </a:rPr>
-              <a:t>Pi worker, hosted, or</a:t>
+              <a:t>mem-extractor, Ollama,</a:t>
             </a:r>
             <a:endParaRPr lang="en-US" sz="1300" dirty="0"/>
           </a:p>
@@ -28809,7 +33063,7 @@
                 <a:ea typeface="Times New Roman" pitchFamily="34" charset="-122"/>
                 <a:cs typeface="Times New Roman" pitchFamily="34" charset="-120"/>
               </a:rPr>
-              <a:t>Ollama, local</a:t>
+              <a:t>local</a:t>
             </a:r>
             <a:endParaRPr lang="en-US" sz="1300" dirty="0"/>
           </a:p>
@@ -28975,7 +33229,7 @@
                 <a:ea typeface="Times New Roman" pitchFamily="34" charset="-122"/>
                 <a:cs typeface="Times New Roman" pitchFamily="34" charset="-120"/>
               </a:rPr>
-              <a:t>queues the Neo4j project job</a:t>
+              <a:t>queues the Neo4j job</a:t>
             </a:r>
             <a:endParaRPr lang="en-US" sz="1300" dirty="0"/>
           </a:p>
@@ -29636,6 +33890,10 @@
             <a:prstDash val="solid"/>
           </a:ln>
         </p:spPr>
+        <p:txBody>
+          <a:bodyPr/>
+          <a:p/>
+        </p:txBody>
       </p:sp>
       <p:sp>
         <p:nvSpPr>
@@ -30786,6 +35044,10 @@
             <a:prstDash val="solid"/>
           </a:ln>
         </p:spPr>
+        <p:txBody>
+          <a:bodyPr/>
+          <a:p/>
+        </p:txBody>
       </p:sp>
       <p:sp>
         <p:nvSpPr>
@@ -30850,6 +35112,10 @@
             <a:prstDash val="solid"/>
           </a:ln>
         </p:spPr>
+        <p:txBody>
+          <a:bodyPr/>
+          <a:p/>
+        </p:txBody>
       </p:sp>
       <p:sp>
         <p:nvSpPr>
@@ -30914,6 +35180,10 @@
             <a:prstDash val="solid"/>
           </a:ln>
         </p:spPr>
+        <p:txBody>
+          <a:bodyPr/>
+          <a:p/>
+        </p:txBody>
       </p:sp>
       <p:sp>
         <p:nvSpPr>
@@ -31075,7 +35345,7 @@
 
 <file path=ppt/slides/slide9.xml><?xml version="1.0" encoding="utf-8"?>
 <p:sld xmlns:a="http://schemas.openxmlformats.org/drawingml/2006/main" xmlns:r="http://schemas.openxmlformats.org/officeDocument/2006/relationships" xmlns:p="http://schemas.openxmlformats.org/presentationml/2006/main">
-  <p:cSld name="Slide 9">
+  <p:cSld name="Slide 8">
     <p:spTree>
       <p:nvGrpSpPr>
         <p:cNvPr id="1" name=""/>
@@ -31125,7 +35395,7 @@
                 <a:ea typeface="Times New Roman" pitchFamily="34" charset="-122"/>
                 <a:cs typeface="Times New Roman" pitchFamily="34" charset="-120"/>
               </a:rPr>
-              <a:t>DATA MODEL AND KNOWLEDGE GRAPH</a:t>
+              <a:t>WORKER ARCHITECTURE</a:t>
             </a:r>
             <a:endParaRPr lang="en-US" sz="3000" dirty="0"/>
           </a:p>
@@ -31133,13 +35403,42 @@
       </p:sp>
       <p:sp>
         <p:nvSpPr>
-          <p:cNvPr id="3" name="Text 1"/>
+          <p:cNvPr id="3" name="Shape 1"/>
           <p:cNvSpPr/>
           <p:nvPr/>
         </p:nvSpPr>
         <p:spPr>
           <a:xfrm>
-            <a:off x="594360" y="1225296"/>
+            <a:off x="594360" y="1188720"/>
+            <a:ext cx="11002975" cy="2231136"/>
+          </a:xfrm>
+          <a:prstGeom prst="rect">
+            <a:avLst/>
+          </a:prstGeom>
+          <a:solidFill>
+            <a:srgbClr val="F2F2F2"/>
+          </a:solidFill>
+          <a:ln w="9525">
+            <a:solidFill>
+              <a:srgbClr val="BFBFBF"/>
+            </a:solidFill>
+            <a:prstDash val="solid"/>
+          </a:ln>
+        </p:spPr>
+        <p:txBody>
+          <a:bodyPr/>
+          <a:p/>
+        </p:txBody>
+      </p:sp>
+      <p:sp>
+        <p:nvSpPr>
+          <p:cNvPr id="4" name="Text 2"/>
+          <p:cNvSpPr/>
+          <p:nvPr/>
+        </p:nvSpPr>
+        <p:spPr>
+          <a:xfrm>
+            <a:off x="713232" y="1243584"/>
             <a:ext cx="292608" cy="292608"/>
           </a:xfrm>
           <a:prstGeom prst="rect">
@@ -31178,14 +35477,14 @@
       </p:sp>
       <p:sp>
         <p:nvSpPr>
-          <p:cNvPr id="4" name="Text 2"/>
+          <p:cNvPr id="5" name="Text 3"/>
           <p:cNvSpPr txBox="1"/>
           <p:nvPr/>
         </p:nvSpPr>
         <p:spPr>
           <a:xfrm>
-            <a:off x="996696" y="1225296"/>
-            <a:ext cx="5486400" cy="292608"/>
+            <a:off x="1115568" y="1243584"/>
+            <a:ext cx="2743200" cy="292608"/>
           </a:xfrm>
           <a:prstGeom prst="rect">
             <a:avLst/>
@@ -31209,7 +35508,7 @@
                 <a:ea typeface="Times New Roman" pitchFamily="34" charset="-122"/>
                 <a:cs typeface="Times New Roman" pitchFamily="34" charset="-120"/>
               </a:rPr>
-              <a:t>TABLES AND LINKS</a:t>
+              <a:t>JOB CHAIN FOR ONE EPISODE</a:t>
             </a:r>
             <a:endParaRPr lang="en-US" sz="1300" dirty="0"/>
           </a:p>
@@ -31217,14 +35516,14 @@
       </p:sp>
       <p:sp>
         <p:nvSpPr>
-          <p:cNvPr id="5" name="Text 3"/>
+          <p:cNvPr id="6" name="Text 4"/>
           <p:cNvSpPr/>
           <p:nvPr/>
         </p:nvSpPr>
         <p:spPr>
           <a:xfrm>
-            <a:off x="594360" y="1572768"/>
-            <a:ext cx="1920240" cy="731520"/>
+            <a:off x="704088" y="1609344"/>
+            <a:ext cx="1737360" cy="713232"/>
           </a:xfrm>
           <a:prstGeom prst="rect">
             <a:avLst/>
@@ -31250,7 +35549,7 @@
               <a:buNone/>
             </a:pPr>
             <a:r>
-              <a:rPr lang="en-US" sz="1200" b="1" dirty="0">
+              <a:rPr lang="en-US" sz="1300" b="1" dirty="0">
                 <a:solidFill>
                   <a:srgbClr val="1A1A1A"/>
                 </a:solidFill>
@@ -31258,16 +35557,16 @@
                 <a:ea typeface="Times New Roman" pitchFamily="34" charset="-122"/>
                 <a:cs typeface="Times New Roman" pitchFamily="34" charset="-120"/>
               </a:rPr>
-              <a:t>raw_events</a:t>
-            </a:r>
-            <a:endParaRPr lang="en-US" sz="1200" dirty="0"/>
+              <a:t>Retain</a:t>
+            </a:r>
+            <a:endParaRPr lang="en-US" sz="1300" dirty="0"/>
           </a:p>
           <a:p>
             <a:pPr algn="l" indent="0" marL="0">
               <a:buNone/>
             </a:pPr>
             <a:r>
-              <a:rPr lang="en-US" sz="1100" dirty="0">
+              <a:rPr lang="en-US" sz="1200" dirty="0">
                 <a:solidFill>
                   <a:srgbClr val="1A1A1A"/>
                 </a:solidFill>
@@ -31275,39 +35574,22 @@
                 <a:ea typeface="Times New Roman" pitchFamily="34" charset="-122"/>
                 <a:cs typeface="Times New Roman" pitchFamily="34" charset="-120"/>
               </a:rPr>
-              <a:t>role, content, occurred_at</a:t>
-            </a:r>
-            <a:endParaRPr lang="en-US" sz="1200" dirty="0"/>
-          </a:p>
-          <a:p>
-            <a:pPr algn="l" indent="0" marL="0">
-              <a:buNone/>
-            </a:pPr>
-            <a:r>
-              <a:rPr lang="en-US" sz="1100" dirty="0">
-                <a:solidFill>
-                  <a:srgbClr val="1A1A1A"/>
-                </a:solidFill>
-                <a:latin typeface="Times New Roman" pitchFamily="34" charset="0"/>
-                <a:ea typeface="Times New Roman" pitchFamily="34" charset="-122"/>
-                <a:cs typeface="Times New Roman" pitchFamily="34" charset="-120"/>
-              </a:rPr>
-              <a:t>metadata, processing_state</a:t>
-            </a:r>
-            <a:endParaRPr lang="en-US" sz="1200" dirty="0"/>
+              <a:t>episode, extract job</a:t>
+            </a:r>
+            <a:endParaRPr lang="en-US" sz="1300" dirty="0"/>
           </a:p>
         </p:txBody>
       </p:sp>
       <p:sp>
         <p:nvSpPr>
-          <p:cNvPr id="6" name="Text 4"/>
+          <p:cNvPr id="7" name="Text 5"/>
           <p:cNvSpPr/>
           <p:nvPr/>
         </p:nvSpPr>
         <p:spPr>
           <a:xfrm>
-            <a:off x="594360" y="2615184"/>
-            <a:ext cx="1920240" cy="731520"/>
+            <a:off x="3352800" y="1609344"/>
+            <a:ext cx="2103120" cy="713232"/>
           </a:xfrm>
           <a:prstGeom prst="rect">
             <a:avLst/>
@@ -31333,7 +35615,7 @@
               <a:buNone/>
             </a:pPr>
             <a:r>
-              <a:rPr lang="en-US" sz="1200" b="1" dirty="0">
+              <a:rPr lang="en-US" sz="1300" b="1" dirty="0">
                 <a:solidFill>
                   <a:srgbClr val="1A1A1A"/>
                 </a:solidFill>
@@ -31341,16 +35623,16 @@
                 <a:ea typeface="Times New Roman" pitchFamily="34" charset="-122"/>
                 <a:cs typeface="Times New Roman" pitchFamily="34" charset="-120"/>
               </a:rPr>
-              <a:t>chunks</a:t>
-            </a:r>
-            <a:endParaRPr lang="en-US" sz="1200" dirty="0"/>
+              <a:t>Extract job</a:t>
+            </a:r>
+            <a:endParaRPr lang="en-US" sz="1300" dirty="0"/>
           </a:p>
           <a:p>
             <a:pPr algn="l" indent="0" marL="0">
               <a:buNone/>
             </a:pPr>
             <a:r>
-              <a:rPr lang="en-US" sz="1100" dirty="0">
+              <a:rPr lang="en-US" sz="1200" dirty="0">
                 <a:solidFill>
                   <a:srgbClr val="1A1A1A"/>
                 </a:solidFill>
@@ -31358,39 +35640,88 @@
                 <a:ea typeface="Times New Roman" pitchFamily="34" charset="-122"/>
                 <a:cs typeface="Times New Roman" pitchFamily="34" charset="-120"/>
               </a:rPr>
-              <a:t>one per event, never split</a:t>
-            </a:r>
-            <a:endParaRPr lang="en-US" sz="1200" dirty="0"/>
-          </a:p>
-          <a:p>
-            <a:pPr algn="l" indent="0" marL="0">
-              <a:buNone/>
-            </a:pPr>
-            <a:r>
-              <a:rPr lang="en-US" sz="1100" dirty="0">
-                <a:solidFill>
-                  <a:srgbClr val="1A1A1A"/>
-                </a:solidFill>
-                <a:latin typeface="Times New Roman" pitchFamily="34" charset="0"/>
-                <a:ea typeface="Times New Roman" pitchFamily="34" charset="-122"/>
-                <a:cs typeface="Times New Roman" pitchFamily="34" charset="-120"/>
-              </a:rPr>
-              <a:t>embedding, search_vector</a:t>
-            </a:r>
-            <a:endParaRPr lang="en-US" sz="1200" dirty="0"/>
+              <a:t>claimed under a lease</a:t>
+            </a:r>
+            <a:endParaRPr lang="en-US" sz="1300" dirty="0"/>
           </a:p>
         </p:txBody>
       </p:sp>
       <p:sp>
         <p:nvSpPr>
-          <p:cNvPr id="7" name="Text 5"/>
+          <p:cNvPr id="8" name="Text 6"/>
           <p:cNvSpPr/>
           <p:nvPr/>
         </p:nvSpPr>
         <p:spPr>
           <a:xfrm>
-            <a:off x="594360" y="3639312"/>
-            <a:ext cx="1920240" cy="914400"/>
+            <a:off x="6367272" y="1609344"/>
+            <a:ext cx="2286000" cy="713232"/>
+          </a:xfrm>
+          <a:prstGeom prst="rect">
+            <a:avLst/>
+          </a:prstGeom>
+          <a:solidFill>
+            <a:srgbClr val="F2F2F2"/>
+          </a:solidFill>
+          <a:ln w="22225">
+            <a:solidFill>
+              <a:srgbClr val="000000"/>
+            </a:solidFill>
+            <a:prstDash val="solid"/>
+          </a:ln>
+        </p:spPr>
+        <p:txBody>
+          <a:bodyPr wrap="square" lIns="63500" tIns="88900" rIns="88900" bIns="63500" rtlCol="0" anchor="t"/>
+          <a:lstStyle/>
+          <a:p>
+            <a:pPr algn="l" indent="0" marL="0">
+              <a:spcAft>
+                <a:spcPts val="300"/>
+              </a:spcAft>
+              <a:buNone/>
+            </a:pPr>
+            <a:r>
+              <a:rPr lang="en-US" sz="1300" b="1" dirty="0">
+                <a:solidFill>
+                  <a:srgbClr val="1A1A1A"/>
+                </a:solidFill>
+                <a:latin typeface="Times New Roman" pitchFamily="34" charset="0"/>
+                <a:ea typeface="Times New Roman" pitchFamily="34" charset="-122"/>
+                <a:cs typeface="Times New Roman" pitchFamily="34" charset="-120"/>
+              </a:rPr>
+              <a:t>Student model</a:t>
+            </a:r>
+            <a:endParaRPr lang="en-US" sz="1300" dirty="0"/>
+          </a:p>
+          <a:p>
+            <a:pPr algn="l" indent="0" marL="0">
+              <a:buNone/>
+            </a:pPr>
+            <a:r>
+              <a:rPr lang="en-US" sz="1200" dirty="0">
+                <a:solidFill>
+                  <a:srgbClr val="1A1A1A"/>
+                </a:solidFill>
+                <a:latin typeface="Times New Roman" pitchFamily="34" charset="0"/>
+                <a:ea typeface="Times New Roman" pitchFamily="34" charset="-122"/>
+                <a:cs typeface="Times New Roman" pitchFamily="34" charset="-120"/>
+              </a:rPr>
+              <a:t>mem-extractor on Ollama</a:t>
+            </a:r>
+            <a:endParaRPr lang="en-US" sz="1300" dirty="0"/>
+          </a:p>
+        </p:txBody>
+      </p:sp>
+      <p:sp>
+        <p:nvSpPr>
+          <p:cNvPr id="9" name="Text 7"/>
+          <p:cNvSpPr/>
+          <p:nvPr/>
+        </p:nvSpPr>
+        <p:spPr>
+          <a:xfrm>
+            <a:off x="9564624" y="1609344"/>
+            <a:ext cx="1920240" cy="713232"/>
           </a:xfrm>
           <a:prstGeom prst="rect">
             <a:avLst/>
@@ -31416,7 +35747,7 @@
               <a:buNone/>
             </a:pPr>
             <a:r>
-              <a:rPr lang="en-US" sz="1200" b="1" dirty="0">
+              <a:rPr lang="en-US" sz="1300" b="1" dirty="0">
                 <a:solidFill>
                   <a:srgbClr val="1A1A1A"/>
                 </a:solidFill>
@@ -31424,16 +35755,16 @@
                 <a:ea typeface="Times New Roman" pitchFamily="34" charset="-122"/>
                 <a:cs typeface="Times New Roman" pitchFamily="34" charset="-120"/>
               </a:rPr>
-              <a:t>episodes</a:t>
-            </a:r>
-            <a:endParaRPr lang="en-US" sz="1200" dirty="0"/>
+              <a:t>Validate and repair</a:t>
+            </a:r>
+            <a:endParaRPr lang="en-US" sz="1300" dirty="0"/>
           </a:p>
           <a:p>
             <a:pPr algn="l" indent="0" marL="0">
               <a:buNone/>
             </a:pPr>
             <a:r>
-              <a:rPr lang="en-US" sz="1100" dirty="0">
+              <a:rPr lang="en-US" sz="1200" dirty="0">
                 <a:solidFill>
                   <a:srgbClr val="1A1A1A"/>
                 </a:solidFill>
@@ -31441,16 +35772,16 @@
                 <a:ea typeface="Times New Roman" pitchFamily="34" charset="-122"/>
                 <a:cs typeface="Times New Roman" pitchFamily="34" charset="-120"/>
               </a:rPr>
-              <a:t>one retain call, idempotent</a:t>
-            </a:r>
-            <a:endParaRPr lang="en-US" sz="1200" dirty="0"/>
+              <a:t>exact quotes,</a:t>
+            </a:r>
+            <a:endParaRPr lang="en-US" sz="1300" dirty="0"/>
           </a:p>
           <a:p>
             <a:pPr algn="l" indent="0" marL="0">
               <a:buNone/>
             </a:pPr>
             <a:r>
-              <a:rPr lang="en-US" sz="1100" dirty="0">
+              <a:rPr lang="en-US" sz="1200" dirty="0">
                 <a:solidFill>
                   <a:srgbClr val="1A1A1A"/>
                 </a:solidFill>
@@ -31458,22 +35789,22 @@
                 <a:ea typeface="Times New Roman" pitchFamily="34" charset="-122"/>
                 <a:cs typeface="Times New Roman" pitchFamily="34" charset="-120"/>
               </a:rPr>
-              <a:t>episode_sources keep order</a:t>
-            </a:r>
-            <a:endParaRPr lang="en-US" sz="1200" dirty="0"/>
+              <a:t>2 repairs</a:t>
+            </a:r>
+            <a:endParaRPr lang="en-US" sz="1300" dirty="0"/>
           </a:p>
         </p:txBody>
       </p:sp>
       <p:sp>
         <p:nvSpPr>
-          <p:cNvPr id="8" name="Text 6"/>
+          <p:cNvPr id="10" name="Text 8"/>
           <p:cNvSpPr/>
           <p:nvPr/>
         </p:nvSpPr>
         <p:spPr>
           <a:xfrm>
-            <a:off x="3246120" y="1572768"/>
-            <a:ext cx="2011680" cy="731520"/>
+            <a:off x="704088" y="2615184"/>
+            <a:ext cx="1737360" cy="713232"/>
           </a:xfrm>
           <a:prstGeom prst="rect">
             <a:avLst/>
@@ -31499,7 +35830,7 @@
               <a:buNone/>
             </a:pPr>
             <a:r>
-              <a:rPr lang="en-US" sz="1200" b="1" dirty="0">
+              <a:rPr lang="en-US" sz="1300" b="1" dirty="0">
                 <a:solidFill>
                   <a:srgbClr val="1A1A1A"/>
                 </a:solidFill>
@@ -31507,16 +35838,16 @@
                 <a:ea typeface="Times New Roman" pitchFamily="34" charset="-122"/>
                 <a:cs typeface="Times New Roman" pitchFamily="34" charset="-120"/>
               </a:rPr>
-              <a:t>entities, aliases</a:t>
-            </a:r>
-            <a:endParaRPr lang="en-US" sz="1200" dirty="0"/>
+              <a:t>Store claims</a:t>
+            </a:r>
+            <a:endParaRPr lang="en-US" sz="1300" dirty="0"/>
           </a:p>
           <a:p>
             <a:pPr algn="l" indent="0" marL="0">
               <a:buNone/>
             </a:pPr>
             <a:r>
-              <a:rPr lang="en-US" sz="1100" dirty="0">
+              <a:rPr lang="en-US" sz="1200" dirty="0">
                 <a:solidFill>
                   <a:srgbClr val="1A1A1A"/>
                 </a:solidFill>
@@ -31524,39 +35855,22 @@
                 <a:ea typeface="Times New Roman" pitchFamily="34" charset="-122"/>
                 <a:cs typeface="Times New Roman" pitchFamily="34" charset="-120"/>
               </a:rPr>
-              <a:t>type, name, normalized_name</a:t>
-            </a:r>
-            <a:endParaRPr lang="en-US" sz="1200" dirty="0"/>
-          </a:p>
-          <a:p>
-            <a:pPr algn="l" indent="0" marL="0">
-              <a:buNone/>
-            </a:pPr>
-            <a:r>
-              <a:rPr lang="en-US" sz="1100" dirty="0">
-                <a:solidFill>
-                  <a:srgbClr val="1A1A1A"/>
-                </a:solidFill>
-                <a:latin typeface="Times New Roman" pitchFamily="34" charset="0"/>
-                <a:ea typeface="Times New Roman" pitchFamily="34" charset="-122"/>
-                <a:cs typeface="Times New Roman" pitchFamily="34" charset="-120"/>
-              </a:rPr>
-              <a:t>alias with its grounding chunk</a:t>
-            </a:r>
-            <a:endParaRPr lang="en-US" sz="1200" dirty="0"/>
+              <a:t>supersede or reinforce</a:t>
+            </a:r>
+            <a:endParaRPr lang="en-US" sz="1300" dirty="0"/>
           </a:p>
         </p:txBody>
       </p:sp>
       <p:sp>
         <p:nvSpPr>
-          <p:cNvPr id="9" name="Text 7"/>
+          <p:cNvPr id="11" name="Text 9"/>
           <p:cNvSpPr/>
           <p:nvPr/>
         </p:nvSpPr>
         <p:spPr>
           <a:xfrm>
-            <a:off x="3246120" y="2615184"/>
-            <a:ext cx="2011680" cy="731520"/>
+            <a:off x="3352800" y="2615184"/>
+            <a:ext cx="2103120" cy="713232"/>
           </a:xfrm>
           <a:prstGeom prst="rect">
             <a:avLst/>
@@ -31582,7 +35896,7 @@
               <a:buNone/>
             </a:pPr>
             <a:r>
-              <a:rPr lang="en-US" sz="1200" b="1" dirty="0">
+              <a:rPr lang="en-US" sz="1300" b="1" dirty="0">
                 <a:solidFill>
                   <a:srgbClr val="1A1A1A"/>
                 </a:solidFill>
@@ -31590,16 +35904,16 @@
                 <a:ea typeface="Times New Roman" pitchFamily="34" charset="-122"/>
                 <a:cs typeface="Times New Roman" pitchFamily="34" charset="-120"/>
               </a:rPr>
-              <a:t>assertion_sources</a:t>
-            </a:r>
-            <a:endParaRPr lang="en-US" sz="1200" dirty="0"/>
+              <a:t>Consolidate job</a:t>
+            </a:r>
+            <a:endParaRPr lang="en-US" sz="1300" dirty="0"/>
           </a:p>
           <a:p>
             <a:pPr algn="l" indent="0" marL="0">
               <a:buNone/>
             </a:pPr>
             <a:r>
-              <a:rPr lang="en-US" sz="1100" dirty="0">
+              <a:rPr lang="en-US" sz="1200" dirty="0">
                 <a:solidFill>
                   <a:srgbClr val="1A1A1A"/>
                 </a:solidFill>
@@ -31607,16 +35921,16 @@
                 <a:ea typeface="Times New Roman" pitchFamily="34" charset="-122"/>
                 <a:cs typeface="Times New Roman" pitchFamily="34" charset="-120"/>
               </a:rPr>
-              <a:t>assertion_id, chunk_id, quote</a:t>
-            </a:r>
-            <a:endParaRPr lang="en-US" sz="1200" dirty="0"/>
+              <a:t>same model reads facts,</a:t>
+            </a:r>
+            <a:endParaRPr lang="en-US" sz="1300" dirty="0"/>
           </a:p>
           <a:p>
             <a:pPr algn="l" indent="0" marL="0">
               <a:buNone/>
             </a:pPr>
             <a:r>
-              <a:rPr lang="en-US" sz="1100" dirty="0">
+              <a:rPr lang="en-US" sz="1200" dirty="0">
                 <a:solidFill>
                   <a:srgbClr val="1A1A1A"/>
                 </a:solidFill>
@@ -31624,22 +35938,105 @@
                 <a:ea typeface="Times New Roman" pitchFamily="34" charset="-122"/>
                 <a:cs typeface="Times New Roman" pitchFamily="34" charset="-120"/>
               </a:rPr>
-              <a:t>quote is exact chunk text</a:t>
-            </a:r>
-            <a:endParaRPr lang="en-US" sz="1200" dirty="0"/>
+              <a:t>writes observations</a:t>
+            </a:r>
+            <a:endParaRPr lang="en-US" sz="1300" dirty="0"/>
           </a:p>
         </p:txBody>
       </p:sp>
       <p:sp>
         <p:nvSpPr>
-          <p:cNvPr id="10" name="Text 8"/>
+          <p:cNvPr id="12" name="Text 10"/>
           <p:cNvSpPr/>
           <p:nvPr/>
         </p:nvSpPr>
         <p:spPr>
           <a:xfrm>
-            <a:off x="6080760" y="1572768"/>
-            <a:ext cx="2468880" cy="1773936"/>
+            <a:off x="6367272" y="2615184"/>
+            <a:ext cx="2286000" cy="713232"/>
+          </a:xfrm>
+          <a:prstGeom prst="rect">
+            <a:avLst/>
+          </a:prstGeom>
+          <a:solidFill>
+            <a:srgbClr val="FFFFFF"/>
+          </a:solidFill>
+          <a:ln w="12700">
+            <a:solidFill>
+              <a:srgbClr val="333333"/>
+            </a:solidFill>
+            <a:prstDash val="solid"/>
+          </a:ln>
+        </p:spPr>
+        <p:txBody>
+          <a:bodyPr wrap="square" lIns="63500" tIns="88900" rIns="88900" bIns="63500" rtlCol="0" anchor="t"/>
+          <a:lstStyle/>
+          <a:p>
+            <a:pPr algn="l" indent="0" marL="0">
+              <a:spcAft>
+                <a:spcPts val="300"/>
+              </a:spcAft>
+              <a:buNone/>
+            </a:pPr>
+            <a:r>
+              <a:rPr lang="en-US" sz="1300" b="1" dirty="0">
+                <a:solidFill>
+                  <a:srgbClr val="1A1A1A"/>
+                </a:solidFill>
+                <a:latin typeface="Times New Roman" pitchFamily="34" charset="0"/>
+                <a:ea typeface="Times New Roman" pitchFamily="34" charset="-122"/>
+                <a:cs typeface="Times New Roman" pitchFamily="34" charset="-120"/>
+              </a:rPr>
+              <a:t>Project job</a:t>
+            </a:r>
+            <a:endParaRPr lang="en-US" sz="1300" dirty="0"/>
+          </a:p>
+          <a:p>
+            <a:pPr algn="l" indent="0" marL="0">
+              <a:buNone/>
+            </a:pPr>
+            <a:r>
+              <a:rPr lang="en-US" sz="1200" dirty="0">
+                <a:solidFill>
+                  <a:srgbClr val="1A1A1A"/>
+                </a:solidFill>
+                <a:latin typeface="Times New Roman" pitchFamily="34" charset="0"/>
+                <a:ea typeface="Times New Roman" pitchFamily="34" charset="-122"/>
+                <a:cs typeface="Times New Roman" pitchFamily="34" charset="-120"/>
+              </a:rPr>
+              <a:t>entities and edges</a:t>
+            </a:r>
+            <a:endParaRPr lang="en-US" sz="1300" dirty="0"/>
+          </a:p>
+          <a:p>
+            <a:pPr algn="l" indent="0" marL="0">
+              <a:buNone/>
+            </a:pPr>
+            <a:r>
+              <a:rPr lang="en-US" sz="1200" dirty="0">
+                <a:solidFill>
+                  <a:srgbClr val="1A1A1A"/>
+                </a:solidFill>
+                <a:latin typeface="Times New Roman" pitchFamily="34" charset="0"/>
+                <a:ea typeface="Times New Roman" pitchFamily="34" charset="-122"/>
+                <a:cs typeface="Times New Roman" pitchFamily="34" charset="-120"/>
+              </a:rPr>
+              <a:t>written to Neo4j</a:t>
+            </a:r>
+            <a:endParaRPr lang="en-US" sz="1300" dirty="0"/>
+          </a:p>
+        </p:txBody>
+      </p:sp>
+      <p:sp>
+        <p:nvSpPr>
+          <p:cNvPr id="13" name="Text 11"/>
+          <p:cNvSpPr/>
+          <p:nvPr/>
+        </p:nvSpPr>
+        <p:spPr>
+          <a:xfrm>
+            <a:off x="9564624" y="2615184"/>
+            <a:ext cx="1920240" cy="713232"/>
           </a:xfrm>
           <a:prstGeom prst="rect">
             <a:avLst/>
@@ -31665,7 +36062,7 @@
               <a:buNone/>
             </a:pPr>
             <a:r>
-              <a:rPr lang="en-US" sz="1200" b="1" dirty="0">
+              <a:rPr lang="en-US" sz="1300" b="1" dirty="0">
                 <a:solidFill>
                   <a:srgbClr val="1A1A1A"/>
                 </a:solidFill>
@@ -31673,16 +36070,16 @@
                 <a:ea typeface="Times New Roman" pitchFamily="34" charset="-122"/>
                 <a:cs typeface="Times New Roman" pitchFamily="34" charset="-120"/>
               </a:rPr>
-              <a:t>assertions</a:t>
-            </a:r>
-            <a:endParaRPr lang="en-US" sz="1200" dirty="0"/>
+              <a:t>Graph and recall</a:t>
+            </a:r>
+            <a:endParaRPr lang="en-US" sz="1300" dirty="0"/>
           </a:p>
           <a:p>
             <a:pPr algn="l" indent="0" marL="0">
               <a:buNone/>
             </a:pPr>
             <a:r>
-              <a:rPr lang="en-US" sz="1100" dirty="0">
+              <a:rPr lang="en-US" sz="1200" dirty="0">
                 <a:solidFill>
                   <a:srgbClr val="1A1A1A"/>
                 </a:solidFill>
@@ -31690,16 +36087,16 @@
                 <a:ea typeface="Times New Roman" pitchFamily="34" charset="-122"/>
                 <a:cs typeface="Times New Roman" pitchFamily="34" charset="-120"/>
               </a:rPr>
-              <a:t>slot_key: subject_id::predicate</a:t>
-            </a:r>
-            <a:endParaRPr lang="en-US" sz="1200" dirty="0"/>
+              <a:t>live graph page,</a:t>
+            </a:r>
+            <a:endParaRPr lang="en-US" sz="1300" dirty="0"/>
           </a:p>
           <a:p>
             <a:pPr algn="l" indent="0" marL="0">
               <a:buNone/>
             </a:pPr>
             <a:r>
-              <a:rPr lang="en-US" sz="1100" dirty="0">
+              <a:rPr lang="en-US" sz="1200" dirty="0">
                 <a:solidFill>
                   <a:srgbClr val="1A1A1A"/>
                 </a:solidFill>
@@ -31707,90 +36104,766 @@
                 <a:ea typeface="Times New Roman" pitchFamily="34" charset="-122"/>
                 <a:cs typeface="Times New Roman" pitchFamily="34" charset="-120"/>
               </a:rPr>
-              <a:t>cardinality: single, multiple, event</a:t>
-            </a:r>
-            <a:endParaRPr lang="en-US" sz="1200" dirty="0"/>
-          </a:p>
-          <a:p>
-            <a:pPr algn="l" indent="0" marL="0">
-              <a:buNone/>
-            </a:pPr>
-            <a:r>
-              <a:rPr lang="en-US" sz="1100" dirty="0">
-                <a:solidFill>
-                  <a:srgbClr val="1A1A1A"/>
-                </a:solidFill>
-                <a:latin typeface="Times New Roman" pitchFamily="34" charset="0"/>
-                <a:ea typeface="Times New Roman" pitchFamily="34" charset="-122"/>
-                <a:cs typeface="Times New Roman" pitchFamily="34" charset="-120"/>
-              </a:rPr>
-              <a:t>status: active, superseded, contested, stale, retracted</a:t>
-            </a:r>
-            <a:endParaRPr lang="en-US" sz="1200" dirty="0"/>
-          </a:p>
-          <a:p>
-            <a:pPr algn="l" indent="0" marL="0">
-              <a:buNone/>
-            </a:pPr>
-            <a:r>
-              <a:rPr lang="en-US" sz="1100" dirty="0">
-                <a:solidFill>
-                  <a:srgbClr val="1A1A1A"/>
-                </a:solidFill>
-                <a:latin typeface="Times New Roman" pitchFamily="34" charset="0"/>
-                <a:ea typeface="Times New Roman" pitchFamily="34" charset="-122"/>
-                <a:cs typeface="Times New Roman" pitchFamily="34" charset="-120"/>
-              </a:rPr>
-              <a:t>valid_from, valid_to: belief applies</a:t>
-            </a:r>
-            <a:endParaRPr lang="en-US" sz="1200" dirty="0"/>
-          </a:p>
-          <a:p>
-            <a:pPr algn="l" indent="0" marL="0">
-              <a:buNone/>
-            </a:pPr>
-            <a:r>
-              <a:rPr lang="en-US" sz="1100" dirty="0">
-                <a:solidFill>
-                  <a:srgbClr val="1A1A1A"/>
-                </a:solidFill>
-                <a:latin typeface="Times New Roman" pitchFamily="34" charset="0"/>
-                <a:ea typeface="Times New Roman" pitchFamily="34" charset="-122"/>
-                <a:cs typeface="Times New Roman" pitchFamily="34" charset="-120"/>
-              </a:rPr>
-              <a:t>event_at: event happened</a:t>
-            </a:r>
-            <a:endParaRPr lang="en-US" sz="1200" dirty="0"/>
-          </a:p>
-          <a:p>
-            <a:pPr algn="l" indent="0" marL="0">
-              <a:buNone/>
-            </a:pPr>
-            <a:r>
-              <a:rPr lang="en-US" sz="1100" dirty="0">
-                <a:solidFill>
-                  <a:srgbClr val="1A1A1A"/>
-                </a:solidFill>
-                <a:latin typeface="Times New Roman" pitchFamily="34" charset="0"/>
-                <a:ea typeface="Times New Roman" pitchFamily="34" charset="-122"/>
-                <a:cs typeface="Times New Roman" pitchFamily="34" charset="-120"/>
-              </a:rPr>
-              <a:t>recorded_at: engine stored it</a:t>
-            </a:r>
-            <a:endParaRPr lang="en-US" sz="1200" dirty="0"/>
+              <a:t>graph hops at recall</a:t>
+            </a:r>
+            <a:endParaRPr lang="en-US" sz="1300" dirty="0"/>
+          </a:p>
+        </p:txBody>
+      </p:sp>
+      <p:cxnSp>
+        <p:nvCxnSpPr>
+          <p:cNvPr id="14" name="Connector 14"/>
+          <p:cNvCxnSpPr/>
+          <p:nvPr/>
+        </p:nvCxnSpPr>
+        <p:spPr>
+          <a:xfrm>
+            <a:off x="2441448" y="1828800"/>
+            <a:ext cx="911352" cy="0"/>
+          </a:xfrm>
+          <a:prstGeom prst="straightConnector1">
+            <a:avLst/>
+          </a:prstGeom>
+          <a:noFill/>
+          <a:ln w="15875">
+            <a:solidFill>
+              <a:srgbClr val="333333"/>
+            </a:solidFill>
+            <a:prstDash val="solid"/>
+            <a:tailEnd type="triangle"/>
+          </a:ln>
+        </p:spPr>
+      </p:cxnSp>
+      <p:sp>
+        <p:nvSpPr>
+          <p:cNvPr id="15" name="Text 13"/>
+          <p:cNvSpPr txBox="1"/>
+          <p:nvPr/>
+        </p:nvSpPr>
+        <p:spPr>
+          <a:xfrm>
+            <a:off x="2458212" y="1600200"/>
+            <a:ext cx="877824" cy="201168"/>
+          </a:xfrm>
+          <a:prstGeom prst="rect">
+            <a:avLst/>
+          </a:prstGeom>
+          <a:noFill/>
+          <a:ln/>
+        </p:spPr>
+        <p:txBody>
+          <a:bodyPr wrap="square" lIns="0" tIns="0" rIns="0" bIns="0" rtlCol="0" anchor="ctr"/>
+          <a:lstStyle/>
+          <a:p>
+            <a:pPr algn="ctr" indent="0" marL="0">
+              <a:buNone/>
+            </a:pPr>
+            <a:r>
+              <a:rPr lang="en-US" sz="1100" i="1" dirty="0">
+                <a:solidFill>
+                  <a:srgbClr val="595959"/>
+                </a:solidFill>
+                <a:latin typeface="Times New Roman" pitchFamily="34" charset="0"/>
+                <a:ea typeface="Times New Roman" pitchFamily="34" charset="-122"/>
+                <a:cs typeface="Times New Roman" pitchFamily="34" charset="-120"/>
+              </a:rPr>
+              <a:t>episode</a:t>
+            </a:r>
+            <a:endParaRPr lang="en-US" sz="1100" dirty="0"/>
+          </a:p>
+        </p:txBody>
+      </p:sp>
+      <p:cxnSp>
+        <p:nvCxnSpPr>
+          <p:cNvPr id="16" name="Connector 16"/>
+          <p:cNvCxnSpPr/>
+          <p:nvPr/>
+        </p:nvCxnSpPr>
+        <p:spPr>
+          <a:xfrm flipH="1">
+            <a:off x="2441448" y="2139696"/>
+            <a:ext cx="911352" cy="0"/>
+          </a:xfrm>
+          <a:prstGeom prst="straightConnector1">
+            <a:avLst/>
+          </a:prstGeom>
+          <a:noFill/>
+          <a:ln w="15875">
+            <a:solidFill>
+              <a:srgbClr val="333333"/>
+            </a:solidFill>
+            <a:prstDash val="solid"/>
+            <a:tailEnd type="triangle"/>
+          </a:ln>
+        </p:spPr>
+      </p:cxnSp>
+      <p:sp>
+        <p:nvSpPr>
+          <p:cNvPr id="17" name="Text 15"/>
+          <p:cNvSpPr txBox="1"/>
+          <p:nvPr/>
+        </p:nvSpPr>
+        <p:spPr>
+          <a:xfrm>
+            <a:off x="2458212" y="1911096"/>
+            <a:ext cx="877824" cy="201168"/>
+          </a:xfrm>
+          <a:prstGeom prst="rect">
+            <a:avLst/>
+          </a:prstGeom>
+          <a:noFill/>
+          <a:ln/>
+        </p:spPr>
+        <p:txBody>
+          <a:bodyPr wrap="square" lIns="0" tIns="0" rIns="0" bIns="0" rtlCol="0" anchor="ctr"/>
+          <a:lstStyle/>
+          <a:p>
+            <a:pPr algn="ctr" indent="0" marL="0">
+              <a:buNone/>
+            </a:pPr>
+            <a:r>
+              <a:rPr lang="en-US" sz="1100" i="1" dirty="0">
+                <a:solidFill>
+                  <a:srgbClr val="595959"/>
+                </a:solidFill>
+                <a:latin typeface="Times New Roman" pitchFamily="34" charset="0"/>
+                <a:ea typeface="Times New Roman" pitchFamily="34" charset="-122"/>
+                <a:cs typeface="Times New Roman" pitchFamily="34" charset="-120"/>
+              </a:rPr>
+              <a:t>job</a:t>
+            </a:r>
+            <a:endParaRPr lang="en-US" sz="1100" dirty="0"/>
+          </a:p>
+        </p:txBody>
+      </p:sp>
+      <p:cxnSp>
+        <p:nvCxnSpPr>
+          <p:cNvPr id="18" name="Connector 18"/>
+          <p:cNvCxnSpPr>
+            <a:stCxn id="7" idx="3"/>
+            <a:endCxn id="8" idx="1"/>
+          </p:cNvCxnSpPr>
+          <p:nvPr/>
+        </p:nvCxnSpPr>
+        <p:spPr>
+          <a:xfrm>
+            <a:off x="5455920" y="1965960"/>
+            <a:ext cx="911352" cy="0"/>
+          </a:xfrm>
+          <a:prstGeom prst="straightConnector1">
+            <a:avLst/>
+          </a:prstGeom>
+          <a:noFill/>
+          <a:ln w="15875">
+            <a:solidFill>
+              <a:srgbClr val="333333"/>
+            </a:solidFill>
+            <a:prstDash val="solid"/>
+            <a:tailEnd type="triangle"/>
+          </a:ln>
+        </p:spPr>
+      </p:cxnSp>
+      <p:sp>
+        <p:nvSpPr>
+          <p:cNvPr id="19" name="Text 17"/>
+          <p:cNvSpPr txBox="1"/>
+          <p:nvPr/>
+        </p:nvSpPr>
+        <p:spPr>
+          <a:xfrm>
+            <a:off x="5472684" y="1737360"/>
+            <a:ext cx="877824" cy="201168"/>
+          </a:xfrm>
+          <a:prstGeom prst="rect">
+            <a:avLst/>
+          </a:prstGeom>
+          <a:noFill/>
+          <a:ln/>
+        </p:spPr>
+        <p:txBody>
+          <a:bodyPr wrap="square" lIns="0" tIns="0" rIns="0" bIns="0" rtlCol="0" anchor="ctr"/>
+          <a:lstStyle/>
+          <a:p>
+            <a:pPr algn="ctr" indent="0" marL="0">
+              <a:buNone/>
+            </a:pPr>
+            <a:r>
+              <a:rPr lang="en-US" sz="1100" i="1" dirty="0">
+                <a:solidFill>
+                  <a:srgbClr val="595959"/>
+                </a:solidFill>
+                <a:latin typeface="Times New Roman" pitchFamily="34" charset="0"/>
+                <a:ea typeface="Times New Roman" pitchFamily="34" charset="-122"/>
+                <a:cs typeface="Times New Roman" pitchFamily="34" charset="-120"/>
+              </a:rPr>
+              <a:t>prompt</a:t>
+            </a:r>
+            <a:endParaRPr lang="en-US" sz="1100" dirty="0"/>
+          </a:p>
+        </p:txBody>
+      </p:sp>
+      <p:cxnSp>
+        <p:nvCxnSpPr>
+          <p:cNvPr id="20" name="Connector 20"/>
+          <p:cNvCxnSpPr>
+            <a:stCxn id="8" idx="3"/>
+            <a:endCxn id="9" idx="1"/>
+          </p:cNvCxnSpPr>
+          <p:nvPr/>
+        </p:nvCxnSpPr>
+        <p:spPr>
+          <a:xfrm>
+            <a:off x="8653272" y="1965960"/>
+            <a:ext cx="911352" cy="0"/>
+          </a:xfrm>
+          <a:prstGeom prst="straightConnector1">
+            <a:avLst/>
+          </a:prstGeom>
+          <a:noFill/>
+          <a:ln w="15875">
+            <a:solidFill>
+              <a:srgbClr val="333333"/>
+            </a:solidFill>
+            <a:prstDash val="solid"/>
+            <a:tailEnd type="triangle"/>
+          </a:ln>
+        </p:spPr>
+      </p:cxnSp>
+      <p:sp>
+        <p:nvSpPr>
+          <p:cNvPr id="21" name="Text 19"/>
+          <p:cNvSpPr txBox="1"/>
+          <p:nvPr/>
+        </p:nvSpPr>
+        <p:spPr>
+          <a:xfrm>
+            <a:off x="8670036" y="1737360"/>
+            <a:ext cx="877824" cy="201168"/>
+          </a:xfrm>
+          <a:prstGeom prst="rect">
+            <a:avLst/>
+          </a:prstGeom>
+          <a:noFill/>
+          <a:ln/>
+        </p:spPr>
+        <p:txBody>
+          <a:bodyPr wrap="square" lIns="0" tIns="0" rIns="0" bIns="0" rtlCol="0" anchor="ctr"/>
+          <a:lstStyle/>
+          <a:p>
+            <a:pPr algn="ctr" indent="0" marL="0">
+              <a:buNone/>
+            </a:pPr>
+            <a:r>
+              <a:rPr lang="en-US" sz="1100" i="1" dirty="0">
+                <a:solidFill>
+                  <a:srgbClr val="595959"/>
+                </a:solidFill>
+                <a:latin typeface="Times New Roman" pitchFamily="34" charset="0"/>
+                <a:ea typeface="Times New Roman" pitchFamily="34" charset="-122"/>
+                <a:cs typeface="Times New Roman" pitchFamily="34" charset="-120"/>
+              </a:rPr>
+              <a:t>reply</a:t>
+            </a:r>
+            <a:endParaRPr lang="en-US" sz="1100" dirty="0"/>
+          </a:p>
+        </p:txBody>
+      </p:sp>
+      <p:cxnSp>
+        <p:nvCxnSpPr>
+          <p:cNvPr id="22" name="Connector 22"/>
+          <p:cNvCxnSpPr>
+            <a:stCxn id="8" idx="2"/>
+          </p:cNvCxnSpPr>
+          <p:nvPr/>
+        </p:nvCxnSpPr>
+        <p:spPr>
+          <a:xfrm>
+            <a:off x="7510272" y="2322576"/>
+            <a:ext cx="0" cy="146304"/>
+          </a:xfrm>
+          <a:prstGeom prst="straightConnector1">
+            <a:avLst/>
+          </a:prstGeom>
+          <a:noFill/>
+          <a:ln w="15875">
+            <a:solidFill>
+              <a:srgbClr val="333333"/>
+            </a:solidFill>
+            <a:prstDash val="solid"/>
+          </a:ln>
+        </p:spPr>
+      </p:cxnSp>
+      <p:cxnSp>
+        <p:nvCxnSpPr>
+          <p:cNvPr id="23" name="Connector 23"/>
+          <p:cNvCxnSpPr/>
+          <p:nvPr/>
+        </p:nvCxnSpPr>
+        <p:spPr>
+          <a:xfrm flipH="1">
+            <a:off x="1572768" y="2468880"/>
+            <a:ext cx="5937504" cy="0"/>
+          </a:xfrm>
+          <a:prstGeom prst="straightConnector1">
+            <a:avLst/>
+          </a:prstGeom>
+          <a:noFill/>
+          <a:ln w="15875">
+            <a:solidFill>
+              <a:srgbClr val="333333"/>
+            </a:solidFill>
+            <a:prstDash val="solid"/>
+          </a:ln>
+        </p:spPr>
+      </p:cxnSp>
+      <p:cxnSp>
+        <p:nvCxnSpPr>
+          <p:cNvPr id="24" name="Connector 24"/>
+          <p:cNvCxnSpPr>
+            <a:endCxn id="10" idx="0"/>
+          </p:cNvCxnSpPr>
+          <p:nvPr/>
+        </p:nvCxnSpPr>
+        <p:spPr>
+          <a:xfrm>
+            <a:off x="1572768" y="2468880"/>
+            <a:ext cx="0" cy="146304"/>
+          </a:xfrm>
+          <a:prstGeom prst="straightConnector1">
+            <a:avLst/>
+          </a:prstGeom>
+          <a:noFill/>
+          <a:ln w="15875">
+            <a:solidFill>
+              <a:srgbClr val="333333"/>
+            </a:solidFill>
+            <a:prstDash val="solid"/>
+            <a:tailEnd type="triangle"/>
+          </a:ln>
+        </p:spPr>
+      </p:cxnSp>
+      <p:sp>
+        <p:nvSpPr>
+          <p:cNvPr id="25" name="Text 23"/>
+          <p:cNvSpPr txBox="1"/>
+          <p:nvPr/>
+        </p:nvSpPr>
+        <p:spPr>
+          <a:xfrm>
+            <a:off x="4107180" y="2368296"/>
+            <a:ext cx="868680" cy="201168"/>
+          </a:xfrm>
+          <a:prstGeom prst="rect">
+            <a:avLst/>
+          </a:prstGeom>
+          <a:solidFill>
+            <a:srgbClr val="FFFFFF"/>
+          </a:solidFill>
+          <a:ln/>
+        </p:spPr>
+        <p:txBody>
+          <a:bodyPr wrap="square" lIns="0" tIns="0" rIns="0" bIns="0" rtlCol="0" anchor="ctr"/>
+          <a:lstStyle/>
+          <a:p>
+            <a:pPr algn="ctr" indent="0" marL="0">
+              <a:buNone/>
+            </a:pPr>
+            <a:r>
+              <a:rPr lang="en-US" sz="1100" i="1" dirty="0">
+                <a:solidFill>
+                  <a:srgbClr val="595959"/>
+                </a:solidFill>
+                <a:latin typeface="Times New Roman" pitchFamily="34" charset="0"/>
+                <a:ea typeface="Times New Roman" pitchFamily="34" charset="-122"/>
+                <a:cs typeface="Times New Roman" pitchFamily="34" charset="-120"/>
+              </a:rPr>
+              <a:t>valid claims</a:t>
+            </a:r>
+            <a:endParaRPr lang="en-US" sz="1100" dirty="0"/>
+          </a:p>
+        </p:txBody>
+      </p:sp>
+      <p:cxnSp>
+        <p:nvCxnSpPr>
+          <p:cNvPr id="26" name="Connector 26"/>
+          <p:cNvCxnSpPr>
+            <a:stCxn id="10" idx="3"/>
+            <a:endCxn id="11" idx="1"/>
+          </p:cNvCxnSpPr>
+          <p:nvPr/>
+        </p:nvCxnSpPr>
+        <p:spPr>
+          <a:xfrm>
+            <a:off x="2441448" y="2971800"/>
+            <a:ext cx="911352" cy="0"/>
+          </a:xfrm>
+          <a:prstGeom prst="straightConnector1">
+            <a:avLst/>
+          </a:prstGeom>
+          <a:noFill/>
+          <a:ln w="15875">
+            <a:solidFill>
+              <a:srgbClr val="333333"/>
+            </a:solidFill>
+            <a:prstDash val="solid"/>
+            <a:tailEnd type="triangle"/>
+          </a:ln>
+        </p:spPr>
+      </p:cxnSp>
+      <p:sp>
+        <p:nvSpPr>
+          <p:cNvPr id="27" name="Text 25"/>
+          <p:cNvSpPr txBox="1"/>
+          <p:nvPr/>
+        </p:nvSpPr>
+        <p:spPr>
+          <a:xfrm>
+            <a:off x="2458212" y="2743200"/>
+            <a:ext cx="877824" cy="201168"/>
+          </a:xfrm>
+          <a:prstGeom prst="rect">
+            <a:avLst/>
+          </a:prstGeom>
+          <a:noFill/>
+          <a:ln/>
+        </p:spPr>
+        <p:txBody>
+          <a:bodyPr wrap="square" lIns="0" tIns="0" rIns="0" bIns="0" rtlCol="0" anchor="ctr"/>
+          <a:lstStyle/>
+          <a:p>
+            <a:pPr algn="ctr" indent="0" marL="0">
+              <a:buNone/>
+            </a:pPr>
+            <a:r>
+              <a:rPr lang="en-US" sz="1100" i="1" dirty="0">
+                <a:solidFill>
+                  <a:srgbClr val="595959"/>
+                </a:solidFill>
+                <a:latin typeface="Times New Roman" pitchFamily="34" charset="0"/>
+                <a:ea typeface="Times New Roman" pitchFamily="34" charset="-122"/>
+                <a:cs typeface="Times New Roman" pitchFamily="34" charset="-120"/>
+              </a:rPr>
+              <a:t>consolidate</a:t>
+            </a:r>
+            <a:endParaRPr lang="en-US" sz="1100" dirty="0"/>
+          </a:p>
+        </p:txBody>
+      </p:sp>
+      <p:cxnSp>
+        <p:nvCxnSpPr>
+          <p:cNvPr id="28" name="Connector 28"/>
+          <p:cNvCxnSpPr/>
+          <p:nvPr/>
+        </p:nvCxnSpPr>
+        <p:spPr>
+          <a:xfrm>
+            <a:off x="5455920" y="2834640"/>
+            <a:ext cx="911352" cy="0"/>
+          </a:xfrm>
+          <a:prstGeom prst="straightConnector1">
+            <a:avLst/>
+          </a:prstGeom>
+          <a:noFill/>
+          <a:ln w="15875">
+            <a:solidFill>
+              <a:srgbClr val="333333"/>
+            </a:solidFill>
+            <a:prstDash val="solid"/>
+            <a:tailEnd type="triangle"/>
+          </a:ln>
+        </p:spPr>
+      </p:cxnSp>
+      <p:sp>
+        <p:nvSpPr>
+          <p:cNvPr id="29" name="Text 27"/>
+          <p:cNvSpPr txBox="1"/>
+          <p:nvPr/>
+        </p:nvSpPr>
+        <p:spPr>
+          <a:xfrm>
+            <a:off x="5472684" y="2606040"/>
+            <a:ext cx="877824" cy="201168"/>
+          </a:xfrm>
+          <a:prstGeom prst="rect">
+            <a:avLst/>
+          </a:prstGeom>
+          <a:noFill/>
+          <a:ln/>
+        </p:spPr>
+        <p:txBody>
+          <a:bodyPr wrap="square" lIns="0" tIns="0" rIns="0" bIns="0" rtlCol="0" anchor="ctr"/>
+          <a:lstStyle/>
+          <a:p>
+            <a:pPr algn="ctr" indent="0" marL="0">
+              <a:buNone/>
+            </a:pPr>
+            <a:r>
+              <a:rPr lang="en-US" sz="1100" i="1" dirty="0">
+                <a:solidFill>
+                  <a:srgbClr val="595959"/>
+                </a:solidFill>
+                <a:latin typeface="Times New Roman" pitchFamily="34" charset="0"/>
+                <a:ea typeface="Times New Roman" pitchFamily="34" charset="-122"/>
+                <a:cs typeface="Times New Roman" pitchFamily="34" charset="-120"/>
+              </a:rPr>
+              <a:t>facts</a:t>
+            </a:r>
+            <a:endParaRPr lang="en-US" sz="1100" dirty="0"/>
+          </a:p>
+        </p:txBody>
+      </p:sp>
+      <p:cxnSp>
+        <p:nvCxnSpPr>
+          <p:cNvPr id="30" name="Connector 30"/>
+          <p:cNvCxnSpPr/>
+          <p:nvPr/>
+        </p:nvCxnSpPr>
+        <p:spPr>
+          <a:xfrm flipH="1">
+            <a:off x="5455920" y="3145536"/>
+            <a:ext cx="911352" cy="0"/>
+          </a:xfrm>
+          <a:prstGeom prst="straightConnector1">
+            <a:avLst/>
+          </a:prstGeom>
+          <a:noFill/>
+          <a:ln w="15875">
+            <a:solidFill>
+              <a:srgbClr val="333333"/>
+            </a:solidFill>
+            <a:prstDash val="solid"/>
+            <a:tailEnd type="triangle"/>
+          </a:ln>
+        </p:spPr>
+      </p:cxnSp>
+      <p:sp>
+        <p:nvSpPr>
+          <p:cNvPr id="31" name="Text 29"/>
+          <p:cNvSpPr txBox="1"/>
+          <p:nvPr/>
+        </p:nvSpPr>
+        <p:spPr>
+          <a:xfrm>
+            <a:off x="5472684" y="2916936"/>
+            <a:ext cx="877824" cy="201168"/>
+          </a:xfrm>
+          <a:prstGeom prst="rect">
+            <a:avLst/>
+          </a:prstGeom>
+          <a:noFill/>
+          <a:ln/>
+        </p:spPr>
+        <p:txBody>
+          <a:bodyPr wrap="square" lIns="0" tIns="0" rIns="0" bIns="0" rtlCol="0" anchor="ctr"/>
+          <a:lstStyle/>
+          <a:p>
+            <a:pPr algn="ctr" indent="0" marL="0">
+              <a:buNone/>
+            </a:pPr>
+            <a:r>
+              <a:rPr lang="en-US" sz="1100" i="1" dirty="0">
+                <a:solidFill>
+                  <a:srgbClr val="595959"/>
+                </a:solidFill>
+                <a:latin typeface="Times New Roman" pitchFamily="34" charset="0"/>
+                <a:ea typeface="Times New Roman" pitchFamily="34" charset="-122"/>
+                <a:cs typeface="Times New Roman" pitchFamily="34" charset="-120"/>
+              </a:rPr>
+              <a:t>project job</a:t>
+            </a:r>
+            <a:endParaRPr lang="en-US" sz="1100" dirty="0"/>
+          </a:p>
+        </p:txBody>
+      </p:sp>
+      <p:cxnSp>
+        <p:nvCxnSpPr>
+          <p:cNvPr id="32" name="Connector 32"/>
+          <p:cNvCxnSpPr>
+            <a:stCxn id="12" idx="3"/>
+            <a:endCxn id="13" idx="1"/>
+          </p:cNvCxnSpPr>
+          <p:nvPr/>
+        </p:nvCxnSpPr>
+        <p:spPr>
+          <a:xfrm>
+            <a:off x="8653272" y="2971800"/>
+            <a:ext cx="911352" cy="0"/>
+          </a:xfrm>
+          <a:prstGeom prst="straightConnector1">
+            <a:avLst/>
+          </a:prstGeom>
+          <a:noFill/>
+          <a:ln w="15875">
+            <a:solidFill>
+              <a:srgbClr val="333333"/>
+            </a:solidFill>
+            <a:prstDash val="solid"/>
+            <a:tailEnd type="triangle"/>
+          </a:ln>
+        </p:spPr>
+      </p:cxnSp>
+      <p:sp>
+        <p:nvSpPr>
+          <p:cNvPr id="33" name="Text 31"/>
+          <p:cNvSpPr txBox="1"/>
+          <p:nvPr/>
+        </p:nvSpPr>
+        <p:spPr>
+          <a:xfrm>
+            <a:off x="8670036" y="2743200"/>
+            <a:ext cx="877824" cy="201168"/>
+          </a:xfrm>
+          <a:prstGeom prst="rect">
+            <a:avLst/>
+          </a:prstGeom>
+          <a:noFill/>
+          <a:ln/>
+        </p:spPr>
+        <p:txBody>
+          <a:bodyPr wrap="square" lIns="0" tIns="0" rIns="0" bIns="0" rtlCol="0" anchor="ctr"/>
+          <a:lstStyle/>
+          <a:p>
+            <a:pPr algn="ctr" indent="0" marL="0">
+              <a:buNone/>
+            </a:pPr>
+            <a:r>
+              <a:rPr lang="en-US" sz="1100" i="1" dirty="0">
+                <a:solidFill>
+                  <a:srgbClr val="595959"/>
+                </a:solidFill>
+                <a:latin typeface="Times New Roman" pitchFamily="34" charset="0"/>
+                <a:ea typeface="Times New Roman" pitchFamily="34" charset="-122"/>
+                <a:cs typeface="Times New Roman" pitchFamily="34" charset="-120"/>
+              </a:rPr>
+              <a:t>edges</a:t>
+            </a:r>
+            <a:endParaRPr lang="en-US" sz="1100" dirty="0"/>
           </a:p>
         </p:txBody>
       </p:sp>
       <p:sp>
         <p:nvSpPr>
-          <p:cNvPr id="11" name="Text 9"/>
+          <p:cNvPr id="34" name="Shape 32"/>
           <p:cNvSpPr/>
           <p:nvPr/>
         </p:nvSpPr>
         <p:spPr>
           <a:xfrm>
-            <a:off x="6080760" y="3639312"/>
-            <a:ext cx="2468880" cy="914400"/>
+            <a:off x="594360" y="3493008"/>
+            <a:ext cx="11002975" cy="2231136"/>
+          </a:xfrm>
+          <a:prstGeom prst="rect">
+            <a:avLst/>
+          </a:prstGeom>
+          <a:solidFill>
+            <a:srgbClr val="F2F2F2"/>
+          </a:solidFill>
+          <a:ln w="9525">
+            <a:solidFill>
+              <a:srgbClr val="BFBFBF"/>
+            </a:solidFill>
+            <a:prstDash val="solid"/>
+          </a:ln>
+        </p:spPr>
+        <p:txBody>
+          <a:bodyPr/>
+          <a:p/>
+        </p:txBody>
+      </p:sp>
+      <p:sp>
+        <p:nvSpPr>
+          <p:cNvPr id="35" name="Text 33"/>
+          <p:cNvSpPr/>
+          <p:nvPr/>
+        </p:nvSpPr>
+        <p:spPr>
+          <a:xfrm>
+            <a:off x="713232" y="3547872"/>
+            <a:ext cx="292608" cy="292608"/>
+          </a:xfrm>
+          <a:prstGeom prst="rect">
+            <a:avLst/>
+          </a:prstGeom>
+          <a:solidFill>
+            <a:srgbClr val="000000"/>
+          </a:solidFill>
+          <a:ln w="6350">
+            <a:solidFill>
+              <a:srgbClr val="000000"/>
+            </a:solidFill>
+          </a:ln>
+        </p:spPr>
+        <p:txBody>
+          <a:bodyPr wrap="square" lIns="0" tIns="0" rIns="0" bIns="0" rtlCol="0" anchor="ctr"/>
+          <a:lstStyle/>
+          <a:p>
+            <a:pPr algn="ctr" indent="0" marL="0">
+              <a:buNone/>
+            </a:pPr>
+            <a:r>
+              <a:rPr lang="en-US" sz="1300" b="1" dirty="0">
+                <a:solidFill>
+                  <a:srgbClr val="FFFFFF"/>
+                </a:solidFill>
+                <a:latin typeface="Times New Roman" pitchFamily="34" charset="0"/>
+                <a:ea typeface="Times New Roman" pitchFamily="34" charset="-122"/>
+                <a:cs typeface="Times New Roman" pitchFamily="34" charset="-120"/>
+              </a:rPr>
+              <a:t>2</a:t>
+            </a:r>
+            <a:endParaRPr lang="en-US" sz="1300" dirty="0"/>
+          </a:p>
+        </p:txBody>
+      </p:sp>
+      <p:sp>
+        <p:nvSpPr>
+          <p:cNvPr id="36" name="Text 34"/>
+          <p:cNvSpPr txBox="1"/>
+          <p:nvPr/>
+        </p:nvSpPr>
+        <p:spPr>
+          <a:xfrm>
+            <a:off x="1115568" y="3547872"/>
+            <a:ext cx="2743200" cy="292608"/>
+          </a:xfrm>
+          <a:prstGeom prst="rect">
+            <a:avLst/>
+          </a:prstGeom>
+          <a:noFill/>
+          <a:ln/>
+        </p:spPr>
+        <p:txBody>
+          <a:bodyPr wrap="square" lIns="0" tIns="0" rIns="0" bIns="0" rtlCol="0" anchor="ctr"/>
+          <a:lstStyle/>
+          <a:p>
+            <a:pPr indent="0" marL="0">
+              <a:buNone/>
+            </a:pPr>
+            <a:r>
+              <a:rPr lang="en-US" sz="1300" b="1" dirty="0">
+                <a:solidFill>
+                  <a:srgbClr val="000000"/>
+                </a:solidFill>
+                <a:latin typeface="Times New Roman" pitchFamily="34" charset="0"/>
+                <a:ea typeface="Times New Roman" pitchFamily="34" charset="-122"/>
+                <a:cs typeface="Times New Roman" pitchFamily="34" charset="-120"/>
+              </a:rPr>
+              <a:t>LEASES AND FAILURES</a:t>
+            </a:r>
+            <a:endParaRPr lang="en-US" sz="1300" dirty="0"/>
+          </a:p>
+        </p:txBody>
+      </p:sp>
+      <p:sp>
+        <p:nvSpPr>
+          <p:cNvPr id="37" name="Text 35"/>
+          <p:cNvSpPr/>
+          <p:nvPr/>
+        </p:nvSpPr>
+        <p:spPr>
+          <a:xfrm>
+            <a:off x="704088" y="3913632"/>
+            <a:ext cx="1737360" cy="1719072"/>
           </a:xfrm>
           <a:prstGeom prst="rect">
             <a:avLst/>
@@ -31816,7 +36889,7 @@
               <a:buNone/>
             </a:pPr>
             <a:r>
-              <a:rPr lang="en-US" sz="1200" b="1" dirty="0">
+              <a:rPr lang="en-US" sz="1300" b="1" dirty="0">
                 <a:solidFill>
                   <a:srgbClr val="1A1A1A"/>
                 </a:solidFill>
@@ -31824,16 +36897,16 @@
                 <a:ea typeface="Times New Roman" pitchFamily="34" charset="-122"/>
                 <a:cs typeface="Times New Roman" pitchFamily="34" charset="-120"/>
               </a:rPr>
-              <a:t>assertion_edges</a:t>
-            </a:r>
-            <a:endParaRPr lang="en-US" sz="1200" dirty="0"/>
+              <a:t>Job lease</a:t>
+            </a:r>
+            <a:endParaRPr lang="en-US" sz="1300" dirty="0"/>
           </a:p>
           <a:p>
             <a:pPr algn="l" indent="0" marL="0">
               <a:buNone/>
             </a:pPr>
             <a:r>
-              <a:rPr lang="en-US" sz="1100" dirty="0">
+              <a:rPr lang="en-US" sz="1200" dirty="0">
                 <a:solidFill>
                   <a:srgbClr val="1A1A1A"/>
                 </a:solidFill>
@@ -31841,16 +36914,16 @@
                 <a:ea typeface="Times New Roman" pitchFamily="34" charset="-122"/>
                 <a:cs typeface="Times New Roman" pitchFamily="34" charset="-120"/>
               </a:rPr>
-              <a:t>supersedes, extends, contradicts, causes</a:t>
-            </a:r>
-            <a:endParaRPr lang="en-US" sz="1200" dirty="0"/>
+              <a:t>one attempt owns a job,</a:t>
+            </a:r>
+            <a:endParaRPr lang="en-US" sz="1300" dirty="0"/>
           </a:p>
           <a:p>
             <a:pPr algn="l" indent="0" marL="0">
               <a:buNone/>
             </a:pPr>
             <a:r>
-              <a:rPr lang="en-US" sz="1100" dirty="0">
+              <a:rPr lang="en-US" sz="1200" dirty="0">
                 <a:solidFill>
                   <a:srgbClr val="1A1A1A"/>
                 </a:solidFill>
@@ -31858,454 +36931,90 @@
                 <a:ea typeface="Times New Roman" pitchFamily="34" charset="-122"/>
                 <a:cs typeface="Times New Roman" pitchFamily="34" charset="-120"/>
               </a:rPr>
-              <a:t>supports: observation to its facts</a:t>
-            </a:r>
-            <a:endParaRPr lang="en-US" sz="1200" dirty="0"/>
-          </a:p>
-          <a:p>
-            <a:pPr algn="l" indent="0" marL="0">
-              <a:buNone/>
-            </a:pPr>
-            <a:r>
-              <a:rPr lang="en-US" sz="1100" dirty="0">
-                <a:solidFill>
-                  <a:srgbClr val="1A1A1A"/>
-                </a:solidFill>
-                <a:latin typeface="Times New Roman" pitchFamily="34" charset="0"/>
-                <a:ea typeface="Times New Roman" pitchFamily="34" charset="-122"/>
-                <a:cs typeface="Times New Roman" pitchFamily="34" charset="-120"/>
-              </a:rPr>
-              <a:t>derives: no writer, Status to confirm</a:t>
-            </a:r>
-            <a:endParaRPr lang="en-US" sz="1200" dirty="0"/>
-          </a:p>
-        </p:txBody>
-      </p:sp>
-      <p:cxnSp>
-        <p:nvCxnSpPr>
-          <p:cNvPr id="12" name="Connector 12"/>
-          <p:cNvCxnSpPr/>
-          <p:nvPr/>
-        </p:nvCxnSpPr>
-        <p:spPr>
-          <a:xfrm flipV="1">
-            <a:off x="1170432" y="2304288"/>
-            <a:ext cx="0" cy="310896"/>
-          </a:xfrm>
-          <a:prstGeom prst="straightConnector1">
-            <a:avLst/>
-          </a:prstGeom>
-          <a:noFill/>
-          <a:ln w="15875">
-            <a:solidFill>
-              <a:srgbClr val="333333"/>
-            </a:solidFill>
-            <a:prstDash val="solid"/>
-            <a:tailEnd type="triangle"/>
-          </a:ln>
-        </p:spPr>
-      </p:cxnSp>
-      <p:sp>
-        <p:nvSpPr>
-          <p:cNvPr id="13" name="Text 11"/>
-          <p:cNvSpPr txBox="1"/>
-          <p:nvPr/>
-        </p:nvSpPr>
-        <p:spPr>
-          <a:xfrm>
-            <a:off x="1243584" y="2331720"/>
-            <a:ext cx="914400" cy="256032"/>
-          </a:xfrm>
-          <a:prstGeom prst="rect">
-            <a:avLst/>
-          </a:prstGeom>
-          <a:noFill/>
-          <a:ln/>
-        </p:spPr>
-        <p:txBody>
-          <a:bodyPr wrap="square" lIns="0" tIns="0" rIns="0" bIns="0" rtlCol="0" anchor="ctr"/>
-          <a:lstStyle/>
-          <a:p>
-            <a:pPr algn="l" indent="0" marL="0">
-              <a:buNone/>
-            </a:pPr>
-            <a:r>
-              <a:rPr lang="en-US" sz="1100" i="1" dirty="0">
-                <a:solidFill>
-                  <a:srgbClr val="595959"/>
-                </a:solidFill>
-                <a:latin typeface="Times New Roman" pitchFamily="34" charset="0"/>
-                <a:ea typeface="Times New Roman" pitchFamily="34" charset="-122"/>
-                <a:cs typeface="Times New Roman" pitchFamily="34" charset="-120"/>
-              </a:rPr>
-              <a:t>raw_event_id</a:t>
-            </a:r>
-            <a:endParaRPr lang="en-US" sz="1100" dirty="0"/>
-          </a:p>
-        </p:txBody>
-      </p:sp>
-      <p:cxnSp>
-        <p:nvCxnSpPr>
-          <p:cNvPr id="14" name="Connector 14"/>
-          <p:cNvCxnSpPr/>
-          <p:nvPr/>
-        </p:nvCxnSpPr>
-        <p:spPr>
-          <a:xfrm flipV="1">
-            <a:off x="1170432" y="3346704"/>
-            <a:ext cx="0" cy="292608"/>
-          </a:xfrm>
-          <a:prstGeom prst="straightConnector1">
-            <a:avLst/>
-          </a:prstGeom>
-          <a:noFill/>
-          <a:ln w="15875">
-            <a:solidFill>
-              <a:srgbClr val="333333"/>
-            </a:solidFill>
-            <a:prstDash val="solid"/>
-            <a:tailEnd type="triangle"/>
-          </a:ln>
-        </p:spPr>
-      </p:cxnSp>
-      <p:sp>
-        <p:nvSpPr>
-          <p:cNvPr id="15" name="Text 13"/>
-          <p:cNvSpPr txBox="1"/>
-          <p:nvPr/>
-        </p:nvSpPr>
-        <p:spPr>
-          <a:xfrm>
-            <a:off x="1243584" y="3364992"/>
-            <a:ext cx="914400" cy="256032"/>
-          </a:xfrm>
-          <a:prstGeom prst="rect">
-            <a:avLst/>
-          </a:prstGeom>
-          <a:noFill/>
-          <a:ln/>
-        </p:spPr>
-        <p:txBody>
-          <a:bodyPr wrap="square" lIns="0" tIns="0" rIns="0" bIns="0" rtlCol="0" anchor="ctr"/>
-          <a:lstStyle/>
-          <a:p>
-            <a:pPr algn="l" indent="0" marL="0">
-              <a:buNone/>
-            </a:pPr>
-            <a:r>
-              <a:rPr lang="en-US" sz="1100" i="1" dirty="0">
-                <a:solidFill>
-                  <a:srgbClr val="595959"/>
-                </a:solidFill>
-                <a:latin typeface="Times New Roman" pitchFamily="34" charset="0"/>
-                <a:ea typeface="Times New Roman" pitchFamily="34" charset="-122"/>
-                <a:cs typeface="Times New Roman" pitchFamily="34" charset="-120"/>
-              </a:rPr>
-              <a:t>chunk_id</a:t>
-            </a:r>
-            <a:endParaRPr lang="en-US" sz="1100" dirty="0"/>
-          </a:p>
-        </p:txBody>
-      </p:sp>
-      <p:cxnSp>
-        <p:nvCxnSpPr>
-          <p:cNvPr id="16" name="Connector 16"/>
-          <p:cNvCxnSpPr>
-            <a:stCxn id="9" idx="1"/>
-            <a:endCxn id="6" idx="3"/>
-          </p:cNvCxnSpPr>
-          <p:nvPr/>
-        </p:nvCxnSpPr>
-        <p:spPr>
-          <a:xfrm flipH="1">
-            <a:off x="2514600" y="2980944"/>
-            <a:ext cx="731520" cy="0"/>
-          </a:xfrm>
-          <a:prstGeom prst="straightConnector1">
-            <a:avLst/>
-          </a:prstGeom>
-          <a:noFill/>
-          <a:ln w="15875">
-            <a:solidFill>
-              <a:srgbClr val="333333"/>
-            </a:solidFill>
-            <a:prstDash val="solid"/>
-            <a:tailEnd type="triangle"/>
-          </a:ln>
-        </p:spPr>
-      </p:cxnSp>
-      <p:sp>
-        <p:nvSpPr>
-          <p:cNvPr id="17" name="Text 15"/>
-          <p:cNvSpPr txBox="1"/>
-          <p:nvPr/>
-        </p:nvSpPr>
-        <p:spPr>
-          <a:xfrm>
-            <a:off x="2560320" y="2697480"/>
-            <a:ext cx="640080" cy="256032"/>
-          </a:xfrm>
-          <a:prstGeom prst="rect">
-            <a:avLst/>
-          </a:prstGeom>
-          <a:noFill/>
-          <a:ln/>
-        </p:spPr>
-        <p:txBody>
-          <a:bodyPr wrap="square" lIns="0" tIns="0" rIns="0" bIns="0" rtlCol="0" anchor="ctr"/>
-          <a:lstStyle/>
-          <a:p>
-            <a:pPr algn="ctr" indent="0" marL="0">
-              <a:buNone/>
-            </a:pPr>
-            <a:r>
-              <a:rPr lang="en-US" sz="1100" i="1" dirty="0">
-                <a:solidFill>
-                  <a:srgbClr val="595959"/>
-                </a:solidFill>
-                <a:latin typeface="Times New Roman" pitchFamily="34" charset="0"/>
-                <a:ea typeface="Times New Roman" pitchFamily="34" charset="-122"/>
-                <a:cs typeface="Times New Roman" pitchFamily="34" charset="-120"/>
-              </a:rPr>
-              <a:t>chunk_id</a:t>
-            </a:r>
-            <a:endParaRPr lang="en-US" sz="1100" dirty="0"/>
-          </a:p>
-        </p:txBody>
-      </p:sp>
-      <p:cxnSp>
-        <p:nvCxnSpPr>
-          <p:cNvPr id="18" name="Connector 18"/>
-          <p:cNvCxnSpPr>
-            <a:stCxn id="9" idx="3"/>
-          </p:cNvCxnSpPr>
-          <p:nvPr/>
-        </p:nvCxnSpPr>
-        <p:spPr>
-          <a:xfrm>
-            <a:off x="5257800" y="2980944"/>
-            <a:ext cx="822960" cy="0"/>
-          </a:xfrm>
-          <a:prstGeom prst="straightConnector1">
-            <a:avLst/>
-          </a:prstGeom>
-          <a:noFill/>
-          <a:ln w="15875">
-            <a:solidFill>
-              <a:srgbClr val="333333"/>
-            </a:solidFill>
-            <a:prstDash val="solid"/>
-            <a:tailEnd type="triangle"/>
-          </a:ln>
-        </p:spPr>
-      </p:cxnSp>
-      <p:sp>
-        <p:nvSpPr>
-          <p:cNvPr id="19" name="Text 17"/>
-          <p:cNvSpPr txBox="1"/>
-          <p:nvPr/>
-        </p:nvSpPr>
-        <p:spPr>
-          <a:xfrm>
-            <a:off x="5280660" y="2697480"/>
-            <a:ext cx="777240" cy="256032"/>
-          </a:xfrm>
-          <a:prstGeom prst="rect">
-            <a:avLst/>
-          </a:prstGeom>
-          <a:noFill/>
-          <a:ln/>
-        </p:spPr>
-        <p:txBody>
-          <a:bodyPr wrap="square" lIns="0" tIns="0" rIns="0" bIns="0" rtlCol="0" anchor="ctr"/>
-          <a:lstStyle/>
-          <a:p>
-            <a:pPr algn="ctr" indent="0" marL="0">
-              <a:buNone/>
-            </a:pPr>
-            <a:r>
-              <a:rPr lang="en-US" sz="1100" i="1" dirty="0">
-                <a:solidFill>
-                  <a:srgbClr val="595959"/>
-                </a:solidFill>
-                <a:latin typeface="Times New Roman" pitchFamily="34" charset="0"/>
-                <a:ea typeface="Times New Roman" pitchFamily="34" charset="-122"/>
-                <a:cs typeface="Times New Roman" pitchFamily="34" charset="-120"/>
-              </a:rPr>
-              <a:t>assertion_id</a:t>
-            </a:r>
-            <a:endParaRPr lang="en-US" sz="1100" dirty="0"/>
-          </a:p>
-        </p:txBody>
-      </p:sp>
-      <p:cxnSp>
-        <p:nvCxnSpPr>
-          <p:cNvPr id="20" name="Connector 20"/>
-          <p:cNvCxnSpPr>
-            <a:endCxn id="8" idx="3"/>
-          </p:cNvCxnSpPr>
-          <p:nvPr/>
-        </p:nvCxnSpPr>
-        <p:spPr>
-          <a:xfrm flipH="1">
-            <a:off x="5257800" y="1938528"/>
-            <a:ext cx="822960" cy="0"/>
-          </a:xfrm>
-          <a:prstGeom prst="straightConnector1">
-            <a:avLst/>
-          </a:prstGeom>
-          <a:noFill/>
-          <a:ln w="15875">
-            <a:solidFill>
-              <a:srgbClr val="333333"/>
-            </a:solidFill>
-            <a:prstDash val="solid"/>
-            <a:tailEnd type="triangle"/>
-          </a:ln>
-        </p:spPr>
-      </p:cxnSp>
-      <p:sp>
-        <p:nvSpPr>
-          <p:cNvPr id="21" name="Text 19"/>
-          <p:cNvSpPr txBox="1"/>
-          <p:nvPr/>
-        </p:nvSpPr>
-        <p:spPr>
-          <a:xfrm>
-            <a:off x="5303520" y="1655064"/>
-            <a:ext cx="731520" cy="256032"/>
-          </a:xfrm>
-          <a:prstGeom prst="rect">
-            <a:avLst/>
-          </a:prstGeom>
-          <a:noFill/>
-          <a:ln/>
-        </p:spPr>
-        <p:txBody>
-          <a:bodyPr wrap="square" lIns="0" tIns="0" rIns="0" bIns="0" rtlCol="0" anchor="ctr"/>
-          <a:lstStyle/>
-          <a:p>
-            <a:pPr algn="ctr" indent="0" marL="0">
-              <a:buNone/>
-            </a:pPr>
-            <a:r>
-              <a:rPr lang="en-US" sz="1100" i="1" dirty="0">
-                <a:solidFill>
-                  <a:srgbClr val="595959"/>
-                </a:solidFill>
-                <a:latin typeface="Times New Roman" pitchFamily="34" charset="0"/>
-                <a:ea typeface="Times New Roman" pitchFamily="34" charset="-122"/>
-                <a:cs typeface="Times New Roman" pitchFamily="34" charset="-120"/>
-              </a:rPr>
-              <a:t>subject_id</a:t>
-            </a:r>
-            <a:endParaRPr lang="en-US" sz="1100" dirty="0"/>
-          </a:p>
-        </p:txBody>
-      </p:sp>
-      <p:cxnSp>
-        <p:nvCxnSpPr>
-          <p:cNvPr id="22" name="Connector 22"/>
-          <p:cNvCxnSpPr/>
-          <p:nvPr/>
-        </p:nvCxnSpPr>
-        <p:spPr>
-          <a:xfrm flipV="1">
-            <a:off x="6821424" y="3346704"/>
-            <a:ext cx="0" cy="292608"/>
-          </a:xfrm>
-          <a:prstGeom prst="straightConnector1">
-            <a:avLst/>
-          </a:prstGeom>
-          <a:noFill/>
-          <a:ln w="15875">
-            <a:solidFill>
-              <a:srgbClr val="333333"/>
-            </a:solidFill>
-            <a:prstDash val="solid"/>
-            <a:tailEnd type="triangle"/>
-          </a:ln>
-        </p:spPr>
-      </p:cxnSp>
-      <p:sp>
-        <p:nvSpPr>
-          <p:cNvPr id="23" name="Text 21"/>
-          <p:cNvSpPr txBox="1"/>
-          <p:nvPr/>
-        </p:nvSpPr>
-        <p:spPr>
-          <a:xfrm>
-            <a:off x="6894576" y="3364992"/>
-            <a:ext cx="1097280" cy="256032"/>
-          </a:xfrm>
-          <a:prstGeom prst="rect">
-            <a:avLst/>
-          </a:prstGeom>
-          <a:noFill/>
-          <a:ln/>
-        </p:spPr>
-        <p:txBody>
-          <a:bodyPr wrap="square" lIns="0" tIns="0" rIns="0" bIns="0" rtlCol="0" anchor="ctr"/>
-          <a:lstStyle/>
-          <a:p>
-            <a:pPr algn="l" indent="0" marL="0">
-              <a:buNone/>
-            </a:pPr>
-            <a:r>
-              <a:rPr lang="en-US" sz="1100" i="1" dirty="0">
-                <a:solidFill>
-                  <a:srgbClr val="595959"/>
-                </a:solidFill>
-                <a:latin typeface="Times New Roman" pitchFamily="34" charset="0"/>
-                <a:ea typeface="Times New Roman" pitchFamily="34" charset="-122"/>
-                <a:cs typeface="Times New Roman" pitchFamily="34" charset="-120"/>
-              </a:rPr>
-              <a:t>from_id, to_id</a:t>
-            </a:r>
-            <a:endParaRPr lang="en-US" sz="1100" dirty="0"/>
+              <a:t>renewed every 30 s</a:t>
+            </a:r>
+            <a:endParaRPr lang="en-US" sz="1300" dirty="0"/>
           </a:p>
         </p:txBody>
       </p:sp>
       <p:sp>
         <p:nvSpPr>
-          <p:cNvPr id="24" name="Text 22"/>
+          <p:cNvPr id="38" name="Text 36"/>
           <p:cNvSpPr/>
           <p:nvPr/>
         </p:nvSpPr>
         <p:spPr>
           <a:xfrm>
-            <a:off x="594360" y="4645152"/>
-            <a:ext cx="292608" cy="292608"/>
+            <a:off x="3352800" y="3913632"/>
+            <a:ext cx="2103120" cy="713232"/>
           </a:xfrm>
           <a:prstGeom prst="rect">
             <a:avLst/>
           </a:prstGeom>
           <a:solidFill>
-            <a:srgbClr val="000000"/>
+            <a:srgbClr val="F2F2F2"/>
           </a:solidFill>
-          <a:ln w="6350">
+          <a:ln w="22225">
             <a:solidFill>
               <a:srgbClr val="000000"/>
             </a:solidFill>
+            <a:prstDash val="solid"/>
           </a:ln>
         </p:spPr>
         <p:txBody>
-          <a:bodyPr wrap="square" lIns="0" tIns="0" rIns="0" bIns="0" rtlCol="0" anchor="ctr"/>
+          <a:bodyPr wrap="square" lIns="63500" tIns="88900" rIns="88900" bIns="63500" rtlCol="0" anchor="t"/>
           <a:lstStyle/>
           <a:p>
-            <a:pPr algn="ctr" indent="0" marL="0">
+            <a:pPr algn="l" indent="0" marL="0">
+              <a:spcAft>
+                <a:spcPts val="300"/>
+              </a:spcAft>
               <a:buNone/>
             </a:pPr>
             <a:r>
               <a:rPr lang="en-US" sz="1300" b="1" dirty="0">
                 <a:solidFill>
-                  <a:srgbClr val="FFFFFF"/>
-                </a:solidFill>
-                <a:latin typeface="Times New Roman" pitchFamily="34" charset="0"/>
-                <a:ea typeface="Times New Roman" pitchFamily="34" charset="-122"/>
-                <a:cs typeface="Times New Roman" pitchFamily="34" charset="-120"/>
-              </a:rPr>
-              <a:t>2</a:t>
+                  <a:srgbClr val="1A1A1A"/>
+                </a:solidFill>
+                <a:latin typeface="Times New Roman" pitchFamily="34" charset="0"/>
+                <a:ea typeface="Times New Roman" pitchFamily="34" charset="-122"/>
+                <a:cs typeface="Times New Roman" pitchFamily="34" charset="-120"/>
+              </a:rPr>
+              <a:t>Namespace lease</a:t>
+            </a:r>
+            <a:endParaRPr lang="en-US" sz="1300" dirty="0"/>
+          </a:p>
+          <a:p>
+            <a:pPr algn="l" indent="0" marL="0">
+              <a:buNone/>
+            </a:pPr>
+            <a:r>
+              <a:rPr lang="en-US" sz="1200" dirty="0">
+                <a:solidFill>
+                  <a:srgbClr val="1A1A1A"/>
+                </a:solidFill>
+                <a:latin typeface="Times New Roman" pitchFamily="34" charset="0"/>
+                <a:ea typeface="Times New Roman" pitchFamily="34" charset="-122"/>
+                <a:cs typeface="Times New Roman" pitchFamily="34" charset="-120"/>
+              </a:rPr>
+              <a:t>one episode at a time</a:t>
+            </a:r>
+            <a:endParaRPr lang="en-US" sz="1300" dirty="0"/>
+          </a:p>
+          <a:p>
+            <a:pPr algn="l" indent="0" marL="0">
+              <a:buNone/>
+            </a:pPr>
+            <a:r>
+              <a:rPr lang="en-US" sz="1200" dirty="0">
+                <a:solidFill>
+                  <a:srgbClr val="1A1A1A"/>
+                </a:solidFill>
+                <a:latin typeface="Times New Roman" pitchFamily="34" charset="0"/>
+                <a:ea typeface="Times New Roman" pitchFamily="34" charset="-122"/>
+                <a:cs typeface="Times New Roman" pitchFamily="34" charset="-120"/>
+              </a:rPr>
+              <a:t>per namespace</a:t>
             </a:r>
             <a:endParaRPr lang="en-US" sz="1300" dirty="0"/>
           </a:p>
@@ -32313,53 +37022,14 @@
       </p:sp>
       <p:sp>
         <p:nvSpPr>
-          <p:cNvPr id="25" name="Text 23"/>
-          <p:cNvSpPr txBox="1"/>
-          <p:nvPr/>
-        </p:nvSpPr>
-        <p:spPr>
-          <a:xfrm>
-            <a:off x="996696" y="4645152"/>
-            <a:ext cx="4572000" cy="292608"/>
-          </a:xfrm>
-          <a:prstGeom prst="rect">
-            <a:avLst/>
-          </a:prstGeom>
-          <a:noFill/>
-          <a:ln/>
-        </p:spPr>
-        <p:txBody>
-          <a:bodyPr wrap="square" lIns="0" tIns="0" rIns="0" bIns="0" rtlCol="0" anchor="ctr"/>
-          <a:lstStyle/>
-          <a:p>
-            <a:pPr indent="0" marL="0">
-              <a:buNone/>
-            </a:pPr>
-            <a:r>
-              <a:rPr lang="en-US" sz="1300" b="1" dirty="0">
-                <a:solidFill>
-                  <a:srgbClr val="000000"/>
-                </a:solidFill>
-                <a:latin typeface="Times New Roman" pitchFamily="34" charset="0"/>
-                <a:ea typeface="Times New Roman" pitchFamily="34" charset="-122"/>
-                <a:cs typeface="Times New Roman" pitchFamily="34" charset="-120"/>
-              </a:rPr>
-              <a:t>VERSION CHAIN FOR ONE SLOT</a:t>
-            </a:r>
-            <a:endParaRPr lang="en-US" sz="1300" dirty="0"/>
-          </a:p>
-        </p:txBody>
-      </p:sp>
-      <p:sp>
-        <p:nvSpPr>
-          <p:cNvPr id="26" name="Text 24"/>
+          <p:cNvPr id="39" name="Text 37"/>
           <p:cNvSpPr/>
           <p:nvPr/>
         </p:nvSpPr>
         <p:spPr>
           <a:xfrm>
-            <a:off x="594360" y="5029200"/>
-            <a:ext cx="3063240" cy="749808"/>
+            <a:off x="6367272" y="3913632"/>
+            <a:ext cx="2286000" cy="713232"/>
           </a:xfrm>
           <a:prstGeom prst="rect">
             <a:avLst/>
@@ -32385,7 +37055,7 @@
               <a:buNone/>
             </a:pPr>
             <a:r>
-              <a:rPr lang="en-US" sz="1200" b="1" dirty="0">
+              <a:rPr lang="en-US" sz="1300" b="1" dirty="0">
                 <a:solidFill>
                   <a:srgbClr val="1A1A1A"/>
                 </a:solidFill>
@@ -32393,16 +37063,16 @@
                 <a:ea typeface="Times New Roman" pitchFamily="34" charset="-122"/>
                 <a:cs typeface="Times New Roman" pitchFamily="34" charset="-120"/>
               </a:rPr>
-              <a:t>deploys on: Friday</a:t>
-            </a:r>
-            <a:endParaRPr lang="en-US" sz="1200" dirty="0"/>
+              <a:t>Parallel namespaces</a:t>
+            </a:r>
+            <a:endParaRPr lang="en-US" sz="1300" dirty="0"/>
           </a:p>
           <a:p>
             <a:pPr algn="l" indent="0" marL="0">
               <a:buNone/>
             </a:pPr>
             <a:r>
-              <a:rPr lang="en-US" sz="1100" dirty="0">
+              <a:rPr lang="en-US" sz="1200" dirty="0">
                 <a:solidFill>
                   <a:srgbClr val="1A1A1A"/>
                 </a:solidFill>
@@ -32410,39 +37080,882 @@
                 <a:ea typeface="Times New Roman" pitchFamily="34" charset="-122"/>
                 <a:cs typeface="Times New Roman" pitchFamily="34" charset="-120"/>
               </a:rPr>
-              <a:t>status: superseded, valid_to: session 3</a:t>
-            </a:r>
-            <a:endParaRPr lang="en-US" sz="1200" dirty="0"/>
-          </a:p>
-          <a:p>
-            <a:pPr algn="l" indent="0" marL="0">
-              <a:buNone/>
-            </a:pPr>
-            <a:r>
-              <a:rPr lang="en-US" sz="1100" dirty="0">
-                <a:solidFill>
-                  <a:srgbClr val="1A1A1A"/>
-                </a:solidFill>
-                <a:latin typeface="Times New Roman" pitchFamily="34" charset="0"/>
-                <a:ea typeface="Times New Roman" pitchFamily="34" charset="-122"/>
-                <a:cs typeface="Times New Roman" pitchFamily="34" charset="-120"/>
-              </a:rPr>
-              <a:t>valid_from: session 1</a:t>
-            </a:r>
-            <a:endParaRPr lang="en-US" sz="1200" dirty="0"/>
+              <a:t>default 4, at most 8</a:t>
+            </a:r>
+            <a:endParaRPr lang="en-US" sz="1300" dirty="0"/>
           </a:p>
         </p:txBody>
       </p:sp>
       <p:sp>
         <p:nvSpPr>
-          <p:cNvPr id="27" name="Text 25"/>
+          <p:cNvPr id="40" name="Text 38"/>
           <p:cNvSpPr/>
           <p:nvPr/>
         </p:nvSpPr>
         <p:spPr>
           <a:xfrm>
-            <a:off x="5394960" y="5029200"/>
-            <a:ext cx="3154680" cy="749808"/>
+            <a:off x="9564624" y="3913632"/>
+            <a:ext cx="1920240" cy="713232"/>
+          </a:xfrm>
+          <a:prstGeom prst="rect">
+            <a:avLst/>
+          </a:prstGeom>
+          <a:solidFill>
+            <a:srgbClr val="FFFFFF"/>
+          </a:solidFill>
+          <a:ln w="12700">
+            <a:solidFill>
+              <a:srgbClr val="333333"/>
+            </a:solidFill>
+            <a:prstDash val="solid"/>
+          </a:ln>
+        </p:spPr>
+        <p:txBody>
+          <a:bodyPr wrap="square" lIns="63500" tIns="88900" rIns="88900" bIns="63500" rtlCol="0" anchor="t"/>
+          <a:lstStyle/>
+          <a:p>
+            <a:pPr algn="l" indent="0" marL="0">
+              <a:spcAft>
+                <a:spcPts val="300"/>
+              </a:spcAft>
+              <a:buNone/>
+            </a:pPr>
+            <a:r>
+              <a:rPr lang="en-US" sz="1300" b="1" dirty="0">
+                <a:solidFill>
+                  <a:srgbClr val="1A1A1A"/>
+                </a:solidFill>
+                <a:latin typeface="Times New Roman" pitchFamily="34" charset="0"/>
+                <a:ea typeface="Times New Roman" pitchFamily="34" charset="-122"/>
+                <a:cs typeface="Times New Roman" pitchFamily="34" charset="-120"/>
+              </a:rPr>
+              <a:t>Token fencing</a:t>
+            </a:r>
+            <a:endParaRPr lang="en-US" sz="1300" dirty="0"/>
+          </a:p>
+          <a:p>
+            <a:pPr algn="l" indent="0" marL="0">
+              <a:buNone/>
+            </a:pPr>
+            <a:r>
+              <a:rPr lang="en-US" sz="1200" dirty="0">
+                <a:solidFill>
+                  <a:srgbClr val="1A1A1A"/>
+                </a:solidFill>
+                <a:latin typeface="Times New Roman" pitchFamily="34" charset="0"/>
+                <a:ea typeface="Times New Roman" pitchFamily="34" charset="-122"/>
+                <a:cs typeface="Times New Roman" pitchFamily="34" charset="-120"/>
+              </a:rPr>
+              <a:t>late work cannot commit</a:t>
+            </a:r>
+            <a:endParaRPr lang="en-US" sz="1300" dirty="0"/>
+          </a:p>
+        </p:txBody>
+      </p:sp>
+      <p:sp>
+        <p:nvSpPr>
+          <p:cNvPr id="41" name="Text 39"/>
+          <p:cNvSpPr/>
+          <p:nvPr/>
+        </p:nvSpPr>
+        <p:spPr>
+          <a:xfrm>
+            <a:off x="9564624" y="4919472"/>
+            <a:ext cx="1920240" cy="713232"/>
+          </a:xfrm>
+          <a:prstGeom prst="rect">
+            <a:avLst/>
+          </a:prstGeom>
+          <a:solidFill>
+            <a:srgbClr val="FFFFFF"/>
+          </a:solidFill>
+          <a:ln w="12700">
+            <a:solidFill>
+              <a:srgbClr val="333333"/>
+            </a:solidFill>
+            <a:prstDash val="solid"/>
+          </a:ln>
+        </p:spPr>
+        <p:txBody>
+          <a:bodyPr wrap="square" lIns="63500" tIns="88900" rIns="88900" bIns="63500" rtlCol="0" anchor="t"/>
+          <a:lstStyle/>
+          <a:p>
+            <a:pPr algn="l" indent="0" marL="0">
+              <a:spcAft>
+                <a:spcPts val="300"/>
+              </a:spcAft>
+              <a:buNone/>
+            </a:pPr>
+            <a:r>
+              <a:rPr lang="en-US" sz="1300" b="1" dirty="0">
+                <a:solidFill>
+                  <a:srgbClr val="1A1A1A"/>
+                </a:solidFill>
+                <a:latin typeface="Times New Roman" pitchFamily="34" charset="0"/>
+                <a:ea typeface="Times New Roman" pitchFamily="34" charset="-122"/>
+                <a:cs typeface="Times New Roman" pitchFamily="34" charset="-120"/>
+              </a:rPr>
+              <a:t>Retry</a:t>
+            </a:r>
+            <a:endParaRPr lang="en-US" sz="1300" dirty="0"/>
+          </a:p>
+          <a:p>
+            <a:pPr algn="l" indent="0" marL="0">
+              <a:buNone/>
+            </a:pPr>
+            <a:r>
+              <a:rPr lang="en-US" sz="1200" dirty="0">
+                <a:solidFill>
+                  <a:srgbClr val="1A1A1A"/>
+                </a:solidFill>
+                <a:latin typeface="Times New Roman" pitchFamily="34" charset="0"/>
+                <a:ea typeface="Times New Roman" pitchFamily="34" charset="-122"/>
+                <a:cs typeface="Times New Roman" pitchFamily="34" charset="-120"/>
+              </a:rPr>
+              <a:t>failure kept on the job</a:t>
+            </a:r>
+            <a:endParaRPr lang="en-US" sz="1300" dirty="0"/>
+          </a:p>
+        </p:txBody>
+      </p:sp>
+      <p:sp>
+        <p:nvSpPr>
+          <p:cNvPr id="42" name="Text 40"/>
+          <p:cNvSpPr/>
+          <p:nvPr/>
+        </p:nvSpPr>
+        <p:spPr>
+          <a:xfrm>
+            <a:off x="6367272" y="4919472"/>
+            <a:ext cx="2286000" cy="713232"/>
+          </a:xfrm>
+          <a:prstGeom prst="rect">
+            <a:avLst/>
+          </a:prstGeom>
+          <a:solidFill>
+            <a:srgbClr val="FFFFFF"/>
+          </a:solidFill>
+          <a:ln w="12700">
+            <a:solidFill>
+              <a:srgbClr val="333333"/>
+            </a:solidFill>
+            <a:prstDash val="solid"/>
+          </a:ln>
+        </p:spPr>
+        <p:txBody>
+          <a:bodyPr wrap="square" lIns="63500" tIns="88900" rIns="88900" bIns="63500" rtlCol="0" anchor="t"/>
+          <a:lstStyle/>
+          <a:p>
+            <a:pPr algn="l" indent="0" marL="0">
+              <a:spcAft>
+                <a:spcPts val="300"/>
+              </a:spcAft>
+              <a:buNone/>
+            </a:pPr>
+            <a:r>
+              <a:rPr lang="en-US" sz="1300" b="1" dirty="0">
+                <a:solidFill>
+                  <a:srgbClr val="1A1A1A"/>
+                </a:solidFill>
+                <a:latin typeface="Times New Roman" pitchFamily="34" charset="0"/>
+                <a:ea typeface="Times New Roman" pitchFamily="34" charset="-122"/>
+                <a:cs typeface="Times New Roman" pitchFamily="34" charset="-120"/>
+              </a:rPr>
+              <a:t>No fallback model</a:t>
+            </a:r>
+            <a:endParaRPr lang="en-US" sz="1300" dirty="0"/>
+          </a:p>
+          <a:p>
+            <a:pPr algn="l" indent="0" marL="0">
+              <a:buNone/>
+            </a:pPr>
+            <a:r>
+              <a:rPr lang="en-US" sz="1200" dirty="0">
+                <a:solidFill>
+                  <a:srgbClr val="1A1A1A"/>
+                </a:solidFill>
+                <a:latin typeface="Times New Roman" pitchFamily="34" charset="0"/>
+                <a:ea typeface="Times New Roman" pitchFamily="34" charset="-122"/>
+                <a:cs typeface="Times New Roman" pitchFamily="34" charset="-120"/>
+              </a:rPr>
+              <a:t>a bad reply fails the job</a:t>
+            </a:r>
+            <a:endParaRPr lang="en-US" sz="1300" dirty="0"/>
+          </a:p>
+        </p:txBody>
+      </p:sp>
+      <p:sp>
+        <p:nvSpPr>
+          <p:cNvPr id="43" name="Text 41"/>
+          <p:cNvSpPr/>
+          <p:nvPr/>
+        </p:nvSpPr>
+        <p:spPr>
+          <a:xfrm>
+            <a:off x="3352800" y="4919472"/>
+            <a:ext cx="2103120" cy="713232"/>
+          </a:xfrm>
+          <a:prstGeom prst="rect">
+            <a:avLst/>
+          </a:prstGeom>
+          <a:solidFill>
+            <a:srgbClr val="FFFFFF"/>
+          </a:solidFill>
+          <a:ln w="12700">
+            <a:solidFill>
+              <a:srgbClr val="333333"/>
+            </a:solidFill>
+            <a:prstDash val="solid"/>
+          </a:ln>
+        </p:spPr>
+        <p:txBody>
+          <a:bodyPr wrap="square" lIns="63500" tIns="88900" rIns="88900" bIns="63500" rtlCol="0" anchor="t"/>
+          <a:lstStyle/>
+          <a:p>
+            <a:pPr algn="l" indent="0" marL="0">
+              <a:spcAft>
+                <a:spcPts val="300"/>
+              </a:spcAft>
+              <a:buNone/>
+            </a:pPr>
+            <a:r>
+              <a:rPr lang="en-US" sz="1300" b="1" dirty="0">
+                <a:solidFill>
+                  <a:srgbClr val="1A1A1A"/>
+                </a:solidFill>
+                <a:latin typeface="Times New Roman" pitchFamily="34" charset="0"/>
+                <a:ea typeface="Times New Roman" pitchFamily="34" charset="-122"/>
+                <a:cs typeface="Times New Roman" pitchFamily="34" charset="-120"/>
+              </a:rPr>
+              <a:t>Pi stays out</a:t>
+            </a:r>
+            <a:endParaRPr lang="en-US" sz="1300" dirty="0"/>
+          </a:p>
+          <a:p>
+            <a:pPr algn="l" indent="0" marL="0">
+              <a:buNone/>
+            </a:pPr>
+            <a:r>
+              <a:rPr lang="en-US" sz="1200" dirty="0">
+                <a:solidFill>
+                  <a:srgbClr val="1A1A1A"/>
+                </a:solidFill>
+                <a:latin typeface="Times New Roman" pitchFamily="34" charset="0"/>
+                <a:ea typeface="Times New Roman" pitchFamily="34" charset="-122"/>
+                <a:cs typeface="Times New Roman" pitchFamily="34" charset="-120"/>
+              </a:rPr>
+              <a:t>it is not the worker</a:t>
+            </a:r>
+            <a:endParaRPr lang="en-US" sz="1300" dirty="0"/>
+          </a:p>
+        </p:txBody>
+      </p:sp>
+      <p:cxnSp>
+        <p:nvCxnSpPr>
+          <p:cNvPr id="44" name="Connector 44"/>
+          <p:cNvCxnSpPr>
+            <a:endCxn id="38" idx="1"/>
+          </p:cNvCxnSpPr>
+          <p:nvPr/>
+        </p:nvCxnSpPr>
+        <p:spPr>
+          <a:xfrm>
+            <a:off x="2441448" y="4270248"/>
+            <a:ext cx="911352" cy="0"/>
+          </a:xfrm>
+          <a:prstGeom prst="straightConnector1">
+            <a:avLst/>
+          </a:prstGeom>
+          <a:noFill/>
+          <a:ln w="15875">
+            <a:solidFill>
+              <a:srgbClr val="333333"/>
+            </a:solidFill>
+            <a:prstDash val="solid"/>
+            <a:tailEnd type="triangle"/>
+          </a:ln>
+        </p:spPr>
+      </p:cxnSp>
+      <p:sp>
+        <p:nvSpPr>
+          <p:cNvPr id="45" name="Text 43"/>
+          <p:cNvSpPr txBox="1"/>
+          <p:nvPr/>
+        </p:nvSpPr>
+        <p:spPr>
+          <a:xfrm>
+            <a:off x="2458212" y="4041648"/>
+            <a:ext cx="877824" cy="201168"/>
+          </a:xfrm>
+          <a:prstGeom prst="rect">
+            <a:avLst/>
+          </a:prstGeom>
+          <a:noFill/>
+          <a:ln/>
+        </p:spPr>
+        <p:txBody>
+          <a:bodyPr wrap="square" lIns="0" tIns="0" rIns="0" bIns="0" rtlCol="0" anchor="ctr"/>
+          <a:lstStyle/>
+          <a:p>
+            <a:pPr algn="ctr" indent="0" marL="0">
+              <a:buNone/>
+            </a:pPr>
+            <a:r>
+              <a:rPr lang="en-US" sz="1100" i="1" dirty="0">
+                <a:solidFill>
+                  <a:srgbClr val="595959"/>
+                </a:solidFill>
+                <a:latin typeface="Times New Roman" pitchFamily="34" charset="0"/>
+                <a:ea typeface="Times New Roman" pitchFamily="34" charset="-122"/>
+                <a:cs typeface="Times New Roman" pitchFamily="34" charset="-120"/>
+              </a:rPr>
+              <a:t/>
+            </a:r>
+            <a:endParaRPr lang="en-US" sz="1100" dirty="0"/>
+          </a:p>
+        </p:txBody>
+      </p:sp>
+      <p:cxnSp>
+        <p:nvCxnSpPr>
+          <p:cNvPr id="46" name="Connector 46"/>
+          <p:cNvCxnSpPr>
+            <a:stCxn id="38" idx="3"/>
+            <a:endCxn id="39" idx="1"/>
+          </p:cNvCxnSpPr>
+          <p:nvPr/>
+        </p:nvCxnSpPr>
+        <p:spPr>
+          <a:xfrm>
+            <a:off x="5455920" y="4270248"/>
+            <a:ext cx="911352" cy="0"/>
+          </a:xfrm>
+          <a:prstGeom prst="straightConnector1">
+            <a:avLst/>
+          </a:prstGeom>
+          <a:noFill/>
+          <a:ln w="15875">
+            <a:solidFill>
+              <a:srgbClr val="333333"/>
+            </a:solidFill>
+            <a:prstDash val="solid"/>
+            <a:tailEnd type="triangle"/>
+          </a:ln>
+        </p:spPr>
+      </p:cxnSp>
+      <p:sp>
+        <p:nvSpPr>
+          <p:cNvPr id="47" name="Text 45"/>
+          <p:cNvSpPr txBox="1"/>
+          <p:nvPr/>
+        </p:nvSpPr>
+        <p:spPr>
+          <a:xfrm>
+            <a:off x="5472684" y="4041648"/>
+            <a:ext cx="877824" cy="201168"/>
+          </a:xfrm>
+          <a:prstGeom prst="rect">
+            <a:avLst/>
+          </a:prstGeom>
+          <a:noFill/>
+          <a:ln/>
+        </p:spPr>
+        <p:txBody>
+          <a:bodyPr wrap="square" lIns="0" tIns="0" rIns="0" bIns="0" rtlCol="0" anchor="ctr"/>
+          <a:lstStyle/>
+          <a:p>
+            <a:pPr algn="ctr" indent="0" marL="0">
+              <a:buNone/>
+            </a:pPr>
+            <a:r>
+              <a:rPr lang="en-US" sz="1100" i="1" dirty="0">
+                <a:solidFill>
+                  <a:srgbClr val="595959"/>
+                </a:solidFill>
+                <a:latin typeface="Times New Roman" pitchFamily="34" charset="0"/>
+                <a:ea typeface="Times New Roman" pitchFamily="34" charset="-122"/>
+                <a:cs typeface="Times New Roman" pitchFamily="34" charset="-120"/>
+              </a:rPr>
+              <a:t/>
+            </a:r>
+            <a:endParaRPr lang="en-US" sz="1100" dirty="0"/>
+          </a:p>
+        </p:txBody>
+      </p:sp>
+      <p:cxnSp>
+        <p:nvCxnSpPr>
+          <p:cNvPr id="48" name="Connector 48"/>
+          <p:cNvCxnSpPr>
+            <a:stCxn id="39" idx="3"/>
+            <a:endCxn id="40" idx="1"/>
+          </p:cNvCxnSpPr>
+          <p:nvPr/>
+        </p:nvCxnSpPr>
+        <p:spPr>
+          <a:xfrm>
+            <a:off x="8653272" y="4270248"/>
+            <a:ext cx="911352" cy="0"/>
+          </a:xfrm>
+          <a:prstGeom prst="straightConnector1">
+            <a:avLst/>
+          </a:prstGeom>
+          <a:noFill/>
+          <a:ln w="15875">
+            <a:solidFill>
+              <a:srgbClr val="333333"/>
+            </a:solidFill>
+            <a:prstDash val="solid"/>
+            <a:tailEnd type="triangle"/>
+          </a:ln>
+        </p:spPr>
+      </p:cxnSp>
+      <p:sp>
+        <p:nvSpPr>
+          <p:cNvPr id="49" name="Text 47"/>
+          <p:cNvSpPr txBox="1"/>
+          <p:nvPr/>
+        </p:nvSpPr>
+        <p:spPr>
+          <a:xfrm>
+            <a:off x="8670036" y="4041648"/>
+            <a:ext cx="877824" cy="201168"/>
+          </a:xfrm>
+          <a:prstGeom prst="rect">
+            <a:avLst/>
+          </a:prstGeom>
+          <a:noFill/>
+          <a:ln/>
+        </p:spPr>
+        <p:txBody>
+          <a:bodyPr wrap="square" lIns="0" tIns="0" rIns="0" bIns="0" rtlCol="0" anchor="ctr"/>
+          <a:lstStyle/>
+          <a:p>
+            <a:pPr algn="ctr" indent="0" marL="0">
+              <a:buNone/>
+            </a:pPr>
+            <a:r>
+              <a:rPr lang="en-US" sz="1100" i="1" dirty="0">
+                <a:solidFill>
+                  <a:srgbClr val="595959"/>
+                </a:solidFill>
+                <a:latin typeface="Times New Roman" pitchFamily="34" charset="0"/>
+                <a:ea typeface="Times New Roman" pitchFamily="34" charset="-122"/>
+                <a:cs typeface="Times New Roman" pitchFamily="34" charset="-120"/>
+              </a:rPr>
+              <a:t/>
+            </a:r>
+            <a:endParaRPr lang="en-US" sz="1100" dirty="0"/>
+          </a:p>
+        </p:txBody>
+      </p:sp>
+      <p:cxnSp>
+        <p:nvCxnSpPr>
+          <p:cNvPr id="50" name="Connector 50"/>
+          <p:cNvCxnSpPr>
+            <a:stCxn id="40" idx="2"/>
+            <a:endCxn id="41" idx="0"/>
+          </p:cNvCxnSpPr>
+          <p:nvPr/>
+        </p:nvCxnSpPr>
+        <p:spPr>
+          <a:xfrm>
+            <a:off x="10524744" y="4626864"/>
+            <a:ext cx="0" cy="292608"/>
+          </a:xfrm>
+          <a:prstGeom prst="straightConnector1">
+            <a:avLst/>
+          </a:prstGeom>
+          <a:noFill/>
+          <a:ln w="15875">
+            <a:solidFill>
+              <a:srgbClr val="333333"/>
+            </a:solidFill>
+            <a:prstDash val="solid"/>
+            <a:tailEnd type="triangle"/>
+          </a:ln>
+        </p:spPr>
+      </p:cxnSp>
+      <p:sp>
+        <p:nvSpPr>
+          <p:cNvPr id="51" name="Text 49"/>
+          <p:cNvSpPr txBox="1"/>
+          <p:nvPr/>
+        </p:nvSpPr>
+        <p:spPr>
+          <a:xfrm>
+            <a:off x="10597896" y="4672584"/>
+            <a:ext cx="640080" cy="201168"/>
+          </a:xfrm>
+          <a:prstGeom prst="rect">
+            <a:avLst/>
+          </a:prstGeom>
+          <a:noFill/>
+          <a:ln/>
+        </p:spPr>
+        <p:txBody>
+          <a:bodyPr wrap="square" lIns="0" tIns="0" rIns="0" bIns="0" rtlCol="0" anchor="ctr"/>
+          <a:lstStyle/>
+          <a:p>
+            <a:pPr algn="l" indent="0" marL="0">
+              <a:buNone/>
+            </a:pPr>
+            <a:r>
+              <a:rPr lang="en-US" sz="1100" i="1" dirty="0">
+                <a:solidFill>
+                  <a:srgbClr val="595959"/>
+                </a:solidFill>
+                <a:latin typeface="Times New Roman" pitchFamily="34" charset="0"/>
+                <a:ea typeface="Times New Roman" pitchFamily="34" charset="-122"/>
+                <a:cs typeface="Times New Roman" pitchFamily="34" charset="-120"/>
+              </a:rPr>
+              <a:t>on error</a:t>
+            </a:r>
+            <a:endParaRPr lang="en-US" sz="1100" dirty="0"/>
+          </a:p>
+        </p:txBody>
+      </p:sp>
+      <p:cxnSp>
+        <p:nvCxnSpPr>
+          <p:cNvPr id="52" name="Connector 52"/>
+          <p:cNvCxnSpPr>
+            <a:stCxn id="41" idx="1"/>
+            <a:endCxn id="42" idx="3"/>
+          </p:cNvCxnSpPr>
+          <p:nvPr/>
+        </p:nvCxnSpPr>
+        <p:spPr>
+          <a:xfrm flipH="1">
+            <a:off x="8653272" y="5276088"/>
+            <a:ext cx="911352" cy="0"/>
+          </a:xfrm>
+          <a:prstGeom prst="straightConnector1">
+            <a:avLst/>
+          </a:prstGeom>
+          <a:noFill/>
+          <a:ln w="15875">
+            <a:solidFill>
+              <a:srgbClr val="333333"/>
+            </a:solidFill>
+            <a:prstDash val="solid"/>
+            <a:tailEnd type="triangle"/>
+          </a:ln>
+        </p:spPr>
+      </p:cxnSp>
+      <p:sp>
+        <p:nvSpPr>
+          <p:cNvPr id="53" name="Text 51"/>
+          <p:cNvSpPr txBox="1"/>
+          <p:nvPr/>
+        </p:nvSpPr>
+        <p:spPr>
+          <a:xfrm>
+            <a:off x="8670036" y="5047488"/>
+            <a:ext cx="877824" cy="201168"/>
+          </a:xfrm>
+          <a:prstGeom prst="rect">
+            <a:avLst/>
+          </a:prstGeom>
+          <a:noFill/>
+          <a:ln/>
+        </p:spPr>
+        <p:txBody>
+          <a:bodyPr wrap="square" lIns="0" tIns="0" rIns="0" bIns="0" rtlCol="0" anchor="ctr"/>
+          <a:lstStyle/>
+          <a:p>
+            <a:pPr algn="ctr" indent="0" marL="0">
+              <a:buNone/>
+            </a:pPr>
+            <a:r>
+              <a:rPr lang="en-US" sz="1100" i="1" dirty="0">
+                <a:solidFill>
+                  <a:srgbClr val="595959"/>
+                </a:solidFill>
+                <a:latin typeface="Times New Roman" pitchFamily="34" charset="0"/>
+                <a:ea typeface="Times New Roman" pitchFamily="34" charset="-122"/>
+                <a:cs typeface="Times New Roman" pitchFamily="34" charset="-120"/>
+              </a:rPr>
+              <a:t/>
+            </a:r>
+            <a:endParaRPr lang="en-US" sz="1100" dirty="0"/>
+          </a:p>
+        </p:txBody>
+      </p:sp>
+      <p:cxnSp>
+        <p:nvCxnSpPr>
+          <p:cNvPr id="54" name="Connector 54"/>
+          <p:cNvCxnSpPr>
+            <a:stCxn id="42" idx="1"/>
+            <a:endCxn id="43" idx="3"/>
+          </p:cNvCxnSpPr>
+          <p:nvPr/>
+        </p:nvCxnSpPr>
+        <p:spPr>
+          <a:xfrm flipH="1">
+            <a:off x="5455920" y="5276088"/>
+            <a:ext cx="911352" cy="0"/>
+          </a:xfrm>
+          <a:prstGeom prst="straightConnector1">
+            <a:avLst/>
+          </a:prstGeom>
+          <a:noFill/>
+          <a:ln w="15875">
+            <a:solidFill>
+              <a:srgbClr val="333333"/>
+            </a:solidFill>
+            <a:prstDash val="solid"/>
+            <a:tailEnd type="triangle"/>
+          </a:ln>
+        </p:spPr>
+      </p:cxnSp>
+      <p:sp>
+        <p:nvSpPr>
+          <p:cNvPr id="55" name="Text 53"/>
+          <p:cNvSpPr txBox="1"/>
+          <p:nvPr/>
+        </p:nvSpPr>
+        <p:spPr>
+          <a:xfrm>
+            <a:off x="5472684" y="5047488"/>
+            <a:ext cx="877824" cy="201168"/>
+          </a:xfrm>
+          <a:prstGeom prst="rect">
+            <a:avLst/>
+          </a:prstGeom>
+          <a:noFill/>
+          <a:ln/>
+        </p:spPr>
+        <p:txBody>
+          <a:bodyPr wrap="square" lIns="0" tIns="0" rIns="0" bIns="0" rtlCol="0" anchor="ctr"/>
+          <a:lstStyle/>
+          <a:p>
+            <a:pPr algn="ctr" indent="0" marL="0">
+              <a:buNone/>
+            </a:pPr>
+            <a:r>
+              <a:rPr lang="en-US" sz="1100" i="1" dirty="0">
+                <a:solidFill>
+                  <a:srgbClr val="595959"/>
+                </a:solidFill>
+                <a:latin typeface="Times New Roman" pitchFamily="34" charset="0"/>
+                <a:ea typeface="Times New Roman" pitchFamily="34" charset="-122"/>
+                <a:cs typeface="Times New Roman" pitchFamily="34" charset="-120"/>
+              </a:rPr>
+              <a:t/>
+            </a:r>
+            <a:endParaRPr lang="en-US" sz="1100" dirty="0"/>
+          </a:p>
+        </p:txBody>
+      </p:sp>
+      <p:cxnSp>
+        <p:nvCxnSpPr>
+          <p:cNvPr id="56" name="Connector 56"/>
+          <p:cNvCxnSpPr>
+            <a:stCxn id="43" idx="1"/>
+          </p:cNvCxnSpPr>
+          <p:nvPr/>
+        </p:nvCxnSpPr>
+        <p:spPr>
+          <a:xfrm flipH="1">
+            <a:off x="2441448" y="5276088"/>
+            <a:ext cx="911352" cy="0"/>
+          </a:xfrm>
+          <a:prstGeom prst="straightConnector1">
+            <a:avLst/>
+          </a:prstGeom>
+          <a:noFill/>
+          <a:ln w="15875">
+            <a:solidFill>
+              <a:srgbClr val="333333"/>
+            </a:solidFill>
+            <a:prstDash val="solid"/>
+            <a:tailEnd type="triangle"/>
+          </a:ln>
+        </p:spPr>
+      </p:cxnSp>
+      <p:sp>
+        <p:nvSpPr>
+          <p:cNvPr id="57" name="Text 55"/>
+          <p:cNvSpPr txBox="1"/>
+          <p:nvPr/>
+        </p:nvSpPr>
+        <p:spPr>
+          <a:xfrm>
+            <a:off x="2458212" y="5047488"/>
+            <a:ext cx="877824" cy="201168"/>
+          </a:xfrm>
+          <a:prstGeom prst="rect">
+            <a:avLst/>
+          </a:prstGeom>
+          <a:noFill/>
+          <a:ln/>
+        </p:spPr>
+        <p:txBody>
+          <a:bodyPr wrap="square" lIns="0" tIns="0" rIns="0" bIns="0" rtlCol="0" anchor="ctr"/>
+          <a:lstStyle/>
+          <a:p>
+            <a:pPr algn="ctr" indent="0" marL="0">
+              <a:buNone/>
+            </a:pPr>
+            <a:r>
+              <a:rPr lang="en-US" sz="1100" i="1" dirty="0">
+                <a:solidFill>
+                  <a:srgbClr val="595959"/>
+                </a:solidFill>
+                <a:latin typeface="Times New Roman" pitchFamily="34" charset="0"/>
+                <a:ea typeface="Times New Roman" pitchFamily="34" charset="-122"/>
+                <a:cs typeface="Times New Roman" pitchFamily="34" charset="-120"/>
+              </a:rPr>
+              <a:t/>
+            </a:r>
+            <a:endParaRPr lang="en-US" sz="1100" dirty="0"/>
+          </a:p>
+        </p:txBody>
+      </p:sp>
+      <p:sp>
+        <p:nvSpPr>
+          <p:cNvPr id="58" name="Shape 56"/>
+          <p:cNvSpPr/>
+          <p:nvPr/>
+        </p:nvSpPr>
+        <p:spPr>
+          <a:xfrm>
+            <a:off x="594360" y="5879592"/>
+            <a:ext cx="384048" cy="201168"/>
+          </a:xfrm>
+          <a:prstGeom prst="rect">
+            <a:avLst/>
+          </a:prstGeom>
+          <a:solidFill>
+            <a:srgbClr val="FFFFFF"/>
+          </a:solidFill>
+          <a:ln w="12700">
+            <a:solidFill>
+              <a:srgbClr val="333333"/>
+            </a:solidFill>
+            <a:prstDash val="solid"/>
+          </a:ln>
+        </p:spPr>
+        <p:txBody>
+          <a:bodyPr/>
+          <a:p/>
+        </p:txBody>
+      </p:sp>
+      <p:sp>
+        <p:nvSpPr>
+          <p:cNvPr id="59" name="Text 57"/>
+          <p:cNvSpPr txBox="1"/>
+          <p:nvPr/>
+        </p:nvSpPr>
+        <p:spPr>
+          <a:xfrm>
+            <a:off x="1051560" y="5852160"/>
+            <a:ext cx="1371600" cy="256032"/>
+          </a:xfrm>
+          <a:prstGeom prst="rect">
+            <a:avLst/>
+          </a:prstGeom>
+          <a:noFill/>
+          <a:ln/>
+        </p:spPr>
+        <p:txBody>
+          <a:bodyPr wrap="square" lIns="0" tIns="0" rIns="0" bIns="0" rtlCol="0" anchor="ctr"/>
+          <a:lstStyle/>
+          <a:p>
+            <a:pPr indent="0" marL="0">
+              <a:buNone/>
+            </a:pPr>
+            <a:r>
+              <a:rPr lang="en-US" sz="1100" dirty="0">
+                <a:solidFill>
+                  <a:srgbClr val="1A1A1A"/>
+                </a:solidFill>
+                <a:latin typeface="Times New Roman" pitchFamily="34" charset="0"/>
+                <a:ea typeface="Times New Roman" pitchFamily="34" charset="-122"/>
+                <a:cs typeface="Times New Roman" pitchFamily="34" charset="-120"/>
+              </a:rPr>
+              <a:t>Implemented in code</a:t>
+            </a:r>
+            <a:endParaRPr lang="en-US" sz="1100" dirty="0"/>
+          </a:p>
+        </p:txBody>
+      </p:sp>
+      <p:sp>
+        <p:nvSpPr>
+          <p:cNvPr id="60" name="Shape 58"/>
+          <p:cNvSpPr/>
+          <p:nvPr/>
+        </p:nvSpPr>
+        <p:spPr>
+          <a:xfrm>
+            <a:off x="2606040" y="5879592"/>
+            <a:ext cx="384048" cy="201168"/>
+          </a:xfrm>
+          <a:prstGeom prst="rect">
+            <a:avLst/>
+          </a:prstGeom>
+          <a:solidFill>
+            <a:srgbClr val="F2F2F2"/>
+          </a:solidFill>
+          <a:ln w="9525">
+            <a:solidFill>
+              <a:srgbClr val="808080"/>
+            </a:solidFill>
+            <a:prstDash val="solid"/>
+          </a:ln>
+        </p:spPr>
+        <p:txBody>
+          <a:bodyPr/>
+          <a:p/>
+        </p:txBody>
+      </p:sp>
+      <p:sp>
+        <p:nvSpPr>
+          <p:cNvPr id="61" name="Text 59"/>
+          <p:cNvSpPr txBox="1"/>
+          <p:nvPr/>
+        </p:nvSpPr>
+        <p:spPr>
+          <a:xfrm>
+            <a:off x="3063240" y="5852160"/>
+            <a:ext cx="1005840" cy="256032"/>
+          </a:xfrm>
+          <a:prstGeom prst="rect">
+            <a:avLst/>
+          </a:prstGeom>
+          <a:noFill/>
+          <a:ln/>
+        </p:spPr>
+        <p:txBody>
+          <a:bodyPr wrap="square" lIns="0" tIns="0" rIns="0" bIns="0" rtlCol="0" anchor="ctr"/>
+          <a:lstStyle/>
+          <a:p>
+            <a:pPr indent="0" marL="0">
+              <a:buNone/>
+            </a:pPr>
+            <a:r>
+              <a:rPr lang="en-US" sz="1100" dirty="0">
+                <a:solidFill>
+                  <a:srgbClr val="1A1A1A"/>
+                </a:solidFill>
+                <a:latin typeface="Times New Roman" pitchFamily="34" charset="0"/>
+                <a:ea typeface="Times New Roman" pitchFamily="34" charset="-122"/>
+                <a:cs typeface="Times New Roman" pitchFamily="34" charset="-120"/>
+              </a:rPr>
+              <a:t>Actor, not code</a:t>
+            </a:r>
+            <a:endParaRPr lang="en-US" sz="1100" dirty="0"/>
+          </a:p>
+        </p:txBody>
+      </p:sp>
+      <p:sp>
+        <p:nvSpPr>
+          <p:cNvPr id="62" name="Shape 60"/>
+          <p:cNvSpPr/>
+          <p:nvPr/>
+        </p:nvSpPr>
+        <p:spPr>
+          <a:xfrm>
+            <a:off x="4297680" y="5879592"/>
+            <a:ext cx="384048" cy="201168"/>
           </a:xfrm>
           <a:prstGeom prst="rect">
             <a:avLst/>
@@ -32458,17 +37971,36 @@
           </a:ln>
         </p:spPr>
         <p:txBody>
-          <a:bodyPr wrap="square" lIns="63500" tIns="88900" rIns="88900" bIns="63500" rtlCol="0" anchor="t"/>
+          <a:bodyPr/>
+          <a:p/>
+        </p:txBody>
+      </p:sp>
+      <p:sp>
+        <p:nvSpPr>
+          <p:cNvPr id="63" name="Text 61"/>
+          <p:cNvSpPr txBox="1"/>
+          <p:nvPr/>
+        </p:nvSpPr>
+        <p:spPr>
+          <a:xfrm>
+            <a:off x="4754880" y="5852160"/>
+            <a:ext cx="822960" cy="256032"/>
+          </a:xfrm>
+          <a:prstGeom prst="rect">
+            <a:avLst/>
+          </a:prstGeom>
+          <a:noFill/>
+          <a:ln/>
+        </p:spPr>
+        <p:txBody>
+          <a:bodyPr wrap="square" lIns="0" tIns="0" rIns="0" bIns="0" rtlCol="0" anchor="ctr"/>
           <a:lstStyle/>
           <a:p>
-            <a:pPr algn="l" indent="0" marL="0">
-              <a:spcAft>
-                <a:spcPts val="300"/>
-              </a:spcAft>
-              <a:buNone/>
-            </a:pPr>
-            <a:r>
-              <a:rPr lang="en-US" sz="1200" b="1" dirty="0">
+            <a:pPr indent="0" marL="0">
+              <a:buNone/>
+            </a:pPr>
+            <a:r>
+              <a:rPr lang="en-US" sz="1100" dirty="0">
                 <a:solidFill>
                   <a:srgbClr val="1A1A1A"/>
                 </a:solidFill>
@@ -32476,59 +38008,22 @@
                 <a:ea typeface="Times New Roman" pitchFamily="34" charset="-122"/>
                 <a:cs typeface="Times New Roman" pitchFamily="34" charset="-120"/>
               </a:rPr>
-              <a:t>deploys on: Tuesday</a:t>
-            </a:r>
-            <a:endParaRPr lang="en-US" sz="1200" dirty="0"/>
-          </a:p>
-          <a:p>
-            <a:pPr algn="l" indent="0" marL="0">
-              <a:buNone/>
-            </a:pPr>
-            <a:r>
-              <a:rPr lang="en-US" sz="1100" dirty="0">
-                <a:solidFill>
-                  <a:srgbClr val="1A1A1A"/>
-                </a:solidFill>
-                <a:latin typeface="Times New Roman" pitchFamily="34" charset="0"/>
-                <a:ea typeface="Times New Roman" pitchFamily="34" charset="-122"/>
-                <a:cs typeface="Times New Roman" pitchFamily="34" charset="-120"/>
-              </a:rPr>
-              <a:t>status: active, valid_to: empty</a:t>
-            </a:r>
-            <a:endParaRPr lang="en-US" sz="1200" dirty="0"/>
-          </a:p>
-          <a:p>
-            <a:pPr algn="l" indent="0" marL="0">
-              <a:buNone/>
-            </a:pPr>
-            <a:r>
-              <a:rPr lang="en-US" sz="1100" dirty="0">
-                <a:solidFill>
-                  <a:srgbClr val="1A1A1A"/>
-                </a:solidFill>
-                <a:latin typeface="Times New Roman" pitchFamily="34" charset="0"/>
-                <a:ea typeface="Times New Roman" pitchFamily="34" charset="-122"/>
-                <a:cs typeface="Times New Roman" pitchFamily="34" charset="-120"/>
-              </a:rPr>
-              <a:t>valid_from: session 3</a:t>
-            </a:r>
-            <a:endParaRPr lang="en-US" sz="1200" dirty="0"/>
+              <a:t>Key box</a:t>
+            </a:r>
+            <a:endParaRPr lang="en-US" sz="1100" dirty="0"/>
           </a:p>
         </p:txBody>
       </p:sp>
       <p:cxnSp>
         <p:nvCxnSpPr>
-          <p:cNvPr id="28" name="Connector 28"/>
-          <p:cNvCxnSpPr>
-            <a:stCxn id="27" idx="1"/>
-            <a:endCxn id="26" idx="3"/>
-          </p:cNvCxnSpPr>
+          <p:cNvPr id="64" name="Connector 64"/>
+          <p:cNvCxnSpPr/>
           <p:nvPr/>
         </p:nvCxnSpPr>
         <p:spPr>
-          <a:xfrm flipH="1">
-            <a:off x="3657600" y="5404104"/>
-            <a:ext cx="1737360" cy="0"/>
+          <a:xfrm>
+            <a:off x="5669280" y="5980176"/>
+            <a:ext cx="384048" cy="0"/>
           </a:xfrm>
           <a:prstGeom prst="straightConnector1">
             <a:avLst/>
@@ -32545,14 +38040,14 @@
       </p:cxnSp>
       <p:sp>
         <p:nvSpPr>
-          <p:cNvPr id="29" name="Text 27"/>
+          <p:cNvPr id="65" name="Text 63"/>
           <p:cNvSpPr txBox="1"/>
           <p:nvPr/>
         </p:nvSpPr>
         <p:spPr>
           <a:xfrm>
-            <a:off x="4069080" y="5120640"/>
-            <a:ext cx="914400" cy="256032"/>
+            <a:off x="6126480" y="5852160"/>
+            <a:ext cx="1371600" cy="256032"/>
           </a:xfrm>
           <a:prstGeom prst="rect">
             <a:avLst/>
@@ -32564,19 +38059,19 @@
           <a:bodyPr wrap="square" lIns="0" tIns="0" rIns="0" bIns="0" rtlCol="0" anchor="ctr"/>
           <a:lstStyle/>
           <a:p>
-            <a:pPr algn="ctr" indent="0" marL="0">
-              <a:buNone/>
-            </a:pPr>
-            <a:r>
-              <a:rPr lang="en-US" sz="1100" i="1" dirty="0">
-                <a:solidFill>
-                  <a:srgbClr val="595959"/>
-                </a:solidFill>
-                <a:latin typeface="Times New Roman" pitchFamily="34" charset="0"/>
-                <a:ea typeface="Times New Roman" pitchFamily="34" charset="-122"/>
-                <a:cs typeface="Times New Roman" pitchFamily="34" charset="-120"/>
-              </a:rPr>
-              <a:t>supersedes</a:t>
+            <a:pPr indent="0" marL="0">
+              <a:buNone/>
+            </a:pPr>
+            <a:r>
+              <a:rPr lang="en-US" sz="1100" dirty="0">
+                <a:solidFill>
+                  <a:srgbClr val="1A1A1A"/>
+                </a:solidFill>
+                <a:latin typeface="Times New Roman" pitchFamily="34" charset="0"/>
+                <a:ea typeface="Times New Roman" pitchFamily="34" charset="-122"/>
+                <a:cs typeface="Times New Roman" pitchFamily="34" charset="-120"/>
+              </a:rPr>
+              <a:t>Labelled data or call</a:t>
             </a:r>
             <a:endParaRPr lang="en-US" sz="1100" dirty="0"/>
           </a:p>
@@ -32584,454 +38079,7 @@
       </p:sp>
       <p:sp>
         <p:nvSpPr>
-          <p:cNvPr id="30" name="Text 28"/>
-          <p:cNvSpPr/>
-          <p:nvPr/>
-        </p:nvSpPr>
-        <p:spPr>
-          <a:xfrm>
-            <a:off x="8823960" y="1225296"/>
-            <a:ext cx="292608" cy="292608"/>
-          </a:xfrm>
-          <a:prstGeom prst="rect">
-            <a:avLst/>
-          </a:prstGeom>
-          <a:solidFill>
-            <a:srgbClr val="000000"/>
-          </a:solidFill>
-          <a:ln w="6350">
-            <a:solidFill>
-              <a:srgbClr val="000000"/>
-            </a:solidFill>
-          </a:ln>
-        </p:spPr>
-        <p:txBody>
-          <a:bodyPr wrap="square" lIns="0" tIns="0" rIns="0" bIns="0" rtlCol="0" anchor="ctr"/>
-          <a:lstStyle/>
-          <a:p>
-            <a:pPr algn="ctr" indent="0" marL="0">
-              <a:buNone/>
-            </a:pPr>
-            <a:r>
-              <a:rPr lang="en-US" sz="1300" b="1" dirty="0">
-                <a:solidFill>
-                  <a:srgbClr val="FFFFFF"/>
-                </a:solidFill>
-                <a:latin typeface="Times New Roman" pitchFamily="34" charset="0"/>
-                <a:ea typeface="Times New Roman" pitchFamily="34" charset="-122"/>
-                <a:cs typeface="Times New Roman" pitchFamily="34" charset="-120"/>
-              </a:rPr>
-              <a:t>3</a:t>
-            </a:r>
-            <a:endParaRPr lang="en-US" sz="1300" dirty="0"/>
-          </a:p>
-        </p:txBody>
-      </p:sp>
-      <p:sp>
-        <p:nvSpPr>
-          <p:cNvPr id="31" name="Text 29"/>
-          <p:cNvSpPr txBox="1"/>
-          <p:nvPr/>
-        </p:nvSpPr>
-        <p:spPr>
-          <a:xfrm>
-            <a:off x="9226296" y="1225296"/>
-            <a:ext cx="2743200" cy="292608"/>
-          </a:xfrm>
-          <a:prstGeom prst="rect">
-            <a:avLst/>
-          </a:prstGeom>
-          <a:noFill/>
-          <a:ln/>
-        </p:spPr>
-        <p:txBody>
-          <a:bodyPr wrap="square" lIns="0" tIns="0" rIns="0" bIns="0" rtlCol="0" anchor="ctr"/>
-          <a:lstStyle/>
-          <a:p>
-            <a:pPr indent="0" marL="0">
-              <a:buNone/>
-            </a:pPr>
-            <a:r>
-              <a:rPr lang="en-US" sz="1300" b="1" dirty="0">
-                <a:solidFill>
-                  <a:srgbClr val="000000"/>
-                </a:solidFill>
-                <a:latin typeface="Times New Roman" pitchFamily="34" charset="0"/>
-                <a:ea typeface="Times New Roman" pitchFamily="34" charset="-122"/>
-                <a:cs typeface="Times New Roman" pitchFamily="34" charset="-120"/>
-              </a:rPr>
-              <a:t>GRAPH PROJECTION</a:t>
-            </a:r>
-            <a:endParaRPr lang="en-US" sz="1300" dirty="0"/>
-          </a:p>
-        </p:txBody>
-      </p:sp>
-      <p:sp>
-        <p:nvSpPr>
-          <p:cNvPr id="32" name="Text 30"/>
-          <p:cNvSpPr/>
-          <p:nvPr/>
-        </p:nvSpPr>
-        <p:spPr>
-          <a:xfrm>
-            <a:off x="8823960" y="1572768"/>
-            <a:ext cx="2773375" cy="914400"/>
-          </a:xfrm>
-          <a:prstGeom prst="rect">
-            <a:avLst/>
-          </a:prstGeom>
-          <a:solidFill>
-            <a:srgbClr val="F2F2F2"/>
-          </a:solidFill>
-          <a:ln w="22225">
-            <a:solidFill>
-              <a:srgbClr val="000000"/>
-            </a:solidFill>
-            <a:prstDash val="solid"/>
-          </a:ln>
-        </p:spPr>
-        <p:txBody>
-          <a:bodyPr wrap="square" lIns="63500" tIns="88900" rIns="88900" bIns="63500" rtlCol="0" anchor="t"/>
-          <a:lstStyle/>
-          <a:p>
-            <a:pPr algn="l" indent="0" marL="0">
-              <a:spcAft>
-                <a:spcPts val="300"/>
-              </a:spcAft>
-              <a:buNone/>
-            </a:pPr>
-            <a:r>
-              <a:rPr lang="en-US" sz="1200" b="1" dirty="0">
-                <a:solidFill>
-                  <a:srgbClr val="1A1A1A"/>
-                </a:solidFill>
-                <a:latin typeface="Times New Roman" pitchFamily="34" charset="0"/>
-                <a:ea typeface="Times New Roman" pitchFamily="34" charset="-122"/>
-                <a:cs typeface="Times New Roman" pitchFamily="34" charset="-120"/>
-              </a:rPr>
-              <a:t>PostgreSQL 17, authoritative</a:t>
-            </a:r>
-            <a:endParaRPr lang="en-US" sz="1200" dirty="0"/>
-          </a:p>
-          <a:p>
-            <a:pPr algn="l" indent="0" marL="0">
-              <a:buNone/>
-            </a:pPr>
-            <a:r>
-              <a:rPr lang="en-US" sz="1100" dirty="0">
-                <a:solidFill>
-                  <a:srgbClr val="1A1A1A"/>
-                </a:solidFill>
-                <a:latin typeface="Times New Roman" pitchFamily="34" charset="0"/>
-                <a:ea typeface="Times New Roman" pitchFamily="34" charset="-122"/>
-                <a:cs typeface="Times New Roman" pitchFamily="34" charset="-120"/>
-              </a:rPr>
-              <a:t>Entities resolve by exact type and name, else one grounded alias, never by similarity. Every update raises a revision.</a:t>
-            </a:r>
-            <a:endParaRPr lang="en-US" sz="1200" dirty="0"/>
-          </a:p>
-        </p:txBody>
-      </p:sp>
-      <p:sp>
-        <p:nvSpPr>
-          <p:cNvPr id="33" name="Text 31"/>
-          <p:cNvSpPr/>
-          <p:nvPr/>
-        </p:nvSpPr>
-        <p:spPr>
-          <a:xfrm>
-            <a:off x="8823960" y="2743200"/>
-            <a:ext cx="2773375" cy="1097280"/>
-          </a:xfrm>
-          <a:prstGeom prst="rect">
-            <a:avLst/>
-          </a:prstGeom>
-          <a:solidFill>
-            <a:srgbClr val="FFFFFF"/>
-          </a:solidFill>
-          <a:ln w="12700">
-            <a:solidFill>
-              <a:srgbClr val="333333"/>
-            </a:solidFill>
-            <a:prstDash val="solid"/>
-          </a:ln>
-        </p:spPr>
-        <p:txBody>
-          <a:bodyPr wrap="square" lIns="63500" tIns="88900" rIns="88900" bIns="63500" rtlCol="0" anchor="t"/>
-          <a:lstStyle/>
-          <a:p>
-            <a:pPr algn="l" indent="0" marL="0">
-              <a:spcAft>
-                <a:spcPts val="300"/>
-              </a:spcAft>
-              <a:buNone/>
-            </a:pPr>
-            <a:r>
-              <a:rPr lang="en-US" sz="1200" b="1" dirty="0">
-                <a:solidFill>
-                  <a:srgbClr val="1A1A1A"/>
-                </a:solidFill>
-                <a:latin typeface="Times New Roman" pitchFamily="34" charset="0"/>
-                <a:ea typeface="Times New Roman" pitchFamily="34" charset="-122"/>
-                <a:cs typeface="Times New Roman" pitchFamily="34" charset="-120"/>
-              </a:rPr>
-              <a:t>Neo4j 5.26, projection</a:t>
-            </a:r>
-            <a:endParaRPr lang="en-US" sz="1200" dirty="0"/>
-          </a:p>
-          <a:p>
-            <a:pPr algn="l" indent="0" marL="0">
-              <a:buNone/>
-            </a:pPr>
-            <a:r>
-              <a:rPr lang="en-US" sz="1100" dirty="0">
-                <a:solidFill>
-                  <a:srgbClr val="1A1A1A"/>
-                </a:solidFill>
-                <a:latin typeface="Times New Roman" pitchFamily="34" charset="0"/>
-                <a:ea typeface="Times New Roman" pitchFamily="34" charset="-122"/>
-                <a:cs typeface="Times New Roman" pitchFamily="34" charset="-120"/>
-              </a:rPr>
-              <a:t>Assertion, KnowledgeEntity and MemoryNamespace nodes, MENTIONS and SUPPORTS edges. A write with an older revision is dropped.</a:t>
-            </a:r>
-            <a:endParaRPr lang="en-US" sz="1200" dirty="0"/>
-          </a:p>
-        </p:txBody>
-      </p:sp>
-      <p:sp>
-        <p:nvSpPr>
-          <p:cNvPr id="34" name="Text 32"/>
-          <p:cNvSpPr/>
-          <p:nvPr/>
-        </p:nvSpPr>
-        <p:spPr>
-          <a:xfrm>
-            <a:off x="8823960" y="4096512"/>
-            <a:ext cx="2773375" cy="1005840"/>
-          </a:xfrm>
-          <a:prstGeom prst="rect">
-            <a:avLst/>
-          </a:prstGeom>
-          <a:solidFill>
-            <a:srgbClr val="FFFFFF"/>
-          </a:solidFill>
-          <a:ln w="12700">
-            <a:solidFill>
-              <a:srgbClr val="333333"/>
-            </a:solidFill>
-            <a:prstDash val="solid"/>
-          </a:ln>
-        </p:spPr>
-        <p:txBody>
-          <a:bodyPr wrap="square" lIns="63500" tIns="88900" rIns="88900" bIns="63500" rtlCol="0" anchor="t"/>
-          <a:lstStyle/>
-          <a:p>
-            <a:pPr algn="l" indent="0" marL="0">
-              <a:spcAft>
-                <a:spcPts val="300"/>
-              </a:spcAft>
-              <a:buNone/>
-            </a:pPr>
-            <a:r>
-              <a:rPr lang="en-US" sz="1200" b="1" dirty="0">
-                <a:solidFill>
-                  <a:srgbClr val="1A1A1A"/>
-                </a:solidFill>
-                <a:latin typeface="Times New Roman" pitchFamily="34" charset="0"/>
-                <a:ea typeface="Times New Roman" pitchFamily="34" charset="-122"/>
-                <a:cs typeface="Times New Roman" pitchFamily="34" charset="-120"/>
-              </a:rPr>
-              <a:t>Graph arm in recall</a:t>
-            </a:r>
-            <a:endParaRPr lang="en-US" sz="1200" dirty="0"/>
-          </a:p>
-          <a:p>
-            <a:pPr algn="l" indent="0" marL="0">
-              <a:buNone/>
-            </a:pPr>
-            <a:r>
-              <a:rPr lang="en-US" sz="1100" dirty="0">
-                <a:solidFill>
-                  <a:srgbClr val="1A1A1A"/>
-                </a:solidFill>
-                <a:latin typeface="Times New Roman" pitchFamily="34" charset="0"/>
-                <a:ea typeface="Times New Roman" pitchFamily="34" charset="-122"/>
-                <a:cs typeface="Times New Roman" pitchFamily="34" charset="-120"/>
-              </a:rPr>
-              <a:t>Seeds: top 5 lexical, top 5 semantic, 10 by entity name. Two expansion rounds, 200 rows at most. PostgreSQL checks every id again.</a:t>
-            </a:r>
-            <a:endParaRPr lang="en-US" sz="1200" dirty="0"/>
-          </a:p>
-        </p:txBody>
-      </p:sp>
-      <p:cxnSp>
-        <p:nvCxnSpPr>
-          <p:cNvPr id="35" name="Connector 35"/>
-          <p:cNvCxnSpPr/>
-          <p:nvPr/>
-        </p:nvCxnSpPr>
-        <p:spPr>
-          <a:xfrm>
-            <a:off x="9156765" y="2487168"/>
-            <a:ext cx="0" cy="256032"/>
-          </a:xfrm>
-          <a:prstGeom prst="straightConnector1">
-            <a:avLst/>
-          </a:prstGeom>
-          <a:noFill/>
-          <a:ln w="15875">
-            <a:solidFill>
-              <a:srgbClr val="333333"/>
-            </a:solidFill>
-            <a:prstDash val="solid"/>
-            <a:tailEnd type="triangle"/>
-          </a:ln>
-        </p:spPr>
-      </p:cxnSp>
-      <p:sp>
-        <p:nvSpPr>
-          <p:cNvPr id="36" name="Text 34"/>
-          <p:cNvSpPr txBox="1"/>
-          <p:nvPr/>
-        </p:nvSpPr>
-        <p:spPr>
-          <a:xfrm>
-            <a:off x="9229917" y="2487168"/>
-            <a:ext cx="1554480" cy="256032"/>
-          </a:xfrm>
-          <a:prstGeom prst="rect">
-            <a:avLst/>
-          </a:prstGeom>
-          <a:noFill/>
-          <a:ln/>
-        </p:spPr>
-        <p:txBody>
-          <a:bodyPr wrap="square" lIns="0" tIns="0" rIns="0" bIns="0" rtlCol="0" anchor="ctr"/>
-          <a:lstStyle/>
-          <a:p>
-            <a:pPr algn="l" indent="0" marL="0">
-              <a:buNone/>
-            </a:pPr>
-            <a:r>
-              <a:rPr lang="en-US" sz="1100" i="1" dirty="0">
-                <a:solidFill>
-                  <a:srgbClr val="595959"/>
-                </a:solidFill>
-                <a:latin typeface="Times New Roman" pitchFamily="34" charset="0"/>
-                <a:ea typeface="Times New Roman" pitchFamily="34" charset="-122"/>
-                <a:cs typeface="Times New Roman" pitchFamily="34" charset="-120"/>
-              </a:rPr>
-              <a:t>assertion id, revision</a:t>
-            </a:r>
-            <a:endParaRPr lang="en-US" sz="1100" dirty="0"/>
-          </a:p>
-        </p:txBody>
-      </p:sp>
-      <p:cxnSp>
-        <p:nvCxnSpPr>
-          <p:cNvPr id="37" name="Connector 37"/>
-          <p:cNvCxnSpPr/>
-          <p:nvPr/>
-        </p:nvCxnSpPr>
-        <p:spPr>
-          <a:xfrm>
-            <a:off x="9156765" y="3840480"/>
-            <a:ext cx="0" cy="256032"/>
-          </a:xfrm>
-          <a:prstGeom prst="straightConnector1">
-            <a:avLst/>
-          </a:prstGeom>
-          <a:noFill/>
-          <a:ln w="15875">
-            <a:solidFill>
-              <a:srgbClr val="333333"/>
-            </a:solidFill>
-            <a:prstDash val="solid"/>
-            <a:tailEnd type="triangle"/>
-          </a:ln>
-        </p:spPr>
-      </p:cxnSp>
-      <p:sp>
-        <p:nvSpPr>
-          <p:cNvPr id="38" name="Text 36"/>
-          <p:cNvSpPr txBox="1"/>
-          <p:nvPr/>
-        </p:nvSpPr>
-        <p:spPr>
-          <a:xfrm>
-            <a:off x="9229917" y="3840480"/>
-            <a:ext cx="1554480" cy="256032"/>
-          </a:xfrm>
-          <a:prstGeom prst="rect">
-            <a:avLst/>
-          </a:prstGeom>
-          <a:noFill/>
-          <a:ln/>
-        </p:spPr>
-        <p:txBody>
-          <a:bodyPr wrap="square" lIns="0" tIns="0" rIns="0" bIns="0" rtlCol="0" anchor="ctr"/>
-          <a:lstStyle/>
-          <a:p>
-            <a:pPr algn="l" indent="0" marL="0">
-              <a:buNone/>
-            </a:pPr>
-            <a:r>
-              <a:rPr lang="en-US" sz="1100" i="1" dirty="0">
-                <a:solidFill>
-                  <a:srgbClr val="595959"/>
-                </a:solidFill>
-                <a:latin typeface="Times New Roman" pitchFamily="34" charset="0"/>
-                <a:ea typeface="Times New Roman" pitchFamily="34" charset="-122"/>
-                <a:cs typeface="Times New Roman" pitchFamily="34" charset="-120"/>
-              </a:rPr>
-              <a:t>candidate ids, paths</a:t>
-            </a:r>
-            <a:endParaRPr lang="en-US" sz="1100" dirty="0"/>
-          </a:p>
-        </p:txBody>
-      </p:sp>
-      <p:sp>
-        <p:nvSpPr>
-          <p:cNvPr id="39" name="Text 37"/>
-          <p:cNvSpPr txBox="1"/>
-          <p:nvPr/>
-        </p:nvSpPr>
-        <p:spPr>
-          <a:xfrm>
-            <a:off x="8823960" y="5212080"/>
-            <a:ext cx="2773375" cy="777240"/>
-          </a:xfrm>
-          <a:prstGeom prst="rect">
-            <a:avLst/>
-          </a:prstGeom>
-          <a:noFill/>
-          <a:ln/>
-        </p:spPr>
-        <p:txBody>
-          <a:bodyPr wrap="square" lIns="0" tIns="0" rIns="0" bIns="0" rtlCol="0" anchor="t"/>
-          <a:lstStyle/>
-          <a:p>
-            <a:pPr indent="0" marL="0">
-              <a:buNone/>
-            </a:pPr>
-            <a:r>
-              <a:rPr lang="en-US" sz="1100" dirty="0">
-                <a:solidFill>
-                  <a:srgbClr val="1A1A1A"/>
-                </a:solidFill>
-                <a:latin typeface="Times New Roman" pitchFamily="34" charset="0"/>
-                <a:ea typeface="Times New Roman" pitchFamily="34" charset="-122"/>
-                <a:cs typeface="Times New Roman" pitchFamily="34" charset="-120"/>
-              </a:rPr>
-              <a:t>Every fact traces back to its exact quote, chunk and raw event. Graph results are ranked by Neo4j row order, and we have not measured what the graph search adds.</a:t>
-            </a:r>
-            <a:endParaRPr lang="en-US" sz="1100" dirty="0"/>
-          </a:p>
-        </p:txBody>
-      </p:sp>
-      <p:sp>
-        <p:nvSpPr>
-          <p:cNvPr id="40" name="Slide Number Placeholder 0"/>
+          <p:cNvPr id="66" name="Slide Number Placeholder 0"/>
           <p:cNvSpPr>
             <a:spLocks noGrp="1"/>
           </p:cNvSpPr>

--- a/P1_R2_13.pptx
+++ b/P1_R2_13.pptx
@@ -20,7 +20,6 @@
     <p:sldId id="267" r:id="rId13"/>
     <p:sldId id="268" r:id="rId14"/>
     <p:sldId id="269" r:id="rId15"/>
-    <p:sldId id="273" r:id="rId24"/>
     <p:sldId id="270" r:id="rId16"/>
     <p:sldId id="271" r:id="rId17"/>
   </p:sldIdLst>
@@ -1070,7 +1069,7 @@
             <a:pPr/>
             <a:r>
               <a:rPr lang="en-US" dirty="0"/>
-              <a:t>Every row is one measurement on one machine, mostly on our own user:dev namespace, so none of this is a benchmark result. The two numbers that miss their target are the median context size and the latency when the date planner runs.</a:t>
+              <a:t>Every row is one measurement on one machine, mostly on our own user:dev namespace, so treat each as a single measurement. The two numbers that miss their target are the median context size and the latency when the date planner runs.</a:t>
             </a:r>
           </a:p>
           <a:p>
@@ -1092,7 +1091,7 @@
             </a:pPr>
             <a:r>
               <a:rPr lang="en-US" dirty="0"/>
-              <a:t>The local model row replays 10 of the 18 document batches that the hosted model had already processed, and the 14B model passed 2 of them. LongMemEval-S has not been run, because it needs a 277 MB dataset and a lot of model use, so we cannot say yet that memory improves answers.</a:t>
+              <a:t>The local model row replays 10 of the 18 document batches that the hosted model had already processed, and the 14B model passed 2 of them.</a:t>
             </a:r>
           </a:p>
         </p:txBody>
@@ -1191,7 +1190,7 @@
             </a:pPr>
             <a:r>
               <a:rPr lang="en-US" dirty="0"/>
-              <a:t>M4 covers jobs, consolidation, traces, metrics and the LongMemEval runner, and decay, re-embedding and backup are Planned. The local 14B extractor is In progress because it passed validation on only 2 of 10 test batches.</a:t>
+              <a:t>M4 covers jobs, consolidation, traces and metrics, and decay, re-embedding and backup are Planned. The local 14B extractor is In progress because it passed validation on only 2 of 10 test batches.</a:t>
             </a:r>
           </a:p>
           <a:p>
@@ -1202,7 +1201,7 @@
             </a:pPr>
             <a:r>
               <a:rPr lang="en-US" dirty="0"/>
-              <a:t>The fine-tuned worker is In progress because its internal scores are mixed: consolidation and reflection improved, extraction coverage fell, and we have not yet run the full benchmark with it.</a:t>
+              <a:t>The fine-tuned worker is In progress because its internal scores are mixed: consolidation and reflection improved, extraction coverage fell.</a:t>
             </a:r>
           </a:p>
         </p:txBody>
@@ -1421,76 +1420,6 @@
           <a:p>
             <a:r>
               <a:t>Retaining a conversation and interpreting it are separate jobs. Retain stores the episode and queues an extract job in one transaction. A worker claims that job under a lease, sends windows of about 2,800 tokens to mem-extractor on Ollama, and checks every reply against the engine's rules, with at most two repairs. Valid claims are stored as facts: a new value in a single-value slot supersedes the old one, and the old one stays as history. Storing an episode queues a consolidate job, where the same model combines two or more facts into observations, and a project job that copies entities and edges to Neo4j. A job lease renewed every 30 seconds lets one attempt own a job, and a namespace lease keeps one episode per namespace at a time, so four namespaces run in parallel by default. A late attempt that lost its lease cannot commit. There is no fallback model: if the model is unreachable or never gives a valid reply, the job fails and is retried.</a:t>
-            </a:r>
-          </a:p>
-        </p:txBody>
-      </p:sp>
-      <p:sp>
-        <p:nvSpPr>
-          <p:cNvPr id="4" name="Slide Number Placeholder 3"/>
-          <p:cNvSpPr>
-            <a:spLocks noGrp="1"/>
-          </p:cNvSpPr>
-          <p:nvPr>
-            <p:ph type="sldNum" idx="5" sz="quarter"/>
-          </p:nvPr>
-        </p:nvSpPr>
-        <p:spPr/>
-      </p:sp>
-    </p:spTree>
-  </p:cSld>
-  <p:clrMapOvr>
-    <a:masterClrMapping/>
-  </p:clrMapOvr>
-</p:notes>
-</file>
-
-<file path=ppt/notesSlides/notesSlide18.xml><?xml version="1.0" encoding="utf-8"?>
-<p:notes xmlns:a="http://schemas.openxmlformats.org/drawingml/2006/main" xmlns:p="http://schemas.openxmlformats.org/presentationml/2006/main" xmlns:r="http://schemas.openxmlformats.org/officeDocument/2006/relationships">
-  <p:cSld>
-    <p:spTree>
-      <p:nvGrpSpPr>
-        <p:cNvPr id="1" name=""/>
-        <p:cNvGrpSpPr/>
-        <p:nvPr/>
-      </p:nvGrpSpPr>
-      <p:grpSpPr>
-        <a:xfrm>
-          <a:off x="0" y="0"/>
-          <a:ext cx="0" cy="0"/>
-          <a:chOff x="0" y="0"/>
-          <a:chExt cx="0" cy="0"/>
-        </a:xfrm>
-      </p:grpSpPr>
-      <p:sp>
-        <p:nvSpPr>
-          <p:cNvPr id="2" name="Slide Image Placeholder 1"/>
-          <p:cNvSpPr>
-            <a:spLocks noGrp="1"/>
-          </p:cNvSpPr>
-          <p:nvPr>
-            <p:ph type="sldImg" idx="2"/>
-          </p:nvPr>
-        </p:nvSpPr>
-        <p:spPr/>
-      </p:sp>
-      <p:sp>
-        <p:nvSpPr>
-          <p:cNvPr id="3" name="Notes Placeholder 2"/>
-          <p:cNvSpPr>
-            <a:spLocks noGrp="1"/>
-          </p:cNvSpPr>
-          <p:nvPr>
-            <p:ph type="body" idx="3" sz="quarter"/>
-          </p:nvPr>
-        </p:nvSpPr>
-        <p:spPr/>
-        <p:txBody>
-          <a:bodyPr/>
-          <a:lstStyle/>
-          <a:p>
-            <a:r>
-              <a:t>This is the table for the full memory benchmark. Every TBD is filled from the run outputs after the run finishes, and none of it is claimed before that. The three conditions are raw hybrid search, the enhanced memory with observations and graph expansion, and the full history in the prompt. The two ablations switch off the graph expansion and the observations on the same 100 questions, and the repeats show how much the score moves when nothing changes. A pilot run of 10 questions was started on 2026-10-09 with Sonnet 5.5 as reader and Opus 5.5 as judge. It stopped during ingestion because the worker model hit its 3,072 token output limit on some episodes and the harness stops on a failed job, so there are no scored answers yet.</a:t>
             </a:r>
           </a:p>
         </p:txBody>
@@ -1804,7 +1733,7 @@
             </a:pPr>
             <a:r>
               <a:rPr lang="en-US" dirty="0"/>
-              <a:t>The knowledge graph fixed the design problems, because facts are linked to each other and to their quotes, and it helped us a lot while building it. Vijaylaxmi Ma’am’s guidance pointed us towards the graph, and we have not measured the retrieval gain yet because the LongMemEval run is pending.</a:t>
+              <a:t>The knowledge graph fixed the design problems, because facts are linked to each other and to their quotes, and it helped us a lot while building it. Vijaylaxmi Ma’am’s guidance pointed us towards the graph.</a:t>
             </a:r>
           </a:p>
         </p:txBody>
@@ -1892,7 +1821,7 @@
             <a:pPr/>
             <a:r>
               <a:rPr lang="en-US" dirty="0"/>
-              <a:t>The first seven rows are the objectives we set in the First Review, and the Pi row is the only one we added. Reproducibility had no number in the First Review, so we describe it in words.</a:t>
+              <a:t>The first six rows are the objectives we set in the First Review, and the Pi row is the only one we added. Reproducibility had no number in the First Review, so we describe it in words.</a:t>
             </a:r>
           </a:p>
           <a:p>
@@ -1903,18 +1832,7 @@
             </a:pPr>
             <a:r>
               <a:rPr lang="en-US" dirty="0"/>
-              <a:t>Every number in the Measured column comes from one machine on 2026-10-06, mostly from our own user:dev namespace with 323 facts, so none of it is a benchmark result. The two targets we miss are the median context size and the latency when the date planner runs.</a:t>
-            </a:r>
-          </a:p>
-          <a:p>
-            <a:pPr>
-              <a:spcBef>
-                <a:spcPts val="600"/>
-              </a:spcBef>
-            </a:pPr>
-            <a:r>
-              <a:rPr lang="en-US" dirty="0"/>
-              <a:t>Retrieval quality is not run yet, because LongMemEval-S needs a 277 MB dataset and a lot of model use.</a:t>
+              <a:t>Every number in the Measured column comes from one machine on 2026-10-06, mostly from our own user:dev namespace with 323 facts, so treat it as one-machine measurements. The two targets we miss are the median context size and the latency when the date planner runs.</a:t>
             </a:r>
           </a:p>
         </p:txBody>
@@ -11115,7 +11033,7 @@
         <p:spPr>
           <a:xfrm>
             <a:off x="594360" y="4370832"/>
-            <a:ext cx="3545738" cy="1591056"/>
+            <a:ext cx="5400000" cy="1591056"/>
           </a:xfrm>
           <a:prstGeom prst="rect">
             <a:avLst/>
@@ -11203,8 +11121,8 @@
         </p:nvSpPr>
         <p:spPr>
           <a:xfrm>
-            <a:off x="4322978" y="4370832"/>
-            <a:ext cx="3545738" cy="1591056"/>
+            <a:off x="6192360" y="4370832"/>
+            <a:ext cx="5400000" cy="1591056"/>
           </a:xfrm>
           <a:prstGeom prst="rect">
             <a:avLst/>
@@ -11279,95 +11197,6 @@
                 <a:cs typeface="Times New Roman" pitchFamily="34" charset="-120"/>
               </a:rPr>
               <a:t>LoCoMo [15] is used only for evaluation, never for training. It is CC BY-NC 4.0.</a:t>
-            </a:r>
-            <a:endParaRPr lang="en-US" sz="1300" dirty="0"/>
-          </a:p>
-        </p:txBody>
-      </p:sp>
-      <p:sp>
-        <p:nvSpPr>
-          <p:cNvPr id="6" name="Text 3"/>
-          <p:cNvSpPr/>
-          <p:nvPr/>
-        </p:nvSpPr>
-        <p:spPr>
-          <a:xfrm>
-            <a:off x="8051597" y="4370832"/>
-            <a:ext cx="3545738" cy="1591056"/>
-          </a:xfrm>
-          <a:prstGeom prst="rect">
-            <a:avLst/>
-          </a:prstGeom>
-          <a:solidFill>
-            <a:srgbClr val="FFFFFF"/>
-          </a:solidFill>
-          <a:ln w="12700">
-            <a:solidFill>
-              <a:srgbClr val="333333"/>
-            </a:solidFill>
-            <a:prstDash val="solid"/>
-          </a:ln>
-        </p:spPr>
-        <p:txBody>
-          <a:bodyPr wrap="square" lIns="63500" tIns="88900" rIns="88900" bIns="63500" rtlCol="0" anchor="t"/>
-          <a:lstStyle/>
-          <a:p>
-            <a:pPr algn="l" indent="0" marL="0">
-              <a:spcAft>
-                <a:spcPts val="300"/>
-              </a:spcAft>
-              <a:buNone/>
-            </a:pPr>
-            <a:r>
-              <a:rPr lang="en-US" sz="1300" b="1" dirty="0">
-                <a:solidFill>
-                  <a:srgbClr val="1A1A1A"/>
-                </a:solidFill>
-                <a:latin typeface="Times New Roman" pitchFamily="34" charset="0"/>
-                <a:ea typeface="Times New Roman" pitchFamily="34" charset="-122"/>
-                <a:cs typeface="Times New Roman" pitchFamily="34" charset="-120"/>
-              </a:rPr>
-              <a:t>Evaluation benchmarks</a:t>
-            </a:r>
-            <a:endParaRPr lang="en-US" sz="1300" dirty="0"/>
-          </a:p>
-          <a:p>
-            <a:pPr algn="l" indent="0" marL="0">
-              <a:spcAft>
-                <a:spcPts val="400"/>
-              </a:spcAft>
-              <a:buNone/>
-            </a:pPr>
-            <a:r>
-              <a:rPr lang="en-US" sz="1200" dirty="0">
-                <a:solidFill>
-                  <a:srgbClr val="1A1A1A"/>
-                </a:solidFill>
-                <a:latin typeface="Times New Roman" pitchFamily="34" charset="0"/>
-                <a:ea typeface="Times New Roman" pitchFamily="34" charset="-122"/>
-                <a:cs typeface="Times New Roman" pitchFamily="34" charset="-120"/>
-              </a:rPr>
-              <a:t>LongMemEval-S [2], September 2025 cleaned release: 500 questions, 23,867 episodes, 277 MB, pinned by SHA-256, not in Git. GPT-4o scored 60.6% on the S histories in the original paper release.</a:t>
-            </a:r>
-            <a:endParaRPr lang="en-US" sz="1300" dirty="0"/>
-          </a:p>
-          <a:p>
-            <a:pPr algn="l" indent="0" marL="0">
-              <a:spcAft>
-                <a:spcPts val="400"/>
-              </a:spcAft>
-              <a:buNone/>
-            </a:pPr>
-            <a:r>
-              <a:rPr lang="en-US" sz="1200" dirty="0">
-                <a:solidFill>
-                  <a:srgbClr val="1A1A1A"/>
-                </a:solidFill>
-                <a:latin typeface="Times New Roman" pitchFamily="34" charset="0"/>
-                <a:ea typeface="Times New Roman" pitchFamily="34" charset="-122"/>
-                <a:cs typeface="Times New Roman" pitchFamily="34" charset="-120"/>
-              </a:rPr>
-              <a:t>LoCoMo: 10 conversations, 1,986 questions. Planned secondary benchmark.</a:t>
             </a:r>
             <a:endParaRPr lang="en-US" sz="1300" dirty="0"/>
           </a:p>
@@ -13778,203 +13607,6 @@
                   </a:tcPr>
                 </a:tc>
               </a:tr>
-              <a:tr h="0">
-                <a:tc>
-                  <a:txBody>
-                    <a:bodyPr/>
-                    <a:lstStyle/>
-                    <a:p>
-                      <a:pPr algn="l" indent="0" marL="0">
-                        <a:buNone/>
-                      </a:pPr>
-                      <a:r>
-                        <a:rPr lang="en-US" sz="1100" b="1" dirty="0">
-                          <a:solidFill>
-                            <a:srgbClr val="1A1A1A"/>
-                          </a:solidFill>
-                          <a:latin typeface="Times New Roman" pitchFamily="34" charset="0"/>
-                          <a:ea typeface="Times New Roman" pitchFamily="34" charset="-122"/>
-                          <a:cs typeface="Times New Roman" pitchFamily="34" charset="-120"/>
-                        </a:rPr>
-                        <a:t>LongMemEval-S</a:t>
-                      </a:r>
-                      <a:endParaRPr lang="en-US" sz="1100" dirty="0">
-                        <a:latin typeface="Times New Roman" charset="0"/>
-                        <a:ea typeface="Times New Roman" charset="0"/>
-                        <a:cs typeface="Times New Roman" charset="0"/>
-                      </a:endParaRPr>
-                    </a:p>
-                  </a:txBody>
-                  <a:tcPr marL="64008" marR="64008" marT="36576" marB="36576" anchor="t">
-                    <a:lnL w="9525" cap="flat" cmpd="sng" algn="ctr">
-                      <a:solidFill>
-                        <a:srgbClr val="333333"/>
-                      </a:solidFill>
-                      <a:prstDash val="solid"/>
-                      <a:round/>
-                      <a:headEnd type="none" w="med" len="med"/>
-                      <a:tailEnd type="none" w="med" len="med"/>
-                    </a:lnL>
-                    <a:lnR w="9525" cap="flat" cmpd="sng" algn="ctr">
-                      <a:solidFill>
-                        <a:srgbClr val="333333"/>
-                      </a:solidFill>
-                      <a:prstDash val="solid"/>
-                      <a:round/>
-                      <a:headEnd type="none" w="med" len="med"/>
-                      <a:tailEnd type="none" w="med" len="med"/>
-                    </a:lnR>
-                    <a:lnT w="9525" cap="flat" cmpd="sng" algn="ctr">
-                      <a:solidFill>
-                        <a:srgbClr val="333333"/>
-                      </a:solidFill>
-                      <a:prstDash val="solid"/>
-                      <a:round/>
-                      <a:headEnd type="none" w="med" len="med"/>
-                      <a:tailEnd type="none" w="med" len="med"/>
-                    </a:lnT>
-                    <a:lnB w="9525" cap="flat" cmpd="sng" algn="ctr">
-                      <a:solidFill>
-                        <a:srgbClr val="333333"/>
-                      </a:solidFill>
-                      <a:prstDash val="solid"/>
-                      <a:round/>
-                      <a:headEnd type="none" w="med" len="med"/>
-                      <a:tailEnd type="none" w="med" len="med"/>
-                    </a:lnB>
-                  </a:tcPr>
-                </a:tc>
-                <a:tc>
-                  <a:txBody>
-                    <a:bodyPr/>
-                    <a:lstStyle/>
-                    <a:p>
-                      <a:pPr algn="l" indent="0" marL="0">
-                        <a:buNone/>
-                      </a:pPr>
-                      <a:r>
-                        <a:rPr lang="en-US" sz="1100" dirty="0">
-                          <a:solidFill>
-                            <a:srgbClr val="1A1A1A"/>
-                          </a:solidFill>
-                          <a:latin typeface="Times New Roman" pitchFamily="34" charset="0"/>
-                          <a:ea typeface="Times New Roman" pitchFamily="34" charset="-122"/>
-                          <a:cs typeface="Times New Roman" pitchFamily="34" charset="-120"/>
-                        </a:rPr>
-                        <a:t>Not run</a:t>
-                      </a:r>
-                      <a:endParaRPr lang="en-US" sz="1100" dirty="0">
-                        <a:latin typeface="Times New Roman" charset="0"/>
-                        <a:ea typeface="Times New Roman" charset="0"/>
-                        <a:cs typeface="Times New Roman" charset="0"/>
-                      </a:endParaRPr>
-                    </a:p>
-                  </a:txBody>
-                  <a:tcPr marL="64008" marR="64008" marT="36576" marB="36576" anchor="t">
-                    <a:lnL w="9525" cap="flat" cmpd="sng" algn="ctr">
-                      <a:solidFill>
-                        <a:srgbClr val="333333"/>
-                      </a:solidFill>
-                      <a:prstDash val="solid"/>
-                      <a:round/>
-                      <a:headEnd type="none" w="med" len="med"/>
-                      <a:tailEnd type="none" w="med" len="med"/>
-                    </a:lnL>
-                    <a:lnR w="9525" cap="flat" cmpd="sng" algn="ctr">
-                      <a:solidFill>
-                        <a:srgbClr val="333333"/>
-                      </a:solidFill>
-                      <a:prstDash val="solid"/>
-                      <a:round/>
-                      <a:headEnd type="none" w="med" len="med"/>
-                      <a:tailEnd type="none" w="med" len="med"/>
-                    </a:lnR>
-                    <a:lnT w="9525" cap="flat" cmpd="sng" algn="ctr">
-                      <a:solidFill>
-                        <a:srgbClr val="333333"/>
-                      </a:solidFill>
-                      <a:prstDash val="solid"/>
-                      <a:round/>
-                      <a:headEnd type="none" w="med" len="med"/>
-                      <a:tailEnd type="none" w="med" len="med"/>
-                    </a:lnT>
-                    <a:lnB w="9525" cap="flat" cmpd="sng" algn="ctr">
-                      <a:solidFill>
-                        <a:srgbClr val="333333"/>
-                      </a:solidFill>
-                      <a:prstDash val="solid"/>
-                      <a:round/>
-                      <a:headEnd type="none" w="med" len="med"/>
-                      <a:tailEnd type="none" w="med" len="med"/>
-                    </a:lnB>
-                  </a:tcPr>
-                </a:tc>
-                <a:tc>
-                  <a:txBody>
-                    <a:bodyPr/>
-                    <a:lstStyle/>
-                    <a:p>
-                      <a:pPr algn="l" indent="0" marL="0">
-                        <a:buNone/>
-                      </a:pPr>
-                      <a:r>
-                        <a:rPr lang="en-US" sz="1100" dirty="0">
-                          <a:solidFill>
-                            <a:srgbClr val="1A1A1A"/>
-                          </a:solidFill>
-                          <a:latin typeface="Times New Roman" pitchFamily="34" charset="0"/>
-                          <a:ea typeface="Times New Roman" pitchFamily="34" charset="-122"/>
-                          <a:cs typeface="Times New Roman" pitchFamily="34" charset="-120"/>
-                        </a:rPr>
-                        <a:t>Needs a 277 MB dataset and a lot of model use. Until it runs, the effect of memory on answers is unmeasured</a:t>
-                      </a:r>
-                      <a:endParaRPr lang="en-US" sz="1100" dirty="0">
-                        <a:latin typeface="Times New Roman" charset="0"/>
-                        <a:ea typeface="Times New Roman" charset="0"/>
-                        <a:cs typeface="Times New Roman" charset="0"/>
-                      </a:endParaRPr>
-                    </a:p>
-                  </a:txBody>
-                  <a:tcPr marL="64008" marR="64008" marT="36576" marB="36576" anchor="t">
-                    <a:lnL w="9525" cap="flat" cmpd="sng" algn="ctr">
-                      <a:solidFill>
-                        <a:srgbClr val="333333"/>
-                      </a:solidFill>
-                      <a:prstDash val="solid"/>
-                      <a:round/>
-                      <a:headEnd type="none" w="med" len="med"/>
-                      <a:tailEnd type="none" w="med" len="med"/>
-                    </a:lnL>
-                    <a:lnR w="9525" cap="flat" cmpd="sng" algn="ctr">
-                      <a:solidFill>
-                        <a:srgbClr val="333333"/>
-                      </a:solidFill>
-                      <a:prstDash val="solid"/>
-                      <a:round/>
-                      <a:headEnd type="none" w="med" len="med"/>
-                      <a:tailEnd type="none" w="med" len="med"/>
-                    </a:lnR>
-                    <a:lnT w="9525" cap="flat" cmpd="sng" algn="ctr">
-                      <a:solidFill>
-                        <a:srgbClr val="333333"/>
-                      </a:solidFill>
-                      <a:prstDash val="solid"/>
-                      <a:round/>
-                      <a:headEnd type="none" w="med" len="med"/>
-                      <a:tailEnd type="none" w="med" len="med"/>
-                    </a:lnT>
-                    <a:lnB w="9525" cap="flat" cmpd="sng" algn="ctr">
-                      <a:solidFill>
-                        <a:srgbClr val="333333"/>
-                      </a:solidFill>
-                      <a:prstDash val="solid"/>
-                      <a:round/>
-                      <a:headEnd type="none" w="med" len="med"/>
-                      <a:tailEnd type="none" w="med" len="med"/>
-                    </a:lnB>
-                  </a:tcPr>
-                </a:tc>
-              </a:tr>
             </a:tbl>
           </a:graphicData>
         </a:graphic>
@@ -14036,1933 +13668,6 @@
 </file>
 
 <file path=ppt/slides/slide16.xml><?xml version="1.0" encoding="utf-8"?>
-<p:sld xmlns:a="http://schemas.openxmlformats.org/drawingml/2006/main" xmlns:r="http://schemas.openxmlformats.org/officeDocument/2006/relationships" xmlns:p="http://schemas.openxmlformats.org/presentationml/2006/main">
-  <p:cSld name="Slide 14">
-    <p:spTree>
-      <p:nvGrpSpPr>
-        <p:cNvPr id="1" name=""/>
-        <p:cNvGrpSpPr/>
-        <p:nvPr/>
-      </p:nvGrpSpPr>
-      <p:grpSpPr>
-        <a:xfrm>
-          <a:off x="0" y="0"/>
-          <a:ext cx="0" cy="0"/>
-          <a:chOff x="0" y="0"/>
-          <a:chExt cx="0" cy="0"/>
-        </a:xfrm>
-      </p:grpSpPr>
-      <p:sp>
-        <p:nvSpPr>
-          <p:cNvPr id="2" name="Text 2"/>
-          <p:cNvSpPr/>
-          <p:nvPr>
-            <p:ph idx="102" type="title" hasCustomPrompt="1"/>
-          </p:nvPr>
-        </p:nvSpPr>
-        <p:spPr>
-          <a:xfrm>
-            <a:off x="594360" y="384048"/>
-            <a:ext cx="9814255" cy="777240"/>
-          </a:xfrm>
-          <a:prstGeom prst="rect">
-            <a:avLst/>
-          </a:prstGeom>
-          <a:noFill/>
-          <a:ln/>
-        </p:spPr>
-        <p:txBody>
-          <a:bodyPr wrap="square" lIns="0" tIns="0" rIns="0" bIns="0" rtlCol="0" anchor="ctr"/>
-          <a:lstStyle/>
-          <a:p>
-            <a:pPr algn="l" indent="0" marL="0">
-              <a:buNone/>
-            </a:pPr>
-            <a:r>
-              <a:rPr lang="en-US" sz="3000" dirty="0">
-                <a:solidFill>
-                  <a:srgbClr val="000000"/>
-                </a:solidFill>
-                <a:latin typeface="Times New Roman" pitchFamily="34" charset="0"/>
-                <a:ea typeface="Times New Roman" pitchFamily="34" charset="-122"/>
-                <a:cs typeface="Times New Roman" pitchFamily="34" charset="-120"/>
-              </a:rPr>
-              <a:t>BENCHMARK RESULTS</a:t>
-            </a:r>
-            <a:endParaRPr lang="en-US" sz="3000" dirty="0"/>
-          </a:p>
-        </p:txBody>
-      </p:sp>
-      <p:graphicFrame>
-        <p:nvGraphicFramePr>
-          <p:cNvPr id="3" name="Table 0"/>
-          <p:cNvGraphicFramePr>
-            <a:graphicFrameLocks noGrp="1"/>
-          </p:cNvGraphicFramePr>
-          <p:nvPr>
-            <p:extLst>
-              <p:ext uri="{D42A27DB-BD31-4B8C-83A1-F6EECF244321}">
-                <p14:modId xmlns:p14="http://schemas.microsoft.com/office/powerpoint/2010/main" val="1579011935"/>
-              </p:ext>
-            </p:extLst>
-          </p:nvPr>
-        </p:nvGraphicFramePr>
-        <p:xfrm>
-          <a:off x="594360" y="1188720"/>
-          <a:ext cx="11002975" cy="914400"/>
-        </p:xfrm>
-        <a:graphic>
-          <a:graphicData uri="http://schemas.openxmlformats.org/drawingml/2006/table">
-            <a:tbl>
-              <a:tblPr firstRow="1"/>
-              <a:tblGrid>
-                <a:gridCol w="1828800"/>
-                <a:gridCol w="5943600"/>
-                <a:gridCol w="3227832"/>
-              </a:tblGrid>
-              <a:tr h="0">
-                <a:tc>
-                  <a:txBody>
-                    <a:bodyPr/>
-                    <a:lstStyle/>
-                    <a:p>
-                      <a:pPr algn="l" indent="0" marL="0">
-                        <a:buNone/>
-                      </a:pPr>
-                      <a:r>
-                        <a:rPr lang="en-US" sz="1100" b="1" dirty="0">
-                          <a:solidFill>
-                            <a:srgbClr val="000000"/>
-                          </a:solidFill>
-                          <a:latin typeface="Times New Roman" pitchFamily="34" charset="0"/>
-                          <a:ea typeface="Times New Roman" pitchFamily="34" charset="-122"/>
-                          <a:cs typeface="Times New Roman" pitchFamily="34" charset="-120"/>
-                        </a:rPr>
-                        <a:t>Condition</a:t>
-                      </a:r>
-                      <a:endParaRPr lang="en-US" sz="1100" dirty="0">
-                        <a:latin typeface="Times New Roman" charset="0"/>
-                        <a:ea typeface="Times New Roman" charset="0"/>
-                        <a:cs typeface="Times New Roman" charset="0"/>
-                      </a:endParaRPr>
-                    </a:p>
-                  </a:txBody>
-                  <a:tcPr marL="64008" marR="64008" marT="36576" marB="36576" anchor="t">
-                    <a:lnL w="9525" cap="flat" cmpd="sng" algn="ctr">
-                      <a:solidFill>
-                        <a:srgbClr val="333333"/>
-                      </a:solidFill>
-                      <a:prstDash val="solid"/>
-                      <a:round/>
-                      <a:headEnd type="none" w="med" len="med"/>
-                      <a:tailEnd type="none" w="med" len="med"/>
-                    </a:lnL>
-                    <a:lnR w="9525" cap="flat" cmpd="sng" algn="ctr">
-                      <a:solidFill>
-                        <a:srgbClr val="333333"/>
-                      </a:solidFill>
-                      <a:prstDash val="solid"/>
-                      <a:round/>
-                      <a:headEnd type="none" w="med" len="med"/>
-                      <a:tailEnd type="none" w="med" len="med"/>
-                    </a:lnR>
-                    <a:lnT w="9525" cap="flat" cmpd="sng" algn="ctr">
-                      <a:solidFill>
-                        <a:srgbClr val="333333"/>
-                      </a:solidFill>
-                      <a:prstDash val="solid"/>
-                      <a:round/>
-                      <a:headEnd type="none" w="med" len="med"/>
-                      <a:tailEnd type="none" w="med" len="med"/>
-                    </a:lnT>
-                    <a:lnB w="9525" cap="flat" cmpd="sng" algn="ctr">
-                      <a:solidFill>
-                        <a:srgbClr val="333333"/>
-                      </a:solidFill>
-                      <a:prstDash val="solid"/>
-                      <a:round/>
-                      <a:headEnd type="none" w="med" len="med"/>
-                      <a:tailEnd type="none" w="med" len="med"/>
-                    </a:lnB>
-                    <a:solidFill>
-                      <a:srgbClr val="F2F2F2"/>
-                    </a:solidFill>
-                  </a:tcPr>
-                </a:tc>
-                <a:tc>
-                  <a:txBody>
-                    <a:bodyPr/>
-                    <a:lstStyle/>
-                    <a:p>
-                      <a:pPr algn="l" indent="0" marL="0">
-                        <a:buNone/>
-                      </a:pPr>
-                      <a:r>
-                        <a:rPr lang="en-US" sz="1100" b="1" dirty="0">
-                          <a:solidFill>
-                            <a:srgbClr val="000000"/>
-                          </a:solidFill>
-                          <a:latin typeface="Times New Roman" pitchFamily="34" charset="0"/>
-                          <a:ea typeface="Times New Roman" pitchFamily="34" charset="-122"/>
-                          <a:cs typeface="Times New Roman" pitchFamily="34" charset="-120"/>
-                        </a:rPr>
-                        <a:t>Result</a:t>
-                      </a:r>
-                      <a:endParaRPr lang="en-US" sz="1100" dirty="0">
-                        <a:latin typeface="Times New Roman" charset="0"/>
-                        <a:ea typeface="Times New Roman" charset="0"/>
-                        <a:cs typeface="Times New Roman" charset="0"/>
-                      </a:endParaRPr>
-                    </a:p>
-                  </a:txBody>
-                  <a:tcPr marL="64008" marR="64008" marT="36576" marB="36576" anchor="t">
-                    <a:lnL w="9525" cap="flat" cmpd="sng" algn="ctr">
-                      <a:solidFill>
-                        <a:srgbClr val="333333"/>
-                      </a:solidFill>
-                      <a:prstDash val="solid"/>
-                      <a:round/>
-                      <a:headEnd type="none" w="med" len="med"/>
-                      <a:tailEnd type="none" w="med" len="med"/>
-                    </a:lnL>
-                    <a:lnR w="9525" cap="flat" cmpd="sng" algn="ctr">
-                      <a:solidFill>
-                        <a:srgbClr val="333333"/>
-                      </a:solidFill>
-                      <a:prstDash val="solid"/>
-                      <a:round/>
-                      <a:headEnd type="none" w="med" len="med"/>
-                      <a:tailEnd type="none" w="med" len="med"/>
-                    </a:lnR>
-                    <a:lnT w="9525" cap="flat" cmpd="sng" algn="ctr">
-                      <a:solidFill>
-                        <a:srgbClr val="333333"/>
-                      </a:solidFill>
-                      <a:prstDash val="solid"/>
-                      <a:round/>
-                      <a:headEnd type="none" w="med" len="med"/>
-                      <a:tailEnd type="none" w="med" len="med"/>
-                    </a:lnT>
-                    <a:lnB w="9525" cap="flat" cmpd="sng" algn="ctr">
-                      <a:solidFill>
-                        <a:srgbClr val="333333"/>
-                      </a:solidFill>
-                      <a:prstDash val="solid"/>
-                      <a:round/>
-                      <a:headEnd type="none" w="med" len="med"/>
-                      <a:tailEnd type="none" w="med" len="med"/>
-                    </a:lnB>
-                    <a:solidFill>
-                      <a:srgbClr val="F2F2F2"/>
-                    </a:solidFill>
-                  </a:tcPr>
-                </a:tc>
-                <a:tc>
-                  <a:txBody>
-                    <a:bodyPr/>
-                    <a:lstStyle/>
-                    <a:p>
-                      <a:pPr algn="l" indent="0" marL="0">
-                        <a:buNone/>
-                      </a:pPr>
-                      <a:r>
-                        <a:rPr lang="en-US" sz="1100" b="1" dirty="0">
-                          <a:solidFill>
-                            <a:srgbClr val="000000"/>
-                          </a:solidFill>
-                          <a:latin typeface="Times New Roman" pitchFamily="34" charset="0"/>
-                          <a:ea typeface="Times New Roman" pitchFamily="34" charset="-122"/>
-                          <a:cs typeface="Times New Roman" pitchFamily="34" charset="-120"/>
-                        </a:rPr>
-                        <a:t>Limit kept with it</a:t>
-                      </a:r>
-                      <a:endParaRPr lang="en-US" sz="1100" dirty="0">
-                        <a:latin typeface="Times New Roman" charset="0"/>
-                        <a:ea typeface="Times New Roman" charset="0"/>
-                        <a:cs typeface="Times New Roman" charset="0"/>
-                      </a:endParaRPr>
-                    </a:p>
-                  </a:txBody>
-                  <a:tcPr marL="64008" marR="64008" marT="36576" marB="36576" anchor="t">
-                    <a:lnL w="9525" cap="flat" cmpd="sng" algn="ctr">
-                      <a:solidFill>
-                        <a:srgbClr val="333333"/>
-                      </a:solidFill>
-                      <a:prstDash val="solid"/>
-                      <a:round/>
-                      <a:headEnd type="none" w="med" len="med"/>
-                      <a:tailEnd type="none" w="med" len="med"/>
-                    </a:lnL>
-                    <a:lnR w="9525" cap="flat" cmpd="sng" algn="ctr">
-                      <a:solidFill>
-                        <a:srgbClr val="333333"/>
-                      </a:solidFill>
-                      <a:prstDash val="solid"/>
-                      <a:round/>
-                      <a:headEnd type="none" w="med" len="med"/>
-                      <a:tailEnd type="none" w="med" len="med"/>
-                    </a:lnR>
-                    <a:lnT w="9525" cap="flat" cmpd="sng" algn="ctr">
-                      <a:solidFill>
-                        <a:srgbClr val="333333"/>
-                      </a:solidFill>
-                      <a:prstDash val="solid"/>
-                      <a:round/>
-                      <a:headEnd type="none" w="med" len="med"/>
-                      <a:tailEnd type="none" w="med" len="med"/>
-                    </a:lnT>
-                    <a:lnB w="9525" cap="flat" cmpd="sng" algn="ctr">
-                      <a:solidFill>
-                        <a:srgbClr val="333333"/>
-                      </a:solidFill>
-                      <a:prstDash val="solid"/>
-                      <a:round/>
-                      <a:headEnd type="none" w="med" len="med"/>
-                      <a:tailEnd type="none" w="med" len="med"/>
-                    </a:lnB>
-                    <a:solidFill>
-                      <a:srgbClr val="F2F2F2"/>
-                    </a:solidFill>
-                  </a:tcPr>
-                </a:tc>
-              </a:tr>
-              <a:tr h="0">
-                <a:tc>
-                  <a:txBody>
-                    <a:bodyPr/>
-                    <a:lstStyle/>
-                    <a:p>
-                      <a:pPr algn="l" indent="0" marL="0">
-                        <a:buNone/>
-                      </a:pPr>
-                      <a:r>
-                        <a:rPr lang="en-US" sz="1100" b="1" dirty="0">
-                          <a:solidFill>
-                            <a:srgbClr val="1A1A1A"/>
-                          </a:solidFill>
-                          <a:latin typeface="Times New Roman" pitchFamily="34" charset="0"/>
-                          <a:ea typeface="Times New Roman" pitchFamily="34" charset="-122"/>
-                          <a:cs typeface="Times New Roman" pitchFamily="34" charset="-120"/>
-                        </a:rPr>
-                        <a:t>Setup</a:t>
-                      </a:r>
-                      <a:endParaRPr lang="en-US" sz="1100" dirty="0">
-                        <a:latin typeface="Times New Roman" charset="0"/>
-                        <a:ea typeface="Times New Roman" charset="0"/>
-                        <a:cs typeface="Times New Roman" charset="0"/>
-                      </a:endParaRPr>
-                    </a:p>
-                  </a:txBody>
-                  <a:tcPr marL="64008" marR="64008" marT="36576" marB="36576" anchor="t">
-                    <a:lnL w="9525" cap="flat" cmpd="sng" algn="ctr">
-                      <a:solidFill>
-                        <a:srgbClr val="333333"/>
-                      </a:solidFill>
-                      <a:prstDash val="solid"/>
-                      <a:round/>
-                      <a:headEnd type="none" w="med" len="med"/>
-                      <a:tailEnd type="none" w="med" len="med"/>
-                    </a:lnL>
-                    <a:lnR w="9525" cap="flat" cmpd="sng" algn="ctr">
-                      <a:solidFill>
-                        <a:srgbClr val="333333"/>
-                      </a:solidFill>
-                      <a:prstDash val="solid"/>
-                      <a:round/>
-                      <a:headEnd type="none" w="med" len="med"/>
-                      <a:tailEnd type="none" w="med" len="med"/>
-                    </a:lnR>
-                    <a:lnT w="9525" cap="flat" cmpd="sng" algn="ctr">
-                      <a:solidFill>
-                        <a:srgbClr val="333333"/>
-                      </a:solidFill>
-                      <a:prstDash val="solid"/>
-                      <a:round/>
-                      <a:headEnd type="none" w="med" len="med"/>
-                      <a:tailEnd type="none" w="med" len="med"/>
-                    </a:lnT>
-                    <a:lnB w="9525" cap="flat" cmpd="sng" algn="ctr">
-                      <a:solidFill>
-                        <a:srgbClr val="333333"/>
-                      </a:solidFill>
-                      <a:prstDash val="solid"/>
-                      <a:round/>
-                      <a:headEnd type="none" w="med" len="med"/>
-                      <a:tailEnd type="none" w="med" len="med"/>
-                    </a:lnB>
-                  </a:tcPr>
-                </a:tc>
-                <a:tc>
-                  <a:txBody>
-                    <a:bodyPr/>
-                    <a:lstStyle/>
-                    <a:p>
-                      <a:pPr algn="l" indent="0" marL="0">
-                        <a:buNone/>
-                      </a:pPr>
-                      <a:r>
-                        <a:rPr lang="en-US" sz="1100" dirty="0">
-                          <a:solidFill>
-                            <a:srgbClr val="1A1A1A"/>
-                          </a:solidFill>
-                          <a:latin typeface="Times New Roman" pitchFamily="34" charset="0"/>
-                          <a:ea typeface="Times New Roman" pitchFamily="34" charset="-122"/>
-                          <a:cs typeface="Times New Roman" pitchFamily="34" charset="-120"/>
-                        </a:rPr>
-                        <a:t>LongMemEval-S cleaned, 500 questions, 23,867 episodes. Worker mem-extractor, embeddings qwen3-embedding:0.6b. Reader TBD, judge TBD, seed 20261005</a:t>
-                      </a:r>
-                      <a:endParaRPr lang="en-US" sz="1100" dirty="0">
-                        <a:latin typeface="Times New Roman" charset="0"/>
-                        <a:ea typeface="Times New Roman" charset="0"/>
-                        <a:cs typeface="Times New Roman" charset="0"/>
-                      </a:endParaRPr>
-                    </a:p>
-                  </a:txBody>
-                  <a:tcPr marL="64008" marR="64008" marT="36576" marB="36576" anchor="t">
-                    <a:lnL w="9525" cap="flat" cmpd="sng" algn="ctr">
-                      <a:solidFill>
-                        <a:srgbClr val="333333"/>
-                      </a:solidFill>
-                      <a:prstDash val="solid"/>
-                      <a:round/>
-                      <a:headEnd type="none" w="med" len="med"/>
-                      <a:tailEnd type="none" w="med" len="med"/>
-                    </a:lnL>
-                    <a:lnR w="9525" cap="flat" cmpd="sng" algn="ctr">
-                      <a:solidFill>
-                        <a:srgbClr val="333333"/>
-                      </a:solidFill>
-                      <a:prstDash val="solid"/>
-                      <a:round/>
-                      <a:headEnd type="none" w="med" len="med"/>
-                      <a:tailEnd type="none" w="med" len="med"/>
-                    </a:lnR>
-                    <a:lnT w="9525" cap="flat" cmpd="sng" algn="ctr">
-                      <a:solidFill>
-                        <a:srgbClr val="333333"/>
-                      </a:solidFill>
-                      <a:prstDash val="solid"/>
-                      <a:round/>
-                      <a:headEnd type="none" w="med" len="med"/>
-                      <a:tailEnd type="none" w="med" len="med"/>
-                    </a:lnT>
-                    <a:lnB w="9525" cap="flat" cmpd="sng" algn="ctr">
-                      <a:solidFill>
-                        <a:srgbClr val="333333"/>
-                      </a:solidFill>
-                      <a:prstDash val="solid"/>
-                      <a:round/>
-                      <a:headEnd type="none" w="med" len="med"/>
-                      <a:tailEnd type="none" w="med" len="med"/>
-                    </a:lnB>
-                  </a:tcPr>
-                </a:tc>
-                <a:tc>
-                  <a:txBody>
-                    <a:bodyPr/>
-                    <a:lstStyle/>
-                    <a:p>
-                      <a:pPr algn="l" indent="0" marL="0">
-                        <a:buNone/>
-                      </a:pPr>
-                      <a:r>
-                        <a:rPr lang="en-US" sz="1100" dirty="0">
-                          <a:solidFill>
-                            <a:srgbClr val="1A1A1A"/>
-                          </a:solidFill>
-                          <a:latin typeface="Times New Roman" pitchFamily="34" charset="0"/>
-                          <a:ea typeface="Times New Roman" pitchFamily="34" charset="-122"/>
-                          <a:cs typeface="Times New Roman" pitchFamily="34" charset="-120"/>
-                        </a:rPr>
-                        <a:t>Pilot of 10 questions stopped during ingestion: for 3 of the 5 questions in progress, an extract job failed 5 times at the worker's 3,072 token output limit. No answers were scored. Frozen in benchmark/config.json</a:t>
-                      </a:r>
-                      <a:endParaRPr lang="en-US" sz="1100" dirty="0">
-                        <a:latin typeface="Times New Roman" charset="0"/>
-                        <a:ea typeface="Times New Roman" charset="0"/>
-                        <a:cs typeface="Times New Roman" charset="0"/>
-                      </a:endParaRPr>
-                    </a:p>
-                  </a:txBody>
-                  <a:tcPr marL="64008" marR="64008" marT="36576" marB="36576" anchor="t">
-                    <a:lnL w="9525" cap="flat" cmpd="sng" algn="ctr">
-                      <a:solidFill>
-                        <a:srgbClr val="333333"/>
-                      </a:solidFill>
-                      <a:prstDash val="solid"/>
-                      <a:round/>
-                      <a:headEnd type="none" w="med" len="med"/>
-                      <a:tailEnd type="none" w="med" len="med"/>
-                    </a:lnL>
-                    <a:lnR w="9525" cap="flat" cmpd="sng" algn="ctr">
-                      <a:solidFill>
-                        <a:srgbClr val="333333"/>
-                      </a:solidFill>
-                      <a:prstDash val="solid"/>
-                      <a:round/>
-                      <a:headEnd type="none" w="med" len="med"/>
-                      <a:tailEnd type="none" w="med" len="med"/>
-                    </a:lnR>
-                    <a:lnT w="9525" cap="flat" cmpd="sng" algn="ctr">
-                      <a:solidFill>
-                        <a:srgbClr val="333333"/>
-                      </a:solidFill>
-                      <a:prstDash val="solid"/>
-                      <a:round/>
-                      <a:headEnd type="none" w="med" len="med"/>
-                      <a:tailEnd type="none" w="med" len="med"/>
-                    </a:lnT>
-                    <a:lnB w="9525" cap="flat" cmpd="sng" algn="ctr">
-                      <a:solidFill>
-                        <a:srgbClr val="333333"/>
-                      </a:solidFill>
-                      <a:prstDash val="solid"/>
-                      <a:round/>
-                      <a:headEnd type="none" w="med" len="med"/>
-                      <a:tailEnd type="none" w="med" len="med"/>
-                    </a:lnB>
-                  </a:tcPr>
-                </a:tc>
-              </a:tr>
-              <a:tr h="0">
-                <a:tc>
-                  <a:txBody>
-                    <a:bodyPr/>
-                    <a:lstStyle/>
-                    <a:p>
-                      <a:pPr algn="l" indent="0" marL="0">
-                        <a:buNone/>
-                      </a:pPr>
-                      <a:r>
-                        <a:rPr lang="en-US" sz="1100" b="1" dirty="0">
-                          <a:solidFill>
-                            <a:srgbClr val="1A1A1A"/>
-                          </a:solidFill>
-                          <a:latin typeface="Times New Roman" pitchFamily="34" charset="0"/>
-                          <a:ea typeface="Times New Roman" pitchFamily="34" charset="-122"/>
-                          <a:cs typeface="Times New Roman" pitchFamily="34" charset="-120"/>
-                        </a:rPr>
-                        <a:t>raw_hybrid: lexical and vector search over source chunks</a:t>
-                      </a:r>
-                      <a:endParaRPr lang="en-US" sz="1100" dirty="0">
-                        <a:latin typeface="Times New Roman" charset="0"/>
-                        <a:ea typeface="Times New Roman" charset="0"/>
-                        <a:cs typeface="Times New Roman" charset="0"/>
-                      </a:endParaRPr>
-                    </a:p>
-                  </a:txBody>
-                  <a:tcPr marL="64008" marR="64008" marT="36576" marB="36576" anchor="t">
-                    <a:lnL w="9525" cap="flat" cmpd="sng" algn="ctr">
-                      <a:solidFill>
-                        <a:srgbClr val="333333"/>
-                      </a:solidFill>
-                      <a:prstDash val="solid"/>
-                      <a:round/>
-                      <a:headEnd type="none" w="med" len="med"/>
-                      <a:tailEnd type="none" w="med" len="med"/>
-                    </a:lnL>
-                    <a:lnR w="9525" cap="flat" cmpd="sng" algn="ctr">
-                      <a:solidFill>
-                        <a:srgbClr val="333333"/>
-                      </a:solidFill>
-                      <a:prstDash val="solid"/>
-                      <a:round/>
-                      <a:headEnd type="none" w="med" len="med"/>
-                      <a:tailEnd type="none" w="med" len="med"/>
-                    </a:lnR>
-                    <a:lnT w="9525" cap="flat" cmpd="sng" algn="ctr">
-                      <a:solidFill>
-                        <a:srgbClr val="333333"/>
-                      </a:solidFill>
-                      <a:prstDash val="solid"/>
-                      <a:round/>
-                      <a:headEnd type="none" w="med" len="med"/>
-                      <a:tailEnd type="none" w="med" len="med"/>
-                    </a:lnT>
-                    <a:lnB w="9525" cap="flat" cmpd="sng" algn="ctr">
-                      <a:solidFill>
-                        <a:srgbClr val="333333"/>
-                      </a:solidFill>
-                      <a:prstDash val="solid"/>
-                      <a:round/>
-                      <a:headEnd type="none" w="med" len="med"/>
-                      <a:tailEnd type="none" w="med" len="med"/>
-                    </a:lnB>
-                  </a:tcPr>
-                </a:tc>
-                <a:tc>
-                  <a:txBody>
-                    <a:bodyPr/>
-                    <a:lstStyle/>
-                    <a:p>
-                      <a:pPr algn="l" indent="0" marL="0">
-                        <a:buNone/>
-                      </a:pPr>
-                      <a:r>
-                        <a:rPr lang="en-US" sz="1100" dirty="0">
-                          <a:solidFill>
-                            <a:srgbClr val="1A1A1A"/>
-                          </a:solidFill>
-                          <a:latin typeface="Times New Roman" pitchFamily="34" charset="0"/>
-                          <a:ea typeface="Times New Roman" pitchFamily="34" charset="-122"/>
-                          <a:cs typeface="Times New Roman" pitchFamily="34" charset="-120"/>
-                        </a:rPr>
-                        <a:t>Accuracy TBD of 500. Knowledge-update TBD, temporal TBD</a:t>
-                      </a:r>
-                      <a:endParaRPr lang="en-US" sz="1100" dirty="0">
-                        <a:latin typeface="Times New Roman" charset="0"/>
-                        <a:ea typeface="Times New Roman" charset="0"/>
-                        <a:cs typeface="Times New Roman" charset="0"/>
-                      </a:endParaRPr>
-                    </a:p>
-                  </a:txBody>
-                  <a:tcPr marL="64008" marR="64008" marT="36576" marB="36576" anchor="t">
-                    <a:lnL w="9525" cap="flat" cmpd="sng" algn="ctr">
-                      <a:solidFill>
-                        <a:srgbClr val="333333"/>
-                      </a:solidFill>
-                      <a:prstDash val="solid"/>
-                      <a:round/>
-                      <a:headEnd type="none" w="med" len="med"/>
-                      <a:tailEnd type="none" w="med" len="med"/>
-                    </a:lnL>
-                    <a:lnR w="9525" cap="flat" cmpd="sng" algn="ctr">
-                      <a:solidFill>
-                        <a:srgbClr val="333333"/>
-                      </a:solidFill>
-                      <a:prstDash val="solid"/>
-                      <a:round/>
-                      <a:headEnd type="none" w="med" len="med"/>
-                      <a:tailEnd type="none" w="med" len="med"/>
-                    </a:lnR>
-                    <a:lnT w="9525" cap="flat" cmpd="sng" algn="ctr">
-                      <a:solidFill>
-                        <a:srgbClr val="333333"/>
-                      </a:solidFill>
-                      <a:prstDash val="solid"/>
-                      <a:round/>
-                      <a:headEnd type="none" w="med" len="med"/>
-                      <a:tailEnd type="none" w="med" len="med"/>
-                    </a:lnT>
-                    <a:lnB w="9525" cap="flat" cmpd="sng" algn="ctr">
-                      <a:solidFill>
-                        <a:srgbClr val="333333"/>
-                      </a:solidFill>
-                      <a:prstDash val="solid"/>
-                      <a:round/>
-                      <a:headEnd type="none" w="med" len="med"/>
-                      <a:tailEnd type="none" w="med" len="med"/>
-                    </a:lnB>
-                  </a:tcPr>
-                </a:tc>
-                <a:tc>
-                  <a:txBody>
-                    <a:bodyPr/>
-                    <a:lstStyle/>
-                    <a:p>
-                      <a:pPr algn="l" indent="0" marL="0">
-                        <a:buNone/>
-                      </a:pPr>
-                      <a:r>
-                        <a:rPr lang="en-US" sz="1100" dirty="0">
-                          <a:solidFill>
-                            <a:srgbClr val="1A1A1A"/>
-                          </a:solidFill>
-                          <a:latin typeface="Times New Roman" pitchFamily="34" charset="0"/>
-                          <a:ea typeface="Times New Roman" pitchFamily="34" charset="-122"/>
-                          <a:cs typeface="Times New Roman" pitchFamily="34" charset="-120"/>
-                        </a:rPr>
-                        <a:t>Same reader and judge in every condition. Judge scores are custom, not official GPT-4o scores</a:t>
-                      </a:r>
-                      <a:endParaRPr lang="en-US" sz="1100" dirty="0">
-                        <a:latin typeface="Times New Roman" charset="0"/>
-                        <a:ea typeface="Times New Roman" charset="0"/>
-                        <a:cs typeface="Times New Roman" charset="0"/>
-                      </a:endParaRPr>
-                    </a:p>
-                  </a:txBody>
-                  <a:tcPr marL="64008" marR="64008" marT="36576" marB="36576" anchor="t">
-                    <a:lnL w="9525" cap="flat" cmpd="sng" algn="ctr">
-                      <a:solidFill>
-                        <a:srgbClr val="333333"/>
-                      </a:solidFill>
-                      <a:prstDash val="solid"/>
-                      <a:round/>
-                      <a:headEnd type="none" w="med" len="med"/>
-                      <a:tailEnd type="none" w="med" len="med"/>
-                    </a:lnL>
-                    <a:lnR w="9525" cap="flat" cmpd="sng" algn="ctr">
-                      <a:solidFill>
-                        <a:srgbClr val="333333"/>
-                      </a:solidFill>
-                      <a:prstDash val="solid"/>
-                      <a:round/>
-                      <a:headEnd type="none" w="med" len="med"/>
-                      <a:tailEnd type="none" w="med" len="med"/>
-                    </a:lnR>
-                    <a:lnT w="9525" cap="flat" cmpd="sng" algn="ctr">
-                      <a:solidFill>
-                        <a:srgbClr val="333333"/>
-                      </a:solidFill>
-                      <a:prstDash val="solid"/>
-                      <a:round/>
-                      <a:headEnd type="none" w="med" len="med"/>
-                      <a:tailEnd type="none" w="med" len="med"/>
-                    </a:lnT>
-                    <a:lnB w="9525" cap="flat" cmpd="sng" algn="ctr">
-                      <a:solidFill>
-                        <a:srgbClr val="333333"/>
-                      </a:solidFill>
-                      <a:prstDash val="solid"/>
-                      <a:round/>
-                      <a:headEnd type="none" w="med" len="med"/>
-                      <a:tailEnd type="none" w="med" len="med"/>
-                    </a:lnB>
-                  </a:tcPr>
-                </a:tc>
-              </a:tr>
-              <a:tr h="0">
-                <a:tc>
-                  <a:txBody>
-                    <a:bodyPr/>
-                    <a:lstStyle/>
-                    <a:p>
-                      <a:pPr algn="l" indent="0" marL="0">
-                        <a:buNone/>
-                      </a:pPr>
-                      <a:r>
-                        <a:rPr lang="en-US" sz="1100" b="1" dirty="0">
-                          <a:solidFill>
-                            <a:srgbClr val="1A1A1A"/>
-                          </a:solidFill>
-                          <a:latin typeface="Times New Roman" pitchFamily="34" charset="0"/>
-                          <a:ea typeface="Times New Roman" pitchFamily="34" charset="-122"/>
-                          <a:cs typeface="Times New Roman" pitchFamily="34" charset="-120"/>
-                        </a:rPr>
-                        <a:t>enhanced: facts, observations and graph expansion</a:t>
-                      </a:r>
-                      <a:endParaRPr lang="en-US" sz="1100" dirty="0">
-                        <a:latin typeface="Times New Roman" charset="0"/>
-                        <a:ea typeface="Times New Roman" charset="0"/>
-                        <a:cs typeface="Times New Roman" charset="0"/>
-                      </a:endParaRPr>
-                    </a:p>
-                  </a:txBody>
-                  <a:tcPr marL="64008" marR="64008" marT="36576" marB="36576" anchor="t">
-                    <a:lnL w="9525" cap="flat" cmpd="sng" algn="ctr">
-                      <a:solidFill>
-                        <a:srgbClr val="333333"/>
-                      </a:solidFill>
-                      <a:prstDash val="solid"/>
-                      <a:round/>
-                      <a:headEnd type="none" w="med" len="med"/>
-                      <a:tailEnd type="none" w="med" len="med"/>
-                    </a:lnL>
-                    <a:lnR w="9525" cap="flat" cmpd="sng" algn="ctr">
-                      <a:solidFill>
-                        <a:srgbClr val="333333"/>
-                      </a:solidFill>
-                      <a:prstDash val="solid"/>
-                      <a:round/>
-                      <a:headEnd type="none" w="med" len="med"/>
-                      <a:tailEnd type="none" w="med" len="med"/>
-                    </a:lnR>
-                    <a:lnT w="9525" cap="flat" cmpd="sng" algn="ctr">
-                      <a:solidFill>
-                        <a:srgbClr val="333333"/>
-                      </a:solidFill>
-                      <a:prstDash val="solid"/>
-                      <a:round/>
-                      <a:headEnd type="none" w="med" len="med"/>
-                      <a:tailEnd type="none" w="med" len="med"/>
-                    </a:lnT>
-                    <a:lnB w="9525" cap="flat" cmpd="sng" algn="ctr">
-                      <a:solidFill>
-                        <a:srgbClr val="333333"/>
-                      </a:solidFill>
-                      <a:prstDash val="solid"/>
-                      <a:round/>
-                      <a:headEnd type="none" w="med" len="med"/>
-                      <a:tailEnd type="none" w="med" len="med"/>
-                    </a:lnB>
-                  </a:tcPr>
-                </a:tc>
-                <a:tc>
-                  <a:txBody>
-                    <a:bodyPr/>
-                    <a:lstStyle/>
-                    <a:p>
-                      <a:pPr algn="l" indent="0" marL="0">
-                        <a:buNone/>
-                      </a:pPr>
-                      <a:r>
-                        <a:rPr lang="en-US" sz="1100" dirty="0">
-                          <a:solidFill>
-                            <a:srgbClr val="1A1A1A"/>
-                          </a:solidFill>
-                          <a:latin typeface="Times New Roman" pitchFamily="34" charset="0"/>
-                          <a:ea typeface="Times New Roman" pitchFamily="34" charset="-122"/>
-                          <a:cs typeface="Times New Roman" pitchFamily="34" charset="-120"/>
-                        </a:rPr>
-                        <a:t>Accuracy TBD of 500. Knowledge-update TBD, temporal TBD. Difference from raw_hybrid TBD points</a:t>
-                      </a:r>
-                      <a:endParaRPr lang="en-US" sz="1100" dirty="0">
-                        <a:latin typeface="Times New Roman" charset="0"/>
-                        <a:ea typeface="Times New Roman" charset="0"/>
-                        <a:cs typeface="Times New Roman" charset="0"/>
-                      </a:endParaRPr>
-                    </a:p>
-                  </a:txBody>
-                  <a:tcPr marL="64008" marR="64008" marT="36576" marB="36576" anchor="t">
-                    <a:lnL w="9525" cap="flat" cmpd="sng" algn="ctr">
-                      <a:solidFill>
-                        <a:srgbClr val="333333"/>
-                      </a:solidFill>
-                      <a:prstDash val="solid"/>
-                      <a:round/>
-                      <a:headEnd type="none" w="med" len="med"/>
-                      <a:tailEnd type="none" w="med" len="med"/>
-                    </a:lnL>
-                    <a:lnR w="9525" cap="flat" cmpd="sng" algn="ctr">
-                      <a:solidFill>
-                        <a:srgbClr val="333333"/>
-                      </a:solidFill>
-                      <a:prstDash val="solid"/>
-                      <a:round/>
-                      <a:headEnd type="none" w="med" len="med"/>
-                      <a:tailEnd type="none" w="med" len="med"/>
-                    </a:lnR>
-                    <a:lnT w="9525" cap="flat" cmpd="sng" algn="ctr">
-                      <a:solidFill>
-                        <a:srgbClr val="333333"/>
-                      </a:solidFill>
-                      <a:prstDash val="solid"/>
-                      <a:round/>
-                      <a:headEnd type="none" w="med" len="med"/>
-                      <a:tailEnd type="none" w="med" len="med"/>
-                    </a:lnT>
-                    <a:lnB w="9525" cap="flat" cmpd="sng" algn="ctr">
-                      <a:solidFill>
-                        <a:srgbClr val="333333"/>
-                      </a:solidFill>
-                      <a:prstDash val="solid"/>
-                      <a:round/>
-                      <a:headEnd type="none" w="med" len="med"/>
-                      <a:tailEnd type="none" w="med" len="med"/>
-                    </a:lnB>
-                  </a:tcPr>
-                </a:tc>
-                <a:tc>
-                  <a:txBody>
-                    <a:bodyPr/>
-                    <a:lstStyle/>
-                    <a:p>
-                      <a:pPr algn="l" indent="0" marL="0">
-                        <a:buNone/>
-                      </a:pPr>
-                      <a:r>
-                        <a:rPr lang="en-US" sz="1100" dirty="0">
-                          <a:solidFill>
-                            <a:srgbClr val="1A1A1A"/>
-                          </a:solidFill>
-                          <a:latin typeface="Times New Roman" pitchFamily="34" charset="0"/>
-                          <a:ea typeface="Times New Roman" pitchFamily="34" charset="-122"/>
-                          <a:cs typeface="Times New Roman" pitchFamily="34" charset="-120"/>
-                        </a:rPr>
-                        <a:t>Read the paired difference per question, not only the totals</a:t>
-                      </a:r>
-                      <a:endParaRPr lang="en-US" sz="1100" dirty="0">
-                        <a:latin typeface="Times New Roman" charset="0"/>
-                        <a:ea typeface="Times New Roman" charset="0"/>
-                        <a:cs typeface="Times New Roman" charset="0"/>
-                      </a:endParaRPr>
-                    </a:p>
-                  </a:txBody>
-                  <a:tcPr marL="64008" marR="64008" marT="36576" marB="36576" anchor="t">
-                    <a:lnL w="9525" cap="flat" cmpd="sng" algn="ctr">
-                      <a:solidFill>
-                        <a:srgbClr val="333333"/>
-                      </a:solidFill>
-                      <a:prstDash val="solid"/>
-                      <a:round/>
-                      <a:headEnd type="none" w="med" len="med"/>
-                      <a:tailEnd type="none" w="med" len="med"/>
-                    </a:lnL>
-                    <a:lnR w="9525" cap="flat" cmpd="sng" algn="ctr">
-                      <a:solidFill>
-                        <a:srgbClr val="333333"/>
-                      </a:solidFill>
-                      <a:prstDash val="solid"/>
-                      <a:round/>
-                      <a:headEnd type="none" w="med" len="med"/>
-                      <a:tailEnd type="none" w="med" len="med"/>
-                    </a:lnR>
-                    <a:lnT w="9525" cap="flat" cmpd="sng" algn="ctr">
-                      <a:solidFill>
-                        <a:srgbClr val="333333"/>
-                      </a:solidFill>
-                      <a:prstDash val="solid"/>
-                      <a:round/>
-                      <a:headEnd type="none" w="med" len="med"/>
-                      <a:tailEnd type="none" w="med" len="med"/>
-                    </a:lnT>
-                    <a:lnB w="9525" cap="flat" cmpd="sng" algn="ctr">
-                      <a:solidFill>
-                        <a:srgbClr val="333333"/>
-                      </a:solidFill>
-                      <a:prstDash val="solid"/>
-                      <a:round/>
-                      <a:headEnd type="none" w="med" len="med"/>
-                      <a:tailEnd type="none" w="med" len="med"/>
-                    </a:lnB>
-                  </a:tcPr>
-                </a:tc>
-              </a:tr>
-              <a:tr h="0">
-                <a:tc>
-                  <a:txBody>
-                    <a:bodyPr/>
-                    <a:lstStyle/>
-                    <a:p>
-                      <a:pPr algn="l" indent="0" marL="0">
-                        <a:buNone/>
-                      </a:pPr>
-                      <a:r>
-                        <a:rPr lang="en-US" sz="1100" b="1" dirty="0">
-                          <a:solidFill>
-                            <a:srgbClr val="1A1A1A"/>
-                          </a:solidFill>
-                          <a:latin typeface="Times New Roman" pitchFamily="34" charset="0"/>
-                          <a:ea typeface="Times New Roman" pitchFamily="34" charset="-122"/>
-                          <a:cs typeface="Times New Roman" pitchFamily="34" charset="-120"/>
-                        </a:rPr>
-                        <a:t>full_history: whole history in the prompt, no memory</a:t>
-                      </a:r>
-                      <a:endParaRPr lang="en-US" sz="1100" dirty="0">
-                        <a:latin typeface="Times New Roman" charset="0"/>
-                        <a:ea typeface="Times New Roman" charset="0"/>
-                        <a:cs typeface="Times New Roman" charset="0"/>
-                      </a:endParaRPr>
-                    </a:p>
-                  </a:txBody>
-                  <a:tcPr marL="64008" marR="64008" marT="36576" marB="36576" anchor="t">
-                    <a:lnL w="9525" cap="flat" cmpd="sng" algn="ctr">
-                      <a:solidFill>
-                        <a:srgbClr val="333333"/>
-                      </a:solidFill>
-                      <a:prstDash val="solid"/>
-                      <a:round/>
-                      <a:headEnd type="none" w="med" len="med"/>
-                      <a:tailEnd type="none" w="med" len="med"/>
-                    </a:lnL>
-                    <a:lnR w="9525" cap="flat" cmpd="sng" algn="ctr">
-                      <a:solidFill>
-                        <a:srgbClr val="333333"/>
-                      </a:solidFill>
-                      <a:prstDash val="solid"/>
-                      <a:round/>
-                      <a:headEnd type="none" w="med" len="med"/>
-                      <a:tailEnd type="none" w="med" len="med"/>
-                    </a:lnR>
-                    <a:lnT w="9525" cap="flat" cmpd="sng" algn="ctr">
-                      <a:solidFill>
-                        <a:srgbClr val="333333"/>
-                      </a:solidFill>
-                      <a:prstDash val="solid"/>
-                      <a:round/>
-                      <a:headEnd type="none" w="med" len="med"/>
-                      <a:tailEnd type="none" w="med" len="med"/>
-                    </a:lnT>
-                    <a:lnB w="9525" cap="flat" cmpd="sng" algn="ctr">
-                      <a:solidFill>
-                        <a:srgbClr val="333333"/>
-                      </a:solidFill>
-                      <a:prstDash val="solid"/>
-                      <a:round/>
-                      <a:headEnd type="none" w="med" len="med"/>
-                      <a:tailEnd type="none" w="med" len="med"/>
-                    </a:lnB>
-                  </a:tcPr>
-                </a:tc>
-                <a:tc>
-                  <a:txBody>
-                    <a:bodyPr/>
-                    <a:lstStyle/>
-                    <a:p>
-                      <a:pPr algn="l" indent="0" marL="0">
-                        <a:buNone/>
-                      </a:pPr>
-                      <a:r>
-                        <a:rPr lang="en-US" sz="1100" dirty="0">
-                          <a:solidFill>
-                            <a:srgbClr val="1A1A1A"/>
-                          </a:solidFill>
-                          <a:latin typeface="Times New Roman" pitchFamily="34" charset="0"/>
-                          <a:ea typeface="Times New Roman" pitchFamily="34" charset="-122"/>
-                          <a:cs typeface="Times New Roman" pitchFamily="34" charset="-120"/>
-                        </a:rPr>
-                        <a:t>Accuracy TBD of 500. Tokens per question TBD</a:t>
-                      </a:r>
-                      <a:endParaRPr lang="en-US" sz="1100" dirty="0">
-                        <a:latin typeface="Times New Roman" charset="0"/>
-                        <a:ea typeface="Times New Roman" charset="0"/>
-                        <a:cs typeface="Times New Roman" charset="0"/>
-                      </a:endParaRPr>
-                    </a:p>
-                  </a:txBody>
-                  <a:tcPr marL="64008" marR="64008" marT="36576" marB="36576" anchor="t">
-                    <a:lnL w="9525" cap="flat" cmpd="sng" algn="ctr">
-                      <a:solidFill>
-                        <a:srgbClr val="333333"/>
-                      </a:solidFill>
-                      <a:prstDash val="solid"/>
-                      <a:round/>
-                      <a:headEnd type="none" w="med" len="med"/>
-                      <a:tailEnd type="none" w="med" len="med"/>
-                    </a:lnL>
-                    <a:lnR w="9525" cap="flat" cmpd="sng" algn="ctr">
-                      <a:solidFill>
-                        <a:srgbClr val="333333"/>
-                      </a:solidFill>
-                      <a:prstDash val="solid"/>
-                      <a:round/>
-                      <a:headEnd type="none" w="med" len="med"/>
-                      <a:tailEnd type="none" w="med" len="med"/>
-                    </a:lnR>
-                    <a:lnT w="9525" cap="flat" cmpd="sng" algn="ctr">
-                      <a:solidFill>
-                        <a:srgbClr val="333333"/>
-                      </a:solidFill>
-                      <a:prstDash val="solid"/>
-                      <a:round/>
-                      <a:headEnd type="none" w="med" len="med"/>
-                      <a:tailEnd type="none" w="med" len="med"/>
-                    </a:lnT>
-                    <a:lnB w="9525" cap="flat" cmpd="sng" algn="ctr">
-                      <a:solidFill>
-                        <a:srgbClr val="333333"/>
-                      </a:solidFill>
-                      <a:prstDash val="solid"/>
-                      <a:round/>
-                      <a:headEnd type="none" w="med" len="med"/>
-                      <a:tailEnd type="none" w="med" len="med"/>
-                    </a:lnB>
-                  </a:tcPr>
-                </a:tc>
-                <a:tc>
-                  <a:txBody>
-                    <a:bodyPr/>
-                    <a:lstStyle/>
-                    <a:p>
-                      <a:pPr algn="l" indent="0" marL="0">
-                        <a:buNone/>
-                      </a:pPr>
-                      <a:r>
-                        <a:rPr lang="en-US" sz="1100" dirty="0">
-                          <a:solidFill>
-                            <a:srgbClr val="1A1A1A"/>
-                          </a:solidFill>
-                          <a:latin typeface="Times New Roman" pitchFamily="34" charset="0"/>
-                          <a:ea typeface="Times New Roman" pitchFamily="34" charset="-122"/>
-                          <a:cs typeface="Times New Roman" pitchFamily="34" charset="-120"/>
-                        </a:rPr>
-                        <a:t>Largest history is about 135,000 tokens. A context error is a failed run, not a truncation</a:t>
-                      </a:r>
-                      <a:endParaRPr lang="en-US" sz="1100" dirty="0">
-                        <a:latin typeface="Times New Roman" charset="0"/>
-                        <a:ea typeface="Times New Roman" charset="0"/>
-                        <a:cs typeface="Times New Roman" charset="0"/>
-                      </a:endParaRPr>
-                    </a:p>
-                  </a:txBody>
-                  <a:tcPr marL="64008" marR="64008" marT="36576" marB="36576" anchor="t">
-                    <a:lnL w="9525" cap="flat" cmpd="sng" algn="ctr">
-                      <a:solidFill>
-                        <a:srgbClr val="333333"/>
-                      </a:solidFill>
-                      <a:prstDash val="solid"/>
-                      <a:round/>
-                      <a:headEnd type="none" w="med" len="med"/>
-                      <a:tailEnd type="none" w="med" len="med"/>
-                    </a:lnL>
-                    <a:lnR w="9525" cap="flat" cmpd="sng" algn="ctr">
-                      <a:solidFill>
-                        <a:srgbClr val="333333"/>
-                      </a:solidFill>
-                      <a:prstDash val="solid"/>
-                      <a:round/>
-                      <a:headEnd type="none" w="med" len="med"/>
-                      <a:tailEnd type="none" w="med" len="med"/>
-                    </a:lnR>
-                    <a:lnT w="9525" cap="flat" cmpd="sng" algn="ctr">
-                      <a:solidFill>
-                        <a:srgbClr val="333333"/>
-                      </a:solidFill>
-                      <a:prstDash val="solid"/>
-                      <a:round/>
-                      <a:headEnd type="none" w="med" len="med"/>
-                      <a:tailEnd type="none" w="med" len="med"/>
-                    </a:lnT>
-                    <a:lnB w="9525" cap="flat" cmpd="sng" algn="ctr">
-                      <a:solidFill>
-                        <a:srgbClr val="333333"/>
-                      </a:solidFill>
-                      <a:prstDash val="solid"/>
-                      <a:round/>
-                      <a:headEnd type="none" w="med" len="med"/>
-                      <a:tailEnd type="none" w="med" len="med"/>
-                    </a:lnB>
-                  </a:tcPr>
-                </a:tc>
-              </a:tr>
-              <a:tr h="0">
-                <a:tc>
-                  <a:txBody>
-                    <a:bodyPr/>
-                    <a:lstStyle/>
-                    <a:p>
-                      <a:pPr algn="l" indent="0" marL="0">
-                        <a:buNone/>
-                      </a:pPr>
-                      <a:r>
-                        <a:rPr lang="en-US" sz="1100" b="1" dirty="0">
-                          <a:solidFill>
-                            <a:srgbClr val="1A1A1A"/>
-                          </a:solidFill>
-                          <a:latin typeface="Times New Roman" pitchFamily="34" charset="0"/>
-                          <a:ea typeface="Times New Roman" pitchFamily="34" charset="-122"/>
-                          <a:cs typeface="Times New Roman" pitchFamily="34" charset="-120"/>
-                        </a:rPr>
-                        <a:t>Ablations on 100 questions: no_graph and no_consolidation</a:t>
-                      </a:r>
-                      <a:endParaRPr lang="en-US" sz="1100" dirty="0">
-                        <a:latin typeface="Times New Roman" charset="0"/>
-                        <a:ea typeface="Times New Roman" charset="0"/>
-                        <a:cs typeface="Times New Roman" charset="0"/>
-                      </a:endParaRPr>
-                    </a:p>
-                  </a:txBody>
-                  <a:tcPr marL="64008" marR="64008" marT="36576" marB="36576" anchor="t">
-                    <a:lnL w="9525" cap="flat" cmpd="sng" algn="ctr">
-                      <a:solidFill>
-                        <a:srgbClr val="333333"/>
-                      </a:solidFill>
-                      <a:prstDash val="solid"/>
-                      <a:round/>
-                      <a:headEnd type="none" w="med" len="med"/>
-                      <a:tailEnd type="none" w="med" len="med"/>
-                    </a:lnL>
-                    <a:lnR w="9525" cap="flat" cmpd="sng" algn="ctr">
-                      <a:solidFill>
-                        <a:srgbClr val="333333"/>
-                      </a:solidFill>
-                      <a:prstDash val="solid"/>
-                      <a:round/>
-                      <a:headEnd type="none" w="med" len="med"/>
-                      <a:tailEnd type="none" w="med" len="med"/>
-                    </a:lnR>
-                    <a:lnT w="9525" cap="flat" cmpd="sng" algn="ctr">
-                      <a:solidFill>
-                        <a:srgbClr val="333333"/>
-                      </a:solidFill>
-                      <a:prstDash val="solid"/>
-                      <a:round/>
-                      <a:headEnd type="none" w="med" len="med"/>
-                      <a:tailEnd type="none" w="med" len="med"/>
-                    </a:lnT>
-                    <a:lnB w="9525" cap="flat" cmpd="sng" algn="ctr">
-                      <a:solidFill>
-                        <a:srgbClr val="333333"/>
-                      </a:solidFill>
-                      <a:prstDash val="solid"/>
-                      <a:round/>
-                      <a:headEnd type="none" w="med" len="med"/>
-                      <a:tailEnd type="none" w="med" len="med"/>
-                    </a:lnB>
-                  </a:tcPr>
-                </a:tc>
-                <a:tc>
-                  <a:txBody>
-                    <a:bodyPr/>
-                    <a:lstStyle/>
-                    <a:p>
-                      <a:pPr algn="l" indent="0" marL="0">
-                        <a:buNone/>
-                      </a:pPr>
-                      <a:r>
-                        <a:rPr lang="en-US" sz="1100" dirty="0">
-                          <a:solidFill>
-                            <a:srgbClr val="1A1A1A"/>
-                          </a:solidFill>
-                          <a:latin typeface="Times New Roman" pitchFamily="34" charset="0"/>
-                          <a:ea typeface="Times New Roman" pitchFamily="34" charset="-122"/>
-                          <a:cs typeface="Times New Roman" pitchFamily="34" charset="-120"/>
-                        </a:rPr>
-                        <a:t>no_graph TBD, no_consolidation TBD, enhanced on the same 100 TBD</a:t>
-                      </a:r>
-                      <a:endParaRPr lang="en-US" sz="1100" dirty="0">
-                        <a:latin typeface="Times New Roman" charset="0"/>
-                        <a:ea typeface="Times New Roman" charset="0"/>
-                        <a:cs typeface="Times New Roman" charset="0"/>
-                      </a:endParaRPr>
-                    </a:p>
-                  </a:txBody>
-                  <a:tcPr marL="64008" marR="64008" marT="36576" marB="36576" anchor="t">
-                    <a:lnL w="9525" cap="flat" cmpd="sng" algn="ctr">
-                      <a:solidFill>
-                        <a:srgbClr val="333333"/>
-                      </a:solidFill>
-                      <a:prstDash val="solid"/>
-                      <a:round/>
-                      <a:headEnd type="none" w="med" len="med"/>
-                      <a:tailEnd type="none" w="med" len="med"/>
-                    </a:lnL>
-                    <a:lnR w="9525" cap="flat" cmpd="sng" algn="ctr">
-                      <a:solidFill>
-                        <a:srgbClr val="333333"/>
-                      </a:solidFill>
-                      <a:prstDash val="solid"/>
-                      <a:round/>
-                      <a:headEnd type="none" w="med" len="med"/>
-                      <a:tailEnd type="none" w="med" len="med"/>
-                    </a:lnR>
-                    <a:lnT w="9525" cap="flat" cmpd="sng" algn="ctr">
-                      <a:solidFill>
-                        <a:srgbClr val="333333"/>
-                      </a:solidFill>
-                      <a:prstDash val="solid"/>
-                      <a:round/>
-                      <a:headEnd type="none" w="med" len="med"/>
-                      <a:tailEnd type="none" w="med" len="med"/>
-                    </a:lnT>
-                    <a:lnB w="9525" cap="flat" cmpd="sng" algn="ctr">
-                      <a:solidFill>
-                        <a:srgbClr val="333333"/>
-                      </a:solidFill>
-                      <a:prstDash val="solid"/>
-                      <a:round/>
-                      <a:headEnd type="none" w="med" len="med"/>
-                      <a:tailEnd type="none" w="med" len="med"/>
-                    </a:lnB>
-                  </a:tcPr>
-                </a:tc>
-                <a:tc>
-                  <a:txBody>
-                    <a:bodyPr/>
-                    <a:lstStyle/>
-                    <a:p>
-                      <a:pPr algn="l" indent="0" marL="0">
-                        <a:buNone/>
-                      </a:pPr>
-                      <a:r>
-                        <a:rPr lang="en-US" sz="1100" dirty="0">
-                          <a:solidFill>
-                            <a:srgbClr val="1A1A1A"/>
-                          </a:solidFill>
-                          <a:latin typeface="Times New Roman" pitchFamily="34" charset="0"/>
-                          <a:ea typeface="Times New Roman" pitchFamily="34" charset="-122"/>
-                          <a:cs typeface="Times New Roman" pitchFamily="34" charset="-120"/>
-                        </a:rPr>
-                        <a:t>Small sample. Do not claim a component helps unless the gap is larger than the repeat spread</a:t>
-                      </a:r>
-                      <a:endParaRPr lang="en-US" sz="1100" dirty="0">
-                        <a:latin typeface="Times New Roman" charset="0"/>
-                        <a:ea typeface="Times New Roman" charset="0"/>
-                        <a:cs typeface="Times New Roman" charset="0"/>
-                      </a:endParaRPr>
-                    </a:p>
-                  </a:txBody>
-                  <a:tcPr marL="64008" marR="64008" marT="36576" marB="36576" anchor="t">
-                    <a:lnL w="9525" cap="flat" cmpd="sng" algn="ctr">
-                      <a:solidFill>
-                        <a:srgbClr val="333333"/>
-                      </a:solidFill>
-                      <a:prstDash val="solid"/>
-                      <a:round/>
-                      <a:headEnd type="none" w="med" len="med"/>
-                      <a:tailEnd type="none" w="med" len="med"/>
-                    </a:lnL>
-                    <a:lnR w="9525" cap="flat" cmpd="sng" algn="ctr">
-                      <a:solidFill>
-                        <a:srgbClr val="333333"/>
-                      </a:solidFill>
-                      <a:prstDash val="solid"/>
-                      <a:round/>
-                      <a:headEnd type="none" w="med" len="med"/>
-                      <a:tailEnd type="none" w="med" len="med"/>
-                    </a:lnR>
-                    <a:lnT w="9525" cap="flat" cmpd="sng" algn="ctr">
-                      <a:solidFill>
-                        <a:srgbClr val="333333"/>
-                      </a:solidFill>
-                      <a:prstDash val="solid"/>
-                      <a:round/>
-                      <a:headEnd type="none" w="med" len="med"/>
-                      <a:tailEnd type="none" w="med" len="med"/>
-                    </a:lnT>
-                    <a:lnB w="9525" cap="flat" cmpd="sng" algn="ctr">
-                      <a:solidFill>
-                        <a:srgbClr val="333333"/>
-                      </a:solidFill>
-                      <a:prstDash val="solid"/>
-                      <a:round/>
-                      <a:headEnd type="none" w="med" len="med"/>
-                      <a:tailEnd type="none" w="med" len="med"/>
-                    </a:lnB>
-                  </a:tcPr>
-                </a:tc>
-              </a:tr>
-              <a:tr h="0">
-                <a:tc>
-                  <a:txBody>
-                    <a:bodyPr/>
-                    <a:lstStyle/>
-                    <a:p>
-                      <a:pPr algn="l" indent="0" marL="0">
-                        <a:buNone/>
-                      </a:pPr>
-                      <a:r>
-                        <a:rPr lang="en-US" sz="1100" b="1" dirty="0">
-                          <a:solidFill>
-                            <a:srgbClr val="1A1A1A"/>
-                          </a:solidFill>
-                          <a:latin typeface="Times New Roman" pitchFamily="34" charset="0"/>
-                          <a:ea typeface="Times New Roman" pitchFamily="34" charset="-122"/>
-                          <a:cs typeface="Times New Roman" pitchFamily="34" charset="-120"/>
-                        </a:rPr>
-                        <a:t>Repeats: 100 questions, 3 repetitions</a:t>
-                      </a:r>
-                      <a:endParaRPr lang="en-US" sz="1100" dirty="0">
-                        <a:latin typeface="Times New Roman" charset="0"/>
-                        <a:ea typeface="Times New Roman" charset="0"/>
-                        <a:cs typeface="Times New Roman" charset="0"/>
-                      </a:endParaRPr>
-                    </a:p>
-                  </a:txBody>
-                  <a:tcPr marL="64008" marR="64008" marT="36576" marB="36576" anchor="t">
-                    <a:lnL w="9525" cap="flat" cmpd="sng" algn="ctr">
-                      <a:solidFill>
-                        <a:srgbClr val="333333"/>
-                      </a:solidFill>
-                      <a:prstDash val="solid"/>
-                      <a:round/>
-                      <a:headEnd type="none" w="med" len="med"/>
-                      <a:tailEnd type="none" w="med" len="med"/>
-                    </a:lnL>
-                    <a:lnR w="9525" cap="flat" cmpd="sng" algn="ctr">
-                      <a:solidFill>
-                        <a:srgbClr val="333333"/>
-                      </a:solidFill>
-                      <a:prstDash val="solid"/>
-                      <a:round/>
-                      <a:headEnd type="none" w="med" len="med"/>
-                      <a:tailEnd type="none" w="med" len="med"/>
-                    </a:lnR>
-                    <a:lnT w="9525" cap="flat" cmpd="sng" algn="ctr">
-                      <a:solidFill>
-                        <a:srgbClr val="333333"/>
-                      </a:solidFill>
-                      <a:prstDash val="solid"/>
-                      <a:round/>
-                      <a:headEnd type="none" w="med" len="med"/>
-                      <a:tailEnd type="none" w="med" len="med"/>
-                    </a:lnT>
-                    <a:lnB w="9525" cap="flat" cmpd="sng" algn="ctr">
-                      <a:solidFill>
-                        <a:srgbClr val="333333"/>
-                      </a:solidFill>
-                      <a:prstDash val="solid"/>
-                      <a:round/>
-                      <a:headEnd type="none" w="med" len="med"/>
-                      <a:tailEnd type="none" w="med" len="med"/>
-                    </a:lnB>
-                  </a:tcPr>
-                </a:tc>
-                <a:tc>
-                  <a:txBody>
-                    <a:bodyPr/>
-                    <a:lstStyle/>
-                    <a:p>
-                      <a:pPr algn="l" indent="0" marL="0">
-                        <a:buNone/>
-                      </a:pPr>
-                      <a:r>
-                        <a:rPr lang="en-US" sz="1100" dirty="0">
-                          <a:solidFill>
-                            <a:srgbClr val="1A1A1A"/>
-                          </a:solidFill>
-                          <a:latin typeface="Times New Roman" pitchFamily="34" charset="0"/>
-                          <a:ea typeface="Times New Roman" pitchFamily="34" charset="-122"/>
-                          <a:cs typeface="Times New Roman" pitchFamily="34" charset="-120"/>
-                        </a:rPr>
-                        <a:t>Spread across repeats TBD points</a:t>
-                      </a:r>
-                      <a:endParaRPr lang="en-US" sz="1100" dirty="0">
-                        <a:latin typeface="Times New Roman" charset="0"/>
-                        <a:ea typeface="Times New Roman" charset="0"/>
-                        <a:cs typeface="Times New Roman" charset="0"/>
-                      </a:endParaRPr>
-                    </a:p>
-                  </a:txBody>
-                  <a:tcPr marL="64008" marR="64008" marT="36576" marB="36576" anchor="t">
-                    <a:lnL w="9525" cap="flat" cmpd="sng" algn="ctr">
-                      <a:solidFill>
-                        <a:srgbClr val="333333"/>
-                      </a:solidFill>
-                      <a:prstDash val="solid"/>
-                      <a:round/>
-                      <a:headEnd type="none" w="med" len="med"/>
-                      <a:tailEnd type="none" w="med" len="med"/>
-                    </a:lnL>
-                    <a:lnR w="9525" cap="flat" cmpd="sng" algn="ctr">
-                      <a:solidFill>
-                        <a:srgbClr val="333333"/>
-                      </a:solidFill>
-                      <a:prstDash val="solid"/>
-                      <a:round/>
-                      <a:headEnd type="none" w="med" len="med"/>
-                      <a:tailEnd type="none" w="med" len="med"/>
-                    </a:lnR>
-                    <a:lnT w="9525" cap="flat" cmpd="sng" algn="ctr">
-                      <a:solidFill>
-                        <a:srgbClr val="333333"/>
-                      </a:solidFill>
-                      <a:prstDash val="solid"/>
-                      <a:round/>
-                      <a:headEnd type="none" w="med" len="med"/>
-                      <a:tailEnd type="none" w="med" len="med"/>
-                    </a:lnT>
-                    <a:lnB w="9525" cap="flat" cmpd="sng" algn="ctr">
-                      <a:solidFill>
-                        <a:srgbClr val="333333"/>
-                      </a:solidFill>
-                      <a:prstDash val="solid"/>
-                      <a:round/>
-                      <a:headEnd type="none" w="med" len="med"/>
-                      <a:tailEnd type="none" w="med" len="med"/>
-                    </a:lnB>
-                  </a:tcPr>
-                </a:tc>
-                <a:tc>
-                  <a:txBody>
-                    <a:bodyPr/>
-                    <a:lstStyle/>
-                    <a:p>
-                      <a:pPr algn="l" indent="0" marL="0">
-                        <a:buNone/>
-                      </a:pPr>
-                      <a:r>
-                        <a:rPr lang="en-US" sz="1100" dirty="0">
-                          <a:solidFill>
-                            <a:srgbClr val="1A1A1A"/>
-                          </a:solidFill>
-                          <a:latin typeface="Times New Roman" pitchFamily="34" charset="0"/>
-                          <a:ea typeface="Times New Roman" pitchFamily="34" charset="-122"/>
-                          <a:cs typeface="Times New Roman" pitchFamily="34" charset="-120"/>
-                        </a:rPr>
-                        <a:t>Shows how much the score moves with the same settings</a:t>
-                      </a:r>
-                      <a:endParaRPr lang="en-US" sz="1100" dirty="0">
-                        <a:latin typeface="Times New Roman" charset="0"/>
-                        <a:ea typeface="Times New Roman" charset="0"/>
-                        <a:cs typeface="Times New Roman" charset="0"/>
-                      </a:endParaRPr>
-                    </a:p>
-                  </a:txBody>
-                  <a:tcPr marL="64008" marR="64008" marT="36576" marB="36576" anchor="t">
-                    <a:lnL w="9525" cap="flat" cmpd="sng" algn="ctr">
-                      <a:solidFill>
-                        <a:srgbClr val="333333"/>
-                      </a:solidFill>
-                      <a:prstDash val="solid"/>
-                      <a:round/>
-                      <a:headEnd type="none" w="med" len="med"/>
-                      <a:tailEnd type="none" w="med" len="med"/>
-                    </a:lnL>
-                    <a:lnR w="9525" cap="flat" cmpd="sng" algn="ctr">
-                      <a:solidFill>
-                        <a:srgbClr val="333333"/>
-                      </a:solidFill>
-                      <a:prstDash val="solid"/>
-                      <a:round/>
-                      <a:headEnd type="none" w="med" len="med"/>
-                      <a:tailEnd type="none" w="med" len="med"/>
-                    </a:lnR>
-                    <a:lnT w="9525" cap="flat" cmpd="sng" algn="ctr">
-                      <a:solidFill>
-                        <a:srgbClr val="333333"/>
-                      </a:solidFill>
-                      <a:prstDash val="solid"/>
-                      <a:round/>
-                      <a:headEnd type="none" w="med" len="med"/>
-                      <a:tailEnd type="none" w="med" len="med"/>
-                    </a:lnT>
-                    <a:lnB w="9525" cap="flat" cmpd="sng" algn="ctr">
-                      <a:solidFill>
-                        <a:srgbClr val="333333"/>
-                      </a:solidFill>
-                      <a:prstDash val="solid"/>
-                      <a:round/>
-                      <a:headEnd type="none" w="med" len="med"/>
-                      <a:tailEnd type="none" w="med" len="med"/>
-                    </a:lnB>
-                  </a:tcPr>
-                </a:tc>
-              </a:tr>
-              <a:tr h="0">
-                <a:tc>
-                  <a:txBody>
-                    <a:bodyPr/>
-                    <a:lstStyle/>
-                    <a:p>
-                      <a:pPr algn="l" indent="0" marL="0">
-                        <a:buNone/>
-                      </a:pPr>
-                      <a:r>
-                        <a:rPr lang="en-US" sz="1100" b="1" dirty="0">
-                          <a:solidFill>
-                            <a:srgbClr val="1A1A1A"/>
-                          </a:solidFill>
-                          <a:latin typeface="Times New Roman" pitchFamily="34" charset="0"/>
-                          <a:ea typeface="Times New Roman" pitchFamily="34" charset="-122"/>
-                          <a:cs typeface="Times New Roman" pitchFamily="34" charset="-120"/>
-                        </a:rPr>
-                        <a:t>Retrieval latency and context size at benchmark scale</a:t>
-                      </a:r>
-                      <a:endParaRPr lang="en-US" sz="1100" dirty="0">
-                        <a:latin typeface="Times New Roman" charset="0"/>
-                        <a:ea typeface="Times New Roman" charset="0"/>
-                        <a:cs typeface="Times New Roman" charset="0"/>
-                      </a:endParaRPr>
-                    </a:p>
-                  </a:txBody>
-                  <a:tcPr marL="64008" marR="64008" marT="36576" marB="36576" anchor="t">
-                    <a:lnL w="9525" cap="flat" cmpd="sng" algn="ctr">
-                      <a:solidFill>
-                        <a:srgbClr val="333333"/>
-                      </a:solidFill>
-                      <a:prstDash val="solid"/>
-                      <a:round/>
-                      <a:headEnd type="none" w="med" len="med"/>
-                      <a:tailEnd type="none" w="med" len="med"/>
-                    </a:lnL>
-                    <a:lnR w="9525" cap="flat" cmpd="sng" algn="ctr">
-                      <a:solidFill>
-                        <a:srgbClr val="333333"/>
-                      </a:solidFill>
-                      <a:prstDash val="solid"/>
-                      <a:round/>
-                      <a:headEnd type="none" w="med" len="med"/>
-                      <a:tailEnd type="none" w="med" len="med"/>
-                    </a:lnR>
-                    <a:lnT w="9525" cap="flat" cmpd="sng" algn="ctr">
-                      <a:solidFill>
-                        <a:srgbClr val="333333"/>
-                      </a:solidFill>
-                      <a:prstDash val="solid"/>
-                      <a:round/>
-                      <a:headEnd type="none" w="med" len="med"/>
-                      <a:tailEnd type="none" w="med" len="med"/>
-                    </a:lnT>
-                    <a:lnB w="9525" cap="flat" cmpd="sng" algn="ctr">
-                      <a:solidFill>
-                        <a:srgbClr val="333333"/>
-                      </a:solidFill>
-                      <a:prstDash val="solid"/>
-                      <a:round/>
-                      <a:headEnd type="none" w="med" len="med"/>
-                      <a:tailEnd type="none" w="med" len="med"/>
-                    </a:lnB>
-                  </a:tcPr>
-                </a:tc>
-                <a:tc>
-                  <a:txBody>
-                    <a:bodyPr/>
-                    <a:lstStyle/>
-                    <a:p>
-                      <a:pPr algn="l" indent="0" marL="0">
-                        <a:buNone/>
-                      </a:pPr>
-                      <a:r>
-                        <a:rPr lang="en-US" sz="1100" dirty="0">
-                          <a:solidFill>
-                            <a:srgbClr val="1A1A1A"/>
-                          </a:solidFill>
-                          <a:latin typeface="Times New Roman" pitchFamily="34" charset="0"/>
-                          <a:ea typeface="Times New Roman" pitchFamily="34" charset="-122"/>
-                          <a:cs typeface="Times New Roman" pitchFamily="34" charset="-120"/>
-                        </a:rPr>
-                        <a:t>p50 TBD ms, p95 TBD ms. Median context TBD tokens, p95 TBD tokens</a:t>
-                      </a:r>
-                      <a:endParaRPr lang="en-US" sz="1100" dirty="0">
-                        <a:latin typeface="Times New Roman" charset="0"/>
-                        <a:ea typeface="Times New Roman" charset="0"/>
-                        <a:cs typeface="Times New Roman" charset="0"/>
-                      </a:endParaRPr>
-                    </a:p>
-                  </a:txBody>
-                  <a:tcPr marL="64008" marR="64008" marT="36576" marB="36576" anchor="t">
-                    <a:lnL w="9525" cap="flat" cmpd="sng" algn="ctr">
-                      <a:solidFill>
-                        <a:srgbClr val="333333"/>
-                      </a:solidFill>
-                      <a:prstDash val="solid"/>
-                      <a:round/>
-                      <a:headEnd type="none" w="med" len="med"/>
-                      <a:tailEnd type="none" w="med" len="med"/>
-                    </a:lnL>
-                    <a:lnR w="9525" cap="flat" cmpd="sng" algn="ctr">
-                      <a:solidFill>
-                        <a:srgbClr val="333333"/>
-                      </a:solidFill>
-                      <a:prstDash val="solid"/>
-                      <a:round/>
-                      <a:headEnd type="none" w="med" len="med"/>
-                      <a:tailEnd type="none" w="med" len="med"/>
-                    </a:lnR>
-                    <a:lnT w="9525" cap="flat" cmpd="sng" algn="ctr">
-                      <a:solidFill>
-                        <a:srgbClr val="333333"/>
-                      </a:solidFill>
-                      <a:prstDash val="solid"/>
-                      <a:round/>
-                      <a:headEnd type="none" w="med" len="med"/>
-                      <a:tailEnd type="none" w="med" len="med"/>
-                    </a:lnT>
-                    <a:lnB w="9525" cap="flat" cmpd="sng" algn="ctr">
-                      <a:solidFill>
-                        <a:srgbClr val="333333"/>
-                      </a:solidFill>
-                      <a:prstDash val="solid"/>
-                      <a:round/>
-                      <a:headEnd type="none" w="med" len="med"/>
-                      <a:tailEnd type="none" w="med" len="med"/>
-                    </a:lnB>
-                  </a:tcPr>
-                </a:tc>
-                <a:tc>
-                  <a:txBody>
-                    <a:bodyPr/>
-                    <a:lstStyle/>
-                    <a:p>
-                      <a:pPr algn="l" indent="0" marL="0">
-                        <a:buNone/>
-                      </a:pPr>
-                      <a:r>
-                        <a:rPr lang="en-US" sz="1100" dirty="0">
-                          <a:solidFill>
-                            <a:srgbClr val="1A1A1A"/>
-                          </a:solidFill>
-                          <a:latin typeface="Times New Roman" pitchFamily="34" charset="0"/>
-                          <a:ea typeface="Times New Roman" pitchFamily="34" charset="-122"/>
-                          <a:cs typeface="Times New Roman" pitchFamily="34" charset="-120"/>
-                        </a:rPr>
-                        <a:t>Compare with slide 15: p95 72 ms and 1,942 tokens on a 323-fact namespace</a:t>
-                      </a:r>
-                      <a:endParaRPr lang="en-US" sz="1100" dirty="0">
-                        <a:latin typeface="Times New Roman" charset="0"/>
-                        <a:ea typeface="Times New Roman" charset="0"/>
-                        <a:cs typeface="Times New Roman" charset="0"/>
-                      </a:endParaRPr>
-                    </a:p>
-                  </a:txBody>
-                  <a:tcPr marL="64008" marR="64008" marT="36576" marB="36576" anchor="t">
-                    <a:lnL w="9525" cap="flat" cmpd="sng" algn="ctr">
-                      <a:solidFill>
-                        <a:srgbClr val="333333"/>
-                      </a:solidFill>
-                      <a:prstDash val="solid"/>
-                      <a:round/>
-                      <a:headEnd type="none" w="med" len="med"/>
-                      <a:tailEnd type="none" w="med" len="med"/>
-                    </a:lnL>
-                    <a:lnR w="9525" cap="flat" cmpd="sng" algn="ctr">
-                      <a:solidFill>
-                        <a:srgbClr val="333333"/>
-                      </a:solidFill>
-                      <a:prstDash val="solid"/>
-                      <a:round/>
-                      <a:headEnd type="none" w="med" len="med"/>
-                      <a:tailEnd type="none" w="med" len="med"/>
-                    </a:lnR>
-                    <a:lnT w="9525" cap="flat" cmpd="sng" algn="ctr">
-                      <a:solidFill>
-                        <a:srgbClr val="333333"/>
-                      </a:solidFill>
-                      <a:prstDash val="solid"/>
-                      <a:round/>
-                      <a:headEnd type="none" w="med" len="med"/>
-                      <a:tailEnd type="none" w="med" len="med"/>
-                    </a:lnT>
-                    <a:lnB w="9525" cap="flat" cmpd="sng" algn="ctr">
-                      <a:solidFill>
-                        <a:srgbClr val="333333"/>
-                      </a:solidFill>
-                      <a:prstDash val="solid"/>
-                      <a:round/>
-                      <a:headEnd type="none" w="med" len="med"/>
-                      <a:tailEnd type="none" w="med" len="med"/>
-                    </a:lnB>
-                  </a:tcPr>
-                </a:tc>
-              </a:tr>
-              <a:tr h="0">
-                <a:tc>
-                  <a:txBody>
-                    <a:bodyPr/>
-                    <a:lstStyle/>
-                    <a:p>
-                      <a:pPr algn="l" indent="0" marL="0">
-                        <a:buNone/>
-                      </a:pPr>
-                      <a:r>
-                        <a:rPr lang="en-US" sz="1100" b="1" dirty="0">
-                          <a:solidFill>
-                            <a:srgbClr val="1A1A1A"/>
-                          </a:solidFill>
-                          <a:latin typeface="Times New Roman" pitchFamily="34" charset="0"/>
-                          <a:ea typeface="Times New Roman" pitchFamily="34" charset="-122"/>
-                          <a:cs typeface="Times New Roman" pitchFamily="34" charset="-120"/>
-                        </a:rPr>
-                        <a:t>Scale check, about 10,000 graph nodes</a:t>
-                      </a:r>
-                      <a:endParaRPr lang="en-US" sz="1100" dirty="0">
-                        <a:latin typeface="Times New Roman" charset="0"/>
-                        <a:ea typeface="Times New Roman" charset="0"/>
-                        <a:cs typeface="Times New Roman" charset="0"/>
-                      </a:endParaRPr>
-                    </a:p>
-                  </a:txBody>
-                  <a:tcPr marL="64008" marR="64008" marT="36576" marB="36576" anchor="t">
-                    <a:lnL w="9525" cap="flat" cmpd="sng" algn="ctr">
-                      <a:solidFill>
-                        <a:srgbClr val="333333"/>
-                      </a:solidFill>
-                      <a:prstDash val="solid"/>
-                      <a:round/>
-                      <a:headEnd type="none" w="med" len="med"/>
-                      <a:tailEnd type="none" w="med" len="med"/>
-                    </a:lnL>
-                    <a:lnR w="9525" cap="flat" cmpd="sng" algn="ctr">
-                      <a:solidFill>
-                        <a:srgbClr val="333333"/>
-                      </a:solidFill>
-                      <a:prstDash val="solid"/>
-                      <a:round/>
-                      <a:headEnd type="none" w="med" len="med"/>
-                      <a:tailEnd type="none" w="med" len="med"/>
-                    </a:lnR>
-                    <a:lnT w="9525" cap="flat" cmpd="sng" algn="ctr">
-                      <a:solidFill>
-                        <a:srgbClr val="333333"/>
-                      </a:solidFill>
-                      <a:prstDash val="solid"/>
-                      <a:round/>
-                      <a:headEnd type="none" w="med" len="med"/>
-                      <a:tailEnd type="none" w="med" len="med"/>
-                    </a:lnT>
-                    <a:lnB w="9525" cap="flat" cmpd="sng" algn="ctr">
-                      <a:solidFill>
-                        <a:srgbClr val="333333"/>
-                      </a:solidFill>
-                      <a:prstDash val="solid"/>
-                      <a:round/>
-                      <a:headEnd type="none" w="med" len="med"/>
-                      <a:tailEnd type="none" w="med" len="med"/>
-                    </a:lnB>
-                  </a:tcPr>
-                </a:tc>
-                <a:tc>
-                  <a:txBody>
-                    <a:bodyPr/>
-                    <a:lstStyle/>
-                    <a:p>
-                      <a:pPr algn="l" indent="0" marL="0">
-                        <a:buNone/>
-                      </a:pPr>
-                      <a:r>
-                        <a:rPr lang="en-US" sz="1100" dirty="0">
-                          <a:solidFill>
-                            <a:srgbClr val="1A1A1A"/>
-                          </a:solidFill>
-                          <a:latin typeface="Times New Roman" pitchFamily="34" charset="0"/>
-                          <a:ea typeface="Times New Roman" pitchFamily="34" charset="-122"/>
-                          <a:cs typeface="Times New Roman" pitchFamily="34" charset="-120"/>
-                        </a:rPr>
-                        <a:t>Nodes TBD. Recall p95 TBD ms. Correct answers TBD of TBD. Graph page renders in TBD s</a:t>
-                      </a:r>
-                      <a:endParaRPr lang="en-US" sz="1100" dirty="0">
-                        <a:latin typeface="Times New Roman" charset="0"/>
-                        <a:ea typeface="Times New Roman" charset="0"/>
-                        <a:cs typeface="Times New Roman" charset="0"/>
-                      </a:endParaRPr>
-                    </a:p>
-                  </a:txBody>
-                  <a:tcPr marL="64008" marR="64008" marT="36576" marB="36576" anchor="t">
-                    <a:lnL w="9525" cap="flat" cmpd="sng" algn="ctr">
-                      <a:solidFill>
-                        <a:srgbClr val="333333"/>
-                      </a:solidFill>
-                      <a:prstDash val="solid"/>
-                      <a:round/>
-                      <a:headEnd type="none" w="med" len="med"/>
-                      <a:tailEnd type="none" w="med" len="med"/>
-                    </a:lnL>
-                    <a:lnR w="9525" cap="flat" cmpd="sng" algn="ctr">
-                      <a:solidFill>
-                        <a:srgbClr val="333333"/>
-                      </a:solidFill>
-                      <a:prstDash val="solid"/>
-                      <a:round/>
-                      <a:headEnd type="none" w="med" len="med"/>
-                      <a:tailEnd type="none" w="med" len="med"/>
-                    </a:lnR>
-                    <a:lnT w="9525" cap="flat" cmpd="sng" algn="ctr">
-                      <a:solidFill>
-                        <a:srgbClr val="333333"/>
-                      </a:solidFill>
-                      <a:prstDash val="solid"/>
-                      <a:round/>
-                      <a:headEnd type="none" w="med" len="med"/>
-                      <a:tailEnd type="none" w="med" len="med"/>
-                    </a:lnT>
-                    <a:lnB w="9525" cap="flat" cmpd="sng" algn="ctr">
-                      <a:solidFill>
-                        <a:srgbClr val="333333"/>
-                      </a:solidFill>
-                      <a:prstDash val="solid"/>
-                      <a:round/>
-                      <a:headEnd type="none" w="med" len="med"/>
-                      <a:tailEnd type="none" w="med" len="med"/>
-                    </a:lnB>
-                  </a:tcPr>
-                </a:tc>
-                <a:tc>
-                  <a:txBody>
-                    <a:bodyPr/>
-                    <a:lstStyle/>
-                    <a:p>
-                      <a:pPr algn="l" indent="0" marL="0">
-                        <a:buNone/>
-                      </a:pPr>
-                      <a:r>
-                        <a:rPr lang="en-US" sz="1100" dirty="0">
-                          <a:solidFill>
-                            <a:srgbClr val="1A1A1A"/>
-                          </a:solidFill>
-                          <a:latin typeface="Times New Roman" pitchFamily="34" charset="0"/>
-                          <a:ea typeface="Times New Roman" pitchFamily="34" charset="-122"/>
-                          <a:cs typeface="Times New Roman" pitchFamily="34" charset="-120"/>
-                        </a:rPr>
-                        <a:t>Machine, model and embedding settings written next to the number</a:t>
-                      </a:r>
-                      <a:endParaRPr lang="en-US" sz="1100" dirty="0">
-                        <a:latin typeface="Times New Roman" charset="0"/>
-                        <a:ea typeface="Times New Roman" charset="0"/>
-                        <a:cs typeface="Times New Roman" charset="0"/>
-                      </a:endParaRPr>
-                    </a:p>
-                  </a:txBody>
-                  <a:tcPr marL="64008" marR="64008" marT="36576" marB="36576" anchor="t">
-                    <a:lnL w="9525" cap="flat" cmpd="sng" algn="ctr">
-                      <a:solidFill>
-                        <a:srgbClr val="333333"/>
-                      </a:solidFill>
-                      <a:prstDash val="solid"/>
-                      <a:round/>
-                      <a:headEnd type="none" w="med" len="med"/>
-                      <a:tailEnd type="none" w="med" len="med"/>
-                    </a:lnL>
-                    <a:lnR w="9525" cap="flat" cmpd="sng" algn="ctr">
-                      <a:solidFill>
-                        <a:srgbClr val="333333"/>
-                      </a:solidFill>
-                      <a:prstDash val="solid"/>
-                      <a:round/>
-                      <a:headEnd type="none" w="med" len="med"/>
-                      <a:tailEnd type="none" w="med" len="med"/>
-                    </a:lnR>
-                    <a:lnT w="9525" cap="flat" cmpd="sng" algn="ctr">
-                      <a:solidFill>
-                        <a:srgbClr val="333333"/>
-                      </a:solidFill>
-                      <a:prstDash val="solid"/>
-                      <a:round/>
-                      <a:headEnd type="none" w="med" len="med"/>
-                      <a:tailEnd type="none" w="med" len="med"/>
-                    </a:lnT>
-                    <a:lnB w="9525" cap="flat" cmpd="sng" algn="ctr">
-                      <a:solidFill>
-                        <a:srgbClr val="333333"/>
-                      </a:solidFill>
-                      <a:prstDash val="solid"/>
-                      <a:round/>
-                      <a:headEnd type="none" w="med" len="med"/>
-                      <a:tailEnd type="none" w="med" len="med"/>
-                    </a:lnB>
-                  </a:tcPr>
-                </a:tc>
-              </a:tr>
-            </a:tbl>
-          </a:graphicData>
-        </a:graphic>
-      </p:graphicFrame>
-      <p:sp>
-        <p:nvSpPr>
-          <p:cNvPr id="4" name="Slide Number Placeholder 0"/>
-          <p:cNvSpPr>
-            <a:spLocks noGrp="1"/>
-          </p:cNvSpPr>
-          <p:nvPr>
-            <p:ph type="sldNum" sz="quarter" idx="4294967295"/>
-          </p:nvPr>
-        </p:nvSpPr>
-        <p:spPr>
-          <a:xfrm>
-            <a:off x="10865815" y="384048"/>
-            <a:ext cx="731520" cy="457200"/>
-          </a:xfrm>
-          <a:prstGeom prst="rect">
-            <a:avLst/>
-          </a:prstGeom>
-          <a:extLst>
-            <a:ext uri="{C572A759-6A51-4108-AA02-DFA0A04FC94B}">
-              <ma14:wrappingTextBoxFlag xmlns:ma14="http://schemas.microsoft.com/office/mac/drawingml/2011/main" val="0"/>
-            </a:ext>
-          </a:extLst>
-        </p:spPr>
-        <p:txBody>
-          <a:bodyPr/>
-          <a:lstStyle>
-            <a:lvl1pPr>
-              <a:defRPr sz="1600">
-                <a:solidFill>
-                  <a:srgbClr val="000000"/>
-                </a:solidFill>
-                <a:latin typeface="Times New Roman"/>
-                <a:ea typeface="Times New Roman"/>
-                <a:cs typeface="Times New Roman"/>
-              </a:defRPr>
-            </a:lvl1pPr>
-          </a:lstStyle>
-          <a:p>
-            <a:pPr algn="r"/>
-            <a:fld id="{F7021451-1387-4CA6-816F-3879F97B5CBC}" type="slidenum">
-              <a:rPr b="0" lang="en-US"/>
-              <a:t>16</a:t>
-            </a:fld>
-            <a:endParaRPr lang="en-US"/>
-          </a:p>
-        </p:txBody>
-      </p:sp>
-    </p:spTree>
-  </p:cSld>
-  <p:clrMapOvr>
-    <a:masterClrMapping/>
-  </p:clrMapOvr>
-</p:sld>
-</file>
-
-<file path=ppt/slides/slide17.xml><?xml version="1.0" encoding="utf-8"?>
 <p:sld xmlns:a="http://schemas.openxmlformats.org/drawingml/2006/main" xmlns:r="http://schemas.openxmlformats.org/officeDocument/2006/relationships" xmlns:p="http://schemas.openxmlformats.org/presentationml/2006/main">
   <p:cSld name="Slide 15">
     <p:spTree>
@@ -17585,7 +15290,7 @@
                           <a:ea typeface="Times New Roman" pitchFamily="34" charset="-122"/>
                           <a:cs typeface="Times New Roman" pitchFamily="34" charset="-120"/>
                         </a:rPr>
-                        <a:t>Shorter context, LongMemEval-S recall, graph ablation, a rule for short prompts. A derives writer and a move off the deprecated Neo4j HTTP endpoint: Status to confirm</a:t>
+                        <a:t>Shorter context, graph ablation, a rule for short prompts. A derives writer and a move off the deprecated Neo4j HTTP endpoint: Status to confirm</a:t>
                       </a:r>
                       <a:endParaRPr lang="en-US" sz="1200" dirty="0">
                         <a:latin typeface="Times New Roman" charset="0"/>
@@ -17782,7 +15487,7 @@
                           <a:ea typeface="Times New Roman" pitchFamily="34" charset="-122"/>
                           <a:cs typeface="Times New Roman" pitchFamily="34" charset="-120"/>
                         </a:rPr>
-                        <a:t>Retries, heartbeats, consolidation, traces, /healthz, /metrics, runner</a:t>
+                        <a:t>Retries, heartbeats, consolidation, traces, /healthz, /metrics</a:t>
                       </a:r>
                       <a:endParaRPr lang="en-US" sz="1200" dirty="0">
                         <a:latin typeface="Times New Roman" charset="0"/>
@@ -17847,7 +15552,7 @@
                           <a:ea typeface="Times New Roman" pitchFamily="34" charset="-122"/>
                           <a:cs typeface="Times New Roman" pitchFamily="34" charset="-120"/>
                         </a:rPr>
-                        <a:t>src/worker.rs, benchmark/run.py, 5 protocol tests</a:t>
+                        <a:t>src/worker.rs</a:t>
                       </a:r>
                       <a:endParaRPr lang="en-US" sz="1200" dirty="0">
                         <a:latin typeface="Times New Roman" charset="0"/>
@@ -17912,7 +15617,7 @@
                           <a:ea typeface="Times New Roman" pitchFamily="34" charset="-122"/>
                           <a:cs typeface="Times New Roman" pitchFamily="34" charset="-120"/>
                         </a:rPr>
-                        <a:t>Finish a first LongMemEval-S run, add p95 latency to the runner, run a human audit (Planned). Decay, re-embedding, backup: none exists</a:t>
+                        <a:t>Human audit (Planned). Decay, re-embedding, backup: none exists</a:t>
                       </a:r>
                       <a:endParaRPr lang="en-US" sz="1200" dirty="0">
                         <a:latin typeface="Times New Roman" charset="0"/>
@@ -17977,7 +15682,7 @@
                           <a:ea typeface="Times New Roman" pitchFamily="34" charset="-122"/>
                           <a:cs typeface="Times New Roman" pitchFamily="34" charset="-120"/>
                         </a:rPr>
-                        <a:t>Completed. Benchmark run: In progress</a:t>
+                        <a:t>Completed</a:t>
                       </a:r>
                       <a:endParaRPr lang="en-US" sz="1200" dirty="0">
                         <a:latin typeface="Times New Roman" charset="0"/>
@@ -18566,7 +16271,7 @@
                           <a:ea typeface="Times New Roman" pitchFamily="34" charset="-122"/>
                           <a:cs typeface="Times New Roman" pitchFamily="34" charset="-120"/>
                         </a:rPr>
-                        <a:t>Coverage fell, relative dates weak. Live check and benchmark run: In progress</a:t>
+                        <a:t>Coverage fell, relative dates weak. Live smoke check passed</a:t>
                       </a:r>
                       <a:endParaRPr lang="en-US" sz="1200" dirty="0">
                         <a:latin typeface="Times New Roman" charset="0"/>
@@ -19053,7 +16758,7 @@
             <a:pPr algn="r"/>
             <a:fld id="{F7021451-1387-4CA6-816F-3879F97B5CBC}" type="slidenum">
               <a:rPr b="0" lang="en-US"/>
-              <a:t>17</a:t>
+              <a:t>16</a:t>
             </a:fld>
             <a:endParaRPr lang="en-US"/>
           </a:p>
@@ -19067,7 +16772,7 @@
 </p:sld>
 </file>
 
-<file path=ppt/slides/slide18.xml><?xml version="1.0" encoding="utf-8"?>
+<file path=ppt/slides/slide17.xml><?xml version="1.0" encoding="utf-8"?>
 <p:sld xmlns:a="http://schemas.openxmlformats.org/drawingml/2006/main" xmlns:r="http://schemas.openxmlformats.org/officeDocument/2006/relationships" xmlns:p="http://schemas.openxmlformats.org/presentationml/2006/main">
   <p:cSld name="Slide 16">
     <p:spTree>
@@ -19511,7 +17216,7 @@
             <a:pPr algn="r"/>
             <a:fld id="{F7021451-1387-4CA6-816F-3879F97B5CBC}" type="slidenum">
               <a:rPr b="0" lang="en-US"/>
-              <a:t>18</a:t>
+              <a:t>17</a:t>
             </a:fld>
             <a:endParaRPr lang="en-US"/>
           </a:p>
@@ -24895,268 +22600,6 @@
                           <a:ea typeface="Times New Roman" pitchFamily="34" charset="-122"/>
                           <a:cs typeface="Times New Roman" pitchFamily="34" charset="-120"/>
                         </a:rPr>
-                        <a:t>Retrieval gain</a:t>
-                      </a:r>
-                      <a:endParaRPr lang="en-US" sz="1250" dirty="0">
-                        <a:latin typeface="Times New Roman" charset="0"/>
-                        <a:ea typeface="Times New Roman" charset="0"/>
-                        <a:cs typeface="Times New Roman" charset="0"/>
-                      </a:endParaRPr>
-                    </a:p>
-                  </a:txBody>
-                  <a:tcPr marL="64008" marR="64008" marT="36576" marB="36576" anchor="t">
-                    <a:lnL w="9525" cap="flat" cmpd="sng" algn="ctr">
-                      <a:solidFill>
-                        <a:srgbClr val="333333"/>
-                      </a:solidFill>
-                      <a:prstDash val="solid"/>
-                      <a:round/>
-                      <a:headEnd type="none" w="med" len="med"/>
-                      <a:tailEnd type="none" w="med" len="med"/>
-                    </a:lnL>
-                    <a:lnR w="9525" cap="flat" cmpd="sng" algn="ctr">
-                      <a:solidFill>
-                        <a:srgbClr val="333333"/>
-                      </a:solidFill>
-                      <a:prstDash val="solid"/>
-                      <a:round/>
-                      <a:headEnd type="none" w="med" len="med"/>
-                      <a:tailEnd type="none" w="med" len="med"/>
-                    </a:lnR>
-                    <a:lnT w="9525" cap="flat" cmpd="sng" algn="ctr">
-                      <a:solidFill>
-                        <a:srgbClr val="333333"/>
-                      </a:solidFill>
-                      <a:prstDash val="solid"/>
-                      <a:round/>
-                      <a:headEnd type="none" w="med" len="med"/>
-                      <a:tailEnd type="none" w="med" len="med"/>
-                    </a:lnT>
-                    <a:lnB w="9525" cap="flat" cmpd="sng" algn="ctr">
-                      <a:solidFill>
-                        <a:srgbClr val="333333"/>
-                      </a:solidFill>
-                      <a:prstDash val="solid"/>
-                      <a:round/>
-                      <a:headEnd type="none" w="med" len="med"/>
-                      <a:tailEnd type="none" w="med" len="med"/>
-                    </a:lnB>
-                  </a:tcPr>
-                </a:tc>
-                <a:tc>
-                  <a:txBody>
-                    <a:bodyPr/>
-                    <a:lstStyle/>
-                    <a:p>
-                      <a:pPr algn="l" indent="0" marL="0">
-                        <a:buNone/>
-                      </a:pPr>
-                      <a:r>
-                        <a:rPr lang="en-US" sz="1250" dirty="0">
-                          <a:solidFill>
-                            <a:srgbClr val="1A1A1A"/>
-                          </a:solidFill>
-                          <a:latin typeface="Times New Roman" pitchFamily="34" charset="0"/>
-                          <a:ea typeface="Times New Roman" pitchFamily="34" charset="-122"/>
-                          <a:cs typeface="Times New Roman" pitchFamily="34" charset="-120"/>
-                        </a:rPr>
-                        <a:t>Match a pgvector-only baseline overall and beat it by 5 points on knowledge-update and temporal questions.</a:t>
-                      </a:r>
-                      <a:endParaRPr lang="en-US" sz="1250" dirty="0">
-                        <a:latin typeface="Times New Roman" charset="0"/>
-                        <a:ea typeface="Times New Roman" charset="0"/>
-                        <a:cs typeface="Times New Roman" charset="0"/>
-                      </a:endParaRPr>
-                    </a:p>
-                  </a:txBody>
-                  <a:tcPr marL="64008" marR="64008" marT="36576" marB="36576" anchor="t">
-                    <a:lnL w="9525" cap="flat" cmpd="sng" algn="ctr">
-                      <a:solidFill>
-                        <a:srgbClr val="333333"/>
-                      </a:solidFill>
-                      <a:prstDash val="solid"/>
-                      <a:round/>
-                      <a:headEnd type="none" w="med" len="med"/>
-                      <a:tailEnd type="none" w="med" len="med"/>
-                    </a:lnL>
-                    <a:lnR w="9525" cap="flat" cmpd="sng" algn="ctr">
-                      <a:solidFill>
-                        <a:srgbClr val="333333"/>
-                      </a:solidFill>
-                      <a:prstDash val="solid"/>
-                      <a:round/>
-                      <a:headEnd type="none" w="med" len="med"/>
-                      <a:tailEnd type="none" w="med" len="med"/>
-                    </a:lnR>
-                    <a:lnT w="9525" cap="flat" cmpd="sng" algn="ctr">
-                      <a:solidFill>
-                        <a:srgbClr val="333333"/>
-                      </a:solidFill>
-                      <a:prstDash val="solid"/>
-                      <a:round/>
-                      <a:headEnd type="none" w="med" len="med"/>
-                      <a:tailEnd type="none" w="med" len="med"/>
-                    </a:lnT>
-                    <a:lnB w="9525" cap="flat" cmpd="sng" algn="ctr">
-                      <a:solidFill>
-                        <a:srgbClr val="333333"/>
-                      </a:solidFill>
-                      <a:prstDash val="solid"/>
-                      <a:round/>
-                      <a:headEnd type="none" w="med" len="med"/>
-                      <a:tailEnd type="none" w="med" len="med"/>
-                    </a:lnB>
-                  </a:tcPr>
-                </a:tc>
-                <a:tc>
-                  <a:txBody>
-                    <a:bodyPr/>
-                    <a:lstStyle/>
-                    <a:p>
-                      <a:pPr algn="l" indent="0" marL="0">
-                        <a:buNone/>
-                      </a:pPr>
-                      <a:r>
-                        <a:rPr lang="en-US" sz="1250" dirty="0">
-                          <a:solidFill>
-                            <a:srgbClr val="1A1A1A"/>
-                          </a:solidFill>
-                          <a:latin typeface="Times New Roman" pitchFamily="34" charset="0"/>
-                          <a:ea typeface="Times New Roman" pitchFamily="34" charset="-122"/>
-                          <a:cs typeface="Times New Roman" pitchFamily="34" charset="-120"/>
-                        </a:rPr>
-                        <a:t>Not run. LongMemEval-S needs a 277 MB dataset and a lot of model use.</a:t>
-                      </a:r>
-                      <a:endParaRPr lang="en-US" sz="1250" dirty="0">
-                        <a:latin typeface="Times New Roman" charset="0"/>
-                        <a:ea typeface="Times New Roman" charset="0"/>
-                        <a:cs typeface="Times New Roman" charset="0"/>
-                      </a:endParaRPr>
-                    </a:p>
-                  </a:txBody>
-                  <a:tcPr marL="64008" marR="64008" marT="36576" marB="36576" anchor="t">
-                    <a:lnL w="9525" cap="flat" cmpd="sng" algn="ctr">
-                      <a:solidFill>
-                        <a:srgbClr val="333333"/>
-                      </a:solidFill>
-                      <a:prstDash val="solid"/>
-                      <a:round/>
-                      <a:headEnd type="none" w="med" len="med"/>
-                      <a:tailEnd type="none" w="med" len="med"/>
-                    </a:lnL>
-                    <a:lnR w="9525" cap="flat" cmpd="sng" algn="ctr">
-                      <a:solidFill>
-                        <a:srgbClr val="333333"/>
-                      </a:solidFill>
-                      <a:prstDash val="solid"/>
-                      <a:round/>
-                      <a:headEnd type="none" w="med" len="med"/>
-                      <a:tailEnd type="none" w="med" len="med"/>
-                    </a:lnR>
-                    <a:lnT w="9525" cap="flat" cmpd="sng" algn="ctr">
-                      <a:solidFill>
-                        <a:srgbClr val="333333"/>
-                      </a:solidFill>
-                      <a:prstDash val="solid"/>
-                      <a:round/>
-                      <a:headEnd type="none" w="med" len="med"/>
-                      <a:tailEnd type="none" w="med" len="med"/>
-                    </a:lnT>
-                    <a:lnB w="9525" cap="flat" cmpd="sng" algn="ctr">
-                      <a:solidFill>
-                        <a:srgbClr val="333333"/>
-                      </a:solidFill>
-                      <a:prstDash val="solid"/>
-                      <a:round/>
-                      <a:headEnd type="none" w="med" len="med"/>
-                      <a:tailEnd type="none" w="med" len="med"/>
-                    </a:lnB>
-                  </a:tcPr>
-                </a:tc>
-                <a:tc>
-                  <a:txBody>
-                    <a:bodyPr/>
-                    <a:lstStyle/>
-                    <a:p>
-                      <a:pPr algn="l" indent="0" marL="0">
-                        <a:buNone/>
-                      </a:pPr>
-                      <a:r>
-                        <a:rPr lang="en-US" sz="1250" b="1" dirty="0">
-                          <a:solidFill>
-                            <a:srgbClr val="1A1A1A"/>
-                          </a:solidFill>
-                          <a:latin typeface="Times New Roman" pitchFamily="34" charset="0"/>
-                          <a:ea typeface="Times New Roman" pitchFamily="34" charset="-122"/>
-                          <a:cs typeface="Times New Roman" pitchFamily="34" charset="-120"/>
-                        </a:rPr>
-                        <a:t>Planned</a:t>
-                      </a:r>
-                      <a:endParaRPr lang="en-US" sz="1250" dirty="0">
-                        <a:latin typeface="Times New Roman" charset="0"/>
-                        <a:ea typeface="Times New Roman" charset="0"/>
-                        <a:cs typeface="Times New Roman" charset="0"/>
-                      </a:endParaRPr>
-                    </a:p>
-                  </a:txBody>
-                  <a:tcPr marL="64008" marR="64008" marT="36576" marB="36576" anchor="t">
-                    <a:lnL w="9525" cap="flat" cmpd="sng" algn="ctr">
-                      <a:solidFill>
-                        <a:srgbClr val="333333"/>
-                      </a:solidFill>
-                      <a:prstDash val="solid"/>
-                      <a:round/>
-                      <a:headEnd type="none" w="med" len="med"/>
-                      <a:tailEnd type="none" w="med" len="med"/>
-                    </a:lnL>
-                    <a:lnR w="9525" cap="flat" cmpd="sng" algn="ctr">
-                      <a:solidFill>
-                        <a:srgbClr val="333333"/>
-                      </a:solidFill>
-                      <a:prstDash val="solid"/>
-                      <a:round/>
-                      <a:headEnd type="none" w="med" len="med"/>
-                      <a:tailEnd type="none" w="med" len="med"/>
-                    </a:lnR>
-                    <a:lnT w="9525" cap="flat" cmpd="sng" algn="ctr">
-                      <a:solidFill>
-                        <a:srgbClr val="333333"/>
-                      </a:solidFill>
-                      <a:prstDash val="solid"/>
-                      <a:round/>
-                      <a:headEnd type="none" w="med" len="med"/>
-                      <a:tailEnd type="none" w="med" len="med"/>
-                    </a:lnT>
-                    <a:lnB w="9525" cap="flat" cmpd="sng" algn="ctr">
-                      <a:solidFill>
-                        <a:srgbClr val="333333"/>
-                      </a:solidFill>
-                      <a:prstDash val="solid"/>
-                      <a:round/>
-                      <a:headEnd type="none" w="med" len="med"/>
-                      <a:tailEnd type="none" w="med" len="med"/>
-                    </a:lnB>
-                  </a:tcPr>
-                </a:tc>
-              </a:tr>
-              <a:tr h="0">
-                <a:tc>
-                  <a:txBody>
-                    <a:bodyPr/>
-                    <a:lstStyle/>
-                    <a:p>
-                      <a:pPr algn="l" indent="0" marL="0">
-                        <a:buNone/>
-                      </a:pPr>
-                      <a:r>
-                        <a:rPr lang="en-US" sz="1250" dirty="0">
-                          <a:solidFill>
-                            <a:srgbClr val="1A1A1A"/>
-                          </a:solidFill>
-                          <a:latin typeface="Times New Roman" pitchFamily="34" charset="0"/>
-                          <a:ea typeface="Times New Roman" pitchFamily="34" charset="-122"/>
-                          <a:cs typeface="Times New Roman" pitchFamily="34" charset="-120"/>
-                        </a:rPr>
                         <a:t>Retrieval latency</a:t>
                       </a:r>
                       <a:endParaRPr lang="en-US" sz="1250" dirty="0">
@@ -25746,7 +23189,7 @@
                           <a:ea typeface="Times New Roman" pitchFamily="34" charset="-122"/>
                           <a:cs typeface="Times New Roman" pitchFamily="34" charset="-120"/>
                         </a:rPr>
-                        <a:t>Dataset revision, models, prompts and configuration pinned, raw run outputs published.</a:t>
+                        <a:t>Models, prompts and configuration pinned.</a:t>
                       </a:r>
                       <a:endParaRPr lang="en-US" sz="1250" dirty="0">
                         <a:latin typeface="Times New Roman" charset="0"/>
@@ -25811,7 +23254,7 @@
                           <a:ea typeface="Times New Roman" pitchFamily="34" charset="-122"/>
                           <a:cs typeface="Times New Roman" pitchFamily="34" charset="-120"/>
                         </a:rPr>
-                        <a:t>Dataset pinned by SHA-256 and settings kept in benchmark/config.json. No run exists yet, so there are no outputs to publish, and the Docker image tag still floats.</a:t>
+                        <a:t>Worker model pinned to a Hugging Face revision and SHA-256 checksum. The Docker image tag still floats.</a:t>
                       </a:r>
                       <a:endParaRPr lang="en-US" sz="1250" dirty="0">
                         <a:latin typeface="Times New Roman" charset="0"/>
@@ -27935,203 +25378,6 @@
                           <a:ea typeface="Times New Roman" pitchFamily="34" charset="-122"/>
                           <a:cs typeface="Times New Roman" pitchFamily="34" charset="-120"/>
                         </a:rPr>
-                        <a:t>Evaluation</a:t>
-                      </a:r>
-                      <a:endParaRPr lang="en-US" sz="1250" dirty="0">
-                        <a:latin typeface="Times New Roman" charset="0"/>
-                        <a:ea typeface="Times New Roman" charset="0"/>
-                        <a:cs typeface="Times New Roman" charset="0"/>
-                      </a:endParaRPr>
-                    </a:p>
-                  </a:txBody>
-                  <a:tcPr marL="64008" marR="64008" marT="36576" marB="36576" anchor="t">
-                    <a:lnL w="9525" cap="flat" cmpd="sng" algn="ctr">
-                      <a:solidFill>
-                        <a:srgbClr val="333333"/>
-                      </a:solidFill>
-                      <a:prstDash val="solid"/>
-                      <a:round/>
-                      <a:headEnd type="none" w="med" len="med"/>
-                      <a:tailEnd type="none" w="med" len="med"/>
-                    </a:lnL>
-                    <a:lnR w="9525" cap="flat" cmpd="sng" algn="ctr">
-                      <a:solidFill>
-                        <a:srgbClr val="333333"/>
-                      </a:solidFill>
-                      <a:prstDash val="solid"/>
-                      <a:round/>
-                      <a:headEnd type="none" w="med" len="med"/>
-                      <a:tailEnd type="none" w="med" len="med"/>
-                    </a:lnR>
-                    <a:lnT w="9525" cap="flat" cmpd="sng" algn="ctr">
-                      <a:solidFill>
-                        <a:srgbClr val="333333"/>
-                      </a:solidFill>
-                      <a:prstDash val="solid"/>
-                      <a:round/>
-                      <a:headEnd type="none" w="med" len="med"/>
-                      <a:tailEnd type="none" w="med" len="med"/>
-                    </a:lnT>
-                    <a:lnB w="9525" cap="flat" cmpd="sng" algn="ctr">
-                      <a:solidFill>
-                        <a:srgbClr val="333333"/>
-                      </a:solidFill>
-                      <a:prstDash val="solid"/>
-                      <a:round/>
-                      <a:headEnd type="none" w="med" len="med"/>
-                      <a:tailEnd type="none" w="med" len="med"/>
-                    </a:lnB>
-                  </a:tcPr>
-                </a:tc>
-                <a:tc>
-                  <a:txBody>
-                    <a:bodyPr/>
-                    <a:lstStyle/>
-                    <a:p>
-                      <a:pPr algn="l" indent="0" marL="0">
-                        <a:buNone/>
-                      </a:pPr>
-                      <a:r>
-                        <a:rPr lang="en-US" sz="1250" dirty="0">
-                          <a:solidFill>
-                            <a:srgbClr val="1A1A1A"/>
-                          </a:solidFill>
-                          <a:latin typeface="Times New Roman" pitchFamily="34" charset="0"/>
-                          <a:ea typeface="Times New Roman" pitchFamily="34" charset="-122"/>
-                          <a:cs typeface="Times New Roman" pitchFamily="34" charset="-120"/>
-                        </a:rPr>
-                        <a:t>LongMemEval-S and LoCoMo, baselines B0 to B3, k6</a:t>
-                      </a:r>
-                      <a:endParaRPr lang="en-US" sz="1250" dirty="0">
-                        <a:latin typeface="Times New Roman" charset="0"/>
-                        <a:ea typeface="Times New Roman" charset="0"/>
-                        <a:cs typeface="Times New Roman" charset="0"/>
-                      </a:endParaRPr>
-                    </a:p>
-                  </a:txBody>
-                  <a:tcPr marL="64008" marR="64008" marT="36576" marB="36576" anchor="t">
-                    <a:lnL w="9525" cap="flat" cmpd="sng" algn="ctr">
-                      <a:solidFill>
-                        <a:srgbClr val="333333"/>
-                      </a:solidFill>
-                      <a:prstDash val="solid"/>
-                      <a:round/>
-                      <a:headEnd type="none" w="med" len="med"/>
-                      <a:tailEnd type="none" w="med" len="med"/>
-                    </a:lnL>
-                    <a:lnR w="9525" cap="flat" cmpd="sng" algn="ctr">
-                      <a:solidFill>
-                        <a:srgbClr val="333333"/>
-                      </a:solidFill>
-                      <a:prstDash val="solid"/>
-                      <a:round/>
-                      <a:headEnd type="none" w="med" len="med"/>
-                      <a:tailEnd type="none" w="med" len="med"/>
-                    </a:lnR>
-                    <a:lnT w="9525" cap="flat" cmpd="sng" algn="ctr">
-                      <a:solidFill>
-                        <a:srgbClr val="333333"/>
-                      </a:solidFill>
-                      <a:prstDash val="solid"/>
-                      <a:round/>
-                      <a:headEnd type="none" w="med" len="med"/>
-                      <a:tailEnd type="none" w="med" len="med"/>
-                    </a:lnT>
-                    <a:lnB w="9525" cap="flat" cmpd="sng" algn="ctr">
-                      <a:solidFill>
-                        <a:srgbClr val="333333"/>
-                      </a:solidFill>
-                      <a:prstDash val="solid"/>
-                      <a:round/>
-                      <a:headEnd type="none" w="med" len="med"/>
-                      <a:tailEnd type="none" w="med" len="med"/>
-                    </a:lnB>
-                  </a:tcPr>
-                </a:tc>
-                <a:tc>
-                  <a:txBody>
-                    <a:bodyPr/>
-                    <a:lstStyle/>
-                    <a:p>
-                      <a:pPr algn="l" indent="0" marL="0">
-                        <a:buNone/>
-                      </a:pPr>
-                      <a:r>
-                        <a:rPr lang="en-US" sz="1250" dirty="0">
-                          <a:solidFill>
-                            <a:srgbClr val="1A1A1A"/>
-                          </a:solidFill>
-                          <a:latin typeface="Times New Roman" pitchFamily="34" charset="0"/>
-                          <a:ea typeface="Times New Roman" pitchFamily="34" charset="-122"/>
-                          <a:cs typeface="Times New Roman" pitchFamily="34" charset="-120"/>
-                        </a:rPr>
-                        <a:t>LongMemEval-S runner, no completed run yet. LoCoMo and k6 are Planned.</a:t>
-                      </a:r>
-                      <a:endParaRPr lang="en-US" sz="1250" dirty="0">
-                        <a:latin typeface="Times New Roman" charset="0"/>
-                        <a:ea typeface="Times New Roman" charset="0"/>
-                        <a:cs typeface="Times New Roman" charset="0"/>
-                      </a:endParaRPr>
-                    </a:p>
-                  </a:txBody>
-                  <a:tcPr marL="64008" marR="64008" marT="36576" marB="36576" anchor="t">
-                    <a:lnL w="9525" cap="flat" cmpd="sng" algn="ctr">
-                      <a:solidFill>
-                        <a:srgbClr val="333333"/>
-                      </a:solidFill>
-                      <a:prstDash val="solid"/>
-                      <a:round/>
-                      <a:headEnd type="none" w="med" len="med"/>
-                      <a:tailEnd type="none" w="med" len="med"/>
-                    </a:lnL>
-                    <a:lnR w="9525" cap="flat" cmpd="sng" algn="ctr">
-                      <a:solidFill>
-                        <a:srgbClr val="333333"/>
-                      </a:solidFill>
-                      <a:prstDash val="solid"/>
-                      <a:round/>
-                      <a:headEnd type="none" w="med" len="med"/>
-                      <a:tailEnd type="none" w="med" len="med"/>
-                    </a:lnR>
-                    <a:lnT w="9525" cap="flat" cmpd="sng" algn="ctr">
-                      <a:solidFill>
-                        <a:srgbClr val="333333"/>
-                      </a:solidFill>
-                      <a:prstDash val="solid"/>
-                      <a:round/>
-                      <a:headEnd type="none" w="med" len="med"/>
-                      <a:tailEnd type="none" w="med" len="med"/>
-                    </a:lnT>
-                    <a:lnB w="9525" cap="flat" cmpd="sng" algn="ctr">
-                      <a:solidFill>
-                        <a:srgbClr val="333333"/>
-                      </a:solidFill>
-                      <a:prstDash val="solid"/>
-                      <a:round/>
-                      <a:headEnd type="none" w="med" len="med"/>
-                      <a:tailEnd type="none" w="med" len="med"/>
-                    </a:lnB>
-                  </a:tcPr>
-                </a:tc>
-              </a:tr>
-              <a:tr h="0">
-                <a:tc>
-                  <a:txBody>
-                    <a:bodyPr/>
-                    <a:lstStyle/>
-                    <a:p>
-                      <a:pPr algn="l" indent="0" marL="0">
-                        <a:buNone/>
-                      </a:pPr>
-                      <a:r>
-                        <a:rPr lang="en-US" sz="1250" dirty="0">
-                          <a:solidFill>
-                            <a:srgbClr val="1A1A1A"/>
-                          </a:solidFill>
-                          <a:latin typeface="Times New Roman" pitchFamily="34" charset="0"/>
-                          <a:ea typeface="Times New Roman" pitchFamily="34" charset="-122"/>
-                          <a:cs typeface="Times New Roman" pitchFamily="34" charset="-120"/>
-                        </a:rPr>
                         <a:t>Tests</a:t>
                       </a:r>
                       <a:endParaRPr lang="en-US" sz="1250" dirty="0">
@@ -29011,138 +26257,6 @@
       </p:sp>
       <p:sp>
         <p:nvSpPr>
-          <p:cNvPr id="7" name="Text 5"/>
-          <p:cNvSpPr/>
-          <p:nvPr/>
-        </p:nvSpPr>
-        <p:spPr>
-          <a:xfrm>
-            <a:off x="3566160" y="1225296"/>
-            <a:ext cx="1554480" cy="530352"/>
-          </a:xfrm>
-          <a:prstGeom prst="rect">
-            <a:avLst/>
-          </a:prstGeom>
-          <a:solidFill>
-            <a:srgbClr val="FFFFFF"/>
-          </a:solidFill>
-          <a:ln w="12700">
-            <a:solidFill>
-              <a:srgbClr val="333333"/>
-            </a:solidFill>
-            <a:prstDash val="dashDot"/>
-          </a:ln>
-        </p:spPr>
-        <p:txBody>
-          <a:bodyPr wrap="square" lIns="63500" tIns="88900" rIns="88900" bIns="63500" rtlCol="0" anchor="t"/>
-          <a:lstStyle/>
-          <a:p>
-            <a:pPr algn="l" indent="0" marL="0">
-              <a:spcAft>
-                <a:spcPts val="300"/>
-              </a:spcAft>
-              <a:buNone/>
-            </a:pPr>
-            <a:r>
-              <a:rPr lang="en-US" sz="1300" b="1" dirty="0">
-                <a:solidFill>
-                  <a:srgbClr val="1A1A1A"/>
-                </a:solidFill>
-                <a:latin typeface="Times New Roman" pitchFamily="34" charset="0"/>
-                <a:ea typeface="Times New Roman" pitchFamily="34" charset="-122"/>
-                <a:cs typeface="Times New Roman" pitchFamily="34" charset="-120"/>
-              </a:rPr>
-              <a:t>Evaluation harness</a:t>
-            </a:r>
-            <a:endParaRPr lang="en-US" sz="1300" dirty="0"/>
-          </a:p>
-          <a:p>
-            <a:pPr algn="l" indent="0" marL="0">
-              <a:buNone/>
-            </a:pPr>
-            <a:r>
-              <a:rPr lang="en-US" sz="1200" dirty="0">
-                <a:solidFill>
-                  <a:srgbClr val="1A1A1A"/>
-                </a:solidFill>
-                <a:latin typeface="Times New Roman" pitchFamily="34" charset="0"/>
-                <a:ea typeface="Times New Roman" pitchFamily="34" charset="-122"/>
-                <a:cs typeface="Times New Roman" pitchFamily="34" charset="-120"/>
-              </a:rPr>
-              <a:t>runner, In progress</a:t>
-            </a:r>
-            <a:endParaRPr lang="en-US" sz="1300" dirty="0"/>
-          </a:p>
-        </p:txBody>
-      </p:sp>
-      <p:sp>
-        <p:nvSpPr>
-          <p:cNvPr id="8" name="Text 6"/>
-          <p:cNvSpPr/>
-          <p:nvPr/>
-        </p:nvSpPr>
-        <p:spPr>
-          <a:xfrm>
-            <a:off x="5394960" y="1225296"/>
-            <a:ext cx="1828800" cy="530352"/>
-          </a:xfrm>
-          <a:prstGeom prst="rect">
-            <a:avLst/>
-          </a:prstGeom>
-          <a:solidFill>
-            <a:srgbClr val="FAFAFA"/>
-          </a:solidFill>
-          <a:ln w="12700">
-            <a:solidFill>
-              <a:srgbClr val="595959"/>
-            </a:solidFill>
-            <a:prstDash val="sysDot"/>
-          </a:ln>
-        </p:spPr>
-        <p:txBody>
-          <a:bodyPr wrap="square" lIns="63500" tIns="88900" rIns="88900" bIns="63500" rtlCol="0" anchor="t"/>
-          <a:lstStyle/>
-          <a:p>
-            <a:pPr algn="l" indent="0" marL="0">
-              <a:spcAft>
-                <a:spcPts val="300"/>
-              </a:spcAft>
-              <a:buNone/>
-            </a:pPr>
-            <a:r>
-              <a:rPr lang="en-US" sz="1300" b="1" dirty="0">
-                <a:solidFill>
-                  <a:srgbClr val="595959"/>
-                </a:solidFill>
-                <a:latin typeface="Times New Roman" pitchFamily="34" charset="0"/>
-                <a:ea typeface="Times New Roman" pitchFamily="34" charset="-122"/>
-                <a:cs typeface="Times New Roman" pitchFamily="34" charset="-120"/>
-              </a:rPr>
-              <a:t>k6, Criterion, LoCoMo</a:t>
-            </a:r>
-            <a:endParaRPr lang="en-US" sz="1300" dirty="0"/>
-          </a:p>
-          <a:p>
-            <a:pPr algn="l" indent="0" marL="0">
-              <a:buNone/>
-            </a:pPr>
-            <a:r>
-              <a:rPr lang="en-US" sz="1100" i="1" dirty="0">
-                <a:solidFill>
-                  <a:srgbClr val="595959"/>
-                </a:solidFill>
-                <a:latin typeface="Times New Roman" pitchFamily="34" charset="0"/>
-                <a:ea typeface="Times New Roman" pitchFamily="34" charset="-122"/>
-                <a:cs typeface="Times New Roman" pitchFamily="34" charset="-120"/>
-              </a:rPr>
-              <a:t>Planned</a:t>
-            </a:r>
-            <a:endParaRPr lang="en-US" sz="1300" dirty="0"/>
-          </a:p>
-        </p:txBody>
-      </p:sp>
-      <p:sp>
-        <p:nvSpPr>
           <p:cNvPr id="9" name="Text 7"/>
           <p:cNvSpPr/>
           <p:nvPr/>
@@ -30767,69 +27881,6 @@
                 <a:cs typeface="Times New Roman" pitchFamily="34" charset="-120"/>
               </a:rPr>
               <a:t>context</a:t>
-            </a:r>
-            <a:endParaRPr lang="en-US" sz="1100" dirty="0"/>
-          </a:p>
-        </p:txBody>
-      </p:sp>
-      <p:cxnSp>
-        <p:nvCxnSpPr>
-          <p:cNvPr id="41" name="Connector 41"/>
-          <p:cNvCxnSpPr/>
-          <p:nvPr/>
-        </p:nvCxnSpPr>
-        <p:spPr>
-          <a:xfrm>
-            <a:off x="4023360" y="1755648"/>
-            <a:ext cx="0" cy="274320"/>
-          </a:xfrm>
-          <a:prstGeom prst="straightConnector1">
-            <a:avLst/>
-          </a:prstGeom>
-          <a:noFill/>
-          <a:ln w="15875">
-            <a:solidFill>
-              <a:srgbClr val="333333"/>
-            </a:solidFill>
-            <a:prstDash val="solid"/>
-            <a:tailEnd type="triangle"/>
-          </a:ln>
-        </p:spPr>
-      </p:cxnSp>
-      <p:sp>
-        <p:nvSpPr>
-          <p:cNvPr id="42" name="Text 40"/>
-          <p:cNvSpPr txBox="1"/>
-          <p:nvPr/>
-        </p:nvSpPr>
-        <p:spPr>
-          <a:xfrm>
-            <a:off x="4096512" y="1783080"/>
-            <a:ext cx="1234440" cy="219456"/>
-          </a:xfrm>
-          <a:prstGeom prst="rect">
-            <a:avLst/>
-          </a:prstGeom>
-          <a:noFill/>
-          <a:ln/>
-        </p:spPr>
-        <p:txBody>
-          <a:bodyPr wrap="square" lIns="0" tIns="0" rIns="0" bIns="0" rtlCol="0" anchor="ctr"/>
-          <a:lstStyle/>
-          <a:p>
-            <a:pPr algn="l" indent="0" marL="0">
-              <a:buNone/>
-            </a:pPr>
-            <a:r>
-              <a:rPr lang="en-US" sz="1100" i="1" dirty="0">
-                <a:solidFill>
-                  <a:srgbClr val="595959"/>
-                </a:solidFill>
-                <a:latin typeface="Times New Roman" pitchFamily="34" charset="0"/>
-                <a:ea typeface="Times New Roman" pitchFamily="34" charset="-122"/>
-                <a:cs typeface="Times New Roman" pitchFamily="34" charset="-120"/>
-              </a:rPr>
-              <a:t>benchmark queries</a:t>
             </a:r>
             <a:endParaRPr lang="en-US" sz="1100" dirty="0"/>
           </a:p>

--- a/P1_R2_13.pptx
+++ b/P1_R2_13.pptx
@@ -27986,7 +27986,7 @@
           <p:nvPr/>
         </p:nvCxnSpPr>
         <p:spPr>
-          <a:xfrm flipH="1">
+          <a:xfrm>
             <a:off x="1965960" y="1490472"/>
             <a:ext cx="182880" cy="0"/>
           </a:xfrm>

--- a/P1_R2_13.pptx
+++ b/P1_R2_13.pptx
@@ -37,6 +37,9 @@
     <p:sldId id="282" r:id="rId31"/>
     <p:sldId id="283" r:id="rId32"/>
     <p:sldId id="284" r:id="rId33"/>
+    <p:sldId id="285" r:id="rId34"/>
+    <p:sldId id="286" r:id="rId35"/>
+    <p:sldId id="287" r:id="rId36"/>
   </p:sldIdLst>
   <p:sldSz cx="12192000" cy="6858000"/>
   <p:notesSz cx="6858000" cy="12192000"/>
@@ -624,7 +627,7 @@
           <a:lstStyle/>
           <a:p>
             <a:r>
-              <a:t>This is where the update rule lives, and it is code, not a model decision. Everything for a job happens in one transaction that holds a namespace lock. Chennai stays on record as valid from 1 to 10 October and superseded; Bengaluru is active from 10 October and linked to its quote. When an assertion changes, inferences built on it are marked stale.</a:t>
+              <a:t>Module 1 saves the raw messages before any model touches them, so a failed model call can never lose a conversation. In the walkthrough, this is the step that stores Maya's two messages.</a:t>
             </a:r>
           </a:p>
         </p:txBody>
@@ -694,7 +697,7 @@
           <a:lstStyle/>
           <a:p>
             <a:r>
-              <a:t>Recall never trusts the graph on its own: anything found through Neo4j is checked against PostgreSQL before it is used. Packing stops at the token budget, so the agent's prompt stays small.</a:t>
+              <a:t>Both stages call the same local model. The prompt also includes related existing assertions, which is how the model knows 'Bengaluru is now my home city' corrects Chennai. Algorithm 1 decides which existing assertions fit in the prompt.</a:t>
             </a:r>
           </a:p>
         </p:txBody>
@@ -764,7 +767,7 @@
           <a:lstStyle/>
           <a:p>
             <a:r>
-              <a:t>Labels are checked for structure and exact quotes before they are frozen into training, validation and test splits. Module 5 produces the model that Modules 2 and 4 call. The comparison numbers are on the results slides.</a:t>
+              <a:t>This is where G1 and G2 are answered: the update rule is code, not a model decision, and nothing is deleted. Chennai stays on record as valid from 1 to 10 October. If an assertion changes, any inference built on it is marked stale. Algorithm 2 is this rule written out.</a:t>
             </a:r>
           </a:p>
         </p:txBody>
@@ -834,7 +837,7 @@
           <a:lstStyle/>
           <a:p>
             <a:r>
-              <a:t>Six algorithms carry the system. The first three run when memory is written, the last three when it is read. Each one gets its own pseudocode on the next slides.</a:t>
+              <a:t>Each search misses different things, so we run several and merge them (Algorithms 4 and 5). Anything found through the graph copy is checked against PostgreSQL before use, and packing stops at the token budget so the agent's prompt stays small.</a:t>
             </a:r>
           </a:p>
         </p:txBody>
@@ -904,7 +907,7 @@
           <a:lstStyle/>
           <a:p>
             <a:r>
-              <a:t>Selection keeps the extraction prompt inside the model's limit without dropping the assertions the new messages talk about. Versioning is the update rule from Module 3, written out.</a:t>
+              <a:t>Labels are checked for structure and exact quotes before they go into the dataset. The dataset slides describe the data, and the results slides compare the model before and after fine-tuning.</a:t>
             </a:r>
           </a:p>
         </p:txBody>
@@ -974,7 +977,7 @@
           <a:lstStyle/>
           <a:p>
             <a:r>
-              <a:t>An inference is only as good as the assertions under it, so when one of them changes the inference is marked stale instead of quietly staying in memory. Retrieval runs several searches because each one misses different things.</a:t>
+              <a:t>Six algorithms do the work inside the modules. The first three run when memory is written, the last three when it is read. The next three slides give the steps of each.</a:t>
             </a:r>
           </a:p>
         </p:txBody>
@@ -1044,7 +1047,7 @@
           <a:lstStyle/>
           <a:p>
             <a:r>
-              <a:t>k = 60 is the constant from the original RRF paper. The answering step refuses rather than guesses: with nothing retrieved it says so, and an answer that cites nothing is rejected.</a:t>
+              <a:t>Algorithm 1 keeps the extraction prompt inside the model's limit without dropping the assertions the new messages are about. Algorithm 2 is the Module 3 rule: in the walkthrough, Bengaluru takes the third branch and Chennai becomes history.</a:t>
             </a:r>
           </a:p>
         </p:txBody>
@@ -1114,7 +1117,7 @@
           <a:lstStyle/>
           <a:p>
             <a:r>
-              <a:t>The service is written in Rust. PostgreSQL is the store of record, and Neo4j is only a copy. Everything model-related runs on Ollama on our own machine.</a:t>
+              <a:t>An inference is only as good as the assertions under it, so when one of them changes, the inference is marked stale instead of quietly staying in memory. Retrieval runs several searches because each one misses different things.</a:t>
             </a:r>
           </a:p>
         </p:txBody>
@@ -1184,7 +1187,7 @@
           <a:lstStyle/>
           <a:p>
             <a:r>
-              <a:t>The model side is the standard Hugging Face stack for QLoRA, then llama.cpp to get a GGUF file that Ollama can serve. Pi is the agent we integrate with; the dashboard is React.</a:t>
+              <a:t>A memory ranked high by several searches scores highest; 60 is the constant from the original RRF paper. The answering step would rather refuse than guess: with nothing retrieved it says so, and an answer that cites nothing is rejected.</a:t>
             </a:r>
           </a:p>
         </p:txBody>
@@ -1254,7 +1257,7 @@
           <a:lstStyle/>
           <a:p>
             <a:r>
-              <a:t>All training conversations are synthetic. The teacher model labelled them, a second model checked the labels adversarially, and we cleaned what was left. A lot of rows test whether the model keeps only what the user said, like this one, where the assistant's suggestion must not become a memory.</a:t>
+              <a:t>The service is written in Rust. PostgreSQL holds everything and Neo4j is only a copy. All models run through Ollama on our own machine, which is how we answer G4.</a:t>
             </a:r>
           </a:p>
         </p:txBody>
@@ -1324,7 +1327,7 @@
           <a:lstStyle/>
           <a:p>
             <a:r>
-              <a:t>An LLM call remembers nothing from earlier calls, so an agent that works across many sessions needs somewhere to keep what it was told. Putting the whole history back in the prompt is the obvious fix, but Liu et al. showed models use the middle of a long input poorly, and it gets slower and more expensive as the history grows. LongMemEval lists the abilities we are aiming for. The release-freeze example is the behaviour we want and is the same one shown in the demo.</a:t>
+              <a:t>A language model remembers nothing between calls, so an agent that works with someone over many sessions needs a place to keep what it was told. Re-sending the whole history is the obvious fix, but Liu et al. showed that models make poor use of the middle of a long input, and the cost grows with every session. LongMemEval is the benchmark that tests the abilities we are after. Pi, which appears throughout the deck, is the Pi coding agent, not a Raspberry Pi.</a:t>
             </a:r>
           </a:p>
         </p:txBody>
@@ -1394,7 +1397,7 @@
           <a:lstStyle/>
           <a:p>
             <a:r>
-              <a:t>LoCoMo gives us real-style conversations the model never saw in training. Forty reference assertions is a small set, so we treat these numbers as a check, not a benchmark.</a:t>
+              <a:t>The training side uses the usual Hugging Face tools for QLoRA, then llama.cpp to produce a file Ollama can serve. Pi is the agent we integrate with, and the dashboard is a React app.</a:t>
             </a:r>
           </a:p>
         </p:txBody>
@@ -1464,7 +1467,7 @@
           <a:lstStyle/>
           <a:p>
             <a:r>
-              <a:t>Software is the largest domain because the dataset started as coding conversations only. The count is task rows, not conversations, since one episode can produce an extraction, a consolidation and a question-answering row.</a:t>
+              <a:t>This is the data Module 5 trains on. Every conversation is synthetic: the larger model labelled it, a second model checked the labels, and we cleaned what was left. Many rows test whether the model keeps only what the user said. In this one, the assistant's suggestion must not become a memory.</a:t>
             </a:r>
           </a:p>
         </p:txBody>
@@ -1534,7 +1537,7 @@
           <a:lstStyle/>
           <a:p>
             <a:r>
-              <a:t>Figures 1 and 2 were captured on 20 October 2026 from the current build, with Pi running Claude Sonnet 5.5 and a fresh namespace. Session 1 is in payments-api and session 2 in mobile-app, so nothing carries over except through the memory service.</a:t>
+              <a:t>To see how the model does on conversations it was not trained on, we use LoCoMo. Forty reference assertions is a small set, so we treat these numbers as a check, not a benchmark.</a:t>
             </a:r>
           </a:p>
         </p:txBody>
@@ -1604,7 +1607,7 @@
           <a:lstStyle/>
           <a:p>
             <a:r>
-              <a:t>In Figure 3 the agent also points out that the stored date has the year 2026 although the user never gave one, which is exactly why answers cite their quotes. Figure 4 is our graph page: the Friday assertion supersedes and contradicts the Thursday one, and the side panel shows its source message.</a:t>
+              <a:t>Software is the largest domain because the dataset began as coding conversations only. The bars count task rows, not conversations: one conversation can give an extraction row, a consolidation row and a question-answering row.</a:t>
             </a:r>
           </a:p>
         </p:txBody>
@@ -1674,7 +1677,7 @@
           <a:lstStyle/>
           <a:p>
             <a:r>
-              <a:t>These come from demos and a database audit on one machine, not from a benchmark. The quote check shows every assertion can be traced, but it does not prove the model read the quote correctly.</a:t>
+              <a:t>This is the same flow as the Maya walkthrough, with project details instead. Session 1 is in the payments-api folder and session 2 in mobile-app, so nothing carries over except through the memory service. Captured on 20 October 2026 from the current build, with Pi running Claude Sonnet 5.5.</a:t>
             </a:r>
           </a:p>
         </p:txBody>
@@ -1744,7 +1747,7 @@
           <a:lstStyle/>
           <a:p>
             <a:r>
-              <a:t>The 1.7B model looked fine on synthetic data and fell apart on natural conversation. That is what pushed us to widen the training data and move to the 4B model. Dates are still the weakest part.</a:t>
+              <a:t>In Figure 3 Pi also notices that the stored date has the year 2026 although the user never gave one. That is why every answer carries its quote: a reader can check it. Figure 4 is our graph page. The Friday assertion replaces the Thursday one, and the side panel shows the message it came from.</a:t>
             </a:r>
           </a:p>
         </p:txBody>
@@ -1814,7 +1817,7 @@
           <a:lstStyle/>
           <a:p>
             <a:r>
-              <a:t>Fine-tuning clearly helped consolidation and answering. Extraction got worse, and we have not worked out why yet. Passing the format check says nothing about whether the content is right, and without the full LongMemEval run we cannot claim an overall improvement.</a:t>
+              <a:t>This slide is about behaviour: demos and a database audit on one machine, not a benchmark. The quote check shows that every assertion can be traced, but it does not prove the model read the quote correctly. The next slide has the model numbers.</a:t>
             </a:r>
           </a:p>
         </p:txBody>
@@ -1884,7 +1887,7 @@
           <a:lstStyle/>
           <a:p>
             <a:r>
-              <a:t>Implemented means the feature is in the code and tested, not that it has been measured to be good. M2's extraction quality is the main open problem. The biggest missing piece is the LongMemEval-S run, which needs a 277 MB dataset and a lot of model time. Until it is done we cannot say memory improves answers over long histories.</a:t>
+              <a:t>Fine-tuning clearly helped with combining assertions and answering. Extraction got worse, and we have not found out why yet. The format check only says the output is valid JSON with valid IDs; it says nothing about whether the content is right.</a:t>
             </a:r>
           </a:p>
         </p:txBody>
@@ -1954,7 +1957,77 @@
           <a:lstStyle/>
           <a:p>
             <a:r>
-              <a:t>References follow IEEE style and are numbered in the order they are first cited in the slides.</a:t>
+              <a:t>These are the weak points we know about. The 1.7B model looked fine on synthetic data and failed on natural conversation, which is why we widened the training data and moved to the 4B model. The full LongMemEval-S run is still pending, so we cannot yet claim the memory helps over long histories.</a:t>
+            </a:r>
+          </a:p>
+        </p:txBody>
+      </p:sp>
+      <p:sp>
+        <p:nvSpPr>
+          <p:cNvPr id="4" name="Slide Number Placeholder 3"/>
+          <p:cNvSpPr>
+            <a:spLocks noGrp="1"/>
+          </p:cNvSpPr>
+          <p:nvPr>
+            <p:ph type="sldNum" idx="4"/>
+          </p:nvPr>
+        </p:nvSpPr>
+        <p:spPr/>
+      </p:sp>
+    </p:spTree>
+  </p:cSld>
+  <p:clrMapOvr>
+    <a:masterClrMapping/>
+  </p:clrMapOvr>
+</p:notes>
+</file>
+
+<file path=ppt/notesSlides/notesSlide29.xml><?xml version="1.0" encoding="utf-8"?>
+<p:notes xmlns:a="http://schemas.openxmlformats.org/drawingml/2006/main" xmlns:p="http://schemas.openxmlformats.org/presentationml/2006/main" xmlns:r="http://schemas.openxmlformats.org/officeDocument/2006/relationships">
+  <p:cSld>
+    <p:spTree>
+      <p:nvGrpSpPr>
+        <p:cNvPr id="1" name=""/>
+        <p:cNvGrpSpPr/>
+        <p:nvPr/>
+      </p:nvGrpSpPr>
+      <p:grpSpPr>
+        <a:xfrm>
+          <a:off x="0" y="0"/>
+          <a:ext cx="0" cy="0"/>
+          <a:chOff x="0" y="0"/>
+          <a:chExt cx="0" cy="0"/>
+        </a:xfrm>
+      </p:grpSpPr>
+      <p:sp>
+        <p:nvSpPr>
+          <p:cNvPr id="2" name="Slide Image Placeholder 1"/>
+          <p:cNvSpPr>
+            <a:spLocks noGrp="1"/>
+          </p:cNvSpPr>
+          <p:nvPr>
+            <p:ph type="sldImg"/>
+          </p:nvPr>
+        </p:nvSpPr>
+        <p:spPr/>
+      </p:sp>
+      <p:sp>
+        <p:nvSpPr>
+          <p:cNvPr id="3" name="Notes Placeholder 2"/>
+          <p:cNvSpPr>
+            <a:spLocks noGrp="1"/>
+          </p:cNvSpPr>
+          <p:nvPr>
+            <p:ph type="body"/>
+          </p:nvPr>
+        </p:nvSpPr>
+        <p:spPr/>
+        <p:txBody>
+          <a:bodyPr/>
+          <a:lstStyle/>
+          <a:p>
+            <a:r>
+              <a:t>Implemented means the feature is in the code and has tests; it does not mean it has been measured to be good. The largest missing piece is the LongMemEval-S run, which needs a 277 MB dataset and a lot of model time.</a:t>
             </a:r>
           </a:p>
         </p:txBody>
@@ -2024,7 +2097,147 @@
           <a:lstStyle/>
           <a:p>
             <a:r>
-              <a:t>MemGPT is a preprint; Letta grew out of it, so this row describes the paper, not the product. Zep's numbers come from the authors' own single run, and Zep calls its graph edges 'facts'. Mem0's authors work for Mem0 and ran only LoCoMo, where the full history actually scored higher on the judge metric.</a:t>
+              <a:t>We read five memory systems and the plain baseline. MemGPT is a preprint, and Letta grew out of it, so this row describes the paper. Zep's numbers are from the authors' single run; Zep calls its graph edges 'facts'. Mem0's authors work for Mem0 and tested only on LoCoMo, where the full history still scored higher; Mem0's advantage is speed (1.4 s against 17 s at the 95th percentile).</a:t>
+            </a:r>
+          </a:p>
+        </p:txBody>
+      </p:sp>
+      <p:sp>
+        <p:nvSpPr>
+          <p:cNvPr id="4" name="Slide Number Placeholder 3"/>
+          <p:cNvSpPr>
+            <a:spLocks noGrp="1"/>
+          </p:cNvSpPr>
+          <p:nvPr>
+            <p:ph type="sldNum" idx="4"/>
+          </p:nvPr>
+        </p:nvSpPr>
+        <p:spPr/>
+      </p:sp>
+    </p:spTree>
+  </p:cSld>
+  <p:clrMapOvr>
+    <a:masterClrMapping/>
+  </p:clrMapOvr>
+</p:notes>
+</file>
+
+<file path=ppt/notesSlides/notesSlide30.xml><?xml version="1.0" encoding="utf-8"?>
+<p:notes xmlns:a="http://schemas.openxmlformats.org/drawingml/2006/main" xmlns:p="http://schemas.openxmlformats.org/presentationml/2006/main" xmlns:r="http://schemas.openxmlformats.org/officeDocument/2006/relationships">
+  <p:cSld>
+    <p:spTree>
+      <p:nvGrpSpPr>
+        <p:cNvPr id="1" name=""/>
+        <p:cNvGrpSpPr/>
+        <p:nvPr/>
+      </p:nvGrpSpPr>
+      <p:grpSpPr>
+        <a:xfrm>
+          <a:off x="0" y="0"/>
+          <a:ext cx="0" cy="0"/>
+          <a:chOff x="0" y="0"/>
+          <a:chExt cx="0" cy="0"/>
+        </a:xfrm>
+      </p:grpSpPr>
+      <p:sp>
+        <p:nvSpPr>
+          <p:cNvPr id="2" name="Slide Image Placeholder 1"/>
+          <p:cNvSpPr>
+            <a:spLocks noGrp="1"/>
+          </p:cNvSpPr>
+          <p:nvPr>
+            <p:ph type="sldImg"/>
+          </p:nvPr>
+        </p:nvSpPr>
+        <p:spPr/>
+      </p:sp>
+      <p:sp>
+        <p:nvSpPr>
+          <p:cNvPr id="3" name="Notes Placeholder 2"/>
+          <p:cNvSpPr>
+            <a:spLocks noGrp="1"/>
+          </p:cNvSpPr>
+          <p:nvPr>
+            <p:ph type="body"/>
+          </p:nvPr>
+        </p:nvSpPr>
+        <p:spPr/>
+        <p:txBody>
+          <a:bodyPr/>
+          <a:lstStyle/>
+          <a:p>
+            <a:r>
+              <a:t>To sum up against the objectives: memory across sessions, versioned changes and traceable quotes work; the local model works but extraction needs fixing; and the benchmark that would let us compare fairly (G5) is the main thing left.</a:t>
+            </a:r>
+          </a:p>
+        </p:txBody>
+      </p:sp>
+      <p:sp>
+        <p:nvSpPr>
+          <p:cNvPr id="4" name="Slide Number Placeholder 3"/>
+          <p:cNvSpPr>
+            <a:spLocks noGrp="1"/>
+          </p:cNvSpPr>
+          <p:nvPr>
+            <p:ph type="sldNum" idx="4"/>
+          </p:nvPr>
+        </p:nvSpPr>
+        <p:spPr/>
+      </p:sp>
+    </p:spTree>
+  </p:cSld>
+  <p:clrMapOvr>
+    <a:masterClrMapping/>
+  </p:clrMapOvr>
+</p:notes>
+</file>
+
+<file path=ppt/notesSlides/notesSlide31.xml><?xml version="1.0" encoding="utf-8"?>
+<p:notes xmlns:a="http://schemas.openxmlformats.org/drawingml/2006/main" xmlns:p="http://schemas.openxmlformats.org/presentationml/2006/main" xmlns:r="http://schemas.openxmlformats.org/officeDocument/2006/relationships">
+  <p:cSld>
+    <p:spTree>
+      <p:nvGrpSpPr>
+        <p:cNvPr id="1" name=""/>
+        <p:cNvGrpSpPr/>
+        <p:nvPr/>
+      </p:nvGrpSpPr>
+      <p:grpSpPr>
+        <a:xfrm>
+          <a:off x="0" y="0"/>
+          <a:ext cx="0" cy="0"/>
+          <a:chOff x="0" y="0"/>
+          <a:chExt cx="0" cy="0"/>
+        </a:xfrm>
+      </p:grpSpPr>
+      <p:sp>
+        <p:nvSpPr>
+          <p:cNvPr id="2" name="Slide Image Placeholder 1"/>
+          <p:cNvSpPr>
+            <a:spLocks noGrp="1"/>
+          </p:cNvSpPr>
+          <p:nvPr>
+            <p:ph type="sldImg"/>
+          </p:nvPr>
+        </p:nvSpPr>
+        <p:spPr/>
+      </p:sp>
+      <p:sp>
+        <p:nvSpPr>
+          <p:cNvPr id="3" name="Notes Placeholder 2"/>
+          <p:cNvSpPr>
+            <a:spLocks noGrp="1"/>
+          </p:cNvSpPr>
+          <p:nvPr>
+            <p:ph type="body"/>
+          </p:nvPr>
+        </p:nvSpPr>
+        <p:spPr/>
+        <p:txBody>
+          <a:bodyPr/>
+          <a:lstStyle/>
+          <a:p>
+            <a:r>
+              <a:t>References follow IEEE style and are numbered in the order they are first cited in the slides.</a:t>
             </a:r>
           </a:p>
         </p:txBody>
@@ -2094,7 +2307,7 @@
           <a:lstStyle/>
           <a:p>
             <a:r>
-              <a:t>We cite Supermemory for how it works only and do not repeat its numbers. Hindsight shaped our recall step: several searches fused by rank and packed to a budget. The last row is the baseline every system here is trying to beat. None of these scores can be ranked against each other, because each paper uses its own models, judges and benchmarks.</a:t>
+              <a:t>We cite Supermemory for how it works and do not repeat its numbers. Hindsight shaped our recall step. The last row is the baseline every system here tries to beat. The scores cannot be ranked against each other because each paper uses its own models, judges and benchmarks. The next slide lists what these systems leave open.</a:t>
             </a:r>
           </a:p>
         </p:txBody>
@@ -2164,7 +2377,7 @@
           <a:lstStyle/>
           <a:p>
             <a:r>
-              <a:t>These are the gaps we found while reading the literature, not problems we hit while building. The first is the main one: in MemGPT and Mem0 the model itself decides whether to add, update or delete, so a bad call is a lost or corrupted memory and there is no rule to inspect. Only Zep keeps the old value, and it does so inside the graph database. The remaining gaps are about trust and cost. Zep and Mem0 run extraction on hosted OpenAI models. And the published numbers come from the authors' own runs with different setups, so they cannot be compared. Our objectives on the next slide follow directly from these five gaps.</a:t>
+              <a:t>These are gaps we found while reading, not problems we hit while building. G1 is the main one: in MemGPT and Mem0 the model itself decides whether to add, update or delete, so a bad call means a lost or corrupted memory and there is no rule anyone can inspect. Only Zep keeps old values. G4 is about cost and privacy: Zep and Mem0 run extraction on hosted OpenAI models. G5 is why we do not compare our numbers with theirs. Each objective on the next slide points back to one of these gaps.</a:t>
             </a:r>
           </a:p>
         </p:txBody>
@@ -2234,7 +2447,7 @@
           <a:lstStyle/>
           <a:p>
             <a:r>
-              <a:t>Each objective answers one of the gaps. Keeping old versions and linking to the source message answer the overwrite and traceability gaps, the local model answers the hosted-model gap, and the last objective is about making our own numbers repeatable.</a:t>
+              <a:t>The first and fifth objectives come straight from the problem statement; the others answer the gaps G1 to G5. From here on the deck shows how the system meets each of them, and the results slides say how far we got.</a:t>
             </a:r>
           </a:p>
         </p:txBody>
@@ -2304,7 +2517,7 @@
           <a:lstStyle/>
           <a:p>
             <a:r>
-              <a:t>Pi saves every message through M1 and asks M4 for memory before it answers. M2 turns saved messages into assertions, and M3 is the only part that writes them, keeping old versions. PostgreSQL is the store of record; Neo4j holds a graph copy that can be rebuilt from it. Ollama runs the models locally, and M5 trains the extraction model offline.</a:t>
+              <a:t>Our guide pointed out that our earlier names, 'evidence' and 'facts', were misleading. A fact is something established, but what we extract is a model's reading of a message and can be wrong. Evidence is a role something plays for a conclusion, not a thing we store. So the stored message is a source, and what we extract from it is an assertion, following how Wikidata and W3C PROV name claims and their sources. The example column is the Maya example used on the next slides.</a:t>
             </a:r>
           </a:p>
         </p:txBody>
@@ -2374,7 +2587,7 @@
           <a:lstStyle/>
           <a:p>
             <a:r>
-              <a:t>Module 1 saves the raw messages before any model touches them, so a failed model call can never lose a conversation. Retries are safe because the same request hash returns the same IDs.</a:t>
+              <a:t>Pi saves every message through Module 1 and asks Module 4 for memory before it answers. Module 2 turns saved messages into assertions, and Module 3 is the only part that writes them, keeping old versions. PostgreSQL holds everything; Neo4j holds a graph copy that can be rebuilt from it. Ollama runs the models on our machine, and Module 5 trains the extraction model offline. The next slide follows one example through these modules.</a:t>
             </a:r>
           </a:p>
         </p:txBody>
@@ -2444,7 +2657,7 @@
           <a:lstStyle/>
           <a:p>
             <a:r>
-              <a:t>Both stages call the same local model, and the prompt builder fits new messages and related existing assertions into its input. In the Maya example, 'Bengaluru is now my home city' comes out as a correction to Chennai, and three work assertions become one inference.</a:t>
+              <a:t>This is the example from the report. Maya mentions her city in one session, corrects it in a later one, and asks about it in a third. Each row is what one module does with it. The confidence threshold and the 'supersedes' link are explained on the Module 3 slide.</a:t>
             </a:r>
           </a:p>
         </p:txBody>
@@ -4547,6 +4760,470 @@
                 <a:ea typeface="Times New Roman"/>
                 <a:cs typeface="Times New Roman"/>
               </a:rPr>
+              <a:t>MODULE 1: SOURCE ACQUISITION AND PROCESSING</a:t>
+            </a:r>
+          </a:p>
+        </p:txBody>
+      </p:sp>
+      <p:sp>
+        <p:nvSpPr>
+          <p:cNvPr id="25" name="PlaceHolder 2"/>
+          <p:cNvSpPr>
+            <a:spLocks noGrp="1"/>
+          </p:cNvSpPr>
+          <p:nvPr>
+            <p:ph type="sldNum" idx="5"/>
+          </p:nvPr>
+        </p:nvSpPr>
+        <p:spPr>
+          <a:xfrm>
+            <a:off x="10865880" y="384120"/>
+            <a:ext cx="730440" cy="456120"/>
+          </a:xfrm>
+          <a:prstGeom prst="rect">
+            <a:avLst/>
+          </a:prstGeom>
+          <a:noFill/>
+          <a:ln w="0">
+            <a:noFill/>
+          </a:ln>
+        </p:spPr>
+        <p:txBody>
+          <a:bodyPr lIns="90000" tIns="45000" rIns="90000" bIns="45000" anchor="t">
+            <a:noAutofit/>
+          </a:bodyPr>
+          <a:lstStyle>
+            <a:lvl1pPr indent="0" algn="r" defTabSz="914400">
+              <a:lnSpc>
+                <a:spcPct val="100000"/>
+              </a:lnSpc>
+              <a:buNone/>
+              <a:tabLst>
+                <a:tab pos="0" algn="l"/>
+              </a:tabLst>
+              <a:defRPr lang="en-US" sz="1800" b="0" u="none" strike="noStrike">
+                <a:solidFill>
+                  <a:srgbClr val="000000"/>
+                </a:solidFill>
+                <a:effectLst/>
+                <a:uFillTx/>
+                <a:latin typeface="Times New Roman"/>
+                <a:ea typeface="Times New Roman"/>
+              </a:defRPr>
+            </a:lvl1pPr>
+          </a:lstStyle>
+          <a:p>
+            <a:pPr indent="0" algn="r" defTabSz="914400">
+              <a:lnSpc>
+                <a:spcPct val="100000"/>
+              </a:lnSpc>
+              <a:buNone/>
+              <a:tabLst>
+                <a:tab pos="0" algn="l"/>
+              </a:tabLst>
+            </a:pPr>
+            <a:fld id="{9873986A-C957-40DB-B7BB-3EB1CE963720}" type="slidenum">
+              <a:rPr lang="en-US" sz="1800" b="0" u="none" strike="noStrike">
+                <a:solidFill>
+                  <a:srgbClr val="000000"/>
+                </a:solidFill>
+                <a:effectLst/>
+                <a:uFillTx/>
+                <a:latin typeface="Times New Roman"/>
+                <a:ea typeface="Times New Roman"/>
+              </a:rPr>
+              <a:t>&lt;number&gt;</a:t>
+            </a:fld>
+            <a:endParaRPr lang="en-US" sz="1600" b="0" u="none" strike="noStrike">
+              <a:solidFill>
+                <a:srgbClr val="000000"/>
+              </a:solidFill>
+              <a:effectLst/>
+              <a:uFillTx/>
+              <a:latin typeface="Times New Roman"/>
+            </a:endParaRPr>
+          </a:p>
+        </p:txBody>
+      </p:sp>
+      <p:pic>
+        <p:nvPicPr>
+          <p:cNvPr id="26" name="Picture 25" descr="Module 1: Source Acquisition And Processing (landscape layout of the report figure)"/>
+          <p:cNvPicPr>
+            <a:picLocks noChangeAspect="1"/>
+          </p:cNvPicPr>
+          <p:nvPr/>
+        </p:nvPicPr>
+        <p:blipFill>
+          <a:blip r:embed="rId3"/>
+          <a:stretch>
+            <a:fillRect/>
+          </a:stretch>
+        </p:blipFill>
+        <p:spPr>
+          <a:xfrm>
+            <a:off x="594360" y="1280160"/>
+            <a:ext cx="11000232" cy="1919653"/>
+          </a:xfrm>
+          <a:prstGeom prst="rect">
+            <a:avLst/>
+          </a:prstGeom>
+        </p:spPr>
+      </p:pic>
+      <p:sp>
+        <p:nvSpPr>
+          <p:cNvPr id="27" name="TextBox 26"/>
+          <p:cNvSpPr txBox="1"/>
+          <p:nvPr/>
+        </p:nvSpPr>
+        <p:spPr>
+          <a:xfrm>
+            <a:off x="594360" y="3428413"/>
+            <a:ext cx="11000232" cy="2835226"/>
+          </a:xfrm>
+          <a:prstGeom prst="rect">
+            <a:avLst/>
+          </a:prstGeom>
+          <a:noFill/>
+        </p:spPr>
+        <p:txBody>
+          <a:bodyPr wrap="square" lIns="45720" rIns="45720" tIns="27432" bIns="27432"/>
+          <a:lstStyle/>
+          <a:p>
+            <a:pPr marL="256032" indent="-256032">
+              <a:spcAft>
+                <a:spcPts val="600"/>
+              </a:spcAft>
+              <a:buFont typeface="Arial"/>
+              <a:buChar char="•"/>
+            </a:pPr>
+            <a:r>
+              <a:rPr sz="1800" b="0" i="0">
+                <a:solidFill>
+                  <a:srgbClr val="000000"/>
+                </a:solidFill>
+                <a:latin typeface="Times New Roman"/>
+                <a:ea typeface="Times New Roman"/>
+                <a:cs typeface="Times New Roman"/>
+              </a:rPr>
+              <a:t>Pi first writes each message to a local file queue, so nothing is lost if the memory service is down.</a:t>
+            </a:r>
+          </a:p>
+          <a:p>
+            <a:pPr marL="256032" indent="-256032">
+              <a:spcAft>
+                <a:spcPts val="600"/>
+              </a:spcAft>
+              <a:buFont typeface="Arial"/>
+              <a:buChar char="•"/>
+            </a:pPr>
+            <a:r>
+              <a:rPr sz="1800" b="0" i="0">
+                <a:solidFill>
+                  <a:srgbClr val="000000"/>
+                </a:solidFill>
+                <a:latin typeface="Times New Roman"/>
+                <a:ea typeface="Times New Roman"/>
+                <a:cs typeface="Times New Roman"/>
+              </a:rPr>
+              <a:t>The service's save endpoint stores them as source events, together with a job for Module 2. Sending the same request twice does not create duplicates.</a:t>
+            </a:r>
+          </a:p>
+          <a:p>
+            <a:pPr marL="256032" indent="-256032">
+              <a:spcAft>
+                <a:spcPts val="600"/>
+              </a:spcAft>
+              <a:buFont typeface="Arial"/>
+              <a:buChar char="•"/>
+            </a:pPr>
+            <a:r>
+              <a:rPr sz="1800" b="0" i="0">
+                <a:solidFill>
+                  <a:srgbClr val="000000"/>
+                </a:solidFill>
+                <a:latin typeface="Times New Roman"/>
+                <a:ea typeface="Times New Roman"/>
+                <a:cs typeface="Times New Roman"/>
+              </a:rPr>
+              <a:t>Messages are split into chunks and turned into vectors for search. Background workers pick up jobs and retry failures up to five times.</a:t>
+            </a:r>
+          </a:p>
+        </p:txBody>
+      </p:sp>
+    </p:spTree>
+  </p:cSld>
+  <p:clrMapOvr>
+    <a:masterClrMapping/>
+  </p:clrMapOvr>
+</p:sld>
+</file>
+
+<file path=ppt/slides/slide11.xml><?xml version="1.0" encoding="utf-8"?>
+<p:sld xmlns:a="http://schemas.openxmlformats.org/drawingml/2006/main" xmlns:p="http://schemas.openxmlformats.org/presentationml/2006/main" xmlns:r="http://schemas.openxmlformats.org/officeDocument/2006/relationships">
+  <p:cSld>
+    <p:spTree>
+      <p:nvGrpSpPr>
+        <p:cNvPr id="1" name=""/>
+        <p:cNvGrpSpPr/>
+        <p:nvPr/>
+      </p:nvGrpSpPr>
+      <p:grpSpPr/>
+      <p:sp>
+        <p:nvSpPr>
+          <p:cNvPr id="2" name="Title 1"/>
+          <p:cNvSpPr>
+            <a:spLocks noGrp="1"/>
+          </p:cNvSpPr>
+          <p:nvPr>
+            <p:ph type="title"/>
+          </p:nvPr>
+        </p:nvSpPr>
+        <p:spPr/>
+        <p:txBody>
+          <a:bodyPr/>
+          <a:lstStyle/>
+          <a:p>
+            <a:r>
+              <a:rPr sz="2400" b="1" i="0">
+                <a:solidFill>
+                  <a:srgbClr val="000000"/>
+                </a:solidFill>
+                <a:latin typeface="Times New Roman"/>
+                <a:ea typeface="Times New Roman"/>
+                <a:cs typeface="Times New Roman"/>
+              </a:rPr>
+              <a:t>MODULE 2: KNOWLEDGE EXTRACTION AND CONSOLIDATION</a:t>
+            </a:r>
+          </a:p>
+        </p:txBody>
+      </p:sp>
+      <p:sp>
+        <p:nvSpPr>
+          <p:cNvPr id="25" name="PlaceHolder 2"/>
+          <p:cNvSpPr>
+            <a:spLocks noGrp="1"/>
+          </p:cNvSpPr>
+          <p:nvPr>
+            <p:ph type="sldNum" idx="5"/>
+          </p:nvPr>
+        </p:nvSpPr>
+        <p:spPr>
+          <a:xfrm>
+            <a:off x="10865880" y="384120"/>
+            <a:ext cx="730440" cy="456120"/>
+          </a:xfrm>
+          <a:prstGeom prst="rect">
+            <a:avLst/>
+          </a:prstGeom>
+          <a:noFill/>
+          <a:ln w="0">
+            <a:noFill/>
+          </a:ln>
+        </p:spPr>
+        <p:txBody>
+          <a:bodyPr lIns="90000" tIns="45000" rIns="90000" bIns="45000" anchor="t">
+            <a:noAutofit/>
+          </a:bodyPr>
+          <a:lstStyle>
+            <a:lvl1pPr indent="0" algn="r" defTabSz="914400">
+              <a:lnSpc>
+                <a:spcPct val="100000"/>
+              </a:lnSpc>
+              <a:buNone/>
+              <a:tabLst>
+                <a:tab pos="0" algn="l"/>
+              </a:tabLst>
+              <a:defRPr lang="en-US" sz="1800" b="0" u="none" strike="noStrike">
+                <a:solidFill>
+                  <a:srgbClr val="000000"/>
+                </a:solidFill>
+                <a:effectLst/>
+                <a:uFillTx/>
+                <a:latin typeface="Times New Roman"/>
+                <a:ea typeface="Times New Roman"/>
+              </a:defRPr>
+            </a:lvl1pPr>
+          </a:lstStyle>
+          <a:p>
+            <a:pPr indent="0" algn="r" defTabSz="914400">
+              <a:lnSpc>
+                <a:spcPct val="100000"/>
+              </a:lnSpc>
+              <a:buNone/>
+              <a:tabLst>
+                <a:tab pos="0" algn="l"/>
+              </a:tabLst>
+            </a:pPr>
+            <a:fld id="{9873986A-C957-40DB-B7BB-3EB1CE963720}" type="slidenum">
+              <a:rPr lang="en-US" sz="1800" b="0" u="none" strike="noStrike">
+                <a:solidFill>
+                  <a:srgbClr val="000000"/>
+                </a:solidFill>
+                <a:effectLst/>
+                <a:uFillTx/>
+                <a:latin typeface="Times New Roman"/>
+                <a:ea typeface="Times New Roman"/>
+              </a:rPr>
+              <a:t>&lt;number&gt;</a:t>
+            </a:fld>
+            <a:endParaRPr lang="en-US" sz="1600" b="0" u="none" strike="noStrike">
+              <a:solidFill>
+                <a:srgbClr val="000000"/>
+              </a:solidFill>
+              <a:effectLst/>
+              <a:uFillTx/>
+              <a:latin typeface="Times New Roman"/>
+            </a:endParaRPr>
+          </a:p>
+        </p:txBody>
+      </p:sp>
+      <p:pic>
+        <p:nvPicPr>
+          <p:cNvPr id="26" name="Picture 25" descr="Module 2: Knowledge Extraction And Consolidation (landscape layout of the report figure)"/>
+          <p:cNvPicPr>
+            <a:picLocks noChangeAspect="1"/>
+          </p:cNvPicPr>
+          <p:nvPr/>
+        </p:nvPicPr>
+        <p:blipFill>
+          <a:blip r:embed="rId3"/>
+          <a:stretch>
+            <a:fillRect/>
+          </a:stretch>
+        </p:blipFill>
+        <p:spPr>
+          <a:xfrm>
+            <a:off x="594360" y="1280160"/>
+            <a:ext cx="11000232" cy="2304949"/>
+          </a:xfrm>
+          <a:prstGeom prst="rect">
+            <a:avLst/>
+          </a:prstGeom>
+        </p:spPr>
+      </p:pic>
+      <p:sp>
+        <p:nvSpPr>
+          <p:cNvPr id="27" name="TextBox 26"/>
+          <p:cNvSpPr txBox="1"/>
+          <p:nvPr/>
+        </p:nvSpPr>
+        <p:spPr>
+          <a:xfrm>
+            <a:off x="594360" y="3813709"/>
+            <a:ext cx="11000232" cy="2449930"/>
+          </a:xfrm>
+          <a:prstGeom prst="rect">
+            <a:avLst/>
+          </a:prstGeom>
+          <a:noFill/>
+        </p:spPr>
+        <p:txBody>
+          <a:bodyPr wrap="square" lIns="45720" rIns="45720" tIns="27432" bIns="27432"/>
+          <a:lstStyle/>
+          <a:p>
+            <a:pPr marL="256032" indent="-256032">
+              <a:spcAft>
+                <a:spcPts val="600"/>
+              </a:spcAft>
+              <a:buFont typeface="Arial"/>
+              <a:buChar char="•"/>
+            </a:pPr>
+            <a:r>
+              <a:rPr sz="1800" b="0" i="0">
+                <a:solidFill>
+                  <a:srgbClr val="000000"/>
+                </a:solidFill>
+                <a:latin typeface="Times New Roman"/>
+                <a:ea typeface="Times New Roman"/>
+                <a:cs typeface="Times New Roman"/>
+              </a:rPr>
+              <a:t>Extraction: the fine-tuned model turns new source events into assertions, each with an exact quote. A quote that is not in the message is rejected, and the model tries again up to two times.</a:t>
+            </a:r>
+          </a:p>
+          <a:p>
+            <a:pPr marL="256032" indent="-256032">
+              <a:spcAft>
+                <a:spcPts val="600"/>
+              </a:spcAft>
+              <a:buFont typeface="Arial"/>
+              <a:buChar char="•"/>
+            </a:pPr>
+            <a:r>
+              <a:rPr sz="1800" b="0" i="0">
+                <a:solidFill>
+                  <a:srgbClr val="000000"/>
+                </a:solidFill>
+                <a:latin typeface="Times New Roman"/>
+                <a:ea typeface="Times New Roman"/>
+                <a:cs typeface="Times New Roman"/>
+              </a:rPr>
+              <a:t>A review step checks that a correction is really stated in the text and removes secrets.</a:t>
+            </a:r>
+          </a:p>
+          <a:p>
+            <a:pPr marL="256032" indent="-256032">
+              <a:spcAft>
+                <a:spcPts val="600"/>
+              </a:spcAft>
+              <a:buFont typeface="Arial"/>
+              <a:buChar char="•"/>
+            </a:pPr>
+            <a:r>
+              <a:rPr sz="1800" b="0" i="0">
+                <a:solidFill>
+                  <a:srgbClr val="000000"/>
+                </a:solidFill>
+                <a:latin typeface="Times New Roman"/>
+                <a:ea typeface="Times New Roman"/>
+                <a:cs typeface="Times New Roman"/>
+              </a:rPr>
+              <a:t>Consolidation: after Module 3 saves them, the model may combine two or more assertions about one subject into an inference.</a:t>
+            </a:r>
+          </a:p>
+        </p:txBody>
+      </p:sp>
+    </p:spTree>
+  </p:cSld>
+  <p:clrMapOvr>
+    <a:masterClrMapping/>
+  </p:clrMapOvr>
+</p:sld>
+</file>
+
+<file path=ppt/slides/slide12.xml><?xml version="1.0" encoding="utf-8"?>
+<p:sld xmlns:a="http://schemas.openxmlformats.org/drawingml/2006/main" xmlns:p="http://schemas.openxmlformats.org/presentationml/2006/main" xmlns:r="http://schemas.openxmlformats.org/officeDocument/2006/relationships">
+  <p:cSld>
+    <p:spTree>
+      <p:nvGrpSpPr>
+        <p:cNvPr id="1" name=""/>
+        <p:cNvGrpSpPr/>
+        <p:nvPr/>
+      </p:nvGrpSpPr>
+      <p:grpSpPr/>
+      <p:sp>
+        <p:nvSpPr>
+          <p:cNvPr id="2" name="Title 1"/>
+          <p:cNvSpPr>
+            <a:spLocks noGrp="1"/>
+          </p:cNvSpPr>
+          <p:nvPr>
+            <p:ph type="title"/>
+          </p:nvPr>
+        </p:nvSpPr>
+        <p:spPr/>
+        <p:txBody>
+          <a:bodyPr/>
+          <a:lstStyle/>
+          <a:p>
+            <a:r>
+              <a:rPr sz="2400" b="1" i="0">
+                <a:solidFill>
+                  <a:srgbClr val="000000"/>
+                </a:solidFill>
+                <a:latin typeface="Times New Roman"/>
+                <a:ea typeface="Times New Roman"/>
+                <a:cs typeface="Times New Roman"/>
+              </a:rPr>
               <a:t>MODULE 3: TEMPORAL KNOWLEDGE &amp; GRAPH MANAGEMENT</a:t>
             </a:r>
           </a:p>
@@ -4692,7 +5369,7 @@
                 <a:ea typeface="Times New Roman"/>
                 <a:cs typeface="Times New Roman"/>
               </a:rPr>
-              <a:t>The only module that writes assertions. A new value replaces the old one only if it is a reviewed correction with confidence of at least 0.8; otherwise both are marked contested.</a:t>
+              <a:t>The only module that writes assertions. In a single-value slot, a new value supersedes the old one only if it is a reviewed correction and the model's confidence is at least 0.8. Otherwise both are marked contested: kept, but neither is current.</a:t>
             </a:r>
           </a:p>
           <a:p>
@@ -4712,7 +5389,7 @@
                 <a:ea typeface="Times New Roman"/>
                 <a:cs typeface="Times New Roman"/>
               </a:rPr>
-              <a:t>Old values keep their validity interval, and a projection worker copies every change to Neo4j.</a:t>
+              <a:t>Replaced values keep the dates they were valid, and every change is copied to Neo4j for graph search.</a:t>
             </a:r>
           </a:p>
         </p:txBody>
@@ -4725,7 +5402,7 @@
 </p:sld>
 </file>
 
-<file path=ppt/slides/slide11.xml><?xml version="1.0" encoding="utf-8"?>
+<file path=ppt/slides/slide13.xml><?xml version="1.0" encoding="utf-8"?>
 <p:sld xmlns:a="http://schemas.openxmlformats.org/drawingml/2006/main" xmlns:p="http://schemas.openxmlformats.org/presentationml/2006/main" xmlns:r="http://schemas.openxmlformats.org/officeDocument/2006/relationships">
   <p:cSld>
     <p:spTree>
@@ -4904,7 +5581,7 @@
                 <a:ea typeface="Times New Roman"/>
                 <a:cs typeface="Times New Roman"/>
               </a:rPr>
-              <a:t>Keyword, vector and, when the question has dates, time-based search run together. Top hits are expanded through Neo4j and checked again in PostgreSQL.</a:t>
+              <a:t>Before Pi answers, it asks for memory. Keyword search, vector search and, for questions about dates, time-based search run together.</a:t>
             </a:r>
           </a:p>
           <a:p>
@@ -4924,7 +5601,7 @@
                 <a:ea typeface="Times New Roman"/>
                 <a:cs typeface="Times New Roman"/>
               </a:rPr>
-              <a:t>Reciprocal Rank Fusion merges the lists, and the best results are packed into the token budget with their quotes.</a:t>
+              <a:t>Top hits are expanded through Neo4j and checked again in PostgreSQL. The lists are merged by rank and packed into the token budget, each with its quote.</a:t>
             </a:r>
           </a:p>
           <a:p>
@@ -4944,7 +5621,7 @@
                 <a:ea typeface="Times New Roman"/>
                 <a:cs typeface="Times New Roman"/>
               </a:rPr>
-              <a:t>An optional reflect step writes an answer with citations.</a:t>
+              <a:t>An optional step writes a full answer that cites the memories it used.</a:t>
             </a:r>
           </a:p>
         </p:txBody>
@@ -4957,7 +5634,7 @@
 </p:sld>
 </file>
 
-<file path=ppt/slides/slide12.xml><?xml version="1.0" encoding="utf-8"?>
+<file path=ppt/slides/slide14.xml><?xml version="1.0" encoding="utf-8"?>
 <p:sld xmlns:a="http://schemas.openxmlformats.org/drawingml/2006/main" xmlns:p="http://schemas.openxmlformats.org/presentationml/2006/main" xmlns:r="http://schemas.openxmlformats.org/officeDocument/2006/relationships">
   <p:cSld>
     <p:spTree>
@@ -5136,7 +5813,7 @@
                 <a:ea typeface="Times New Roman"/>
                 <a:cs typeface="Times New Roman"/>
               </a:rPr>
-              <a:t>Runs offline on synthetic episodes from 16 domains labelled by GPT-5.6-sol; live chats are never used for training.</a:t>
+              <a:t>Runs offline. Short synthetic conversations from 16 domains are labelled by a larger model, GPT-5.6-sol. Live chats are never used for training.</a:t>
             </a:r>
           </a:p>
           <a:p>
@@ -5156,7 +5833,7 @@
                 <a:ea typeface="Times New Roman"/>
                 <a:cs typeface="Times New Roman"/>
               </a:rPr>
-              <a:t>Qwen3-4B is fine-tuned with QLoRA, quantised to GGUF and served by Ollama only after it beats the base model.</a:t>
+              <a:t>Qwen3-4B is fine-tuned on those labels and served to Modules 2 and 4 through Ollama, but only after it beats the base model on held-out tests.</a:t>
             </a:r>
           </a:p>
         </p:txBody>
@@ -5169,7 +5846,7 @@
 </p:sld>
 </file>
 
-<file path=ppt/slides/slide13.xml><?xml version="1.0" encoding="utf-8"?>
+<file path=ppt/slides/slide15.xml><?xml version="1.0" encoding="utf-8"?>
 <p:sld xmlns:a="http://schemas.openxmlformats.org/drawingml/2006/main" xmlns:p="http://schemas.openxmlformats.org/presentationml/2006/main" xmlns:r="http://schemas.openxmlformats.org/officeDocument/2006/relationships">
   <p:cSld>
     <p:spTree>
@@ -5305,8 +5982,9 @@
             <a:tbl>
               <a:tblPr firstRow="1" bandRow="0"/>
               <a:tblGrid>
-                <a:gridCol w="3850081"/>
-                <a:gridCol w="7150150"/>
+                <a:gridCol w="4033418"/>
+                <a:gridCol w="5866790"/>
+                <a:gridCol w="1100023"/>
               </a:tblGrid>
               <a:tr h="457200">
                 <a:tc>
@@ -5384,6 +6062,60 @@
                           <a:cs typeface="Times New Roman"/>
                         </a:rPr>
                         <a:t>Purpose</a:t>
+                      </a:r>
+                    </a:p>
+                  </a:txBody>
+                  <a:tcPr marL="73152" marR="73152" marT="36576" marB="36576">
+                    <a:lnL w="9525" cap="flat" cmpd="sng" algn="ctr">
+                      <a:solidFill>
+                        <a:srgbClr val="404040"/>
+                      </a:solidFill>
+                      <a:prstDash val="solid"/>
+                    </a:lnL>
+                    <a:lnR w="9525" cap="flat" cmpd="sng" algn="ctr">
+                      <a:solidFill>
+                        <a:srgbClr val="404040"/>
+                      </a:solidFill>
+                      <a:prstDash val="solid"/>
+                    </a:lnR>
+                    <a:lnT w="9525" cap="flat" cmpd="sng" algn="ctr">
+                      <a:solidFill>
+                        <a:srgbClr val="404040"/>
+                      </a:solidFill>
+                      <a:prstDash val="solid"/>
+                    </a:lnT>
+                    <a:lnB w="9525" cap="flat" cmpd="sng" algn="ctr">
+                      <a:solidFill>
+                        <a:srgbClr val="404040"/>
+                      </a:solidFill>
+                      <a:prstDash val="solid"/>
+                    </a:lnB>
+                    <a:solidFill>
+                      <a:srgbClr val="D9E2EC"/>
+                    </a:solidFill>
+                  </a:tcPr>
+                </a:tc>
+                <a:tc>
+                  <a:txBody>
+                    <a:bodyPr wrap="square"/>
+                    <a:lstStyle/>
+                    <a:p>
+                      <a:pPr marL="0" indent="0">
+                        <a:spcAft>
+                          <a:spcPts val="0"/>
+                        </a:spcAft>
+                        <a:buNone/>
+                      </a:pPr>
+                      <a:r>
+                        <a:rPr sz="1800" b="1" i="0">
+                          <a:solidFill>
+                            <a:srgbClr val="000000"/>
+                          </a:solidFill>
+                          <a:latin typeface="Times New Roman"/>
+                          <a:ea typeface="Times New Roman"/>
+                          <a:cs typeface="Times New Roman"/>
+                        </a:rPr>
+                        <a:t>Module</a:t>
                       </a:r>
                     </a:p>
                   </a:txBody>
@@ -5493,7 +6225,61 @@
                           <a:ea typeface="Times New Roman"/>
                           <a:cs typeface="Times New Roman"/>
                         </a:rPr>
-                        <a:t>Picks the existing assertions that matter most and fit the model's input limit.</a:t>
+                        <a:t>Picks the existing assertions that matter most and fit the model's input.</a:t>
+                      </a:r>
+                    </a:p>
+                  </a:txBody>
+                  <a:tcPr marL="73152" marR="73152" marT="36576" marB="36576">
+                    <a:lnL w="9525" cap="flat" cmpd="sng" algn="ctr">
+                      <a:solidFill>
+                        <a:srgbClr val="404040"/>
+                      </a:solidFill>
+                      <a:prstDash val="solid"/>
+                    </a:lnL>
+                    <a:lnR w="9525" cap="flat" cmpd="sng" algn="ctr">
+                      <a:solidFill>
+                        <a:srgbClr val="404040"/>
+                      </a:solidFill>
+                      <a:prstDash val="solid"/>
+                    </a:lnR>
+                    <a:lnT w="9525" cap="flat" cmpd="sng" algn="ctr">
+                      <a:solidFill>
+                        <a:srgbClr val="404040"/>
+                      </a:solidFill>
+                      <a:prstDash val="solid"/>
+                    </a:lnT>
+                    <a:lnB w="9525" cap="flat" cmpd="sng" algn="ctr">
+                      <a:solidFill>
+                        <a:srgbClr val="404040"/>
+                      </a:solidFill>
+                      <a:prstDash val="solid"/>
+                    </a:lnB>
+                    <a:solidFill>
+                      <a:srgbClr val="FFFFFF"/>
+                    </a:solidFill>
+                  </a:tcPr>
+                </a:tc>
+                <a:tc>
+                  <a:txBody>
+                    <a:bodyPr wrap="square"/>
+                    <a:lstStyle/>
+                    <a:p>
+                      <a:pPr marL="0" indent="0">
+                        <a:spcAft>
+                          <a:spcPts val="0"/>
+                        </a:spcAft>
+                        <a:buNone/>
+                      </a:pPr>
+                      <a:r>
+                        <a:rPr sz="1800" b="0" i="0">
+                          <a:solidFill>
+                            <a:srgbClr val="000000"/>
+                          </a:solidFill>
+                          <a:latin typeface="Times New Roman"/>
+                          <a:ea typeface="Times New Roman"/>
+                          <a:cs typeface="Times New Roman"/>
+                        </a:rPr>
+                        <a:t>M2</a:t>
                       </a:r>
                     </a:p>
                   </a:txBody>
@@ -5549,7 +6335,7 @@
                           <a:ea typeface="Times New Roman"/>
                           <a:cs typeface="Times New Roman"/>
                         </a:rPr>
-                        <a:t>2. Entity resolution and memory versioning</a:t>
+                        <a:t>2. Entity resolution and versioning</a:t>
                       </a:r>
                     </a:p>
                   </a:txBody>
@@ -5603,7 +6389,61 @@
                           <a:ea typeface="Times New Roman"/>
                           <a:cs typeface="Times New Roman"/>
                         </a:rPr>
-                        <a:t>Matches entities and handles repeats, corrections and conflicting values.</a:t>
+                        <a:t>Matches the subject, then handles repeats, corrections and conflicts.</a:t>
+                      </a:r>
+                    </a:p>
+                  </a:txBody>
+                  <a:tcPr marL="73152" marR="73152" marT="36576" marB="36576">
+                    <a:lnL w="9525" cap="flat" cmpd="sng" algn="ctr">
+                      <a:solidFill>
+                        <a:srgbClr val="404040"/>
+                      </a:solidFill>
+                      <a:prstDash val="solid"/>
+                    </a:lnL>
+                    <a:lnR w="9525" cap="flat" cmpd="sng" algn="ctr">
+                      <a:solidFill>
+                        <a:srgbClr val="404040"/>
+                      </a:solidFill>
+                      <a:prstDash val="solid"/>
+                    </a:lnR>
+                    <a:lnT w="9525" cap="flat" cmpd="sng" algn="ctr">
+                      <a:solidFill>
+                        <a:srgbClr val="404040"/>
+                      </a:solidFill>
+                      <a:prstDash val="solid"/>
+                    </a:lnT>
+                    <a:lnB w="9525" cap="flat" cmpd="sng" algn="ctr">
+                      <a:solidFill>
+                        <a:srgbClr val="404040"/>
+                      </a:solidFill>
+                      <a:prstDash val="solid"/>
+                    </a:lnB>
+                    <a:solidFill>
+                      <a:srgbClr val="FFFFFF"/>
+                    </a:solidFill>
+                  </a:tcPr>
+                </a:tc>
+                <a:tc>
+                  <a:txBody>
+                    <a:bodyPr wrap="square"/>
+                    <a:lstStyle/>
+                    <a:p>
+                      <a:pPr marL="0" indent="0">
+                        <a:spcAft>
+                          <a:spcPts val="0"/>
+                        </a:spcAft>
+                        <a:buNone/>
+                      </a:pPr>
+                      <a:r>
+                        <a:rPr sz="1800" b="0" i="0">
+                          <a:solidFill>
+                            <a:srgbClr val="000000"/>
+                          </a:solidFill>
+                          <a:latin typeface="Times New Roman"/>
+                          <a:ea typeface="Times New Roman"/>
+                          <a:cs typeface="Times New Roman"/>
+                        </a:rPr>
+                        <a:t>M3</a:t>
                       </a:r>
                     </a:p>
                   </a:txBody>
@@ -5659,7 +6499,7 @@
                           <a:ea typeface="Times New Roman"/>
                           <a:cs typeface="Times New Roman"/>
                         </a:rPr>
-                        <a:t>3. Memory consolidation and invalidation</a:t>
+                        <a:t>3. Consolidation and invalidation</a:t>
                       </a:r>
                     </a:p>
                   </a:txBody>
@@ -5713,7 +6553,61 @@
                           <a:ea typeface="Times New Roman"/>
                           <a:cs typeface="Times New Roman"/>
                         </a:rPr>
-                        <a:t>Combines assertions into inferences and marks them stale when their support changes.</a:t>
+                        <a:t>Builds inferences and marks them stale when their support changes.</a:t>
+                      </a:r>
+                    </a:p>
+                  </a:txBody>
+                  <a:tcPr marL="73152" marR="73152" marT="36576" marB="36576">
+                    <a:lnL w="9525" cap="flat" cmpd="sng" algn="ctr">
+                      <a:solidFill>
+                        <a:srgbClr val="404040"/>
+                      </a:solidFill>
+                      <a:prstDash val="solid"/>
+                    </a:lnL>
+                    <a:lnR w="9525" cap="flat" cmpd="sng" algn="ctr">
+                      <a:solidFill>
+                        <a:srgbClr val="404040"/>
+                      </a:solidFill>
+                      <a:prstDash val="solid"/>
+                    </a:lnR>
+                    <a:lnT w="9525" cap="flat" cmpd="sng" algn="ctr">
+                      <a:solidFill>
+                        <a:srgbClr val="404040"/>
+                      </a:solidFill>
+                      <a:prstDash val="solid"/>
+                    </a:lnT>
+                    <a:lnB w="9525" cap="flat" cmpd="sng" algn="ctr">
+                      <a:solidFill>
+                        <a:srgbClr val="404040"/>
+                      </a:solidFill>
+                      <a:prstDash val="solid"/>
+                    </a:lnB>
+                    <a:solidFill>
+                      <a:srgbClr val="FFFFFF"/>
+                    </a:solidFill>
+                  </a:tcPr>
+                </a:tc>
+                <a:tc>
+                  <a:txBody>
+                    <a:bodyPr wrap="square"/>
+                    <a:lstStyle/>
+                    <a:p>
+                      <a:pPr marL="0" indent="0">
+                        <a:spcAft>
+                          <a:spcPts val="0"/>
+                        </a:spcAft>
+                        <a:buNone/>
+                      </a:pPr>
+                      <a:r>
+                        <a:rPr sz="1800" b="0" i="0">
+                          <a:solidFill>
+                            <a:srgbClr val="000000"/>
+                          </a:solidFill>
+                          <a:latin typeface="Times New Roman"/>
+                          <a:ea typeface="Times New Roman"/>
+                          <a:cs typeface="Times New Roman"/>
+                        </a:rPr>
+                        <a:t>M2, M3</a:t>
                       </a:r>
                     </a:p>
                   </a:txBody>
@@ -5823,7 +6717,61 @@
                           <a:ea typeface="Times New Roman"/>
                           <a:cs typeface="Times New Roman"/>
                         </a:rPr>
-                        <a:t>Finds memories by keyword, meaning, date and graph connection.</a:t>
+                        <a:t>Finds memories by keyword, meaning, date and graph link.</a:t>
+                      </a:r>
+                    </a:p>
+                  </a:txBody>
+                  <a:tcPr marL="73152" marR="73152" marT="36576" marB="36576">
+                    <a:lnL w="9525" cap="flat" cmpd="sng" algn="ctr">
+                      <a:solidFill>
+                        <a:srgbClr val="404040"/>
+                      </a:solidFill>
+                      <a:prstDash val="solid"/>
+                    </a:lnL>
+                    <a:lnR w="9525" cap="flat" cmpd="sng" algn="ctr">
+                      <a:solidFill>
+                        <a:srgbClr val="404040"/>
+                      </a:solidFill>
+                      <a:prstDash val="solid"/>
+                    </a:lnR>
+                    <a:lnT w="9525" cap="flat" cmpd="sng" algn="ctr">
+                      <a:solidFill>
+                        <a:srgbClr val="404040"/>
+                      </a:solidFill>
+                      <a:prstDash val="solid"/>
+                    </a:lnT>
+                    <a:lnB w="9525" cap="flat" cmpd="sng" algn="ctr">
+                      <a:solidFill>
+                        <a:srgbClr val="404040"/>
+                      </a:solidFill>
+                      <a:prstDash val="solid"/>
+                    </a:lnB>
+                    <a:solidFill>
+                      <a:srgbClr val="FFFFFF"/>
+                    </a:solidFill>
+                  </a:tcPr>
+                </a:tc>
+                <a:tc>
+                  <a:txBody>
+                    <a:bodyPr wrap="square"/>
+                    <a:lstStyle/>
+                    <a:p>
+                      <a:pPr marL="0" indent="0">
+                        <a:spcAft>
+                          <a:spcPts val="0"/>
+                        </a:spcAft>
+                        <a:buNone/>
+                      </a:pPr>
+                      <a:r>
+                        <a:rPr sz="1800" b="0" i="0">
+                          <a:solidFill>
+                            <a:srgbClr val="000000"/>
+                          </a:solidFill>
+                          <a:latin typeface="Times New Roman"/>
+                          <a:ea typeface="Times New Roman"/>
+                          <a:cs typeface="Times New Roman"/>
+                        </a:rPr>
+                        <a:t>M4</a:t>
                       </a:r>
                     </a:p>
                   </a:txBody>
@@ -5879,7 +6827,7 @@
                           <a:ea typeface="Times New Roman"/>
                           <a:cs typeface="Times New Roman"/>
                         </a:rPr>
-                        <a:t>5. Reciprocal Rank Fusion and context packing</a:t>
+                        <a:t>5. Rank fusion and context packing</a:t>
                       </a:r>
                     </a:p>
                   </a:txBody>
@@ -5933,7 +6881,61 @@
                           <a:ea typeface="Times New Roman"/>
                           <a:cs typeface="Times New Roman"/>
                         </a:rPr>
-                        <a:t>Merges the search rankings and fits the best memories into the context budget.</a:t>
+                        <a:t>Merges the search rankings and fits the best memories into the token budget.</a:t>
+                      </a:r>
+                    </a:p>
+                  </a:txBody>
+                  <a:tcPr marL="73152" marR="73152" marT="36576" marB="36576">
+                    <a:lnL w="9525" cap="flat" cmpd="sng" algn="ctr">
+                      <a:solidFill>
+                        <a:srgbClr val="404040"/>
+                      </a:solidFill>
+                      <a:prstDash val="solid"/>
+                    </a:lnL>
+                    <a:lnR w="9525" cap="flat" cmpd="sng" algn="ctr">
+                      <a:solidFill>
+                        <a:srgbClr val="404040"/>
+                      </a:solidFill>
+                      <a:prstDash val="solid"/>
+                    </a:lnR>
+                    <a:lnT w="9525" cap="flat" cmpd="sng" algn="ctr">
+                      <a:solidFill>
+                        <a:srgbClr val="404040"/>
+                      </a:solidFill>
+                      <a:prstDash val="solid"/>
+                    </a:lnT>
+                    <a:lnB w="9525" cap="flat" cmpd="sng" algn="ctr">
+                      <a:solidFill>
+                        <a:srgbClr val="404040"/>
+                      </a:solidFill>
+                      <a:prstDash val="solid"/>
+                    </a:lnB>
+                    <a:solidFill>
+                      <a:srgbClr val="FFFFFF"/>
+                    </a:solidFill>
+                  </a:tcPr>
+                </a:tc>
+                <a:tc>
+                  <a:txBody>
+                    <a:bodyPr wrap="square"/>
+                    <a:lstStyle/>
+                    <a:p>
+                      <a:pPr marL="0" indent="0">
+                        <a:spcAft>
+                          <a:spcPts val="0"/>
+                        </a:spcAft>
+                        <a:buNone/>
+                      </a:pPr>
+                      <a:r>
+                        <a:rPr sz="1800" b="0" i="0">
+                          <a:solidFill>
+                            <a:srgbClr val="000000"/>
+                          </a:solidFill>
+                          <a:latin typeface="Times New Roman"/>
+                          <a:ea typeface="Times New Roman"/>
+                          <a:cs typeface="Times New Roman"/>
+                        </a:rPr>
+                        <a:t>M4</a:t>
                       </a:r>
                     </a:p>
                   </a:txBody>
@@ -5989,7 +6991,7 @@
                           <a:ea typeface="Times New Roman"/>
                           <a:cs typeface="Times New Roman"/>
                         </a:rPr>
-                        <a:t>6. Source-grounded answer generation</a:t>
+                        <a:t>6. Source-grounded answering</a:t>
                       </a:r>
                     </a:p>
                   </a:txBody>
@@ -6043,7 +7045,61 @@
                           <a:ea typeface="Times New Roman"/>
                           <a:cs typeface="Times New Roman"/>
                         </a:rPr>
-                        <a:t>Answers from retrieved memories and checks every citation.</a:t>
+                        <a:t>Answers only from retrieved memories and checks every citation.</a:t>
+                      </a:r>
+                    </a:p>
+                  </a:txBody>
+                  <a:tcPr marL="73152" marR="73152" marT="36576" marB="36576">
+                    <a:lnL w="9525" cap="flat" cmpd="sng" algn="ctr">
+                      <a:solidFill>
+                        <a:srgbClr val="404040"/>
+                      </a:solidFill>
+                      <a:prstDash val="solid"/>
+                    </a:lnL>
+                    <a:lnR w="9525" cap="flat" cmpd="sng" algn="ctr">
+                      <a:solidFill>
+                        <a:srgbClr val="404040"/>
+                      </a:solidFill>
+                      <a:prstDash val="solid"/>
+                    </a:lnR>
+                    <a:lnT w="9525" cap="flat" cmpd="sng" algn="ctr">
+                      <a:solidFill>
+                        <a:srgbClr val="404040"/>
+                      </a:solidFill>
+                      <a:prstDash val="solid"/>
+                    </a:lnT>
+                    <a:lnB w="9525" cap="flat" cmpd="sng" algn="ctr">
+                      <a:solidFill>
+                        <a:srgbClr val="404040"/>
+                      </a:solidFill>
+                      <a:prstDash val="solid"/>
+                    </a:lnB>
+                    <a:solidFill>
+                      <a:srgbClr val="FFFFFF"/>
+                    </a:solidFill>
+                  </a:tcPr>
+                </a:tc>
+                <a:tc>
+                  <a:txBody>
+                    <a:bodyPr wrap="square"/>
+                    <a:lstStyle/>
+                    <a:p>
+                      <a:pPr marL="0" indent="0">
+                        <a:spcAft>
+                          <a:spcPts val="0"/>
+                        </a:spcAft>
+                        <a:buNone/>
+                      </a:pPr>
+                      <a:r>
+                        <a:rPr sz="1800" b="0" i="0">
+                          <a:solidFill>
+                            <a:srgbClr val="000000"/>
+                          </a:solidFill>
+                          <a:latin typeface="Times New Roman"/>
+                          <a:ea typeface="Times New Roman"/>
+                          <a:cs typeface="Times New Roman"/>
+                        </a:rPr>
+                        <a:t>M4</a:t>
                       </a:r>
                     </a:p>
                   </a:txBody>
@@ -6090,7 +7146,7 @@
 </p:sld>
 </file>
 
-<file path=ppt/slides/slide14.xml><?xml version="1.0" encoding="utf-8"?>
+<file path=ppt/slides/slide16.xml><?xml version="1.0" encoding="utf-8"?>
 <p:sld xmlns:a="http://schemas.openxmlformats.org/drawingml/2006/main" xmlns:p="http://schemas.openxmlformats.org/presentationml/2006/main" xmlns:r="http://schemas.openxmlformats.org/officeDocument/2006/relationships">
   <p:cSld>
     <p:spTree>
@@ -6274,7 +7330,7 @@
                 <a:ea typeface="Times New Roman"/>
                 <a:cs typeface="Times New Roman"/>
               </a:rPr>
-              <a:t>existing assertions, new messages, input budget</a:t>
+              <a:t>existing assertions, new messages, input limit</a:t>
             </a:r>
           </a:p>
           <a:p>
@@ -6391,7 +7447,7 @@
                 <a:ea typeface="Times New Roman"/>
                 <a:cs typeface="Times New Roman"/>
               </a:rPr>
-              <a:t>Binary-search the largest prefix that fits the budget</a:t>
+              <a:t>Find the longest sorted prefix that fits, by binary search</a:t>
             </a:r>
           </a:p>
           <a:p>
@@ -6491,7 +7547,7 @@
                 <a:ea typeface="Times New Roman"/>
                 <a:cs typeface="Times New Roman"/>
               </a:rPr>
-              <a:t>a new claim and the stored memory</a:t>
+              <a:t>a new assertion and the stored memory</a:t>
             </a:r>
           </a:p>
           <a:p>
@@ -6510,7 +7566,7 @@
                 <a:ea typeface="Times New Roman"/>
                 <a:cs typeface="Times New Roman"/>
               </a:rPr>
-              <a:t>Match the entity by type and normalised name, or a unique alias; otherwise create it</a:t>
+              <a:t>Match the subject by type and name, or a unique alias; otherwise create it</a:t>
             </a:r>
           </a:p>
           <a:p>
@@ -6608,7 +7664,7 @@
                 <a:ea typeface="Times New Roman"/>
                 <a:cs typeface="Times New Roman"/>
               </a:rPr>
-              <a:t>store the claim as active</a:t>
+              <a:t>store it as active</a:t>
             </a:r>
           </a:p>
           <a:p>
@@ -6657,7 +7713,7 @@
                 <a:ea typeface="Times New Roman"/>
                 <a:cs typeface="Times New Roman"/>
               </a:rPr>
-              <a:t>supersede the old value</a:t>
+              <a:t>replace the old value, keep it as history</a:t>
             </a:r>
           </a:p>
           <a:p>
@@ -6719,7 +7775,7 @@
 </p:sld>
 </file>
 
-<file path=ppt/slides/slide15.xml><?xml version="1.0" encoding="utf-8"?>
+<file path=ppt/slides/slide17.xml><?xml version="1.0" encoding="utf-8"?>
 <p:sld xmlns:a="http://schemas.openxmlformats.org/drawingml/2006/main" xmlns:p="http://schemas.openxmlformats.org/presentationml/2006/main" xmlns:r="http://schemas.openxmlformats.org/officeDocument/2006/relationships">
   <p:cSld>
     <p:spTree>
@@ -6903,7 +7959,7 @@
                 <a:ea typeface="Times New Roman"/>
                 <a:cs typeface="Times New Roman"/>
               </a:rPr>
-              <a:t>active assertions about the changed entities</a:t>
+              <a:t>active assertions about the changed subjects</a:t>
             </a:r>
           </a:p>
           <a:p>
@@ -6979,7 +8035,7 @@
                 <a:ea typeface="Times New Roman"/>
                 <a:cs typeface="Times New Roman"/>
               </a:rPr>
-              <a:t>Recheck that every support is still active, then save with links</a:t>
+              <a:t>Check that every support is still active, then save with links</a:t>
             </a:r>
           </a:p>
           <a:p>
@@ -7028,7 +8084,7 @@
                 <a:ea typeface="Times New Roman"/>
                 <a:cs typeface="Times New Roman"/>
               </a:rPr>
-              <a:t>find dependent inferences recursively</a:t>
+              <a:t>find inferences that depend on it</a:t>
             </a:r>
           </a:p>
           <a:p>
@@ -7136,7 +8192,7 @@
                 <a:ea typeface="Times New Roman"/>
                 <a:cs typeface="Times New Roman"/>
               </a:rPr>
-              <a:t>Resolve date phrases if planning is on</a:t>
+              <a:t>Work out the dates a question refers to, if any</a:t>
             </a:r>
           </a:p>
           <a:p>
@@ -7185,7 +8241,7 @@
                 <a:ea typeface="Times New Roman"/>
                 <a:cs typeface="Times New Roman"/>
               </a:rPr>
-              <a:t> there is a date window:</a:t>
+              <a:t> there is a date range:</a:t>
             </a:r>
           </a:p>
           <a:p>
@@ -7204,7 +8260,7 @@
                 <a:ea typeface="Times New Roman"/>
                 <a:cs typeface="Times New Roman"/>
               </a:rPr>
-              <a:t>add time-based candidates</a:t>
+              <a:t>add assertions valid in that range</a:t>
             </a:r>
           </a:p>
           <a:p>
@@ -7223,7 +8279,7 @@
                 <a:ea typeface="Times New Roman"/>
                 <a:cs typeface="Times New Roman"/>
               </a:rPr>
-              <a:t>Expand from the matched assertions and entities for two bounded hops</a:t>
+              <a:t>Follow graph links from the matches for up to two steps</a:t>
             </a:r>
           </a:p>
           <a:p>
@@ -7242,7 +8298,7 @@
                 <a:ea typeface="Times New Roman"/>
                 <a:cs typeface="Times New Roman"/>
               </a:rPr>
-              <a:t>Drop results outside their validity or the distance cutoff</a:t>
+              <a:t>Drop results outside their validity or too far in meaning</a:t>
             </a:r>
           </a:p>
           <a:p>
@@ -7285,7 +8341,7 @@
 </p:sld>
 </file>
 
-<file path=ppt/slides/slide16.xml><?xml version="1.0" encoding="utf-8"?>
+<file path=ppt/slides/slide18.xml><?xml version="1.0" encoding="utf-8"?>
 <p:sld xmlns:a="http://schemas.openxmlformats.org/drawingml/2006/main" xmlns:p="http://schemas.openxmlformats.org/presentationml/2006/main" xmlns:r="http://schemas.openxmlformats.org/officeDocument/2006/relationships">
   <p:cSld>
     <p:spTree>
@@ -7933,7 +8989,7 @@
 </p:sld>
 </file>
 
-<file path=ppt/slides/slide17.xml><?xml version="1.0" encoding="utf-8"?>
+<file path=ppt/slides/slide19.xml><?xml version="1.0" encoding="utf-8"?>
 <p:sld xmlns:a="http://schemas.openxmlformats.org/drawingml/2006/main" xmlns:p="http://schemas.openxmlformats.org/presentationml/2006/main" xmlns:r="http://schemas.openxmlformats.org/officeDocument/2006/relationships">
   <p:cSld>
     <p:spTree>
@@ -8367,7 +9423,7 @@
                           <a:ea typeface="Times New Roman"/>
                           <a:cs typeface="Times New Roman"/>
                         </a:rPr>
-                        <a:t>Source events, assertions, history and jobs; keyword and vector search.</a:t>
+                        <a:t>Stores sources, assertions, history and jobs; keyword and vector search.</a:t>
                       </a:r>
                     </a:p>
                   </a:txBody>
@@ -8477,7 +9533,7 @@
                           <a:ea typeface="Times New Roman"/>
                           <a:cs typeface="Times New Roman"/>
                         </a:rPr>
-                        <a:t>Graph copy of assertions and entities, used to widen recall.</a:t>
+                        <a:t>Graph copy of assertions and subjects, used to widen recall.</a:t>
                       </a:r>
                     </a:p>
                   </a:txBody>
@@ -8587,7 +9643,7 @@
                           <a:ea typeface="Times New Roman"/>
                           <a:cs typeface="Times New Roman"/>
                         </a:rPr>
-                        <a:t>Runs the memory model and the embedding model locally.</a:t>
+                        <a:t>Runs the memory model and the embedding model on our machine.</a:t>
                       </a:r>
                     </a:p>
                   </a:txBody>
@@ -8744,7 +9800,275 @@
 </p:sld>
 </file>
 
-<file path=ppt/slides/slide18.xml><?xml version="1.0" encoding="utf-8"?>
+<file path=ppt/slides/slide2.xml><?xml version="1.0" encoding="utf-8"?>
+<p:sld xmlns:a="http://schemas.openxmlformats.org/drawingml/2006/main" xmlns:p="http://schemas.openxmlformats.org/presentationml/2006/main" xmlns:r="http://schemas.openxmlformats.org/officeDocument/2006/relationships">
+  <p:cSld>
+    <p:spTree>
+      <p:nvGrpSpPr>
+        <p:cNvPr id="1" name=""/>
+        <p:cNvGrpSpPr/>
+        <p:nvPr/>
+      </p:nvGrpSpPr>
+      <p:grpSpPr/>
+      <p:sp>
+        <p:nvSpPr>
+          <p:cNvPr id="2" name="Title 1"/>
+          <p:cNvSpPr>
+            <a:spLocks noGrp="1"/>
+          </p:cNvSpPr>
+          <p:nvPr>
+            <p:ph type="title"/>
+          </p:nvPr>
+        </p:nvSpPr>
+        <p:spPr/>
+        <p:txBody>
+          <a:bodyPr/>
+          <a:lstStyle/>
+          <a:p>
+            <a:r>
+              <a:rPr sz="2400" b="1" i="0">
+                <a:solidFill>
+                  <a:srgbClr val="000000"/>
+                </a:solidFill>
+                <a:latin typeface="Times New Roman"/>
+                <a:ea typeface="Times New Roman"/>
+                <a:cs typeface="Times New Roman"/>
+              </a:rPr>
+              <a:t>PROBLEM STATEMENT</a:t>
+            </a:r>
+          </a:p>
+        </p:txBody>
+      </p:sp>
+      <p:sp>
+        <p:nvSpPr>
+          <p:cNvPr id="25" name="PlaceHolder 2"/>
+          <p:cNvSpPr>
+            <a:spLocks noGrp="1"/>
+          </p:cNvSpPr>
+          <p:nvPr>
+            <p:ph type="sldNum" idx="5"/>
+          </p:nvPr>
+        </p:nvSpPr>
+        <p:spPr>
+          <a:xfrm>
+            <a:off x="10865880" y="384120"/>
+            <a:ext cx="730440" cy="456120"/>
+          </a:xfrm>
+          <a:prstGeom prst="rect">
+            <a:avLst/>
+          </a:prstGeom>
+          <a:noFill/>
+          <a:ln w="0">
+            <a:noFill/>
+          </a:ln>
+        </p:spPr>
+        <p:txBody>
+          <a:bodyPr lIns="90000" tIns="45000" rIns="90000" bIns="45000" anchor="t">
+            <a:noAutofit/>
+          </a:bodyPr>
+          <a:lstStyle>
+            <a:lvl1pPr indent="0" algn="r" defTabSz="914400">
+              <a:lnSpc>
+                <a:spcPct val="100000"/>
+              </a:lnSpc>
+              <a:buNone/>
+              <a:tabLst>
+                <a:tab pos="0" algn="l"/>
+              </a:tabLst>
+              <a:defRPr lang="en-US" sz="1800" b="0" u="none" strike="noStrike">
+                <a:solidFill>
+                  <a:srgbClr val="000000"/>
+                </a:solidFill>
+                <a:effectLst/>
+                <a:uFillTx/>
+                <a:latin typeface="Times New Roman"/>
+                <a:ea typeface="Times New Roman"/>
+              </a:defRPr>
+            </a:lvl1pPr>
+          </a:lstStyle>
+          <a:p>
+            <a:pPr indent="0" algn="r" defTabSz="914400">
+              <a:lnSpc>
+                <a:spcPct val="100000"/>
+              </a:lnSpc>
+              <a:buNone/>
+              <a:tabLst>
+                <a:tab pos="0" algn="l"/>
+              </a:tabLst>
+            </a:pPr>
+            <a:fld id="{9873986A-C957-40DB-B7BB-3EB1CE963720}" type="slidenum">
+              <a:rPr lang="en-US" sz="1800" b="0" u="none" strike="noStrike">
+                <a:solidFill>
+                  <a:srgbClr val="000000"/>
+                </a:solidFill>
+                <a:effectLst/>
+                <a:uFillTx/>
+                <a:latin typeface="Times New Roman"/>
+                <a:ea typeface="Times New Roman"/>
+              </a:rPr>
+              <a:t>&lt;number&gt;</a:t>
+            </a:fld>
+            <a:endParaRPr lang="en-US" sz="1600" b="0" u="none" strike="noStrike">
+              <a:solidFill>
+                <a:srgbClr val="000000"/>
+              </a:solidFill>
+              <a:effectLst/>
+              <a:uFillTx/>
+              <a:latin typeface="Times New Roman"/>
+            </a:endParaRPr>
+          </a:p>
+        </p:txBody>
+      </p:sp>
+      <p:sp>
+        <p:nvSpPr>
+          <p:cNvPr id="26" name="TextBox 25"/>
+          <p:cNvSpPr txBox="1"/>
+          <p:nvPr/>
+        </p:nvSpPr>
+        <p:spPr>
+          <a:xfrm>
+            <a:off x="594360" y="1280160"/>
+            <a:ext cx="11000232" cy="3931920"/>
+          </a:xfrm>
+          <a:prstGeom prst="rect">
+            <a:avLst/>
+          </a:prstGeom>
+          <a:noFill/>
+        </p:spPr>
+        <p:txBody>
+          <a:bodyPr wrap="square" lIns="45720" rIns="45720" tIns="27432" bIns="27432"/>
+          <a:lstStyle/>
+          <a:p>
+            <a:pPr marL="256032" indent="-256032">
+              <a:spcAft>
+                <a:spcPts val="1400"/>
+              </a:spcAft>
+              <a:buFont typeface="Arial"/>
+              <a:buChar char="•"/>
+            </a:pPr>
+            <a:r>
+              <a:rPr sz="1800" b="0" i="0">
+                <a:solidFill>
+                  <a:srgbClr val="000000"/>
+                </a:solidFill>
+                <a:latin typeface="Times New Roman"/>
+                <a:ea typeface="Times New Roman"/>
+                <a:cs typeface="Times New Roman"/>
+              </a:rPr>
+              <a:t>An AI agent starts every session with a blank memory. Instructions, decisions and corrections from earlier sessions are gone unless the user repeats them.</a:t>
+            </a:r>
+          </a:p>
+          <a:p>
+            <a:pPr marL="256032" indent="-256032">
+              <a:spcAft>
+                <a:spcPts val="1400"/>
+              </a:spcAft>
+              <a:buFont typeface="Arial"/>
+              <a:buChar char="•"/>
+            </a:pPr>
+            <a:r>
+              <a:rPr sz="1800" b="0" i="0">
+                <a:solidFill>
+                  <a:srgbClr val="000000"/>
+                </a:solidFill>
+                <a:latin typeface="Times New Roman"/>
+                <a:ea typeface="Times New Roman"/>
+                <a:cs typeface="Times New Roman"/>
+              </a:rPr>
+              <a:t>Pasting the whole history back into the prompt does not scale. Models make poor use of information in the middle of a long input [1], and each answer gets slower and more expensive.</a:t>
+            </a:r>
+          </a:p>
+          <a:p>
+            <a:pPr marL="256032" indent="-256032">
+              <a:spcAft>
+                <a:spcPts val="1400"/>
+              </a:spcAft>
+              <a:buFont typeface="Arial"/>
+              <a:buChar char="•"/>
+            </a:pPr>
+            <a:r>
+              <a:rPr sz="1800" b="0" i="0">
+                <a:solidFill>
+                  <a:srgbClr val="000000"/>
+                </a:solidFill>
+                <a:latin typeface="Times New Roman"/>
+                <a:ea typeface="Times New Roman"/>
+                <a:cs typeface="Times New Roman"/>
+              </a:rPr>
+              <a:t>When something changes, the agent cannot tell the new value from the old one, so it can act on outdated information.</a:t>
+            </a:r>
+          </a:p>
+          <a:p>
+            <a:pPr marL="256032" indent="-256032">
+              <a:spcAft>
+                <a:spcPts val="1400"/>
+              </a:spcAft>
+              <a:buFont typeface="Arial"/>
+              <a:buChar char="•"/>
+            </a:pPr>
+            <a:r>
+              <a:rPr sz="1800" b="0" i="0">
+                <a:solidFill>
+                  <a:srgbClr val="000000"/>
+                </a:solidFill>
+                <a:latin typeface="Times New Roman"/>
+                <a:ea typeface="Times New Roman"/>
+                <a:cs typeface="Times New Roman"/>
+              </a:rPr>
+              <a:t>An agent needs a memory that records what the user said and when it changed, and returns only the parts relevant to the current question, each with its source message. The LongMemEval benchmark [2] measures this.</a:t>
+            </a:r>
+          </a:p>
+        </p:txBody>
+      </p:sp>
+      <p:sp>
+        <p:nvSpPr>
+          <p:cNvPr id="27" name="TextBox 26"/>
+          <p:cNvSpPr txBox="1"/>
+          <p:nvPr/>
+        </p:nvSpPr>
+        <p:spPr>
+          <a:xfrm>
+            <a:off x="594360" y="4434840"/>
+            <a:ext cx="11000232" cy="731520"/>
+          </a:xfrm>
+          <a:prstGeom prst="rect">
+            <a:avLst/>
+          </a:prstGeom>
+          <a:noFill/>
+        </p:spPr>
+        <p:txBody>
+          <a:bodyPr wrap="square" lIns="45720" rIns="45720" tIns="27432" bIns="27432"/>
+          <a:lstStyle/>
+          <a:p>
+            <a:pPr marL="0" indent="0">
+              <a:spcAft>
+                <a:spcPts val="600"/>
+              </a:spcAft>
+              <a:buNone/>
+            </a:pPr>
+            <a:r>
+              <a:rPr sz="1800" b="1" i="0">
+                <a:solidFill>
+                  <a:srgbClr val="000000"/>
+                </a:solidFill>
+                <a:latin typeface="Times New Roman"/>
+                <a:ea typeface="Times New Roman"/>
+                <a:cs typeface="Times New Roman"/>
+              </a:rPr>
+              <a:t>This project builds that memory as a service for AI agents, connected here to Pi, an open-source coding agent that runs in the terminal.</a:t>
+            </a:r>
+          </a:p>
+        </p:txBody>
+      </p:sp>
+    </p:spTree>
+  </p:cSld>
+  <p:clrMapOvr>
+    <a:masterClrMapping/>
+  </p:clrMapOvr>
+</p:sld>
+</file>
+
+<file path=ppt/slides/slide20.xml><?xml version="1.0" encoding="utf-8"?>
 <p:sld xmlns:a="http://schemas.openxmlformats.org/drawingml/2006/main" xmlns:p="http://schemas.openxmlformats.org/presentationml/2006/main" xmlns:r="http://schemas.openxmlformats.org/officeDocument/2006/relationships">
   <p:cSld>
     <p:spTree>
@@ -9124,7 +10448,7 @@
                           <a:ea typeface="Times New Roman"/>
                           <a:cs typeface="Times New Roman"/>
                         </a:rPr>
-                        <a:t>Python, PyTorch, Transformers, PEFT, bitsandbytes</a:t>
+                        <a:t>Pi coding agent [13]</a:t>
                       </a:r>
                     </a:p>
                   </a:txBody>
@@ -9178,7 +10502,117 @@
                           <a:ea typeface="Times New Roman"/>
                           <a:cs typeface="Times New Roman"/>
                         </a:rPr>
-                        <a:t>Dataset preparation and QLoRA fine-tuning [14].</a:t>
+                        <a:t>The agent we connect to: it sends messages and receives recalled memory.</a:t>
+                      </a:r>
+                    </a:p>
+                  </a:txBody>
+                  <a:tcPr marL="73152" marR="73152" marT="36576" marB="36576">
+                    <a:lnL w="9525" cap="flat" cmpd="sng" algn="ctr">
+                      <a:solidFill>
+                        <a:srgbClr val="404040"/>
+                      </a:solidFill>
+                      <a:prstDash val="solid"/>
+                    </a:lnL>
+                    <a:lnR w="9525" cap="flat" cmpd="sng" algn="ctr">
+                      <a:solidFill>
+                        <a:srgbClr val="404040"/>
+                      </a:solidFill>
+                      <a:prstDash val="solid"/>
+                    </a:lnR>
+                    <a:lnT w="9525" cap="flat" cmpd="sng" algn="ctr">
+                      <a:solidFill>
+                        <a:srgbClr val="404040"/>
+                      </a:solidFill>
+                      <a:prstDash val="solid"/>
+                    </a:lnT>
+                    <a:lnB w="9525" cap="flat" cmpd="sng" algn="ctr">
+                      <a:solidFill>
+                        <a:srgbClr val="404040"/>
+                      </a:solidFill>
+                      <a:prstDash val="solid"/>
+                    </a:lnB>
+                    <a:solidFill>
+                      <a:srgbClr val="FFFFFF"/>
+                    </a:solidFill>
+                  </a:tcPr>
+                </a:tc>
+              </a:tr>
+              <a:tr h="502920">
+                <a:tc>
+                  <a:txBody>
+                    <a:bodyPr wrap="square"/>
+                    <a:lstStyle/>
+                    <a:p>
+                      <a:pPr marL="0" indent="0">
+                        <a:spcAft>
+                          <a:spcPts val="0"/>
+                        </a:spcAft>
+                        <a:buNone/>
+                      </a:pPr>
+                      <a:r>
+                        <a:rPr sz="1800" b="0" i="0">
+                          <a:solidFill>
+                            <a:srgbClr val="000000"/>
+                          </a:solidFill>
+                          <a:latin typeface="Times New Roman"/>
+                          <a:ea typeface="Times New Roman"/>
+                          <a:cs typeface="Times New Roman"/>
+                        </a:rPr>
+                        <a:t>Python, PyTorch, Transformers, PEFT, bitsandbytes</a:t>
+                      </a:r>
+                    </a:p>
+                  </a:txBody>
+                  <a:tcPr marL="73152" marR="73152" marT="36576" marB="36576">
+                    <a:lnL w="9525" cap="flat" cmpd="sng" algn="ctr">
+                      <a:solidFill>
+                        <a:srgbClr val="404040"/>
+                      </a:solidFill>
+                      <a:prstDash val="solid"/>
+                    </a:lnL>
+                    <a:lnR w="9525" cap="flat" cmpd="sng" algn="ctr">
+                      <a:solidFill>
+                        <a:srgbClr val="404040"/>
+                      </a:solidFill>
+                      <a:prstDash val="solid"/>
+                    </a:lnR>
+                    <a:lnT w="9525" cap="flat" cmpd="sng" algn="ctr">
+                      <a:solidFill>
+                        <a:srgbClr val="404040"/>
+                      </a:solidFill>
+                      <a:prstDash val="solid"/>
+                    </a:lnT>
+                    <a:lnB w="9525" cap="flat" cmpd="sng" algn="ctr">
+                      <a:solidFill>
+                        <a:srgbClr val="404040"/>
+                      </a:solidFill>
+                      <a:prstDash val="solid"/>
+                    </a:lnB>
+                    <a:solidFill>
+                      <a:srgbClr val="FFFFFF"/>
+                    </a:solidFill>
+                  </a:tcPr>
+                </a:tc>
+                <a:tc>
+                  <a:txBody>
+                    <a:bodyPr wrap="square"/>
+                    <a:lstStyle/>
+                    <a:p>
+                      <a:pPr marL="0" indent="0">
+                        <a:spcAft>
+                          <a:spcPts val="0"/>
+                        </a:spcAft>
+                        <a:buNone/>
+                      </a:pPr>
+                      <a:r>
+                        <a:rPr sz="1800" b="0" i="0">
+                          <a:solidFill>
+                            <a:srgbClr val="000000"/>
+                          </a:solidFill>
+                          <a:latin typeface="Times New Roman"/>
+                          <a:ea typeface="Times New Roman"/>
+                          <a:cs typeface="Times New Roman"/>
+                        </a:rPr>
+                        <a:t>Dataset preparation and QLoRA, a low-memory fine-tuning method [14].</a:t>
                       </a:r>
                     </a:p>
                   </a:txBody>
@@ -9288,117 +10722,7 @@
                           <a:ea typeface="Times New Roman"/>
                           <a:cs typeface="Times New Roman"/>
                         </a:rPr>
-                        <a:t>Converts and quantises the trained model for Ollama.</a:t>
-                      </a:r>
-                    </a:p>
-                  </a:txBody>
-                  <a:tcPr marL="73152" marR="73152" marT="36576" marB="36576">
-                    <a:lnL w="9525" cap="flat" cmpd="sng" algn="ctr">
-                      <a:solidFill>
-                        <a:srgbClr val="404040"/>
-                      </a:solidFill>
-                      <a:prstDash val="solid"/>
-                    </a:lnL>
-                    <a:lnR w="9525" cap="flat" cmpd="sng" algn="ctr">
-                      <a:solidFill>
-                        <a:srgbClr val="404040"/>
-                      </a:solidFill>
-                      <a:prstDash val="solid"/>
-                    </a:lnR>
-                    <a:lnT w="9525" cap="flat" cmpd="sng" algn="ctr">
-                      <a:solidFill>
-                        <a:srgbClr val="404040"/>
-                      </a:solidFill>
-                      <a:prstDash val="solid"/>
-                    </a:lnT>
-                    <a:lnB w="9525" cap="flat" cmpd="sng" algn="ctr">
-                      <a:solidFill>
-                        <a:srgbClr val="404040"/>
-                      </a:solidFill>
-                      <a:prstDash val="solid"/>
-                    </a:lnB>
-                    <a:solidFill>
-                      <a:srgbClr val="FFFFFF"/>
-                    </a:solidFill>
-                  </a:tcPr>
-                </a:tc>
-              </a:tr>
-              <a:tr h="502920">
-                <a:tc>
-                  <a:txBody>
-                    <a:bodyPr wrap="square"/>
-                    <a:lstStyle/>
-                    <a:p>
-                      <a:pPr marL="0" indent="0">
-                        <a:spcAft>
-                          <a:spcPts val="0"/>
-                        </a:spcAft>
-                        <a:buNone/>
-                      </a:pPr>
-                      <a:r>
-                        <a:rPr sz="1800" b="0" i="0">
-                          <a:solidFill>
-                            <a:srgbClr val="000000"/>
-                          </a:solidFill>
-                          <a:latin typeface="Times New Roman"/>
-                          <a:ea typeface="Times New Roman"/>
-                          <a:cs typeface="Times New Roman"/>
-                        </a:rPr>
-                        <a:t>Pi coding agent [13]</a:t>
-                      </a:r>
-                    </a:p>
-                  </a:txBody>
-                  <a:tcPr marL="73152" marR="73152" marT="36576" marB="36576">
-                    <a:lnL w="9525" cap="flat" cmpd="sng" algn="ctr">
-                      <a:solidFill>
-                        <a:srgbClr val="404040"/>
-                      </a:solidFill>
-                      <a:prstDash val="solid"/>
-                    </a:lnL>
-                    <a:lnR w="9525" cap="flat" cmpd="sng" algn="ctr">
-                      <a:solidFill>
-                        <a:srgbClr val="404040"/>
-                      </a:solidFill>
-                      <a:prstDash val="solid"/>
-                    </a:lnR>
-                    <a:lnT w="9525" cap="flat" cmpd="sng" algn="ctr">
-                      <a:solidFill>
-                        <a:srgbClr val="404040"/>
-                      </a:solidFill>
-                      <a:prstDash val="solid"/>
-                    </a:lnT>
-                    <a:lnB w="9525" cap="flat" cmpd="sng" algn="ctr">
-                      <a:solidFill>
-                        <a:srgbClr val="404040"/>
-                      </a:solidFill>
-                      <a:prstDash val="solid"/>
-                    </a:lnB>
-                    <a:solidFill>
-                      <a:srgbClr val="FFFFFF"/>
-                    </a:solidFill>
-                  </a:tcPr>
-                </a:tc>
-                <a:tc>
-                  <a:txBody>
-                    <a:bodyPr wrap="square"/>
-                    <a:lstStyle/>
-                    <a:p>
-                      <a:pPr marL="0" indent="0">
-                        <a:spcAft>
-                          <a:spcPts val="0"/>
-                        </a:spcAft>
-                        <a:buNone/>
-                      </a:pPr>
-                      <a:r>
-                        <a:rPr sz="1800" b="0" i="0">
-                          <a:solidFill>
-                            <a:srgbClr val="000000"/>
-                          </a:solidFill>
-                          <a:latin typeface="Times New Roman"/>
-                          <a:ea typeface="Times New Roman"/>
-                          <a:cs typeface="Times New Roman"/>
-                        </a:rPr>
-                        <a:t>Captures session messages and adds recalled memory to the agent's context.</a:t>
+                        <a:t>Converts and compresses the trained model so Ollama can run it.</a:t>
                       </a:r>
                     </a:p>
                   </a:txBody>
@@ -9665,7 +10989,7 @@
 </p:sld>
 </file>
 
-<file path=ppt/slides/slide19.xml><?xml version="1.0" encoding="utf-8"?>
+<file path=ppt/slides/slide21.xml><?xml version="1.0" encoding="utf-8"?>
 <p:sld xmlns:a="http://schemas.openxmlformats.org/drawingml/2006/main" xmlns:p="http://schemas.openxmlformats.org/presentationml/2006/main" xmlns:r="http://schemas.openxmlformats.org/officeDocument/2006/relationships">
   <p:cSld>
     <p:spTree>
@@ -9819,7 +11143,7 @@
                 <a:ea typeface="Times New Roman"/>
                 <a:cs typeface="Times New Roman"/>
               </a:rPr>
-              <a:t>Fine-tuning dataset (Qwen3-4B-Instruct-2507)</a:t>
+              <a:t>Fine-tuning dataset for the Module 5 model (Qwen3-4B-Instruct-2507)</a:t>
             </a:r>
           </a:p>
         </p:txBody>
@@ -10029,7 +11353,7 @@
                           <a:ea typeface="Times New Roman"/>
                           <a:cs typeface="Times New Roman"/>
                         </a:rPr>
-                        <a:t>Started with coding conversations, then expanded to 16 domains such as family, food, travel, education, work and software.</a:t>
+                        <a:t>Started with coding conversations, then grew to 16 domains such as family, food, travel, education, work and software.</a:t>
                       </a:r>
                     </a:p>
                   </a:txBody>
@@ -10139,7 +11463,7 @@
                           <a:ea typeface="Times New Roman"/>
                           <a:cs typeface="Times New Roman"/>
                         </a:rPr>
-                        <a:t>Synthetic conversations labelled by GPT-5.6-sol, checked by a second adversarial model and cleaned.</a:t>
+                        <a:t>Synthetic conversations labelled by GPT-5.6-sol, checked by a second model and cleaned by us.</a:t>
                       </a:r>
                     </a:p>
                   </a:txBody>
@@ -10249,7 +11573,7 @@
                           <a:ea typeface="Times New Roman"/>
                           <a:cs typeface="Times New Roman"/>
                         </a:rPr>
-                        <a:t>2,961 task examples: 2,095 training, 424 validation and 442 test.</a:t>
+                        <a:t>2,961 task examples: 2,095 for training, 424 for validation and 442 for testing.</a:t>
                       </a:r>
                     </a:p>
                   </a:txBody>
@@ -10359,7 +11683,7 @@
                           <a:ea typeface="Times New Roman"/>
                           <a:cs typeface="Times New Roman"/>
                         </a:rPr>
-                        <a:t>Extract assertions, combine related assertions and answer questions with citations.</a:t>
+                        <a:t>Extract assertions, combine related assertions, and answer questions with citations.</a:t>
                       </a:r>
                     </a:p>
                   </a:txBody>
@@ -10558,7 +11882,7 @@
 </p:sld>
 </file>
 
-<file path=ppt/slides/slide2.xml><?xml version="1.0" encoding="utf-8"?>
+<file path=ppt/slides/slide22.xml><?xml version="1.0" encoding="utf-8"?>
 <p:sld xmlns:a="http://schemas.openxmlformats.org/drawingml/2006/main" xmlns:p="http://schemas.openxmlformats.org/presentationml/2006/main" xmlns:r="http://schemas.openxmlformats.org/officeDocument/2006/relationships">
   <p:cSld>
     <p:spTree>
@@ -10592,7 +11916,7 @@
                 <a:ea typeface="Times New Roman"/>
                 <a:cs typeface="Times New Roman"/>
               </a:rPr>
-              <a:t>PROBLEM STATEMENT</a:t>
+              <a:t>DATASET (2/3)</a:t>
             </a:r>
           </a:p>
         </p:txBody>
@@ -10685,386 +12009,6 @@
         </p:nvSpPr>
         <p:spPr>
           <a:xfrm>
-            <a:off x="594360" y="1280160"/>
-            <a:ext cx="11000232" cy="3246120"/>
-          </a:xfrm>
-          <a:prstGeom prst="rect">
-            <a:avLst/>
-          </a:prstGeom>
-          <a:noFill/>
-        </p:spPr>
-        <p:txBody>
-          <a:bodyPr wrap="square" lIns="45720" rIns="45720" tIns="27432" bIns="27432"/>
-          <a:lstStyle/>
-          <a:p>
-            <a:pPr marL="256032" indent="-256032">
-              <a:spcAft>
-                <a:spcPts val="1000"/>
-              </a:spcAft>
-              <a:buFont typeface="Arial"/>
-              <a:buChar char="•"/>
-            </a:pPr>
-            <a:r>
-              <a:rPr sz="1800" b="0" i="0">
-                <a:solidFill>
-                  <a:srgbClr val="000000"/>
-                </a:solidFill>
-                <a:latin typeface="Times New Roman"/>
-                <a:ea typeface="Times New Roman"/>
-                <a:cs typeface="Times New Roman"/>
-              </a:rPr>
-              <a:t>An AI agent forgets everything when a session ends. Instructions, decisions and corrections from earlier sessions are lost unless the user repeats them.</a:t>
-            </a:r>
-          </a:p>
-          <a:p>
-            <a:pPr marL="256032" indent="-256032">
-              <a:spcAft>
-                <a:spcPts val="1000"/>
-              </a:spcAft>
-              <a:buFont typeface="Arial"/>
-              <a:buChar char="•"/>
-            </a:pPr>
-            <a:r>
-              <a:rPr sz="1800" b="0" i="0">
-                <a:solidFill>
-                  <a:srgbClr val="000000"/>
-                </a:solidFill>
-                <a:latin typeface="Times New Roman"/>
-                <a:ea typeface="Times New Roman"/>
-                <a:cs typeface="Times New Roman"/>
-              </a:rPr>
-              <a:t>Pasting the whole history into the prompt does not solve this. Models use information in the middle of a long context poorly [1], and every answer gets slower and costlier as the history grows.</a:t>
-            </a:r>
-          </a:p>
-          <a:p>
-            <a:pPr marL="256032" indent="-256032">
-              <a:spcAft>
-                <a:spcPts val="1000"/>
-              </a:spcAft>
-              <a:buFont typeface="Arial"/>
-              <a:buChar char="•"/>
-            </a:pPr>
-            <a:r>
-              <a:rPr sz="1800" b="0" i="0">
-                <a:solidFill>
-                  <a:srgbClr val="000000"/>
-                </a:solidFill>
-                <a:latin typeface="Times New Roman"/>
-                <a:ea typeface="Times New Roman"/>
-                <a:cs typeface="Times New Roman"/>
-              </a:rPr>
-              <a:t>When a detail changes, the agent cannot tell the new value from the old one, so it may act on outdated information.</a:t>
-            </a:r>
-          </a:p>
-          <a:p>
-            <a:pPr marL="256032" indent="-256032">
-              <a:spcAft>
-                <a:spcPts val="1000"/>
-              </a:spcAft>
-              <a:buFont typeface="Arial"/>
-              <a:buChar char="•"/>
-            </a:pPr>
-            <a:r>
-              <a:rPr sz="1800" b="0" i="0">
-                <a:solidFill>
-                  <a:srgbClr val="000000"/>
-                </a:solidFill>
-                <a:latin typeface="Times New Roman"/>
-                <a:ea typeface="Times New Roman"/>
-                <a:cs typeface="Times New Roman"/>
-              </a:rPr>
-              <a:t>We need a memory that keeps what the user said, notices when it changes, and returns only the relevant parts with the message each came from. LongMemEval [2] tests exactly this: recall across sessions, reasoning about time, handling updates and admitting when it does not know.</a:t>
-            </a:r>
-          </a:p>
-        </p:txBody>
-      </p:sp>
-      <p:sp>
-        <p:nvSpPr>
-          <p:cNvPr id="27" name="Rectangle 26"/>
-          <p:cNvSpPr/>
-          <p:nvPr/>
-        </p:nvSpPr>
-        <p:spPr>
-          <a:xfrm>
-            <a:off x="594360" y="4617720"/>
-            <a:ext cx="11000232" cy="1600200"/>
-          </a:xfrm>
-          <a:prstGeom prst="rect">
-            <a:avLst/>
-          </a:prstGeom>
-          <a:solidFill>
-            <a:srgbClr val="EEF2F7"/>
-          </a:solidFill>
-          <a:ln w="9525">
-            <a:solidFill>
-              <a:srgbClr val="8A9BB0"/>
-            </a:solidFill>
-          </a:ln>
-          <a:effectLst/>
-        </p:spPr>
-        <p:style>
-          <a:lnRef idx="1">
-            <a:schemeClr val="accent1"/>
-          </a:lnRef>
-          <a:fillRef idx="3">
-            <a:schemeClr val="accent1"/>
-          </a:fillRef>
-          <a:effectRef idx="2">
-            <a:schemeClr val="accent1"/>
-          </a:effectRef>
-          <a:fontRef idx="minor">
-            <a:schemeClr val="lt1"/>
-          </a:fontRef>
-        </p:style>
-        <p:txBody>
-          <a:bodyPr rtlCol="0" anchor="t" lIns="137160" rIns="137160" tIns="73152" bIns="73152" wrap="square"/>
-          <a:lstStyle/>
-          <a:p>
-            <a:pPr algn="ctr" marL="0" indent="0">
-              <a:spcAft>
-                <a:spcPts val="400"/>
-              </a:spcAft>
-              <a:buNone/>
-            </a:pPr>
-            <a:r>
-              <a:rPr sz="1800" b="1" i="0">
-                <a:solidFill>
-                  <a:srgbClr val="000000"/>
-                </a:solidFill>
-                <a:latin typeface="Times New Roman"/>
-                <a:ea typeface="Times New Roman"/>
-                <a:cs typeface="Times New Roman"/>
-              </a:rPr>
-              <a:t>Example</a:t>
-            </a:r>
-          </a:p>
-          <a:p>
-            <a:pPr marL="0" indent="0">
-              <a:spcAft>
-                <a:spcPts val="200"/>
-              </a:spcAft>
-              <a:buNone/>
-            </a:pPr>
-            <a:r>
-              <a:rPr sz="1800" b="1" i="0">
-                <a:solidFill>
-                  <a:srgbClr val="000000"/>
-                </a:solidFill>
-                <a:latin typeface="Times New Roman"/>
-                <a:ea typeface="Times New Roman"/>
-                <a:cs typeface="Times New Roman"/>
-              </a:rPr>
-              <a:t>Session 1: </a:t>
-            </a:r>
-            <a:r>
-              <a:rPr sz="1800" b="0" i="0">
-                <a:solidFill>
-                  <a:srgbClr val="000000"/>
-                </a:solidFill>
-                <a:latin typeface="Times New Roman"/>
-                <a:ea typeface="Times New Roman"/>
-                <a:cs typeface="Times New Roman"/>
-              </a:rPr>
-              <a:t>"The release freeze is Thursday at 17:00."</a:t>
-            </a:r>
-          </a:p>
-          <a:p>
-            <a:pPr marL="0" indent="0">
-              <a:spcAft>
-                <a:spcPts val="200"/>
-              </a:spcAft>
-              <a:buNone/>
-            </a:pPr>
-            <a:r>
-              <a:rPr sz="1800" b="1" i="0">
-                <a:solidFill>
-                  <a:srgbClr val="000000"/>
-                </a:solidFill>
-                <a:latin typeface="Times New Roman"/>
-                <a:ea typeface="Times New Roman"/>
-                <a:cs typeface="Times New Roman"/>
-              </a:rPr>
-              <a:t>Session 2: </a:t>
-            </a:r>
-            <a:r>
-              <a:rPr sz="1800" b="0" i="0">
-                <a:solidFill>
-                  <a:srgbClr val="000000"/>
-                </a:solidFill>
-                <a:latin typeface="Times New Roman"/>
-                <a:ea typeface="Times New Roman"/>
-                <a:cs typeface="Times New Roman"/>
-              </a:rPr>
-              <a:t>"The freeze moved to Friday at 16:30."</a:t>
-            </a:r>
-          </a:p>
-          <a:p>
-            <a:pPr marL="0" indent="0">
-              <a:spcAft>
-                <a:spcPts val="0"/>
-              </a:spcAft>
-              <a:buNone/>
-            </a:pPr>
-            <a:r>
-              <a:rPr sz="1800" b="1" i="0">
-                <a:solidFill>
-                  <a:srgbClr val="000000"/>
-                </a:solidFill>
-                <a:latin typeface="Times New Roman"/>
-                <a:ea typeface="Times New Roman"/>
-                <a:cs typeface="Times New Roman"/>
-              </a:rPr>
-              <a:t>Session 3: </a:t>
-            </a:r>
-            <a:r>
-              <a:rPr sz="1800" b="0" i="0">
-                <a:solidFill>
-                  <a:srgbClr val="000000"/>
-                </a:solidFill>
-                <a:latin typeface="Times New Roman"/>
-                <a:ea typeface="Times New Roman"/>
-                <a:cs typeface="Times New Roman"/>
-              </a:rPr>
-              <a:t>"When is the release freeze?" The agent should say Friday at 16:30, and know it used to be Thursday.</a:t>
-            </a:r>
-          </a:p>
-        </p:txBody>
-      </p:sp>
-    </p:spTree>
-  </p:cSld>
-  <p:clrMapOvr>
-    <a:masterClrMapping/>
-  </p:clrMapOvr>
-</p:sld>
-</file>
-
-<file path=ppt/slides/slide20.xml><?xml version="1.0" encoding="utf-8"?>
-<p:sld xmlns:a="http://schemas.openxmlformats.org/drawingml/2006/main" xmlns:p="http://schemas.openxmlformats.org/presentationml/2006/main" xmlns:r="http://schemas.openxmlformats.org/officeDocument/2006/relationships">
-  <p:cSld>
-    <p:spTree>
-      <p:nvGrpSpPr>
-        <p:cNvPr id="1" name=""/>
-        <p:cNvGrpSpPr/>
-        <p:nvPr/>
-      </p:nvGrpSpPr>
-      <p:grpSpPr/>
-      <p:sp>
-        <p:nvSpPr>
-          <p:cNvPr id="2" name="Title 1"/>
-          <p:cNvSpPr>
-            <a:spLocks noGrp="1"/>
-          </p:cNvSpPr>
-          <p:nvPr>
-            <p:ph type="title"/>
-          </p:nvPr>
-        </p:nvSpPr>
-        <p:spPr/>
-        <p:txBody>
-          <a:bodyPr/>
-          <a:lstStyle/>
-          <a:p>
-            <a:r>
-              <a:rPr sz="2400" b="1" i="0">
-                <a:solidFill>
-                  <a:srgbClr val="000000"/>
-                </a:solidFill>
-                <a:latin typeface="Times New Roman"/>
-                <a:ea typeface="Times New Roman"/>
-                <a:cs typeface="Times New Roman"/>
-              </a:rPr>
-              <a:t>DATASET (2/3)</a:t>
-            </a:r>
-          </a:p>
-        </p:txBody>
-      </p:sp>
-      <p:sp>
-        <p:nvSpPr>
-          <p:cNvPr id="25" name="PlaceHolder 2"/>
-          <p:cNvSpPr>
-            <a:spLocks noGrp="1"/>
-          </p:cNvSpPr>
-          <p:nvPr>
-            <p:ph type="sldNum" idx="5"/>
-          </p:nvPr>
-        </p:nvSpPr>
-        <p:spPr>
-          <a:xfrm>
-            <a:off x="10865880" y="384120"/>
-            <a:ext cx="730440" cy="456120"/>
-          </a:xfrm>
-          <a:prstGeom prst="rect">
-            <a:avLst/>
-          </a:prstGeom>
-          <a:noFill/>
-          <a:ln w="0">
-            <a:noFill/>
-          </a:ln>
-        </p:spPr>
-        <p:txBody>
-          <a:bodyPr lIns="90000" tIns="45000" rIns="90000" bIns="45000" anchor="t">
-            <a:noAutofit/>
-          </a:bodyPr>
-          <a:lstStyle>
-            <a:lvl1pPr indent="0" algn="r" defTabSz="914400">
-              <a:lnSpc>
-                <a:spcPct val="100000"/>
-              </a:lnSpc>
-              <a:buNone/>
-              <a:tabLst>
-                <a:tab pos="0" algn="l"/>
-              </a:tabLst>
-              <a:defRPr lang="en-US" sz="1800" b="0" u="none" strike="noStrike">
-                <a:solidFill>
-                  <a:srgbClr val="000000"/>
-                </a:solidFill>
-                <a:effectLst/>
-                <a:uFillTx/>
-                <a:latin typeface="Times New Roman"/>
-                <a:ea typeface="Times New Roman"/>
-              </a:defRPr>
-            </a:lvl1pPr>
-          </a:lstStyle>
-          <a:p>
-            <a:pPr indent="0" algn="r" defTabSz="914400">
-              <a:lnSpc>
-                <a:spcPct val="100000"/>
-              </a:lnSpc>
-              <a:buNone/>
-              <a:tabLst>
-                <a:tab pos="0" algn="l"/>
-              </a:tabLst>
-            </a:pPr>
-            <a:fld id="{9873986A-C957-40DB-B7BB-3EB1CE963720}" type="slidenum">
-              <a:rPr lang="en-US" sz="1800" b="0" u="none" strike="noStrike">
-                <a:solidFill>
-                  <a:srgbClr val="000000"/>
-                </a:solidFill>
-                <a:effectLst/>
-                <a:uFillTx/>
-                <a:latin typeface="Times New Roman"/>
-                <a:ea typeface="Times New Roman"/>
-              </a:rPr>
-              <a:t>&lt;number&gt;</a:t>
-            </a:fld>
-            <a:endParaRPr lang="en-US" sz="1600" b="0" u="none" strike="noStrike">
-              <a:solidFill>
-                <a:srgbClr val="000000"/>
-              </a:solidFill>
-              <a:effectLst/>
-              <a:uFillTx/>
-              <a:latin typeface="Times New Roman"/>
-            </a:endParaRPr>
-          </a:p>
-        </p:txBody>
-      </p:sp>
-      <p:sp>
-        <p:nvSpPr>
-          <p:cNvPr id="26" name="TextBox 25"/>
-          <p:cNvSpPr txBox="1"/>
-          <p:nvPr/>
-        </p:nvSpPr>
-        <p:spPr>
-          <a:xfrm>
             <a:off x="594360" y="1234439"/>
             <a:ext cx="11000232" cy="365760"/>
           </a:xfrm>
@@ -11092,7 +12036,7 @@
                 <a:ea typeface="Times New Roman"/>
                 <a:cs typeface="Times New Roman"/>
               </a:rPr>
-              <a:t>External evaluation dataset</a:t>
+              <a:t>External test dataset</a:t>
             </a:r>
           </a:p>
         </p:txBody>
@@ -11618,7 +12562,7 @@
                 <a:ea typeface="Times New Roman"/>
                 <a:cs typeface="Times New Roman"/>
               </a:rPr>
-              <a:t>Evaluation example (LoCoMo)</a:t>
+              <a:t>Test example (LoCoMo)</a:t>
             </a:r>
           </a:p>
           <a:p>
@@ -11811,7 +12755,7 @@
 </p:sld>
 </file>
 
-<file path=ppt/slides/slide21.xml><?xml version="1.0" encoding="utf-8"?>
+<file path=ppt/slides/slide23.xml><?xml version="1.0" encoding="utf-8"?>
 <p:sld xmlns:a="http://schemas.openxmlformats.org/drawingml/2006/main" xmlns:p="http://schemas.openxmlformats.org/presentationml/2006/main" xmlns:r="http://schemas.openxmlformats.org/officeDocument/2006/relationships">
   <p:cSld>
     <p:spTree>
@@ -11989,7 +12933,7 @@
                 <a:ea typeface="Times New Roman"/>
                 <a:cs typeface="Times New Roman"/>
               </a:rPr>
-              <a:t>Software and technical projects has 240 rows and the other domains have about 110 to 140 each. One episode can give several task rows.</a:t>
+              <a:t>Of the 2,095 training rows, software and technical projects has 240; the other domains have about 110 to 140 each.</a:t>
             </a:r>
           </a:p>
         </p:txBody>
@@ -12002,7 +12946,7 @@
 </p:sld>
 </file>
 
-<file path=ppt/slides/slide22.xml><?xml version="1.0" encoding="utf-8"?>
+<file path=ppt/slides/slide24.xml><?xml version="1.0" encoding="utf-8"?>
 <p:sld xmlns:a="http://schemas.openxmlformats.org/drawingml/2006/main" xmlns:p="http://schemas.openxmlformats.org/presentationml/2006/main" xmlns:r="http://schemas.openxmlformats.org/officeDocument/2006/relationships">
   <p:cSld>
     <p:spTree>
@@ -12121,9 +13065,49 @@
           </a:p>
         </p:txBody>
       </p:sp>
+      <p:sp>
+        <p:nvSpPr>
+          <p:cNvPr id="26" name="TextBox 25"/>
+          <p:cNvSpPr txBox="1"/>
+          <p:nvPr/>
+        </p:nvSpPr>
+        <p:spPr>
+          <a:xfrm>
+            <a:off x="594360" y="1234439"/>
+            <a:ext cx="11000232" cy="365760"/>
+          </a:xfrm>
+          <a:prstGeom prst="rect">
+            <a:avLst/>
+          </a:prstGeom>
+          <a:noFill/>
+        </p:spPr>
+        <p:txBody>
+          <a:bodyPr wrap="square" lIns="45720" rIns="45720" tIns="27432" bIns="27432"/>
+          <a:lstStyle/>
+          <a:p>
+            <a:pPr marL="0" indent="0">
+              <a:spcAft>
+                <a:spcPts val="600"/>
+              </a:spcAft>
+              <a:buNone/>
+            </a:pPr>
+            <a:r>
+              <a:rPr sz="1800" b="1" i="0">
+                <a:solidFill>
+                  <a:srgbClr val="000000"/>
+                </a:solidFill>
+                <a:latin typeface="Times New Roman"/>
+                <a:ea typeface="Times New Roman"/>
+                <a:cs typeface="Times New Roman"/>
+              </a:rPr>
+              <a:t>Demo: two Pi sessions in different project folders, sharing one memory</a:t>
+            </a:r>
+          </a:p>
+        </p:txBody>
+      </p:sp>
       <p:pic>
         <p:nvPicPr>
-          <p:cNvPr id="26" name="Picture 25" descr="in the first session the user gives a certificate expiry date, a weekly review time and the dashboard owner, and Pi submits them to memory."/>
+          <p:cNvPr id="27" name="Picture 26" descr="the user gives a certificate expiry date, a weekly review time and the dashboard owner, and Pi saves them to memory."/>
           <p:cNvPicPr>
             <a:picLocks noChangeAspect="1"/>
           </p:cNvPicPr>
@@ -12137,8 +13121,8 @@
         </p:blipFill>
         <p:spPr>
           <a:xfrm>
-            <a:off x="952229" y="1280160"/>
-            <a:ext cx="4601496" cy="3566160"/>
+            <a:off x="1158707" y="1691639"/>
+            <a:ext cx="4188541" cy="3246120"/>
           </a:xfrm>
           <a:prstGeom prst="rect">
             <a:avLst/>
@@ -12152,14 +13136,14 @@
       </p:pic>
       <p:sp>
         <p:nvSpPr>
-          <p:cNvPr id="27" name="TextBox 26"/>
+          <p:cNvPr id="28" name="TextBox 27"/>
           <p:cNvSpPr txBox="1"/>
           <p:nvPr/>
         </p:nvSpPr>
         <p:spPr>
           <a:xfrm>
-            <a:off x="594360" y="4937760"/>
-            <a:ext cx="5317236" cy="1325880"/>
+            <a:off x="594360" y="5029200"/>
+            <a:ext cx="5317236" cy="1234440"/>
           </a:xfrm>
           <a:prstGeom prst="rect">
             <a:avLst/>
@@ -12196,14 +13180,14 @@
                 <a:ea typeface="Times New Roman"/>
                 <a:cs typeface="Times New Roman"/>
               </a:rPr>
-              <a:t>in the first session the user gives a certificate expiry date, a weekly review time and the dashboard owner, and Pi submits them to memory.</a:t>
+              <a:t>the user gives a certificate expiry date, a weekly review time and the dashboard owner, and Pi saves them to memory.</a:t>
             </a:r>
           </a:p>
         </p:txBody>
       </p:sp>
       <p:pic>
         <p:nvPicPr>
-          <p:cNvPr id="28" name="Picture 27" descr="a fresh session in another project folder asks for the same details without repeating them."/>
+          <p:cNvPr id="29" name="Picture 28" descr="a fresh session in another folder asks for the same three details without repeating them."/>
           <p:cNvPicPr>
             <a:picLocks noChangeAspect="1"/>
           </p:cNvPicPr>
@@ -12217,7 +13201,7 @@
         </p:blipFill>
         <p:spPr>
           <a:xfrm>
-            <a:off x="6277356" y="1280160"/>
+            <a:off x="6277356" y="1691639"/>
             <a:ext cx="5317236" cy="1967377"/>
           </a:xfrm>
           <a:prstGeom prst="rect">
@@ -12232,14 +13216,14 @@
       </p:pic>
       <p:sp>
         <p:nvSpPr>
-          <p:cNvPr id="29" name="TextBox 28"/>
+          <p:cNvPr id="30" name="TextBox 29"/>
           <p:cNvSpPr txBox="1"/>
           <p:nvPr/>
         </p:nvSpPr>
         <p:spPr>
           <a:xfrm>
-            <a:off x="6277356" y="4937760"/>
-            <a:ext cx="5317236" cy="1325880"/>
+            <a:off x="6277356" y="5029200"/>
+            <a:ext cx="5317236" cy="1234440"/>
           </a:xfrm>
           <a:prstGeom prst="rect">
             <a:avLst/>
@@ -12276,7 +13260,7 @@
                 <a:ea typeface="Times New Roman"/>
                 <a:cs typeface="Times New Roman"/>
               </a:rPr>
-              <a:t>a fresh session in another project folder asks for the same details without repeating them.</a:t>
+              <a:t>a fresh session in another folder asks for the same three details without repeating them.</a:t>
             </a:r>
           </a:p>
         </p:txBody>
@@ -12289,7 +13273,7 @@
 </p:sld>
 </file>
 
-<file path=ppt/slides/slide23.xml><?xml version="1.0" encoding="utf-8"?>
+<file path=ppt/slides/slide25.xml><?xml version="1.0" encoding="utf-8"?>
 <p:sld xmlns:a="http://schemas.openxmlformats.org/drawingml/2006/main" xmlns:p="http://schemas.openxmlformats.org/presentationml/2006/main" xmlns:r="http://schemas.openxmlformats.org/officeDocument/2006/relationships">
   <p:cSld>
     <p:spTree>
@@ -12408,9 +13392,49 @@
           </a:p>
         </p:txBody>
       </p:sp>
+      <p:sp>
+        <p:nvSpPr>
+          <p:cNvPr id="26" name="TextBox 25"/>
+          <p:cNvSpPr txBox="1"/>
+          <p:nvPr/>
+        </p:nvSpPr>
+        <p:spPr>
+          <a:xfrm>
+            <a:off x="594360" y="1234439"/>
+            <a:ext cx="11000232" cy="365760"/>
+          </a:xfrm>
+          <a:prstGeom prst="rect">
+            <a:avLst/>
+          </a:prstGeom>
+          <a:noFill/>
+        </p:spPr>
+        <p:txBody>
+          <a:bodyPr wrap="square" lIns="45720" rIns="45720" tIns="27432" bIns="27432"/>
+          <a:lstStyle/>
+          <a:p>
+            <a:pPr marL="0" indent="0">
+              <a:spcAft>
+                <a:spcPts val="600"/>
+              </a:spcAft>
+              <a:buNone/>
+            </a:pPr>
+            <a:r>
+              <a:rPr sz="1800" b="1" i="0">
+                <a:solidFill>
+                  <a:srgbClr val="000000"/>
+                </a:solidFill>
+                <a:latin typeface="Times New Roman"/>
+                <a:ea typeface="Times New Roman"/>
+                <a:cs typeface="Times New Roman"/>
+              </a:rPr>
+              <a:t>The new session answers from memory, and the graph keeps the correction</a:t>
+            </a:r>
+          </a:p>
+        </p:txBody>
+      </p:sp>
       <p:pic>
         <p:nvPicPr>
-          <p:cNvPr id="26" name="Picture 25" descr="memory from the first session is added to the context, and the agent answers March 3, Tuesday at 11:00 and Kavya."/>
+          <p:cNvPr id="27" name="Picture 26" descr="the memory from session 1 is added to the prompt, and Pi answers March 3, Tuesday at 11:00 and Kavya."/>
           <p:cNvPicPr>
             <a:picLocks noChangeAspect="1"/>
           </p:cNvPicPr>
@@ -12424,8 +13448,8 @@
         </p:blipFill>
         <p:spPr>
           <a:xfrm>
-            <a:off x="952229" y="1280160"/>
-            <a:ext cx="4601496" cy="3566160"/>
+            <a:off x="1158707" y="1691639"/>
+            <a:ext cx="4188541" cy="3246120"/>
           </a:xfrm>
           <a:prstGeom prst="rect">
             <a:avLst/>
@@ -12439,14 +13463,14 @@
       </p:pic>
       <p:sp>
         <p:nvSpPr>
-          <p:cNvPr id="27" name="TextBox 26"/>
+          <p:cNvPr id="28" name="TextBox 27"/>
           <p:cNvSpPr txBox="1"/>
           <p:nvPr/>
         </p:nvSpPr>
         <p:spPr>
           <a:xfrm>
-            <a:off x="594360" y="4937760"/>
-            <a:ext cx="5317236" cy="1325880"/>
+            <a:off x="594360" y="5029200"/>
+            <a:ext cx="5317236" cy="1234440"/>
           </a:xfrm>
           <a:prstGeom prst="rect">
             <a:avLst/>
@@ -12483,14 +13507,14 @@
                 <a:ea typeface="Times New Roman"/>
                 <a:cs typeface="Times New Roman"/>
               </a:rPr>
-              <a:t>memory from the first session is added to the context, and the agent answers March 3, Tuesday at 11:00 and Kavya.</a:t>
+              <a:t>the memory from session 1 is added to the prompt, and Pi answers March 3, Tuesday at 11:00 and Kavya.</a:t>
             </a:r>
           </a:p>
         </p:txBody>
       </p:sp>
       <p:pic>
         <p:nvPicPr>
-          <p:cNvPr id="28" name="Picture 27" descr="the graph shows Friday 16:30 as the current release freeze, linked to the old Thursday 17:00 value."/>
+          <p:cNvPr id="29" name="Picture 28" descr="the user later moved the release freeze from Thursday 17:00 to Friday 16:30. The graph shows Friday as current, linked to the old value."/>
           <p:cNvPicPr>
             <a:picLocks noChangeAspect="1"/>
           </p:cNvPicPr>
@@ -12504,8 +13528,8 @@
         </p:blipFill>
         <p:spPr>
           <a:xfrm>
-            <a:off x="7072127" y="1280160"/>
-            <a:ext cx="3727693" cy="3566160"/>
+            <a:off x="7239395" y="1691639"/>
+            <a:ext cx="3393156" cy="3246120"/>
           </a:xfrm>
           <a:prstGeom prst="rect">
             <a:avLst/>
@@ -12519,14 +13543,14 @@
       </p:pic>
       <p:sp>
         <p:nvSpPr>
-          <p:cNvPr id="29" name="TextBox 28"/>
+          <p:cNvPr id="30" name="TextBox 29"/>
           <p:cNvSpPr txBox="1"/>
           <p:nvPr/>
         </p:nvSpPr>
         <p:spPr>
           <a:xfrm>
-            <a:off x="6277356" y="4937760"/>
-            <a:ext cx="5317236" cy="1325880"/>
+            <a:off x="6277356" y="5029200"/>
+            <a:ext cx="5317236" cy="1234440"/>
           </a:xfrm>
           <a:prstGeom prst="rect">
             <a:avLst/>
@@ -12563,7 +13587,7 @@
                 <a:ea typeface="Times New Roman"/>
                 <a:cs typeface="Times New Roman"/>
               </a:rPr>
-              <a:t>the graph shows Friday 16:30 as the current release freeze, linked to the old Thursday 17:00 value.</a:t>
+              <a:t>the user later moved the release freeze from Thursday 17:00 to Friday 16:30. The graph shows Friday as current, linked to the old value.</a:t>
             </a:r>
           </a:p>
         </p:txBody>
@@ -12576,7 +13600,7 @@
 </p:sld>
 </file>
 
-<file path=ppt/slides/slide24.xml><?xml version="1.0" encoding="utf-8"?>
+<file path=ppt/slides/slide26.xml><?xml version="1.0" encoding="utf-8"?>
 <p:sld xmlns:a="http://schemas.openxmlformats.org/drawingml/2006/main" xmlns:p="http://schemas.openxmlformats.org/presentationml/2006/main" xmlns:r="http://schemas.openxmlformats.org/officeDocument/2006/relationships">
   <p:cSld>
     <p:spTree>
@@ -12736,7 +13760,7 @@
           <a:p>
             <a:pPr marL="0" indent="0">
               <a:spcAft>
-                <a:spcPts val="1400"/>
+                <a:spcPts val="1200"/>
               </a:spcAft>
               <a:buNone/>
             </a:pPr>
@@ -12768,13 +13792,13 @@
                 <a:ea typeface="Times New Roman"/>
                 <a:cs typeface="Times New Roman"/>
               </a:rPr>
-              <a:t>Updating one assertion left the others alone.</a:t>
+              <a:t>Changing one assertion left the others alone.</a:t>
             </a:r>
           </a:p>
           <a:p>
             <a:pPr marL="0" indent="0">
               <a:spcAft>
-                <a:spcPts val="1400"/>
+                <a:spcPts val="1200"/>
               </a:spcAft>
               <a:buNone/>
             </a:pPr>
@@ -12812,6 +13836,44 @@
           <a:p>
             <a:pPr marL="0" indent="0">
               <a:spcAft>
+                <a:spcPts val="1200"/>
+              </a:spcAft>
+              <a:buNone/>
+            </a:pPr>
+            <a:r>
+              <a:rPr sz="1800" b="0" i="0">
+                <a:solidFill>
+                  <a:srgbClr val="000000"/>
+                </a:solidFill>
+                <a:latin typeface="Times New Roman"/>
+                <a:ea typeface="Times New Roman"/>
+                <a:cs typeface="Times New Roman"/>
+              </a:rPr>
+              <a:t>A database audit found that all 142 stored quotes match their original messages exactly.</a:t>
+            </a:r>
+          </a:p>
+          <a:p>
+            <a:pPr marL="0" indent="0">
+              <a:spcAft>
+                <a:spcPts val="200"/>
+              </a:spcAft>
+              <a:buNone/>
+            </a:pPr>
+            <a:r>
+              <a:rPr sz="1800" b="1" i="0">
+                <a:solidFill>
+                  <a:srgbClr val="000000"/>
+                </a:solidFill>
+                <a:latin typeface="Times New Roman"/>
+                <a:ea typeface="Times New Roman"/>
+                <a:cs typeface="Times New Roman"/>
+              </a:rPr>
+              <a:t>Related assertions were combined.</a:t>
+            </a:r>
+          </a:p>
+          <a:p>
+            <a:pPr marL="0" indent="0">
+              <a:spcAft>
                 <a:spcPts val="0"/>
               </a:spcAft>
               <a:buNone/>
@@ -12825,7 +13887,7 @@
                 <a:ea typeface="Times New Roman"/>
                 <a:cs typeface="Times New Roman"/>
               </a:rPr>
-              <a:t>A database audit found that all 142 stored source quotes match their original text exactly.</a:t>
+              <a:t>The same audit found 8 inferences, each built from at least two assertions.</a:t>
             </a:r>
           </a:p>
         </p:txBody>
@@ -12838,7 +13900,7 @@
 </p:sld>
 </file>
 
-<file path=ppt/slides/slide25.xml><?xml version="1.0" encoding="utf-8"?>
+<file path=ppt/slides/slide27.xml><?xml version="1.0" encoding="utf-8"?>
 <p:sld xmlns:a="http://schemas.openxmlformats.org/drawingml/2006/main" xmlns:p="http://schemas.openxmlformats.org/presentationml/2006/main" xmlns:r="http://schemas.openxmlformats.org/officeDocument/2006/relationships">
   <p:cSld>
     <p:spTree>
@@ -12965,268 +14027,6 @@
         </p:nvSpPr>
         <p:spPr>
           <a:xfrm>
-            <a:off x="594360" y="1280160"/>
-            <a:ext cx="11000232" cy="4983480"/>
-          </a:xfrm>
-          <a:prstGeom prst="rect">
-            <a:avLst/>
-          </a:prstGeom>
-          <a:noFill/>
-        </p:spPr>
-        <p:txBody>
-          <a:bodyPr wrap="square" lIns="45720" rIns="45720" tIns="27432" bIns="27432"/>
-          <a:lstStyle/>
-          <a:p>
-            <a:pPr marL="0" indent="0">
-              <a:spcAft>
-                <a:spcPts val="200"/>
-              </a:spcAft>
-              <a:buNone/>
-            </a:pPr>
-            <a:r>
-              <a:rPr sz="1800" b="1" i="0">
-                <a:solidFill>
-                  <a:srgbClr val="000000"/>
-                </a:solidFill>
-                <a:latin typeface="Times New Roman"/>
-                <a:ea typeface="Times New Roman"/>
-                <a:cs typeface="Times New Roman"/>
-              </a:rPr>
-              <a:t>Related assertions were combined into inferences.</a:t>
-            </a:r>
-          </a:p>
-          <a:p>
-            <a:pPr marL="0" indent="0">
-              <a:spcAft>
-                <a:spcPts val="1400"/>
-              </a:spcAft>
-              <a:buNone/>
-            </a:pPr>
-            <a:r>
-              <a:rPr sz="1800" b="0" i="0">
-                <a:solidFill>
-                  <a:srgbClr val="000000"/>
-                </a:solidFill>
-                <a:latin typeface="Times New Roman"/>
-                <a:ea typeface="Times New Roman"/>
-                <a:cs typeface="Times New Roman"/>
-              </a:rPr>
-              <a:t>The same audit found 8 inferences, each linked to at least two supporting assertions.</a:t>
-            </a:r>
-          </a:p>
-          <a:p>
-            <a:pPr marL="0" indent="0">
-              <a:spcAft>
-                <a:spcPts val="200"/>
-              </a:spcAft>
-              <a:buNone/>
-            </a:pPr>
-            <a:r>
-              <a:rPr sz="1800" b="1" i="0">
-                <a:solidFill>
-                  <a:srgbClr val="000000"/>
-                </a:solidFill>
-                <a:latin typeface="Times New Roman"/>
-                <a:ea typeface="Times New Roman"/>
-                <a:cs typeface="Times New Roman"/>
-              </a:rPr>
-              <a:t>Dates are still a weak point.</a:t>
-            </a:r>
-          </a:p>
-          <a:p>
-            <a:pPr marL="0" indent="0">
-              <a:spcAft>
-                <a:spcPts val="1400"/>
-              </a:spcAft>
-              <a:buNone/>
-            </a:pPr>
-            <a:r>
-              <a:rPr sz="1800" b="0" i="0">
-                <a:solidFill>
-                  <a:srgbClr val="000000"/>
-                </a:solidFill>
-                <a:latin typeface="Times New Roman"/>
-                <a:ea typeface="Times New Roman"/>
-                <a:cs typeface="Times New Roman"/>
-              </a:rPr>
-              <a:t>Some relative dates were read wrongly. "Tomorrow" in a message sent on June 1 was stored as June 3.</a:t>
-            </a:r>
-          </a:p>
-          <a:p>
-            <a:pPr marL="0" indent="0">
-              <a:spcAft>
-                <a:spcPts val="200"/>
-              </a:spcAft>
-              <a:buNone/>
-            </a:pPr>
-            <a:r>
-              <a:rPr sz="1800" b="1" i="0">
-                <a:solidFill>
-                  <a:srgbClr val="000000"/>
-                </a:solidFill>
-                <a:latin typeface="Times New Roman"/>
-                <a:ea typeface="Times New Roman"/>
-                <a:cs typeface="Times New Roman"/>
-              </a:rPr>
-              <a:t>The first model was too small.</a:t>
-            </a:r>
-          </a:p>
-          <a:p>
-            <a:pPr marL="0" indent="0">
-              <a:spcAft>
-                <a:spcPts val="0"/>
-              </a:spcAft>
-              <a:buNone/>
-            </a:pPr>
-            <a:r>
-              <a:rPr sz="1800" b="0" i="0">
-                <a:solidFill>
-                  <a:srgbClr val="000000"/>
-                </a:solidFill>
-                <a:latin typeface="Times New Roman"/>
-                <a:ea typeface="Times New Roman"/>
-                <a:cs typeface="Times New Roman"/>
-              </a:rPr>
-              <a:t>Qwen3-1.7B did well on synthetic examples, but only 18 of 33 natural-conversation windows passed validation. Most failures were wrong source attribution, mismatched quotes and invalid IDs, so we widened the data, tightened the output format and moved to Qwen3-4B.</a:t>
-            </a:r>
-          </a:p>
-        </p:txBody>
-      </p:sp>
-    </p:spTree>
-  </p:cSld>
-  <p:clrMapOvr>
-    <a:masterClrMapping/>
-  </p:clrMapOvr>
-</p:sld>
-</file>
-
-<file path=ppt/slides/slide26.xml><?xml version="1.0" encoding="utf-8"?>
-<p:sld xmlns:a="http://schemas.openxmlformats.org/drawingml/2006/main" xmlns:p="http://schemas.openxmlformats.org/presentationml/2006/main" xmlns:r="http://schemas.openxmlformats.org/officeDocument/2006/relationships">
-  <p:cSld>
-    <p:spTree>
-      <p:nvGrpSpPr>
-        <p:cNvPr id="1" name=""/>
-        <p:cNvGrpSpPr/>
-        <p:nvPr/>
-      </p:nvGrpSpPr>
-      <p:grpSpPr/>
-      <p:sp>
-        <p:nvSpPr>
-          <p:cNvPr id="2" name="Title 1"/>
-          <p:cNvSpPr>
-            <a:spLocks noGrp="1"/>
-          </p:cNvSpPr>
-          <p:nvPr>
-            <p:ph type="title"/>
-          </p:nvPr>
-        </p:nvSpPr>
-        <p:spPr/>
-        <p:txBody>
-          <a:bodyPr/>
-          <a:lstStyle/>
-          <a:p>
-            <a:r>
-              <a:rPr sz="2400" b="1" i="0">
-                <a:solidFill>
-                  <a:srgbClr val="000000"/>
-                </a:solidFill>
-                <a:latin typeface="Times New Roman"/>
-                <a:ea typeface="Times New Roman"/>
-                <a:cs typeface="Times New Roman"/>
-              </a:rPr>
-              <a:t>RESULTS AND OBSERVATIONS (3/3)</a:t>
-            </a:r>
-          </a:p>
-        </p:txBody>
-      </p:sp>
-      <p:sp>
-        <p:nvSpPr>
-          <p:cNvPr id="25" name="PlaceHolder 2"/>
-          <p:cNvSpPr>
-            <a:spLocks noGrp="1"/>
-          </p:cNvSpPr>
-          <p:nvPr>
-            <p:ph type="sldNum" idx="5"/>
-          </p:nvPr>
-        </p:nvSpPr>
-        <p:spPr>
-          <a:xfrm>
-            <a:off x="10865880" y="384120"/>
-            <a:ext cx="730440" cy="456120"/>
-          </a:xfrm>
-          <a:prstGeom prst="rect">
-            <a:avLst/>
-          </a:prstGeom>
-          <a:noFill/>
-          <a:ln w="0">
-            <a:noFill/>
-          </a:ln>
-        </p:spPr>
-        <p:txBody>
-          <a:bodyPr lIns="90000" tIns="45000" rIns="90000" bIns="45000" anchor="t">
-            <a:noAutofit/>
-          </a:bodyPr>
-          <a:lstStyle>
-            <a:lvl1pPr indent="0" algn="r" defTabSz="914400">
-              <a:lnSpc>
-                <a:spcPct val="100000"/>
-              </a:lnSpc>
-              <a:buNone/>
-              <a:tabLst>
-                <a:tab pos="0" algn="l"/>
-              </a:tabLst>
-              <a:defRPr lang="en-US" sz="1800" b="0" u="none" strike="noStrike">
-                <a:solidFill>
-                  <a:srgbClr val="000000"/>
-                </a:solidFill>
-                <a:effectLst/>
-                <a:uFillTx/>
-                <a:latin typeface="Times New Roman"/>
-                <a:ea typeface="Times New Roman"/>
-              </a:defRPr>
-            </a:lvl1pPr>
-          </a:lstStyle>
-          <a:p>
-            <a:pPr indent="0" algn="r" defTabSz="914400">
-              <a:lnSpc>
-                <a:spcPct val="100000"/>
-              </a:lnSpc>
-              <a:buNone/>
-              <a:tabLst>
-                <a:tab pos="0" algn="l"/>
-              </a:tabLst>
-            </a:pPr>
-            <a:fld id="{9873986A-C957-40DB-B7BB-3EB1CE963720}" type="slidenum">
-              <a:rPr lang="en-US" sz="1800" b="0" u="none" strike="noStrike">
-                <a:solidFill>
-                  <a:srgbClr val="000000"/>
-                </a:solidFill>
-                <a:effectLst/>
-                <a:uFillTx/>
-                <a:latin typeface="Times New Roman"/>
-                <a:ea typeface="Times New Roman"/>
-              </a:rPr>
-              <a:t>&lt;number&gt;</a:t>
-            </a:fld>
-            <a:endParaRPr lang="en-US" sz="1600" b="0" u="none" strike="noStrike">
-              <a:solidFill>
-                <a:srgbClr val="000000"/>
-              </a:solidFill>
-              <a:effectLst/>
-              <a:uFillTx/>
-              <a:latin typeface="Times New Roman"/>
-            </a:endParaRPr>
-          </a:p>
-        </p:txBody>
-      </p:sp>
-      <p:sp>
-        <p:nvSpPr>
-          <p:cNvPr id="26" name="TextBox 25"/>
-          <p:cNvSpPr txBox="1"/>
-          <p:nvPr/>
-        </p:nvSpPr>
-        <p:spPr>
-          <a:xfrm>
             <a:off x="594360" y="1234439"/>
             <a:ext cx="11000232" cy="365760"/>
           </a:xfrm>
@@ -13254,7 +14054,7 @@
                 <a:ea typeface="Times New Roman"/>
                 <a:cs typeface="Times New Roman"/>
               </a:rPr>
-              <a:t>Qwen3-4B before and after fine-tuning, on 64 unseen tasks across 16 domains and 16 external samples</a:t>
+              <a:t>Base Qwen3-4B (before) and our fine-tuned model (after), on 64 held-out tasks and 16 LoCoMo samples</a:t>
             </a:r>
           </a:p>
         </p:txBody>
@@ -14631,7 +15431,7 @@
                 <a:ea typeface="Times New Roman"/>
                 <a:cs typeface="Times New Roman"/>
               </a:rPr>
-              <a:t>Combining and answering improved a lot, but extraction recovered fewer assertions. A correct format also does not guarantee a correct meaning.</a:t>
+              <a:t>Combining went from 1/16 to 13/16 and answering from 10/16 to 15/16, but extraction now misses more assertions.</a:t>
             </a:r>
           </a:p>
         </p:txBody>
@@ -14644,7 +15444,269 @@
 </p:sld>
 </file>
 
-<file path=ppt/slides/slide27.xml><?xml version="1.0" encoding="utf-8"?>
+<file path=ppt/slides/slide28.xml><?xml version="1.0" encoding="utf-8"?>
+<p:sld xmlns:a="http://schemas.openxmlformats.org/drawingml/2006/main" xmlns:p="http://schemas.openxmlformats.org/presentationml/2006/main" xmlns:r="http://schemas.openxmlformats.org/officeDocument/2006/relationships">
+  <p:cSld>
+    <p:spTree>
+      <p:nvGrpSpPr>
+        <p:cNvPr id="1" name=""/>
+        <p:cNvGrpSpPr/>
+        <p:nvPr/>
+      </p:nvGrpSpPr>
+      <p:grpSpPr/>
+      <p:sp>
+        <p:nvSpPr>
+          <p:cNvPr id="2" name="Title 1"/>
+          <p:cNvSpPr>
+            <a:spLocks noGrp="1"/>
+          </p:cNvSpPr>
+          <p:nvPr>
+            <p:ph type="title"/>
+          </p:nvPr>
+        </p:nvSpPr>
+        <p:spPr/>
+        <p:txBody>
+          <a:bodyPr/>
+          <a:lstStyle/>
+          <a:p>
+            <a:r>
+              <a:rPr sz="2400" b="1" i="0">
+                <a:solidFill>
+                  <a:srgbClr val="000000"/>
+                </a:solidFill>
+                <a:latin typeface="Times New Roman"/>
+                <a:ea typeface="Times New Roman"/>
+                <a:cs typeface="Times New Roman"/>
+              </a:rPr>
+              <a:t>RESULTS AND OBSERVATIONS (3/3)</a:t>
+            </a:r>
+          </a:p>
+        </p:txBody>
+      </p:sp>
+      <p:sp>
+        <p:nvSpPr>
+          <p:cNvPr id="25" name="PlaceHolder 2"/>
+          <p:cNvSpPr>
+            <a:spLocks noGrp="1"/>
+          </p:cNvSpPr>
+          <p:nvPr>
+            <p:ph type="sldNum" idx="5"/>
+          </p:nvPr>
+        </p:nvSpPr>
+        <p:spPr>
+          <a:xfrm>
+            <a:off x="10865880" y="384120"/>
+            <a:ext cx="730440" cy="456120"/>
+          </a:xfrm>
+          <a:prstGeom prst="rect">
+            <a:avLst/>
+          </a:prstGeom>
+          <a:noFill/>
+          <a:ln w="0">
+            <a:noFill/>
+          </a:ln>
+        </p:spPr>
+        <p:txBody>
+          <a:bodyPr lIns="90000" tIns="45000" rIns="90000" bIns="45000" anchor="t">
+            <a:noAutofit/>
+          </a:bodyPr>
+          <a:lstStyle>
+            <a:lvl1pPr indent="0" algn="r" defTabSz="914400">
+              <a:lnSpc>
+                <a:spcPct val="100000"/>
+              </a:lnSpc>
+              <a:buNone/>
+              <a:tabLst>
+                <a:tab pos="0" algn="l"/>
+              </a:tabLst>
+              <a:defRPr lang="en-US" sz="1800" b="0" u="none" strike="noStrike">
+                <a:solidFill>
+                  <a:srgbClr val="000000"/>
+                </a:solidFill>
+                <a:effectLst/>
+                <a:uFillTx/>
+                <a:latin typeface="Times New Roman"/>
+                <a:ea typeface="Times New Roman"/>
+              </a:defRPr>
+            </a:lvl1pPr>
+          </a:lstStyle>
+          <a:p>
+            <a:pPr indent="0" algn="r" defTabSz="914400">
+              <a:lnSpc>
+                <a:spcPct val="100000"/>
+              </a:lnSpc>
+              <a:buNone/>
+              <a:tabLst>
+                <a:tab pos="0" algn="l"/>
+              </a:tabLst>
+            </a:pPr>
+            <a:fld id="{9873986A-C957-40DB-B7BB-3EB1CE963720}" type="slidenum">
+              <a:rPr lang="en-US" sz="1800" b="0" u="none" strike="noStrike">
+                <a:solidFill>
+                  <a:srgbClr val="000000"/>
+                </a:solidFill>
+                <a:effectLst/>
+                <a:uFillTx/>
+                <a:latin typeface="Times New Roman"/>
+                <a:ea typeface="Times New Roman"/>
+              </a:rPr>
+              <a:t>&lt;number&gt;</a:t>
+            </a:fld>
+            <a:endParaRPr lang="en-US" sz="1600" b="0" u="none" strike="noStrike">
+              <a:solidFill>
+                <a:srgbClr val="000000"/>
+              </a:solidFill>
+              <a:effectLst/>
+              <a:uFillTx/>
+              <a:latin typeface="Times New Roman"/>
+            </a:endParaRPr>
+          </a:p>
+        </p:txBody>
+      </p:sp>
+      <p:sp>
+        <p:nvSpPr>
+          <p:cNvPr id="26" name="TextBox 25"/>
+          <p:cNvSpPr txBox="1"/>
+          <p:nvPr/>
+        </p:nvSpPr>
+        <p:spPr>
+          <a:xfrm>
+            <a:off x="594360" y="1280160"/>
+            <a:ext cx="11000232" cy="4983480"/>
+          </a:xfrm>
+          <a:prstGeom prst="rect">
+            <a:avLst/>
+          </a:prstGeom>
+          <a:noFill/>
+        </p:spPr>
+        <p:txBody>
+          <a:bodyPr wrap="square" lIns="45720" rIns="45720" tIns="27432" bIns="27432"/>
+          <a:lstStyle/>
+          <a:p>
+            <a:pPr marL="0" indent="0">
+              <a:spcAft>
+                <a:spcPts val="200"/>
+              </a:spcAft>
+              <a:buNone/>
+            </a:pPr>
+            <a:r>
+              <a:rPr sz="1800" b="1" i="0">
+                <a:solidFill>
+                  <a:srgbClr val="000000"/>
+                </a:solidFill>
+                <a:latin typeface="Times New Roman"/>
+                <a:ea typeface="Times New Roman"/>
+                <a:cs typeface="Times New Roman"/>
+              </a:rPr>
+              <a:t>The full benchmark has not been run yet.</a:t>
+            </a:r>
+          </a:p>
+          <a:p>
+            <a:pPr marL="0" indent="0">
+              <a:spcAft>
+                <a:spcPts val="1200"/>
+              </a:spcAft>
+              <a:buNone/>
+            </a:pPr>
+            <a:r>
+              <a:rPr sz="1800" b="0" i="0">
+                <a:solidFill>
+                  <a:srgbClr val="000000"/>
+                </a:solidFill>
+                <a:latin typeface="Times New Roman"/>
+                <a:ea typeface="Times New Roman"/>
+                <a:cs typeface="Times New Roman"/>
+              </a:rPr>
+              <a:t>Until LongMemEval-S is done, we cannot claim the memory improves answers over long histories.</a:t>
+            </a:r>
+          </a:p>
+          <a:p>
+            <a:pPr marL="0" indent="0">
+              <a:spcAft>
+                <a:spcPts val="200"/>
+              </a:spcAft>
+              <a:buNone/>
+            </a:pPr>
+            <a:r>
+              <a:rPr sz="1800" b="1" i="0">
+                <a:solidFill>
+                  <a:srgbClr val="000000"/>
+                </a:solidFill>
+                <a:latin typeface="Times New Roman"/>
+                <a:ea typeface="Times New Roman"/>
+                <a:cs typeface="Times New Roman"/>
+              </a:rPr>
+              <a:t>Dates are still a weak point.</a:t>
+            </a:r>
+          </a:p>
+          <a:p>
+            <a:pPr marL="0" indent="0">
+              <a:spcAft>
+                <a:spcPts val="1200"/>
+              </a:spcAft>
+              <a:buNone/>
+            </a:pPr>
+            <a:r>
+              <a:rPr sz="1800" b="0" i="0">
+                <a:solidFill>
+                  <a:srgbClr val="000000"/>
+                </a:solidFill>
+                <a:latin typeface="Times New Roman"/>
+                <a:ea typeface="Times New Roman"/>
+                <a:cs typeface="Times New Roman"/>
+              </a:rPr>
+              <a:t>Some relative dates were read wrongly: "tomorrow" in a message sent on June 1 was stored as June 3.</a:t>
+            </a:r>
+          </a:p>
+          <a:p>
+            <a:pPr marL="0" indent="0">
+              <a:spcAft>
+                <a:spcPts val="200"/>
+              </a:spcAft>
+              <a:buNone/>
+            </a:pPr>
+            <a:r>
+              <a:rPr sz="1800" b="1" i="0">
+                <a:solidFill>
+                  <a:srgbClr val="000000"/>
+                </a:solidFill>
+                <a:latin typeface="Times New Roman"/>
+                <a:ea typeface="Times New Roman"/>
+                <a:cs typeface="Times New Roman"/>
+              </a:rPr>
+              <a:t>The first model was too small.</a:t>
+            </a:r>
+          </a:p>
+          <a:p>
+            <a:pPr marL="0" indent="0">
+              <a:spcAft>
+                <a:spcPts val="0"/>
+              </a:spcAft>
+              <a:buNone/>
+            </a:pPr>
+            <a:r>
+              <a:rPr sz="1800" b="0" i="0">
+                <a:solidFill>
+                  <a:srgbClr val="000000"/>
+                </a:solidFill>
+                <a:latin typeface="Times New Roman"/>
+                <a:ea typeface="Times New Roman"/>
+                <a:cs typeface="Times New Roman"/>
+              </a:rPr>
+              <a:t>Our first choice, Qwen3-1.7B, did well on synthetic examples, but only 18 of 33 real-style conversation segments passed validation. Most failures were wrong sources, quotes that did not match and invalid IDs. So we widened the data, tightened the output format and moved to Qwen3-4B.</a:t>
+            </a:r>
+          </a:p>
+        </p:txBody>
+      </p:sp>
+    </p:spTree>
+  </p:cSld>
+  <p:clrMapOvr>
+    <a:masterClrMapping/>
+  </p:clrMapOvr>
+</p:sld>
+</file>
+
+<file path=ppt/slides/slide29.xml><?xml version="1.0" encoding="utf-8"?>
 <p:sld xmlns:a="http://schemas.openxmlformats.org/drawingml/2006/main" xmlns:p="http://schemas.openxmlformats.org/presentationml/2006/main" xmlns:r="http://schemas.openxmlformats.org/officeDocument/2006/relationships">
   <p:cSld>
     <p:spTree>
@@ -15078,7 +16140,7 @@
                           <a:ea typeface="Times New Roman"/>
                           <a:cs typeface="Times New Roman"/>
                         </a:rPr>
-                        <a:t>Captures Pi messages and tool results; handles duplicates, offline queueing and retries. Covered by Pi integration tests.</a:t>
+                        <a:t>Saves Pi messages and tool results; handles duplicates, offline queueing and retries. Covered by Pi integration tests.</a:t>
                       </a:r>
                     </a:p>
                   </a:txBody>
@@ -15132,7 +16194,7 @@
                           <a:ea typeface="Times New Roman"/>
                           <a:cs typeface="Times New Roman"/>
                         </a:rPr>
-                        <a:t>API access control; tested backup and restore.</a:t>
+                        <a:t>Access control for the API; tested backup and restore.</a:t>
                       </a:r>
                     </a:p>
                   </a:txBody>
@@ -15296,7 +16358,7 @@
                           <a:ea typeface="Times New Roman"/>
                           <a:cs typeface="Times New Roman"/>
                         </a:rPr>
-                        <a:t>Extracts assertions with quotes, reviews corrections, builds embeddings and inferences. Extraction and review tests.</a:t>
+                        <a:t>Extracts assertions with quotes, reviews corrections, builds vectors and inferences. Covered by tests.</a:t>
                       </a:r>
                     </a:p>
                   </a:txBody>
@@ -15350,7 +16412,7 @@
                           <a:ea typeface="Times New Roman"/>
                           <a:cs typeface="Times New Roman"/>
                         </a:rPr>
-                        <a:t>Better coverage, dates and source attribution; measure the review step.</a:t>
+                        <a:t>Fewer missed assertions, better dates and sources; measure the review step.</a:t>
                       </a:r>
                     </a:p>
                   </a:txBody>
@@ -15514,7 +16576,7 @@
                           <a:ea typeface="Times New Roman"/>
                           <a:cs typeface="Times New Roman"/>
                         </a:rPr>
-                        <a:t>Entity resolution, corrections, conflicts, history, stale inferences and the Neo4j copy. Integration tests for each.</a:t>
+                        <a:t>Matches subjects, applies corrections, keeps history, marks stale inferences, updates Neo4j. Tests for each.</a:t>
                       </a:r>
                     </a:p>
                   </a:txBody>
@@ -15568,7 +16630,7 @@
                           <a:ea typeface="Times New Roman"/>
                           <a:cs typeface="Times New Roman"/>
                         </a:rPr>
-                        <a:t>Ambiguous updates, aliases and long correction chains.</a:t>
+                        <a:t>Unclear updates, aliases and long chains of corrections.</a:t>
                       </a:r>
                     </a:p>
                   </a:txBody>
@@ -15786,7 +16848,7 @@
                           <a:ea typeface="Times New Roman"/>
                           <a:cs typeface="Times New Roman"/>
                         </a:rPr>
-                        <a:t>Full LongMemEval-S run, ablations, quality and latency report.</a:t>
+                        <a:t>Full LongMemEval-S run, with and without graph search and inferences.</a:t>
                       </a:r>
                     </a:p>
                   </a:txBody>
@@ -15950,7 +17012,7 @@
                           <a:ea typeface="Times New Roman"/>
                           <a:cs typeface="Times New Roman"/>
                         </a:rPr>
-                        <a:t>Qwen3-4B fine-tuned with QLoRA, exported to Q8 GGUF and served by Ollama. Tested on 64 internal and 16 external cases.</a:t>
+                        <a:t>Qwen3-4B fine-tuned with QLoRA and served by Ollama. Tested on 64 internal and 16 external cases.</a:t>
                       </a:r>
                     </a:p>
                   </a:txBody>
@@ -16097,1061 +17159,6 @@
           </a:graphicData>
         </a:graphic>
       </p:graphicFrame>
-    </p:spTree>
-  </p:cSld>
-  <p:clrMapOvr>
-    <a:masterClrMapping/>
-  </p:clrMapOvr>
-</p:sld>
-</file>
-
-<file path=ppt/slides/slide28.xml><?xml version="1.0" encoding="utf-8"?>
-<p:sld xmlns:a="http://schemas.openxmlformats.org/drawingml/2006/main" xmlns:p="http://schemas.openxmlformats.org/presentationml/2006/main" xmlns:r="http://schemas.openxmlformats.org/officeDocument/2006/relationships">
-  <p:cSld>
-    <p:spTree>
-      <p:nvGrpSpPr>
-        <p:cNvPr id="1" name=""/>
-        <p:cNvGrpSpPr/>
-        <p:nvPr/>
-      </p:nvGrpSpPr>
-      <p:grpSpPr/>
-      <p:sp>
-        <p:nvSpPr>
-          <p:cNvPr id="2" name="Title 1"/>
-          <p:cNvSpPr>
-            <a:spLocks noGrp="1"/>
-          </p:cNvSpPr>
-          <p:nvPr>
-            <p:ph type="title"/>
-          </p:nvPr>
-        </p:nvSpPr>
-        <p:spPr/>
-        <p:txBody>
-          <a:bodyPr/>
-          <a:lstStyle/>
-          <a:p>
-            <a:r>
-              <a:rPr sz="2400" b="1" i="0">
-                <a:solidFill>
-                  <a:srgbClr val="000000"/>
-                </a:solidFill>
-                <a:latin typeface="Times New Roman"/>
-                <a:ea typeface="Times New Roman"/>
-                <a:cs typeface="Times New Roman"/>
-              </a:rPr>
-              <a:t>REFERENCES (1/2)</a:t>
-            </a:r>
-          </a:p>
-        </p:txBody>
-      </p:sp>
-      <p:sp>
-        <p:nvSpPr>
-          <p:cNvPr id="25" name="PlaceHolder 2"/>
-          <p:cNvSpPr>
-            <a:spLocks noGrp="1"/>
-          </p:cNvSpPr>
-          <p:nvPr>
-            <p:ph type="sldNum" idx="5"/>
-          </p:nvPr>
-        </p:nvSpPr>
-        <p:spPr>
-          <a:xfrm>
-            <a:off x="10865880" y="384120"/>
-            <a:ext cx="730440" cy="456120"/>
-          </a:xfrm>
-          <a:prstGeom prst="rect">
-            <a:avLst/>
-          </a:prstGeom>
-          <a:noFill/>
-          <a:ln w="0">
-            <a:noFill/>
-          </a:ln>
-        </p:spPr>
-        <p:txBody>
-          <a:bodyPr lIns="90000" tIns="45000" rIns="90000" bIns="45000" anchor="t">
-            <a:noAutofit/>
-          </a:bodyPr>
-          <a:lstStyle>
-            <a:lvl1pPr indent="0" algn="r" defTabSz="914400">
-              <a:lnSpc>
-                <a:spcPct val="100000"/>
-              </a:lnSpc>
-              <a:buNone/>
-              <a:tabLst>
-                <a:tab pos="0" algn="l"/>
-              </a:tabLst>
-              <a:defRPr lang="en-US" sz="1800" b="0" u="none" strike="noStrike">
-                <a:solidFill>
-                  <a:srgbClr val="000000"/>
-                </a:solidFill>
-                <a:effectLst/>
-                <a:uFillTx/>
-                <a:latin typeface="Times New Roman"/>
-                <a:ea typeface="Times New Roman"/>
-              </a:defRPr>
-            </a:lvl1pPr>
-          </a:lstStyle>
-          <a:p>
-            <a:pPr indent="0" algn="r" defTabSz="914400">
-              <a:lnSpc>
-                <a:spcPct val="100000"/>
-              </a:lnSpc>
-              <a:buNone/>
-              <a:tabLst>
-                <a:tab pos="0" algn="l"/>
-              </a:tabLst>
-            </a:pPr>
-            <a:fld id="{9873986A-C957-40DB-B7BB-3EB1CE963720}" type="slidenum">
-              <a:rPr lang="en-US" sz="1800" b="0" u="none" strike="noStrike">
-                <a:solidFill>
-                  <a:srgbClr val="000000"/>
-                </a:solidFill>
-                <a:effectLst/>
-                <a:uFillTx/>
-                <a:latin typeface="Times New Roman"/>
-                <a:ea typeface="Times New Roman"/>
-              </a:rPr>
-              <a:t>&lt;number&gt;</a:t>
-            </a:fld>
-            <a:endParaRPr lang="en-US" sz="1600" b="0" u="none" strike="noStrike">
-              <a:solidFill>
-                <a:srgbClr val="000000"/>
-              </a:solidFill>
-              <a:effectLst/>
-              <a:uFillTx/>
-              <a:latin typeface="Times New Roman"/>
-            </a:endParaRPr>
-          </a:p>
-        </p:txBody>
-      </p:sp>
-      <p:sp>
-        <p:nvSpPr>
-          <p:cNvPr id="26" name="TextBox 25"/>
-          <p:cNvSpPr txBox="1"/>
-          <p:nvPr/>
-        </p:nvSpPr>
-        <p:spPr>
-          <a:xfrm>
-            <a:off x="594360" y="1280160"/>
-            <a:ext cx="11000232" cy="4983480"/>
-          </a:xfrm>
-          <a:prstGeom prst="rect">
-            <a:avLst/>
-          </a:prstGeom>
-          <a:noFill/>
-        </p:spPr>
-        <p:txBody>
-          <a:bodyPr wrap="square" lIns="45720" rIns="45720" tIns="27432" bIns="27432"/>
-          <a:lstStyle/>
-          <a:p>
-            <a:pPr marL="548640" indent="-548640">
-              <a:spcAft>
-                <a:spcPts val="300"/>
-              </a:spcAft>
-              <a:buNone/>
-              <a:tabLst>
-                <a:tab pos="548640" algn="l"/>
-              </a:tabLst>
-            </a:pPr>
-            <a:r>
-              <a:rPr sz="1800" b="0" i="0">
-                <a:solidFill>
-                  <a:srgbClr val="000000"/>
-                </a:solidFill>
-                <a:latin typeface="Times New Roman"/>
-                <a:ea typeface="Times New Roman"/>
-                <a:cs typeface="Times New Roman"/>
-              </a:rPr>
-              <a:t>[1]	</a:t>
-            </a:r>
-            <a:r>
-              <a:rPr sz="1800" b="0" i="0">
-                <a:solidFill>
-                  <a:srgbClr val="000000"/>
-                </a:solidFill>
-                <a:latin typeface="Times New Roman"/>
-                <a:ea typeface="Times New Roman"/>
-                <a:cs typeface="Times New Roman"/>
-              </a:rPr>
-              <a:t>N. F. Liu et al., "Lost in the middle: How language models use long contexts," </a:t>
-            </a:r>
-            <a:r>
-              <a:rPr sz="1800" b="0" i="1">
-                <a:solidFill>
-                  <a:srgbClr val="000000"/>
-                </a:solidFill>
-                <a:latin typeface="Times New Roman"/>
-                <a:ea typeface="Times New Roman"/>
-                <a:cs typeface="Times New Roman"/>
-              </a:rPr>
-              <a:t>Trans. Assoc. Comput. Linguist.</a:t>
-            </a:r>
-            <a:r>
-              <a:rPr sz="1800" b="0" i="0">
-                <a:solidFill>
-                  <a:srgbClr val="000000"/>
-                </a:solidFill>
-                <a:latin typeface="Times New Roman"/>
-                <a:ea typeface="Times New Roman"/>
-                <a:cs typeface="Times New Roman"/>
-              </a:rPr>
-              <a:t>, vol. 12, pp. 157–173, 2024.</a:t>
-            </a:r>
-          </a:p>
-          <a:p>
-            <a:pPr marL="548640" indent="-548640">
-              <a:spcAft>
-                <a:spcPts val="300"/>
-              </a:spcAft>
-              <a:buNone/>
-              <a:tabLst>
-                <a:tab pos="548640" algn="l"/>
-              </a:tabLst>
-            </a:pPr>
-            <a:r>
-              <a:rPr sz="1800" b="0" i="0">
-                <a:solidFill>
-                  <a:srgbClr val="000000"/>
-                </a:solidFill>
-                <a:latin typeface="Times New Roman"/>
-                <a:ea typeface="Times New Roman"/>
-                <a:cs typeface="Times New Roman"/>
-              </a:rPr>
-              <a:t>[2]	</a:t>
-            </a:r>
-            <a:r>
-              <a:rPr sz="1800" b="0" i="0">
-                <a:solidFill>
-                  <a:srgbClr val="000000"/>
-                </a:solidFill>
-                <a:latin typeface="Times New Roman"/>
-                <a:ea typeface="Times New Roman"/>
-                <a:cs typeface="Times New Roman"/>
-              </a:rPr>
-              <a:t>D. Wu, H. Wang, W. Yu, Y. Zhang, K.-W. Chang, and D. Yu, "LongMemEval: Benchmarking chat assistants on long-term interactive memory," in </a:t>
-            </a:r>
-            <a:r>
-              <a:rPr sz="1800" b="0" i="1">
-                <a:solidFill>
-                  <a:srgbClr val="000000"/>
-                </a:solidFill>
-                <a:latin typeface="Times New Roman"/>
-                <a:ea typeface="Times New Roman"/>
-                <a:cs typeface="Times New Roman"/>
-              </a:rPr>
-              <a:t>Proc. Int. Conf. Learn. Represent. (ICLR)</a:t>
-            </a:r>
-            <a:r>
-              <a:rPr sz="1800" b="0" i="0">
-                <a:solidFill>
-                  <a:srgbClr val="000000"/>
-                </a:solidFill>
-                <a:latin typeface="Times New Roman"/>
-                <a:ea typeface="Times New Roman"/>
-                <a:cs typeface="Times New Roman"/>
-              </a:rPr>
-              <a:t>, 2025, pp. 86809–86836.</a:t>
-            </a:r>
-          </a:p>
-          <a:p>
-            <a:pPr marL="548640" indent="-548640">
-              <a:spcAft>
-                <a:spcPts val="300"/>
-              </a:spcAft>
-              <a:buNone/>
-              <a:tabLst>
-                <a:tab pos="548640" algn="l"/>
-              </a:tabLst>
-            </a:pPr>
-            <a:r>
-              <a:rPr sz="1800" b="0" i="0">
-                <a:solidFill>
-                  <a:srgbClr val="000000"/>
-                </a:solidFill>
-                <a:latin typeface="Times New Roman"/>
-                <a:ea typeface="Times New Roman"/>
-                <a:cs typeface="Times New Roman"/>
-              </a:rPr>
-              <a:t>[3]	</a:t>
-            </a:r>
-            <a:r>
-              <a:rPr sz="1800" b="0" i="0">
-                <a:solidFill>
-                  <a:srgbClr val="000000"/>
-                </a:solidFill>
-                <a:latin typeface="Times New Roman"/>
-                <a:ea typeface="Times New Roman"/>
-                <a:cs typeface="Times New Roman"/>
-              </a:rPr>
-              <a:t>C. Packer et al., "MemGPT: Towards LLMs as operating systems," 2023, </a:t>
-            </a:r>
-            <a:r>
-              <a:rPr sz="1800" b="0" i="1">
-                <a:solidFill>
-                  <a:srgbClr val="000000"/>
-                </a:solidFill>
-                <a:latin typeface="Times New Roman"/>
-                <a:ea typeface="Times New Roman"/>
-                <a:cs typeface="Times New Roman"/>
-              </a:rPr>
-              <a:t>arXiv:2310.08560</a:t>
-            </a:r>
-            <a:r>
-              <a:rPr sz="1800" b="0" i="0">
-                <a:solidFill>
-                  <a:srgbClr val="000000"/>
-                </a:solidFill>
-                <a:latin typeface="Times New Roman"/>
-                <a:ea typeface="Times New Roman"/>
-                <a:cs typeface="Times New Roman"/>
-              </a:rPr>
-              <a:t>.</a:t>
-            </a:r>
-          </a:p>
-          <a:p>
-            <a:pPr marL="548640" indent="-548640">
-              <a:spcAft>
-                <a:spcPts val="300"/>
-              </a:spcAft>
-              <a:buNone/>
-              <a:tabLst>
-                <a:tab pos="548640" algn="l"/>
-              </a:tabLst>
-            </a:pPr>
-            <a:r>
-              <a:rPr sz="1800" b="0" i="0">
-                <a:solidFill>
-                  <a:srgbClr val="000000"/>
-                </a:solidFill>
-                <a:latin typeface="Times New Roman"/>
-                <a:ea typeface="Times New Roman"/>
-                <a:cs typeface="Times New Roman"/>
-              </a:rPr>
-              <a:t>[4]	</a:t>
-            </a:r>
-            <a:r>
-              <a:rPr sz="1800" b="0" i="0">
-                <a:solidFill>
-                  <a:srgbClr val="000000"/>
-                </a:solidFill>
-                <a:latin typeface="Times New Roman"/>
-                <a:ea typeface="Times New Roman"/>
-                <a:cs typeface="Times New Roman"/>
-              </a:rPr>
-              <a:t>P. Rasmussen, P. Paliychuk, T. Beauvais, J. Ryan, and D. Chalef, "Zep: A temporal knowledge graph architecture for agent memory," 2025, </a:t>
-            </a:r>
-            <a:r>
-              <a:rPr sz="1800" b="0" i="1">
-                <a:solidFill>
-                  <a:srgbClr val="000000"/>
-                </a:solidFill>
-                <a:latin typeface="Times New Roman"/>
-                <a:ea typeface="Times New Roman"/>
-                <a:cs typeface="Times New Roman"/>
-              </a:rPr>
-              <a:t>arXiv:2501.13956</a:t>
-            </a:r>
-            <a:r>
-              <a:rPr sz="1800" b="0" i="0">
-                <a:solidFill>
-                  <a:srgbClr val="000000"/>
-                </a:solidFill>
-                <a:latin typeface="Times New Roman"/>
-                <a:ea typeface="Times New Roman"/>
-                <a:cs typeface="Times New Roman"/>
-              </a:rPr>
-              <a:t>.</a:t>
-            </a:r>
-          </a:p>
-          <a:p>
-            <a:pPr marL="548640" indent="-548640">
-              <a:spcAft>
-                <a:spcPts val="300"/>
-              </a:spcAft>
-              <a:buNone/>
-              <a:tabLst>
-                <a:tab pos="548640" algn="l"/>
-              </a:tabLst>
-            </a:pPr>
-            <a:r>
-              <a:rPr sz="1800" b="0" i="0">
-                <a:solidFill>
-                  <a:srgbClr val="000000"/>
-                </a:solidFill>
-                <a:latin typeface="Times New Roman"/>
-                <a:ea typeface="Times New Roman"/>
-                <a:cs typeface="Times New Roman"/>
-              </a:rPr>
-              <a:t>[5]	</a:t>
-            </a:r>
-            <a:r>
-              <a:rPr sz="1800" b="0" i="0">
-                <a:solidFill>
-                  <a:srgbClr val="000000"/>
-                </a:solidFill>
-                <a:latin typeface="Times New Roman"/>
-                <a:ea typeface="Times New Roman"/>
-                <a:cs typeface="Times New Roman"/>
-              </a:rPr>
-              <a:t>P. Chhikara, D. Khant, S. Aryan, T. Singh, and D. Yadav, "Mem0: Building production-ready AI agents with scalable long-term memory," in </a:t>
-            </a:r>
-            <a:r>
-              <a:rPr sz="1800" b="0" i="1">
-                <a:solidFill>
-                  <a:srgbClr val="000000"/>
-                </a:solidFill>
-                <a:latin typeface="Times New Roman"/>
-                <a:ea typeface="Times New Roman"/>
-                <a:cs typeface="Times New Roman"/>
-              </a:rPr>
-              <a:t>Proc. 28th Eur. Conf. Artif. Intell. (ECAI)</a:t>
-            </a:r>
-            <a:r>
-              <a:rPr sz="1800" b="0" i="0">
-                <a:solidFill>
-                  <a:srgbClr val="000000"/>
-                </a:solidFill>
-                <a:latin typeface="Times New Roman"/>
-                <a:ea typeface="Times New Roman"/>
-                <a:cs typeface="Times New Roman"/>
-              </a:rPr>
-              <a:t>, 2025, pp. 2993–3000, doi: 10.3233/FAIA251160.</a:t>
-            </a:r>
-          </a:p>
-          <a:p>
-            <a:pPr marL="548640" indent="-548640">
-              <a:spcAft>
-                <a:spcPts val="300"/>
-              </a:spcAft>
-              <a:buNone/>
-              <a:tabLst>
-                <a:tab pos="548640" algn="l"/>
-              </a:tabLst>
-            </a:pPr>
-            <a:r>
-              <a:rPr sz="1800" b="0" i="0">
-                <a:solidFill>
-                  <a:srgbClr val="000000"/>
-                </a:solidFill>
-                <a:latin typeface="Times New Roman"/>
-                <a:ea typeface="Times New Roman"/>
-                <a:cs typeface="Times New Roman"/>
-              </a:rPr>
-              <a:t>[6]	</a:t>
-            </a:r>
-            <a:r>
-              <a:rPr sz="1800" b="0" i="0">
-                <a:solidFill>
-                  <a:srgbClr val="000000"/>
-                </a:solidFill>
-                <a:latin typeface="Times New Roman"/>
-                <a:ea typeface="Times New Roman"/>
-                <a:cs typeface="Times New Roman"/>
-              </a:rPr>
-              <a:t>S. Daga, S. Sreedhar, and D. Shah, "LongMemEval," Supermemory Research, May 2026. Accessed: Oct. 6, 2026. [Online]. Available: https://supermemory.ai/research/longmembench/</a:t>
-            </a:r>
-          </a:p>
-          <a:p>
-            <a:pPr marL="548640" indent="-548640">
-              <a:spcAft>
-                <a:spcPts val="300"/>
-              </a:spcAft>
-              <a:buNone/>
-              <a:tabLst>
-                <a:tab pos="548640" algn="l"/>
-              </a:tabLst>
-            </a:pPr>
-            <a:r>
-              <a:rPr sz="1800" b="0" i="0">
-                <a:solidFill>
-                  <a:srgbClr val="000000"/>
-                </a:solidFill>
-                <a:latin typeface="Times New Roman"/>
-                <a:ea typeface="Times New Roman"/>
-                <a:cs typeface="Times New Roman"/>
-              </a:rPr>
-              <a:t>[7]	</a:t>
-            </a:r>
-            <a:r>
-              <a:rPr sz="1800" b="0" i="0">
-                <a:solidFill>
-                  <a:srgbClr val="000000"/>
-                </a:solidFill>
-                <a:latin typeface="Times New Roman"/>
-                <a:ea typeface="Times New Roman"/>
-                <a:cs typeface="Times New Roman"/>
-              </a:rPr>
-              <a:t>C. Latimer et al., "Hindsight is 20/20: Building agent memory that retains, recalls, and reflects," 2025, </a:t>
-            </a:r>
-            <a:r>
-              <a:rPr sz="1800" b="0" i="1">
-                <a:solidFill>
-                  <a:srgbClr val="000000"/>
-                </a:solidFill>
-                <a:latin typeface="Times New Roman"/>
-                <a:ea typeface="Times New Roman"/>
-                <a:cs typeface="Times New Roman"/>
-              </a:rPr>
-              <a:t>arXiv:2512.12818</a:t>
-            </a:r>
-            <a:r>
-              <a:rPr sz="1800" b="0" i="0">
-                <a:solidFill>
-                  <a:srgbClr val="000000"/>
-                </a:solidFill>
-                <a:latin typeface="Times New Roman"/>
-                <a:ea typeface="Times New Roman"/>
-                <a:cs typeface="Times New Roman"/>
-              </a:rPr>
-              <a:t>.</a:t>
-            </a:r>
-          </a:p>
-          <a:p>
-            <a:pPr marL="548640" indent="-548640">
-              <a:spcAft>
-                <a:spcPts val="300"/>
-              </a:spcAft>
-              <a:buNone/>
-              <a:tabLst>
-                <a:tab pos="548640" algn="l"/>
-              </a:tabLst>
-            </a:pPr>
-            <a:r>
-              <a:rPr sz="1800" b="0" i="0">
-                <a:solidFill>
-                  <a:srgbClr val="000000"/>
-                </a:solidFill>
-                <a:latin typeface="Times New Roman"/>
-                <a:ea typeface="Times New Roman"/>
-                <a:cs typeface="Times New Roman"/>
-              </a:rPr>
-              <a:t>[8]	</a:t>
-            </a:r>
-            <a:r>
-              <a:rPr sz="1800" b="0" i="0">
-                <a:solidFill>
-                  <a:srgbClr val="000000"/>
-                </a:solidFill>
-                <a:latin typeface="Times New Roman"/>
-                <a:ea typeface="Times New Roman"/>
-                <a:cs typeface="Times New Roman"/>
-              </a:rPr>
-              <a:t>PostgreSQL Global Development Group, "Full text search," in </a:t>
-            </a:r>
-            <a:r>
-              <a:rPr sz="1800" b="0" i="1">
-                <a:solidFill>
-                  <a:srgbClr val="000000"/>
-                </a:solidFill>
-                <a:latin typeface="Times New Roman"/>
-                <a:ea typeface="Times New Roman"/>
-                <a:cs typeface="Times New Roman"/>
-              </a:rPr>
-              <a:t>PostgreSQL 17 Documentation</a:t>
-            </a:r>
-            <a:r>
-              <a:rPr sz="1800" b="0" i="0">
-                <a:solidFill>
-                  <a:srgbClr val="000000"/>
-                </a:solidFill>
-                <a:latin typeface="Times New Roman"/>
-                <a:ea typeface="Times New Roman"/>
-                <a:cs typeface="Times New Roman"/>
-              </a:rPr>
-              <a:t>, ch. 12, 2026. Accessed: Oct. 6, 2026. [Online]. Available: https://www.postgresql.org/docs/17/textsearch.html</a:t>
-            </a:r>
-          </a:p>
-        </p:txBody>
-      </p:sp>
-    </p:spTree>
-  </p:cSld>
-  <p:clrMapOvr>
-    <a:masterClrMapping/>
-  </p:clrMapOvr>
-</p:sld>
-</file>
-
-<file path=ppt/slides/slide29.xml><?xml version="1.0" encoding="utf-8"?>
-<p:sld xmlns:a="http://schemas.openxmlformats.org/drawingml/2006/main" xmlns:p="http://schemas.openxmlformats.org/presentationml/2006/main" xmlns:r="http://schemas.openxmlformats.org/officeDocument/2006/relationships">
-  <p:cSld>
-    <p:spTree>
-      <p:nvGrpSpPr>
-        <p:cNvPr id="1" name=""/>
-        <p:cNvGrpSpPr/>
-        <p:nvPr/>
-      </p:nvGrpSpPr>
-      <p:grpSpPr/>
-      <p:sp>
-        <p:nvSpPr>
-          <p:cNvPr id="2" name="Title 1"/>
-          <p:cNvSpPr>
-            <a:spLocks noGrp="1"/>
-          </p:cNvSpPr>
-          <p:nvPr>
-            <p:ph type="title"/>
-          </p:nvPr>
-        </p:nvSpPr>
-        <p:spPr/>
-        <p:txBody>
-          <a:bodyPr/>
-          <a:lstStyle/>
-          <a:p>
-            <a:r>
-              <a:rPr sz="2400" b="1" i="0">
-                <a:solidFill>
-                  <a:srgbClr val="000000"/>
-                </a:solidFill>
-                <a:latin typeface="Times New Roman"/>
-                <a:ea typeface="Times New Roman"/>
-                <a:cs typeface="Times New Roman"/>
-              </a:rPr>
-              <a:t>REFERENCES (2/2)</a:t>
-            </a:r>
-          </a:p>
-        </p:txBody>
-      </p:sp>
-      <p:sp>
-        <p:nvSpPr>
-          <p:cNvPr id="25" name="PlaceHolder 2"/>
-          <p:cNvSpPr>
-            <a:spLocks noGrp="1"/>
-          </p:cNvSpPr>
-          <p:nvPr>
-            <p:ph type="sldNum" idx="5"/>
-          </p:nvPr>
-        </p:nvSpPr>
-        <p:spPr>
-          <a:xfrm>
-            <a:off x="10865880" y="384120"/>
-            <a:ext cx="730440" cy="456120"/>
-          </a:xfrm>
-          <a:prstGeom prst="rect">
-            <a:avLst/>
-          </a:prstGeom>
-          <a:noFill/>
-          <a:ln w="0">
-            <a:noFill/>
-          </a:ln>
-        </p:spPr>
-        <p:txBody>
-          <a:bodyPr lIns="90000" tIns="45000" rIns="90000" bIns="45000" anchor="t">
-            <a:noAutofit/>
-          </a:bodyPr>
-          <a:lstStyle>
-            <a:lvl1pPr indent="0" algn="r" defTabSz="914400">
-              <a:lnSpc>
-                <a:spcPct val="100000"/>
-              </a:lnSpc>
-              <a:buNone/>
-              <a:tabLst>
-                <a:tab pos="0" algn="l"/>
-              </a:tabLst>
-              <a:defRPr lang="en-US" sz="1800" b="0" u="none" strike="noStrike">
-                <a:solidFill>
-                  <a:srgbClr val="000000"/>
-                </a:solidFill>
-                <a:effectLst/>
-                <a:uFillTx/>
-                <a:latin typeface="Times New Roman"/>
-                <a:ea typeface="Times New Roman"/>
-              </a:defRPr>
-            </a:lvl1pPr>
-          </a:lstStyle>
-          <a:p>
-            <a:pPr indent="0" algn="r" defTabSz="914400">
-              <a:lnSpc>
-                <a:spcPct val="100000"/>
-              </a:lnSpc>
-              <a:buNone/>
-              <a:tabLst>
-                <a:tab pos="0" algn="l"/>
-              </a:tabLst>
-            </a:pPr>
-            <a:fld id="{9873986A-C957-40DB-B7BB-3EB1CE963720}" type="slidenum">
-              <a:rPr lang="en-US" sz="1800" b="0" u="none" strike="noStrike">
-                <a:solidFill>
-                  <a:srgbClr val="000000"/>
-                </a:solidFill>
-                <a:effectLst/>
-                <a:uFillTx/>
-                <a:latin typeface="Times New Roman"/>
-                <a:ea typeface="Times New Roman"/>
-              </a:rPr>
-              <a:t>&lt;number&gt;</a:t>
-            </a:fld>
-            <a:endParaRPr lang="en-US" sz="1600" b="0" u="none" strike="noStrike">
-              <a:solidFill>
-                <a:srgbClr val="000000"/>
-              </a:solidFill>
-              <a:effectLst/>
-              <a:uFillTx/>
-              <a:latin typeface="Times New Roman"/>
-            </a:endParaRPr>
-          </a:p>
-        </p:txBody>
-      </p:sp>
-      <p:sp>
-        <p:nvSpPr>
-          <p:cNvPr id="26" name="TextBox 25"/>
-          <p:cNvSpPr txBox="1"/>
-          <p:nvPr/>
-        </p:nvSpPr>
-        <p:spPr>
-          <a:xfrm>
-            <a:off x="594360" y="1280160"/>
-            <a:ext cx="11000232" cy="4983480"/>
-          </a:xfrm>
-          <a:prstGeom prst="rect">
-            <a:avLst/>
-          </a:prstGeom>
-          <a:noFill/>
-        </p:spPr>
-        <p:txBody>
-          <a:bodyPr wrap="square" lIns="45720" rIns="45720" tIns="27432" bIns="27432"/>
-          <a:lstStyle/>
-          <a:p>
-            <a:pPr marL="548640" indent="-548640">
-              <a:spcAft>
-                <a:spcPts val="300"/>
-              </a:spcAft>
-              <a:buNone/>
-              <a:tabLst>
-                <a:tab pos="548640" algn="l"/>
-              </a:tabLst>
-            </a:pPr>
-            <a:r>
-              <a:rPr sz="1800" b="0" i="0">
-                <a:solidFill>
-                  <a:srgbClr val="000000"/>
-                </a:solidFill>
-                <a:latin typeface="Times New Roman"/>
-                <a:ea typeface="Times New Roman"/>
-                <a:cs typeface="Times New Roman"/>
-              </a:rPr>
-              <a:t>[9]	</a:t>
-            </a:r>
-            <a:r>
-              <a:rPr sz="1800" b="0" i="0">
-                <a:solidFill>
-                  <a:srgbClr val="000000"/>
-                </a:solidFill>
-                <a:latin typeface="Times New Roman"/>
-                <a:ea typeface="Times New Roman"/>
-                <a:cs typeface="Times New Roman"/>
-              </a:rPr>
-              <a:t>A. Kane et al., "pgvector: Open-source vector similarity search for Postgres," GitHub repository, 2026. Accessed: Oct. 6, 2026. [Online]. Available: https://github.com/pgvector/pgvector</a:t>
-            </a:r>
-          </a:p>
-          <a:p>
-            <a:pPr marL="548640" indent="-548640">
-              <a:spcAft>
-                <a:spcPts val="300"/>
-              </a:spcAft>
-              <a:buNone/>
-              <a:tabLst>
-                <a:tab pos="548640" algn="l"/>
-              </a:tabLst>
-            </a:pPr>
-            <a:r>
-              <a:rPr sz="1800" b="0" i="0">
-                <a:solidFill>
-                  <a:srgbClr val="000000"/>
-                </a:solidFill>
-                <a:latin typeface="Times New Roman"/>
-                <a:ea typeface="Times New Roman"/>
-                <a:cs typeface="Times New Roman"/>
-              </a:rPr>
-              <a:t>[10]	</a:t>
-            </a:r>
-            <a:r>
-              <a:rPr sz="1800" b="0" i="0">
-                <a:solidFill>
-                  <a:srgbClr val="000000"/>
-                </a:solidFill>
-                <a:latin typeface="Times New Roman"/>
-                <a:ea typeface="Times New Roman"/>
-                <a:cs typeface="Times New Roman"/>
-              </a:rPr>
-              <a:t>G. V. Cormack, C. L. A. Clarke, and S. Büttcher, "Reciprocal rank fusion outperforms Condorcet and individual rank learning methods," in </a:t>
-            </a:r>
-            <a:r>
-              <a:rPr sz="1800" b="0" i="1">
-                <a:solidFill>
-                  <a:srgbClr val="000000"/>
-                </a:solidFill>
-                <a:latin typeface="Times New Roman"/>
-                <a:ea typeface="Times New Roman"/>
-                <a:cs typeface="Times New Roman"/>
-              </a:rPr>
-              <a:t>Proc. 32nd Int. ACM SIGIR Conf. Res. Develop. Inf. Retrieval</a:t>
-            </a:r>
-            <a:r>
-              <a:rPr sz="1800" b="0" i="0">
-                <a:solidFill>
-                  <a:srgbClr val="000000"/>
-                </a:solidFill>
-                <a:latin typeface="Times New Roman"/>
-                <a:ea typeface="Times New Roman"/>
-                <a:cs typeface="Times New Roman"/>
-              </a:rPr>
-              <a:t>, Boston, MA, USA, 2009, pp. 758–759, doi: 10.1145/1571941.1572114.</a:t>
-            </a:r>
-          </a:p>
-          <a:p>
-            <a:pPr marL="548640" indent="-548640">
-              <a:spcAft>
-                <a:spcPts val="300"/>
-              </a:spcAft>
-              <a:buNone/>
-              <a:tabLst>
-                <a:tab pos="548640" algn="l"/>
-              </a:tabLst>
-            </a:pPr>
-            <a:r>
-              <a:rPr sz="1800" b="0" i="0">
-                <a:solidFill>
-                  <a:srgbClr val="000000"/>
-                </a:solidFill>
-                <a:latin typeface="Times New Roman"/>
-                <a:ea typeface="Times New Roman"/>
-                <a:cs typeface="Times New Roman"/>
-              </a:rPr>
-              <a:t>[11]	</a:t>
-            </a:r>
-            <a:r>
-              <a:rPr sz="1800" b="0" i="0">
-                <a:solidFill>
-                  <a:srgbClr val="000000"/>
-                </a:solidFill>
-                <a:latin typeface="Times New Roman"/>
-                <a:ea typeface="Times New Roman"/>
-                <a:cs typeface="Times New Roman"/>
-              </a:rPr>
-              <a:t>Neo4j, Inc., "Query the database," in </a:t>
-            </a:r>
-            <a:r>
-              <a:rPr sz="1800" b="0" i="1">
-                <a:solidFill>
-                  <a:srgbClr val="000000"/>
-                </a:solidFill>
-                <a:latin typeface="Times New Roman"/>
-                <a:ea typeface="Times New Roman"/>
-                <a:cs typeface="Times New Roman"/>
-              </a:rPr>
-              <a:t>Neo4j HTTP API Manual</a:t>
-            </a:r>
-            <a:r>
-              <a:rPr sz="1800" b="0" i="0">
-                <a:solidFill>
-                  <a:srgbClr val="000000"/>
-                </a:solidFill>
-                <a:latin typeface="Times New Roman"/>
-                <a:ea typeface="Times New Roman"/>
-                <a:cs typeface="Times New Roman"/>
-              </a:rPr>
-              <a:t>, v5, 2026. Accessed: Oct. 6, 2026. [Online]. Available: https://neo4j.com/docs/http-api/5/query/</a:t>
-            </a:r>
-          </a:p>
-          <a:p>
-            <a:pPr marL="548640" indent="-548640">
-              <a:spcAft>
-                <a:spcPts val="300"/>
-              </a:spcAft>
-              <a:buNone/>
-              <a:tabLst>
-                <a:tab pos="548640" algn="l"/>
-              </a:tabLst>
-            </a:pPr>
-            <a:r>
-              <a:rPr sz="1800" b="0" i="0">
-                <a:solidFill>
-                  <a:srgbClr val="000000"/>
-                </a:solidFill>
-                <a:latin typeface="Times New Roman"/>
-                <a:ea typeface="Times New Roman"/>
-                <a:cs typeface="Times New Roman"/>
-              </a:rPr>
-              <a:t>[12]	</a:t>
-            </a:r>
-            <a:r>
-              <a:rPr sz="1800" b="0" i="0">
-                <a:solidFill>
-                  <a:srgbClr val="000000"/>
-                </a:solidFill>
-                <a:latin typeface="Times New Roman"/>
-                <a:ea typeface="Times New Roman"/>
-                <a:cs typeface="Times New Roman"/>
-              </a:rPr>
-              <a:t>Y. Zhang et al., "Qwen3 Embedding: Advancing text embedding and reranking through foundation models," 2025, </a:t>
-            </a:r>
-            <a:r>
-              <a:rPr sz="1800" b="0" i="1">
-                <a:solidFill>
-                  <a:srgbClr val="000000"/>
-                </a:solidFill>
-                <a:latin typeface="Times New Roman"/>
-                <a:ea typeface="Times New Roman"/>
-                <a:cs typeface="Times New Roman"/>
-              </a:rPr>
-              <a:t>arXiv:2506.05176</a:t>
-            </a:r>
-            <a:r>
-              <a:rPr sz="1800" b="0" i="0">
-                <a:solidFill>
-                  <a:srgbClr val="000000"/>
-                </a:solidFill>
-                <a:latin typeface="Times New Roman"/>
-                <a:ea typeface="Times New Roman"/>
-                <a:cs typeface="Times New Roman"/>
-              </a:rPr>
-              <a:t>.</a:t>
-            </a:r>
-          </a:p>
-          <a:p>
-            <a:pPr marL="548640" indent="-548640">
-              <a:spcAft>
-                <a:spcPts val="300"/>
-              </a:spcAft>
-              <a:buNone/>
-              <a:tabLst>
-                <a:tab pos="548640" algn="l"/>
-              </a:tabLst>
-            </a:pPr>
-            <a:r>
-              <a:rPr sz="1800" b="0" i="0">
-                <a:solidFill>
-                  <a:srgbClr val="000000"/>
-                </a:solidFill>
-                <a:latin typeface="Times New Roman"/>
-                <a:ea typeface="Times New Roman"/>
-                <a:cs typeface="Times New Roman"/>
-              </a:rPr>
-              <a:t>[13]	</a:t>
-            </a:r>
-            <a:r>
-              <a:rPr sz="1800" b="0" i="0">
-                <a:solidFill>
-                  <a:srgbClr val="000000"/>
-                </a:solidFill>
-                <a:latin typeface="Times New Roman"/>
-                <a:ea typeface="Times New Roman"/>
-                <a:cs typeface="Times New Roman"/>
-              </a:rPr>
-              <a:t>M. Zechner et al., "pi: AI agent toolkit," GitHub repository, 2026. Accessed: Oct. 6, 2026. [Online]. Available: https://github.com/earendil-works/pi</a:t>
-            </a:r>
-          </a:p>
-          <a:p>
-            <a:pPr marL="548640" indent="-548640">
-              <a:spcAft>
-                <a:spcPts val="300"/>
-              </a:spcAft>
-              <a:buNone/>
-              <a:tabLst>
-                <a:tab pos="548640" algn="l"/>
-              </a:tabLst>
-            </a:pPr>
-            <a:r>
-              <a:rPr sz="1800" b="0" i="0">
-                <a:solidFill>
-                  <a:srgbClr val="000000"/>
-                </a:solidFill>
-                <a:latin typeface="Times New Roman"/>
-                <a:ea typeface="Times New Roman"/>
-                <a:cs typeface="Times New Roman"/>
-              </a:rPr>
-              <a:t>[14]	</a:t>
-            </a:r>
-            <a:r>
-              <a:rPr sz="1800" b="0" i="0">
-                <a:solidFill>
-                  <a:srgbClr val="000000"/>
-                </a:solidFill>
-                <a:latin typeface="Times New Roman"/>
-                <a:ea typeface="Times New Roman"/>
-                <a:cs typeface="Times New Roman"/>
-              </a:rPr>
-              <a:t>T. Dettmers, A. Pagnoni, A. Holtzman, and L. Zettlemoyer, "QLoRA: Efficient finetuning of quantized LLMs," in </a:t>
-            </a:r>
-            <a:r>
-              <a:rPr sz="1800" b="0" i="1">
-                <a:solidFill>
-                  <a:srgbClr val="000000"/>
-                </a:solidFill>
-                <a:latin typeface="Times New Roman"/>
-                <a:ea typeface="Times New Roman"/>
-                <a:cs typeface="Times New Roman"/>
-              </a:rPr>
-              <a:t>Proc. Adv. Neural Inf. Process. Syst. (NeurIPS)</a:t>
-            </a:r>
-            <a:r>
-              <a:rPr sz="1800" b="0" i="0">
-                <a:solidFill>
-                  <a:srgbClr val="000000"/>
-                </a:solidFill>
-                <a:latin typeface="Times New Roman"/>
-                <a:ea typeface="Times New Roman"/>
-                <a:cs typeface="Times New Roman"/>
-              </a:rPr>
-              <a:t>, vol. 36, 2023, pp. 10088–10115.</a:t>
-            </a:r>
-          </a:p>
-          <a:p>
-            <a:pPr marL="548640" indent="-548640">
-              <a:spcAft>
-                <a:spcPts val="300"/>
-              </a:spcAft>
-              <a:buNone/>
-              <a:tabLst>
-                <a:tab pos="548640" algn="l"/>
-              </a:tabLst>
-            </a:pPr>
-            <a:r>
-              <a:rPr sz="1800" b="0" i="0">
-                <a:solidFill>
-                  <a:srgbClr val="000000"/>
-                </a:solidFill>
-                <a:latin typeface="Times New Roman"/>
-                <a:ea typeface="Times New Roman"/>
-                <a:cs typeface="Times New Roman"/>
-              </a:rPr>
-              <a:t>[15]	</a:t>
-            </a:r>
-            <a:r>
-              <a:rPr sz="1800" b="0" i="0">
-                <a:solidFill>
-                  <a:srgbClr val="000000"/>
-                </a:solidFill>
-                <a:latin typeface="Times New Roman"/>
-                <a:ea typeface="Times New Roman"/>
-                <a:cs typeface="Times New Roman"/>
-              </a:rPr>
-              <a:t>A. Maharana, D.-H. Lee, S. Tulyakov, M. Bansal, F. Barbieri, and Y. Fang, "Evaluating very long-term conversational memory of LLM agents," in </a:t>
-            </a:r>
-            <a:r>
-              <a:rPr sz="1800" b="0" i="1">
-                <a:solidFill>
-                  <a:srgbClr val="000000"/>
-                </a:solidFill>
-                <a:latin typeface="Times New Roman"/>
-                <a:ea typeface="Times New Roman"/>
-                <a:cs typeface="Times New Roman"/>
-              </a:rPr>
-              <a:t>Proc. 62nd Annu. Meeting Assoc. Comput. Linguist.</a:t>
-            </a:r>
-            <a:r>
-              <a:rPr sz="1800" b="0" i="0">
-                <a:solidFill>
-                  <a:srgbClr val="000000"/>
-                </a:solidFill>
-                <a:latin typeface="Times New Roman"/>
-                <a:ea typeface="Times New Roman"/>
-                <a:cs typeface="Times New Roman"/>
-              </a:rPr>
-              <a:t>, Bangkok, Thailand, 2024, pp. 13851–13870, doi: 10.18653/v1/2024.acl-long.747.</a:t>
-            </a:r>
-          </a:p>
-        </p:txBody>
-      </p:sp>
     </p:spTree>
   </p:cSld>
   <p:clrMapOvr>
@@ -17594,7 +17601,7 @@
                           <a:ea typeface="Times New Roman"/>
                           <a:cs typeface="Times New Roman"/>
                         </a:rPr>
-                        <a:t>Splits the prompt into a main context and outside storage. The model moves data in and out with function calls.</a:t>
+                        <a:t>Splits the prompt into a working area and outside storage. The model moves data between them by calling functions.</a:t>
                       </a:r>
                     </a:p>
                   </a:txBody>
@@ -17648,7 +17655,7 @@
                           <a:ea typeface="Times New Roman"/>
                           <a:cs typeface="Times New Roman"/>
                         </a:rPr>
-                        <a:t>92.5% on deep memory retrieval with GPT-4, against 32.1% for GPT-4 reading a summary.</a:t>
+                        <a:t>92.5% on a deep-memory recall test with GPT-4, against 32.1% for GPT-4 reading a summary.</a:t>
                       </a:r>
                     </a:p>
                   </a:txBody>
@@ -17702,7 +17709,7 @@
                           <a:ea typeface="Times New Roman"/>
                           <a:cs typeface="Times New Roman"/>
                         </a:rPr>
-                        <a:t>Memory changes only when the model makes the right call. No latency or cost figures.</a:t>
+                        <a:t>Memory changes only when the model makes the right call. No speed or cost figures.</a:t>
                       </a:r>
                     </a:p>
                   </a:txBody>
@@ -17812,7 +17819,7 @@
                           <a:ea typeface="Times New Roman"/>
                           <a:cs typeface="Times New Roman"/>
                         </a:rPr>
-                        <a:t>Temporal knowledge graph of episodes, entities and edges. Each edge has a valid and an invalid time, and a contradiction closes the old edge.</a:t>
+                        <a:t>A knowledge graph whose edges carry the time they became true and stopped being true. A contradiction closes the old edge.</a:t>
                       </a:r>
                     </a:p>
                   </a:txBody>
@@ -17920,7 +17927,7 @@
                           <a:ea typeface="Times New Roman"/>
                           <a:cs typeface="Times New Roman"/>
                         </a:rPr>
-                        <a:t>One run with one configuration. The graph database is the main store.</a:t>
+                        <a:t>A single run with one setup. The graph database is the only store.</a:t>
                       </a:r>
                     </a:p>
                   </a:txBody>
@@ -18030,7 +18037,7 @@
                           <a:ea typeface="Times New Roman"/>
                           <a:cs typeface="Times New Roman"/>
                         </a:rPr>
-                        <a:t>An LLM extracts candidate memories, compares each with similar stored ones and picks add, update, delete or no change.</a:t>
+                        <a:t>An LLM extracts candidate memories, compares each with similar stored ones and chooses add, update, delete or no change.</a:t>
                       </a:r>
                     </a:p>
                   </a:txBody>
@@ -18084,7 +18091,7 @@
                           <a:ea typeface="Times New Roman"/>
                           <a:cs typeface="Times New Roman"/>
                         </a:rPr>
-                        <a:t>LoCoMo judge score 66.9, against 72.9 for the full history. p95 latency 1.4 s against 17 s.</a:t>
+                        <a:t>Score 66.9 from an LLM judge on the LoCoMo conversation benchmark, against 72.9 for the full history, but about 12 times faster.</a:t>
                       </a:r>
                     </a:p>
                   </a:txBody>
@@ -18138,7 +18145,7 @@
                           <a:ea typeface="Times New Roman"/>
                           <a:cs typeface="Times New Roman"/>
                         </a:rPr>
-                        <a:t>One benchmark and an unnamed judge model. The open-source release has dropped update, delete and graph memory.</a:t>
+                        <a:t>One benchmark and an unnamed judge model. The open-source release has since dropped update and delete.</a:t>
                       </a:r>
                     </a:p>
                   </a:txBody>
@@ -18177,6 +18184,1289 @@
           </a:graphicData>
         </a:graphic>
       </p:graphicFrame>
+    </p:spTree>
+  </p:cSld>
+  <p:clrMapOvr>
+    <a:masterClrMapping/>
+  </p:clrMapOvr>
+</p:sld>
+</file>
+
+<file path=ppt/slides/slide30.xml><?xml version="1.0" encoding="utf-8"?>
+<p:sld xmlns:a="http://schemas.openxmlformats.org/drawingml/2006/main" xmlns:p="http://schemas.openxmlformats.org/presentationml/2006/main" xmlns:r="http://schemas.openxmlformats.org/officeDocument/2006/relationships">
+  <p:cSld>
+    <p:spTree>
+      <p:nvGrpSpPr>
+        <p:cNvPr id="1" name=""/>
+        <p:cNvGrpSpPr/>
+        <p:nvPr/>
+      </p:nvGrpSpPr>
+      <p:grpSpPr/>
+      <p:sp>
+        <p:nvSpPr>
+          <p:cNvPr id="2" name="Title 1"/>
+          <p:cNvSpPr>
+            <a:spLocks noGrp="1"/>
+          </p:cNvSpPr>
+          <p:nvPr>
+            <p:ph type="title"/>
+          </p:nvPr>
+        </p:nvSpPr>
+        <p:spPr/>
+        <p:txBody>
+          <a:bodyPr/>
+          <a:lstStyle/>
+          <a:p>
+            <a:r>
+              <a:rPr sz="2400" b="1" i="0">
+                <a:solidFill>
+                  <a:srgbClr val="000000"/>
+                </a:solidFill>
+                <a:latin typeface="Times New Roman"/>
+                <a:ea typeface="Times New Roman"/>
+                <a:cs typeface="Times New Roman"/>
+              </a:rPr>
+              <a:t>CONCLUSION AND NEXT STEPS</a:t>
+            </a:r>
+          </a:p>
+        </p:txBody>
+      </p:sp>
+      <p:sp>
+        <p:nvSpPr>
+          <p:cNvPr id="25" name="PlaceHolder 2"/>
+          <p:cNvSpPr>
+            <a:spLocks noGrp="1"/>
+          </p:cNvSpPr>
+          <p:nvPr>
+            <p:ph type="sldNum" idx="5"/>
+          </p:nvPr>
+        </p:nvSpPr>
+        <p:spPr>
+          <a:xfrm>
+            <a:off x="10865880" y="384120"/>
+            <a:ext cx="730440" cy="456120"/>
+          </a:xfrm>
+          <a:prstGeom prst="rect">
+            <a:avLst/>
+          </a:prstGeom>
+          <a:noFill/>
+          <a:ln w="0">
+            <a:noFill/>
+          </a:ln>
+        </p:spPr>
+        <p:txBody>
+          <a:bodyPr lIns="90000" tIns="45000" rIns="90000" bIns="45000" anchor="t">
+            <a:noAutofit/>
+          </a:bodyPr>
+          <a:lstStyle>
+            <a:lvl1pPr indent="0" algn="r" defTabSz="914400">
+              <a:lnSpc>
+                <a:spcPct val="100000"/>
+              </a:lnSpc>
+              <a:buNone/>
+              <a:tabLst>
+                <a:tab pos="0" algn="l"/>
+              </a:tabLst>
+              <a:defRPr lang="en-US" sz="1800" b="0" u="none" strike="noStrike">
+                <a:solidFill>
+                  <a:srgbClr val="000000"/>
+                </a:solidFill>
+                <a:effectLst/>
+                <a:uFillTx/>
+                <a:latin typeface="Times New Roman"/>
+                <a:ea typeface="Times New Roman"/>
+              </a:defRPr>
+            </a:lvl1pPr>
+          </a:lstStyle>
+          <a:p>
+            <a:pPr indent="0" algn="r" defTabSz="914400">
+              <a:lnSpc>
+                <a:spcPct val="100000"/>
+              </a:lnSpc>
+              <a:buNone/>
+              <a:tabLst>
+                <a:tab pos="0" algn="l"/>
+              </a:tabLst>
+            </a:pPr>
+            <a:fld id="{9873986A-C957-40DB-B7BB-3EB1CE963720}" type="slidenum">
+              <a:rPr lang="en-US" sz="1800" b="0" u="none" strike="noStrike">
+                <a:solidFill>
+                  <a:srgbClr val="000000"/>
+                </a:solidFill>
+                <a:effectLst/>
+                <a:uFillTx/>
+                <a:latin typeface="Times New Roman"/>
+                <a:ea typeface="Times New Roman"/>
+              </a:rPr>
+              <a:t>&lt;number&gt;</a:t>
+            </a:fld>
+            <a:endParaRPr lang="en-US" sz="1600" b="0" u="none" strike="noStrike">
+              <a:solidFill>
+                <a:srgbClr val="000000"/>
+              </a:solidFill>
+              <a:effectLst/>
+              <a:uFillTx/>
+              <a:latin typeface="Times New Roman"/>
+            </a:endParaRPr>
+          </a:p>
+        </p:txBody>
+      </p:sp>
+      <p:sp>
+        <p:nvSpPr>
+          <p:cNvPr id="26" name="TextBox 25"/>
+          <p:cNvSpPr txBox="1"/>
+          <p:nvPr/>
+        </p:nvSpPr>
+        <p:spPr>
+          <a:xfrm>
+            <a:off x="594360" y="1371600"/>
+            <a:ext cx="11000232" cy="4846320"/>
+          </a:xfrm>
+          <a:prstGeom prst="rect">
+            <a:avLst/>
+          </a:prstGeom>
+          <a:noFill/>
+        </p:spPr>
+        <p:txBody>
+          <a:bodyPr wrap="square" lIns="45720" rIns="45720" tIns="27432" bIns="27432"/>
+          <a:lstStyle/>
+          <a:p>
+            <a:pPr marL="256032" indent="-256032">
+              <a:spcAft>
+                <a:spcPts val="1600"/>
+              </a:spcAft>
+              <a:buFont typeface="Arial"/>
+              <a:buChar char="•"/>
+            </a:pPr>
+            <a:r>
+              <a:rPr sz="1800" b="0" i="0">
+                <a:solidFill>
+                  <a:srgbClr val="000000"/>
+                </a:solidFill>
+                <a:latin typeface="Times New Roman"/>
+                <a:ea typeface="Times New Roman"/>
+                <a:cs typeface="Times New Roman"/>
+              </a:rPr>
+              <a:t>All five modules are built. An agent can save what it is told, recall it in a new session and show the message each memory came from.</a:t>
+            </a:r>
+          </a:p>
+          <a:p>
+            <a:pPr marL="256032" indent="-256032">
+              <a:spcAft>
+                <a:spcPts val="1600"/>
+              </a:spcAft>
+              <a:buFont typeface="Arial"/>
+              <a:buChar char="•"/>
+            </a:pPr>
+            <a:r>
+              <a:rPr sz="1800" b="0" i="0">
+                <a:solidFill>
+                  <a:srgbClr val="000000"/>
+                </a:solidFill>
+                <a:latin typeface="Times New Roman"/>
+                <a:ea typeface="Times New Roman"/>
+                <a:cs typeface="Times New Roman"/>
+              </a:rPr>
+              <a:t>Corrections replace old values without erasing them, and unrelated memories stay as they were.</a:t>
+            </a:r>
+          </a:p>
+          <a:p>
+            <a:pPr marL="256032" indent="-256032">
+              <a:spcAft>
+                <a:spcPts val="1600"/>
+              </a:spcAft>
+              <a:buFont typeface="Arial"/>
+              <a:buChar char="•"/>
+            </a:pPr>
+            <a:r>
+              <a:rPr sz="1800" b="0" i="0">
+                <a:solidFill>
+                  <a:srgbClr val="000000"/>
+                </a:solidFill>
+                <a:latin typeface="Times New Roman"/>
+                <a:ea typeface="Times New Roman"/>
+                <a:cs typeface="Times New Roman"/>
+              </a:rPr>
+              <a:t>Fine-tuning raised correct inferences from 1/16 to 13/16 and correct answers from 10/16 to 15/16, but extraction dropped from 50/55 to 41/55.</a:t>
+            </a:r>
+          </a:p>
+          <a:p>
+            <a:pPr marL="256032" indent="-256032">
+              <a:spcAft>
+                <a:spcPts val="1600"/>
+              </a:spcAft>
+              <a:buFont typeface="Arial"/>
+              <a:buChar char="•"/>
+            </a:pPr>
+            <a:r>
+              <a:rPr sz="1800" b="0" i="0">
+                <a:solidFill>
+                  <a:srgbClr val="000000"/>
+                </a:solidFill>
+                <a:latin typeface="Times New Roman"/>
+                <a:ea typeface="Times New Roman"/>
+                <a:cs typeface="Times New Roman"/>
+              </a:rPr>
+              <a:t>Next: fix extraction and date handling, run the full LongMemEval-S benchmark, and add external tests with human review.</a:t>
+            </a:r>
+          </a:p>
+        </p:txBody>
+      </p:sp>
+    </p:spTree>
+  </p:cSld>
+  <p:clrMapOvr>
+    <a:masterClrMapping/>
+  </p:clrMapOvr>
+</p:sld>
+</file>
+
+<file path=ppt/slides/slide31.xml><?xml version="1.0" encoding="utf-8"?>
+<p:sld xmlns:a="http://schemas.openxmlformats.org/drawingml/2006/main" xmlns:p="http://schemas.openxmlformats.org/presentationml/2006/main" xmlns:r="http://schemas.openxmlformats.org/officeDocument/2006/relationships">
+  <p:cSld>
+    <p:spTree>
+      <p:nvGrpSpPr>
+        <p:cNvPr id="1" name=""/>
+        <p:cNvGrpSpPr/>
+        <p:nvPr/>
+      </p:nvGrpSpPr>
+      <p:grpSpPr/>
+      <p:sp>
+        <p:nvSpPr>
+          <p:cNvPr id="2" name="Title 1"/>
+          <p:cNvSpPr>
+            <a:spLocks noGrp="1"/>
+          </p:cNvSpPr>
+          <p:nvPr>
+            <p:ph type="title"/>
+          </p:nvPr>
+        </p:nvSpPr>
+        <p:spPr/>
+        <p:txBody>
+          <a:bodyPr/>
+          <a:lstStyle/>
+          <a:p>
+            <a:r>
+              <a:rPr sz="2400" b="1" i="0">
+                <a:solidFill>
+                  <a:srgbClr val="000000"/>
+                </a:solidFill>
+                <a:latin typeface="Times New Roman"/>
+                <a:ea typeface="Times New Roman"/>
+                <a:cs typeface="Times New Roman"/>
+              </a:rPr>
+              <a:t>REFERENCES (1/2)</a:t>
+            </a:r>
+          </a:p>
+        </p:txBody>
+      </p:sp>
+      <p:sp>
+        <p:nvSpPr>
+          <p:cNvPr id="25" name="PlaceHolder 2"/>
+          <p:cNvSpPr>
+            <a:spLocks noGrp="1"/>
+          </p:cNvSpPr>
+          <p:nvPr>
+            <p:ph type="sldNum" idx="5"/>
+          </p:nvPr>
+        </p:nvSpPr>
+        <p:spPr>
+          <a:xfrm>
+            <a:off x="10865880" y="384120"/>
+            <a:ext cx="730440" cy="456120"/>
+          </a:xfrm>
+          <a:prstGeom prst="rect">
+            <a:avLst/>
+          </a:prstGeom>
+          <a:noFill/>
+          <a:ln w="0">
+            <a:noFill/>
+          </a:ln>
+        </p:spPr>
+        <p:txBody>
+          <a:bodyPr lIns="90000" tIns="45000" rIns="90000" bIns="45000" anchor="t">
+            <a:noAutofit/>
+          </a:bodyPr>
+          <a:lstStyle>
+            <a:lvl1pPr indent="0" algn="r" defTabSz="914400">
+              <a:lnSpc>
+                <a:spcPct val="100000"/>
+              </a:lnSpc>
+              <a:buNone/>
+              <a:tabLst>
+                <a:tab pos="0" algn="l"/>
+              </a:tabLst>
+              <a:defRPr lang="en-US" sz="1800" b="0" u="none" strike="noStrike">
+                <a:solidFill>
+                  <a:srgbClr val="000000"/>
+                </a:solidFill>
+                <a:effectLst/>
+                <a:uFillTx/>
+                <a:latin typeface="Times New Roman"/>
+                <a:ea typeface="Times New Roman"/>
+              </a:defRPr>
+            </a:lvl1pPr>
+          </a:lstStyle>
+          <a:p>
+            <a:pPr indent="0" algn="r" defTabSz="914400">
+              <a:lnSpc>
+                <a:spcPct val="100000"/>
+              </a:lnSpc>
+              <a:buNone/>
+              <a:tabLst>
+                <a:tab pos="0" algn="l"/>
+              </a:tabLst>
+            </a:pPr>
+            <a:fld id="{9873986A-C957-40DB-B7BB-3EB1CE963720}" type="slidenum">
+              <a:rPr lang="en-US" sz="1800" b="0" u="none" strike="noStrike">
+                <a:solidFill>
+                  <a:srgbClr val="000000"/>
+                </a:solidFill>
+                <a:effectLst/>
+                <a:uFillTx/>
+                <a:latin typeface="Times New Roman"/>
+                <a:ea typeface="Times New Roman"/>
+              </a:rPr>
+              <a:t>&lt;number&gt;</a:t>
+            </a:fld>
+            <a:endParaRPr lang="en-US" sz="1600" b="0" u="none" strike="noStrike">
+              <a:solidFill>
+                <a:srgbClr val="000000"/>
+              </a:solidFill>
+              <a:effectLst/>
+              <a:uFillTx/>
+              <a:latin typeface="Times New Roman"/>
+            </a:endParaRPr>
+          </a:p>
+        </p:txBody>
+      </p:sp>
+      <p:sp>
+        <p:nvSpPr>
+          <p:cNvPr id="26" name="TextBox 25"/>
+          <p:cNvSpPr txBox="1"/>
+          <p:nvPr/>
+        </p:nvSpPr>
+        <p:spPr>
+          <a:xfrm>
+            <a:off x="594360" y="1280160"/>
+            <a:ext cx="11000232" cy="4983480"/>
+          </a:xfrm>
+          <a:prstGeom prst="rect">
+            <a:avLst/>
+          </a:prstGeom>
+          <a:noFill/>
+        </p:spPr>
+        <p:txBody>
+          <a:bodyPr wrap="square" lIns="45720" rIns="45720" tIns="27432" bIns="27432"/>
+          <a:lstStyle/>
+          <a:p>
+            <a:pPr marL="548640" indent="-548640">
+              <a:spcAft>
+                <a:spcPts val="300"/>
+              </a:spcAft>
+              <a:buNone/>
+              <a:tabLst>
+                <a:tab pos="548640" algn="l"/>
+              </a:tabLst>
+            </a:pPr>
+            <a:r>
+              <a:rPr sz="1800" b="0" i="0">
+                <a:solidFill>
+                  <a:srgbClr val="000000"/>
+                </a:solidFill>
+                <a:latin typeface="Times New Roman"/>
+                <a:ea typeface="Times New Roman"/>
+                <a:cs typeface="Times New Roman"/>
+              </a:rPr>
+              <a:t>[1]	</a:t>
+            </a:r>
+            <a:r>
+              <a:rPr sz="1800" b="0" i="0">
+                <a:solidFill>
+                  <a:srgbClr val="000000"/>
+                </a:solidFill>
+                <a:latin typeface="Times New Roman"/>
+                <a:ea typeface="Times New Roman"/>
+                <a:cs typeface="Times New Roman"/>
+              </a:rPr>
+              <a:t>N. F. Liu et al., "Lost in the middle: How language models use long contexts," </a:t>
+            </a:r>
+            <a:r>
+              <a:rPr sz="1800" b="0" i="1">
+                <a:solidFill>
+                  <a:srgbClr val="000000"/>
+                </a:solidFill>
+                <a:latin typeface="Times New Roman"/>
+                <a:ea typeface="Times New Roman"/>
+                <a:cs typeface="Times New Roman"/>
+              </a:rPr>
+              <a:t>Trans. Assoc. Comput. Linguist.</a:t>
+            </a:r>
+            <a:r>
+              <a:rPr sz="1800" b="0" i="0">
+                <a:solidFill>
+                  <a:srgbClr val="000000"/>
+                </a:solidFill>
+                <a:latin typeface="Times New Roman"/>
+                <a:ea typeface="Times New Roman"/>
+                <a:cs typeface="Times New Roman"/>
+              </a:rPr>
+              <a:t>, vol. 12, pp. 157–173, 2024.</a:t>
+            </a:r>
+          </a:p>
+          <a:p>
+            <a:pPr marL="548640" indent="-548640">
+              <a:spcAft>
+                <a:spcPts val="300"/>
+              </a:spcAft>
+              <a:buNone/>
+              <a:tabLst>
+                <a:tab pos="548640" algn="l"/>
+              </a:tabLst>
+            </a:pPr>
+            <a:r>
+              <a:rPr sz="1800" b="0" i="0">
+                <a:solidFill>
+                  <a:srgbClr val="000000"/>
+                </a:solidFill>
+                <a:latin typeface="Times New Roman"/>
+                <a:ea typeface="Times New Roman"/>
+                <a:cs typeface="Times New Roman"/>
+              </a:rPr>
+              <a:t>[2]	</a:t>
+            </a:r>
+            <a:r>
+              <a:rPr sz="1800" b="0" i="0">
+                <a:solidFill>
+                  <a:srgbClr val="000000"/>
+                </a:solidFill>
+                <a:latin typeface="Times New Roman"/>
+                <a:ea typeface="Times New Roman"/>
+                <a:cs typeface="Times New Roman"/>
+              </a:rPr>
+              <a:t>D. Wu, H. Wang, W. Yu, Y. Zhang, K.-W. Chang, and D. Yu, "LongMemEval: Benchmarking chat assistants on long-term interactive memory," in </a:t>
+            </a:r>
+            <a:r>
+              <a:rPr sz="1800" b="0" i="1">
+                <a:solidFill>
+                  <a:srgbClr val="000000"/>
+                </a:solidFill>
+                <a:latin typeface="Times New Roman"/>
+                <a:ea typeface="Times New Roman"/>
+                <a:cs typeface="Times New Roman"/>
+              </a:rPr>
+              <a:t>Proc. Int. Conf. Learn. Represent. (ICLR)</a:t>
+            </a:r>
+            <a:r>
+              <a:rPr sz="1800" b="0" i="0">
+                <a:solidFill>
+                  <a:srgbClr val="000000"/>
+                </a:solidFill>
+                <a:latin typeface="Times New Roman"/>
+                <a:ea typeface="Times New Roman"/>
+                <a:cs typeface="Times New Roman"/>
+              </a:rPr>
+              <a:t>, 2025, pp. 86809–86836.</a:t>
+            </a:r>
+          </a:p>
+          <a:p>
+            <a:pPr marL="548640" indent="-548640">
+              <a:spcAft>
+                <a:spcPts val="300"/>
+              </a:spcAft>
+              <a:buNone/>
+              <a:tabLst>
+                <a:tab pos="548640" algn="l"/>
+              </a:tabLst>
+            </a:pPr>
+            <a:r>
+              <a:rPr sz="1800" b="0" i="0">
+                <a:solidFill>
+                  <a:srgbClr val="000000"/>
+                </a:solidFill>
+                <a:latin typeface="Times New Roman"/>
+                <a:ea typeface="Times New Roman"/>
+                <a:cs typeface="Times New Roman"/>
+              </a:rPr>
+              <a:t>[3]	</a:t>
+            </a:r>
+            <a:r>
+              <a:rPr sz="1800" b="0" i="0">
+                <a:solidFill>
+                  <a:srgbClr val="000000"/>
+                </a:solidFill>
+                <a:latin typeface="Times New Roman"/>
+                <a:ea typeface="Times New Roman"/>
+                <a:cs typeface="Times New Roman"/>
+              </a:rPr>
+              <a:t>C. Packer et al., "MemGPT: Towards LLMs as operating systems," 2023, </a:t>
+            </a:r>
+            <a:r>
+              <a:rPr sz="1800" b="0" i="1">
+                <a:solidFill>
+                  <a:srgbClr val="000000"/>
+                </a:solidFill>
+                <a:latin typeface="Times New Roman"/>
+                <a:ea typeface="Times New Roman"/>
+                <a:cs typeface="Times New Roman"/>
+              </a:rPr>
+              <a:t>arXiv:2310.08560</a:t>
+            </a:r>
+            <a:r>
+              <a:rPr sz="1800" b="0" i="0">
+                <a:solidFill>
+                  <a:srgbClr val="000000"/>
+                </a:solidFill>
+                <a:latin typeface="Times New Roman"/>
+                <a:ea typeface="Times New Roman"/>
+                <a:cs typeface="Times New Roman"/>
+              </a:rPr>
+              <a:t>.</a:t>
+            </a:r>
+          </a:p>
+          <a:p>
+            <a:pPr marL="548640" indent="-548640">
+              <a:spcAft>
+                <a:spcPts val="300"/>
+              </a:spcAft>
+              <a:buNone/>
+              <a:tabLst>
+                <a:tab pos="548640" algn="l"/>
+              </a:tabLst>
+            </a:pPr>
+            <a:r>
+              <a:rPr sz="1800" b="0" i="0">
+                <a:solidFill>
+                  <a:srgbClr val="000000"/>
+                </a:solidFill>
+                <a:latin typeface="Times New Roman"/>
+                <a:ea typeface="Times New Roman"/>
+                <a:cs typeface="Times New Roman"/>
+              </a:rPr>
+              <a:t>[4]	</a:t>
+            </a:r>
+            <a:r>
+              <a:rPr sz="1800" b="0" i="0">
+                <a:solidFill>
+                  <a:srgbClr val="000000"/>
+                </a:solidFill>
+                <a:latin typeface="Times New Roman"/>
+                <a:ea typeface="Times New Roman"/>
+                <a:cs typeface="Times New Roman"/>
+              </a:rPr>
+              <a:t>P. Rasmussen, P. Paliychuk, T. Beauvais, J. Ryan, and D. Chalef, "Zep: A temporal knowledge graph architecture for agent memory," 2025, </a:t>
+            </a:r>
+            <a:r>
+              <a:rPr sz="1800" b="0" i="1">
+                <a:solidFill>
+                  <a:srgbClr val="000000"/>
+                </a:solidFill>
+                <a:latin typeface="Times New Roman"/>
+                <a:ea typeface="Times New Roman"/>
+                <a:cs typeface="Times New Roman"/>
+              </a:rPr>
+              <a:t>arXiv:2501.13956</a:t>
+            </a:r>
+            <a:r>
+              <a:rPr sz="1800" b="0" i="0">
+                <a:solidFill>
+                  <a:srgbClr val="000000"/>
+                </a:solidFill>
+                <a:latin typeface="Times New Roman"/>
+                <a:ea typeface="Times New Roman"/>
+                <a:cs typeface="Times New Roman"/>
+              </a:rPr>
+              <a:t>.</a:t>
+            </a:r>
+          </a:p>
+          <a:p>
+            <a:pPr marL="548640" indent="-548640">
+              <a:spcAft>
+                <a:spcPts val="300"/>
+              </a:spcAft>
+              <a:buNone/>
+              <a:tabLst>
+                <a:tab pos="548640" algn="l"/>
+              </a:tabLst>
+            </a:pPr>
+            <a:r>
+              <a:rPr sz="1800" b="0" i="0">
+                <a:solidFill>
+                  <a:srgbClr val="000000"/>
+                </a:solidFill>
+                <a:latin typeface="Times New Roman"/>
+                <a:ea typeface="Times New Roman"/>
+                <a:cs typeface="Times New Roman"/>
+              </a:rPr>
+              <a:t>[5]	</a:t>
+            </a:r>
+            <a:r>
+              <a:rPr sz="1800" b="0" i="0">
+                <a:solidFill>
+                  <a:srgbClr val="000000"/>
+                </a:solidFill>
+                <a:latin typeface="Times New Roman"/>
+                <a:ea typeface="Times New Roman"/>
+                <a:cs typeface="Times New Roman"/>
+              </a:rPr>
+              <a:t>P. Chhikara, D. Khant, S. Aryan, T. Singh, and D. Yadav, "Mem0: Building production-ready AI agents with scalable long-term memory," in </a:t>
+            </a:r>
+            <a:r>
+              <a:rPr sz="1800" b="0" i="1">
+                <a:solidFill>
+                  <a:srgbClr val="000000"/>
+                </a:solidFill>
+                <a:latin typeface="Times New Roman"/>
+                <a:ea typeface="Times New Roman"/>
+                <a:cs typeface="Times New Roman"/>
+              </a:rPr>
+              <a:t>Proc. 28th Eur. Conf. Artif. Intell. (ECAI)</a:t>
+            </a:r>
+            <a:r>
+              <a:rPr sz="1800" b="0" i="0">
+                <a:solidFill>
+                  <a:srgbClr val="000000"/>
+                </a:solidFill>
+                <a:latin typeface="Times New Roman"/>
+                <a:ea typeface="Times New Roman"/>
+                <a:cs typeface="Times New Roman"/>
+              </a:rPr>
+              <a:t>, 2025, pp. 2993–3000, doi: 10.3233/FAIA251160.</a:t>
+            </a:r>
+          </a:p>
+          <a:p>
+            <a:pPr marL="548640" indent="-548640">
+              <a:spcAft>
+                <a:spcPts val="300"/>
+              </a:spcAft>
+              <a:buNone/>
+              <a:tabLst>
+                <a:tab pos="548640" algn="l"/>
+              </a:tabLst>
+            </a:pPr>
+            <a:r>
+              <a:rPr sz="1800" b="0" i="0">
+                <a:solidFill>
+                  <a:srgbClr val="000000"/>
+                </a:solidFill>
+                <a:latin typeface="Times New Roman"/>
+                <a:ea typeface="Times New Roman"/>
+                <a:cs typeface="Times New Roman"/>
+              </a:rPr>
+              <a:t>[6]	</a:t>
+            </a:r>
+            <a:r>
+              <a:rPr sz="1800" b="0" i="0">
+                <a:solidFill>
+                  <a:srgbClr val="000000"/>
+                </a:solidFill>
+                <a:latin typeface="Times New Roman"/>
+                <a:ea typeface="Times New Roman"/>
+                <a:cs typeface="Times New Roman"/>
+              </a:rPr>
+              <a:t>S. Daga, S. Sreedhar, and D. Shah, "LongMemEval," Supermemory Research, May 2026. Accessed: Oct. 6, 2026. [Online]. Available: https://supermemory.ai/research/longmembench/</a:t>
+            </a:r>
+          </a:p>
+          <a:p>
+            <a:pPr marL="548640" indent="-548640">
+              <a:spcAft>
+                <a:spcPts val="300"/>
+              </a:spcAft>
+              <a:buNone/>
+              <a:tabLst>
+                <a:tab pos="548640" algn="l"/>
+              </a:tabLst>
+            </a:pPr>
+            <a:r>
+              <a:rPr sz="1800" b="0" i="0">
+                <a:solidFill>
+                  <a:srgbClr val="000000"/>
+                </a:solidFill>
+                <a:latin typeface="Times New Roman"/>
+                <a:ea typeface="Times New Roman"/>
+                <a:cs typeface="Times New Roman"/>
+              </a:rPr>
+              <a:t>[7]	</a:t>
+            </a:r>
+            <a:r>
+              <a:rPr sz="1800" b="0" i="0">
+                <a:solidFill>
+                  <a:srgbClr val="000000"/>
+                </a:solidFill>
+                <a:latin typeface="Times New Roman"/>
+                <a:ea typeface="Times New Roman"/>
+                <a:cs typeface="Times New Roman"/>
+              </a:rPr>
+              <a:t>C. Latimer et al., "Hindsight is 20/20: Building agent memory that retains, recalls, and reflects," 2025, </a:t>
+            </a:r>
+            <a:r>
+              <a:rPr sz="1800" b="0" i="1">
+                <a:solidFill>
+                  <a:srgbClr val="000000"/>
+                </a:solidFill>
+                <a:latin typeface="Times New Roman"/>
+                <a:ea typeface="Times New Roman"/>
+                <a:cs typeface="Times New Roman"/>
+              </a:rPr>
+              <a:t>arXiv:2512.12818</a:t>
+            </a:r>
+            <a:r>
+              <a:rPr sz="1800" b="0" i="0">
+                <a:solidFill>
+                  <a:srgbClr val="000000"/>
+                </a:solidFill>
+                <a:latin typeface="Times New Roman"/>
+                <a:ea typeface="Times New Roman"/>
+                <a:cs typeface="Times New Roman"/>
+              </a:rPr>
+              <a:t>.</a:t>
+            </a:r>
+          </a:p>
+          <a:p>
+            <a:pPr marL="548640" indent="-548640">
+              <a:spcAft>
+                <a:spcPts val="300"/>
+              </a:spcAft>
+              <a:buNone/>
+              <a:tabLst>
+                <a:tab pos="548640" algn="l"/>
+              </a:tabLst>
+            </a:pPr>
+            <a:r>
+              <a:rPr sz="1800" b="0" i="0">
+                <a:solidFill>
+                  <a:srgbClr val="000000"/>
+                </a:solidFill>
+                <a:latin typeface="Times New Roman"/>
+                <a:ea typeface="Times New Roman"/>
+                <a:cs typeface="Times New Roman"/>
+              </a:rPr>
+              <a:t>[8]	</a:t>
+            </a:r>
+            <a:r>
+              <a:rPr sz="1800" b="0" i="0">
+                <a:solidFill>
+                  <a:srgbClr val="000000"/>
+                </a:solidFill>
+                <a:latin typeface="Times New Roman"/>
+                <a:ea typeface="Times New Roman"/>
+                <a:cs typeface="Times New Roman"/>
+              </a:rPr>
+              <a:t>PostgreSQL Global Development Group, "Full text search," in </a:t>
+            </a:r>
+            <a:r>
+              <a:rPr sz="1800" b="0" i="1">
+                <a:solidFill>
+                  <a:srgbClr val="000000"/>
+                </a:solidFill>
+                <a:latin typeface="Times New Roman"/>
+                <a:ea typeface="Times New Roman"/>
+                <a:cs typeface="Times New Roman"/>
+              </a:rPr>
+              <a:t>PostgreSQL 17 Documentation</a:t>
+            </a:r>
+            <a:r>
+              <a:rPr sz="1800" b="0" i="0">
+                <a:solidFill>
+                  <a:srgbClr val="000000"/>
+                </a:solidFill>
+                <a:latin typeface="Times New Roman"/>
+                <a:ea typeface="Times New Roman"/>
+                <a:cs typeface="Times New Roman"/>
+              </a:rPr>
+              <a:t>, ch. 12, 2026. Accessed: Oct. 6, 2026. [Online]. Available: https://www.postgresql.org/docs/17/textsearch.html</a:t>
+            </a:r>
+          </a:p>
+        </p:txBody>
+      </p:sp>
+    </p:spTree>
+  </p:cSld>
+  <p:clrMapOvr>
+    <a:masterClrMapping/>
+  </p:clrMapOvr>
+</p:sld>
+</file>
+
+<file path=ppt/slides/slide32.xml><?xml version="1.0" encoding="utf-8"?>
+<p:sld xmlns:a="http://schemas.openxmlformats.org/drawingml/2006/main" xmlns:p="http://schemas.openxmlformats.org/presentationml/2006/main" xmlns:r="http://schemas.openxmlformats.org/officeDocument/2006/relationships">
+  <p:cSld>
+    <p:spTree>
+      <p:nvGrpSpPr>
+        <p:cNvPr id="1" name=""/>
+        <p:cNvGrpSpPr/>
+        <p:nvPr/>
+      </p:nvGrpSpPr>
+      <p:grpSpPr/>
+      <p:sp>
+        <p:nvSpPr>
+          <p:cNvPr id="2" name="Title 1"/>
+          <p:cNvSpPr>
+            <a:spLocks noGrp="1"/>
+          </p:cNvSpPr>
+          <p:nvPr>
+            <p:ph type="title"/>
+          </p:nvPr>
+        </p:nvSpPr>
+        <p:spPr/>
+        <p:txBody>
+          <a:bodyPr/>
+          <a:lstStyle/>
+          <a:p>
+            <a:r>
+              <a:rPr sz="2400" b="1" i="0">
+                <a:solidFill>
+                  <a:srgbClr val="000000"/>
+                </a:solidFill>
+                <a:latin typeface="Times New Roman"/>
+                <a:ea typeface="Times New Roman"/>
+                <a:cs typeface="Times New Roman"/>
+              </a:rPr>
+              <a:t>REFERENCES (2/2)</a:t>
+            </a:r>
+          </a:p>
+        </p:txBody>
+      </p:sp>
+      <p:sp>
+        <p:nvSpPr>
+          <p:cNvPr id="25" name="PlaceHolder 2"/>
+          <p:cNvSpPr>
+            <a:spLocks noGrp="1"/>
+          </p:cNvSpPr>
+          <p:nvPr>
+            <p:ph type="sldNum" idx="5"/>
+          </p:nvPr>
+        </p:nvSpPr>
+        <p:spPr>
+          <a:xfrm>
+            <a:off x="10865880" y="384120"/>
+            <a:ext cx="730440" cy="456120"/>
+          </a:xfrm>
+          <a:prstGeom prst="rect">
+            <a:avLst/>
+          </a:prstGeom>
+          <a:noFill/>
+          <a:ln w="0">
+            <a:noFill/>
+          </a:ln>
+        </p:spPr>
+        <p:txBody>
+          <a:bodyPr lIns="90000" tIns="45000" rIns="90000" bIns="45000" anchor="t">
+            <a:noAutofit/>
+          </a:bodyPr>
+          <a:lstStyle>
+            <a:lvl1pPr indent="0" algn="r" defTabSz="914400">
+              <a:lnSpc>
+                <a:spcPct val="100000"/>
+              </a:lnSpc>
+              <a:buNone/>
+              <a:tabLst>
+                <a:tab pos="0" algn="l"/>
+              </a:tabLst>
+              <a:defRPr lang="en-US" sz="1800" b="0" u="none" strike="noStrike">
+                <a:solidFill>
+                  <a:srgbClr val="000000"/>
+                </a:solidFill>
+                <a:effectLst/>
+                <a:uFillTx/>
+                <a:latin typeface="Times New Roman"/>
+                <a:ea typeface="Times New Roman"/>
+              </a:defRPr>
+            </a:lvl1pPr>
+          </a:lstStyle>
+          <a:p>
+            <a:pPr indent="0" algn="r" defTabSz="914400">
+              <a:lnSpc>
+                <a:spcPct val="100000"/>
+              </a:lnSpc>
+              <a:buNone/>
+              <a:tabLst>
+                <a:tab pos="0" algn="l"/>
+              </a:tabLst>
+            </a:pPr>
+            <a:fld id="{9873986A-C957-40DB-B7BB-3EB1CE963720}" type="slidenum">
+              <a:rPr lang="en-US" sz="1800" b="0" u="none" strike="noStrike">
+                <a:solidFill>
+                  <a:srgbClr val="000000"/>
+                </a:solidFill>
+                <a:effectLst/>
+                <a:uFillTx/>
+                <a:latin typeface="Times New Roman"/>
+                <a:ea typeface="Times New Roman"/>
+              </a:rPr>
+              <a:t>&lt;number&gt;</a:t>
+            </a:fld>
+            <a:endParaRPr lang="en-US" sz="1600" b="0" u="none" strike="noStrike">
+              <a:solidFill>
+                <a:srgbClr val="000000"/>
+              </a:solidFill>
+              <a:effectLst/>
+              <a:uFillTx/>
+              <a:latin typeface="Times New Roman"/>
+            </a:endParaRPr>
+          </a:p>
+        </p:txBody>
+      </p:sp>
+      <p:sp>
+        <p:nvSpPr>
+          <p:cNvPr id="26" name="TextBox 25"/>
+          <p:cNvSpPr txBox="1"/>
+          <p:nvPr/>
+        </p:nvSpPr>
+        <p:spPr>
+          <a:xfrm>
+            <a:off x="594360" y="1280160"/>
+            <a:ext cx="11000232" cy="4983480"/>
+          </a:xfrm>
+          <a:prstGeom prst="rect">
+            <a:avLst/>
+          </a:prstGeom>
+          <a:noFill/>
+        </p:spPr>
+        <p:txBody>
+          <a:bodyPr wrap="square" lIns="45720" rIns="45720" tIns="27432" bIns="27432"/>
+          <a:lstStyle/>
+          <a:p>
+            <a:pPr marL="548640" indent="-548640">
+              <a:spcAft>
+                <a:spcPts val="300"/>
+              </a:spcAft>
+              <a:buNone/>
+              <a:tabLst>
+                <a:tab pos="548640" algn="l"/>
+              </a:tabLst>
+            </a:pPr>
+            <a:r>
+              <a:rPr sz="1800" b="0" i="0">
+                <a:solidFill>
+                  <a:srgbClr val="000000"/>
+                </a:solidFill>
+                <a:latin typeface="Times New Roman"/>
+                <a:ea typeface="Times New Roman"/>
+                <a:cs typeface="Times New Roman"/>
+              </a:rPr>
+              <a:t>[9]	</a:t>
+            </a:r>
+            <a:r>
+              <a:rPr sz="1800" b="0" i="0">
+                <a:solidFill>
+                  <a:srgbClr val="000000"/>
+                </a:solidFill>
+                <a:latin typeface="Times New Roman"/>
+                <a:ea typeface="Times New Roman"/>
+                <a:cs typeface="Times New Roman"/>
+              </a:rPr>
+              <a:t>A. Kane et al., "pgvector: Open-source vector similarity search for Postgres," GitHub repository, 2026. Accessed: Oct. 6, 2026. [Online]. Available: https://github.com/pgvector/pgvector</a:t>
+            </a:r>
+          </a:p>
+          <a:p>
+            <a:pPr marL="548640" indent="-548640">
+              <a:spcAft>
+                <a:spcPts val="300"/>
+              </a:spcAft>
+              <a:buNone/>
+              <a:tabLst>
+                <a:tab pos="548640" algn="l"/>
+              </a:tabLst>
+            </a:pPr>
+            <a:r>
+              <a:rPr sz="1800" b="0" i="0">
+                <a:solidFill>
+                  <a:srgbClr val="000000"/>
+                </a:solidFill>
+                <a:latin typeface="Times New Roman"/>
+                <a:ea typeface="Times New Roman"/>
+                <a:cs typeface="Times New Roman"/>
+              </a:rPr>
+              <a:t>[10]	</a:t>
+            </a:r>
+            <a:r>
+              <a:rPr sz="1800" b="0" i="0">
+                <a:solidFill>
+                  <a:srgbClr val="000000"/>
+                </a:solidFill>
+                <a:latin typeface="Times New Roman"/>
+                <a:ea typeface="Times New Roman"/>
+                <a:cs typeface="Times New Roman"/>
+              </a:rPr>
+              <a:t>G. V. Cormack, C. L. A. Clarke, and S. Büttcher, "Reciprocal rank fusion outperforms Condorcet and individual rank learning methods," in </a:t>
+            </a:r>
+            <a:r>
+              <a:rPr sz="1800" b="0" i="1">
+                <a:solidFill>
+                  <a:srgbClr val="000000"/>
+                </a:solidFill>
+                <a:latin typeface="Times New Roman"/>
+                <a:ea typeface="Times New Roman"/>
+                <a:cs typeface="Times New Roman"/>
+              </a:rPr>
+              <a:t>Proc. 32nd Int. ACM SIGIR Conf. Res. Develop. Inf. Retrieval</a:t>
+            </a:r>
+            <a:r>
+              <a:rPr sz="1800" b="0" i="0">
+                <a:solidFill>
+                  <a:srgbClr val="000000"/>
+                </a:solidFill>
+                <a:latin typeface="Times New Roman"/>
+                <a:ea typeface="Times New Roman"/>
+                <a:cs typeface="Times New Roman"/>
+              </a:rPr>
+              <a:t>, Boston, MA, USA, 2009, pp. 758–759, doi: 10.1145/1571941.1572114.</a:t>
+            </a:r>
+          </a:p>
+          <a:p>
+            <a:pPr marL="548640" indent="-548640">
+              <a:spcAft>
+                <a:spcPts val="300"/>
+              </a:spcAft>
+              <a:buNone/>
+              <a:tabLst>
+                <a:tab pos="548640" algn="l"/>
+              </a:tabLst>
+            </a:pPr>
+            <a:r>
+              <a:rPr sz="1800" b="0" i="0">
+                <a:solidFill>
+                  <a:srgbClr val="000000"/>
+                </a:solidFill>
+                <a:latin typeface="Times New Roman"/>
+                <a:ea typeface="Times New Roman"/>
+                <a:cs typeface="Times New Roman"/>
+              </a:rPr>
+              <a:t>[11]	</a:t>
+            </a:r>
+            <a:r>
+              <a:rPr sz="1800" b="0" i="0">
+                <a:solidFill>
+                  <a:srgbClr val="000000"/>
+                </a:solidFill>
+                <a:latin typeface="Times New Roman"/>
+                <a:ea typeface="Times New Roman"/>
+                <a:cs typeface="Times New Roman"/>
+              </a:rPr>
+              <a:t>Neo4j, Inc., "Query the database," in </a:t>
+            </a:r>
+            <a:r>
+              <a:rPr sz="1800" b="0" i="1">
+                <a:solidFill>
+                  <a:srgbClr val="000000"/>
+                </a:solidFill>
+                <a:latin typeface="Times New Roman"/>
+                <a:ea typeface="Times New Roman"/>
+                <a:cs typeface="Times New Roman"/>
+              </a:rPr>
+              <a:t>Neo4j HTTP API Manual</a:t>
+            </a:r>
+            <a:r>
+              <a:rPr sz="1800" b="0" i="0">
+                <a:solidFill>
+                  <a:srgbClr val="000000"/>
+                </a:solidFill>
+                <a:latin typeface="Times New Roman"/>
+                <a:ea typeface="Times New Roman"/>
+                <a:cs typeface="Times New Roman"/>
+              </a:rPr>
+              <a:t>, v5, 2026. Accessed: Oct. 6, 2026. [Online]. Available: https://neo4j.com/docs/http-api/5/query/</a:t>
+            </a:r>
+          </a:p>
+          <a:p>
+            <a:pPr marL="548640" indent="-548640">
+              <a:spcAft>
+                <a:spcPts val="300"/>
+              </a:spcAft>
+              <a:buNone/>
+              <a:tabLst>
+                <a:tab pos="548640" algn="l"/>
+              </a:tabLst>
+            </a:pPr>
+            <a:r>
+              <a:rPr sz="1800" b="0" i="0">
+                <a:solidFill>
+                  <a:srgbClr val="000000"/>
+                </a:solidFill>
+                <a:latin typeface="Times New Roman"/>
+                <a:ea typeface="Times New Roman"/>
+                <a:cs typeface="Times New Roman"/>
+              </a:rPr>
+              <a:t>[12]	</a:t>
+            </a:r>
+            <a:r>
+              <a:rPr sz="1800" b="0" i="0">
+                <a:solidFill>
+                  <a:srgbClr val="000000"/>
+                </a:solidFill>
+                <a:latin typeface="Times New Roman"/>
+                <a:ea typeface="Times New Roman"/>
+                <a:cs typeface="Times New Roman"/>
+              </a:rPr>
+              <a:t>Y. Zhang et al., "Qwen3 Embedding: Advancing text embedding and reranking through foundation models," 2025, </a:t>
+            </a:r>
+            <a:r>
+              <a:rPr sz="1800" b="0" i="1">
+                <a:solidFill>
+                  <a:srgbClr val="000000"/>
+                </a:solidFill>
+                <a:latin typeface="Times New Roman"/>
+                <a:ea typeface="Times New Roman"/>
+                <a:cs typeface="Times New Roman"/>
+              </a:rPr>
+              <a:t>arXiv:2506.05176</a:t>
+            </a:r>
+            <a:r>
+              <a:rPr sz="1800" b="0" i="0">
+                <a:solidFill>
+                  <a:srgbClr val="000000"/>
+                </a:solidFill>
+                <a:latin typeface="Times New Roman"/>
+                <a:ea typeface="Times New Roman"/>
+                <a:cs typeface="Times New Roman"/>
+              </a:rPr>
+              <a:t>.</a:t>
+            </a:r>
+          </a:p>
+          <a:p>
+            <a:pPr marL="548640" indent="-548640">
+              <a:spcAft>
+                <a:spcPts val="300"/>
+              </a:spcAft>
+              <a:buNone/>
+              <a:tabLst>
+                <a:tab pos="548640" algn="l"/>
+              </a:tabLst>
+            </a:pPr>
+            <a:r>
+              <a:rPr sz="1800" b="0" i="0">
+                <a:solidFill>
+                  <a:srgbClr val="000000"/>
+                </a:solidFill>
+                <a:latin typeface="Times New Roman"/>
+                <a:ea typeface="Times New Roman"/>
+                <a:cs typeface="Times New Roman"/>
+              </a:rPr>
+              <a:t>[13]	</a:t>
+            </a:r>
+            <a:r>
+              <a:rPr sz="1800" b="0" i="0">
+                <a:solidFill>
+                  <a:srgbClr val="000000"/>
+                </a:solidFill>
+                <a:latin typeface="Times New Roman"/>
+                <a:ea typeface="Times New Roman"/>
+                <a:cs typeface="Times New Roman"/>
+              </a:rPr>
+              <a:t>M. Zechner et al., "pi: AI agent toolkit," GitHub repository, 2026. Accessed: Oct. 6, 2026. [Online]. Available: https://github.com/earendil-works/pi</a:t>
+            </a:r>
+          </a:p>
+          <a:p>
+            <a:pPr marL="548640" indent="-548640">
+              <a:spcAft>
+                <a:spcPts val="300"/>
+              </a:spcAft>
+              <a:buNone/>
+              <a:tabLst>
+                <a:tab pos="548640" algn="l"/>
+              </a:tabLst>
+            </a:pPr>
+            <a:r>
+              <a:rPr sz="1800" b="0" i="0">
+                <a:solidFill>
+                  <a:srgbClr val="000000"/>
+                </a:solidFill>
+                <a:latin typeface="Times New Roman"/>
+                <a:ea typeface="Times New Roman"/>
+                <a:cs typeface="Times New Roman"/>
+              </a:rPr>
+              <a:t>[14]	</a:t>
+            </a:r>
+            <a:r>
+              <a:rPr sz="1800" b="0" i="0">
+                <a:solidFill>
+                  <a:srgbClr val="000000"/>
+                </a:solidFill>
+                <a:latin typeface="Times New Roman"/>
+                <a:ea typeface="Times New Roman"/>
+                <a:cs typeface="Times New Roman"/>
+              </a:rPr>
+              <a:t>T. Dettmers, A. Pagnoni, A. Holtzman, and L. Zettlemoyer, "QLoRA: Efficient finetuning of quantized LLMs," in </a:t>
+            </a:r>
+            <a:r>
+              <a:rPr sz="1800" b="0" i="1">
+                <a:solidFill>
+                  <a:srgbClr val="000000"/>
+                </a:solidFill>
+                <a:latin typeface="Times New Roman"/>
+                <a:ea typeface="Times New Roman"/>
+                <a:cs typeface="Times New Roman"/>
+              </a:rPr>
+              <a:t>Proc. Adv. Neural Inf. Process. Syst. (NeurIPS)</a:t>
+            </a:r>
+            <a:r>
+              <a:rPr sz="1800" b="0" i="0">
+                <a:solidFill>
+                  <a:srgbClr val="000000"/>
+                </a:solidFill>
+                <a:latin typeface="Times New Roman"/>
+                <a:ea typeface="Times New Roman"/>
+                <a:cs typeface="Times New Roman"/>
+              </a:rPr>
+              <a:t>, vol. 36, 2023, pp. 10088–10115.</a:t>
+            </a:r>
+          </a:p>
+          <a:p>
+            <a:pPr marL="548640" indent="-548640">
+              <a:spcAft>
+                <a:spcPts val="300"/>
+              </a:spcAft>
+              <a:buNone/>
+              <a:tabLst>
+                <a:tab pos="548640" algn="l"/>
+              </a:tabLst>
+            </a:pPr>
+            <a:r>
+              <a:rPr sz="1800" b="0" i="0">
+                <a:solidFill>
+                  <a:srgbClr val="000000"/>
+                </a:solidFill>
+                <a:latin typeface="Times New Roman"/>
+                <a:ea typeface="Times New Roman"/>
+                <a:cs typeface="Times New Roman"/>
+              </a:rPr>
+              <a:t>[15]	</a:t>
+            </a:r>
+            <a:r>
+              <a:rPr sz="1800" b="0" i="0">
+                <a:solidFill>
+                  <a:srgbClr val="000000"/>
+                </a:solidFill>
+                <a:latin typeface="Times New Roman"/>
+                <a:ea typeface="Times New Roman"/>
+                <a:cs typeface="Times New Roman"/>
+              </a:rPr>
+              <a:t>A. Maharana, D.-H. Lee, S. Tulyakov, M. Bansal, F. Barbieri, and Y. Fang, "Evaluating very long-term conversational memory of LLM agents," in </a:t>
+            </a:r>
+            <a:r>
+              <a:rPr sz="1800" b="0" i="1">
+                <a:solidFill>
+                  <a:srgbClr val="000000"/>
+                </a:solidFill>
+                <a:latin typeface="Times New Roman"/>
+                <a:ea typeface="Times New Roman"/>
+                <a:cs typeface="Times New Roman"/>
+              </a:rPr>
+              <a:t>Proc. 62nd Annu. Meeting Assoc. Comput. Linguist.</a:t>
+            </a:r>
+            <a:r>
+              <a:rPr sz="1800" b="0" i="0">
+                <a:solidFill>
+                  <a:srgbClr val="000000"/>
+                </a:solidFill>
+                <a:latin typeface="Times New Roman"/>
+                <a:ea typeface="Times New Roman"/>
+                <a:cs typeface="Times New Roman"/>
+              </a:rPr>
+              <a:t>, Bangkok, Thailand, 2024, pp. 13851–13870, doi: 10.18653/v1/2024.acl-long.747.</a:t>
+            </a:r>
+          </a:p>
+        </p:txBody>
+      </p:sp>
     </p:spTree>
   </p:cSld>
   <p:clrMapOvr>
@@ -18619,7 +19909,7 @@
                           <a:ea typeface="Times New Roman"/>
                           <a:cs typeface="Times New Roman"/>
                         </a:rPr>
-                        <a:t>Atomic memories linked to source chunks, with "updates", "extends" and "derives" links and two timestamps.</a:t>
+                        <a:t>Small memories linked to the text they came from, with "updates", "extends" and "derives" links and two timestamps.</a:t>
                       </a:r>
                     </a:p>
                   </a:txBody>
@@ -18673,7 +19963,7 @@
                           <a:ea typeface="Times New Roman"/>
                           <a:cs typeface="Times New Roman"/>
                         </a:rPr>
-                        <a:t>LongMemEval-S scores by category, from the vendor's own run.</a:t>
+                        <a:t>Scores on LongMemEval-S (the standard-size version), from the company's own run.</a:t>
                       </a:r>
                     </a:p>
                   </a:txBody>
@@ -18837,7 +20127,7 @@
                           <a:ea typeface="Times New Roman"/>
                           <a:cs typeface="Times New Roman"/>
                         </a:rPr>
-                        <a:t>Retain, recall and reflect operations. Recall fuses four retrieval strategies by rank and packs the result into a token budget.</a:t>
+                        <a:t>Retain, recall and reflect operations. Recall merges four kinds of search by rank and trims the result to a size limit.</a:t>
                       </a:r>
                     </a:p>
                   </a:txBody>
@@ -18945,7 +20235,7 @@
                           <a:ea typeface="Times New Roman"/>
                           <a:cs typeface="Times New Roman"/>
                         </a:rPr>
-                        <a:t>Not peer reviewed. No ablation or variance, and the token budget is not stated.</a:t>
+                        <a:t>Not peer reviewed. No repeated runs or component-by-component tests, and the size limit is not stated.</a:t>
                       </a:r>
                     </a:p>
                   </a:txBody>
@@ -19055,7 +20345,7 @@
                           <a:ea typeface="Times New Roman"/>
                           <a:cs typeface="Times New Roman"/>
                         </a:rPr>
-                        <a:t>No separate memory. The whole conversation goes into the model's context.</a:t>
+                        <a:t>No separate memory. The whole conversation goes into the model's input.</a:t>
                       </a:r>
                     </a:p>
                   </a:txBody>
@@ -19535,7 +20825,7 @@
                           <a:ea typeface="Times New Roman"/>
                           <a:cs typeface="Times New Roman"/>
                         </a:rPr>
-                        <a:t>The model decides how memory changes, so a missed or wrong call silently loses or overwrites a memory.</a:t>
+                        <a:t>G1. The model decides how memory changes, so one wrong call silently loses or overwrites a memory.</a:t>
                       </a:r>
                     </a:p>
                   </a:txBody>
@@ -19589,7 +20879,7 @@
                           <a:ea typeface="Times New Roman"/>
                           <a:cs typeface="Times New Roman"/>
                         </a:rPr>
-                        <a:t>MemGPT [3], Mem0 [5]</a:t>
+                        <a:t>MemGPT [3], Mem0 paper [5]</a:t>
                       </a:r>
                     </a:p>
                   </a:txBody>
@@ -19643,7 +20933,7 @@
                           <a:ea typeface="Times New Roman"/>
                           <a:cs typeface="Times New Roman"/>
                         </a:rPr>
-                        <a:t>Update rules are plain service code: one value or many per slot, plus a reviewed correction flag.</a:t>
+                        <a:t>Changes follow fixed rules written in code, not a model decision.</a:t>
                       </a:r>
                     </a:p>
                   </a:txBody>
@@ -19699,7 +20989,7 @@
                           <a:ea typeface="Times New Roman"/>
                           <a:cs typeface="Times New Roman"/>
                         </a:rPr>
-                        <a:t>Changed values are overwritten or deleted, so there is no record of what used to be true.</a:t>
+                        <a:t>G2. Changed values are overwritten or deleted, so nobody can see what used to be true.</a:t>
                       </a:r>
                     </a:p>
                   </a:txBody>
@@ -19753,7 +21043,7 @@
                           <a:ea typeface="Times New Roman"/>
                           <a:cs typeface="Times New Roman"/>
                         </a:rPr>
-                        <a:t>Mem0 [5], MemGPT [3]; Zep [4] keeps it only in its graph</a:t>
+                        <a:t>Mem0 [5], MemGPT [3]; Zep [4] keeps history only in its graph</a:t>
                       </a:r>
                     </a:p>
                   </a:txBody>
@@ -19807,7 +21097,7 @@
                           <a:ea typeface="Times New Roman"/>
                           <a:cs typeface="Times New Roman"/>
                         </a:rPr>
-                        <a:t>Each change is a new version with a validity interval in PostgreSQL. The graph is a copy we can rebuild.</a:t>
+                        <a:t>Every change is a new version that records when it was valid.</a:t>
                       </a:r>
                     </a:p>
                   </a:txBody>
@@ -19863,7 +21153,7 @@
                           <a:ea typeface="Times New Roman"/>
                           <a:cs typeface="Times New Roman"/>
                         </a:rPr>
-                        <a:t>Stored memories are hard to check against what the user actually said.</a:t>
+                        <a:t>G3. A stored memory is hard to check against what the user actually said.</a:t>
                       </a:r>
                     </a:p>
                   </a:txBody>
@@ -19971,7 +21261,7 @@
                           <a:ea typeface="Times New Roman"/>
                           <a:cs typeface="Times New Roman"/>
                         </a:rPr>
-                        <a:t>Every assertion cites an exact quote, and the quote is matched against the original message.</a:t>
+                        <a:t>Every memory cites an exact quote, matched against the original message.</a:t>
                       </a:r>
                     </a:p>
                   </a:txBody>
@@ -20027,7 +21317,7 @@
                           <a:ea typeface="Times New Roman"/>
                           <a:cs typeface="Times New Roman"/>
                         </a:rPr>
-                        <a:t>Extraction depends on large hosted models, which adds cost, latency and privacy concerns.</a:t>
+                        <a:t>G4. Extraction depends on large hosted models, which adds cost and sends user data to a third party.</a:t>
                       </a:r>
                     </a:p>
                   </a:txBody>
@@ -20135,7 +21425,7 @@
                           <a:ea typeface="Times New Roman"/>
                           <a:cs typeface="Times New Roman"/>
                         </a:rPr>
-                        <a:t>A fine-tuned 4B model does extraction, consolidation and answering locally through Ollama.</a:t>
+                        <a:t>A small fine-tuned model runs on our own machine.</a:t>
                       </a:r>
                     </a:p>
                   </a:txBody>
@@ -20191,7 +21481,7 @@
                           <a:ea typeface="Times New Roman"/>
                           <a:cs typeface="Times New Roman"/>
                         </a:rPr>
-                        <a:t>Results are hard to compare: single runs, vendor-run benchmarks, different judges and unstated budgets.</a:t>
+                        <a:t>G5. Results are hard to compare: single runs, company-run benchmarks, different judges.</a:t>
                       </a:r>
                     </a:p>
                   </a:txBody>
@@ -20299,7 +21589,7 @@
                           <a:ea typeface="Times New Roman"/>
                           <a:cs typeface="Times New Roman"/>
                         </a:rPr>
-                        <a:t>We publish our own test cases and run LongMemEval-S with fixed settings.</a:t>
+                        <a:t>We publish our test cases and are running LongMemEval-S with fixed settings.</a:t>
                       </a:r>
                     </a:p>
                   </a:txBody>
@@ -20465,147 +21755,800 @@
           </a:p>
         </p:txBody>
       </p:sp>
-      <p:sp>
-        <p:nvSpPr>
-          <p:cNvPr id="26" name="TextBox 25"/>
-          <p:cNvSpPr txBox="1"/>
+      <p:graphicFrame>
+        <p:nvGraphicFramePr>
+          <p:cNvPr id="26" name="Table 25"/>
+          <p:cNvGraphicFramePr>
+            <a:graphicFrameLocks noGrp="1"/>
+          </p:cNvGraphicFramePr>
           <p:nvPr/>
-        </p:nvSpPr>
-        <p:spPr>
-          <a:xfrm>
-            <a:off x="594360" y="1371600"/>
-            <a:ext cx="11000232" cy="4846320"/>
-          </a:xfrm>
-          <a:prstGeom prst="rect">
-            <a:avLst/>
-          </a:prstGeom>
-          <a:noFill/>
-        </p:spPr>
-        <p:txBody>
-          <a:bodyPr wrap="square" lIns="45720" rIns="45720" tIns="27432" bIns="27432"/>
-          <a:lstStyle/>
-          <a:p>
-            <a:pPr marL="256032" indent="-256032">
-              <a:spcAft>
-                <a:spcPts val="1600"/>
-              </a:spcAft>
-              <a:buFont typeface="Arial"/>
-              <a:buChar char="•"/>
-            </a:pPr>
-            <a:r>
-              <a:rPr sz="1800" b="0" i="0">
-                <a:solidFill>
-                  <a:srgbClr val="000000"/>
-                </a:solidFill>
-                <a:latin typeface="Times New Roman"/>
-                <a:ea typeface="Times New Roman"/>
-                <a:cs typeface="Times New Roman"/>
-              </a:rPr>
-              <a:t>Keep useful information for a general-purpose AI agent across sessions.</a:t>
-            </a:r>
-          </a:p>
-          <a:p>
-            <a:pPr marL="256032" indent="-256032">
-              <a:spcAft>
-                <a:spcPts val="1600"/>
-              </a:spcAft>
-              <a:buFont typeface="Arial"/>
-              <a:buChar char="•"/>
-            </a:pPr>
-            <a:r>
-              <a:rPr sz="1800" b="0" i="0">
-                <a:solidFill>
-                  <a:srgbClr val="000000"/>
-                </a:solidFill>
-                <a:latin typeface="Times New Roman"/>
-                <a:ea typeface="Times New Roman"/>
-                <a:cs typeface="Times New Roman"/>
-              </a:rPr>
-              <a:t>Keep the latest version of an instruction without losing the earlier ones.</a:t>
-            </a:r>
-          </a:p>
-          <a:p>
-            <a:pPr marL="256032" indent="-256032">
-              <a:spcAft>
-                <a:spcPts val="1600"/>
-              </a:spcAft>
-              <a:buFont typeface="Arial"/>
-              <a:buChar char="•"/>
-            </a:pPr>
-            <a:r>
-              <a:rPr sz="1800" b="0" i="0">
-                <a:solidFill>
-                  <a:srgbClr val="000000"/>
-                </a:solidFill>
-                <a:latin typeface="Times New Roman"/>
-                <a:ea typeface="Times New Roman"/>
-                <a:cs typeface="Times New Roman"/>
-              </a:rPr>
-              <a:t>Link every stored assertion to the message it came from, so it can be checked.</a:t>
-            </a:r>
-          </a:p>
-          <a:p>
-            <a:pPr marL="256032" indent="-256032">
-              <a:spcAft>
-                <a:spcPts val="1600"/>
-              </a:spcAft>
-              <a:buFont typeface="Arial"/>
-              <a:buChar char="•"/>
-            </a:pPr>
-            <a:r>
-              <a:rPr sz="1800" b="0" i="0">
-                <a:solidFill>
-                  <a:srgbClr val="000000"/>
-                </a:solidFill>
-                <a:latin typeface="Times New Roman"/>
-                <a:ea typeface="Times New Roman"/>
-                <a:cs typeface="Times New Roman"/>
-              </a:rPr>
-              <a:t>Fine-tune a small local model to extract assertions, combine related ones and answer with citations.</a:t>
-            </a:r>
-          </a:p>
-          <a:p>
-            <a:pPr marL="256032" indent="-256032">
-              <a:spcAft>
-                <a:spcPts val="1600"/>
-              </a:spcAft>
-              <a:buFont typeface="Arial"/>
-              <a:buChar char="•"/>
-            </a:pPr>
-            <a:r>
-              <a:rPr sz="1800" b="0" i="0">
-                <a:solidFill>
-                  <a:srgbClr val="000000"/>
-                </a:solidFill>
-                <a:latin typeface="Times New Roman"/>
-                <a:ea typeface="Times New Roman"/>
-                <a:cs typeface="Times New Roman"/>
-              </a:rPr>
-              <a:t>Return the relevant memories quickly, within a fixed context budget.</a:t>
-            </a:r>
-          </a:p>
-          <a:p>
-            <a:pPr marL="256032" indent="-256032">
-              <a:spcAft>
-                <a:spcPts val="1600"/>
-              </a:spcAft>
-              <a:buFont typeface="Arial"/>
-              <a:buChar char="•"/>
-            </a:pPr>
-            <a:r>
-              <a:rPr sz="1800" b="0" i="0">
-                <a:solidFill>
-                  <a:srgbClr val="000000"/>
-                </a:solidFill>
-                <a:latin typeface="Times New Roman"/>
-                <a:ea typeface="Times New Roman"/>
-                <a:cs typeface="Times New Roman"/>
-              </a:rPr>
-              <a:t>Measure memory accuracy and retrieval quality with repeatable tests.</a:t>
-            </a:r>
-          </a:p>
-        </p:txBody>
-      </p:sp>
+        </p:nvGraphicFramePr>
+        <p:xfrm>
+          <a:off x="594360" y="1280160"/>
+          <a:ext cx="11000231" cy="3520440"/>
+        </p:xfrm>
+        <a:graphic>
+          <a:graphicData uri="http://schemas.openxmlformats.org/drawingml/2006/table">
+            <a:tbl>
+              <a:tblPr firstRow="1" bandRow="0"/>
+              <a:tblGrid>
+                <a:gridCol w="8800185"/>
+                <a:gridCol w="2200046"/>
+              </a:tblGrid>
+              <a:tr h="502920">
+                <a:tc>
+                  <a:txBody>
+                    <a:bodyPr wrap="square"/>
+                    <a:lstStyle/>
+                    <a:p>
+                      <a:pPr marL="0" indent="0">
+                        <a:spcAft>
+                          <a:spcPts val="0"/>
+                        </a:spcAft>
+                        <a:buNone/>
+                      </a:pPr>
+                      <a:r>
+                        <a:rPr sz="1800" b="1" i="0">
+                          <a:solidFill>
+                            <a:srgbClr val="000000"/>
+                          </a:solidFill>
+                          <a:latin typeface="Times New Roman"/>
+                          <a:ea typeface="Times New Roman"/>
+                          <a:cs typeface="Times New Roman"/>
+                        </a:rPr>
+                        <a:t>Objective</a:t>
+                      </a:r>
+                    </a:p>
+                  </a:txBody>
+                  <a:tcPr marL="73152" marR="73152" marT="36576" marB="36576">
+                    <a:lnL w="9525" cap="flat" cmpd="sng" algn="ctr">
+                      <a:solidFill>
+                        <a:srgbClr val="404040"/>
+                      </a:solidFill>
+                      <a:prstDash val="solid"/>
+                    </a:lnL>
+                    <a:lnR w="9525" cap="flat" cmpd="sng" algn="ctr">
+                      <a:solidFill>
+                        <a:srgbClr val="404040"/>
+                      </a:solidFill>
+                      <a:prstDash val="solid"/>
+                    </a:lnR>
+                    <a:lnT w="9525" cap="flat" cmpd="sng" algn="ctr">
+                      <a:solidFill>
+                        <a:srgbClr val="404040"/>
+                      </a:solidFill>
+                      <a:prstDash val="solid"/>
+                    </a:lnT>
+                    <a:lnB w="9525" cap="flat" cmpd="sng" algn="ctr">
+                      <a:solidFill>
+                        <a:srgbClr val="404040"/>
+                      </a:solidFill>
+                      <a:prstDash val="solid"/>
+                    </a:lnB>
+                    <a:solidFill>
+                      <a:srgbClr val="D9E2EC"/>
+                    </a:solidFill>
+                  </a:tcPr>
+                </a:tc>
+                <a:tc>
+                  <a:txBody>
+                    <a:bodyPr wrap="square"/>
+                    <a:lstStyle/>
+                    <a:p>
+                      <a:pPr marL="0" indent="0">
+                        <a:spcAft>
+                          <a:spcPts val="0"/>
+                        </a:spcAft>
+                        <a:buNone/>
+                      </a:pPr>
+                      <a:r>
+                        <a:rPr sz="1800" b="1" i="0">
+                          <a:solidFill>
+                            <a:srgbClr val="000000"/>
+                          </a:solidFill>
+                          <a:latin typeface="Times New Roman"/>
+                          <a:ea typeface="Times New Roman"/>
+                          <a:cs typeface="Times New Roman"/>
+                        </a:rPr>
+                        <a:t>Answers</a:t>
+                      </a:r>
+                    </a:p>
+                  </a:txBody>
+                  <a:tcPr marL="73152" marR="73152" marT="36576" marB="36576">
+                    <a:lnL w="9525" cap="flat" cmpd="sng" algn="ctr">
+                      <a:solidFill>
+                        <a:srgbClr val="404040"/>
+                      </a:solidFill>
+                      <a:prstDash val="solid"/>
+                    </a:lnL>
+                    <a:lnR w="9525" cap="flat" cmpd="sng" algn="ctr">
+                      <a:solidFill>
+                        <a:srgbClr val="404040"/>
+                      </a:solidFill>
+                      <a:prstDash val="solid"/>
+                    </a:lnR>
+                    <a:lnT w="9525" cap="flat" cmpd="sng" algn="ctr">
+                      <a:solidFill>
+                        <a:srgbClr val="404040"/>
+                      </a:solidFill>
+                      <a:prstDash val="solid"/>
+                    </a:lnT>
+                    <a:lnB w="9525" cap="flat" cmpd="sng" algn="ctr">
+                      <a:solidFill>
+                        <a:srgbClr val="404040"/>
+                      </a:solidFill>
+                      <a:prstDash val="solid"/>
+                    </a:lnB>
+                    <a:solidFill>
+                      <a:srgbClr val="D9E2EC"/>
+                    </a:solidFill>
+                  </a:tcPr>
+                </a:tc>
+              </a:tr>
+              <a:tr h="502920">
+                <a:tc>
+                  <a:txBody>
+                    <a:bodyPr wrap="square"/>
+                    <a:lstStyle/>
+                    <a:p>
+                      <a:pPr marL="0" indent="0">
+                        <a:spcAft>
+                          <a:spcPts val="0"/>
+                        </a:spcAft>
+                        <a:buNone/>
+                      </a:pPr>
+                      <a:r>
+                        <a:rPr sz="1800" b="0" i="0">
+                          <a:solidFill>
+                            <a:srgbClr val="000000"/>
+                          </a:solidFill>
+                          <a:latin typeface="Times New Roman"/>
+                          <a:ea typeface="Times New Roman"/>
+                          <a:cs typeface="Times New Roman"/>
+                        </a:rPr>
+                        <a:t>Keep useful information for an AI agent across sessions.</a:t>
+                      </a:r>
+                    </a:p>
+                  </a:txBody>
+                  <a:tcPr marL="73152" marR="73152" marT="36576" marB="36576">
+                    <a:lnL w="9525" cap="flat" cmpd="sng" algn="ctr">
+                      <a:solidFill>
+                        <a:srgbClr val="404040"/>
+                      </a:solidFill>
+                      <a:prstDash val="solid"/>
+                    </a:lnL>
+                    <a:lnR w="9525" cap="flat" cmpd="sng" algn="ctr">
+                      <a:solidFill>
+                        <a:srgbClr val="404040"/>
+                      </a:solidFill>
+                      <a:prstDash val="solid"/>
+                    </a:lnR>
+                    <a:lnT w="9525" cap="flat" cmpd="sng" algn="ctr">
+                      <a:solidFill>
+                        <a:srgbClr val="404040"/>
+                      </a:solidFill>
+                      <a:prstDash val="solid"/>
+                    </a:lnT>
+                    <a:lnB w="9525" cap="flat" cmpd="sng" algn="ctr">
+                      <a:solidFill>
+                        <a:srgbClr val="404040"/>
+                      </a:solidFill>
+                      <a:prstDash val="solid"/>
+                    </a:lnB>
+                    <a:solidFill>
+                      <a:srgbClr val="FFFFFF"/>
+                    </a:solidFill>
+                  </a:tcPr>
+                </a:tc>
+                <a:tc>
+                  <a:txBody>
+                    <a:bodyPr wrap="square"/>
+                    <a:lstStyle/>
+                    <a:p>
+                      <a:pPr marL="0" indent="0">
+                        <a:spcAft>
+                          <a:spcPts val="0"/>
+                        </a:spcAft>
+                        <a:buNone/>
+                      </a:pPr>
+                      <a:r>
+                        <a:rPr sz="1800" b="0" i="0">
+                          <a:solidFill>
+                            <a:srgbClr val="000000"/>
+                          </a:solidFill>
+                          <a:latin typeface="Times New Roman"/>
+                          <a:ea typeface="Times New Roman"/>
+                          <a:cs typeface="Times New Roman"/>
+                        </a:rPr>
+                        <a:t>Problem</a:t>
+                      </a:r>
+                    </a:p>
+                  </a:txBody>
+                  <a:tcPr marL="73152" marR="73152" marT="36576" marB="36576">
+                    <a:lnL w="9525" cap="flat" cmpd="sng" algn="ctr">
+                      <a:solidFill>
+                        <a:srgbClr val="404040"/>
+                      </a:solidFill>
+                      <a:prstDash val="solid"/>
+                    </a:lnL>
+                    <a:lnR w="9525" cap="flat" cmpd="sng" algn="ctr">
+                      <a:solidFill>
+                        <a:srgbClr val="404040"/>
+                      </a:solidFill>
+                      <a:prstDash val="solid"/>
+                    </a:lnR>
+                    <a:lnT w="9525" cap="flat" cmpd="sng" algn="ctr">
+                      <a:solidFill>
+                        <a:srgbClr val="404040"/>
+                      </a:solidFill>
+                      <a:prstDash val="solid"/>
+                    </a:lnT>
+                    <a:lnB w="9525" cap="flat" cmpd="sng" algn="ctr">
+                      <a:solidFill>
+                        <a:srgbClr val="404040"/>
+                      </a:solidFill>
+                      <a:prstDash val="solid"/>
+                    </a:lnB>
+                    <a:solidFill>
+                      <a:srgbClr val="FFFFFF"/>
+                    </a:solidFill>
+                  </a:tcPr>
+                </a:tc>
+              </a:tr>
+              <a:tr h="502920">
+                <a:tc>
+                  <a:txBody>
+                    <a:bodyPr wrap="square"/>
+                    <a:lstStyle/>
+                    <a:p>
+                      <a:pPr marL="0" indent="0">
+                        <a:spcAft>
+                          <a:spcPts val="0"/>
+                        </a:spcAft>
+                        <a:buNone/>
+                      </a:pPr>
+                      <a:r>
+                        <a:rPr sz="1800" b="0" i="0">
+                          <a:solidFill>
+                            <a:srgbClr val="000000"/>
+                          </a:solidFill>
+                          <a:latin typeface="Times New Roman"/>
+                          <a:ea typeface="Times New Roman"/>
+                          <a:cs typeface="Times New Roman"/>
+                        </a:rPr>
+                        <a:t>Apply changes with fixed rules in code, and keep earlier versions with the dates they were valid.</a:t>
+                      </a:r>
+                    </a:p>
+                  </a:txBody>
+                  <a:tcPr marL="73152" marR="73152" marT="36576" marB="36576">
+                    <a:lnL w="9525" cap="flat" cmpd="sng" algn="ctr">
+                      <a:solidFill>
+                        <a:srgbClr val="404040"/>
+                      </a:solidFill>
+                      <a:prstDash val="solid"/>
+                    </a:lnL>
+                    <a:lnR w="9525" cap="flat" cmpd="sng" algn="ctr">
+                      <a:solidFill>
+                        <a:srgbClr val="404040"/>
+                      </a:solidFill>
+                      <a:prstDash val="solid"/>
+                    </a:lnR>
+                    <a:lnT w="9525" cap="flat" cmpd="sng" algn="ctr">
+                      <a:solidFill>
+                        <a:srgbClr val="404040"/>
+                      </a:solidFill>
+                      <a:prstDash val="solid"/>
+                    </a:lnT>
+                    <a:lnB w="9525" cap="flat" cmpd="sng" algn="ctr">
+                      <a:solidFill>
+                        <a:srgbClr val="404040"/>
+                      </a:solidFill>
+                      <a:prstDash val="solid"/>
+                    </a:lnB>
+                    <a:solidFill>
+                      <a:srgbClr val="FFFFFF"/>
+                    </a:solidFill>
+                  </a:tcPr>
+                </a:tc>
+                <a:tc>
+                  <a:txBody>
+                    <a:bodyPr wrap="square"/>
+                    <a:lstStyle/>
+                    <a:p>
+                      <a:pPr marL="0" indent="0">
+                        <a:spcAft>
+                          <a:spcPts val="0"/>
+                        </a:spcAft>
+                        <a:buNone/>
+                      </a:pPr>
+                      <a:r>
+                        <a:rPr sz="1800" b="0" i="0">
+                          <a:solidFill>
+                            <a:srgbClr val="000000"/>
+                          </a:solidFill>
+                          <a:latin typeface="Times New Roman"/>
+                          <a:ea typeface="Times New Roman"/>
+                          <a:cs typeface="Times New Roman"/>
+                        </a:rPr>
+                        <a:t>G1, G2</a:t>
+                      </a:r>
+                    </a:p>
+                  </a:txBody>
+                  <a:tcPr marL="73152" marR="73152" marT="36576" marB="36576">
+                    <a:lnL w="9525" cap="flat" cmpd="sng" algn="ctr">
+                      <a:solidFill>
+                        <a:srgbClr val="404040"/>
+                      </a:solidFill>
+                      <a:prstDash val="solid"/>
+                    </a:lnL>
+                    <a:lnR w="9525" cap="flat" cmpd="sng" algn="ctr">
+                      <a:solidFill>
+                        <a:srgbClr val="404040"/>
+                      </a:solidFill>
+                      <a:prstDash val="solid"/>
+                    </a:lnR>
+                    <a:lnT w="9525" cap="flat" cmpd="sng" algn="ctr">
+                      <a:solidFill>
+                        <a:srgbClr val="404040"/>
+                      </a:solidFill>
+                      <a:prstDash val="solid"/>
+                    </a:lnT>
+                    <a:lnB w="9525" cap="flat" cmpd="sng" algn="ctr">
+                      <a:solidFill>
+                        <a:srgbClr val="404040"/>
+                      </a:solidFill>
+                      <a:prstDash val="solid"/>
+                    </a:lnB>
+                    <a:solidFill>
+                      <a:srgbClr val="FFFFFF"/>
+                    </a:solidFill>
+                  </a:tcPr>
+                </a:tc>
+              </a:tr>
+              <a:tr h="502920">
+                <a:tc>
+                  <a:txBody>
+                    <a:bodyPr wrap="square"/>
+                    <a:lstStyle/>
+                    <a:p>
+                      <a:pPr marL="0" indent="0">
+                        <a:spcAft>
+                          <a:spcPts val="0"/>
+                        </a:spcAft>
+                        <a:buNone/>
+                      </a:pPr>
+                      <a:r>
+                        <a:rPr sz="1800" b="0" i="0">
+                          <a:solidFill>
+                            <a:srgbClr val="000000"/>
+                          </a:solidFill>
+                          <a:latin typeface="Times New Roman"/>
+                          <a:ea typeface="Times New Roman"/>
+                          <a:cs typeface="Times New Roman"/>
+                        </a:rPr>
+                        <a:t>Link every stored memory to the exact message it came from.</a:t>
+                      </a:r>
+                    </a:p>
+                  </a:txBody>
+                  <a:tcPr marL="73152" marR="73152" marT="36576" marB="36576">
+                    <a:lnL w="9525" cap="flat" cmpd="sng" algn="ctr">
+                      <a:solidFill>
+                        <a:srgbClr val="404040"/>
+                      </a:solidFill>
+                      <a:prstDash val="solid"/>
+                    </a:lnL>
+                    <a:lnR w="9525" cap="flat" cmpd="sng" algn="ctr">
+                      <a:solidFill>
+                        <a:srgbClr val="404040"/>
+                      </a:solidFill>
+                      <a:prstDash val="solid"/>
+                    </a:lnR>
+                    <a:lnT w="9525" cap="flat" cmpd="sng" algn="ctr">
+                      <a:solidFill>
+                        <a:srgbClr val="404040"/>
+                      </a:solidFill>
+                      <a:prstDash val="solid"/>
+                    </a:lnT>
+                    <a:lnB w="9525" cap="flat" cmpd="sng" algn="ctr">
+                      <a:solidFill>
+                        <a:srgbClr val="404040"/>
+                      </a:solidFill>
+                      <a:prstDash val="solid"/>
+                    </a:lnB>
+                    <a:solidFill>
+                      <a:srgbClr val="FFFFFF"/>
+                    </a:solidFill>
+                  </a:tcPr>
+                </a:tc>
+                <a:tc>
+                  <a:txBody>
+                    <a:bodyPr wrap="square"/>
+                    <a:lstStyle/>
+                    <a:p>
+                      <a:pPr marL="0" indent="0">
+                        <a:spcAft>
+                          <a:spcPts val="0"/>
+                        </a:spcAft>
+                        <a:buNone/>
+                      </a:pPr>
+                      <a:r>
+                        <a:rPr sz="1800" b="0" i="0">
+                          <a:solidFill>
+                            <a:srgbClr val="000000"/>
+                          </a:solidFill>
+                          <a:latin typeface="Times New Roman"/>
+                          <a:ea typeface="Times New Roman"/>
+                          <a:cs typeface="Times New Roman"/>
+                        </a:rPr>
+                        <a:t>G3</a:t>
+                      </a:r>
+                    </a:p>
+                  </a:txBody>
+                  <a:tcPr marL="73152" marR="73152" marT="36576" marB="36576">
+                    <a:lnL w="9525" cap="flat" cmpd="sng" algn="ctr">
+                      <a:solidFill>
+                        <a:srgbClr val="404040"/>
+                      </a:solidFill>
+                      <a:prstDash val="solid"/>
+                    </a:lnL>
+                    <a:lnR w="9525" cap="flat" cmpd="sng" algn="ctr">
+                      <a:solidFill>
+                        <a:srgbClr val="404040"/>
+                      </a:solidFill>
+                      <a:prstDash val="solid"/>
+                    </a:lnR>
+                    <a:lnT w="9525" cap="flat" cmpd="sng" algn="ctr">
+                      <a:solidFill>
+                        <a:srgbClr val="404040"/>
+                      </a:solidFill>
+                      <a:prstDash val="solid"/>
+                    </a:lnT>
+                    <a:lnB w="9525" cap="flat" cmpd="sng" algn="ctr">
+                      <a:solidFill>
+                        <a:srgbClr val="404040"/>
+                      </a:solidFill>
+                      <a:prstDash val="solid"/>
+                    </a:lnB>
+                    <a:solidFill>
+                      <a:srgbClr val="FFFFFF"/>
+                    </a:solidFill>
+                  </a:tcPr>
+                </a:tc>
+              </a:tr>
+              <a:tr h="502920">
+                <a:tc>
+                  <a:txBody>
+                    <a:bodyPr wrap="square"/>
+                    <a:lstStyle/>
+                    <a:p>
+                      <a:pPr marL="0" indent="0">
+                        <a:spcAft>
+                          <a:spcPts val="0"/>
+                        </a:spcAft>
+                        <a:buNone/>
+                      </a:pPr>
+                      <a:r>
+                        <a:rPr sz="1800" b="0" i="0">
+                          <a:solidFill>
+                            <a:srgbClr val="000000"/>
+                          </a:solidFill>
+                          <a:latin typeface="Times New Roman"/>
+                          <a:ea typeface="Times New Roman"/>
+                          <a:cs typeface="Times New Roman"/>
+                        </a:rPr>
+                        <a:t>Fine-tune a small local model to extract memories, combine them and answer with citations.</a:t>
+                      </a:r>
+                    </a:p>
+                  </a:txBody>
+                  <a:tcPr marL="73152" marR="73152" marT="36576" marB="36576">
+                    <a:lnL w="9525" cap="flat" cmpd="sng" algn="ctr">
+                      <a:solidFill>
+                        <a:srgbClr val="404040"/>
+                      </a:solidFill>
+                      <a:prstDash val="solid"/>
+                    </a:lnL>
+                    <a:lnR w="9525" cap="flat" cmpd="sng" algn="ctr">
+                      <a:solidFill>
+                        <a:srgbClr val="404040"/>
+                      </a:solidFill>
+                      <a:prstDash val="solid"/>
+                    </a:lnR>
+                    <a:lnT w="9525" cap="flat" cmpd="sng" algn="ctr">
+                      <a:solidFill>
+                        <a:srgbClr val="404040"/>
+                      </a:solidFill>
+                      <a:prstDash val="solid"/>
+                    </a:lnT>
+                    <a:lnB w="9525" cap="flat" cmpd="sng" algn="ctr">
+                      <a:solidFill>
+                        <a:srgbClr val="404040"/>
+                      </a:solidFill>
+                      <a:prstDash val="solid"/>
+                    </a:lnB>
+                    <a:solidFill>
+                      <a:srgbClr val="FFFFFF"/>
+                    </a:solidFill>
+                  </a:tcPr>
+                </a:tc>
+                <a:tc>
+                  <a:txBody>
+                    <a:bodyPr wrap="square"/>
+                    <a:lstStyle/>
+                    <a:p>
+                      <a:pPr marL="0" indent="0">
+                        <a:spcAft>
+                          <a:spcPts val="0"/>
+                        </a:spcAft>
+                        <a:buNone/>
+                      </a:pPr>
+                      <a:r>
+                        <a:rPr sz="1800" b="0" i="0">
+                          <a:solidFill>
+                            <a:srgbClr val="000000"/>
+                          </a:solidFill>
+                          <a:latin typeface="Times New Roman"/>
+                          <a:ea typeface="Times New Roman"/>
+                          <a:cs typeface="Times New Roman"/>
+                        </a:rPr>
+                        <a:t>G4</a:t>
+                      </a:r>
+                    </a:p>
+                  </a:txBody>
+                  <a:tcPr marL="73152" marR="73152" marT="36576" marB="36576">
+                    <a:lnL w="9525" cap="flat" cmpd="sng" algn="ctr">
+                      <a:solidFill>
+                        <a:srgbClr val="404040"/>
+                      </a:solidFill>
+                      <a:prstDash val="solid"/>
+                    </a:lnL>
+                    <a:lnR w="9525" cap="flat" cmpd="sng" algn="ctr">
+                      <a:solidFill>
+                        <a:srgbClr val="404040"/>
+                      </a:solidFill>
+                      <a:prstDash val="solid"/>
+                    </a:lnR>
+                    <a:lnT w="9525" cap="flat" cmpd="sng" algn="ctr">
+                      <a:solidFill>
+                        <a:srgbClr val="404040"/>
+                      </a:solidFill>
+                      <a:prstDash val="solid"/>
+                    </a:lnT>
+                    <a:lnB w="9525" cap="flat" cmpd="sng" algn="ctr">
+                      <a:solidFill>
+                        <a:srgbClr val="404040"/>
+                      </a:solidFill>
+                      <a:prstDash val="solid"/>
+                    </a:lnB>
+                    <a:solidFill>
+                      <a:srgbClr val="FFFFFF"/>
+                    </a:solidFill>
+                  </a:tcPr>
+                </a:tc>
+              </a:tr>
+              <a:tr h="502920">
+                <a:tc>
+                  <a:txBody>
+                    <a:bodyPr wrap="square"/>
+                    <a:lstStyle/>
+                    <a:p>
+                      <a:pPr marL="0" indent="0">
+                        <a:spcAft>
+                          <a:spcPts val="0"/>
+                        </a:spcAft>
+                        <a:buNone/>
+                      </a:pPr>
+                      <a:r>
+                        <a:rPr sz="1800" b="0" i="0">
+                          <a:solidFill>
+                            <a:srgbClr val="000000"/>
+                          </a:solidFill>
+                          <a:latin typeface="Times New Roman"/>
+                          <a:ea typeface="Times New Roman"/>
+                          <a:cs typeface="Times New Roman"/>
+                        </a:rPr>
+                        <a:t>Return only the relevant memories, within a fixed size limit for the prompt.</a:t>
+                      </a:r>
+                    </a:p>
+                  </a:txBody>
+                  <a:tcPr marL="73152" marR="73152" marT="36576" marB="36576">
+                    <a:lnL w="9525" cap="flat" cmpd="sng" algn="ctr">
+                      <a:solidFill>
+                        <a:srgbClr val="404040"/>
+                      </a:solidFill>
+                      <a:prstDash val="solid"/>
+                    </a:lnL>
+                    <a:lnR w="9525" cap="flat" cmpd="sng" algn="ctr">
+                      <a:solidFill>
+                        <a:srgbClr val="404040"/>
+                      </a:solidFill>
+                      <a:prstDash val="solid"/>
+                    </a:lnR>
+                    <a:lnT w="9525" cap="flat" cmpd="sng" algn="ctr">
+                      <a:solidFill>
+                        <a:srgbClr val="404040"/>
+                      </a:solidFill>
+                      <a:prstDash val="solid"/>
+                    </a:lnT>
+                    <a:lnB w="9525" cap="flat" cmpd="sng" algn="ctr">
+                      <a:solidFill>
+                        <a:srgbClr val="404040"/>
+                      </a:solidFill>
+                      <a:prstDash val="solid"/>
+                    </a:lnB>
+                    <a:solidFill>
+                      <a:srgbClr val="FFFFFF"/>
+                    </a:solidFill>
+                  </a:tcPr>
+                </a:tc>
+                <a:tc>
+                  <a:txBody>
+                    <a:bodyPr wrap="square"/>
+                    <a:lstStyle/>
+                    <a:p>
+                      <a:pPr marL="0" indent="0">
+                        <a:spcAft>
+                          <a:spcPts val="0"/>
+                        </a:spcAft>
+                        <a:buNone/>
+                      </a:pPr>
+                      <a:r>
+                        <a:rPr sz="1800" b="0" i="0">
+                          <a:solidFill>
+                            <a:srgbClr val="000000"/>
+                          </a:solidFill>
+                          <a:latin typeface="Times New Roman"/>
+                          <a:ea typeface="Times New Roman"/>
+                          <a:cs typeface="Times New Roman"/>
+                        </a:rPr>
+                        <a:t>Problem</a:t>
+                      </a:r>
+                    </a:p>
+                  </a:txBody>
+                  <a:tcPr marL="73152" marR="73152" marT="36576" marB="36576">
+                    <a:lnL w="9525" cap="flat" cmpd="sng" algn="ctr">
+                      <a:solidFill>
+                        <a:srgbClr val="404040"/>
+                      </a:solidFill>
+                      <a:prstDash val="solid"/>
+                    </a:lnL>
+                    <a:lnR w="9525" cap="flat" cmpd="sng" algn="ctr">
+                      <a:solidFill>
+                        <a:srgbClr val="404040"/>
+                      </a:solidFill>
+                      <a:prstDash val="solid"/>
+                    </a:lnR>
+                    <a:lnT w="9525" cap="flat" cmpd="sng" algn="ctr">
+                      <a:solidFill>
+                        <a:srgbClr val="404040"/>
+                      </a:solidFill>
+                      <a:prstDash val="solid"/>
+                    </a:lnT>
+                    <a:lnB w="9525" cap="flat" cmpd="sng" algn="ctr">
+                      <a:solidFill>
+                        <a:srgbClr val="404040"/>
+                      </a:solidFill>
+                      <a:prstDash val="solid"/>
+                    </a:lnB>
+                    <a:solidFill>
+                      <a:srgbClr val="FFFFFF"/>
+                    </a:solidFill>
+                  </a:tcPr>
+                </a:tc>
+              </a:tr>
+              <a:tr h="502920">
+                <a:tc>
+                  <a:txBody>
+                    <a:bodyPr wrap="square"/>
+                    <a:lstStyle/>
+                    <a:p>
+                      <a:pPr marL="0" indent="0">
+                        <a:spcAft>
+                          <a:spcPts val="0"/>
+                        </a:spcAft>
+                        <a:buNone/>
+                      </a:pPr>
+                      <a:r>
+                        <a:rPr sz="1800" b="0" i="0">
+                          <a:solidFill>
+                            <a:srgbClr val="000000"/>
+                          </a:solidFill>
+                          <a:latin typeface="Times New Roman"/>
+                          <a:ea typeface="Times New Roman"/>
+                          <a:cs typeface="Times New Roman"/>
+                        </a:rPr>
+                        <a:t>Measure accuracy with repeatable tests and a public benchmark.</a:t>
+                      </a:r>
+                    </a:p>
+                  </a:txBody>
+                  <a:tcPr marL="73152" marR="73152" marT="36576" marB="36576">
+                    <a:lnL w="9525" cap="flat" cmpd="sng" algn="ctr">
+                      <a:solidFill>
+                        <a:srgbClr val="404040"/>
+                      </a:solidFill>
+                      <a:prstDash val="solid"/>
+                    </a:lnL>
+                    <a:lnR w="9525" cap="flat" cmpd="sng" algn="ctr">
+                      <a:solidFill>
+                        <a:srgbClr val="404040"/>
+                      </a:solidFill>
+                      <a:prstDash val="solid"/>
+                    </a:lnR>
+                    <a:lnT w="9525" cap="flat" cmpd="sng" algn="ctr">
+                      <a:solidFill>
+                        <a:srgbClr val="404040"/>
+                      </a:solidFill>
+                      <a:prstDash val="solid"/>
+                    </a:lnT>
+                    <a:lnB w="9525" cap="flat" cmpd="sng" algn="ctr">
+                      <a:solidFill>
+                        <a:srgbClr val="404040"/>
+                      </a:solidFill>
+                      <a:prstDash val="solid"/>
+                    </a:lnB>
+                    <a:solidFill>
+                      <a:srgbClr val="FFFFFF"/>
+                    </a:solidFill>
+                  </a:tcPr>
+                </a:tc>
+                <a:tc>
+                  <a:txBody>
+                    <a:bodyPr wrap="square"/>
+                    <a:lstStyle/>
+                    <a:p>
+                      <a:pPr marL="0" indent="0">
+                        <a:spcAft>
+                          <a:spcPts val="0"/>
+                        </a:spcAft>
+                        <a:buNone/>
+                      </a:pPr>
+                      <a:r>
+                        <a:rPr sz="1800" b="0" i="0">
+                          <a:solidFill>
+                            <a:srgbClr val="000000"/>
+                          </a:solidFill>
+                          <a:latin typeface="Times New Roman"/>
+                          <a:ea typeface="Times New Roman"/>
+                          <a:cs typeface="Times New Roman"/>
+                        </a:rPr>
+                        <a:t>G5</a:t>
+                      </a:r>
+                    </a:p>
+                  </a:txBody>
+                  <a:tcPr marL="73152" marR="73152" marT="36576" marB="36576">
+                    <a:lnL w="9525" cap="flat" cmpd="sng" algn="ctr">
+                      <a:solidFill>
+                        <a:srgbClr val="404040"/>
+                      </a:solidFill>
+                      <a:prstDash val="solid"/>
+                    </a:lnL>
+                    <a:lnR w="9525" cap="flat" cmpd="sng" algn="ctr">
+                      <a:solidFill>
+                        <a:srgbClr val="404040"/>
+                      </a:solidFill>
+                      <a:prstDash val="solid"/>
+                    </a:lnR>
+                    <a:lnT w="9525" cap="flat" cmpd="sng" algn="ctr">
+                      <a:solidFill>
+                        <a:srgbClr val="404040"/>
+                      </a:solidFill>
+                      <a:prstDash val="solid"/>
+                    </a:lnT>
+                    <a:lnB w="9525" cap="flat" cmpd="sng" algn="ctr">
+                      <a:solidFill>
+                        <a:srgbClr val="404040"/>
+                      </a:solidFill>
+                      <a:prstDash val="solid"/>
+                    </a:lnB>
+                    <a:solidFill>
+                      <a:srgbClr val="FFFFFF"/>
+                    </a:solidFill>
+                  </a:tcPr>
+                </a:tc>
+              </a:tr>
+            </a:tbl>
+          </a:graphicData>
+        </a:graphic>
+      </p:graphicFrame>
     </p:spTree>
   </p:cSld>
   <p:clrMapOvr>
@@ -20648,7 +22591,7 @@
                 <a:ea typeface="Times New Roman"/>
                 <a:cs typeface="Times New Roman"/>
               </a:rPr>
-              <a:t>SYSTEM ARCHITECTURE</a:t>
+              <a:t>KEY TERMS</a:t>
             </a:r>
           </a:p>
         </p:txBody>
@@ -20733,30 +22676,1507 @@
           </a:p>
         </p:txBody>
       </p:sp>
-      <p:pic>
-        <p:nvPicPr>
-          <p:cNvPr id="26" name="Picture 25" descr="Overall system architecture"/>
-          <p:cNvPicPr>
-            <a:picLocks noChangeAspect="1"/>
-          </p:cNvPicPr>
+      <p:graphicFrame>
+        <p:nvGraphicFramePr>
+          <p:cNvPr id="26" name="Table 25"/>
+          <p:cNvGraphicFramePr>
+            <a:graphicFrameLocks noGrp="1"/>
+          </p:cNvGraphicFramePr>
           <p:nvPr/>
-        </p:nvPicPr>
-        <p:blipFill>
-          <a:blip r:embed="rId3"/>
-          <a:stretch>
-            <a:fillRect/>
-          </a:stretch>
-        </p:blipFill>
-        <p:spPr>
-          <a:xfrm>
-            <a:off x="2447435" y="1280160"/>
-            <a:ext cx="7294080" cy="4983480"/>
-          </a:xfrm>
-          <a:prstGeom prst="rect">
-            <a:avLst/>
-          </a:prstGeom>
-        </p:spPr>
-      </p:pic>
+        </p:nvGraphicFramePr>
+        <p:xfrm>
+          <a:off x="594360" y="1280160"/>
+          <a:ext cx="11000231" cy="3703320"/>
+        </p:xfrm>
+        <a:graphic>
+          <a:graphicData uri="http://schemas.openxmlformats.org/drawingml/2006/table">
+            <a:tbl>
+              <a:tblPr firstRow="1" bandRow="0"/>
+              <a:tblGrid>
+                <a:gridCol w="2016709"/>
+                <a:gridCol w="5133441"/>
+                <a:gridCol w="3850081"/>
+              </a:tblGrid>
+              <a:tr h="411480">
+                <a:tc>
+                  <a:txBody>
+                    <a:bodyPr wrap="square"/>
+                    <a:lstStyle/>
+                    <a:p>
+                      <a:pPr marL="0" indent="0">
+                        <a:spcAft>
+                          <a:spcPts val="0"/>
+                        </a:spcAft>
+                        <a:buNone/>
+                      </a:pPr>
+                      <a:r>
+                        <a:rPr sz="1800" b="1" i="0">
+                          <a:solidFill>
+                            <a:srgbClr val="000000"/>
+                          </a:solidFill>
+                          <a:latin typeface="Times New Roman"/>
+                          <a:ea typeface="Times New Roman"/>
+                          <a:cs typeface="Times New Roman"/>
+                        </a:rPr>
+                        <a:t>Term</a:t>
+                      </a:r>
+                    </a:p>
+                  </a:txBody>
+                  <a:tcPr marL="73152" marR="73152" marT="36576" marB="36576">
+                    <a:lnL w="9525" cap="flat" cmpd="sng" algn="ctr">
+                      <a:solidFill>
+                        <a:srgbClr val="404040"/>
+                      </a:solidFill>
+                      <a:prstDash val="solid"/>
+                    </a:lnL>
+                    <a:lnR w="9525" cap="flat" cmpd="sng" algn="ctr">
+                      <a:solidFill>
+                        <a:srgbClr val="404040"/>
+                      </a:solidFill>
+                      <a:prstDash val="solid"/>
+                    </a:lnR>
+                    <a:lnT w="9525" cap="flat" cmpd="sng" algn="ctr">
+                      <a:solidFill>
+                        <a:srgbClr val="404040"/>
+                      </a:solidFill>
+                      <a:prstDash val="solid"/>
+                    </a:lnT>
+                    <a:lnB w="9525" cap="flat" cmpd="sng" algn="ctr">
+                      <a:solidFill>
+                        <a:srgbClr val="404040"/>
+                      </a:solidFill>
+                      <a:prstDash val="solid"/>
+                    </a:lnB>
+                    <a:solidFill>
+                      <a:srgbClr val="D9E2EC"/>
+                    </a:solidFill>
+                  </a:tcPr>
+                </a:tc>
+                <a:tc>
+                  <a:txBody>
+                    <a:bodyPr wrap="square"/>
+                    <a:lstStyle/>
+                    <a:p>
+                      <a:pPr marL="0" indent="0">
+                        <a:spcAft>
+                          <a:spcPts val="0"/>
+                        </a:spcAft>
+                        <a:buNone/>
+                      </a:pPr>
+                      <a:r>
+                        <a:rPr sz="1800" b="1" i="0">
+                          <a:solidFill>
+                            <a:srgbClr val="000000"/>
+                          </a:solidFill>
+                          <a:latin typeface="Times New Roman"/>
+                          <a:ea typeface="Times New Roman"/>
+                          <a:cs typeface="Times New Roman"/>
+                        </a:rPr>
+                        <a:t>Meaning</a:t>
+                      </a:r>
+                    </a:p>
+                  </a:txBody>
+                  <a:tcPr marL="73152" marR="73152" marT="36576" marB="36576">
+                    <a:lnL w="9525" cap="flat" cmpd="sng" algn="ctr">
+                      <a:solidFill>
+                        <a:srgbClr val="404040"/>
+                      </a:solidFill>
+                      <a:prstDash val="solid"/>
+                    </a:lnL>
+                    <a:lnR w="9525" cap="flat" cmpd="sng" algn="ctr">
+                      <a:solidFill>
+                        <a:srgbClr val="404040"/>
+                      </a:solidFill>
+                      <a:prstDash val="solid"/>
+                    </a:lnR>
+                    <a:lnT w="9525" cap="flat" cmpd="sng" algn="ctr">
+                      <a:solidFill>
+                        <a:srgbClr val="404040"/>
+                      </a:solidFill>
+                      <a:prstDash val="solid"/>
+                    </a:lnT>
+                    <a:lnB w="9525" cap="flat" cmpd="sng" algn="ctr">
+                      <a:solidFill>
+                        <a:srgbClr val="404040"/>
+                      </a:solidFill>
+                      <a:prstDash val="solid"/>
+                    </a:lnB>
+                    <a:solidFill>
+                      <a:srgbClr val="D9E2EC"/>
+                    </a:solidFill>
+                  </a:tcPr>
+                </a:tc>
+                <a:tc>
+                  <a:txBody>
+                    <a:bodyPr wrap="square"/>
+                    <a:lstStyle/>
+                    <a:p>
+                      <a:pPr marL="0" indent="0">
+                        <a:spcAft>
+                          <a:spcPts val="0"/>
+                        </a:spcAft>
+                        <a:buNone/>
+                      </a:pPr>
+                      <a:r>
+                        <a:rPr sz="1800" b="1" i="0">
+                          <a:solidFill>
+                            <a:srgbClr val="000000"/>
+                          </a:solidFill>
+                          <a:latin typeface="Times New Roman"/>
+                          <a:ea typeface="Times New Roman"/>
+                          <a:cs typeface="Times New Roman"/>
+                        </a:rPr>
+                        <a:t>Example</a:t>
+                      </a:r>
+                    </a:p>
+                  </a:txBody>
+                  <a:tcPr marL="73152" marR="73152" marT="36576" marB="36576">
+                    <a:lnL w="9525" cap="flat" cmpd="sng" algn="ctr">
+                      <a:solidFill>
+                        <a:srgbClr val="404040"/>
+                      </a:solidFill>
+                      <a:prstDash val="solid"/>
+                    </a:lnL>
+                    <a:lnR w="9525" cap="flat" cmpd="sng" algn="ctr">
+                      <a:solidFill>
+                        <a:srgbClr val="404040"/>
+                      </a:solidFill>
+                      <a:prstDash val="solid"/>
+                    </a:lnR>
+                    <a:lnT w="9525" cap="flat" cmpd="sng" algn="ctr">
+                      <a:solidFill>
+                        <a:srgbClr val="404040"/>
+                      </a:solidFill>
+                      <a:prstDash val="solid"/>
+                    </a:lnT>
+                    <a:lnB w="9525" cap="flat" cmpd="sng" algn="ctr">
+                      <a:solidFill>
+                        <a:srgbClr val="404040"/>
+                      </a:solidFill>
+                      <a:prstDash val="solid"/>
+                    </a:lnB>
+                    <a:solidFill>
+                      <a:srgbClr val="D9E2EC"/>
+                    </a:solidFill>
+                  </a:tcPr>
+                </a:tc>
+              </a:tr>
+              <a:tr h="411480">
+                <a:tc>
+                  <a:txBody>
+                    <a:bodyPr wrap="square"/>
+                    <a:lstStyle/>
+                    <a:p>
+                      <a:pPr marL="0" indent="0">
+                        <a:spcAft>
+                          <a:spcPts val="0"/>
+                        </a:spcAft>
+                        <a:buNone/>
+                      </a:pPr>
+                      <a:r>
+                        <a:rPr sz="1800" b="0" i="0">
+                          <a:solidFill>
+                            <a:srgbClr val="000000"/>
+                          </a:solidFill>
+                          <a:latin typeface="Times New Roman"/>
+                          <a:ea typeface="Times New Roman"/>
+                          <a:cs typeface="Times New Roman"/>
+                        </a:rPr>
+                        <a:t>Source event</a:t>
+                      </a:r>
+                    </a:p>
+                  </a:txBody>
+                  <a:tcPr marL="73152" marR="73152" marT="36576" marB="36576">
+                    <a:lnL w="9525" cap="flat" cmpd="sng" algn="ctr">
+                      <a:solidFill>
+                        <a:srgbClr val="404040"/>
+                      </a:solidFill>
+                      <a:prstDash val="solid"/>
+                    </a:lnL>
+                    <a:lnR w="9525" cap="flat" cmpd="sng" algn="ctr">
+                      <a:solidFill>
+                        <a:srgbClr val="404040"/>
+                      </a:solidFill>
+                      <a:prstDash val="solid"/>
+                    </a:lnR>
+                    <a:lnT w="9525" cap="flat" cmpd="sng" algn="ctr">
+                      <a:solidFill>
+                        <a:srgbClr val="404040"/>
+                      </a:solidFill>
+                      <a:prstDash val="solid"/>
+                    </a:lnT>
+                    <a:lnB w="9525" cap="flat" cmpd="sng" algn="ctr">
+                      <a:solidFill>
+                        <a:srgbClr val="404040"/>
+                      </a:solidFill>
+                      <a:prstDash val="solid"/>
+                    </a:lnB>
+                    <a:solidFill>
+                      <a:srgbClr val="FFFFFF"/>
+                    </a:solidFill>
+                  </a:tcPr>
+                </a:tc>
+                <a:tc>
+                  <a:txBody>
+                    <a:bodyPr wrap="square"/>
+                    <a:lstStyle/>
+                    <a:p>
+                      <a:pPr marL="0" indent="0">
+                        <a:spcAft>
+                          <a:spcPts val="0"/>
+                        </a:spcAft>
+                        <a:buNone/>
+                      </a:pPr>
+                      <a:r>
+                        <a:rPr sz="1800" b="0" i="0">
+                          <a:solidFill>
+                            <a:srgbClr val="000000"/>
+                          </a:solidFill>
+                          <a:latin typeface="Times New Roman"/>
+                          <a:ea typeface="Times New Roman"/>
+                          <a:cs typeface="Times New Roman"/>
+                        </a:rPr>
+                        <a:t>A message or tool result, saved exactly as received.</a:t>
+                      </a:r>
+                    </a:p>
+                  </a:txBody>
+                  <a:tcPr marL="73152" marR="73152" marT="36576" marB="36576">
+                    <a:lnL w="9525" cap="flat" cmpd="sng" algn="ctr">
+                      <a:solidFill>
+                        <a:srgbClr val="404040"/>
+                      </a:solidFill>
+                      <a:prstDash val="solid"/>
+                    </a:lnL>
+                    <a:lnR w="9525" cap="flat" cmpd="sng" algn="ctr">
+                      <a:solidFill>
+                        <a:srgbClr val="404040"/>
+                      </a:solidFill>
+                      <a:prstDash val="solid"/>
+                    </a:lnR>
+                    <a:lnT w="9525" cap="flat" cmpd="sng" algn="ctr">
+                      <a:solidFill>
+                        <a:srgbClr val="404040"/>
+                      </a:solidFill>
+                      <a:prstDash val="solid"/>
+                    </a:lnT>
+                    <a:lnB w="9525" cap="flat" cmpd="sng" algn="ctr">
+                      <a:solidFill>
+                        <a:srgbClr val="404040"/>
+                      </a:solidFill>
+                      <a:prstDash val="solid"/>
+                    </a:lnB>
+                    <a:solidFill>
+                      <a:srgbClr val="FFFFFF"/>
+                    </a:solidFill>
+                  </a:tcPr>
+                </a:tc>
+                <a:tc>
+                  <a:txBody>
+                    <a:bodyPr wrap="square"/>
+                    <a:lstStyle/>
+                    <a:p>
+                      <a:pPr marL="0" indent="0">
+                        <a:spcAft>
+                          <a:spcPts val="0"/>
+                        </a:spcAft>
+                        <a:buNone/>
+                      </a:pPr>
+                      <a:r>
+                        <a:rPr sz="1800" b="0" i="0">
+                          <a:solidFill>
+                            <a:srgbClr val="000000"/>
+                          </a:solidFill>
+                          <a:latin typeface="Times New Roman"/>
+                          <a:ea typeface="Times New Roman"/>
+                          <a:cs typeface="Times New Roman"/>
+                        </a:rPr>
+                        <a:t>"I live in Chennai." (1 Oct)</a:t>
+                      </a:r>
+                    </a:p>
+                  </a:txBody>
+                  <a:tcPr marL="73152" marR="73152" marT="36576" marB="36576">
+                    <a:lnL w="9525" cap="flat" cmpd="sng" algn="ctr">
+                      <a:solidFill>
+                        <a:srgbClr val="404040"/>
+                      </a:solidFill>
+                      <a:prstDash val="solid"/>
+                    </a:lnL>
+                    <a:lnR w="9525" cap="flat" cmpd="sng" algn="ctr">
+                      <a:solidFill>
+                        <a:srgbClr val="404040"/>
+                      </a:solidFill>
+                      <a:prstDash val="solid"/>
+                    </a:lnR>
+                    <a:lnT w="9525" cap="flat" cmpd="sng" algn="ctr">
+                      <a:solidFill>
+                        <a:srgbClr val="404040"/>
+                      </a:solidFill>
+                      <a:prstDash val="solid"/>
+                    </a:lnT>
+                    <a:lnB w="9525" cap="flat" cmpd="sng" algn="ctr">
+                      <a:solidFill>
+                        <a:srgbClr val="404040"/>
+                      </a:solidFill>
+                      <a:prstDash val="solid"/>
+                    </a:lnB>
+                    <a:solidFill>
+                      <a:srgbClr val="FFFFFF"/>
+                    </a:solidFill>
+                  </a:tcPr>
+                </a:tc>
+              </a:tr>
+              <a:tr h="411480">
+                <a:tc>
+                  <a:txBody>
+                    <a:bodyPr wrap="square"/>
+                    <a:lstStyle/>
+                    <a:p>
+                      <a:pPr marL="0" indent="0">
+                        <a:spcAft>
+                          <a:spcPts val="0"/>
+                        </a:spcAft>
+                        <a:buNone/>
+                      </a:pPr>
+                      <a:r>
+                        <a:rPr sz="1800" b="0" i="0">
+                          <a:solidFill>
+                            <a:srgbClr val="000000"/>
+                          </a:solidFill>
+                          <a:latin typeface="Times New Roman"/>
+                          <a:ea typeface="Times New Roman"/>
+                          <a:cs typeface="Times New Roman"/>
+                        </a:rPr>
+                        <a:t>Assertion</a:t>
+                      </a:r>
+                    </a:p>
+                  </a:txBody>
+                  <a:tcPr marL="73152" marR="73152" marT="36576" marB="36576">
+                    <a:lnL w="9525" cap="flat" cmpd="sng" algn="ctr">
+                      <a:solidFill>
+                        <a:srgbClr val="404040"/>
+                      </a:solidFill>
+                      <a:prstDash val="solid"/>
+                    </a:lnL>
+                    <a:lnR w="9525" cap="flat" cmpd="sng" algn="ctr">
+                      <a:solidFill>
+                        <a:srgbClr val="404040"/>
+                      </a:solidFill>
+                      <a:prstDash val="solid"/>
+                    </a:lnR>
+                    <a:lnT w="9525" cap="flat" cmpd="sng" algn="ctr">
+                      <a:solidFill>
+                        <a:srgbClr val="404040"/>
+                      </a:solidFill>
+                      <a:prstDash val="solid"/>
+                    </a:lnT>
+                    <a:lnB w="9525" cap="flat" cmpd="sng" algn="ctr">
+                      <a:solidFill>
+                        <a:srgbClr val="404040"/>
+                      </a:solidFill>
+                      <a:prstDash val="solid"/>
+                    </a:lnB>
+                    <a:solidFill>
+                      <a:srgbClr val="FFFFFF"/>
+                    </a:solidFill>
+                  </a:tcPr>
+                </a:tc>
+                <a:tc>
+                  <a:txBody>
+                    <a:bodyPr wrap="square"/>
+                    <a:lstStyle/>
+                    <a:p>
+                      <a:pPr marL="0" indent="0">
+                        <a:spcAft>
+                          <a:spcPts val="0"/>
+                        </a:spcAft>
+                        <a:buNone/>
+                      </a:pPr>
+                      <a:r>
+                        <a:rPr sz="1800" b="0" i="0">
+                          <a:solidFill>
+                            <a:srgbClr val="000000"/>
+                          </a:solidFill>
+                          <a:latin typeface="Times New Roman"/>
+                          <a:ea typeface="Times New Roman"/>
+                          <a:cs typeface="Times New Roman"/>
+                        </a:rPr>
+                        <a:t>A statement the model extracts from source events, kept with the quote it came from.</a:t>
+                      </a:r>
+                    </a:p>
+                  </a:txBody>
+                  <a:tcPr marL="73152" marR="73152" marT="36576" marB="36576">
+                    <a:lnL w="9525" cap="flat" cmpd="sng" algn="ctr">
+                      <a:solidFill>
+                        <a:srgbClr val="404040"/>
+                      </a:solidFill>
+                      <a:prstDash val="solid"/>
+                    </a:lnL>
+                    <a:lnR w="9525" cap="flat" cmpd="sng" algn="ctr">
+                      <a:solidFill>
+                        <a:srgbClr val="404040"/>
+                      </a:solidFill>
+                      <a:prstDash val="solid"/>
+                    </a:lnR>
+                    <a:lnT w="9525" cap="flat" cmpd="sng" algn="ctr">
+                      <a:solidFill>
+                        <a:srgbClr val="404040"/>
+                      </a:solidFill>
+                      <a:prstDash val="solid"/>
+                    </a:lnT>
+                    <a:lnB w="9525" cap="flat" cmpd="sng" algn="ctr">
+                      <a:solidFill>
+                        <a:srgbClr val="404040"/>
+                      </a:solidFill>
+                      <a:prstDash val="solid"/>
+                    </a:lnB>
+                    <a:solidFill>
+                      <a:srgbClr val="FFFFFF"/>
+                    </a:solidFill>
+                  </a:tcPr>
+                </a:tc>
+                <a:tc>
+                  <a:txBody>
+                    <a:bodyPr wrap="square"/>
+                    <a:lstStyle/>
+                    <a:p>
+                      <a:pPr marL="0" indent="0">
+                        <a:spcAft>
+                          <a:spcPts val="0"/>
+                        </a:spcAft>
+                        <a:buNone/>
+                      </a:pPr>
+                      <a:r>
+                        <a:rPr sz="1800" b="0" i="0">
+                          <a:solidFill>
+                            <a:srgbClr val="000000"/>
+                          </a:solidFill>
+                          <a:latin typeface="Times New Roman"/>
+                          <a:ea typeface="Times New Roman"/>
+                          <a:cs typeface="Times New Roman"/>
+                        </a:rPr>
+                        <a:t>Maya's home city is Chennai.</a:t>
+                      </a:r>
+                    </a:p>
+                  </a:txBody>
+                  <a:tcPr marL="73152" marR="73152" marT="36576" marB="36576">
+                    <a:lnL w="9525" cap="flat" cmpd="sng" algn="ctr">
+                      <a:solidFill>
+                        <a:srgbClr val="404040"/>
+                      </a:solidFill>
+                      <a:prstDash val="solid"/>
+                    </a:lnL>
+                    <a:lnR w="9525" cap="flat" cmpd="sng" algn="ctr">
+                      <a:solidFill>
+                        <a:srgbClr val="404040"/>
+                      </a:solidFill>
+                      <a:prstDash val="solid"/>
+                    </a:lnR>
+                    <a:lnT w="9525" cap="flat" cmpd="sng" algn="ctr">
+                      <a:solidFill>
+                        <a:srgbClr val="404040"/>
+                      </a:solidFill>
+                      <a:prstDash val="solid"/>
+                    </a:lnT>
+                    <a:lnB w="9525" cap="flat" cmpd="sng" algn="ctr">
+                      <a:solidFill>
+                        <a:srgbClr val="404040"/>
+                      </a:solidFill>
+                      <a:prstDash val="solid"/>
+                    </a:lnB>
+                    <a:solidFill>
+                      <a:srgbClr val="FFFFFF"/>
+                    </a:solidFill>
+                  </a:tcPr>
+                </a:tc>
+              </a:tr>
+              <a:tr h="411480">
+                <a:tc>
+                  <a:txBody>
+                    <a:bodyPr wrap="square"/>
+                    <a:lstStyle/>
+                    <a:p>
+                      <a:pPr marL="0" indent="0">
+                        <a:spcAft>
+                          <a:spcPts val="0"/>
+                        </a:spcAft>
+                        <a:buNone/>
+                      </a:pPr>
+                      <a:r>
+                        <a:rPr sz="1800" b="0" i="0">
+                          <a:solidFill>
+                            <a:srgbClr val="000000"/>
+                          </a:solidFill>
+                          <a:latin typeface="Times New Roman"/>
+                          <a:ea typeface="Times New Roman"/>
+                          <a:cs typeface="Times New Roman"/>
+                        </a:rPr>
+                        <a:t>Slot</a:t>
+                      </a:r>
+                    </a:p>
+                  </a:txBody>
+                  <a:tcPr marL="73152" marR="73152" marT="36576" marB="36576">
+                    <a:lnL w="9525" cap="flat" cmpd="sng" algn="ctr">
+                      <a:solidFill>
+                        <a:srgbClr val="404040"/>
+                      </a:solidFill>
+                      <a:prstDash val="solid"/>
+                    </a:lnL>
+                    <a:lnR w="9525" cap="flat" cmpd="sng" algn="ctr">
+                      <a:solidFill>
+                        <a:srgbClr val="404040"/>
+                      </a:solidFill>
+                      <a:prstDash val="solid"/>
+                    </a:lnR>
+                    <a:lnT w="9525" cap="flat" cmpd="sng" algn="ctr">
+                      <a:solidFill>
+                        <a:srgbClr val="404040"/>
+                      </a:solidFill>
+                      <a:prstDash val="solid"/>
+                    </a:lnT>
+                    <a:lnB w="9525" cap="flat" cmpd="sng" algn="ctr">
+                      <a:solidFill>
+                        <a:srgbClr val="404040"/>
+                      </a:solidFill>
+                      <a:prstDash val="solid"/>
+                    </a:lnB>
+                    <a:solidFill>
+                      <a:srgbClr val="FFFFFF"/>
+                    </a:solidFill>
+                  </a:tcPr>
+                </a:tc>
+                <a:tc>
+                  <a:txBody>
+                    <a:bodyPr wrap="square"/>
+                    <a:lstStyle/>
+                    <a:p>
+                      <a:pPr marL="0" indent="0">
+                        <a:spcAft>
+                          <a:spcPts val="0"/>
+                        </a:spcAft>
+                        <a:buNone/>
+                      </a:pPr>
+                      <a:r>
+                        <a:rPr sz="1800" b="0" i="0">
+                          <a:solidFill>
+                            <a:srgbClr val="000000"/>
+                          </a:solidFill>
+                          <a:latin typeface="Times New Roman"/>
+                          <a:ea typeface="Times New Roman"/>
+                          <a:cs typeface="Times New Roman"/>
+                        </a:rPr>
+                        <a:t>One attribute of one subject. A single-value slot has one current value.</a:t>
+                      </a:r>
+                    </a:p>
+                  </a:txBody>
+                  <a:tcPr marL="73152" marR="73152" marT="36576" marB="36576">
+                    <a:lnL w="9525" cap="flat" cmpd="sng" algn="ctr">
+                      <a:solidFill>
+                        <a:srgbClr val="404040"/>
+                      </a:solidFill>
+                      <a:prstDash val="solid"/>
+                    </a:lnL>
+                    <a:lnR w="9525" cap="flat" cmpd="sng" algn="ctr">
+                      <a:solidFill>
+                        <a:srgbClr val="404040"/>
+                      </a:solidFill>
+                      <a:prstDash val="solid"/>
+                    </a:lnR>
+                    <a:lnT w="9525" cap="flat" cmpd="sng" algn="ctr">
+                      <a:solidFill>
+                        <a:srgbClr val="404040"/>
+                      </a:solidFill>
+                      <a:prstDash val="solid"/>
+                    </a:lnT>
+                    <a:lnB w="9525" cap="flat" cmpd="sng" algn="ctr">
+                      <a:solidFill>
+                        <a:srgbClr val="404040"/>
+                      </a:solidFill>
+                      <a:prstDash val="solid"/>
+                    </a:lnB>
+                    <a:solidFill>
+                      <a:srgbClr val="FFFFFF"/>
+                    </a:solidFill>
+                  </a:tcPr>
+                </a:tc>
+                <a:tc>
+                  <a:txBody>
+                    <a:bodyPr wrap="square"/>
+                    <a:lstStyle/>
+                    <a:p>
+                      <a:pPr marL="0" indent="0">
+                        <a:spcAft>
+                          <a:spcPts val="0"/>
+                        </a:spcAft>
+                        <a:buNone/>
+                      </a:pPr>
+                      <a:r>
+                        <a:rPr sz="1800" b="0" i="0">
+                          <a:solidFill>
+                            <a:srgbClr val="000000"/>
+                          </a:solidFill>
+                          <a:latin typeface="Times New Roman"/>
+                          <a:ea typeface="Times New Roman"/>
+                          <a:cs typeface="Times New Roman"/>
+                        </a:rPr>
+                        <a:t>Maya's home city</a:t>
+                      </a:r>
+                    </a:p>
+                  </a:txBody>
+                  <a:tcPr marL="73152" marR="73152" marT="36576" marB="36576">
+                    <a:lnL w="9525" cap="flat" cmpd="sng" algn="ctr">
+                      <a:solidFill>
+                        <a:srgbClr val="404040"/>
+                      </a:solidFill>
+                      <a:prstDash val="solid"/>
+                    </a:lnL>
+                    <a:lnR w="9525" cap="flat" cmpd="sng" algn="ctr">
+                      <a:solidFill>
+                        <a:srgbClr val="404040"/>
+                      </a:solidFill>
+                      <a:prstDash val="solid"/>
+                    </a:lnR>
+                    <a:lnT w="9525" cap="flat" cmpd="sng" algn="ctr">
+                      <a:solidFill>
+                        <a:srgbClr val="404040"/>
+                      </a:solidFill>
+                      <a:prstDash val="solid"/>
+                    </a:lnT>
+                    <a:lnB w="9525" cap="flat" cmpd="sng" algn="ctr">
+                      <a:solidFill>
+                        <a:srgbClr val="404040"/>
+                      </a:solidFill>
+                      <a:prstDash val="solid"/>
+                    </a:lnB>
+                    <a:solidFill>
+                      <a:srgbClr val="FFFFFF"/>
+                    </a:solidFill>
+                  </a:tcPr>
+                </a:tc>
+              </a:tr>
+              <a:tr h="411480">
+                <a:tc>
+                  <a:txBody>
+                    <a:bodyPr wrap="square"/>
+                    <a:lstStyle/>
+                    <a:p>
+                      <a:pPr marL="0" indent="0">
+                        <a:spcAft>
+                          <a:spcPts val="0"/>
+                        </a:spcAft>
+                        <a:buNone/>
+                      </a:pPr>
+                      <a:r>
+                        <a:rPr sz="1800" b="0" i="0">
+                          <a:solidFill>
+                            <a:srgbClr val="000000"/>
+                          </a:solidFill>
+                          <a:latin typeface="Times New Roman"/>
+                          <a:ea typeface="Times New Roman"/>
+                          <a:cs typeface="Times New Roman"/>
+                        </a:rPr>
+                        <a:t>Correction</a:t>
+                      </a:r>
+                    </a:p>
+                  </a:txBody>
+                  <a:tcPr marL="73152" marR="73152" marT="36576" marB="36576">
+                    <a:lnL w="9525" cap="flat" cmpd="sng" algn="ctr">
+                      <a:solidFill>
+                        <a:srgbClr val="404040"/>
+                      </a:solidFill>
+                      <a:prstDash val="solid"/>
+                    </a:lnL>
+                    <a:lnR w="9525" cap="flat" cmpd="sng" algn="ctr">
+                      <a:solidFill>
+                        <a:srgbClr val="404040"/>
+                      </a:solidFill>
+                      <a:prstDash val="solid"/>
+                    </a:lnR>
+                    <a:lnT w="9525" cap="flat" cmpd="sng" algn="ctr">
+                      <a:solidFill>
+                        <a:srgbClr val="404040"/>
+                      </a:solidFill>
+                      <a:prstDash val="solid"/>
+                    </a:lnT>
+                    <a:lnB w="9525" cap="flat" cmpd="sng" algn="ctr">
+                      <a:solidFill>
+                        <a:srgbClr val="404040"/>
+                      </a:solidFill>
+                      <a:prstDash val="solid"/>
+                    </a:lnB>
+                    <a:solidFill>
+                      <a:srgbClr val="FFFFFF"/>
+                    </a:solidFill>
+                  </a:tcPr>
+                </a:tc>
+                <a:tc>
+                  <a:txBody>
+                    <a:bodyPr wrap="square"/>
+                    <a:lstStyle/>
+                    <a:p>
+                      <a:pPr marL="0" indent="0">
+                        <a:spcAft>
+                          <a:spcPts val="0"/>
+                        </a:spcAft>
+                        <a:buNone/>
+                      </a:pPr>
+                      <a:r>
+                        <a:rPr sz="1800" b="0" i="0">
+                          <a:solidFill>
+                            <a:srgbClr val="000000"/>
+                          </a:solidFill>
+                          <a:latin typeface="Times New Roman"/>
+                          <a:ea typeface="Times New Roman"/>
+                          <a:cs typeface="Times New Roman"/>
+                        </a:rPr>
+                        <a:t>A new value that replaces the old one. The old one stays as history.</a:t>
+                      </a:r>
+                    </a:p>
+                  </a:txBody>
+                  <a:tcPr marL="73152" marR="73152" marT="36576" marB="36576">
+                    <a:lnL w="9525" cap="flat" cmpd="sng" algn="ctr">
+                      <a:solidFill>
+                        <a:srgbClr val="404040"/>
+                      </a:solidFill>
+                      <a:prstDash val="solid"/>
+                    </a:lnL>
+                    <a:lnR w="9525" cap="flat" cmpd="sng" algn="ctr">
+                      <a:solidFill>
+                        <a:srgbClr val="404040"/>
+                      </a:solidFill>
+                      <a:prstDash val="solid"/>
+                    </a:lnR>
+                    <a:lnT w="9525" cap="flat" cmpd="sng" algn="ctr">
+                      <a:solidFill>
+                        <a:srgbClr val="404040"/>
+                      </a:solidFill>
+                      <a:prstDash val="solid"/>
+                    </a:lnT>
+                    <a:lnB w="9525" cap="flat" cmpd="sng" algn="ctr">
+                      <a:solidFill>
+                        <a:srgbClr val="404040"/>
+                      </a:solidFill>
+                      <a:prstDash val="solid"/>
+                    </a:lnB>
+                    <a:solidFill>
+                      <a:srgbClr val="FFFFFF"/>
+                    </a:solidFill>
+                  </a:tcPr>
+                </a:tc>
+                <a:tc>
+                  <a:txBody>
+                    <a:bodyPr wrap="square"/>
+                    <a:lstStyle/>
+                    <a:p>
+                      <a:pPr marL="0" indent="0">
+                        <a:spcAft>
+                          <a:spcPts val="0"/>
+                        </a:spcAft>
+                        <a:buNone/>
+                      </a:pPr>
+                      <a:r>
+                        <a:rPr sz="1800" b="0" i="0">
+                          <a:solidFill>
+                            <a:srgbClr val="000000"/>
+                          </a:solidFill>
+                          <a:latin typeface="Times New Roman"/>
+                          <a:ea typeface="Times New Roman"/>
+                          <a:cs typeface="Times New Roman"/>
+                        </a:rPr>
+                        <a:t>Bengaluru replaces Chennai.</a:t>
+                      </a:r>
+                    </a:p>
+                  </a:txBody>
+                  <a:tcPr marL="73152" marR="73152" marT="36576" marB="36576">
+                    <a:lnL w="9525" cap="flat" cmpd="sng" algn="ctr">
+                      <a:solidFill>
+                        <a:srgbClr val="404040"/>
+                      </a:solidFill>
+                      <a:prstDash val="solid"/>
+                    </a:lnL>
+                    <a:lnR w="9525" cap="flat" cmpd="sng" algn="ctr">
+                      <a:solidFill>
+                        <a:srgbClr val="404040"/>
+                      </a:solidFill>
+                      <a:prstDash val="solid"/>
+                    </a:lnR>
+                    <a:lnT w="9525" cap="flat" cmpd="sng" algn="ctr">
+                      <a:solidFill>
+                        <a:srgbClr val="404040"/>
+                      </a:solidFill>
+                      <a:prstDash val="solid"/>
+                    </a:lnT>
+                    <a:lnB w="9525" cap="flat" cmpd="sng" algn="ctr">
+                      <a:solidFill>
+                        <a:srgbClr val="404040"/>
+                      </a:solidFill>
+                      <a:prstDash val="solid"/>
+                    </a:lnB>
+                    <a:solidFill>
+                      <a:srgbClr val="FFFFFF"/>
+                    </a:solidFill>
+                  </a:tcPr>
+                </a:tc>
+              </a:tr>
+              <a:tr h="411480">
+                <a:tc>
+                  <a:txBody>
+                    <a:bodyPr wrap="square"/>
+                    <a:lstStyle/>
+                    <a:p>
+                      <a:pPr marL="0" indent="0">
+                        <a:spcAft>
+                          <a:spcPts val="0"/>
+                        </a:spcAft>
+                        <a:buNone/>
+                      </a:pPr>
+                      <a:r>
+                        <a:rPr sz="1800" b="0" i="0">
+                          <a:solidFill>
+                            <a:srgbClr val="000000"/>
+                          </a:solidFill>
+                          <a:latin typeface="Times New Roman"/>
+                          <a:ea typeface="Times New Roman"/>
+                          <a:cs typeface="Times New Roman"/>
+                        </a:rPr>
+                        <a:t>Inference</a:t>
+                      </a:r>
+                    </a:p>
+                  </a:txBody>
+                  <a:tcPr marL="73152" marR="73152" marT="36576" marB="36576">
+                    <a:lnL w="9525" cap="flat" cmpd="sng" algn="ctr">
+                      <a:solidFill>
+                        <a:srgbClr val="404040"/>
+                      </a:solidFill>
+                      <a:prstDash val="solid"/>
+                    </a:lnL>
+                    <a:lnR w="9525" cap="flat" cmpd="sng" algn="ctr">
+                      <a:solidFill>
+                        <a:srgbClr val="404040"/>
+                      </a:solidFill>
+                      <a:prstDash val="solid"/>
+                    </a:lnR>
+                    <a:lnT w="9525" cap="flat" cmpd="sng" algn="ctr">
+                      <a:solidFill>
+                        <a:srgbClr val="404040"/>
+                      </a:solidFill>
+                      <a:prstDash val="solid"/>
+                    </a:lnT>
+                    <a:lnB w="9525" cap="flat" cmpd="sng" algn="ctr">
+                      <a:solidFill>
+                        <a:srgbClr val="404040"/>
+                      </a:solidFill>
+                      <a:prstDash val="solid"/>
+                    </a:lnB>
+                    <a:solidFill>
+                      <a:srgbClr val="FFFFFF"/>
+                    </a:solidFill>
+                  </a:tcPr>
+                </a:tc>
+                <a:tc>
+                  <a:txBody>
+                    <a:bodyPr wrap="square"/>
+                    <a:lstStyle/>
+                    <a:p>
+                      <a:pPr marL="0" indent="0">
+                        <a:spcAft>
+                          <a:spcPts val="0"/>
+                        </a:spcAft>
+                        <a:buNone/>
+                      </a:pPr>
+                      <a:r>
+                        <a:rPr sz="1800" b="0" i="0">
+                          <a:solidFill>
+                            <a:srgbClr val="000000"/>
+                          </a:solidFill>
+                          <a:latin typeface="Times New Roman"/>
+                          <a:ea typeface="Times New Roman"/>
+                          <a:cs typeface="Times New Roman"/>
+                        </a:rPr>
+                        <a:t>A statement built from two or more assertions.</a:t>
+                      </a:r>
+                    </a:p>
+                  </a:txBody>
+                  <a:tcPr marL="73152" marR="73152" marT="36576" marB="36576">
+                    <a:lnL w="9525" cap="flat" cmpd="sng" algn="ctr">
+                      <a:solidFill>
+                        <a:srgbClr val="404040"/>
+                      </a:solidFill>
+                      <a:prstDash val="solid"/>
+                    </a:lnL>
+                    <a:lnR w="9525" cap="flat" cmpd="sng" algn="ctr">
+                      <a:solidFill>
+                        <a:srgbClr val="404040"/>
+                      </a:solidFill>
+                      <a:prstDash val="solid"/>
+                    </a:lnR>
+                    <a:lnT w="9525" cap="flat" cmpd="sng" algn="ctr">
+                      <a:solidFill>
+                        <a:srgbClr val="404040"/>
+                      </a:solidFill>
+                      <a:prstDash val="solid"/>
+                    </a:lnT>
+                    <a:lnB w="9525" cap="flat" cmpd="sng" algn="ctr">
+                      <a:solidFill>
+                        <a:srgbClr val="404040"/>
+                      </a:solidFill>
+                      <a:prstDash val="solid"/>
+                    </a:lnB>
+                    <a:solidFill>
+                      <a:srgbClr val="FFFFFF"/>
+                    </a:solidFill>
+                  </a:tcPr>
+                </a:tc>
+                <a:tc>
+                  <a:txBody>
+                    <a:bodyPr wrap="square"/>
+                    <a:lstStyle/>
+                    <a:p>
+                      <a:pPr marL="0" indent="0">
+                        <a:spcAft>
+                          <a:spcPts val="0"/>
+                        </a:spcAft>
+                        <a:buNone/>
+                      </a:pPr>
+                      <a:r>
+                        <a:rPr sz="1800" b="0" i="0">
+                          <a:solidFill>
+                            <a:srgbClr val="000000"/>
+                          </a:solidFill>
+                          <a:latin typeface="Times New Roman"/>
+                          <a:ea typeface="Times New Roman"/>
+                          <a:cs typeface="Times New Roman"/>
+                        </a:rPr>
+                        <a:t>Maya works remotely as an engineer at NovaTech.</a:t>
+                      </a:r>
+                    </a:p>
+                  </a:txBody>
+                  <a:tcPr marL="73152" marR="73152" marT="36576" marB="36576">
+                    <a:lnL w="9525" cap="flat" cmpd="sng" algn="ctr">
+                      <a:solidFill>
+                        <a:srgbClr val="404040"/>
+                      </a:solidFill>
+                      <a:prstDash val="solid"/>
+                    </a:lnL>
+                    <a:lnR w="9525" cap="flat" cmpd="sng" algn="ctr">
+                      <a:solidFill>
+                        <a:srgbClr val="404040"/>
+                      </a:solidFill>
+                      <a:prstDash val="solid"/>
+                    </a:lnR>
+                    <a:lnT w="9525" cap="flat" cmpd="sng" algn="ctr">
+                      <a:solidFill>
+                        <a:srgbClr val="404040"/>
+                      </a:solidFill>
+                      <a:prstDash val="solid"/>
+                    </a:lnT>
+                    <a:lnB w="9525" cap="flat" cmpd="sng" algn="ctr">
+                      <a:solidFill>
+                        <a:srgbClr val="404040"/>
+                      </a:solidFill>
+                      <a:prstDash val="solid"/>
+                    </a:lnB>
+                    <a:solidFill>
+                      <a:srgbClr val="FFFFFF"/>
+                    </a:solidFill>
+                  </a:tcPr>
+                </a:tc>
+              </a:tr>
+              <a:tr h="411480">
+                <a:tc>
+                  <a:txBody>
+                    <a:bodyPr wrap="square"/>
+                    <a:lstStyle/>
+                    <a:p>
+                      <a:pPr marL="0" indent="0">
+                        <a:spcAft>
+                          <a:spcPts val="0"/>
+                        </a:spcAft>
+                        <a:buNone/>
+                      </a:pPr>
+                      <a:r>
+                        <a:rPr sz="1800" b="0" i="0">
+                          <a:solidFill>
+                            <a:srgbClr val="000000"/>
+                          </a:solidFill>
+                          <a:latin typeface="Times New Roman"/>
+                          <a:ea typeface="Times New Roman"/>
+                          <a:cs typeface="Times New Roman"/>
+                        </a:rPr>
+                        <a:t>Stale</a:t>
+                      </a:r>
+                    </a:p>
+                  </a:txBody>
+                  <a:tcPr marL="73152" marR="73152" marT="36576" marB="36576">
+                    <a:lnL w="9525" cap="flat" cmpd="sng" algn="ctr">
+                      <a:solidFill>
+                        <a:srgbClr val="404040"/>
+                      </a:solidFill>
+                      <a:prstDash val="solid"/>
+                    </a:lnL>
+                    <a:lnR w="9525" cap="flat" cmpd="sng" algn="ctr">
+                      <a:solidFill>
+                        <a:srgbClr val="404040"/>
+                      </a:solidFill>
+                      <a:prstDash val="solid"/>
+                    </a:lnR>
+                    <a:lnT w="9525" cap="flat" cmpd="sng" algn="ctr">
+                      <a:solidFill>
+                        <a:srgbClr val="404040"/>
+                      </a:solidFill>
+                      <a:prstDash val="solid"/>
+                    </a:lnT>
+                    <a:lnB w="9525" cap="flat" cmpd="sng" algn="ctr">
+                      <a:solidFill>
+                        <a:srgbClr val="404040"/>
+                      </a:solidFill>
+                      <a:prstDash val="solid"/>
+                    </a:lnB>
+                    <a:solidFill>
+                      <a:srgbClr val="FFFFFF"/>
+                    </a:solidFill>
+                  </a:tcPr>
+                </a:tc>
+                <a:tc>
+                  <a:txBody>
+                    <a:bodyPr wrap="square"/>
+                    <a:lstStyle/>
+                    <a:p>
+                      <a:pPr marL="0" indent="0">
+                        <a:spcAft>
+                          <a:spcPts val="0"/>
+                        </a:spcAft>
+                        <a:buNone/>
+                      </a:pPr>
+                      <a:r>
+                        <a:rPr sz="1800" b="0" i="0">
+                          <a:solidFill>
+                            <a:srgbClr val="000000"/>
+                          </a:solidFill>
+                          <a:latin typeface="Times New Roman"/>
+                          <a:ea typeface="Times New Roman"/>
+                          <a:cs typeface="Times New Roman"/>
+                        </a:rPr>
+                        <a:t>An inference whose supporting assertion has changed, so it is no longer used.</a:t>
+                      </a:r>
+                    </a:p>
+                  </a:txBody>
+                  <a:tcPr marL="73152" marR="73152" marT="36576" marB="36576">
+                    <a:lnL w="9525" cap="flat" cmpd="sng" algn="ctr">
+                      <a:solidFill>
+                        <a:srgbClr val="404040"/>
+                      </a:solidFill>
+                      <a:prstDash val="solid"/>
+                    </a:lnL>
+                    <a:lnR w="9525" cap="flat" cmpd="sng" algn="ctr">
+                      <a:solidFill>
+                        <a:srgbClr val="404040"/>
+                      </a:solidFill>
+                      <a:prstDash val="solid"/>
+                    </a:lnR>
+                    <a:lnT w="9525" cap="flat" cmpd="sng" algn="ctr">
+                      <a:solidFill>
+                        <a:srgbClr val="404040"/>
+                      </a:solidFill>
+                      <a:prstDash val="solid"/>
+                    </a:lnT>
+                    <a:lnB w="9525" cap="flat" cmpd="sng" algn="ctr">
+                      <a:solidFill>
+                        <a:srgbClr val="404040"/>
+                      </a:solidFill>
+                      <a:prstDash val="solid"/>
+                    </a:lnB>
+                    <a:solidFill>
+                      <a:srgbClr val="FFFFFF"/>
+                    </a:solidFill>
+                  </a:tcPr>
+                </a:tc>
+                <a:tc>
+                  <a:txBody>
+                    <a:bodyPr wrap="square"/>
+                    <a:lstStyle/>
+                    <a:p>
+                      <a:pPr marL="0" indent="0">
+                        <a:spcAft>
+                          <a:spcPts val="0"/>
+                        </a:spcAft>
+                        <a:buNone/>
+                      </a:pPr>
+                      <a:r>
+                        <a:rPr sz="1800" b="0" i="0">
+                          <a:solidFill>
+                            <a:srgbClr val="000000"/>
+                          </a:solidFill>
+                          <a:latin typeface="Times New Roman"/>
+                          <a:ea typeface="Times New Roman"/>
+                          <a:cs typeface="Times New Roman"/>
+                        </a:rPr>
+                        <a:t>If Maya leaves NovaTech</a:t>
+                      </a:r>
+                    </a:p>
+                  </a:txBody>
+                  <a:tcPr marL="73152" marR="73152" marT="36576" marB="36576">
+                    <a:lnL w="9525" cap="flat" cmpd="sng" algn="ctr">
+                      <a:solidFill>
+                        <a:srgbClr val="404040"/>
+                      </a:solidFill>
+                      <a:prstDash val="solid"/>
+                    </a:lnL>
+                    <a:lnR w="9525" cap="flat" cmpd="sng" algn="ctr">
+                      <a:solidFill>
+                        <a:srgbClr val="404040"/>
+                      </a:solidFill>
+                      <a:prstDash val="solid"/>
+                    </a:lnR>
+                    <a:lnT w="9525" cap="flat" cmpd="sng" algn="ctr">
+                      <a:solidFill>
+                        <a:srgbClr val="404040"/>
+                      </a:solidFill>
+                      <a:prstDash val="solid"/>
+                    </a:lnT>
+                    <a:lnB w="9525" cap="flat" cmpd="sng" algn="ctr">
+                      <a:solidFill>
+                        <a:srgbClr val="404040"/>
+                      </a:solidFill>
+                      <a:prstDash val="solid"/>
+                    </a:lnB>
+                    <a:solidFill>
+                      <a:srgbClr val="FFFFFF"/>
+                    </a:solidFill>
+                  </a:tcPr>
+                </a:tc>
+              </a:tr>
+              <a:tr h="411480">
+                <a:tc>
+                  <a:txBody>
+                    <a:bodyPr wrap="square"/>
+                    <a:lstStyle/>
+                    <a:p>
+                      <a:pPr marL="0" indent="0">
+                        <a:spcAft>
+                          <a:spcPts val="0"/>
+                        </a:spcAft>
+                        <a:buNone/>
+                      </a:pPr>
+                      <a:r>
+                        <a:rPr sz="1800" b="0" i="0">
+                          <a:solidFill>
+                            <a:srgbClr val="000000"/>
+                          </a:solidFill>
+                          <a:latin typeface="Times New Roman"/>
+                          <a:ea typeface="Times New Roman"/>
+                          <a:cs typeface="Times New Roman"/>
+                        </a:rPr>
+                        <a:t>Namespace</a:t>
+                      </a:r>
+                    </a:p>
+                  </a:txBody>
+                  <a:tcPr marL="73152" marR="73152" marT="36576" marB="36576">
+                    <a:lnL w="9525" cap="flat" cmpd="sng" algn="ctr">
+                      <a:solidFill>
+                        <a:srgbClr val="404040"/>
+                      </a:solidFill>
+                      <a:prstDash val="solid"/>
+                    </a:lnL>
+                    <a:lnR w="9525" cap="flat" cmpd="sng" algn="ctr">
+                      <a:solidFill>
+                        <a:srgbClr val="404040"/>
+                      </a:solidFill>
+                      <a:prstDash val="solid"/>
+                    </a:lnR>
+                    <a:lnT w="9525" cap="flat" cmpd="sng" algn="ctr">
+                      <a:solidFill>
+                        <a:srgbClr val="404040"/>
+                      </a:solidFill>
+                      <a:prstDash val="solid"/>
+                    </a:lnT>
+                    <a:lnB w="9525" cap="flat" cmpd="sng" algn="ctr">
+                      <a:solidFill>
+                        <a:srgbClr val="404040"/>
+                      </a:solidFill>
+                      <a:prstDash val="solid"/>
+                    </a:lnB>
+                    <a:solidFill>
+                      <a:srgbClr val="FFFFFF"/>
+                    </a:solidFill>
+                  </a:tcPr>
+                </a:tc>
+                <a:tc>
+                  <a:txBody>
+                    <a:bodyPr wrap="square"/>
+                    <a:lstStyle/>
+                    <a:p>
+                      <a:pPr marL="0" indent="0">
+                        <a:spcAft>
+                          <a:spcPts val="0"/>
+                        </a:spcAft>
+                        <a:buNone/>
+                      </a:pPr>
+                      <a:r>
+                        <a:rPr sz="1800" b="0" i="0">
+                          <a:solidFill>
+                            <a:srgbClr val="000000"/>
+                          </a:solidFill>
+                          <a:latin typeface="Times New Roman"/>
+                          <a:ea typeface="Times New Roman"/>
+                          <a:cs typeface="Times New Roman"/>
+                        </a:rPr>
+                        <a:t>One user's or project's separate memory.</a:t>
+                      </a:r>
+                    </a:p>
+                  </a:txBody>
+                  <a:tcPr marL="73152" marR="73152" marT="36576" marB="36576">
+                    <a:lnL w="9525" cap="flat" cmpd="sng" algn="ctr">
+                      <a:solidFill>
+                        <a:srgbClr val="404040"/>
+                      </a:solidFill>
+                      <a:prstDash val="solid"/>
+                    </a:lnL>
+                    <a:lnR w="9525" cap="flat" cmpd="sng" algn="ctr">
+                      <a:solidFill>
+                        <a:srgbClr val="404040"/>
+                      </a:solidFill>
+                      <a:prstDash val="solid"/>
+                    </a:lnR>
+                    <a:lnT w="9525" cap="flat" cmpd="sng" algn="ctr">
+                      <a:solidFill>
+                        <a:srgbClr val="404040"/>
+                      </a:solidFill>
+                      <a:prstDash val="solid"/>
+                    </a:lnT>
+                    <a:lnB w="9525" cap="flat" cmpd="sng" algn="ctr">
+                      <a:solidFill>
+                        <a:srgbClr val="404040"/>
+                      </a:solidFill>
+                      <a:prstDash val="solid"/>
+                    </a:lnB>
+                    <a:solidFill>
+                      <a:srgbClr val="FFFFFF"/>
+                    </a:solidFill>
+                  </a:tcPr>
+                </a:tc>
+                <a:tc>
+                  <a:txBody>
+                    <a:bodyPr wrap="square"/>
+                    <a:lstStyle/>
+                    <a:p>
+                      <a:pPr marL="0" indent="0">
+                        <a:spcAft>
+                          <a:spcPts val="0"/>
+                        </a:spcAft>
+                        <a:buNone/>
+                      </a:pPr>
+                      <a:r>
+                        <a:rPr sz="1800" b="0" i="0">
+                          <a:solidFill>
+                            <a:srgbClr val="000000"/>
+                          </a:solidFill>
+                          <a:latin typeface="Times New Roman"/>
+                          <a:ea typeface="Times New Roman"/>
+                          <a:cs typeface="Times New Roman"/>
+                        </a:rPr>
+                        <a:t>user:maya</a:t>
+                      </a:r>
+                    </a:p>
+                  </a:txBody>
+                  <a:tcPr marL="73152" marR="73152" marT="36576" marB="36576">
+                    <a:lnL w="9525" cap="flat" cmpd="sng" algn="ctr">
+                      <a:solidFill>
+                        <a:srgbClr val="404040"/>
+                      </a:solidFill>
+                      <a:prstDash val="solid"/>
+                    </a:lnL>
+                    <a:lnR w="9525" cap="flat" cmpd="sng" algn="ctr">
+                      <a:solidFill>
+                        <a:srgbClr val="404040"/>
+                      </a:solidFill>
+                      <a:prstDash val="solid"/>
+                    </a:lnR>
+                    <a:lnT w="9525" cap="flat" cmpd="sng" algn="ctr">
+                      <a:solidFill>
+                        <a:srgbClr val="404040"/>
+                      </a:solidFill>
+                      <a:prstDash val="solid"/>
+                    </a:lnT>
+                    <a:lnB w="9525" cap="flat" cmpd="sng" algn="ctr">
+                      <a:solidFill>
+                        <a:srgbClr val="404040"/>
+                      </a:solidFill>
+                      <a:prstDash val="solid"/>
+                    </a:lnB>
+                    <a:solidFill>
+                      <a:srgbClr val="FFFFFF"/>
+                    </a:solidFill>
+                  </a:tcPr>
+                </a:tc>
+              </a:tr>
+              <a:tr h="411480">
+                <a:tc>
+                  <a:txBody>
+                    <a:bodyPr wrap="square"/>
+                    <a:lstStyle/>
+                    <a:p>
+                      <a:pPr marL="0" indent="0">
+                        <a:spcAft>
+                          <a:spcPts val="0"/>
+                        </a:spcAft>
+                        <a:buNone/>
+                      </a:pPr>
+                      <a:r>
+                        <a:rPr sz="1800" b="0" i="0">
+                          <a:solidFill>
+                            <a:srgbClr val="000000"/>
+                          </a:solidFill>
+                          <a:latin typeface="Times New Roman"/>
+                          <a:ea typeface="Times New Roman"/>
+                          <a:cs typeface="Times New Roman"/>
+                        </a:rPr>
+                        <a:t>Token budget</a:t>
+                      </a:r>
+                    </a:p>
+                  </a:txBody>
+                  <a:tcPr marL="73152" marR="73152" marT="36576" marB="36576">
+                    <a:lnL w="9525" cap="flat" cmpd="sng" algn="ctr">
+                      <a:solidFill>
+                        <a:srgbClr val="404040"/>
+                      </a:solidFill>
+                      <a:prstDash val="solid"/>
+                    </a:lnL>
+                    <a:lnR w="9525" cap="flat" cmpd="sng" algn="ctr">
+                      <a:solidFill>
+                        <a:srgbClr val="404040"/>
+                      </a:solidFill>
+                      <a:prstDash val="solid"/>
+                    </a:lnR>
+                    <a:lnT w="9525" cap="flat" cmpd="sng" algn="ctr">
+                      <a:solidFill>
+                        <a:srgbClr val="404040"/>
+                      </a:solidFill>
+                      <a:prstDash val="solid"/>
+                    </a:lnT>
+                    <a:lnB w="9525" cap="flat" cmpd="sng" algn="ctr">
+                      <a:solidFill>
+                        <a:srgbClr val="404040"/>
+                      </a:solidFill>
+                      <a:prstDash val="solid"/>
+                    </a:lnB>
+                    <a:solidFill>
+                      <a:srgbClr val="FFFFFF"/>
+                    </a:solidFill>
+                  </a:tcPr>
+                </a:tc>
+                <a:tc>
+                  <a:txBody>
+                    <a:bodyPr wrap="square"/>
+                    <a:lstStyle/>
+                    <a:p>
+                      <a:pPr marL="0" indent="0">
+                        <a:spcAft>
+                          <a:spcPts val="0"/>
+                        </a:spcAft>
+                        <a:buNone/>
+                      </a:pPr>
+                      <a:r>
+                        <a:rPr sz="1800" b="0" i="0">
+                          <a:solidFill>
+                            <a:srgbClr val="000000"/>
+                          </a:solidFill>
+                          <a:latin typeface="Times New Roman"/>
+                          <a:ea typeface="Times New Roman"/>
+                          <a:cs typeface="Times New Roman"/>
+                        </a:rPr>
+                        <a:t>The most text the memory may add to the agent's prompt.</a:t>
+                      </a:r>
+                    </a:p>
+                  </a:txBody>
+                  <a:tcPr marL="73152" marR="73152" marT="36576" marB="36576">
+                    <a:lnL w="9525" cap="flat" cmpd="sng" algn="ctr">
+                      <a:solidFill>
+                        <a:srgbClr val="404040"/>
+                      </a:solidFill>
+                      <a:prstDash val="solid"/>
+                    </a:lnL>
+                    <a:lnR w="9525" cap="flat" cmpd="sng" algn="ctr">
+                      <a:solidFill>
+                        <a:srgbClr val="404040"/>
+                      </a:solidFill>
+                      <a:prstDash val="solid"/>
+                    </a:lnR>
+                    <a:lnT w="9525" cap="flat" cmpd="sng" algn="ctr">
+                      <a:solidFill>
+                        <a:srgbClr val="404040"/>
+                      </a:solidFill>
+                      <a:prstDash val="solid"/>
+                    </a:lnT>
+                    <a:lnB w="9525" cap="flat" cmpd="sng" algn="ctr">
+                      <a:solidFill>
+                        <a:srgbClr val="404040"/>
+                      </a:solidFill>
+                      <a:prstDash val="solid"/>
+                    </a:lnB>
+                    <a:solidFill>
+                      <a:srgbClr val="FFFFFF"/>
+                    </a:solidFill>
+                  </a:tcPr>
+                </a:tc>
+                <a:tc>
+                  <a:txBody>
+                    <a:bodyPr wrap="square"/>
+                    <a:lstStyle/>
+                    <a:p>
+                      <a:pPr marL="0" indent="0">
+                        <a:spcAft>
+                          <a:spcPts val="0"/>
+                        </a:spcAft>
+                        <a:buNone/>
+                      </a:pPr>
+                      <a:r>
+                        <a:rPr sz="1800" b="0" i="0">
+                          <a:solidFill>
+                            <a:srgbClr val="000000"/>
+                          </a:solidFill>
+                          <a:latin typeface="Times New Roman"/>
+                          <a:ea typeface="Times New Roman"/>
+                          <a:cs typeface="Times New Roman"/>
+                        </a:rPr>
+                        <a:t>2,048 tokens</a:t>
+                      </a:r>
+                    </a:p>
+                  </a:txBody>
+                  <a:tcPr marL="73152" marR="73152" marT="36576" marB="36576">
+                    <a:lnL w="9525" cap="flat" cmpd="sng" algn="ctr">
+                      <a:solidFill>
+                        <a:srgbClr val="404040"/>
+                      </a:solidFill>
+                      <a:prstDash val="solid"/>
+                    </a:lnL>
+                    <a:lnR w="9525" cap="flat" cmpd="sng" algn="ctr">
+                      <a:solidFill>
+                        <a:srgbClr val="404040"/>
+                      </a:solidFill>
+                      <a:prstDash val="solid"/>
+                    </a:lnR>
+                    <a:lnT w="9525" cap="flat" cmpd="sng" algn="ctr">
+                      <a:solidFill>
+                        <a:srgbClr val="404040"/>
+                      </a:solidFill>
+                      <a:prstDash val="solid"/>
+                    </a:lnT>
+                    <a:lnB w="9525" cap="flat" cmpd="sng" algn="ctr">
+                      <a:solidFill>
+                        <a:srgbClr val="404040"/>
+                      </a:solidFill>
+                      <a:prstDash val="solid"/>
+                    </a:lnB>
+                    <a:solidFill>
+                      <a:srgbClr val="FFFFFF"/>
+                    </a:solidFill>
+                  </a:tcPr>
+                </a:tc>
+              </a:tr>
+            </a:tbl>
+          </a:graphicData>
+        </a:graphic>
+      </p:graphicFrame>
     </p:spTree>
   </p:cSld>
   <p:clrMapOvr>
@@ -20799,7 +24219,7 @@
                 <a:ea typeface="Times New Roman"/>
                 <a:cs typeface="Times New Roman"/>
               </a:rPr>
-              <a:t>MODULE 1: SOURCE ACQUISITION AND PROCESSING</a:t>
+              <a:t>SYSTEM ARCHITECTURE</a:t>
             </a:r>
           </a:p>
         </p:txBody>
@@ -20886,7 +24306,7 @@
       </p:sp>
       <p:pic>
         <p:nvPicPr>
-          <p:cNvPr id="26" name="Picture 25" descr="Module 1: Source Acquisition And Processing (landscape layout of the report figure)"/>
+          <p:cNvPr id="26" name="Picture 25" descr="Overall system architecture"/>
           <p:cNvPicPr>
             <a:picLocks noChangeAspect="1"/>
           </p:cNvPicPr>
@@ -20900,8 +24320,8 @@
         </p:blipFill>
         <p:spPr>
           <a:xfrm>
-            <a:off x="594360" y="1280160"/>
-            <a:ext cx="11000232" cy="1919653"/>
+            <a:off x="2915863" y="1280160"/>
+            <a:ext cx="6357225" cy="4343400"/>
           </a:xfrm>
           <a:prstGeom prst="rect">
             <a:avLst/>
@@ -20916,8 +24336,8 @@
         </p:nvSpPr>
         <p:spPr>
           <a:xfrm>
-            <a:off x="594360" y="3428413"/>
-            <a:ext cx="11000232" cy="2835226"/>
+            <a:off x="594360" y="5760720"/>
+            <a:ext cx="11000232" cy="685800"/>
           </a:xfrm>
           <a:prstGeom prst="rect">
             <a:avLst/>
@@ -20928,12 +24348,11 @@
           <a:bodyPr wrap="square" lIns="45720" rIns="45720" tIns="27432" bIns="27432"/>
           <a:lstStyle/>
           <a:p>
-            <a:pPr marL="256032" indent="-256032">
+            <a:pPr marL="0" indent="0">
               <a:spcAft>
                 <a:spcPts val="600"/>
               </a:spcAft>
-              <a:buFont typeface="Arial"/>
-              <a:buChar char="•"/>
+              <a:buNone/>
             </a:pPr>
             <a:r>
               <a:rPr sz="1800" b="0" i="0">
@@ -20944,67 +24363,7 @@
                 <a:ea typeface="Times New Roman"/>
                 <a:cs typeface="Times New Roman"/>
               </a:rPr>
-              <a:t>Pi sends every message to a local spool first, so nothing is lost if the service is down.</a:t>
-            </a:r>
-          </a:p>
-          <a:p>
-            <a:pPr marL="256032" indent="-256032">
-              <a:spcAft>
-                <a:spcPts val="600"/>
-              </a:spcAft>
-              <a:buFont typeface="Arial"/>
-              <a:buChar char="•"/>
-            </a:pPr>
-            <a:r>
-              <a:rPr sz="1800" b="0" i="0">
-                <a:solidFill>
-                  <a:srgbClr val="000000"/>
-                </a:solidFill>
-                <a:latin typeface="Times New Roman"/>
-                <a:ea typeface="Times New Roman"/>
-                <a:cs typeface="Times New Roman"/>
-              </a:rPr>
-              <a:t>The retain API checks each batch, and a repeated request gets the existing IDs back instead of duplicates.</a:t>
-            </a:r>
-          </a:p>
-          <a:p>
-            <a:pPr marL="256032" indent="-256032">
-              <a:spcAft>
-                <a:spcPts val="600"/>
-              </a:spcAft>
-              <a:buFont typeface="Arial"/>
-              <a:buChar char="•"/>
-            </a:pPr>
-            <a:r>
-              <a:rPr sz="1800" b="0" i="0">
-                <a:solidFill>
-                  <a:srgbClr val="000000"/>
-                </a:solidFill>
-                <a:latin typeface="Times New Roman"/>
-                <a:ea typeface="Times New Roman"/>
-                <a:cs typeface="Times New Roman"/>
-              </a:rPr>
-              <a:t>Source events, chunks and an extraction job are saved in one PostgreSQL transaction.</a:t>
-            </a:r>
-          </a:p>
-          <a:p>
-            <a:pPr marL="256032" indent="-256032">
-              <a:spcAft>
-                <a:spcPts val="600"/>
-              </a:spcAft>
-              <a:buFont typeface="Arial"/>
-              <a:buChar char="•"/>
-            </a:pPr>
-            <a:r>
-              <a:rPr sz="1800" b="0" i="0">
-                <a:solidFill>
-                  <a:srgbClr val="000000"/>
-                </a:solidFill>
-                <a:latin typeface="Times New Roman"/>
-                <a:ea typeface="Times New Roman"/>
-                <a:cs typeface="Times New Roman"/>
-              </a:rPr>
-              <a:t>Chunks are embedded with Qwen3 Embedding, and Tokio workers lease jobs and retry up to five times.</a:t>
+              <a:t>M1 saves messages, M2 extracts assertions, M3 keeps every version, M4 finds and packs memories for the agent, and M5 trains the extraction model offline.</a:t>
             </a:r>
           </a:p>
         </p:txBody>
@@ -21051,7 +24410,7 @@
                 <a:ea typeface="Times New Roman"/>
                 <a:cs typeface="Times New Roman"/>
               </a:rPr>
-              <a:t>MODULE 2: KNOWLEDGE EXTRACTION AND CONSOLIDATION</a:t>
+              <a:t>EXAMPLE WALKTHROUGH</a:t>
             </a:r>
           </a:p>
         </p:txBody>
@@ -21136,56 +24495,113 @@
           </a:p>
         </p:txBody>
       </p:sp>
-      <p:pic>
-        <p:nvPicPr>
-          <p:cNvPr id="26" name="Picture 25" descr="Module 2: Knowledge Extraction And Consolidation (landscape layout of the report figure)"/>
-          <p:cNvPicPr>
-            <a:picLocks noChangeAspect="1"/>
-          </p:cNvPicPr>
-          <p:nvPr/>
-        </p:nvPicPr>
-        <p:blipFill>
-          <a:blip r:embed="rId3"/>
-          <a:stretch>
-            <a:fillRect/>
-          </a:stretch>
-        </p:blipFill>
-        <p:spPr>
-          <a:xfrm>
-            <a:off x="594360" y="1280160"/>
-            <a:ext cx="11000232" cy="2304949"/>
-          </a:xfrm>
-          <a:prstGeom prst="rect">
-            <a:avLst/>
-          </a:prstGeom>
-        </p:spPr>
-      </p:pic>
       <p:sp>
         <p:nvSpPr>
-          <p:cNvPr id="27" name="TextBox 26"/>
-          <p:cNvSpPr txBox="1"/>
+          <p:cNvPr id="26" name="Rounded Rectangle 25"/>
+          <p:cNvSpPr/>
           <p:nvPr/>
         </p:nvSpPr>
         <p:spPr>
           <a:xfrm>
-            <a:off x="594360" y="3813709"/>
-            <a:ext cx="11000232" cy="2449930"/>
+            <a:off x="594360" y="1280160"/>
+            <a:ext cx="1828800" cy="896112"/>
+          </a:xfrm>
+          <a:prstGeom prst="roundRect">
+            <a:avLst/>
+          </a:prstGeom>
+          <a:solidFill>
+            <a:srgbClr val="F2F2F2"/>
+          </a:solidFill>
+          <a:ln>
+            <a:solidFill>
+              <a:srgbClr val="8A9BB0"/>
+            </a:solidFill>
+          </a:ln>
+          <a:effectLst/>
+        </p:spPr>
+        <p:style>
+          <a:lnRef idx="1">
+            <a:schemeClr val="accent1"/>
+          </a:lnRef>
+          <a:fillRef idx="3">
+            <a:schemeClr val="accent1"/>
+          </a:fillRef>
+          <a:effectRef idx="2">
+            <a:schemeClr val="accent1"/>
+          </a:effectRef>
+          <a:fontRef idx="minor">
+            <a:schemeClr val="lt1"/>
+          </a:fontRef>
+        </p:style>
+        <p:txBody>
+          <a:bodyPr rtlCol="0" anchor="ctr" wrap="square"/>
+          <a:lstStyle/>
+          <a:p>
+            <a:pPr algn="ctr" marL="0" indent="0">
+              <a:spcAft>
+                <a:spcPts val="0"/>
+              </a:spcAft>
+              <a:buNone/>
+            </a:pPr>
+            <a:r>
+              <a:rPr sz="1800" b="1" i="0">
+                <a:solidFill>
+                  <a:srgbClr val="000000"/>
+                </a:solidFill>
+                <a:latin typeface="Times New Roman"/>
+                <a:ea typeface="Times New Roman"/>
+                <a:cs typeface="Times New Roman"/>
+              </a:rPr>
+              <a:t>Input</a:t>
+            </a:r>
+          </a:p>
+        </p:txBody>
+      </p:sp>
+      <p:sp>
+        <p:nvSpPr>
+          <p:cNvPr id="27" name="Rectangle 26"/>
+          <p:cNvSpPr/>
+          <p:nvPr/>
+        </p:nvSpPr>
+        <p:spPr>
+          <a:xfrm>
+            <a:off x="2560320" y="1280160"/>
+            <a:ext cx="9034272" cy="896112"/>
           </a:xfrm>
           <a:prstGeom prst="rect">
             <a:avLst/>
           </a:prstGeom>
           <a:noFill/>
+          <a:ln>
+            <a:solidFill>
+              <a:srgbClr val="BFC8D4"/>
+            </a:solidFill>
+          </a:ln>
+          <a:effectLst/>
         </p:spPr>
+        <p:style>
+          <a:lnRef idx="1">
+            <a:schemeClr val="accent1"/>
+          </a:lnRef>
+          <a:fillRef idx="3">
+            <a:schemeClr val="accent1"/>
+          </a:fillRef>
+          <a:effectRef idx="2">
+            <a:schemeClr val="accent1"/>
+          </a:effectRef>
+          <a:fontRef idx="minor">
+            <a:schemeClr val="lt1"/>
+          </a:fontRef>
+        </p:style>
         <p:txBody>
-          <a:bodyPr wrap="square" lIns="45720" rIns="45720" tIns="27432" bIns="27432"/>
+          <a:bodyPr rtlCol="0" anchor="ctr" lIns="109728" rIns="109728" wrap="square"/>
           <a:lstStyle/>
           <a:p>
-            <a:pPr marL="256032" indent="-256032">
+            <a:pPr algn="l" marL="0" indent="0">
               <a:spcAft>
-                <a:spcPts val="600"/>
+                <a:spcPts val="0"/>
               </a:spcAft>
-              <a:buFont typeface="Arial"/>
-              <a:buChar char="•"/>
+              <a:buNone/>
             </a:pPr>
             <a:r>
               <a:rPr sz="1800" b="0" i="0">
@@ -21196,16 +24612,15 @@
                 <a:ea typeface="Times New Roman"/>
                 <a:cs typeface="Times New Roman"/>
               </a:rPr>
-              <a:t>Extraction: the fine-tuned model returns claims with exact quotes. A quote missing from the source is rejected and the model retries, up to two times.</a:t>
-            </a:r>
-          </a:p>
-          <a:p>
-            <a:pPr marL="256032" indent="-256032">
+              <a:t>1 Oct: "I live in Chennai."   10 Oct: "Bengaluru is now my home city."</a:t>
+            </a:r>
+          </a:p>
+          <a:p>
+            <a:pPr marL="0" indent="0" algn="l">
               <a:spcAft>
-                <a:spcPts val="600"/>
+                <a:spcPts val="0"/>
               </a:spcAft>
-              <a:buFont typeface="Arial"/>
-              <a:buChar char="•"/>
+              <a:buNone/>
             </a:pPr>
             <a:r>
               <a:rPr sz="1800" b="0" i="0">
@@ -21216,18 +24631,120 @@
                 <a:ea typeface="Times New Roman"/>
                 <a:cs typeface="Times New Roman"/>
               </a:rPr>
-              <a:t>A review step confirms corrections and filters out secrets before claims go to Module 3.</a:t>
-            </a:r>
-          </a:p>
-          <a:p>
-            <a:pPr marL="256032" indent="-256032">
+              <a:t>13 Oct, new session: "Where do I live now?"</a:t>
+            </a:r>
+          </a:p>
+        </p:txBody>
+      </p:sp>
+      <p:sp>
+        <p:nvSpPr>
+          <p:cNvPr id="28" name="Rounded Rectangle 27"/>
+          <p:cNvSpPr/>
+          <p:nvPr/>
+        </p:nvSpPr>
+        <p:spPr>
+          <a:xfrm>
+            <a:off x="594360" y="2286000"/>
+            <a:ext cx="1828800" cy="896112"/>
+          </a:xfrm>
+          <a:prstGeom prst="roundRect">
+            <a:avLst/>
+          </a:prstGeom>
+          <a:solidFill>
+            <a:srgbClr val="D9E2EC"/>
+          </a:solidFill>
+          <a:ln>
+            <a:solidFill>
+              <a:srgbClr val="8A9BB0"/>
+            </a:solidFill>
+          </a:ln>
+          <a:effectLst/>
+        </p:spPr>
+        <p:style>
+          <a:lnRef idx="1">
+            <a:schemeClr val="accent1"/>
+          </a:lnRef>
+          <a:fillRef idx="3">
+            <a:schemeClr val="accent1"/>
+          </a:fillRef>
+          <a:effectRef idx="2">
+            <a:schemeClr val="accent1"/>
+          </a:effectRef>
+          <a:fontRef idx="minor">
+            <a:schemeClr val="lt1"/>
+          </a:fontRef>
+        </p:style>
+        <p:txBody>
+          <a:bodyPr rtlCol="0" anchor="ctr" wrap="square"/>
+          <a:lstStyle/>
+          <a:p>
+            <a:pPr algn="ctr" marL="0" indent="0">
               <a:spcAft>
-                <a:spcPts val="600"/>
+                <a:spcPts val="0"/>
               </a:spcAft>
-              <a:buFont typeface="Arial"/>
-              <a:buChar char="•"/>
+              <a:buNone/>
             </a:pPr>
             <a:r>
+              <a:rPr sz="1800" b="1" i="0">
+                <a:solidFill>
+                  <a:srgbClr val="000000"/>
+                </a:solidFill>
+                <a:latin typeface="Times New Roman"/>
+                <a:ea typeface="Times New Roman"/>
+                <a:cs typeface="Times New Roman"/>
+              </a:rPr>
+              <a:t>M1  Save</a:t>
+            </a:r>
+          </a:p>
+        </p:txBody>
+      </p:sp>
+      <p:sp>
+        <p:nvSpPr>
+          <p:cNvPr id="29" name="Rectangle 28"/>
+          <p:cNvSpPr/>
+          <p:nvPr/>
+        </p:nvSpPr>
+        <p:spPr>
+          <a:xfrm>
+            <a:off x="2560320" y="2286000"/>
+            <a:ext cx="9034272" cy="896112"/>
+          </a:xfrm>
+          <a:prstGeom prst="rect">
+            <a:avLst/>
+          </a:prstGeom>
+          <a:noFill/>
+          <a:ln>
+            <a:solidFill>
+              <a:srgbClr val="BFC8D4"/>
+            </a:solidFill>
+          </a:ln>
+          <a:effectLst/>
+        </p:spPr>
+        <p:style>
+          <a:lnRef idx="1">
+            <a:schemeClr val="accent1"/>
+          </a:lnRef>
+          <a:fillRef idx="3">
+            <a:schemeClr val="accent1"/>
+          </a:fillRef>
+          <a:effectRef idx="2">
+            <a:schemeClr val="accent1"/>
+          </a:effectRef>
+          <a:fontRef idx="minor">
+            <a:schemeClr val="lt1"/>
+          </a:fontRef>
+        </p:style>
+        <p:txBody>
+          <a:bodyPr rtlCol="0" anchor="ctr" lIns="109728" rIns="109728" wrap="square"/>
+          <a:lstStyle/>
+          <a:p>
+            <a:pPr algn="l" marL="0" indent="0">
+              <a:spcAft>
+                <a:spcPts val="0"/>
+              </a:spcAft>
+              <a:buNone/>
+            </a:pPr>
+            <a:r>
               <a:rPr sz="1800" b="0" i="0">
                 <a:solidFill>
                   <a:srgbClr val="000000"/>
@@ -21236,7 +24753,373 @@
                 <a:ea typeface="Times New Roman"/>
                 <a:cs typeface="Times New Roman"/>
               </a:rPr>
-              <a:t>Consolidation: after Module 3 commits, two or more active assertions about a subject can become one inference.</a:t>
+              <a:t>Both messages are saved exactly as sent, with speaker and time, and an extraction job is queued.</a:t>
+            </a:r>
+          </a:p>
+        </p:txBody>
+      </p:sp>
+      <p:sp>
+        <p:nvSpPr>
+          <p:cNvPr id="30" name="Rounded Rectangle 29"/>
+          <p:cNvSpPr/>
+          <p:nvPr/>
+        </p:nvSpPr>
+        <p:spPr>
+          <a:xfrm>
+            <a:off x="594360" y="3291840"/>
+            <a:ext cx="1828800" cy="896112"/>
+          </a:xfrm>
+          <a:prstGeom prst="roundRect">
+            <a:avLst/>
+          </a:prstGeom>
+          <a:solidFill>
+            <a:srgbClr val="D9E2EC"/>
+          </a:solidFill>
+          <a:ln>
+            <a:solidFill>
+              <a:srgbClr val="8A9BB0"/>
+            </a:solidFill>
+          </a:ln>
+          <a:effectLst/>
+        </p:spPr>
+        <p:style>
+          <a:lnRef idx="1">
+            <a:schemeClr val="accent1"/>
+          </a:lnRef>
+          <a:fillRef idx="3">
+            <a:schemeClr val="accent1"/>
+          </a:fillRef>
+          <a:effectRef idx="2">
+            <a:schemeClr val="accent1"/>
+          </a:effectRef>
+          <a:fontRef idx="minor">
+            <a:schemeClr val="lt1"/>
+          </a:fontRef>
+        </p:style>
+        <p:txBody>
+          <a:bodyPr rtlCol="0" anchor="ctr" wrap="square"/>
+          <a:lstStyle/>
+          <a:p>
+            <a:pPr algn="ctr" marL="0" indent="0">
+              <a:spcAft>
+                <a:spcPts val="0"/>
+              </a:spcAft>
+              <a:buNone/>
+            </a:pPr>
+            <a:r>
+              <a:rPr sz="1800" b="1" i="0">
+                <a:solidFill>
+                  <a:srgbClr val="000000"/>
+                </a:solidFill>
+                <a:latin typeface="Times New Roman"/>
+                <a:ea typeface="Times New Roman"/>
+                <a:cs typeface="Times New Roman"/>
+              </a:rPr>
+              <a:t>M2  Extract</a:t>
+            </a:r>
+          </a:p>
+        </p:txBody>
+      </p:sp>
+      <p:sp>
+        <p:nvSpPr>
+          <p:cNvPr id="31" name="Rectangle 30"/>
+          <p:cNvSpPr/>
+          <p:nvPr/>
+        </p:nvSpPr>
+        <p:spPr>
+          <a:xfrm>
+            <a:off x="2560320" y="3291840"/>
+            <a:ext cx="9034272" cy="896112"/>
+          </a:xfrm>
+          <a:prstGeom prst="rect">
+            <a:avLst/>
+          </a:prstGeom>
+          <a:noFill/>
+          <a:ln>
+            <a:solidFill>
+              <a:srgbClr val="BFC8D4"/>
+            </a:solidFill>
+          </a:ln>
+          <a:effectLst/>
+        </p:spPr>
+        <p:style>
+          <a:lnRef idx="1">
+            <a:schemeClr val="accent1"/>
+          </a:lnRef>
+          <a:fillRef idx="3">
+            <a:schemeClr val="accent1"/>
+          </a:fillRef>
+          <a:effectRef idx="2">
+            <a:schemeClr val="accent1"/>
+          </a:effectRef>
+          <a:fontRef idx="minor">
+            <a:schemeClr val="lt1"/>
+          </a:fontRef>
+        </p:style>
+        <p:txBody>
+          <a:bodyPr rtlCol="0" anchor="ctr" lIns="109728" rIns="109728" wrap="square"/>
+          <a:lstStyle/>
+          <a:p>
+            <a:pPr algn="l" marL="0" indent="0">
+              <a:spcAft>
+                <a:spcPts val="0"/>
+              </a:spcAft>
+              <a:buNone/>
+            </a:pPr>
+            <a:r>
+              <a:rPr sz="1800" b="0" i="0">
+                <a:solidFill>
+                  <a:srgbClr val="000000"/>
+                </a:solidFill>
+                <a:latin typeface="Times New Roman"/>
+                <a:ea typeface="Times New Roman"/>
+                <a:cs typeface="Times New Roman"/>
+              </a:rPr>
+              <a:t>The model from Module 5 returns two assertions, each with its quote: home city Chennai, then home city Bengaluru, marked as a correction.</a:t>
+            </a:r>
+          </a:p>
+        </p:txBody>
+      </p:sp>
+      <p:sp>
+        <p:nvSpPr>
+          <p:cNvPr id="32" name="Rounded Rectangle 31"/>
+          <p:cNvSpPr/>
+          <p:nvPr/>
+        </p:nvSpPr>
+        <p:spPr>
+          <a:xfrm>
+            <a:off x="594360" y="4297680"/>
+            <a:ext cx="1828800" cy="896112"/>
+          </a:xfrm>
+          <a:prstGeom prst="roundRect">
+            <a:avLst/>
+          </a:prstGeom>
+          <a:solidFill>
+            <a:srgbClr val="D9E2EC"/>
+          </a:solidFill>
+          <a:ln>
+            <a:solidFill>
+              <a:srgbClr val="8A9BB0"/>
+            </a:solidFill>
+          </a:ln>
+          <a:effectLst/>
+        </p:spPr>
+        <p:style>
+          <a:lnRef idx="1">
+            <a:schemeClr val="accent1"/>
+          </a:lnRef>
+          <a:fillRef idx="3">
+            <a:schemeClr val="accent1"/>
+          </a:fillRef>
+          <a:effectRef idx="2">
+            <a:schemeClr val="accent1"/>
+          </a:effectRef>
+          <a:fontRef idx="minor">
+            <a:schemeClr val="lt1"/>
+          </a:fontRef>
+        </p:style>
+        <p:txBody>
+          <a:bodyPr rtlCol="0" anchor="ctr" wrap="square"/>
+          <a:lstStyle/>
+          <a:p>
+            <a:pPr algn="ctr" marL="0" indent="0">
+              <a:spcAft>
+                <a:spcPts val="0"/>
+              </a:spcAft>
+              <a:buNone/>
+            </a:pPr>
+            <a:r>
+              <a:rPr sz="1800" b="1" i="0">
+                <a:solidFill>
+                  <a:srgbClr val="000000"/>
+                </a:solidFill>
+                <a:latin typeface="Times New Roman"/>
+                <a:ea typeface="Times New Roman"/>
+                <a:cs typeface="Times New Roman"/>
+              </a:rPr>
+              <a:t>M3  Update</a:t>
+            </a:r>
+          </a:p>
+        </p:txBody>
+      </p:sp>
+      <p:sp>
+        <p:nvSpPr>
+          <p:cNvPr id="33" name="Rectangle 32"/>
+          <p:cNvSpPr/>
+          <p:nvPr/>
+        </p:nvSpPr>
+        <p:spPr>
+          <a:xfrm>
+            <a:off x="2560320" y="4297680"/>
+            <a:ext cx="9034272" cy="896112"/>
+          </a:xfrm>
+          <a:prstGeom prst="rect">
+            <a:avLst/>
+          </a:prstGeom>
+          <a:noFill/>
+          <a:ln>
+            <a:solidFill>
+              <a:srgbClr val="BFC8D4"/>
+            </a:solidFill>
+          </a:ln>
+          <a:effectLst/>
+        </p:spPr>
+        <p:style>
+          <a:lnRef idx="1">
+            <a:schemeClr val="accent1"/>
+          </a:lnRef>
+          <a:fillRef idx="3">
+            <a:schemeClr val="accent1"/>
+          </a:fillRef>
+          <a:effectRef idx="2">
+            <a:schemeClr val="accent1"/>
+          </a:effectRef>
+          <a:fontRef idx="minor">
+            <a:schemeClr val="lt1"/>
+          </a:fontRef>
+        </p:style>
+        <p:txBody>
+          <a:bodyPr rtlCol="0" anchor="ctr" lIns="109728" rIns="109728" wrap="square"/>
+          <a:lstStyle/>
+          <a:p>
+            <a:pPr algn="l" marL="0" indent="0">
+              <a:spcAft>
+                <a:spcPts val="0"/>
+              </a:spcAft>
+              <a:buNone/>
+            </a:pPr>
+            <a:r>
+              <a:rPr sz="1800" b="0" i="0">
+                <a:solidFill>
+                  <a:srgbClr val="000000"/>
+                </a:solidFill>
+                <a:latin typeface="Times New Roman"/>
+                <a:ea typeface="Times New Roman"/>
+                <a:cs typeface="Times New Roman"/>
+              </a:rPr>
+              <a:t>Bengaluru supersedes Chennai. Chennai is kept, valid from 1 to 10 Oct, and Bengaluru is current from 10 Oct.</a:t>
+            </a:r>
+          </a:p>
+        </p:txBody>
+      </p:sp>
+      <p:sp>
+        <p:nvSpPr>
+          <p:cNvPr id="34" name="Rounded Rectangle 33"/>
+          <p:cNvSpPr/>
+          <p:nvPr/>
+        </p:nvSpPr>
+        <p:spPr>
+          <a:xfrm>
+            <a:off x="594360" y="5303520"/>
+            <a:ext cx="1828800" cy="896112"/>
+          </a:xfrm>
+          <a:prstGeom prst="roundRect">
+            <a:avLst/>
+          </a:prstGeom>
+          <a:solidFill>
+            <a:srgbClr val="D9E2EC"/>
+          </a:solidFill>
+          <a:ln>
+            <a:solidFill>
+              <a:srgbClr val="8A9BB0"/>
+            </a:solidFill>
+          </a:ln>
+          <a:effectLst/>
+        </p:spPr>
+        <p:style>
+          <a:lnRef idx="1">
+            <a:schemeClr val="accent1"/>
+          </a:lnRef>
+          <a:fillRef idx="3">
+            <a:schemeClr val="accent1"/>
+          </a:fillRef>
+          <a:effectRef idx="2">
+            <a:schemeClr val="accent1"/>
+          </a:effectRef>
+          <a:fontRef idx="minor">
+            <a:schemeClr val="lt1"/>
+          </a:fontRef>
+        </p:style>
+        <p:txBody>
+          <a:bodyPr rtlCol="0" anchor="ctr" wrap="square"/>
+          <a:lstStyle/>
+          <a:p>
+            <a:pPr algn="ctr" marL="0" indent="0">
+              <a:spcAft>
+                <a:spcPts val="0"/>
+              </a:spcAft>
+              <a:buNone/>
+            </a:pPr>
+            <a:r>
+              <a:rPr sz="1800" b="1" i="0">
+                <a:solidFill>
+                  <a:srgbClr val="000000"/>
+                </a:solidFill>
+                <a:latin typeface="Times New Roman"/>
+                <a:ea typeface="Times New Roman"/>
+                <a:cs typeface="Times New Roman"/>
+              </a:rPr>
+              <a:t>M4  Recall</a:t>
+            </a:r>
+          </a:p>
+        </p:txBody>
+      </p:sp>
+      <p:sp>
+        <p:nvSpPr>
+          <p:cNvPr id="35" name="Rectangle 34"/>
+          <p:cNvSpPr/>
+          <p:nvPr/>
+        </p:nvSpPr>
+        <p:spPr>
+          <a:xfrm>
+            <a:off x="2560320" y="5303520"/>
+            <a:ext cx="9034272" cy="896112"/>
+          </a:xfrm>
+          <a:prstGeom prst="rect">
+            <a:avLst/>
+          </a:prstGeom>
+          <a:noFill/>
+          <a:ln>
+            <a:solidFill>
+              <a:srgbClr val="BFC8D4"/>
+            </a:solidFill>
+          </a:ln>
+          <a:effectLst/>
+        </p:spPr>
+        <p:style>
+          <a:lnRef idx="1">
+            <a:schemeClr val="accent1"/>
+          </a:lnRef>
+          <a:fillRef idx="3">
+            <a:schemeClr val="accent1"/>
+          </a:fillRef>
+          <a:effectRef idx="2">
+            <a:schemeClr val="accent1"/>
+          </a:effectRef>
+          <a:fontRef idx="minor">
+            <a:schemeClr val="lt1"/>
+          </a:fontRef>
+        </p:style>
+        <p:txBody>
+          <a:bodyPr rtlCol="0" anchor="ctr" lIns="109728" rIns="109728" wrap="square"/>
+          <a:lstStyle/>
+          <a:p>
+            <a:pPr algn="l" marL="0" indent="0">
+              <a:spcAft>
+                <a:spcPts val="0"/>
+              </a:spcAft>
+              <a:buNone/>
+            </a:pPr>
+            <a:r>
+              <a:rPr sz="1800" b="0" i="0">
+                <a:solidFill>
+                  <a:srgbClr val="000000"/>
+                </a:solidFill>
+                <a:latin typeface="Times New Roman"/>
+                <a:ea typeface="Times New Roman"/>
+                <a:cs typeface="Times New Roman"/>
+              </a:rPr>
+              <a:t>For the 13 Oct question, search finds the Bengaluru assertion and passes it to Pi with its quote. Pi answers: "Bengaluru, since 10 October. Before that, Chennai."</a:t>
             </a:r>
           </a:p>
         </p:txBody>

--- a/P1_R2_13.pptx
+++ b/P1_R2_13.pptx
@@ -421,2265 +421,6 @@
   </p:cSld>
   <p:clrMap bg1="lt1" bg2="lt2" tx1="dk1" tx2="dk2" accent1="accent1" accent2="accent2" accent3="accent3" accent4="accent4" accent5="accent5" accent6="accent6" hlink="hlink" folHlink="folHlink"/>
 </p:notesMaster>
-</file>
-
-<file path=ppt/notesSlides/notesSlide1.xml><?xml version="1.0" encoding="utf-8"?>
-<p:notes xmlns:a="http://schemas.openxmlformats.org/drawingml/2006/main" xmlns:p="http://schemas.openxmlformats.org/presentationml/2006/main" xmlns:r="http://schemas.openxmlformats.org/officeDocument/2006/relationships" xmlns:p14="http://schemas.microsoft.com/office/powerpoint/2010/main" xmlns:p15="http://schemas.microsoft.com/office/powerpoint/2012/main" xmlns:mc="http://schemas.openxmlformats.org/markup-compatibility/2006">
-  <p:cSld>
-    <p:spTree>
-      <p:nvGrpSpPr>
-        <p:cNvPr id="1" name=""/>
-        <p:cNvGrpSpPr/>
-        <p:nvPr/>
-      </p:nvGrpSpPr>
-      <p:grpSpPr>
-        <a:xfrm>
-          <a:off x="0" y="0"/>
-          <a:ext cx="0" cy="0"/>
-          <a:chOff x="0" y="0"/>
-          <a:chExt cx="0" cy="0"/>
-        </a:xfrm>
-      </p:grpSpPr>
-      <p:sp>
-        <p:nvSpPr>
-          <p:cNvPr id="96" name="PlaceHolder 1"/>
-          <p:cNvSpPr>
-            <a:spLocks noGrp="1"/>
-          </p:cNvSpPr>
-          <p:nvPr>
-            <p:ph type="sldImg"/>
-          </p:nvPr>
-        </p:nvSpPr>
-        <p:spPr>
-          <a:xfrm>
-            <a:off x="685800" y="1143000"/>
-            <a:ext cx="5485320" cy="3085200"/>
-          </a:xfrm>
-          <a:prstGeom prst="rect">
-            <a:avLst/>
-          </a:prstGeom>
-          <a:ln w="0">
-            <a:noFill/>
-          </a:ln>
-        </p:spPr>
-      </p:sp>
-      <p:sp>
-        <p:nvSpPr>
-          <p:cNvPr id="97" name="PlaceHolder 2"/>
-          <p:cNvSpPr>
-            <a:spLocks noGrp="1"/>
-          </p:cNvSpPr>
-          <p:nvPr>
-            <p:ph type="body"/>
-          </p:nvPr>
-        </p:nvSpPr>
-        <p:spPr>
-          <a:xfrm>
-            <a:off x="685800" y="4400640"/>
-            <a:ext cx="5485320" cy="3599280"/>
-          </a:xfrm>
-          <a:prstGeom prst="rect">
-            <a:avLst/>
-          </a:prstGeom>
-          <a:noFill/>
-          <a:ln w="0">
-            <a:noFill/>
-          </a:ln>
-        </p:spPr>
-        <p:txBody>
-          <a:bodyPr lIns="91440" tIns="45720" rIns="91440" bIns="45720" anchor="t">
-            <a:noAutofit/>
-          </a:bodyPr>
-          <a:p>
-            <a:r>
-              <a:t>We are Team 13. This is our second review of the Long-Term Memory Engine for AI agents, written in Rust. It stores what an agent is told, ties every stored assertion to the message it came from, and brings the right assertions back in a later session. Pi in this deck is the Pi coding agent, not a Raspberry Pi.</a:t>
-            </a:r>
-          </a:p>
-        </p:txBody>
-      </p:sp>
-      <p:sp>
-        <p:nvSpPr>
-          <p:cNvPr id="98" name="PlaceHolder 3"/>
-          <p:cNvSpPr>
-            <a:spLocks noGrp="1"/>
-          </p:cNvSpPr>
-          <p:nvPr>
-            <p:ph type="sldNum" idx="15"/>
-          </p:nvPr>
-        </p:nvSpPr>
-        <p:spPr>
-          <a:xfrm>
-            <a:off x="3884760" y="8685360"/>
-            <a:ext cx="2970720" cy="457560"/>
-          </a:xfrm>
-          <a:prstGeom prst="rect">
-            <a:avLst/>
-          </a:prstGeom>
-          <a:noFill/>
-          <a:ln w="0">
-            <a:noFill/>
-          </a:ln>
-        </p:spPr>
-        <p:txBody>
-          <a:bodyPr lIns="91440" tIns="45720" rIns="91440" bIns="45720" anchor="b">
-            <a:noAutofit/>
-          </a:bodyPr>
-          <a:lstStyle>
-            <a:lvl1pPr indent="0" algn="r" defTabSz="914400">
-              <a:lnSpc>
-                <a:spcPct val="100000"/>
-              </a:lnSpc>
-              <a:buNone/>
-              <a:tabLst>
-                <a:tab pos="0" algn="l"/>
-              </a:tabLst>
-              <a:defRPr lang="en-US" sz="1200" b="0" u="none" strike="noStrike">
-                <a:solidFill>
-                  <a:schemeClr val="dk1"/>
-                </a:solidFill>
-                <a:effectLst/>
-                <a:uFillTx/>
-                <a:latin typeface="+mn-lt"/>
-                <a:ea typeface="+mn-ea"/>
-              </a:defRPr>
-            </a:lvl1pPr>
-          </a:lstStyle>
-          <a:p>
-            <a:pPr indent="0" algn="r" defTabSz="914400">
-              <a:lnSpc>
-                <a:spcPct val="100000"/>
-              </a:lnSpc>
-              <a:buNone/>
-              <a:tabLst>
-                <a:tab pos="0" algn="l"/>
-              </a:tabLst>
-            </a:pPr>
-            <a:fld id="{3EA25BEB-A7A5-40D7-B7AC-0E97B534B315}" type="slidenum">
-              <a:rPr lang="en-US" sz="1200" b="0" u="none" strike="noStrike">
-                <a:solidFill>
-                  <a:schemeClr val="dk1"/>
-                </a:solidFill>
-                <a:effectLst/>
-                <a:uFillTx/>
-                <a:latin typeface="+mn-lt"/>
-                <a:ea typeface="+mn-ea"/>
-              </a:rPr>
-              <a:t>&lt;number&gt;</a:t>
-            </a:fld>
-            <a:endParaRPr lang="en-US" sz="1200" b="0" u="none" strike="noStrike">
-              <a:solidFill>
-                <a:srgbClr val="000000"/>
-              </a:solidFill>
-              <a:effectLst/>
-              <a:uFillTx/>
-              <a:latin typeface="Times New Roman"/>
-            </a:endParaRPr>
-          </a:p>
-        </p:txBody>
-      </p:sp>
-    </p:spTree>
-  </p:cSld>
-</p:notes>
-</file>
-
-<file path=ppt/notesSlides/notesSlide10.xml><?xml version="1.0" encoding="utf-8"?>
-<p:notes xmlns:a="http://schemas.openxmlformats.org/drawingml/2006/main" xmlns:p="http://schemas.openxmlformats.org/presentationml/2006/main" xmlns:r="http://schemas.openxmlformats.org/officeDocument/2006/relationships">
-  <p:cSld>
-    <p:spTree>
-      <p:nvGrpSpPr>
-        <p:cNvPr id="1" name=""/>
-        <p:cNvGrpSpPr/>
-        <p:nvPr/>
-      </p:nvGrpSpPr>
-      <p:grpSpPr>
-        <a:xfrm>
-          <a:off x="0" y="0"/>
-          <a:ext cx="0" cy="0"/>
-          <a:chOff x="0" y="0"/>
-          <a:chExt cx="0" cy="0"/>
-        </a:xfrm>
-      </p:grpSpPr>
-      <p:sp>
-        <p:nvSpPr>
-          <p:cNvPr id="2" name="Slide Image Placeholder 1"/>
-          <p:cNvSpPr>
-            <a:spLocks noGrp="1"/>
-          </p:cNvSpPr>
-          <p:nvPr>
-            <p:ph type="sldImg"/>
-          </p:nvPr>
-        </p:nvSpPr>
-        <p:spPr/>
-      </p:sp>
-      <p:sp>
-        <p:nvSpPr>
-          <p:cNvPr id="3" name="Notes Placeholder 2"/>
-          <p:cNvSpPr>
-            <a:spLocks noGrp="1"/>
-          </p:cNvSpPr>
-          <p:nvPr>
-            <p:ph type="body"/>
-          </p:nvPr>
-        </p:nvSpPr>
-        <p:spPr/>
-        <p:txBody>
-          <a:bodyPr/>
-          <a:lstStyle/>
-          <a:p>
-            <a:r>
-              <a:t>Module 1 saves the raw messages before any model touches them, so a failed model call can never lose a conversation. In the walkthrough, this is the step that stores Maya's two messages.</a:t>
-            </a:r>
-          </a:p>
-        </p:txBody>
-      </p:sp>
-      <p:sp>
-        <p:nvSpPr>
-          <p:cNvPr id="4" name="Slide Number Placeholder 3"/>
-          <p:cNvSpPr>
-            <a:spLocks noGrp="1"/>
-          </p:cNvSpPr>
-          <p:nvPr>
-            <p:ph type="sldNum" idx="4"/>
-          </p:nvPr>
-        </p:nvSpPr>
-        <p:spPr/>
-      </p:sp>
-    </p:spTree>
-  </p:cSld>
-  <p:clrMapOvr>
-    <a:masterClrMapping/>
-  </p:clrMapOvr>
-</p:notes>
-</file>
-
-<file path=ppt/notesSlides/notesSlide11.xml><?xml version="1.0" encoding="utf-8"?>
-<p:notes xmlns:a="http://schemas.openxmlformats.org/drawingml/2006/main" xmlns:p="http://schemas.openxmlformats.org/presentationml/2006/main" xmlns:r="http://schemas.openxmlformats.org/officeDocument/2006/relationships">
-  <p:cSld>
-    <p:spTree>
-      <p:nvGrpSpPr>
-        <p:cNvPr id="1" name=""/>
-        <p:cNvGrpSpPr/>
-        <p:nvPr/>
-      </p:nvGrpSpPr>
-      <p:grpSpPr>
-        <a:xfrm>
-          <a:off x="0" y="0"/>
-          <a:ext cx="0" cy="0"/>
-          <a:chOff x="0" y="0"/>
-          <a:chExt cx="0" cy="0"/>
-        </a:xfrm>
-      </p:grpSpPr>
-      <p:sp>
-        <p:nvSpPr>
-          <p:cNvPr id="2" name="Slide Image Placeholder 1"/>
-          <p:cNvSpPr>
-            <a:spLocks noGrp="1"/>
-          </p:cNvSpPr>
-          <p:nvPr>
-            <p:ph type="sldImg"/>
-          </p:nvPr>
-        </p:nvSpPr>
-        <p:spPr/>
-      </p:sp>
-      <p:sp>
-        <p:nvSpPr>
-          <p:cNvPr id="3" name="Notes Placeholder 2"/>
-          <p:cNvSpPr>
-            <a:spLocks noGrp="1"/>
-          </p:cNvSpPr>
-          <p:nvPr>
-            <p:ph type="body"/>
-          </p:nvPr>
-        </p:nvSpPr>
-        <p:spPr/>
-        <p:txBody>
-          <a:bodyPr/>
-          <a:lstStyle/>
-          <a:p>
-            <a:r>
-              <a:t>Both stages call the same local model. The prompt also includes related existing assertions, which is how the model knows 'Bengaluru is now my home city' corrects Chennai. Algorithm 1 decides which existing assertions fit in the prompt.</a:t>
-            </a:r>
-          </a:p>
-        </p:txBody>
-      </p:sp>
-      <p:sp>
-        <p:nvSpPr>
-          <p:cNvPr id="4" name="Slide Number Placeholder 3"/>
-          <p:cNvSpPr>
-            <a:spLocks noGrp="1"/>
-          </p:cNvSpPr>
-          <p:nvPr>
-            <p:ph type="sldNum" idx="4"/>
-          </p:nvPr>
-        </p:nvSpPr>
-        <p:spPr/>
-      </p:sp>
-    </p:spTree>
-  </p:cSld>
-  <p:clrMapOvr>
-    <a:masterClrMapping/>
-  </p:clrMapOvr>
-</p:notes>
-</file>
-
-<file path=ppt/notesSlides/notesSlide12.xml><?xml version="1.0" encoding="utf-8"?>
-<p:notes xmlns:a="http://schemas.openxmlformats.org/drawingml/2006/main" xmlns:p="http://schemas.openxmlformats.org/presentationml/2006/main" xmlns:r="http://schemas.openxmlformats.org/officeDocument/2006/relationships">
-  <p:cSld>
-    <p:spTree>
-      <p:nvGrpSpPr>
-        <p:cNvPr id="1" name=""/>
-        <p:cNvGrpSpPr/>
-        <p:nvPr/>
-      </p:nvGrpSpPr>
-      <p:grpSpPr>
-        <a:xfrm>
-          <a:off x="0" y="0"/>
-          <a:ext cx="0" cy="0"/>
-          <a:chOff x="0" y="0"/>
-          <a:chExt cx="0" cy="0"/>
-        </a:xfrm>
-      </p:grpSpPr>
-      <p:sp>
-        <p:nvSpPr>
-          <p:cNvPr id="2" name="Slide Image Placeholder 1"/>
-          <p:cNvSpPr>
-            <a:spLocks noGrp="1"/>
-          </p:cNvSpPr>
-          <p:nvPr>
-            <p:ph type="sldImg"/>
-          </p:nvPr>
-        </p:nvSpPr>
-        <p:spPr/>
-      </p:sp>
-      <p:sp>
-        <p:nvSpPr>
-          <p:cNvPr id="3" name="Notes Placeholder 2"/>
-          <p:cNvSpPr>
-            <a:spLocks noGrp="1"/>
-          </p:cNvSpPr>
-          <p:nvPr>
-            <p:ph type="body"/>
-          </p:nvPr>
-        </p:nvSpPr>
-        <p:spPr/>
-        <p:txBody>
-          <a:bodyPr/>
-          <a:lstStyle/>
-          <a:p>
-            <a:r>
-              <a:t>This is where G1 and G2 are answered: the update rule is code, not a model decision, and nothing is deleted. Chennai stays on record as valid from 1 to 10 October. If an assertion changes, any inference built on it is marked stale. Algorithm 2 is this rule written out.</a:t>
-            </a:r>
-          </a:p>
-        </p:txBody>
-      </p:sp>
-      <p:sp>
-        <p:nvSpPr>
-          <p:cNvPr id="4" name="Slide Number Placeholder 3"/>
-          <p:cNvSpPr>
-            <a:spLocks noGrp="1"/>
-          </p:cNvSpPr>
-          <p:nvPr>
-            <p:ph type="sldNum" idx="4"/>
-          </p:nvPr>
-        </p:nvSpPr>
-        <p:spPr/>
-      </p:sp>
-    </p:spTree>
-  </p:cSld>
-  <p:clrMapOvr>
-    <a:masterClrMapping/>
-  </p:clrMapOvr>
-</p:notes>
-</file>
-
-<file path=ppt/notesSlides/notesSlide13.xml><?xml version="1.0" encoding="utf-8"?>
-<p:notes xmlns:a="http://schemas.openxmlformats.org/drawingml/2006/main" xmlns:p="http://schemas.openxmlformats.org/presentationml/2006/main" xmlns:r="http://schemas.openxmlformats.org/officeDocument/2006/relationships">
-  <p:cSld>
-    <p:spTree>
-      <p:nvGrpSpPr>
-        <p:cNvPr id="1" name=""/>
-        <p:cNvGrpSpPr/>
-        <p:nvPr/>
-      </p:nvGrpSpPr>
-      <p:grpSpPr>
-        <a:xfrm>
-          <a:off x="0" y="0"/>
-          <a:ext cx="0" cy="0"/>
-          <a:chOff x="0" y="0"/>
-          <a:chExt cx="0" cy="0"/>
-        </a:xfrm>
-      </p:grpSpPr>
-      <p:sp>
-        <p:nvSpPr>
-          <p:cNvPr id="2" name="Slide Image Placeholder 1"/>
-          <p:cNvSpPr>
-            <a:spLocks noGrp="1"/>
-          </p:cNvSpPr>
-          <p:nvPr>
-            <p:ph type="sldImg"/>
-          </p:nvPr>
-        </p:nvSpPr>
-        <p:spPr/>
-      </p:sp>
-      <p:sp>
-        <p:nvSpPr>
-          <p:cNvPr id="3" name="Notes Placeholder 2"/>
-          <p:cNvSpPr>
-            <a:spLocks noGrp="1"/>
-          </p:cNvSpPr>
-          <p:nvPr>
-            <p:ph type="body"/>
-          </p:nvPr>
-        </p:nvSpPr>
-        <p:spPr/>
-        <p:txBody>
-          <a:bodyPr/>
-          <a:lstStyle/>
-          <a:p>
-            <a:r>
-              <a:t>Each search misses different things, so we run several and merge them (Algorithms 4 and 5). Anything found through the graph copy is checked against PostgreSQL before use, and packing stops at the token budget so the agent's prompt stays small.</a:t>
-            </a:r>
-          </a:p>
-        </p:txBody>
-      </p:sp>
-      <p:sp>
-        <p:nvSpPr>
-          <p:cNvPr id="4" name="Slide Number Placeholder 3"/>
-          <p:cNvSpPr>
-            <a:spLocks noGrp="1"/>
-          </p:cNvSpPr>
-          <p:nvPr>
-            <p:ph type="sldNum" idx="4"/>
-          </p:nvPr>
-        </p:nvSpPr>
-        <p:spPr/>
-      </p:sp>
-    </p:spTree>
-  </p:cSld>
-  <p:clrMapOvr>
-    <a:masterClrMapping/>
-  </p:clrMapOvr>
-</p:notes>
-</file>
-
-<file path=ppt/notesSlides/notesSlide14.xml><?xml version="1.0" encoding="utf-8"?>
-<p:notes xmlns:a="http://schemas.openxmlformats.org/drawingml/2006/main" xmlns:p="http://schemas.openxmlformats.org/presentationml/2006/main" xmlns:r="http://schemas.openxmlformats.org/officeDocument/2006/relationships">
-  <p:cSld>
-    <p:spTree>
-      <p:nvGrpSpPr>
-        <p:cNvPr id="1" name=""/>
-        <p:cNvGrpSpPr/>
-        <p:nvPr/>
-      </p:nvGrpSpPr>
-      <p:grpSpPr>
-        <a:xfrm>
-          <a:off x="0" y="0"/>
-          <a:ext cx="0" cy="0"/>
-          <a:chOff x="0" y="0"/>
-          <a:chExt cx="0" cy="0"/>
-        </a:xfrm>
-      </p:grpSpPr>
-      <p:sp>
-        <p:nvSpPr>
-          <p:cNvPr id="2" name="Slide Image Placeholder 1"/>
-          <p:cNvSpPr>
-            <a:spLocks noGrp="1"/>
-          </p:cNvSpPr>
-          <p:nvPr>
-            <p:ph type="sldImg"/>
-          </p:nvPr>
-        </p:nvSpPr>
-        <p:spPr/>
-      </p:sp>
-      <p:sp>
-        <p:nvSpPr>
-          <p:cNvPr id="3" name="Notes Placeholder 2"/>
-          <p:cNvSpPr>
-            <a:spLocks noGrp="1"/>
-          </p:cNvSpPr>
-          <p:nvPr>
-            <p:ph type="body"/>
-          </p:nvPr>
-        </p:nvSpPr>
-        <p:spPr/>
-        <p:txBody>
-          <a:bodyPr/>
-          <a:lstStyle/>
-          <a:p>
-            <a:r>
-              <a:t>Labels are checked for structure and exact quotes before they go into the dataset. The dataset slides describe the data, and the results slides compare the model before and after fine-tuning.</a:t>
-            </a:r>
-          </a:p>
-        </p:txBody>
-      </p:sp>
-      <p:sp>
-        <p:nvSpPr>
-          <p:cNvPr id="4" name="Slide Number Placeholder 3"/>
-          <p:cNvSpPr>
-            <a:spLocks noGrp="1"/>
-          </p:cNvSpPr>
-          <p:nvPr>
-            <p:ph type="sldNum" idx="4"/>
-          </p:nvPr>
-        </p:nvSpPr>
-        <p:spPr/>
-      </p:sp>
-    </p:spTree>
-  </p:cSld>
-  <p:clrMapOvr>
-    <a:masterClrMapping/>
-  </p:clrMapOvr>
-</p:notes>
-</file>
-
-<file path=ppt/notesSlides/notesSlide15.xml><?xml version="1.0" encoding="utf-8"?>
-<p:notes xmlns:a="http://schemas.openxmlformats.org/drawingml/2006/main" xmlns:p="http://schemas.openxmlformats.org/presentationml/2006/main" xmlns:r="http://schemas.openxmlformats.org/officeDocument/2006/relationships">
-  <p:cSld>
-    <p:spTree>
-      <p:nvGrpSpPr>
-        <p:cNvPr id="1" name=""/>
-        <p:cNvGrpSpPr/>
-        <p:nvPr/>
-      </p:nvGrpSpPr>
-      <p:grpSpPr>
-        <a:xfrm>
-          <a:off x="0" y="0"/>
-          <a:ext cx="0" cy="0"/>
-          <a:chOff x="0" y="0"/>
-          <a:chExt cx="0" cy="0"/>
-        </a:xfrm>
-      </p:grpSpPr>
-      <p:sp>
-        <p:nvSpPr>
-          <p:cNvPr id="2" name="Slide Image Placeholder 1"/>
-          <p:cNvSpPr>
-            <a:spLocks noGrp="1"/>
-          </p:cNvSpPr>
-          <p:nvPr>
-            <p:ph type="sldImg"/>
-          </p:nvPr>
-        </p:nvSpPr>
-        <p:spPr/>
-      </p:sp>
-      <p:sp>
-        <p:nvSpPr>
-          <p:cNvPr id="3" name="Notes Placeholder 2"/>
-          <p:cNvSpPr>
-            <a:spLocks noGrp="1"/>
-          </p:cNvSpPr>
-          <p:nvPr>
-            <p:ph type="body"/>
-          </p:nvPr>
-        </p:nvSpPr>
-        <p:spPr/>
-        <p:txBody>
-          <a:bodyPr/>
-          <a:lstStyle/>
-          <a:p>
-            <a:r>
-              <a:t>Six algorithms do the work inside the modules. The first three run when memory is written, the last three when it is read. The next three slides give the steps of each.</a:t>
-            </a:r>
-          </a:p>
-        </p:txBody>
-      </p:sp>
-      <p:sp>
-        <p:nvSpPr>
-          <p:cNvPr id="4" name="Slide Number Placeholder 3"/>
-          <p:cNvSpPr>
-            <a:spLocks noGrp="1"/>
-          </p:cNvSpPr>
-          <p:nvPr>
-            <p:ph type="sldNum" idx="4"/>
-          </p:nvPr>
-        </p:nvSpPr>
-        <p:spPr/>
-      </p:sp>
-    </p:spTree>
-  </p:cSld>
-  <p:clrMapOvr>
-    <a:masterClrMapping/>
-  </p:clrMapOvr>
-</p:notes>
-</file>
-
-<file path=ppt/notesSlides/notesSlide16.xml><?xml version="1.0" encoding="utf-8"?>
-<p:notes xmlns:a="http://schemas.openxmlformats.org/drawingml/2006/main" xmlns:p="http://schemas.openxmlformats.org/presentationml/2006/main" xmlns:r="http://schemas.openxmlformats.org/officeDocument/2006/relationships">
-  <p:cSld>
-    <p:spTree>
-      <p:nvGrpSpPr>
-        <p:cNvPr id="1" name=""/>
-        <p:cNvGrpSpPr/>
-        <p:nvPr/>
-      </p:nvGrpSpPr>
-      <p:grpSpPr>
-        <a:xfrm>
-          <a:off x="0" y="0"/>
-          <a:ext cx="0" cy="0"/>
-          <a:chOff x="0" y="0"/>
-          <a:chExt cx="0" cy="0"/>
-        </a:xfrm>
-      </p:grpSpPr>
-      <p:sp>
-        <p:nvSpPr>
-          <p:cNvPr id="2" name="Slide Image Placeholder 1"/>
-          <p:cNvSpPr>
-            <a:spLocks noGrp="1"/>
-          </p:cNvSpPr>
-          <p:nvPr>
-            <p:ph type="sldImg"/>
-          </p:nvPr>
-        </p:nvSpPr>
-        <p:spPr/>
-      </p:sp>
-      <p:sp>
-        <p:nvSpPr>
-          <p:cNvPr id="3" name="Notes Placeholder 2"/>
-          <p:cNvSpPr>
-            <a:spLocks noGrp="1"/>
-          </p:cNvSpPr>
-          <p:nvPr>
-            <p:ph type="body"/>
-          </p:nvPr>
-        </p:nvSpPr>
-        <p:spPr/>
-        <p:txBody>
-          <a:bodyPr/>
-          <a:lstStyle/>
-          <a:p>
-            <a:r>
-              <a:t>Algorithm 1 keeps the extraction prompt inside the model's limit without dropping the assertions the new messages are about. Algorithm 2 is the Module 3 rule: in the walkthrough, Bengaluru takes the third branch and Chennai becomes history.</a:t>
-            </a:r>
-          </a:p>
-        </p:txBody>
-      </p:sp>
-      <p:sp>
-        <p:nvSpPr>
-          <p:cNvPr id="4" name="Slide Number Placeholder 3"/>
-          <p:cNvSpPr>
-            <a:spLocks noGrp="1"/>
-          </p:cNvSpPr>
-          <p:nvPr>
-            <p:ph type="sldNum" idx="4"/>
-          </p:nvPr>
-        </p:nvSpPr>
-        <p:spPr/>
-      </p:sp>
-    </p:spTree>
-  </p:cSld>
-  <p:clrMapOvr>
-    <a:masterClrMapping/>
-  </p:clrMapOvr>
-</p:notes>
-</file>
-
-<file path=ppt/notesSlides/notesSlide17.xml><?xml version="1.0" encoding="utf-8"?>
-<p:notes xmlns:a="http://schemas.openxmlformats.org/drawingml/2006/main" xmlns:p="http://schemas.openxmlformats.org/presentationml/2006/main" xmlns:r="http://schemas.openxmlformats.org/officeDocument/2006/relationships">
-  <p:cSld>
-    <p:spTree>
-      <p:nvGrpSpPr>
-        <p:cNvPr id="1" name=""/>
-        <p:cNvGrpSpPr/>
-        <p:nvPr/>
-      </p:nvGrpSpPr>
-      <p:grpSpPr>
-        <a:xfrm>
-          <a:off x="0" y="0"/>
-          <a:ext cx="0" cy="0"/>
-          <a:chOff x="0" y="0"/>
-          <a:chExt cx="0" cy="0"/>
-        </a:xfrm>
-      </p:grpSpPr>
-      <p:sp>
-        <p:nvSpPr>
-          <p:cNvPr id="2" name="Slide Image Placeholder 1"/>
-          <p:cNvSpPr>
-            <a:spLocks noGrp="1"/>
-          </p:cNvSpPr>
-          <p:nvPr>
-            <p:ph type="sldImg"/>
-          </p:nvPr>
-        </p:nvSpPr>
-        <p:spPr/>
-      </p:sp>
-      <p:sp>
-        <p:nvSpPr>
-          <p:cNvPr id="3" name="Notes Placeholder 2"/>
-          <p:cNvSpPr>
-            <a:spLocks noGrp="1"/>
-          </p:cNvSpPr>
-          <p:nvPr>
-            <p:ph type="body"/>
-          </p:nvPr>
-        </p:nvSpPr>
-        <p:spPr/>
-        <p:txBody>
-          <a:bodyPr/>
-          <a:lstStyle/>
-          <a:p>
-            <a:r>
-              <a:t>An inference is only as good as the assertions under it, so when one of them changes, the inference is marked stale instead of quietly staying in memory. Retrieval runs several searches because each one misses different things.</a:t>
-            </a:r>
-          </a:p>
-        </p:txBody>
-      </p:sp>
-      <p:sp>
-        <p:nvSpPr>
-          <p:cNvPr id="4" name="Slide Number Placeholder 3"/>
-          <p:cNvSpPr>
-            <a:spLocks noGrp="1"/>
-          </p:cNvSpPr>
-          <p:nvPr>
-            <p:ph type="sldNum" idx="4"/>
-          </p:nvPr>
-        </p:nvSpPr>
-        <p:spPr/>
-      </p:sp>
-    </p:spTree>
-  </p:cSld>
-  <p:clrMapOvr>
-    <a:masterClrMapping/>
-  </p:clrMapOvr>
-</p:notes>
-</file>
-
-<file path=ppt/notesSlides/notesSlide18.xml><?xml version="1.0" encoding="utf-8"?>
-<p:notes xmlns:a="http://schemas.openxmlformats.org/drawingml/2006/main" xmlns:p="http://schemas.openxmlformats.org/presentationml/2006/main" xmlns:r="http://schemas.openxmlformats.org/officeDocument/2006/relationships">
-  <p:cSld>
-    <p:spTree>
-      <p:nvGrpSpPr>
-        <p:cNvPr id="1" name=""/>
-        <p:cNvGrpSpPr/>
-        <p:nvPr/>
-      </p:nvGrpSpPr>
-      <p:grpSpPr>
-        <a:xfrm>
-          <a:off x="0" y="0"/>
-          <a:ext cx="0" cy="0"/>
-          <a:chOff x="0" y="0"/>
-          <a:chExt cx="0" cy="0"/>
-        </a:xfrm>
-      </p:grpSpPr>
-      <p:sp>
-        <p:nvSpPr>
-          <p:cNvPr id="2" name="Slide Image Placeholder 1"/>
-          <p:cNvSpPr>
-            <a:spLocks noGrp="1"/>
-          </p:cNvSpPr>
-          <p:nvPr>
-            <p:ph type="sldImg"/>
-          </p:nvPr>
-        </p:nvSpPr>
-        <p:spPr/>
-      </p:sp>
-      <p:sp>
-        <p:nvSpPr>
-          <p:cNvPr id="3" name="Notes Placeholder 2"/>
-          <p:cNvSpPr>
-            <a:spLocks noGrp="1"/>
-          </p:cNvSpPr>
-          <p:nvPr>
-            <p:ph type="body"/>
-          </p:nvPr>
-        </p:nvSpPr>
-        <p:spPr/>
-        <p:txBody>
-          <a:bodyPr/>
-          <a:lstStyle/>
-          <a:p>
-            <a:r>
-              <a:t>A memory ranked high by several searches scores highest; 60 is the constant from the original RRF paper. The answering step would rather refuse than guess: with nothing retrieved it says so, and an answer that cites nothing is rejected.</a:t>
-            </a:r>
-          </a:p>
-        </p:txBody>
-      </p:sp>
-      <p:sp>
-        <p:nvSpPr>
-          <p:cNvPr id="4" name="Slide Number Placeholder 3"/>
-          <p:cNvSpPr>
-            <a:spLocks noGrp="1"/>
-          </p:cNvSpPr>
-          <p:nvPr>
-            <p:ph type="sldNum" idx="4"/>
-          </p:nvPr>
-        </p:nvSpPr>
-        <p:spPr/>
-      </p:sp>
-    </p:spTree>
-  </p:cSld>
-  <p:clrMapOvr>
-    <a:masterClrMapping/>
-  </p:clrMapOvr>
-</p:notes>
-</file>
-
-<file path=ppt/notesSlides/notesSlide19.xml><?xml version="1.0" encoding="utf-8"?>
-<p:notes xmlns:a="http://schemas.openxmlformats.org/drawingml/2006/main" xmlns:p="http://schemas.openxmlformats.org/presentationml/2006/main" xmlns:r="http://schemas.openxmlformats.org/officeDocument/2006/relationships">
-  <p:cSld>
-    <p:spTree>
-      <p:nvGrpSpPr>
-        <p:cNvPr id="1" name=""/>
-        <p:cNvGrpSpPr/>
-        <p:nvPr/>
-      </p:nvGrpSpPr>
-      <p:grpSpPr>
-        <a:xfrm>
-          <a:off x="0" y="0"/>
-          <a:ext cx="0" cy="0"/>
-          <a:chOff x="0" y="0"/>
-          <a:chExt cx="0" cy="0"/>
-        </a:xfrm>
-      </p:grpSpPr>
-      <p:sp>
-        <p:nvSpPr>
-          <p:cNvPr id="2" name="Slide Image Placeholder 1"/>
-          <p:cNvSpPr>
-            <a:spLocks noGrp="1"/>
-          </p:cNvSpPr>
-          <p:nvPr>
-            <p:ph type="sldImg"/>
-          </p:nvPr>
-        </p:nvSpPr>
-        <p:spPr/>
-      </p:sp>
-      <p:sp>
-        <p:nvSpPr>
-          <p:cNvPr id="3" name="Notes Placeholder 2"/>
-          <p:cNvSpPr>
-            <a:spLocks noGrp="1"/>
-          </p:cNvSpPr>
-          <p:nvPr>
-            <p:ph type="body"/>
-          </p:nvPr>
-        </p:nvSpPr>
-        <p:spPr/>
-        <p:txBody>
-          <a:bodyPr/>
-          <a:lstStyle/>
-          <a:p>
-            <a:r>
-              <a:t>The service is written in Rust. PostgreSQL holds everything and Neo4j is only a copy. All models run through Ollama on our own machine, which is how we answer G4.</a:t>
-            </a:r>
-          </a:p>
-        </p:txBody>
-      </p:sp>
-      <p:sp>
-        <p:nvSpPr>
-          <p:cNvPr id="4" name="Slide Number Placeholder 3"/>
-          <p:cNvSpPr>
-            <a:spLocks noGrp="1"/>
-          </p:cNvSpPr>
-          <p:nvPr>
-            <p:ph type="sldNum" idx="4"/>
-          </p:nvPr>
-        </p:nvSpPr>
-        <p:spPr/>
-      </p:sp>
-    </p:spTree>
-  </p:cSld>
-  <p:clrMapOvr>
-    <a:masterClrMapping/>
-  </p:clrMapOvr>
-</p:notes>
-</file>
-
-<file path=ppt/notesSlides/notesSlide2.xml><?xml version="1.0" encoding="utf-8"?>
-<p:notes xmlns:a="http://schemas.openxmlformats.org/drawingml/2006/main" xmlns:p="http://schemas.openxmlformats.org/presentationml/2006/main" xmlns:r="http://schemas.openxmlformats.org/officeDocument/2006/relationships">
-  <p:cSld>
-    <p:spTree>
-      <p:nvGrpSpPr>
-        <p:cNvPr id="1" name=""/>
-        <p:cNvGrpSpPr/>
-        <p:nvPr/>
-      </p:nvGrpSpPr>
-      <p:grpSpPr>
-        <a:xfrm>
-          <a:off x="0" y="0"/>
-          <a:ext cx="0" cy="0"/>
-          <a:chOff x="0" y="0"/>
-          <a:chExt cx="0" cy="0"/>
-        </a:xfrm>
-      </p:grpSpPr>
-      <p:sp>
-        <p:nvSpPr>
-          <p:cNvPr id="2" name="Slide Image Placeholder 1"/>
-          <p:cNvSpPr>
-            <a:spLocks noGrp="1"/>
-          </p:cNvSpPr>
-          <p:nvPr>
-            <p:ph type="sldImg"/>
-          </p:nvPr>
-        </p:nvSpPr>
-        <p:spPr/>
-      </p:sp>
-      <p:sp>
-        <p:nvSpPr>
-          <p:cNvPr id="3" name="Notes Placeholder 2"/>
-          <p:cNvSpPr>
-            <a:spLocks noGrp="1"/>
-          </p:cNvSpPr>
-          <p:nvPr>
-            <p:ph type="body"/>
-          </p:nvPr>
-        </p:nvSpPr>
-        <p:spPr/>
-        <p:txBody>
-          <a:bodyPr/>
-          <a:lstStyle/>
-          <a:p>
-            <a:r>
-              <a:t>A language model remembers nothing between calls, so an agent that works with someone over many sessions needs a place to keep what it was told. Re-sending the whole history is the obvious fix, but Liu et al. showed that models make poor use of the middle of a long input, and the cost grows with every session. LongMemEval is the benchmark that tests the abilities we are after. Pi, which appears throughout the deck, is the Pi coding agent, not a Raspberry Pi.</a:t>
-            </a:r>
-          </a:p>
-        </p:txBody>
-      </p:sp>
-      <p:sp>
-        <p:nvSpPr>
-          <p:cNvPr id="4" name="Slide Number Placeholder 3"/>
-          <p:cNvSpPr>
-            <a:spLocks noGrp="1"/>
-          </p:cNvSpPr>
-          <p:nvPr>
-            <p:ph type="sldNum" idx="4"/>
-          </p:nvPr>
-        </p:nvSpPr>
-        <p:spPr/>
-      </p:sp>
-    </p:spTree>
-  </p:cSld>
-  <p:clrMapOvr>
-    <a:masterClrMapping/>
-  </p:clrMapOvr>
-</p:notes>
-</file>
-
-<file path=ppt/notesSlides/notesSlide20.xml><?xml version="1.0" encoding="utf-8"?>
-<p:notes xmlns:a="http://schemas.openxmlformats.org/drawingml/2006/main" xmlns:p="http://schemas.openxmlformats.org/presentationml/2006/main" xmlns:r="http://schemas.openxmlformats.org/officeDocument/2006/relationships">
-  <p:cSld>
-    <p:spTree>
-      <p:nvGrpSpPr>
-        <p:cNvPr id="1" name=""/>
-        <p:cNvGrpSpPr/>
-        <p:nvPr/>
-      </p:nvGrpSpPr>
-      <p:grpSpPr>
-        <a:xfrm>
-          <a:off x="0" y="0"/>
-          <a:ext cx="0" cy="0"/>
-          <a:chOff x="0" y="0"/>
-          <a:chExt cx="0" cy="0"/>
-        </a:xfrm>
-      </p:grpSpPr>
-      <p:sp>
-        <p:nvSpPr>
-          <p:cNvPr id="2" name="Slide Image Placeholder 1"/>
-          <p:cNvSpPr>
-            <a:spLocks noGrp="1"/>
-          </p:cNvSpPr>
-          <p:nvPr>
-            <p:ph type="sldImg"/>
-          </p:nvPr>
-        </p:nvSpPr>
-        <p:spPr/>
-      </p:sp>
-      <p:sp>
-        <p:nvSpPr>
-          <p:cNvPr id="3" name="Notes Placeholder 2"/>
-          <p:cNvSpPr>
-            <a:spLocks noGrp="1"/>
-          </p:cNvSpPr>
-          <p:nvPr>
-            <p:ph type="body"/>
-          </p:nvPr>
-        </p:nvSpPr>
-        <p:spPr/>
-        <p:txBody>
-          <a:bodyPr/>
-          <a:lstStyle/>
-          <a:p>
-            <a:r>
-              <a:t>The training side uses the usual Hugging Face tools for QLoRA, then llama.cpp to produce a file Ollama can serve. Pi is the agent we integrate with, and the dashboard is a React app.</a:t>
-            </a:r>
-          </a:p>
-        </p:txBody>
-      </p:sp>
-      <p:sp>
-        <p:nvSpPr>
-          <p:cNvPr id="4" name="Slide Number Placeholder 3"/>
-          <p:cNvSpPr>
-            <a:spLocks noGrp="1"/>
-          </p:cNvSpPr>
-          <p:nvPr>
-            <p:ph type="sldNum" idx="4"/>
-          </p:nvPr>
-        </p:nvSpPr>
-        <p:spPr/>
-      </p:sp>
-    </p:spTree>
-  </p:cSld>
-  <p:clrMapOvr>
-    <a:masterClrMapping/>
-  </p:clrMapOvr>
-</p:notes>
-</file>
-
-<file path=ppt/notesSlides/notesSlide21.xml><?xml version="1.0" encoding="utf-8"?>
-<p:notes xmlns:a="http://schemas.openxmlformats.org/drawingml/2006/main" xmlns:p="http://schemas.openxmlformats.org/presentationml/2006/main" xmlns:r="http://schemas.openxmlformats.org/officeDocument/2006/relationships">
-  <p:cSld>
-    <p:spTree>
-      <p:nvGrpSpPr>
-        <p:cNvPr id="1" name=""/>
-        <p:cNvGrpSpPr/>
-        <p:nvPr/>
-      </p:nvGrpSpPr>
-      <p:grpSpPr>
-        <a:xfrm>
-          <a:off x="0" y="0"/>
-          <a:ext cx="0" cy="0"/>
-          <a:chOff x="0" y="0"/>
-          <a:chExt cx="0" cy="0"/>
-        </a:xfrm>
-      </p:grpSpPr>
-      <p:sp>
-        <p:nvSpPr>
-          <p:cNvPr id="2" name="Slide Image Placeholder 1"/>
-          <p:cNvSpPr>
-            <a:spLocks noGrp="1"/>
-          </p:cNvSpPr>
-          <p:nvPr>
-            <p:ph type="sldImg"/>
-          </p:nvPr>
-        </p:nvSpPr>
-        <p:spPr/>
-      </p:sp>
-      <p:sp>
-        <p:nvSpPr>
-          <p:cNvPr id="3" name="Notes Placeholder 2"/>
-          <p:cNvSpPr>
-            <a:spLocks noGrp="1"/>
-          </p:cNvSpPr>
-          <p:nvPr>
-            <p:ph type="body"/>
-          </p:nvPr>
-        </p:nvSpPr>
-        <p:spPr/>
-        <p:txBody>
-          <a:bodyPr/>
-          <a:lstStyle/>
-          <a:p>
-            <a:r>
-              <a:t>This is the data Module 5 trains on. Every conversation is synthetic: the larger model labelled it, a second model checked the labels, and we cleaned what was left. Many rows test whether the model keeps only what the user said. In this one, the assistant's suggestion must not become a memory.</a:t>
-            </a:r>
-          </a:p>
-        </p:txBody>
-      </p:sp>
-      <p:sp>
-        <p:nvSpPr>
-          <p:cNvPr id="4" name="Slide Number Placeholder 3"/>
-          <p:cNvSpPr>
-            <a:spLocks noGrp="1"/>
-          </p:cNvSpPr>
-          <p:nvPr>
-            <p:ph type="sldNum" idx="4"/>
-          </p:nvPr>
-        </p:nvSpPr>
-        <p:spPr/>
-      </p:sp>
-    </p:spTree>
-  </p:cSld>
-  <p:clrMapOvr>
-    <a:masterClrMapping/>
-  </p:clrMapOvr>
-</p:notes>
-</file>
-
-<file path=ppt/notesSlides/notesSlide22.xml><?xml version="1.0" encoding="utf-8"?>
-<p:notes xmlns:a="http://schemas.openxmlformats.org/drawingml/2006/main" xmlns:p="http://schemas.openxmlformats.org/presentationml/2006/main" xmlns:r="http://schemas.openxmlformats.org/officeDocument/2006/relationships">
-  <p:cSld>
-    <p:spTree>
-      <p:nvGrpSpPr>
-        <p:cNvPr id="1" name=""/>
-        <p:cNvGrpSpPr/>
-        <p:nvPr/>
-      </p:nvGrpSpPr>
-      <p:grpSpPr>
-        <a:xfrm>
-          <a:off x="0" y="0"/>
-          <a:ext cx="0" cy="0"/>
-          <a:chOff x="0" y="0"/>
-          <a:chExt cx="0" cy="0"/>
-        </a:xfrm>
-      </p:grpSpPr>
-      <p:sp>
-        <p:nvSpPr>
-          <p:cNvPr id="2" name="Slide Image Placeholder 1"/>
-          <p:cNvSpPr>
-            <a:spLocks noGrp="1"/>
-          </p:cNvSpPr>
-          <p:nvPr>
-            <p:ph type="sldImg"/>
-          </p:nvPr>
-        </p:nvSpPr>
-        <p:spPr/>
-      </p:sp>
-      <p:sp>
-        <p:nvSpPr>
-          <p:cNvPr id="3" name="Notes Placeholder 2"/>
-          <p:cNvSpPr>
-            <a:spLocks noGrp="1"/>
-          </p:cNvSpPr>
-          <p:nvPr>
-            <p:ph type="body"/>
-          </p:nvPr>
-        </p:nvSpPr>
-        <p:spPr/>
-        <p:txBody>
-          <a:bodyPr/>
-          <a:lstStyle/>
-          <a:p>
-            <a:r>
-              <a:t>To see how the model does on conversations it was not trained on, we use LoCoMo. Forty reference assertions is a small set, so we treat these numbers as a check, not a benchmark.</a:t>
-            </a:r>
-          </a:p>
-        </p:txBody>
-      </p:sp>
-      <p:sp>
-        <p:nvSpPr>
-          <p:cNvPr id="4" name="Slide Number Placeholder 3"/>
-          <p:cNvSpPr>
-            <a:spLocks noGrp="1"/>
-          </p:cNvSpPr>
-          <p:nvPr>
-            <p:ph type="sldNum" idx="4"/>
-          </p:nvPr>
-        </p:nvSpPr>
-        <p:spPr/>
-      </p:sp>
-    </p:spTree>
-  </p:cSld>
-  <p:clrMapOvr>
-    <a:masterClrMapping/>
-  </p:clrMapOvr>
-</p:notes>
-</file>
-
-<file path=ppt/notesSlides/notesSlide23.xml><?xml version="1.0" encoding="utf-8"?>
-<p:notes xmlns:a="http://schemas.openxmlformats.org/drawingml/2006/main" xmlns:p="http://schemas.openxmlformats.org/presentationml/2006/main" xmlns:r="http://schemas.openxmlformats.org/officeDocument/2006/relationships">
-  <p:cSld>
-    <p:spTree>
-      <p:nvGrpSpPr>
-        <p:cNvPr id="1" name=""/>
-        <p:cNvGrpSpPr/>
-        <p:nvPr/>
-      </p:nvGrpSpPr>
-      <p:grpSpPr>
-        <a:xfrm>
-          <a:off x="0" y="0"/>
-          <a:ext cx="0" cy="0"/>
-          <a:chOff x="0" y="0"/>
-          <a:chExt cx="0" cy="0"/>
-        </a:xfrm>
-      </p:grpSpPr>
-      <p:sp>
-        <p:nvSpPr>
-          <p:cNvPr id="2" name="Slide Image Placeholder 1"/>
-          <p:cNvSpPr>
-            <a:spLocks noGrp="1"/>
-          </p:cNvSpPr>
-          <p:nvPr>
-            <p:ph type="sldImg"/>
-          </p:nvPr>
-        </p:nvSpPr>
-        <p:spPr/>
-      </p:sp>
-      <p:sp>
-        <p:nvSpPr>
-          <p:cNvPr id="3" name="Notes Placeholder 2"/>
-          <p:cNvSpPr>
-            <a:spLocks noGrp="1"/>
-          </p:cNvSpPr>
-          <p:nvPr>
-            <p:ph type="body"/>
-          </p:nvPr>
-        </p:nvSpPr>
-        <p:spPr/>
-        <p:txBody>
-          <a:bodyPr/>
-          <a:lstStyle/>
-          <a:p>
-            <a:r>
-              <a:t>Software is the largest domain because the dataset began as coding conversations only. The bars count task rows, not conversations: one conversation can give an extraction row, a consolidation row and a question-answering row.</a:t>
-            </a:r>
-          </a:p>
-        </p:txBody>
-      </p:sp>
-      <p:sp>
-        <p:nvSpPr>
-          <p:cNvPr id="4" name="Slide Number Placeholder 3"/>
-          <p:cNvSpPr>
-            <a:spLocks noGrp="1"/>
-          </p:cNvSpPr>
-          <p:nvPr>
-            <p:ph type="sldNum" idx="4"/>
-          </p:nvPr>
-        </p:nvSpPr>
-        <p:spPr/>
-      </p:sp>
-    </p:spTree>
-  </p:cSld>
-  <p:clrMapOvr>
-    <a:masterClrMapping/>
-  </p:clrMapOvr>
-</p:notes>
-</file>
-
-<file path=ppt/notesSlides/notesSlide24.xml><?xml version="1.0" encoding="utf-8"?>
-<p:notes xmlns:a="http://schemas.openxmlformats.org/drawingml/2006/main" xmlns:p="http://schemas.openxmlformats.org/presentationml/2006/main" xmlns:r="http://schemas.openxmlformats.org/officeDocument/2006/relationships">
-  <p:cSld>
-    <p:spTree>
-      <p:nvGrpSpPr>
-        <p:cNvPr id="1" name=""/>
-        <p:cNvGrpSpPr/>
-        <p:nvPr/>
-      </p:nvGrpSpPr>
-      <p:grpSpPr>
-        <a:xfrm>
-          <a:off x="0" y="0"/>
-          <a:ext cx="0" cy="0"/>
-          <a:chOff x="0" y="0"/>
-          <a:chExt cx="0" cy="0"/>
-        </a:xfrm>
-      </p:grpSpPr>
-      <p:sp>
-        <p:nvSpPr>
-          <p:cNvPr id="2" name="Slide Image Placeholder 1"/>
-          <p:cNvSpPr>
-            <a:spLocks noGrp="1"/>
-          </p:cNvSpPr>
-          <p:nvPr>
-            <p:ph type="sldImg"/>
-          </p:nvPr>
-        </p:nvSpPr>
-        <p:spPr/>
-      </p:sp>
-      <p:sp>
-        <p:nvSpPr>
-          <p:cNvPr id="3" name="Notes Placeholder 2"/>
-          <p:cNvSpPr>
-            <a:spLocks noGrp="1"/>
-          </p:cNvSpPr>
-          <p:nvPr>
-            <p:ph type="body"/>
-          </p:nvPr>
-        </p:nvSpPr>
-        <p:spPr/>
-        <p:txBody>
-          <a:bodyPr/>
-          <a:lstStyle/>
-          <a:p>
-            <a:r>
-              <a:t>This is the same flow as the Maya walkthrough, with project details instead. Session 1 is in the payments-api folder and session 2 in mobile-app, so nothing carries over except through the memory service. Captured on 20 October 2026 from the current build, with Pi running Claude Sonnet 5.5.</a:t>
-            </a:r>
-          </a:p>
-        </p:txBody>
-      </p:sp>
-      <p:sp>
-        <p:nvSpPr>
-          <p:cNvPr id="4" name="Slide Number Placeholder 3"/>
-          <p:cNvSpPr>
-            <a:spLocks noGrp="1"/>
-          </p:cNvSpPr>
-          <p:nvPr>
-            <p:ph type="sldNum" idx="4"/>
-          </p:nvPr>
-        </p:nvSpPr>
-        <p:spPr/>
-      </p:sp>
-    </p:spTree>
-  </p:cSld>
-  <p:clrMapOvr>
-    <a:masterClrMapping/>
-  </p:clrMapOvr>
-</p:notes>
-</file>
-
-<file path=ppt/notesSlides/notesSlide25.xml><?xml version="1.0" encoding="utf-8"?>
-<p:notes xmlns:a="http://schemas.openxmlformats.org/drawingml/2006/main" xmlns:p="http://schemas.openxmlformats.org/presentationml/2006/main" xmlns:r="http://schemas.openxmlformats.org/officeDocument/2006/relationships">
-  <p:cSld>
-    <p:spTree>
-      <p:nvGrpSpPr>
-        <p:cNvPr id="1" name=""/>
-        <p:cNvGrpSpPr/>
-        <p:nvPr/>
-      </p:nvGrpSpPr>
-      <p:grpSpPr>
-        <a:xfrm>
-          <a:off x="0" y="0"/>
-          <a:ext cx="0" cy="0"/>
-          <a:chOff x="0" y="0"/>
-          <a:chExt cx="0" cy="0"/>
-        </a:xfrm>
-      </p:grpSpPr>
-      <p:sp>
-        <p:nvSpPr>
-          <p:cNvPr id="2" name="Slide Image Placeholder 1"/>
-          <p:cNvSpPr>
-            <a:spLocks noGrp="1"/>
-          </p:cNvSpPr>
-          <p:nvPr>
-            <p:ph type="sldImg"/>
-          </p:nvPr>
-        </p:nvSpPr>
-        <p:spPr/>
-      </p:sp>
-      <p:sp>
-        <p:nvSpPr>
-          <p:cNvPr id="3" name="Notes Placeholder 2"/>
-          <p:cNvSpPr>
-            <a:spLocks noGrp="1"/>
-          </p:cNvSpPr>
-          <p:nvPr>
-            <p:ph type="body"/>
-          </p:nvPr>
-        </p:nvSpPr>
-        <p:spPr/>
-        <p:txBody>
-          <a:bodyPr/>
-          <a:lstStyle/>
-          <a:p>
-            <a:r>
-              <a:t>In Figure 3 Pi also notices that the stored date has the year 2026 although the user never gave one. That is why every answer carries its quote: a reader can check it. Figure 4 is our graph page. The Friday assertion replaces the Thursday one, and the side panel shows the message it came from.</a:t>
-            </a:r>
-          </a:p>
-        </p:txBody>
-      </p:sp>
-      <p:sp>
-        <p:nvSpPr>
-          <p:cNvPr id="4" name="Slide Number Placeholder 3"/>
-          <p:cNvSpPr>
-            <a:spLocks noGrp="1"/>
-          </p:cNvSpPr>
-          <p:nvPr>
-            <p:ph type="sldNum" idx="4"/>
-          </p:nvPr>
-        </p:nvSpPr>
-        <p:spPr/>
-      </p:sp>
-    </p:spTree>
-  </p:cSld>
-  <p:clrMapOvr>
-    <a:masterClrMapping/>
-  </p:clrMapOvr>
-</p:notes>
-</file>
-
-<file path=ppt/notesSlides/notesSlide26.xml><?xml version="1.0" encoding="utf-8"?>
-<p:notes xmlns:a="http://schemas.openxmlformats.org/drawingml/2006/main" xmlns:p="http://schemas.openxmlformats.org/presentationml/2006/main" xmlns:r="http://schemas.openxmlformats.org/officeDocument/2006/relationships">
-  <p:cSld>
-    <p:spTree>
-      <p:nvGrpSpPr>
-        <p:cNvPr id="1" name=""/>
-        <p:cNvGrpSpPr/>
-        <p:nvPr/>
-      </p:nvGrpSpPr>
-      <p:grpSpPr>
-        <a:xfrm>
-          <a:off x="0" y="0"/>
-          <a:ext cx="0" cy="0"/>
-          <a:chOff x="0" y="0"/>
-          <a:chExt cx="0" cy="0"/>
-        </a:xfrm>
-      </p:grpSpPr>
-      <p:sp>
-        <p:nvSpPr>
-          <p:cNvPr id="2" name="Slide Image Placeholder 1"/>
-          <p:cNvSpPr>
-            <a:spLocks noGrp="1"/>
-          </p:cNvSpPr>
-          <p:nvPr>
-            <p:ph type="sldImg"/>
-          </p:nvPr>
-        </p:nvSpPr>
-        <p:spPr/>
-      </p:sp>
-      <p:sp>
-        <p:nvSpPr>
-          <p:cNvPr id="3" name="Notes Placeholder 2"/>
-          <p:cNvSpPr>
-            <a:spLocks noGrp="1"/>
-          </p:cNvSpPr>
-          <p:nvPr>
-            <p:ph type="body"/>
-          </p:nvPr>
-        </p:nvSpPr>
-        <p:spPr/>
-        <p:txBody>
-          <a:bodyPr/>
-          <a:lstStyle/>
-          <a:p>
-            <a:r>
-              <a:t>This slide is about behaviour: demos and a database audit on one machine, not a benchmark. The quote check shows that every assertion can be traced, but it does not prove the model read the quote correctly. The next slide has the model numbers.</a:t>
-            </a:r>
-          </a:p>
-        </p:txBody>
-      </p:sp>
-      <p:sp>
-        <p:nvSpPr>
-          <p:cNvPr id="4" name="Slide Number Placeholder 3"/>
-          <p:cNvSpPr>
-            <a:spLocks noGrp="1"/>
-          </p:cNvSpPr>
-          <p:nvPr>
-            <p:ph type="sldNum" idx="4"/>
-          </p:nvPr>
-        </p:nvSpPr>
-        <p:spPr/>
-      </p:sp>
-    </p:spTree>
-  </p:cSld>
-  <p:clrMapOvr>
-    <a:masterClrMapping/>
-  </p:clrMapOvr>
-</p:notes>
-</file>
-
-<file path=ppt/notesSlides/notesSlide27.xml><?xml version="1.0" encoding="utf-8"?>
-<p:notes xmlns:a="http://schemas.openxmlformats.org/drawingml/2006/main" xmlns:p="http://schemas.openxmlformats.org/presentationml/2006/main" xmlns:r="http://schemas.openxmlformats.org/officeDocument/2006/relationships">
-  <p:cSld>
-    <p:spTree>
-      <p:nvGrpSpPr>
-        <p:cNvPr id="1" name=""/>
-        <p:cNvGrpSpPr/>
-        <p:nvPr/>
-      </p:nvGrpSpPr>
-      <p:grpSpPr>
-        <a:xfrm>
-          <a:off x="0" y="0"/>
-          <a:ext cx="0" cy="0"/>
-          <a:chOff x="0" y="0"/>
-          <a:chExt cx="0" cy="0"/>
-        </a:xfrm>
-      </p:grpSpPr>
-      <p:sp>
-        <p:nvSpPr>
-          <p:cNvPr id="2" name="Slide Image Placeholder 1"/>
-          <p:cNvSpPr>
-            <a:spLocks noGrp="1"/>
-          </p:cNvSpPr>
-          <p:nvPr>
-            <p:ph type="sldImg"/>
-          </p:nvPr>
-        </p:nvSpPr>
-        <p:spPr/>
-      </p:sp>
-      <p:sp>
-        <p:nvSpPr>
-          <p:cNvPr id="3" name="Notes Placeholder 2"/>
-          <p:cNvSpPr>
-            <a:spLocks noGrp="1"/>
-          </p:cNvSpPr>
-          <p:nvPr>
-            <p:ph type="body"/>
-          </p:nvPr>
-        </p:nvSpPr>
-        <p:spPr/>
-        <p:txBody>
-          <a:bodyPr/>
-          <a:lstStyle/>
-          <a:p>
-            <a:r>
-              <a:t>Fine-tuning clearly helped with combining assertions and answering. Extraction got worse, and we have not found out why yet. The format check only says the output is valid JSON with valid IDs; it says nothing about whether the content is right.</a:t>
-            </a:r>
-          </a:p>
-        </p:txBody>
-      </p:sp>
-      <p:sp>
-        <p:nvSpPr>
-          <p:cNvPr id="4" name="Slide Number Placeholder 3"/>
-          <p:cNvSpPr>
-            <a:spLocks noGrp="1"/>
-          </p:cNvSpPr>
-          <p:nvPr>
-            <p:ph type="sldNum" idx="4"/>
-          </p:nvPr>
-        </p:nvSpPr>
-        <p:spPr/>
-      </p:sp>
-    </p:spTree>
-  </p:cSld>
-  <p:clrMapOvr>
-    <a:masterClrMapping/>
-  </p:clrMapOvr>
-</p:notes>
-</file>
-
-<file path=ppt/notesSlides/notesSlide28.xml><?xml version="1.0" encoding="utf-8"?>
-<p:notes xmlns:a="http://schemas.openxmlformats.org/drawingml/2006/main" xmlns:p="http://schemas.openxmlformats.org/presentationml/2006/main" xmlns:r="http://schemas.openxmlformats.org/officeDocument/2006/relationships">
-  <p:cSld>
-    <p:spTree>
-      <p:nvGrpSpPr>
-        <p:cNvPr id="1" name=""/>
-        <p:cNvGrpSpPr/>
-        <p:nvPr/>
-      </p:nvGrpSpPr>
-      <p:grpSpPr>
-        <a:xfrm>
-          <a:off x="0" y="0"/>
-          <a:ext cx="0" cy="0"/>
-          <a:chOff x="0" y="0"/>
-          <a:chExt cx="0" cy="0"/>
-        </a:xfrm>
-      </p:grpSpPr>
-      <p:sp>
-        <p:nvSpPr>
-          <p:cNvPr id="2" name="Slide Image Placeholder 1"/>
-          <p:cNvSpPr>
-            <a:spLocks noGrp="1"/>
-          </p:cNvSpPr>
-          <p:nvPr>
-            <p:ph type="sldImg"/>
-          </p:nvPr>
-        </p:nvSpPr>
-        <p:spPr/>
-      </p:sp>
-      <p:sp>
-        <p:nvSpPr>
-          <p:cNvPr id="3" name="Notes Placeholder 2"/>
-          <p:cNvSpPr>
-            <a:spLocks noGrp="1"/>
-          </p:cNvSpPr>
-          <p:nvPr>
-            <p:ph type="body"/>
-          </p:nvPr>
-        </p:nvSpPr>
-        <p:spPr/>
-        <p:txBody>
-          <a:bodyPr/>
-          <a:lstStyle/>
-          <a:p>
-            <a:r>
-              <a:t>These are the weak points we know about. The 1.7B model looked fine on synthetic data and failed on natural conversation, which is why we widened the training data and moved to the 4B model. The full LongMemEval-S run is still pending, so we cannot yet claim the memory helps over long histories.</a:t>
-            </a:r>
-          </a:p>
-        </p:txBody>
-      </p:sp>
-      <p:sp>
-        <p:nvSpPr>
-          <p:cNvPr id="4" name="Slide Number Placeholder 3"/>
-          <p:cNvSpPr>
-            <a:spLocks noGrp="1"/>
-          </p:cNvSpPr>
-          <p:nvPr>
-            <p:ph type="sldNum" idx="4"/>
-          </p:nvPr>
-        </p:nvSpPr>
-        <p:spPr/>
-      </p:sp>
-    </p:spTree>
-  </p:cSld>
-  <p:clrMapOvr>
-    <a:masterClrMapping/>
-  </p:clrMapOvr>
-</p:notes>
-</file>
-
-<file path=ppt/notesSlides/notesSlide29.xml><?xml version="1.0" encoding="utf-8"?>
-<p:notes xmlns:a="http://schemas.openxmlformats.org/drawingml/2006/main" xmlns:p="http://schemas.openxmlformats.org/presentationml/2006/main" xmlns:r="http://schemas.openxmlformats.org/officeDocument/2006/relationships">
-  <p:cSld>
-    <p:spTree>
-      <p:nvGrpSpPr>
-        <p:cNvPr id="1" name=""/>
-        <p:cNvGrpSpPr/>
-        <p:nvPr/>
-      </p:nvGrpSpPr>
-      <p:grpSpPr>
-        <a:xfrm>
-          <a:off x="0" y="0"/>
-          <a:ext cx="0" cy="0"/>
-          <a:chOff x="0" y="0"/>
-          <a:chExt cx="0" cy="0"/>
-        </a:xfrm>
-      </p:grpSpPr>
-      <p:sp>
-        <p:nvSpPr>
-          <p:cNvPr id="2" name="Slide Image Placeholder 1"/>
-          <p:cNvSpPr>
-            <a:spLocks noGrp="1"/>
-          </p:cNvSpPr>
-          <p:nvPr>
-            <p:ph type="sldImg"/>
-          </p:nvPr>
-        </p:nvSpPr>
-        <p:spPr/>
-      </p:sp>
-      <p:sp>
-        <p:nvSpPr>
-          <p:cNvPr id="3" name="Notes Placeholder 2"/>
-          <p:cNvSpPr>
-            <a:spLocks noGrp="1"/>
-          </p:cNvSpPr>
-          <p:nvPr>
-            <p:ph type="body"/>
-          </p:nvPr>
-        </p:nvSpPr>
-        <p:spPr/>
-        <p:txBody>
-          <a:bodyPr/>
-          <a:lstStyle/>
-          <a:p>
-            <a:r>
-              <a:t>Implemented means the feature is in the code and has tests; it does not mean it has been measured to be good. The largest missing piece is the LongMemEval-S run, which needs a 277 MB dataset and a lot of model time.</a:t>
-            </a:r>
-          </a:p>
-        </p:txBody>
-      </p:sp>
-      <p:sp>
-        <p:nvSpPr>
-          <p:cNvPr id="4" name="Slide Number Placeholder 3"/>
-          <p:cNvSpPr>
-            <a:spLocks noGrp="1"/>
-          </p:cNvSpPr>
-          <p:nvPr>
-            <p:ph type="sldNum" idx="4"/>
-          </p:nvPr>
-        </p:nvSpPr>
-        <p:spPr/>
-      </p:sp>
-    </p:spTree>
-  </p:cSld>
-  <p:clrMapOvr>
-    <a:masterClrMapping/>
-  </p:clrMapOvr>
-</p:notes>
-</file>
-
-<file path=ppt/notesSlides/notesSlide3.xml><?xml version="1.0" encoding="utf-8"?>
-<p:notes xmlns:a="http://schemas.openxmlformats.org/drawingml/2006/main" xmlns:p="http://schemas.openxmlformats.org/presentationml/2006/main" xmlns:r="http://schemas.openxmlformats.org/officeDocument/2006/relationships">
-  <p:cSld>
-    <p:spTree>
-      <p:nvGrpSpPr>
-        <p:cNvPr id="1" name=""/>
-        <p:cNvGrpSpPr/>
-        <p:nvPr/>
-      </p:nvGrpSpPr>
-      <p:grpSpPr>
-        <a:xfrm>
-          <a:off x="0" y="0"/>
-          <a:ext cx="0" cy="0"/>
-          <a:chOff x="0" y="0"/>
-          <a:chExt cx="0" cy="0"/>
-        </a:xfrm>
-      </p:grpSpPr>
-      <p:sp>
-        <p:nvSpPr>
-          <p:cNvPr id="2" name="Slide Image Placeholder 1"/>
-          <p:cNvSpPr>
-            <a:spLocks noGrp="1"/>
-          </p:cNvSpPr>
-          <p:nvPr>
-            <p:ph type="sldImg"/>
-          </p:nvPr>
-        </p:nvSpPr>
-        <p:spPr/>
-      </p:sp>
-      <p:sp>
-        <p:nvSpPr>
-          <p:cNvPr id="3" name="Notes Placeholder 2"/>
-          <p:cNvSpPr>
-            <a:spLocks noGrp="1"/>
-          </p:cNvSpPr>
-          <p:nvPr>
-            <p:ph type="body"/>
-          </p:nvPr>
-        </p:nvSpPr>
-        <p:spPr/>
-        <p:txBody>
-          <a:bodyPr/>
-          <a:lstStyle/>
-          <a:p>
-            <a:r>
-              <a:t>We read five memory systems and the plain baseline. MemGPT is a preprint, and Letta grew out of it, so this row describes the paper. Zep's numbers are from the authors' single run; Zep calls its graph edges 'facts'. Mem0's authors work for Mem0 and tested only on LoCoMo, where the full history still scored higher; Mem0's advantage is speed (1.4 s against 17 s at the 95th percentile).</a:t>
-            </a:r>
-          </a:p>
-        </p:txBody>
-      </p:sp>
-      <p:sp>
-        <p:nvSpPr>
-          <p:cNvPr id="4" name="Slide Number Placeholder 3"/>
-          <p:cNvSpPr>
-            <a:spLocks noGrp="1"/>
-          </p:cNvSpPr>
-          <p:nvPr>
-            <p:ph type="sldNum" idx="4"/>
-          </p:nvPr>
-        </p:nvSpPr>
-        <p:spPr/>
-      </p:sp>
-    </p:spTree>
-  </p:cSld>
-  <p:clrMapOvr>
-    <a:masterClrMapping/>
-  </p:clrMapOvr>
-</p:notes>
-</file>
-
-<file path=ppt/notesSlides/notesSlide30.xml><?xml version="1.0" encoding="utf-8"?>
-<p:notes xmlns:a="http://schemas.openxmlformats.org/drawingml/2006/main" xmlns:p="http://schemas.openxmlformats.org/presentationml/2006/main" xmlns:r="http://schemas.openxmlformats.org/officeDocument/2006/relationships">
-  <p:cSld>
-    <p:spTree>
-      <p:nvGrpSpPr>
-        <p:cNvPr id="1" name=""/>
-        <p:cNvGrpSpPr/>
-        <p:nvPr/>
-      </p:nvGrpSpPr>
-      <p:grpSpPr>
-        <a:xfrm>
-          <a:off x="0" y="0"/>
-          <a:ext cx="0" cy="0"/>
-          <a:chOff x="0" y="0"/>
-          <a:chExt cx="0" cy="0"/>
-        </a:xfrm>
-      </p:grpSpPr>
-      <p:sp>
-        <p:nvSpPr>
-          <p:cNvPr id="2" name="Slide Image Placeholder 1"/>
-          <p:cNvSpPr>
-            <a:spLocks noGrp="1"/>
-          </p:cNvSpPr>
-          <p:nvPr>
-            <p:ph type="sldImg"/>
-          </p:nvPr>
-        </p:nvSpPr>
-        <p:spPr/>
-      </p:sp>
-      <p:sp>
-        <p:nvSpPr>
-          <p:cNvPr id="3" name="Notes Placeholder 2"/>
-          <p:cNvSpPr>
-            <a:spLocks noGrp="1"/>
-          </p:cNvSpPr>
-          <p:nvPr>
-            <p:ph type="body"/>
-          </p:nvPr>
-        </p:nvSpPr>
-        <p:spPr/>
-        <p:txBody>
-          <a:bodyPr/>
-          <a:lstStyle/>
-          <a:p>
-            <a:r>
-              <a:t>To sum up against the objectives: memory across sessions, versioned changes and traceable quotes work; the local model works but extraction needs fixing; and the benchmark that would let us compare fairly (G5) is the main thing left.</a:t>
-            </a:r>
-          </a:p>
-        </p:txBody>
-      </p:sp>
-      <p:sp>
-        <p:nvSpPr>
-          <p:cNvPr id="4" name="Slide Number Placeholder 3"/>
-          <p:cNvSpPr>
-            <a:spLocks noGrp="1"/>
-          </p:cNvSpPr>
-          <p:nvPr>
-            <p:ph type="sldNum" idx="4"/>
-          </p:nvPr>
-        </p:nvSpPr>
-        <p:spPr/>
-      </p:sp>
-    </p:spTree>
-  </p:cSld>
-  <p:clrMapOvr>
-    <a:masterClrMapping/>
-  </p:clrMapOvr>
-</p:notes>
-</file>
-
-<file path=ppt/notesSlides/notesSlide31.xml><?xml version="1.0" encoding="utf-8"?>
-<p:notes xmlns:a="http://schemas.openxmlformats.org/drawingml/2006/main" xmlns:p="http://schemas.openxmlformats.org/presentationml/2006/main" xmlns:r="http://schemas.openxmlformats.org/officeDocument/2006/relationships">
-  <p:cSld>
-    <p:spTree>
-      <p:nvGrpSpPr>
-        <p:cNvPr id="1" name=""/>
-        <p:cNvGrpSpPr/>
-        <p:nvPr/>
-      </p:nvGrpSpPr>
-      <p:grpSpPr>
-        <a:xfrm>
-          <a:off x="0" y="0"/>
-          <a:ext cx="0" cy="0"/>
-          <a:chOff x="0" y="0"/>
-          <a:chExt cx="0" cy="0"/>
-        </a:xfrm>
-      </p:grpSpPr>
-      <p:sp>
-        <p:nvSpPr>
-          <p:cNvPr id="2" name="Slide Image Placeholder 1"/>
-          <p:cNvSpPr>
-            <a:spLocks noGrp="1"/>
-          </p:cNvSpPr>
-          <p:nvPr>
-            <p:ph type="sldImg"/>
-          </p:nvPr>
-        </p:nvSpPr>
-        <p:spPr/>
-      </p:sp>
-      <p:sp>
-        <p:nvSpPr>
-          <p:cNvPr id="3" name="Notes Placeholder 2"/>
-          <p:cNvSpPr>
-            <a:spLocks noGrp="1"/>
-          </p:cNvSpPr>
-          <p:nvPr>
-            <p:ph type="body"/>
-          </p:nvPr>
-        </p:nvSpPr>
-        <p:spPr/>
-        <p:txBody>
-          <a:bodyPr/>
-          <a:lstStyle/>
-          <a:p>
-            <a:r>
-              <a:t>References follow IEEE style and are numbered in the order they are first cited in the slides.</a:t>
-            </a:r>
-          </a:p>
-        </p:txBody>
-      </p:sp>
-      <p:sp>
-        <p:nvSpPr>
-          <p:cNvPr id="4" name="Slide Number Placeholder 3"/>
-          <p:cNvSpPr>
-            <a:spLocks noGrp="1"/>
-          </p:cNvSpPr>
-          <p:nvPr>
-            <p:ph type="sldNum" idx="4"/>
-          </p:nvPr>
-        </p:nvSpPr>
-        <p:spPr/>
-      </p:sp>
-    </p:spTree>
-  </p:cSld>
-  <p:clrMapOvr>
-    <a:masterClrMapping/>
-  </p:clrMapOvr>
-</p:notes>
-</file>
-
-<file path=ppt/notesSlides/notesSlide4.xml><?xml version="1.0" encoding="utf-8"?>
-<p:notes xmlns:a="http://schemas.openxmlformats.org/drawingml/2006/main" xmlns:p="http://schemas.openxmlformats.org/presentationml/2006/main" xmlns:r="http://schemas.openxmlformats.org/officeDocument/2006/relationships">
-  <p:cSld>
-    <p:spTree>
-      <p:nvGrpSpPr>
-        <p:cNvPr id="1" name=""/>
-        <p:cNvGrpSpPr/>
-        <p:nvPr/>
-      </p:nvGrpSpPr>
-      <p:grpSpPr>
-        <a:xfrm>
-          <a:off x="0" y="0"/>
-          <a:ext cx="0" cy="0"/>
-          <a:chOff x="0" y="0"/>
-          <a:chExt cx="0" cy="0"/>
-        </a:xfrm>
-      </p:grpSpPr>
-      <p:sp>
-        <p:nvSpPr>
-          <p:cNvPr id="2" name="Slide Image Placeholder 1"/>
-          <p:cNvSpPr>
-            <a:spLocks noGrp="1"/>
-          </p:cNvSpPr>
-          <p:nvPr>
-            <p:ph type="sldImg"/>
-          </p:nvPr>
-        </p:nvSpPr>
-        <p:spPr/>
-      </p:sp>
-      <p:sp>
-        <p:nvSpPr>
-          <p:cNvPr id="3" name="Notes Placeholder 2"/>
-          <p:cNvSpPr>
-            <a:spLocks noGrp="1"/>
-          </p:cNvSpPr>
-          <p:nvPr>
-            <p:ph type="body"/>
-          </p:nvPr>
-        </p:nvSpPr>
-        <p:spPr/>
-        <p:txBody>
-          <a:bodyPr/>
-          <a:lstStyle/>
-          <a:p>
-            <a:r>
-              <a:t>We cite Supermemory for how it works and do not repeat its numbers. Hindsight shaped our recall step. The last row is the baseline every system here tries to beat. The scores cannot be ranked against each other because each paper uses its own models, judges and benchmarks. The next slide lists what these systems leave open.</a:t>
-            </a:r>
-          </a:p>
-        </p:txBody>
-      </p:sp>
-      <p:sp>
-        <p:nvSpPr>
-          <p:cNvPr id="4" name="Slide Number Placeholder 3"/>
-          <p:cNvSpPr>
-            <a:spLocks noGrp="1"/>
-          </p:cNvSpPr>
-          <p:nvPr>
-            <p:ph type="sldNum" idx="4"/>
-          </p:nvPr>
-        </p:nvSpPr>
-        <p:spPr/>
-      </p:sp>
-    </p:spTree>
-  </p:cSld>
-  <p:clrMapOvr>
-    <a:masterClrMapping/>
-  </p:clrMapOvr>
-</p:notes>
-</file>
-
-<file path=ppt/notesSlides/notesSlide5.xml><?xml version="1.0" encoding="utf-8"?>
-<p:notes xmlns:a="http://schemas.openxmlformats.org/drawingml/2006/main" xmlns:p="http://schemas.openxmlformats.org/presentationml/2006/main" xmlns:r="http://schemas.openxmlformats.org/officeDocument/2006/relationships">
-  <p:cSld>
-    <p:spTree>
-      <p:nvGrpSpPr>
-        <p:cNvPr id="1" name=""/>
-        <p:cNvGrpSpPr/>
-        <p:nvPr/>
-      </p:nvGrpSpPr>
-      <p:grpSpPr>
-        <a:xfrm>
-          <a:off x="0" y="0"/>
-          <a:ext cx="0" cy="0"/>
-          <a:chOff x="0" y="0"/>
-          <a:chExt cx="0" cy="0"/>
-        </a:xfrm>
-      </p:grpSpPr>
-      <p:sp>
-        <p:nvSpPr>
-          <p:cNvPr id="2" name="Slide Image Placeholder 1"/>
-          <p:cNvSpPr>
-            <a:spLocks noGrp="1"/>
-          </p:cNvSpPr>
-          <p:nvPr>
-            <p:ph type="sldImg"/>
-          </p:nvPr>
-        </p:nvSpPr>
-        <p:spPr/>
-      </p:sp>
-      <p:sp>
-        <p:nvSpPr>
-          <p:cNvPr id="3" name="Notes Placeholder 2"/>
-          <p:cNvSpPr>
-            <a:spLocks noGrp="1"/>
-          </p:cNvSpPr>
-          <p:nvPr>
-            <p:ph type="body"/>
-          </p:nvPr>
-        </p:nvSpPr>
-        <p:spPr/>
-        <p:txBody>
-          <a:bodyPr/>
-          <a:lstStyle/>
-          <a:p>
-            <a:r>
-              <a:t>These are gaps we found while reading, not problems we hit while building. G1 is the main one: in MemGPT and Mem0 the model itself decides whether to add, update or delete, so a bad call means a lost or corrupted memory and there is no rule anyone can inspect. Only Zep keeps old values. G4 is about cost and privacy: Zep and Mem0 run extraction on hosted OpenAI models. G5 is why we do not compare our numbers with theirs. Each objective on the next slide points back to one of these gaps.</a:t>
-            </a:r>
-          </a:p>
-        </p:txBody>
-      </p:sp>
-      <p:sp>
-        <p:nvSpPr>
-          <p:cNvPr id="4" name="Slide Number Placeholder 3"/>
-          <p:cNvSpPr>
-            <a:spLocks noGrp="1"/>
-          </p:cNvSpPr>
-          <p:nvPr>
-            <p:ph type="sldNum" idx="4"/>
-          </p:nvPr>
-        </p:nvSpPr>
-        <p:spPr/>
-      </p:sp>
-    </p:spTree>
-  </p:cSld>
-  <p:clrMapOvr>
-    <a:masterClrMapping/>
-  </p:clrMapOvr>
-</p:notes>
-</file>
-
-<file path=ppt/notesSlides/notesSlide6.xml><?xml version="1.0" encoding="utf-8"?>
-<p:notes xmlns:a="http://schemas.openxmlformats.org/drawingml/2006/main" xmlns:p="http://schemas.openxmlformats.org/presentationml/2006/main" xmlns:r="http://schemas.openxmlformats.org/officeDocument/2006/relationships">
-  <p:cSld>
-    <p:spTree>
-      <p:nvGrpSpPr>
-        <p:cNvPr id="1" name=""/>
-        <p:cNvGrpSpPr/>
-        <p:nvPr/>
-      </p:nvGrpSpPr>
-      <p:grpSpPr>
-        <a:xfrm>
-          <a:off x="0" y="0"/>
-          <a:ext cx="0" cy="0"/>
-          <a:chOff x="0" y="0"/>
-          <a:chExt cx="0" cy="0"/>
-        </a:xfrm>
-      </p:grpSpPr>
-      <p:sp>
-        <p:nvSpPr>
-          <p:cNvPr id="2" name="Slide Image Placeholder 1"/>
-          <p:cNvSpPr>
-            <a:spLocks noGrp="1"/>
-          </p:cNvSpPr>
-          <p:nvPr>
-            <p:ph type="sldImg"/>
-          </p:nvPr>
-        </p:nvSpPr>
-        <p:spPr/>
-      </p:sp>
-      <p:sp>
-        <p:nvSpPr>
-          <p:cNvPr id="3" name="Notes Placeholder 2"/>
-          <p:cNvSpPr>
-            <a:spLocks noGrp="1"/>
-          </p:cNvSpPr>
-          <p:nvPr>
-            <p:ph type="body"/>
-          </p:nvPr>
-        </p:nvSpPr>
-        <p:spPr/>
-        <p:txBody>
-          <a:bodyPr/>
-          <a:lstStyle/>
-          <a:p>
-            <a:r>
-              <a:t>The first and fifth objectives come straight from the problem statement; the others answer the gaps G1 to G5. From here on the deck shows how the system meets each of them, and the results slides say how far we got.</a:t>
-            </a:r>
-          </a:p>
-        </p:txBody>
-      </p:sp>
-      <p:sp>
-        <p:nvSpPr>
-          <p:cNvPr id="4" name="Slide Number Placeholder 3"/>
-          <p:cNvSpPr>
-            <a:spLocks noGrp="1"/>
-          </p:cNvSpPr>
-          <p:nvPr>
-            <p:ph type="sldNum" idx="4"/>
-          </p:nvPr>
-        </p:nvSpPr>
-        <p:spPr/>
-      </p:sp>
-    </p:spTree>
-  </p:cSld>
-  <p:clrMapOvr>
-    <a:masterClrMapping/>
-  </p:clrMapOvr>
-</p:notes>
-</file>
-
-<file path=ppt/notesSlides/notesSlide7.xml><?xml version="1.0" encoding="utf-8"?>
-<p:notes xmlns:a="http://schemas.openxmlformats.org/drawingml/2006/main" xmlns:p="http://schemas.openxmlformats.org/presentationml/2006/main" xmlns:r="http://schemas.openxmlformats.org/officeDocument/2006/relationships">
-  <p:cSld>
-    <p:spTree>
-      <p:nvGrpSpPr>
-        <p:cNvPr id="1" name=""/>
-        <p:cNvGrpSpPr/>
-        <p:nvPr/>
-      </p:nvGrpSpPr>
-      <p:grpSpPr>
-        <a:xfrm>
-          <a:off x="0" y="0"/>
-          <a:ext cx="0" cy="0"/>
-          <a:chOff x="0" y="0"/>
-          <a:chExt cx="0" cy="0"/>
-        </a:xfrm>
-      </p:grpSpPr>
-      <p:sp>
-        <p:nvSpPr>
-          <p:cNvPr id="2" name="Slide Image Placeholder 1"/>
-          <p:cNvSpPr>
-            <a:spLocks noGrp="1"/>
-          </p:cNvSpPr>
-          <p:nvPr>
-            <p:ph type="sldImg"/>
-          </p:nvPr>
-        </p:nvSpPr>
-        <p:spPr/>
-      </p:sp>
-      <p:sp>
-        <p:nvSpPr>
-          <p:cNvPr id="3" name="Notes Placeholder 2"/>
-          <p:cNvSpPr>
-            <a:spLocks noGrp="1"/>
-          </p:cNvSpPr>
-          <p:nvPr>
-            <p:ph type="body"/>
-          </p:nvPr>
-        </p:nvSpPr>
-        <p:spPr/>
-        <p:txBody>
-          <a:bodyPr/>
-          <a:lstStyle/>
-          <a:p>
-            <a:r>
-              <a:t>Our guide pointed out that our earlier names, 'evidence' and 'facts', were misleading. A fact is something established, but what we extract is a model's reading of a message and can be wrong. Evidence is a role something plays for a conclusion, not a thing we store. So the stored message is a source, and what we extract from it is an assertion, following how Wikidata and W3C PROV name claims and their sources. The example column is the Maya example used on the next slides.</a:t>
-            </a:r>
-          </a:p>
-        </p:txBody>
-      </p:sp>
-      <p:sp>
-        <p:nvSpPr>
-          <p:cNvPr id="4" name="Slide Number Placeholder 3"/>
-          <p:cNvSpPr>
-            <a:spLocks noGrp="1"/>
-          </p:cNvSpPr>
-          <p:nvPr>
-            <p:ph type="sldNum" idx="4"/>
-          </p:nvPr>
-        </p:nvSpPr>
-        <p:spPr/>
-      </p:sp>
-    </p:spTree>
-  </p:cSld>
-  <p:clrMapOvr>
-    <a:masterClrMapping/>
-  </p:clrMapOvr>
-</p:notes>
-</file>
-
-<file path=ppt/notesSlides/notesSlide8.xml><?xml version="1.0" encoding="utf-8"?>
-<p:notes xmlns:a="http://schemas.openxmlformats.org/drawingml/2006/main" xmlns:p="http://schemas.openxmlformats.org/presentationml/2006/main" xmlns:r="http://schemas.openxmlformats.org/officeDocument/2006/relationships">
-  <p:cSld>
-    <p:spTree>
-      <p:nvGrpSpPr>
-        <p:cNvPr id="1" name=""/>
-        <p:cNvGrpSpPr/>
-        <p:nvPr/>
-      </p:nvGrpSpPr>
-      <p:grpSpPr>
-        <a:xfrm>
-          <a:off x="0" y="0"/>
-          <a:ext cx="0" cy="0"/>
-          <a:chOff x="0" y="0"/>
-          <a:chExt cx="0" cy="0"/>
-        </a:xfrm>
-      </p:grpSpPr>
-      <p:sp>
-        <p:nvSpPr>
-          <p:cNvPr id="2" name="Slide Image Placeholder 1"/>
-          <p:cNvSpPr>
-            <a:spLocks noGrp="1"/>
-          </p:cNvSpPr>
-          <p:nvPr>
-            <p:ph type="sldImg"/>
-          </p:nvPr>
-        </p:nvSpPr>
-        <p:spPr/>
-      </p:sp>
-      <p:sp>
-        <p:nvSpPr>
-          <p:cNvPr id="3" name="Notes Placeholder 2"/>
-          <p:cNvSpPr>
-            <a:spLocks noGrp="1"/>
-          </p:cNvSpPr>
-          <p:nvPr>
-            <p:ph type="body"/>
-          </p:nvPr>
-        </p:nvSpPr>
-        <p:spPr/>
-        <p:txBody>
-          <a:bodyPr/>
-          <a:lstStyle/>
-          <a:p>
-            <a:r>
-              <a:t>Pi saves every message through Module 1 and asks Module 4 for memory before it answers. Module 2 turns saved messages into assertions, and Module 3 is the only part that writes them, keeping old versions. PostgreSQL holds everything; Neo4j holds a graph copy that can be rebuilt from it. Ollama runs the models on our machine, and Module 5 trains the extraction model offline. The next slide follows one example through these modules.</a:t>
-            </a:r>
-          </a:p>
-        </p:txBody>
-      </p:sp>
-      <p:sp>
-        <p:nvSpPr>
-          <p:cNvPr id="4" name="Slide Number Placeholder 3"/>
-          <p:cNvSpPr>
-            <a:spLocks noGrp="1"/>
-          </p:cNvSpPr>
-          <p:nvPr>
-            <p:ph type="sldNum" idx="4"/>
-          </p:nvPr>
-        </p:nvSpPr>
-        <p:spPr/>
-      </p:sp>
-    </p:spTree>
-  </p:cSld>
-  <p:clrMapOvr>
-    <a:masterClrMapping/>
-  </p:clrMapOvr>
-</p:notes>
-</file>
-
-<file path=ppt/notesSlides/notesSlide9.xml><?xml version="1.0" encoding="utf-8"?>
-<p:notes xmlns:a="http://schemas.openxmlformats.org/drawingml/2006/main" xmlns:p="http://schemas.openxmlformats.org/presentationml/2006/main" xmlns:r="http://schemas.openxmlformats.org/officeDocument/2006/relationships">
-  <p:cSld>
-    <p:spTree>
-      <p:nvGrpSpPr>
-        <p:cNvPr id="1" name=""/>
-        <p:cNvGrpSpPr/>
-        <p:nvPr/>
-      </p:nvGrpSpPr>
-      <p:grpSpPr>
-        <a:xfrm>
-          <a:off x="0" y="0"/>
-          <a:ext cx="0" cy="0"/>
-          <a:chOff x="0" y="0"/>
-          <a:chExt cx="0" cy="0"/>
-        </a:xfrm>
-      </p:grpSpPr>
-      <p:sp>
-        <p:nvSpPr>
-          <p:cNvPr id="2" name="Slide Image Placeholder 1"/>
-          <p:cNvSpPr>
-            <a:spLocks noGrp="1"/>
-          </p:cNvSpPr>
-          <p:nvPr>
-            <p:ph type="sldImg"/>
-          </p:nvPr>
-        </p:nvSpPr>
-        <p:spPr/>
-      </p:sp>
-      <p:sp>
-        <p:nvSpPr>
-          <p:cNvPr id="3" name="Notes Placeholder 2"/>
-          <p:cNvSpPr>
-            <a:spLocks noGrp="1"/>
-          </p:cNvSpPr>
-          <p:nvPr>
-            <p:ph type="body"/>
-          </p:nvPr>
-        </p:nvSpPr>
-        <p:spPr/>
-        <p:txBody>
-          <a:bodyPr/>
-          <a:lstStyle/>
-          <a:p>
-            <a:r>
-              <a:t>This is the example from the report. Maya mentions her city in one session, corrects it in a later one, and asks about it in a third. Each row is what one module does with it. The confidence threshold and the 'supersedes' link are explained on the Module 3 slide.</a:t>
-            </a:r>
-          </a:p>
-        </p:txBody>
-      </p:sp>
-      <p:sp>
-        <p:nvSpPr>
-          <p:cNvPr id="4" name="Slide Number Placeholder 3"/>
-          <p:cNvSpPr>
-            <a:spLocks noGrp="1"/>
-          </p:cNvSpPr>
-          <p:nvPr>
-            <p:ph type="sldNum" idx="4"/>
-          </p:nvPr>
-        </p:nvSpPr>
-        <p:spPr/>
-      </p:sp>
-    </p:spTree>
-  </p:cSld>
-  <p:clrMapOvr>
-    <a:masterClrMapping/>
-  </p:clrMapOvr>
-</p:notes>
 </file>
 
 <file path=ppt/slideLayouts/slideLayout1.xml><?xml version="1.0" encoding="utf-8"?>

--- a/P1_R2_13.pptx
+++ b/P1_R2_13.pptx
@@ -1996,7 +1996,7 @@
                 <a:ea typeface="Times New Roman"/>
                 <a:cs typeface="Times New Roman"/>
               </a:rPr>
-              <a:t>Department of Information Technology</a:t>
+              <a:t>Department of Information Science and Technology</a:t>
             </a:r>
             <a:endParaRPr lang="en-US" sz="1800" b="0" u="none" strike="noStrike">
               <a:solidFill>
@@ -2197,7 +2197,7 @@
                 <a:ea typeface="Times New Roman"/>
                 <a:cs typeface="Times New Roman"/>
               </a:rPr>
-              <a:t>DEPARTMENT OF INFORMATION TECHNOLOGY</a:t>
+              <a:t>DEPARTMENT OF INFORMATION SCIENCE AND TECHNOLOGY</a:t>
             </a:r>
             <a:endParaRPr lang="en-US" sz="1600" b="0" u="none" strike="noStrike">
               <a:solidFill>
@@ -9552,7 +9552,7 @@
                 <a:ea typeface="Times New Roman"/>
                 <a:cs typeface="Times New Roman"/>
               </a:rPr>
-              <a:t>The engine beats plain retrieval by 3.1 points (95% interval 1.2 to 4.8) and is 6.0 points below the whole conversation, using 30% of its tokens.</a:t>
+              <a:t>The engine beats plain retrieval by 3.1 points (95% interval 1.2 to 4.8) and is 5.9 points below the whole conversation, using 30% of its tokens.</a:t>
             </a:r>
           </a:p>
           <a:p>

--- a/P1_R2_13.pptx
+++ b/P1_R2_13.pptx
@@ -17929,8 +17929,8 @@
         </p:blipFill>
         <p:spPr>
           <a:xfrm>
-            <a:off x="594360" y="1143000"/>
-            <a:ext cx="2733621" cy="5120640"/>
+            <a:off x="1233766" y="1100000"/>
+            <a:ext cx="9724468" cy="3750000"/>
           </a:xfrm>
           <a:prstGeom prst="rect">
             <a:avLst/>
@@ -17945,8 +17945,8 @@
         </p:nvSpPr>
         <p:spPr>
           <a:xfrm>
-            <a:off x="3648021" y="1234440"/>
-            <a:ext cx="7946571" cy="4937760"/>
+            <a:off x="594360" y="4930000"/>
+            <a:ext cx="11003280" cy="1350000"/>
           </a:xfrm>
           <a:prstGeom prst="rect">
             <a:avLst/>
@@ -17955,19 +17955,19 @@
         </p:spPr>
         <p:txBody>
           <a:bodyPr wrap="square" lIns="45720" rIns="45720" tIns="27432" bIns="27432">
-            <a:spAutoFit/>
+            <a:noAutofit/>
           </a:bodyPr>
           <a:lstStyle/>
           <a:p>
             <a:pPr marL="256032" indent="-256032">
               <a:spcAft>
-                <a:spcPts val="1200"/>
+                <a:spcPts val="600"/>
               </a:spcAft>
               <a:buFont typeface="Arial"/>
               <a:buChar char="•"/>
             </a:pPr>
             <a:r>
-              <a:rPr sz="1800" b="0" i="0">
+              <a:rPr sz="1400" b="0" i="0">
                 <a:solidFill>
                   <a:srgbClr val="000000"/>
                 </a:solidFill>
@@ -17981,13 +17981,13 @@
           <a:p>
             <a:pPr marL="256032" indent="-256032">
               <a:spcAft>
-                <a:spcPts val="1200"/>
+                <a:spcPts val="600"/>
               </a:spcAft>
               <a:buFont typeface="Arial"/>
               <a:buChar char="•"/>
             </a:pPr>
             <a:r>
-              <a:rPr sz="1800" b="0" i="0">
+              <a:rPr sz="1400" b="0" i="0">
                 <a:solidFill>
                   <a:srgbClr val="000000"/>
                 </a:solidFill>
@@ -18001,13 +18001,13 @@
           <a:p>
             <a:pPr marL="256032" indent="-256032">
               <a:spcAft>
-                <a:spcPts val="1200"/>
+                <a:spcPts val="600"/>
               </a:spcAft>
               <a:buFont typeface="Arial"/>
               <a:buChar char="•"/>
             </a:pPr>
             <a:r>
-              <a:rPr sz="1800" b="0" i="0">
+              <a:rPr sz="1400" b="0" i="0">
                 <a:solidFill>
                   <a:srgbClr val="000000"/>
                 </a:solidFill>
@@ -18021,13 +18021,13 @@
           <a:p>
             <a:pPr marL="256032" indent="-256032">
               <a:spcAft>
-                <a:spcPts val="1200"/>
+                <a:spcPts val="600"/>
               </a:spcAft>
               <a:buFont typeface="Arial"/>
               <a:buChar char="•"/>
             </a:pPr>
             <a:r>
-              <a:rPr sz="1800" b="0" i="0">
+              <a:rPr sz="1400" b="0" i="0">
                 <a:solidFill>
                   <a:srgbClr val="000000"/>
                 </a:solidFill>
@@ -18041,12 +18041,12 @@
           <a:p>
             <a:pPr marL="0" indent="0">
               <a:spcAft>
-                <a:spcPts val="1200"/>
+                <a:spcPts val="600"/>
               </a:spcAft>
               <a:buNone/>
             </a:pPr>
             <a:r>
-              <a:rPr sz="1800" b="1" i="0">
+              <a:rPr sz="1400" b="1" i="0">
                 <a:solidFill>
                   <a:srgbClr val="000000"/>
                 </a:solidFill>
@@ -18057,7 +18057,7 @@
               <a:t>Maya: </a:t>
             </a:r>
             <a:r>
-              <a:rPr sz="1800" b="0" i="0">
+              <a:rPr sz="1400" b="0" i="0">
                 <a:solidFill>
                   <a:srgbClr val="000000"/>
                 </a:solidFill>
@@ -18531,8 +18531,8 @@
         </p:blipFill>
         <p:spPr>
           <a:xfrm>
-            <a:off x="594360" y="1143000"/>
-            <a:ext cx="3457351" cy="5120640"/>
+            <a:off x="724169" y="1100000"/>
+            <a:ext cx="10743661" cy="3800000"/>
           </a:xfrm>
           <a:prstGeom prst="rect">
             <a:avLst/>
@@ -18547,8 +18547,8 @@
         </p:nvSpPr>
         <p:spPr>
           <a:xfrm>
-            <a:off x="4371751" y="1234440"/>
-            <a:ext cx="7222841" cy="4937760"/>
+            <a:off x="594360" y="4980000"/>
+            <a:ext cx="11003280" cy="1300000"/>
           </a:xfrm>
           <a:prstGeom prst="rect">
             <a:avLst/>
@@ -18557,19 +18557,19 @@
         </p:spPr>
         <p:txBody>
           <a:bodyPr wrap="square" lIns="45720" rIns="45720" tIns="27432" bIns="27432">
-            <a:spAutoFit/>
+            <a:noAutofit/>
           </a:bodyPr>
           <a:lstStyle/>
           <a:p>
             <a:pPr marL="256032" indent="-256032">
               <a:spcAft>
-                <a:spcPts val="1200"/>
+                <a:spcPts val="600"/>
               </a:spcAft>
               <a:buFont typeface="Arial"/>
               <a:buChar char="•"/>
             </a:pPr>
             <a:r>
-              <a:rPr sz="1800" b="0" i="0">
+              <a:rPr sz="1400" b="0" i="0">
                 <a:solidFill>
                   <a:srgbClr val="000000"/>
                 </a:solidFill>
@@ -18583,13 +18583,13 @@
           <a:p>
             <a:pPr marL="256032" indent="-256032">
               <a:spcAft>
-                <a:spcPts val="1200"/>
+                <a:spcPts val="600"/>
               </a:spcAft>
               <a:buFont typeface="Arial"/>
               <a:buChar char="•"/>
             </a:pPr>
             <a:r>
-              <a:rPr sz="1800" b="0" i="0">
+              <a:rPr sz="1400" b="0" i="0">
                 <a:solidFill>
                   <a:srgbClr val="000000"/>
                 </a:solidFill>
@@ -18603,13 +18603,13 @@
           <a:p>
             <a:pPr marL="256032" indent="-256032">
               <a:spcAft>
-                <a:spcPts val="1200"/>
+                <a:spcPts val="600"/>
               </a:spcAft>
               <a:buFont typeface="Arial"/>
               <a:buChar char="•"/>
             </a:pPr>
             <a:r>
-              <a:rPr sz="1800" b="0" i="0">
+              <a:rPr sz="1400" b="0" i="0">
                 <a:solidFill>
                   <a:srgbClr val="000000"/>
                 </a:solidFill>
@@ -18623,13 +18623,13 @@
           <a:p>
             <a:pPr marL="256032" indent="-256032">
               <a:spcAft>
-                <a:spcPts val="1200"/>
+                <a:spcPts val="600"/>
               </a:spcAft>
               <a:buFont typeface="Arial"/>
               <a:buChar char="•"/>
             </a:pPr>
             <a:r>
-              <a:rPr sz="1800" b="0" i="0">
+              <a:rPr sz="1400" b="0" i="0">
                 <a:solidFill>
                   <a:srgbClr val="000000"/>
                 </a:solidFill>
@@ -18643,12 +18643,12 @@
           <a:p>
             <a:pPr marL="0" indent="0">
               <a:spcAft>
-                <a:spcPts val="1200"/>
+                <a:spcPts val="600"/>
               </a:spcAft>
               <a:buNone/>
             </a:pPr>
             <a:r>
-              <a:rPr sz="1800" b="1" i="0">
+              <a:rPr sz="1400" b="1" i="0">
                 <a:solidFill>
                   <a:srgbClr val="000000"/>
                 </a:solidFill>
@@ -18659,7 +18659,7 @@
               <a:t>Maya: </a:t>
             </a:r>
             <a:r>
-              <a:rPr sz="1800" b="0" i="0">
+              <a:rPr sz="1400" b="0" i="0">
                 <a:solidFill>
                   <a:srgbClr val="000000"/>
                 </a:solidFill>
